--- a/deliverables/決賽簡報_AI資安框架.pptx
+++ b/deliverables/決賽簡報_AI資安框架.pptx
@@ -413,7 +413,7 @@
             <a:pPr/>
             <a:r>
               <a:rPr lang="zh-TW" dirty="0"/>
-              <a:t>架構分為四個階段。流量表徵保留內容、時間差與方向，前段模型輸出固定十七類、校準信心與流量表徵；後段以五百二十九維任務向量取得前五筆訓練案例，由本機AI給出支持、複核或不確定。策略閘門檢查範圍與期限，完成套用、讀回和到期撤銷。所有產物透過同一事件識別碼連結，AI不改寫正式分類。</a:t>
+              <a:t>架構分為上下兩層的四個區域。流量表徵保留內容、時間差與方向，同一輸入平行送入兩個偵測模型，再融合為固定十七類、校準信心與流量表徵；後段以五百二十九維任務向量取得前五筆訓練案例，由本機AI給出支持、複核或不確定。策略閘門檢查範圍與期限，完成套用、讀回和到期撤銷。所有產物透過同一事件識別碼連結，AI不改寫正式分類。</a:t>
             </a:r>
           </a:p>
         </p:txBody>
@@ -473,7 +473,7 @@
             <a:pPr/>
             <a:r>
               <a:rPr lang="zh-TW" dirty="0"/>
-              <a:t>前段以兩種互補特徵共同判斷。CTBM閱讀封包內容、時間差與方向；PBCNN補充短視窗位元組模式。校準後由OOF Gate依事件證據融合，輸出固定十七類，並保留信心與表徵交給後段。</a:t>
+              <a:t>前段以兩種互補特徵平行判斷，並非先後串行。CTBM閱讀封包內容、時間差與方向；PBCNN補充短視窗位元組模式。校準後由OOF Gate依事件證據融合，輸出固定十七類，並保留信心與表徵交給後段。</a:t>
             </a:r>
           </a:p>
         </p:txBody>
@@ -773,7 +773,7 @@
             <a:pPr/>
             <a:r>
               <a:rPr lang="zh-TW" dirty="0"/>
-              <a:t>我們以十七類真實前處理張量重跑整合鏈，並以六種隔離情境確認處置回條與回復行為。作品把偵測、證據與處置放在同一個框架，讓判斷有依據、稽核有證據、處置可回復。方法動畫獨立交付，可搭配本機執行紀錄展示。</a:t>
+              <a:t>我們以十七類真實前處理張量重跑整合鏈，並以六種隔離情境確認處置回條與回復行為。作品把偵測、證據與處置放在同一個框架，讓判斷有依據、稽核有證據、處置可回復。前面播放的三十秒動畫以兩倍速說明流程，並可搭配本機執行紀錄展示。</a:t>
             </a:r>
           </a:p>
         </p:txBody>
@@ -1713,12 +1713,12 @@
         </p:nvSpPr>
         <p:spPr>
           <a:xfrm>
-            <a:off x="190500" y="1663446"/>
-            <a:ext cx="2809875" cy="3655314"/>
+            <a:off x="152400" y="1504950"/>
+            <a:ext cx="2152650" cy="1952625"/>
           </a:xfrm>
           <a:prstGeom prst="roundRect">
             <a:avLst>
-              <a:gd name="adj" fmla="val 2712"/>
+              <a:gd name="adj" fmla="val 3902"/>
             </a:avLst>
           </a:prstGeom>
           <a:solidFill>
@@ -1739,26 +1739,26 @@
         </p:nvSpPr>
         <p:spPr>
           <a:xfrm>
-            <a:off x="353568" y="1742567"/>
-            <a:ext cx="145040" cy="322707"/>
-          </a:xfrm>
-          <a:prstGeom prst="rect">
-            <a:avLst/>
-          </a:prstGeom>
-          <a:noFill/>
-          <a:ln>
-            <a:noFill/>
-          </a:ln>
-        </p:spPr>
-        <p:txBody>
-          <a:bodyPr wrap="none" lIns="0" tIns="0" rIns="0" bIns="0" anchor="t" anchorCtr="0">
-            <a:spAutoFit/>
-          </a:bodyPr>
-          <a:lstStyle/>
-          <a:p>
-            <a:pPr algn="l"/>
-            <a:r>
-              <a:rPr lang="en-US" sz="1650" b="1" dirty="0">
+            <a:off x="314706" y="1593850"/>
+            <a:ext cx="1203819" cy="352044"/>
+          </a:xfrm>
+          <a:prstGeom prst="rect">
+            <a:avLst/>
+          </a:prstGeom>
+          <a:noFill/>
+          <a:ln>
+            <a:noFill/>
+          </a:ln>
+        </p:spPr>
+        <p:txBody>
+          <a:bodyPr wrap="none" lIns="0" tIns="0" rIns="0" bIns="0" anchor="t" anchorCtr="0">
+            <a:spAutoFit/>
+          </a:bodyPr>
+          <a:lstStyle/>
+          <a:p>
+            <a:pPr algn="l"/>
+            <a:r>
+              <a:rPr lang="zh-TW" sz="1800" b="1" dirty="0">
                 <a:solidFill>
                   <a:schemeClr val="accent1"/>
                 </a:solidFill>
@@ -1766,54 +1766,14 @@
                 <a:ea typeface="Microsoft JhengHei"/>
                 <a:cs typeface="Microsoft JhengHei"/>
               </a:rPr>
-              <a:t>a</a:t>
-            </a:r>
-          </a:p>
-        </p:txBody>
-      </p:sp>
-      <p:sp>
-        <p:nvSpPr>
-          <p:cNvPr id="6" name="TextBox 6"/>
-          <p:cNvSpPr txBox="1"/>
-          <p:nvPr/>
-        </p:nvSpPr>
-        <p:spPr>
-          <a:xfrm>
-            <a:off x="638937" y="1729867"/>
-            <a:ext cx="943712" cy="337376"/>
-          </a:xfrm>
-          <a:prstGeom prst="rect">
-            <a:avLst/>
-          </a:prstGeom>
-          <a:noFill/>
-          <a:ln>
-            <a:noFill/>
-          </a:ln>
-        </p:spPr>
-        <p:txBody>
-          <a:bodyPr wrap="none" lIns="0" tIns="0" rIns="0" bIns="0" anchor="t" anchorCtr="0">
-            <a:spAutoFit/>
-          </a:bodyPr>
-          <a:lstStyle/>
-          <a:p>
-            <a:pPr algn="l"/>
-            <a:r>
-              <a:rPr lang="zh-TW" sz="1720" b="1" dirty="0">
-                <a:solidFill>
-                  <a:schemeClr val="dk1"/>
-                </a:solidFill>
-                <a:latin typeface="Microsoft JhengHei"/>
-                <a:ea typeface="Microsoft JhengHei"/>
-                <a:cs typeface="Microsoft JhengHei"/>
-              </a:rPr>
-              <a:t>流量表徵</a:t>
+              <a:t>a 流量表徵</a:t>
             </a:r>
           </a:p>
         </p:txBody>
       </p:sp>
       <p:pic>
         <p:nvPicPr>
-          <p:cNvPr id="7" name="Image 7"/>
+          <p:cNvPr id="6" name="Image 6"/>
           <p:cNvPicPr>
             <a:picLocks noChangeAspect="1"/>
           </p:cNvPicPr>
@@ -1827,8 +1787,8 @@
         </p:blipFill>
         <p:spPr>
           <a:xfrm>
-            <a:off x="1135380" y="2064639"/>
-            <a:ext cx="891540" cy="891540"/>
+            <a:off x="1809750" y="1543050"/>
+            <a:ext cx="323850" cy="323850"/>
           </a:xfrm>
           <a:prstGeom prst="rect">
             <a:avLst/>
@@ -1837,14 +1797,94 @@
       </p:pic>
       <p:sp>
         <p:nvSpPr>
+          <p:cNvPr id="7" name="TextBox 7"/>
+          <p:cNvSpPr txBox="1"/>
+          <p:nvPr/>
+        </p:nvSpPr>
+        <p:spPr>
+          <a:xfrm>
+            <a:off x="315849" y="2085975"/>
+            <a:ext cx="1504899" cy="308991"/>
+          </a:xfrm>
+          <a:prstGeom prst="rect">
+            <a:avLst/>
+          </a:prstGeom>
+          <a:noFill/>
+          <a:ln>
+            <a:noFill/>
+          </a:ln>
+        </p:spPr>
+        <p:txBody>
+          <a:bodyPr wrap="none" lIns="0" tIns="0" rIns="0" bIns="0" anchor="t" anchorCtr="0">
+            <a:spAutoFit/>
+          </a:bodyPr>
+          <a:lstStyle/>
+          <a:p>
+            <a:pPr algn="l"/>
+            <a:r>
+              <a:rPr lang="zh-TW" sz="1580" dirty="0">
+                <a:solidFill>
+                  <a:schemeClr val="dk1"/>
+                </a:solidFill>
+                <a:latin typeface="Microsoft JhengHei"/>
+                <a:ea typeface="Microsoft JhengHei"/>
+                <a:cs typeface="Microsoft JhengHei"/>
+              </a:rPr>
+              <a:t>真實前處理張量</a:t>
+            </a:r>
+          </a:p>
+        </p:txBody>
+      </p:sp>
+      <p:sp>
+        <p:nvSpPr>
           <p:cNvPr id="8" name="TextBox 8"/>
           <p:cNvSpPr txBox="1"/>
           <p:nvPr/>
         </p:nvSpPr>
         <p:spPr>
           <a:xfrm>
-            <a:off x="334518" y="3094736"/>
-            <a:ext cx="2460117" cy="322707"/>
+            <a:off x="315468" y="2501900"/>
+            <a:ext cx="905256" cy="322707"/>
+          </a:xfrm>
+          <a:prstGeom prst="rect">
+            <a:avLst/>
+          </a:prstGeom>
+          <a:noFill/>
+          <a:ln>
+            <a:noFill/>
+          </a:ln>
+        </p:spPr>
+        <p:txBody>
+          <a:bodyPr wrap="none" lIns="0" tIns="0" rIns="0" bIns="0" anchor="t" anchorCtr="0">
+            <a:spAutoFit/>
+          </a:bodyPr>
+          <a:lstStyle/>
+          <a:p>
+            <a:pPr algn="l"/>
+            <a:r>
+              <a:rPr lang="zh-TW" sz="1650" dirty="0">
+                <a:solidFill>
+                  <a:schemeClr val="dk1"/>
+                </a:solidFill>
+                <a:latin typeface="Microsoft JhengHei"/>
+                <a:ea typeface="Microsoft JhengHei"/>
+                <a:cs typeface="Microsoft JhengHei"/>
+              </a:rPr>
+              <a:t>封包內容</a:t>
+            </a:r>
+          </a:p>
+        </p:txBody>
+      </p:sp>
+      <p:sp>
+        <p:nvSpPr>
+          <p:cNvPr id="9" name="TextBox 9"/>
+          <p:cNvSpPr txBox="1"/>
+          <p:nvPr/>
+        </p:nvSpPr>
+        <p:spPr>
+          <a:xfrm>
+            <a:off x="315468" y="2806700"/>
+            <a:ext cx="1349502" cy="322707"/>
           </a:xfrm>
           <a:prstGeom prst="rect">
             <a:avLst/>
@@ -1870,214 +1910,65 @@
                 <a:ea typeface="Microsoft JhengHei"/>
                 <a:cs typeface="Microsoft JhengHei"/>
               </a:rPr>
-              <a:t>封包內容・時間差・方向</a:t>
-            </a:r>
-          </a:p>
-        </p:txBody>
-      </p:sp>
-      <p:sp>
-        <p:nvSpPr>
-          <p:cNvPr id="9" name="TextBox 9"/>
-          <p:cNvSpPr txBox="1"/>
-          <p:nvPr/>
-        </p:nvSpPr>
-        <p:spPr>
-          <a:xfrm>
-            <a:off x="334518" y="3391916"/>
-            <a:ext cx="2460117" cy="322707"/>
-          </a:xfrm>
-          <a:prstGeom prst="rect">
-            <a:avLst/>
-          </a:prstGeom>
-          <a:noFill/>
-          <a:ln>
-            <a:noFill/>
-          </a:ln>
-        </p:spPr>
-        <p:txBody>
-          <a:bodyPr wrap="none" lIns="0" tIns="0" rIns="0" bIns="0" anchor="t" anchorCtr="0">
-            <a:spAutoFit/>
-          </a:bodyPr>
-          <a:lstStyle/>
-          <a:p>
-            <a:pPr algn="l"/>
-            <a:r>
-              <a:rPr lang="ja-JP" sz="1650" dirty="0">
-                <a:solidFill>
-                  <a:schemeClr val="dk1"/>
-                </a:solidFill>
-                <a:latin typeface="Microsoft JhengHei"/>
-                <a:ea typeface="Microsoft JhengHei"/>
-                <a:cs typeface="Microsoft JhengHei"/>
-              </a:rPr>
-              <a:t>遮罩識別欄位・流量切窗</a:t>
-            </a:r>
-          </a:p>
-        </p:txBody>
-      </p:sp>
-      <p:sp>
-        <p:nvSpPr>
-          <p:cNvPr id="10" name="Rectangle 10"/>
+              <a:t>時間差・方向</a:t>
+            </a:r>
+          </a:p>
+        </p:txBody>
+      </p:sp>
+      <p:sp>
+        <p:nvSpPr>
+          <p:cNvPr id="10" name="TextBox 10"/>
+          <p:cNvSpPr txBox="1"/>
+          <p:nvPr/>
+        </p:nvSpPr>
+        <p:spPr>
+          <a:xfrm>
+            <a:off x="316230" y="3105150"/>
+            <a:ext cx="1832610" cy="293370"/>
+          </a:xfrm>
+          <a:prstGeom prst="rect">
+            <a:avLst/>
+          </a:prstGeom>
+          <a:noFill/>
+          <a:ln>
+            <a:noFill/>
+          </a:ln>
+        </p:spPr>
+        <p:txBody>
+          <a:bodyPr wrap="none" lIns="0" tIns="0" rIns="0" bIns="0" anchor="t" anchorCtr="0">
+            <a:spAutoFit/>
+          </a:bodyPr>
+          <a:lstStyle/>
+          <a:p>
+            <a:pPr algn="l"/>
+            <a:r>
+              <a:rPr lang="ja-JP" sz="1500" dirty="0">
+                <a:solidFill>
+                  <a:schemeClr val="accent5"/>
+                </a:solidFill>
+                <a:latin typeface="Microsoft JhengHei"/>
+                <a:ea typeface="Microsoft JhengHei"/>
+                <a:cs typeface="Microsoft JhengHei"/>
+              </a:rPr>
+              <a:t>遮罩欄位・流量切窗</a:t>
+            </a:r>
+          </a:p>
+        </p:txBody>
+      </p:sp>
+      <p:sp>
+        <p:nvSpPr>
+          <p:cNvPr id="11" name="Rectangle 11"/>
           <p:cNvSpPr/>
           <p:nvPr/>
         </p:nvSpPr>
         <p:spPr>
           <a:xfrm>
-            <a:off x="323850" y="3862578"/>
-            <a:ext cx="2543175" cy="1188720"/>
+            <a:off x="2533650" y="1504950"/>
+            <a:ext cx="9505950" cy="1952625"/>
           </a:xfrm>
           <a:prstGeom prst="roundRect">
             <a:avLst>
-              <a:gd name="adj" fmla="val 6410"/>
-            </a:avLst>
-          </a:prstGeom>
-          <a:solidFill>
-            <a:schemeClr val="lt1"/>
-          </a:solidFill>
-          <a:ln>
-            <a:noFill/>
-          </a:ln>
-        </p:spPr>
-      </p:sp>
-      <p:sp>
-        <p:nvSpPr>
-          <p:cNvPr id="11" name="TextBox 11"/>
-          <p:cNvSpPr txBox="1"/>
-          <p:nvPr/>
-        </p:nvSpPr>
-        <p:spPr>
-          <a:xfrm>
-            <a:off x="421005" y="3998976"/>
-            <a:ext cx="2034540" cy="293370"/>
-          </a:xfrm>
-          <a:prstGeom prst="rect">
-            <a:avLst/>
-          </a:prstGeom>
-          <a:noFill/>
-          <a:ln>
-            <a:noFill/>
-          </a:ln>
-        </p:spPr>
-        <p:txBody>
-          <a:bodyPr wrap="none" lIns="0" tIns="0" rIns="0" bIns="0" anchor="t" anchorCtr="0">
-            <a:spAutoFit/>
-          </a:bodyPr>
-          <a:lstStyle/>
-          <a:p>
-            <a:pPr algn="l"/>
-            <a:r>
-              <a:rPr lang="zh-TW" sz="1500" dirty="0">
-                <a:solidFill>
-                  <a:schemeClr val="dk1"/>
-                </a:solidFill>
-                <a:latin typeface="Microsoft JhengHei"/>
-                <a:ea typeface="Microsoft JhengHei"/>
-                <a:cs typeface="Microsoft JhengHei"/>
-              </a:rPr>
-              <a:t>輸入：真實前處理張量</a:t>
-            </a:r>
-          </a:p>
-        </p:txBody>
-      </p:sp>
-      <p:sp>
-        <p:nvSpPr>
-          <p:cNvPr id="12" name="TextBox 12"/>
-          <p:cNvSpPr txBox="1"/>
-          <p:nvPr/>
-        </p:nvSpPr>
-        <p:spPr>
-          <a:xfrm>
-            <a:off x="421005" y="4355592"/>
-            <a:ext cx="1832610" cy="293370"/>
-          </a:xfrm>
-          <a:prstGeom prst="rect">
-            <a:avLst/>
-          </a:prstGeom>
-          <a:noFill/>
-          <a:ln>
-            <a:noFill/>
-          </a:ln>
-        </p:spPr>
-        <p:txBody>
-          <a:bodyPr wrap="none" lIns="0" tIns="0" rIns="0" bIns="0" anchor="t" anchorCtr="0">
-            <a:spAutoFit/>
-          </a:bodyPr>
-          <a:lstStyle/>
-          <a:p>
-            <a:pPr algn="l"/>
-            <a:r>
-              <a:rPr lang="zh-TW" sz="1500" dirty="0">
-                <a:solidFill>
-                  <a:schemeClr val="dk1"/>
-                </a:solidFill>
-                <a:latin typeface="Microsoft JhengHei"/>
-                <a:ea typeface="Microsoft JhengHei"/>
-                <a:cs typeface="Microsoft JhengHei"/>
-              </a:rPr>
-              <a:t>輸出：統一事件表徵</a:t>
-            </a:r>
-          </a:p>
-        </p:txBody>
-      </p:sp>
-      <p:sp>
-        <p:nvSpPr>
-          <p:cNvPr id="13" name="Freeform 13"/>
-          <p:cNvSpPr/>
-          <p:nvPr/>
-        </p:nvSpPr>
-        <p:spPr>
-          <a:xfrm>
-            <a:off x="3019425" y="3671697"/>
-            <a:ext cx="133350" cy="114300"/>
-          </a:xfrm>
-          <a:custGeom>
-            <a:avLst/>
-            <a:gdLst/>
-            <a:ahLst/>
-            <a:cxnLst/>
-            <a:rect l="l" t="t" r="r" b="b"/>
-            <a:pathLst>
-              <a:path w="133350" h="114300">
-                <a:moveTo>
-                  <a:pt x="0" y="57150"/>
-                </a:moveTo>
-                <a:lnTo>
-                  <a:pt x="133350" y="57150"/>
-                </a:lnTo>
-                <a:moveTo>
-                  <a:pt x="76200" y="0"/>
-                </a:moveTo>
-                <a:lnTo>
-                  <a:pt x="133350" y="57150"/>
-                </a:lnTo>
-                <a:lnTo>
-                  <a:pt x="76200" y="114300"/>
-                </a:lnTo>
-              </a:path>
-            </a:pathLst>
-          </a:custGeom>
-          <a:noFill/>
-          <a:ln w="28575">
-            <a:solidFill>
-              <a:schemeClr val="accent1"/>
-            </a:solidFill>
-          </a:ln>
-        </p:spPr>
-      </p:sp>
-      <p:sp>
-        <p:nvSpPr>
-          <p:cNvPr id="14" name="Rectangle 14"/>
-          <p:cNvSpPr/>
-          <p:nvPr/>
-        </p:nvSpPr>
-        <p:spPr>
-          <a:xfrm>
-            <a:off x="3190875" y="1663446"/>
-            <a:ext cx="2809875" cy="3655314"/>
-          </a:xfrm>
-          <a:prstGeom prst="roundRect">
-            <a:avLst>
-              <a:gd name="adj" fmla="val 2712"/>
+              <a:gd name="adj" fmla="val 3902"/>
             </a:avLst>
           </a:prstGeom>
           <a:solidFill>
@@ -2090,89 +1981,9 @@
           </a:ln>
         </p:spPr>
       </p:sp>
-      <p:sp>
-        <p:nvSpPr>
-          <p:cNvPr id="15" name="TextBox 15"/>
-          <p:cNvSpPr txBox="1"/>
-          <p:nvPr/>
-        </p:nvSpPr>
-        <p:spPr>
-          <a:xfrm>
-            <a:off x="3353943" y="1742567"/>
-            <a:ext cx="145040" cy="322707"/>
-          </a:xfrm>
-          <a:prstGeom prst="rect">
-            <a:avLst/>
-          </a:prstGeom>
-          <a:noFill/>
-          <a:ln>
-            <a:noFill/>
-          </a:ln>
-        </p:spPr>
-        <p:txBody>
-          <a:bodyPr wrap="none" lIns="0" tIns="0" rIns="0" bIns="0" anchor="t" anchorCtr="0">
-            <a:spAutoFit/>
-          </a:bodyPr>
-          <a:lstStyle/>
-          <a:p>
-            <a:pPr algn="l"/>
-            <a:r>
-              <a:rPr lang="en-US" sz="1650" b="1" dirty="0">
-                <a:solidFill>
-                  <a:schemeClr val="accent1"/>
-                </a:solidFill>
-                <a:latin typeface="Microsoft JhengHei"/>
-                <a:ea typeface="Microsoft JhengHei"/>
-                <a:cs typeface="Microsoft JhengHei"/>
-              </a:rPr>
-              <a:t>b</a:t>
-            </a:r>
-          </a:p>
-        </p:txBody>
-      </p:sp>
-      <p:sp>
-        <p:nvSpPr>
-          <p:cNvPr id="16" name="TextBox 16"/>
-          <p:cNvSpPr txBox="1"/>
-          <p:nvPr/>
-        </p:nvSpPr>
-        <p:spPr>
-          <a:xfrm>
-            <a:off x="3639312" y="1729867"/>
-            <a:ext cx="1052538" cy="337376"/>
-          </a:xfrm>
-          <a:prstGeom prst="rect">
-            <a:avLst/>
-          </a:prstGeom>
-          <a:noFill/>
-          <a:ln>
-            <a:noFill/>
-          </a:ln>
-        </p:spPr>
-        <p:txBody>
-          <a:bodyPr wrap="none" lIns="0" tIns="0" rIns="0" bIns="0" anchor="t" anchorCtr="0">
-            <a:spAutoFit/>
-          </a:bodyPr>
-          <a:lstStyle/>
-          <a:p>
-            <a:pPr algn="l"/>
-            <a:r>
-              <a:rPr lang="zh-TW" sz="1720" b="1" dirty="0">
-                <a:solidFill>
-                  <a:schemeClr val="dk1"/>
-                </a:solidFill>
-                <a:latin typeface="Microsoft JhengHei"/>
-                <a:ea typeface="Microsoft JhengHei"/>
-                <a:cs typeface="Microsoft JhengHei"/>
-              </a:rPr>
-              <a:t>17 類判定</a:t>
-            </a:r>
-          </a:p>
-        </p:txBody>
-      </p:sp>
       <p:pic>
         <p:nvPicPr>
-          <p:cNvPr id="17" name="Image 17"/>
+          <p:cNvPr id="12" name="Image 12"/>
           <p:cNvPicPr>
             <a:picLocks noChangeAspect="1"/>
           </p:cNvPicPr>
@@ -2186,8 +1997,8 @@
         </p:blipFill>
         <p:spPr>
           <a:xfrm>
-            <a:off x="4135755" y="2064639"/>
-            <a:ext cx="891540" cy="891540"/>
+            <a:off x="2686050" y="1562100"/>
+            <a:ext cx="342900" cy="342900"/>
           </a:xfrm>
           <a:prstGeom prst="rect">
             <a:avLst/>
@@ -2196,105 +2007,279 @@
       </p:pic>
       <p:sp>
         <p:nvSpPr>
-          <p:cNvPr id="18" name="TextBox 18"/>
-          <p:cNvSpPr txBox="1"/>
-          <p:nvPr/>
-        </p:nvSpPr>
-        <p:spPr>
-          <a:xfrm>
-            <a:off x="3334893" y="3094736"/>
-            <a:ext cx="1447571" cy="322707"/>
-          </a:xfrm>
-          <a:prstGeom prst="rect">
-            <a:avLst/>
-          </a:prstGeom>
-          <a:noFill/>
-          <a:ln>
-            <a:noFill/>
-          </a:ln>
-        </p:spPr>
-        <p:txBody>
-          <a:bodyPr wrap="none" lIns="0" tIns="0" rIns="0" bIns="0" anchor="t" anchorCtr="0">
-            <a:spAutoFit/>
-          </a:bodyPr>
-          <a:lstStyle/>
-          <a:p>
-            <a:pPr algn="l"/>
-            <a:r>
-              <a:rPr lang="zh-TW" sz="1650" dirty="0">
-                <a:solidFill>
-                  <a:schemeClr val="dk1"/>
-                </a:solidFill>
-                <a:latin typeface="Microsoft JhengHei"/>
-                <a:ea typeface="Microsoft JhengHei"/>
-                <a:cs typeface="Microsoft JhengHei"/>
-              </a:rPr>
-              <a:t>CTBM＋PBCNN</a:t>
-            </a:r>
-          </a:p>
-        </p:txBody>
-      </p:sp>
-      <p:sp>
-        <p:nvSpPr>
-          <p:cNvPr id="19" name="TextBox 19"/>
-          <p:cNvSpPr txBox="1"/>
-          <p:nvPr/>
-        </p:nvSpPr>
-        <p:spPr>
-          <a:xfrm>
-            <a:off x="3334893" y="3391916"/>
-            <a:ext cx="2170728" cy="322707"/>
-          </a:xfrm>
-          <a:prstGeom prst="rect">
-            <a:avLst/>
-          </a:prstGeom>
-          <a:noFill/>
-          <a:ln>
-            <a:noFill/>
-          </a:ln>
-        </p:spPr>
-        <p:txBody>
-          <a:bodyPr wrap="none" lIns="0" tIns="0" rIns="0" bIns="0" anchor="t" anchorCtr="0">
-            <a:spAutoFit/>
-          </a:bodyPr>
-          <a:lstStyle/>
-          <a:p>
-            <a:pPr algn="l"/>
-            <a:r>
-              <a:rPr lang="ja-JP" sz="1650" dirty="0">
-                <a:solidFill>
-                  <a:schemeClr val="dk1"/>
-                </a:solidFill>
-                <a:latin typeface="Microsoft JhengHei"/>
-                <a:ea typeface="Microsoft JhengHei"/>
-                <a:cs typeface="Microsoft JhengHei"/>
-              </a:rPr>
-              <a:t>校準信心・OOF Gate</a:t>
-            </a:r>
-          </a:p>
-        </p:txBody>
-      </p:sp>
-      <p:sp>
-        <p:nvSpPr>
-          <p:cNvPr id="20" name="Rectangle 20"/>
+          <p:cNvPr id="13" name="TextBox 13"/>
+          <p:cNvSpPr txBox="1"/>
+          <p:nvPr/>
+        </p:nvSpPr>
+        <p:spPr>
+          <a:xfrm>
+            <a:off x="3115056" y="1593850"/>
+            <a:ext cx="2605617" cy="352044"/>
+          </a:xfrm>
+          <a:prstGeom prst="rect">
+            <a:avLst/>
+          </a:prstGeom>
+          <a:noFill/>
+          <a:ln>
+            <a:noFill/>
+          </a:ln>
+        </p:spPr>
+        <p:txBody>
+          <a:bodyPr wrap="none" lIns="0" tIns="0" rIns="0" bIns="0" anchor="t" anchorCtr="0">
+            <a:spAutoFit/>
+          </a:bodyPr>
+          <a:lstStyle/>
+          <a:p>
+            <a:pPr algn="l"/>
+            <a:r>
+              <a:rPr lang="zh-TW" sz="1800" b="1" dirty="0">
+                <a:solidFill>
+                  <a:schemeClr val="accent1"/>
+                </a:solidFill>
+                <a:latin typeface="Microsoft JhengHei"/>
+                <a:ea typeface="Microsoft JhengHei"/>
+                <a:cs typeface="Microsoft JhengHei"/>
+              </a:rPr>
+              <a:t>b 互補模型與 17 類判定</a:t>
+            </a:r>
+          </a:p>
+        </p:txBody>
+      </p:sp>
+      <p:sp>
+        <p:nvSpPr>
+          <p:cNvPr id="14" name="Rectangle 14"/>
           <p:cNvSpPr/>
           <p:nvPr/>
         </p:nvSpPr>
         <p:spPr>
           <a:xfrm>
-            <a:off x="3324225" y="3862578"/>
-            <a:ext cx="2543175" cy="1188720"/>
+            <a:off x="2781300" y="2019300"/>
+            <a:ext cx="2857500" cy="571500"/>
           </a:xfrm>
           <a:prstGeom prst="roundRect">
             <a:avLst>
-              <a:gd name="adj" fmla="val 6410"/>
+              <a:gd name="adj" fmla="val 13333"/>
             </a:avLst>
           </a:prstGeom>
           <a:solidFill>
             <a:schemeClr val="lt1"/>
           </a:solidFill>
-          <a:ln>
-            <a:noFill/>
+          <a:ln w="9525">
+            <a:solidFill>
+              <a:schemeClr val="accent6"/>
+            </a:solidFill>
+          </a:ln>
+        </p:spPr>
+      </p:sp>
+      <p:sp>
+        <p:nvSpPr>
+          <p:cNvPr id="15" name="TextBox 15"/>
+          <p:cNvSpPr txBox="1"/>
+          <p:nvPr/>
+        </p:nvSpPr>
+        <p:spPr>
+          <a:xfrm>
+            <a:off x="2943606" y="2051050"/>
+            <a:ext cx="663489" cy="352044"/>
+          </a:xfrm>
+          <a:prstGeom prst="rect">
+            <a:avLst/>
+          </a:prstGeom>
+          <a:noFill/>
+          <a:ln>
+            <a:noFill/>
+          </a:ln>
+        </p:spPr>
+        <p:txBody>
+          <a:bodyPr wrap="none" lIns="0" tIns="0" rIns="0" bIns="0" anchor="t" anchorCtr="0">
+            <a:spAutoFit/>
+          </a:bodyPr>
+          <a:lstStyle/>
+          <a:p>
+            <a:pPr algn="l"/>
+            <a:r>
+              <a:rPr lang="en-US" sz="1800" b="1" dirty="0">
+                <a:solidFill>
+                  <a:schemeClr val="dk1"/>
+                </a:solidFill>
+                <a:latin typeface="Microsoft JhengHei"/>
+                <a:ea typeface="Microsoft JhengHei"/>
+                <a:cs typeface="Microsoft JhengHei"/>
+              </a:rPr>
+              <a:t>CTBM</a:t>
+            </a:r>
+          </a:p>
+        </p:txBody>
+      </p:sp>
+      <p:sp>
+        <p:nvSpPr>
+          <p:cNvPr id="16" name="TextBox 16"/>
+          <p:cNvSpPr txBox="1"/>
+          <p:nvPr/>
+        </p:nvSpPr>
+        <p:spPr>
+          <a:xfrm>
+            <a:off x="2945130" y="2305050"/>
+            <a:ext cx="1832610" cy="293370"/>
+          </a:xfrm>
+          <a:prstGeom prst="rect">
+            <a:avLst/>
+          </a:prstGeom>
+          <a:noFill/>
+          <a:ln>
+            <a:noFill/>
+          </a:ln>
+        </p:spPr>
+        <p:txBody>
+          <a:bodyPr wrap="none" lIns="0" tIns="0" rIns="0" bIns="0" anchor="t" anchorCtr="0">
+            <a:spAutoFit/>
+          </a:bodyPr>
+          <a:lstStyle/>
+          <a:p>
+            <a:pPr algn="l"/>
+            <a:r>
+              <a:rPr lang="ja-JP" sz="1500" dirty="0">
+                <a:solidFill>
+                  <a:schemeClr val="dk1"/>
+                </a:solidFill>
+                <a:latin typeface="Microsoft JhengHei"/>
+                <a:ea typeface="Microsoft JhengHei"/>
+                <a:cs typeface="Microsoft JhengHei"/>
+              </a:rPr>
+              <a:t>內容・時間差・方向</a:t>
+            </a:r>
+          </a:p>
+        </p:txBody>
+      </p:sp>
+      <p:sp>
+        <p:nvSpPr>
+          <p:cNvPr id="17" name="Rectangle 17"/>
+          <p:cNvSpPr/>
+          <p:nvPr/>
+        </p:nvSpPr>
+        <p:spPr>
+          <a:xfrm>
+            <a:off x="2781300" y="2762250"/>
+            <a:ext cx="2857500" cy="571500"/>
+          </a:xfrm>
+          <a:prstGeom prst="roundRect">
+            <a:avLst>
+              <a:gd name="adj" fmla="val 13333"/>
+            </a:avLst>
+          </a:prstGeom>
+          <a:solidFill>
+            <a:schemeClr val="lt1"/>
+          </a:solidFill>
+          <a:ln w="9525">
+            <a:solidFill>
+              <a:schemeClr val="accent6"/>
+            </a:solidFill>
+          </a:ln>
+        </p:spPr>
+      </p:sp>
+      <p:sp>
+        <p:nvSpPr>
+          <p:cNvPr id="18" name="TextBox 18"/>
+          <p:cNvSpPr txBox="1"/>
+          <p:nvPr/>
+        </p:nvSpPr>
+        <p:spPr>
+          <a:xfrm>
+            <a:off x="2943606" y="2794000"/>
+            <a:ext cx="757580" cy="352044"/>
+          </a:xfrm>
+          <a:prstGeom prst="rect">
+            <a:avLst/>
+          </a:prstGeom>
+          <a:noFill/>
+          <a:ln>
+            <a:noFill/>
+          </a:ln>
+        </p:spPr>
+        <p:txBody>
+          <a:bodyPr wrap="none" lIns="0" tIns="0" rIns="0" bIns="0" anchor="t" anchorCtr="0">
+            <a:spAutoFit/>
+          </a:bodyPr>
+          <a:lstStyle/>
+          <a:p>
+            <a:pPr algn="l"/>
+            <a:r>
+              <a:rPr lang="en-US" sz="1800" b="1" dirty="0">
+                <a:solidFill>
+                  <a:schemeClr val="dk1"/>
+                </a:solidFill>
+                <a:latin typeface="Microsoft JhengHei"/>
+                <a:ea typeface="Microsoft JhengHei"/>
+                <a:cs typeface="Microsoft JhengHei"/>
+              </a:rPr>
+              <a:t>PBCNN</a:t>
+            </a:r>
+          </a:p>
+        </p:txBody>
+      </p:sp>
+      <p:sp>
+        <p:nvSpPr>
+          <p:cNvPr id="19" name="TextBox 19"/>
+          <p:cNvSpPr txBox="1"/>
+          <p:nvPr/>
+        </p:nvSpPr>
+        <p:spPr>
+          <a:xfrm>
+            <a:off x="2945130" y="3048000"/>
+            <a:ext cx="1428750" cy="293370"/>
+          </a:xfrm>
+          <a:prstGeom prst="rect">
+            <a:avLst/>
+          </a:prstGeom>
+          <a:noFill/>
+          <a:ln>
+            <a:noFill/>
+          </a:ln>
+        </p:spPr>
+        <p:txBody>
+          <a:bodyPr wrap="none" lIns="0" tIns="0" rIns="0" bIns="0" anchor="t" anchorCtr="0">
+            <a:spAutoFit/>
+          </a:bodyPr>
+          <a:lstStyle/>
+          <a:p>
+            <a:pPr algn="l"/>
+            <a:r>
+              <a:rPr lang="zh-TW" sz="1500" dirty="0">
+                <a:solidFill>
+                  <a:schemeClr val="dk1"/>
+                </a:solidFill>
+                <a:latin typeface="Microsoft JhengHei"/>
+                <a:ea typeface="Microsoft JhengHei"/>
+                <a:cs typeface="Microsoft JhengHei"/>
+              </a:rPr>
+              <a:t>短窗位元組模式</a:t>
+            </a:r>
+          </a:p>
+        </p:txBody>
+      </p:sp>
+      <p:sp>
+        <p:nvSpPr>
+          <p:cNvPr id="20" name="Rectangle 20"/>
+          <p:cNvSpPr/>
+          <p:nvPr/>
+        </p:nvSpPr>
+        <p:spPr>
+          <a:xfrm>
+            <a:off x="6286500" y="2209800"/>
+            <a:ext cx="2647950" cy="857250"/>
+          </a:xfrm>
+          <a:prstGeom prst="roundRect">
+            <a:avLst>
+              <a:gd name="adj" fmla="val 8889"/>
+            </a:avLst>
+          </a:prstGeom>
+          <a:solidFill>
+            <a:schemeClr val="lt1"/>
+          </a:solidFill>
+          <a:ln w="9525">
+            <a:solidFill>
+              <a:schemeClr val="accent6"/>
+            </a:solidFill>
           </a:ln>
         </p:spPr>
       </p:sp>
@@ -2306,8 +2291,154 @@
         </p:nvSpPr>
         <p:spPr>
           <a:xfrm>
-            <a:off x="3421380" y="3998976"/>
-            <a:ext cx="1428750" cy="293370"/>
+            <a:off x="6486906" y="2308225"/>
+            <a:ext cx="1940345" cy="352044"/>
+          </a:xfrm>
+          <a:prstGeom prst="rect">
+            <a:avLst/>
+          </a:prstGeom>
+          <a:noFill/>
+          <a:ln>
+            <a:noFill/>
+          </a:ln>
+        </p:spPr>
+        <p:txBody>
+          <a:bodyPr wrap="none" lIns="0" tIns="0" rIns="0" bIns="0" anchor="t" anchorCtr="0">
+            <a:spAutoFit/>
+          </a:bodyPr>
+          <a:lstStyle/>
+          <a:p>
+            <a:pPr algn="l"/>
+            <a:r>
+              <a:rPr lang="zh-TW" sz="1800" b="1" dirty="0">
+                <a:solidFill>
+                  <a:schemeClr val="dk1"/>
+                </a:solidFill>
+                <a:latin typeface="Microsoft JhengHei"/>
+                <a:ea typeface="Microsoft JhengHei"/>
+                <a:cs typeface="Microsoft JhengHei"/>
+              </a:rPr>
+              <a:t>校準＋OOF Gate</a:t>
+            </a:r>
+          </a:p>
+        </p:txBody>
+      </p:sp>
+      <p:sp>
+        <p:nvSpPr>
+          <p:cNvPr id="22" name="TextBox 22"/>
+          <p:cNvSpPr txBox="1"/>
+          <p:nvPr/>
+        </p:nvSpPr>
+        <p:spPr>
+          <a:xfrm>
+            <a:off x="6487668" y="2673350"/>
+            <a:ext cx="1571625" cy="322707"/>
+          </a:xfrm>
+          <a:prstGeom prst="rect">
+            <a:avLst/>
+          </a:prstGeom>
+          <a:noFill/>
+          <a:ln>
+            <a:noFill/>
+          </a:ln>
+        </p:spPr>
+        <p:txBody>
+          <a:bodyPr wrap="none" lIns="0" tIns="0" rIns="0" bIns="0" anchor="t" anchorCtr="0">
+            <a:spAutoFit/>
+          </a:bodyPr>
+          <a:lstStyle/>
+          <a:p>
+            <a:pPr algn="l"/>
+            <a:r>
+              <a:rPr lang="zh-TW" sz="1650" dirty="0">
+                <a:solidFill>
+                  <a:schemeClr val="dk1"/>
+                </a:solidFill>
+                <a:latin typeface="Microsoft JhengHei"/>
+                <a:ea typeface="Microsoft JhengHei"/>
+                <a:cs typeface="Microsoft JhengHei"/>
+              </a:rPr>
+              <a:t>依事件證據融合</a:t>
+            </a:r>
+          </a:p>
+        </p:txBody>
+      </p:sp>
+      <p:sp>
+        <p:nvSpPr>
+          <p:cNvPr id="23" name="Rectangle 23"/>
+          <p:cNvSpPr/>
+          <p:nvPr/>
+        </p:nvSpPr>
+        <p:spPr>
+          <a:xfrm>
+            <a:off x="9201150" y="2209800"/>
+            <a:ext cx="2628900" cy="857250"/>
+          </a:xfrm>
+          <a:prstGeom prst="roundRect">
+            <a:avLst>
+              <a:gd name="adj" fmla="val 8889"/>
+            </a:avLst>
+          </a:prstGeom>
+          <a:solidFill>
+            <a:schemeClr val="lt1"/>
+          </a:solidFill>
+          <a:ln w="9525">
+            <a:solidFill>
+              <a:schemeClr val="accent6"/>
+            </a:solidFill>
+          </a:ln>
+        </p:spPr>
+      </p:sp>
+      <p:sp>
+        <p:nvSpPr>
+          <p:cNvPr id="24" name="TextBox 24"/>
+          <p:cNvSpPr txBox="1"/>
+          <p:nvPr/>
+        </p:nvSpPr>
+        <p:spPr>
+          <a:xfrm>
+            <a:off x="9382506" y="2308225"/>
+            <a:ext cx="1586073" cy="352044"/>
+          </a:xfrm>
+          <a:prstGeom prst="rect">
+            <a:avLst/>
+          </a:prstGeom>
+          <a:noFill/>
+          <a:ln>
+            <a:noFill/>
+          </a:ln>
+        </p:spPr>
+        <p:txBody>
+          <a:bodyPr wrap="none" lIns="0" tIns="0" rIns="0" bIns="0" anchor="t" anchorCtr="0">
+            <a:spAutoFit/>
+          </a:bodyPr>
+          <a:lstStyle/>
+          <a:p>
+            <a:pPr algn="l"/>
+            <a:r>
+              <a:rPr lang="zh-TW" sz="1800" b="1" dirty="0">
+                <a:solidFill>
+                  <a:schemeClr val="dk1"/>
+                </a:solidFill>
+                <a:latin typeface="Microsoft JhengHei"/>
+                <a:ea typeface="Microsoft JhengHei"/>
+                <a:cs typeface="Microsoft JhengHei"/>
+              </a:rPr>
+              <a:t>17 類正式判定</a:t>
+            </a:r>
+          </a:p>
+        </p:txBody>
+      </p:sp>
+      <p:sp>
+        <p:nvSpPr>
+          <p:cNvPr id="25" name="TextBox 25"/>
+          <p:cNvSpPr txBox="1"/>
+          <p:nvPr/>
+        </p:nvSpPr>
+        <p:spPr>
+          <a:xfrm>
+            <a:off x="9384030" y="2686050"/>
+            <a:ext cx="2105216" cy="293370"/>
           </a:xfrm>
           <a:prstGeom prst="rect">
             <a:avLst/>
@@ -2333,46 +2464,6 @@
                 <a:ea typeface="Microsoft JhengHei"/>
                 <a:cs typeface="Microsoft JhengHei"/>
               </a:rPr>
-              <a:t>輸出：正式類別</a:t>
-            </a:r>
-          </a:p>
-        </p:txBody>
-      </p:sp>
-      <p:sp>
-        <p:nvSpPr>
-          <p:cNvPr id="22" name="TextBox 22"/>
-          <p:cNvSpPr txBox="1"/>
-          <p:nvPr/>
-        </p:nvSpPr>
-        <p:spPr>
-          <a:xfrm>
-            <a:off x="3421380" y="4355592"/>
-            <a:ext cx="2105216" cy="293370"/>
-          </a:xfrm>
-          <a:prstGeom prst="rect">
-            <a:avLst/>
-          </a:prstGeom>
-          <a:noFill/>
-          <a:ln>
-            <a:noFill/>
-          </a:ln>
-        </p:spPr>
-        <p:txBody>
-          <a:bodyPr wrap="none" lIns="0" tIns="0" rIns="0" bIns="0" anchor="t" anchorCtr="0">
-            <a:spAutoFit/>
-          </a:bodyPr>
-          <a:lstStyle/>
-          <a:p>
-            <a:pPr algn="l"/>
-            <a:r>
-              <a:rPr lang="zh-TW" sz="1500" dirty="0">
-                <a:solidFill>
-                  <a:schemeClr val="dk1"/>
-                </a:solidFill>
-                <a:latin typeface="Microsoft JhengHei"/>
-                <a:ea typeface="Microsoft JhengHei"/>
-                <a:cs typeface="Microsoft JhengHei"/>
-              </a:rPr>
               <a:t>512 維表徵＋17 維機率</a:t>
             </a:r>
           </a:p>
@@ -2380,14 +2471,14 @@
       </p:sp>
       <p:sp>
         <p:nvSpPr>
-          <p:cNvPr id="23" name="Freeform 23"/>
+          <p:cNvPr id="26" name="Freeform 26"/>
           <p:cNvSpPr/>
           <p:nvPr/>
         </p:nvSpPr>
         <p:spPr>
           <a:xfrm>
-            <a:off x="6019800" y="3671697"/>
-            <a:ext cx="133350" cy="114300"/>
+            <a:off x="2305050" y="2305050"/>
+            <a:ext cx="476250" cy="171450"/>
           </a:xfrm>
           <a:custGeom>
             <a:avLst/>
@@ -2396,27 +2487,24 @@
             <a:cxnLst/>
             <a:rect l="l" t="t" r="r" b="b"/>
             <a:pathLst>
-              <a:path w="133350" h="114300">
+              <a:path w="476250" h="171450">
                 <a:moveTo>
-                  <a:pt x="0" y="57150"/>
+                  <a:pt x="0" y="171450"/>
                 </a:moveTo>
                 <a:lnTo>
-                  <a:pt x="133350" y="57150"/>
-                </a:lnTo>
-                <a:moveTo>
-                  <a:pt x="76200" y="0"/>
-                </a:moveTo>
-                <a:lnTo>
-                  <a:pt x="133350" y="57150"/>
+                  <a:pt x="361950" y="171450"/>
                 </a:lnTo>
                 <a:lnTo>
-                  <a:pt x="76200" y="114300"/>
+                  <a:pt x="361950" y="0"/>
+                </a:lnTo>
+                <a:lnTo>
+                  <a:pt x="476250" y="0"/>
                 </a:lnTo>
               </a:path>
             </a:pathLst>
           </a:custGeom>
           <a:noFill/>
-          <a:ln w="28575">
+          <a:ln w="19050">
             <a:solidFill>
               <a:schemeClr val="accent1"/>
             </a:solidFill>
@@ -2425,18 +2513,372 @@
       </p:sp>
       <p:sp>
         <p:nvSpPr>
-          <p:cNvPr id="24" name="Rectangle 24"/>
+          <p:cNvPr id="27" name="Freeform 27"/>
           <p:cNvSpPr/>
           <p:nvPr/>
         </p:nvSpPr>
         <p:spPr>
           <a:xfrm>
-            <a:off x="6191250" y="1663446"/>
-            <a:ext cx="2809875" cy="3655314"/>
+            <a:off x="2714625" y="2257425"/>
+            <a:ext cx="66675" cy="95250"/>
+          </a:xfrm>
+          <a:custGeom>
+            <a:avLst/>
+            <a:gdLst/>
+            <a:ahLst/>
+            <a:cxnLst/>
+            <a:rect l="l" t="t" r="r" b="b"/>
+            <a:pathLst>
+              <a:path w="66675" h="95250">
+                <a:moveTo>
+                  <a:pt x="0" y="0"/>
+                </a:moveTo>
+                <a:lnTo>
+                  <a:pt x="66675" y="47625"/>
+                </a:lnTo>
+                <a:lnTo>
+                  <a:pt x="0" y="95250"/>
+                </a:lnTo>
+              </a:path>
+            </a:pathLst>
+          </a:custGeom>
+          <a:noFill/>
+          <a:ln w="19050">
+            <a:solidFill>
+              <a:schemeClr val="accent1"/>
+            </a:solidFill>
+          </a:ln>
+        </p:spPr>
+      </p:sp>
+      <p:sp>
+        <p:nvSpPr>
+          <p:cNvPr id="28" name="Freeform 28"/>
+          <p:cNvSpPr/>
+          <p:nvPr/>
+        </p:nvSpPr>
+        <p:spPr>
+          <a:xfrm>
+            <a:off x="2667000" y="2476500"/>
+            <a:ext cx="114300" cy="571500"/>
+          </a:xfrm>
+          <a:custGeom>
+            <a:avLst/>
+            <a:gdLst/>
+            <a:ahLst/>
+            <a:cxnLst/>
+            <a:rect l="l" t="t" r="r" b="b"/>
+            <a:pathLst>
+              <a:path w="114300" h="571500">
+                <a:moveTo>
+                  <a:pt x="0" y="0"/>
+                </a:moveTo>
+                <a:lnTo>
+                  <a:pt x="0" y="571500"/>
+                </a:lnTo>
+                <a:lnTo>
+                  <a:pt x="114300" y="571500"/>
+                </a:lnTo>
+              </a:path>
+            </a:pathLst>
+          </a:custGeom>
+          <a:noFill/>
+          <a:ln w="19050">
+            <a:solidFill>
+              <a:schemeClr val="accent1"/>
+            </a:solidFill>
+          </a:ln>
+        </p:spPr>
+      </p:sp>
+      <p:sp>
+        <p:nvSpPr>
+          <p:cNvPr id="29" name="Freeform 29"/>
+          <p:cNvSpPr/>
+          <p:nvPr/>
+        </p:nvSpPr>
+        <p:spPr>
+          <a:xfrm>
+            <a:off x="2714625" y="3000375"/>
+            <a:ext cx="66675" cy="95250"/>
+          </a:xfrm>
+          <a:custGeom>
+            <a:avLst/>
+            <a:gdLst/>
+            <a:ahLst/>
+            <a:cxnLst/>
+            <a:rect l="l" t="t" r="r" b="b"/>
+            <a:pathLst>
+              <a:path w="66675" h="95250">
+                <a:moveTo>
+                  <a:pt x="0" y="0"/>
+                </a:moveTo>
+                <a:lnTo>
+                  <a:pt x="66675" y="47625"/>
+                </a:lnTo>
+                <a:lnTo>
+                  <a:pt x="0" y="95250"/>
+                </a:lnTo>
+              </a:path>
+            </a:pathLst>
+          </a:custGeom>
+          <a:noFill/>
+          <a:ln w="19050">
+            <a:solidFill>
+              <a:schemeClr val="accent1"/>
+            </a:solidFill>
+          </a:ln>
+        </p:spPr>
+      </p:sp>
+      <p:sp>
+        <p:nvSpPr>
+          <p:cNvPr id="30" name="Freeform 30"/>
+          <p:cNvSpPr/>
+          <p:nvPr/>
+        </p:nvSpPr>
+        <p:spPr>
+          <a:xfrm>
+            <a:off x="5638800" y="2305050"/>
+            <a:ext cx="647700" cy="333375"/>
+          </a:xfrm>
+          <a:custGeom>
+            <a:avLst/>
+            <a:gdLst/>
+            <a:ahLst/>
+            <a:cxnLst/>
+            <a:rect l="l" t="t" r="r" b="b"/>
+            <a:pathLst>
+              <a:path w="647700" h="333375">
+                <a:moveTo>
+                  <a:pt x="0" y="0"/>
+                </a:moveTo>
+                <a:lnTo>
+                  <a:pt x="314325" y="0"/>
+                </a:lnTo>
+                <a:lnTo>
+                  <a:pt x="314325" y="333375"/>
+                </a:lnTo>
+                <a:lnTo>
+                  <a:pt x="647700" y="333375"/>
+                </a:lnTo>
+              </a:path>
+            </a:pathLst>
+          </a:custGeom>
+          <a:noFill/>
+          <a:ln w="19050">
+            <a:solidFill>
+              <a:schemeClr val="accent1"/>
+            </a:solidFill>
+          </a:ln>
+        </p:spPr>
+      </p:sp>
+      <p:sp>
+        <p:nvSpPr>
+          <p:cNvPr id="31" name="Freeform 31"/>
+          <p:cNvSpPr/>
+          <p:nvPr/>
+        </p:nvSpPr>
+        <p:spPr>
+          <a:xfrm>
+            <a:off x="6219825" y="2590800"/>
+            <a:ext cx="66675" cy="95250"/>
+          </a:xfrm>
+          <a:custGeom>
+            <a:avLst/>
+            <a:gdLst/>
+            <a:ahLst/>
+            <a:cxnLst/>
+            <a:rect l="l" t="t" r="r" b="b"/>
+            <a:pathLst>
+              <a:path w="66675" h="95250">
+                <a:moveTo>
+                  <a:pt x="0" y="0"/>
+                </a:moveTo>
+                <a:lnTo>
+                  <a:pt x="66675" y="47625"/>
+                </a:lnTo>
+                <a:lnTo>
+                  <a:pt x="0" y="95250"/>
+                </a:lnTo>
+              </a:path>
+            </a:pathLst>
+          </a:custGeom>
+          <a:noFill/>
+          <a:ln w="19050">
+            <a:solidFill>
+              <a:schemeClr val="accent1"/>
+            </a:solidFill>
+          </a:ln>
+        </p:spPr>
+      </p:sp>
+      <p:sp>
+        <p:nvSpPr>
+          <p:cNvPr id="32" name="Freeform 32"/>
+          <p:cNvSpPr/>
+          <p:nvPr/>
+        </p:nvSpPr>
+        <p:spPr>
+          <a:xfrm>
+            <a:off x="5638800" y="2638425"/>
+            <a:ext cx="647700" cy="409575"/>
+          </a:xfrm>
+          <a:custGeom>
+            <a:avLst/>
+            <a:gdLst/>
+            <a:ahLst/>
+            <a:cxnLst/>
+            <a:rect l="l" t="t" r="r" b="b"/>
+            <a:pathLst>
+              <a:path w="647700" h="409575">
+                <a:moveTo>
+                  <a:pt x="0" y="409575"/>
+                </a:moveTo>
+                <a:lnTo>
+                  <a:pt x="314325" y="409575"/>
+                </a:lnTo>
+                <a:lnTo>
+                  <a:pt x="314325" y="0"/>
+                </a:lnTo>
+                <a:lnTo>
+                  <a:pt x="647700" y="0"/>
+                </a:lnTo>
+              </a:path>
+            </a:pathLst>
+          </a:custGeom>
+          <a:noFill/>
+          <a:ln w="19050">
+            <a:solidFill>
+              <a:schemeClr val="accent1"/>
+            </a:solidFill>
+          </a:ln>
+        </p:spPr>
+      </p:sp>
+      <p:sp>
+        <p:nvSpPr>
+          <p:cNvPr id="33" name="Freeform 33"/>
+          <p:cNvSpPr/>
+          <p:nvPr/>
+        </p:nvSpPr>
+        <p:spPr>
+          <a:xfrm>
+            <a:off x="6219825" y="2590800"/>
+            <a:ext cx="66675" cy="95250"/>
+          </a:xfrm>
+          <a:custGeom>
+            <a:avLst/>
+            <a:gdLst/>
+            <a:ahLst/>
+            <a:cxnLst/>
+            <a:rect l="l" t="t" r="r" b="b"/>
+            <a:pathLst>
+              <a:path w="66675" h="95250">
+                <a:moveTo>
+                  <a:pt x="0" y="0"/>
+                </a:moveTo>
+                <a:lnTo>
+                  <a:pt x="66675" y="47625"/>
+                </a:lnTo>
+                <a:lnTo>
+                  <a:pt x="0" y="95250"/>
+                </a:lnTo>
+              </a:path>
+            </a:pathLst>
+          </a:custGeom>
+          <a:noFill/>
+          <a:ln w="19050">
+            <a:solidFill>
+              <a:schemeClr val="accent1"/>
+            </a:solidFill>
+          </a:ln>
+        </p:spPr>
+      </p:sp>
+      <p:sp>
+        <p:nvSpPr>
+          <p:cNvPr id="34" name="Freeform 34"/>
+          <p:cNvSpPr/>
+          <p:nvPr/>
+        </p:nvSpPr>
+        <p:spPr>
+          <a:xfrm>
+            <a:off x="8934450" y="2638425"/>
+            <a:ext cx="266700" cy="9525"/>
+          </a:xfrm>
+          <a:custGeom>
+            <a:avLst/>
+            <a:gdLst/>
+            <a:ahLst/>
+            <a:cxnLst/>
+            <a:rect l="l" t="t" r="r" b="b"/>
+            <a:pathLst>
+              <a:path w="266700" h="9525">
+                <a:moveTo>
+                  <a:pt x="0" y="0"/>
+                </a:moveTo>
+                <a:lnTo>
+                  <a:pt x="266700" y="0"/>
+                </a:lnTo>
+              </a:path>
+            </a:pathLst>
+          </a:custGeom>
+          <a:noFill/>
+          <a:ln w="19050">
+            <a:solidFill>
+              <a:schemeClr val="accent1"/>
+            </a:solidFill>
+          </a:ln>
+        </p:spPr>
+      </p:sp>
+      <p:sp>
+        <p:nvSpPr>
+          <p:cNvPr id="35" name="Freeform 35"/>
+          <p:cNvSpPr/>
+          <p:nvPr/>
+        </p:nvSpPr>
+        <p:spPr>
+          <a:xfrm>
+            <a:off x="9134475" y="2590800"/>
+            <a:ext cx="66675" cy="95250"/>
+          </a:xfrm>
+          <a:custGeom>
+            <a:avLst/>
+            <a:gdLst/>
+            <a:ahLst/>
+            <a:cxnLst/>
+            <a:rect l="l" t="t" r="r" b="b"/>
+            <a:pathLst>
+              <a:path w="66675" h="95250">
+                <a:moveTo>
+                  <a:pt x="0" y="0"/>
+                </a:moveTo>
+                <a:lnTo>
+                  <a:pt x="66675" y="47625"/>
+                </a:lnTo>
+                <a:lnTo>
+                  <a:pt x="0" y="95250"/>
+                </a:lnTo>
+              </a:path>
+            </a:pathLst>
+          </a:custGeom>
+          <a:noFill/>
+          <a:ln w="19050">
+            <a:solidFill>
+              <a:schemeClr val="accent1"/>
+            </a:solidFill>
+          </a:ln>
+        </p:spPr>
+      </p:sp>
+      <p:sp>
+        <p:nvSpPr>
+          <p:cNvPr id="36" name="Rectangle 36"/>
+          <p:cNvSpPr/>
+          <p:nvPr/>
+        </p:nvSpPr>
+        <p:spPr>
+          <a:xfrm>
+            <a:off x="152400" y="4038600"/>
+            <a:ext cx="8001000" cy="1771650"/>
           </a:xfrm>
           <a:prstGeom prst="roundRect">
             <a:avLst>
-              <a:gd name="adj" fmla="val 2712"/>
+              <a:gd name="adj" fmla="val 4301"/>
             </a:avLst>
           </a:prstGeom>
           <a:solidFill>
@@ -2449,89 +2891,9 @@
           </a:ln>
         </p:spPr>
       </p:sp>
-      <p:sp>
-        <p:nvSpPr>
-          <p:cNvPr id="25" name="TextBox 25"/>
-          <p:cNvSpPr txBox="1"/>
-          <p:nvPr/>
-        </p:nvSpPr>
-        <p:spPr>
-          <a:xfrm>
-            <a:off x="6354318" y="1742567"/>
-            <a:ext cx="145040" cy="322707"/>
-          </a:xfrm>
-          <a:prstGeom prst="rect">
-            <a:avLst/>
-          </a:prstGeom>
-          <a:noFill/>
-          <a:ln>
-            <a:noFill/>
-          </a:ln>
-        </p:spPr>
-        <p:txBody>
-          <a:bodyPr wrap="none" lIns="0" tIns="0" rIns="0" bIns="0" anchor="t" anchorCtr="0">
-            <a:spAutoFit/>
-          </a:bodyPr>
-          <a:lstStyle/>
-          <a:p>
-            <a:pPr algn="l"/>
-            <a:r>
-              <a:rPr lang="en-US" sz="1650" b="1" dirty="0">
-                <a:solidFill>
-                  <a:schemeClr val="accent1"/>
-                </a:solidFill>
-                <a:latin typeface="Microsoft JhengHei"/>
-                <a:ea typeface="Microsoft JhengHei"/>
-                <a:cs typeface="Microsoft JhengHei"/>
-              </a:rPr>
-              <a:t>c</a:t>
-            </a:r>
-          </a:p>
-        </p:txBody>
-      </p:sp>
-      <p:sp>
-        <p:nvSpPr>
-          <p:cNvPr id="26" name="TextBox 26"/>
-          <p:cNvSpPr txBox="1"/>
-          <p:nvPr/>
-        </p:nvSpPr>
-        <p:spPr>
-          <a:xfrm>
-            <a:off x="6639687" y="1729867"/>
-            <a:ext cx="1638351" cy="337376"/>
-          </a:xfrm>
-          <a:prstGeom prst="rect">
-            <a:avLst/>
-          </a:prstGeom>
-          <a:noFill/>
-          <a:ln>
-            <a:noFill/>
-          </a:ln>
-        </p:spPr>
-        <p:txBody>
-          <a:bodyPr wrap="none" lIns="0" tIns="0" rIns="0" bIns="0" anchor="t" anchorCtr="0">
-            <a:spAutoFit/>
-          </a:bodyPr>
-          <a:lstStyle/>
-          <a:p>
-            <a:pPr algn="l"/>
-            <a:r>
-              <a:rPr lang="zh-TW" sz="1720" b="1" dirty="0">
-                <a:solidFill>
-                  <a:schemeClr val="dk1"/>
-                </a:solidFill>
-                <a:latin typeface="Microsoft JhengHei"/>
-                <a:ea typeface="Microsoft JhengHei"/>
-                <a:cs typeface="Microsoft JhengHei"/>
-              </a:rPr>
-              <a:t>證據檢索與稽核</a:t>
-            </a:r>
-          </a:p>
-        </p:txBody>
-      </p:sp>
       <p:pic>
         <p:nvPicPr>
-          <p:cNvPr id="27" name="Image 27"/>
+          <p:cNvPr id="37" name="Image 37"/>
           <p:cNvPicPr>
             <a:picLocks noChangeAspect="1"/>
           </p:cNvPicPr>
@@ -2545,8 +2907,8 @@
         </p:blipFill>
         <p:spPr>
           <a:xfrm>
-            <a:off x="7136130" y="2064639"/>
-            <a:ext cx="891540" cy="891540"/>
+            <a:off x="323850" y="4095750"/>
+            <a:ext cx="342900" cy="342900"/>
           </a:xfrm>
           <a:prstGeom prst="rect">
             <a:avLst/>
@@ -2555,117 +2917,331 @@
       </p:pic>
       <p:sp>
         <p:nvSpPr>
-          <p:cNvPr id="28" name="TextBox 28"/>
-          <p:cNvSpPr txBox="1"/>
-          <p:nvPr/>
-        </p:nvSpPr>
-        <p:spPr>
-          <a:xfrm>
-            <a:off x="6335268" y="3094736"/>
-            <a:ext cx="2443143" cy="322707"/>
-          </a:xfrm>
-          <a:prstGeom prst="rect">
-            <a:avLst/>
-          </a:prstGeom>
-          <a:noFill/>
-          <a:ln>
-            <a:noFill/>
-          </a:ln>
-        </p:spPr>
-        <p:txBody>
-          <a:bodyPr wrap="none" lIns="0" tIns="0" rIns="0" bIns="0" anchor="t" anchorCtr="0">
-            <a:spAutoFit/>
-          </a:bodyPr>
-          <a:lstStyle/>
-          <a:p>
-            <a:pPr algn="l"/>
-            <a:r>
-              <a:rPr lang="zh-TW" sz="1650" dirty="0">
-                <a:solidFill>
-                  <a:schemeClr val="dk1"/>
-                </a:solidFill>
-                <a:latin typeface="Microsoft JhengHei"/>
-                <a:ea typeface="Microsoft JhengHei"/>
-                <a:cs typeface="Microsoft JhengHei"/>
-              </a:rPr>
-              <a:t>529 維任務向量 → Top-5</a:t>
-            </a:r>
-          </a:p>
-        </p:txBody>
-      </p:sp>
-      <p:sp>
-        <p:nvSpPr>
-          <p:cNvPr id="29" name="TextBox 29"/>
-          <p:cNvSpPr txBox="1"/>
-          <p:nvPr/>
-        </p:nvSpPr>
-        <p:spPr>
-          <a:xfrm>
-            <a:off x="6335268" y="3391916"/>
-            <a:ext cx="2134057" cy="322707"/>
-          </a:xfrm>
-          <a:prstGeom prst="rect">
-            <a:avLst/>
-          </a:prstGeom>
-          <a:noFill/>
-          <a:ln>
-            <a:noFill/>
-          </a:ln>
-        </p:spPr>
-        <p:txBody>
-          <a:bodyPr wrap="none" lIns="0" tIns="0" rIns="0" bIns="0" anchor="t" anchorCtr="0">
-            <a:spAutoFit/>
-          </a:bodyPr>
-          <a:lstStyle/>
-          <a:p>
-            <a:pPr algn="l"/>
-            <a:r>
-              <a:rPr lang="zh-TW" sz="1650" dirty="0">
-                <a:solidFill>
-                  <a:schemeClr val="dk1"/>
-                </a:solidFill>
-                <a:latin typeface="Microsoft JhengHei"/>
-                <a:ea typeface="Microsoft JhengHei"/>
-                <a:cs typeface="Microsoft JhengHei"/>
-              </a:rPr>
-              <a:t>本機 AI 核對訓練案例</a:t>
-            </a:r>
-          </a:p>
-        </p:txBody>
-      </p:sp>
-      <p:sp>
-        <p:nvSpPr>
-          <p:cNvPr id="30" name="Rectangle 30"/>
+          <p:cNvPr id="38" name="TextBox 38"/>
+          <p:cNvSpPr txBox="1"/>
+          <p:nvPr/>
+        </p:nvSpPr>
+        <p:spPr>
+          <a:xfrm>
+            <a:off x="752856" y="4127500"/>
+            <a:ext cx="2805208" cy="352044"/>
+          </a:xfrm>
+          <a:prstGeom prst="rect">
+            <a:avLst/>
+          </a:prstGeom>
+          <a:noFill/>
+          <a:ln>
+            <a:noFill/>
+          </a:ln>
+        </p:spPr>
+        <p:txBody>
+          <a:bodyPr wrap="none" lIns="0" tIns="0" rIns="0" bIns="0" anchor="t" anchorCtr="0">
+            <a:spAutoFit/>
+          </a:bodyPr>
+          <a:lstStyle/>
+          <a:p>
+            <a:pPr algn="l"/>
+            <a:r>
+              <a:rPr lang="zh-TW" sz="1800" b="1" dirty="0">
+                <a:solidFill>
+                  <a:schemeClr val="accent1"/>
+                </a:solidFill>
+                <a:latin typeface="Microsoft JhengHei"/>
+                <a:ea typeface="Microsoft JhengHei"/>
+                <a:cs typeface="Microsoft JhengHei"/>
+              </a:rPr>
+              <a:t>c 任務導向檢索與 AI 稽核</a:t>
+            </a:r>
+          </a:p>
+        </p:txBody>
+      </p:sp>
+      <p:sp>
+        <p:nvSpPr>
+          <p:cNvPr id="39" name="Rectangle 39"/>
           <p:cNvSpPr/>
           <p:nvPr/>
         </p:nvSpPr>
         <p:spPr>
           <a:xfrm>
-            <a:off x="6324600" y="3862578"/>
-            <a:ext cx="2543175" cy="1188720"/>
+            <a:off x="381000" y="4591050"/>
+            <a:ext cx="1809750" cy="781050"/>
           </a:xfrm>
           <a:prstGeom prst="roundRect">
             <a:avLst>
-              <a:gd name="adj" fmla="val 6410"/>
+              <a:gd name="adj" fmla="val 9756"/>
             </a:avLst>
           </a:prstGeom>
           <a:solidFill>
             <a:schemeClr val="lt1"/>
           </a:solidFill>
-          <a:ln>
-            <a:noFill/>
-          </a:ln>
-        </p:spPr>
-      </p:sp>
-      <p:sp>
-        <p:nvSpPr>
-          <p:cNvPr id="31" name="TextBox 31"/>
-          <p:cNvSpPr txBox="1"/>
-          <p:nvPr/>
-        </p:nvSpPr>
-        <p:spPr>
-          <a:xfrm>
-            <a:off x="6421755" y="3998976"/>
+          <a:ln w="9525">
+            <a:solidFill>
+              <a:schemeClr val="accent6"/>
+            </a:solidFill>
+          </a:ln>
+        </p:spPr>
+      </p:sp>
+      <p:sp>
+        <p:nvSpPr>
+          <p:cNvPr id="40" name="TextBox 40"/>
+          <p:cNvSpPr txBox="1"/>
+          <p:nvPr/>
+        </p:nvSpPr>
+        <p:spPr>
+          <a:xfrm>
+            <a:off x="505968" y="4711700"/>
+            <a:ext cx="1582176" cy="322707"/>
+          </a:xfrm>
+          <a:prstGeom prst="rect">
+            <a:avLst/>
+          </a:prstGeom>
+          <a:noFill/>
+          <a:ln>
+            <a:noFill/>
+          </a:ln>
+        </p:spPr>
+        <p:txBody>
+          <a:bodyPr wrap="none" lIns="0" tIns="0" rIns="0" bIns="0" anchor="t" anchorCtr="0">
+            <a:spAutoFit/>
+          </a:bodyPr>
+          <a:lstStyle/>
+          <a:p>
+            <a:pPr algn="l"/>
+            <a:r>
+              <a:rPr lang="zh-TW" sz="1650" b="1" dirty="0">
+                <a:solidFill>
+                  <a:schemeClr val="dk1"/>
+                </a:solidFill>
+                <a:latin typeface="Microsoft JhengHei"/>
+                <a:ea typeface="Microsoft JhengHei"/>
+                <a:cs typeface="Microsoft JhengHei"/>
+              </a:rPr>
+              <a:t>529 維任務向量</a:t>
+            </a:r>
+          </a:p>
+        </p:txBody>
+      </p:sp>
+      <p:sp>
+        <p:nvSpPr>
+          <p:cNvPr id="41" name="TextBox 41"/>
+          <p:cNvSpPr txBox="1"/>
+          <p:nvPr/>
+        </p:nvSpPr>
+        <p:spPr>
+          <a:xfrm>
+            <a:off x="506730" y="5019675"/>
+            <a:ext cx="919734" cy="293370"/>
+          </a:xfrm>
+          <a:prstGeom prst="rect">
+            <a:avLst/>
+          </a:prstGeom>
+          <a:noFill/>
+          <a:ln>
+            <a:noFill/>
+          </a:ln>
+        </p:spPr>
+        <p:txBody>
+          <a:bodyPr wrap="none" lIns="0" tIns="0" rIns="0" bIns="0" anchor="t" anchorCtr="0">
+            <a:spAutoFit/>
+          </a:bodyPr>
+          <a:lstStyle/>
+          <a:p>
+            <a:pPr algn="l"/>
+            <a:r>
+              <a:rPr lang="zh-TW" sz="1500" dirty="0">
+                <a:solidFill>
+                  <a:schemeClr val="dk1"/>
+                </a:solidFill>
+                <a:latin typeface="Microsoft JhengHei"/>
+                <a:ea typeface="Microsoft JhengHei"/>
+                <a:cs typeface="Microsoft JhengHei"/>
+              </a:rPr>
+              <a:t>L2 正規化</a:t>
+            </a:r>
+          </a:p>
+        </p:txBody>
+      </p:sp>
+      <p:sp>
+        <p:nvSpPr>
+          <p:cNvPr id="42" name="Rectangle 42"/>
+          <p:cNvSpPr/>
+          <p:nvPr/>
+        </p:nvSpPr>
+        <p:spPr>
+          <a:xfrm>
+            <a:off x="2476500" y="4591050"/>
+            <a:ext cx="2324100" cy="781050"/>
+          </a:xfrm>
+          <a:prstGeom prst="roundRect">
+            <a:avLst>
+              <a:gd name="adj" fmla="val 9756"/>
+            </a:avLst>
+          </a:prstGeom>
+          <a:solidFill>
+            <a:schemeClr val="lt1"/>
+          </a:solidFill>
+          <a:ln w="9525">
+            <a:solidFill>
+              <a:schemeClr val="accent6"/>
+            </a:solidFill>
+          </a:ln>
+        </p:spPr>
+      </p:sp>
+      <p:sp>
+        <p:nvSpPr>
+          <p:cNvPr id="43" name="TextBox 43"/>
+          <p:cNvSpPr txBox="1"/>
+          <p:nvPr/>
+        </p:nvSpPr>
+        <p:spPr>
+          <a:xfrm>
+            <a:off x="2601468" y="4711700"/>
+            <a:ext cx="1630027" cy="322707"/>
+          </a:xfrm>
+          <a:prstGeom prst="rect">
+            <a:avLst/>
+          </a:prstGeom>
+          <a:noFill/>
+          <a:ln>
+            <a:noFill/>
+          </a:ln>
+        </p:spPr>
+        <p:txBody>
+          <a:bodyPr wrap="none" lIns="0" tIns="0" rIns="0" bIns="0" anchor="t" anchorCtr="0">
+            <a:spAutoFit/>
+          </a:bodyPr>
+          <a:lstStyle/>
+          <a:p>
+            <a:pPr algn="l"/>
+            <a:r>
+              <a:rPr lang="zh-TW" sz="1650" b="1" dirty="0">
+                <a:solidFill>
+                  <a:schemeClr val="dk1"/>
+                </a:solidFill>
+                <a:latin typeface="Microsoft JhengHei"/>
+                <a:ea typeface="Microsoft JhengHei"/>
+                <a:cs typeface="Microsoft JhengHei"/>
+              </a:rPr>
+              <a:t>Top-5 相似案例</a:t>
+            </a:r>
+          </a:p>
+        </p:txBody>
+      </p:sp>
+      <p:sp>
+        <p:nvSpPr>
+          <p:cNvPr id="44" name="TextBox 44"/>
+          <p:cNvSpPr txBox="1"/>
+          <p:nvPr/>
+        </p:nvSpPr>
+        <p:spPr>
+          <a:xfrm>
+            <a:off x="2602230" y="5019675"/>
+            <a:ext cx="1630680" cy="293370"/>
+          </a:xfrm>
+          <a:prstGeom prst="rect">
+            <a:avLst/>
+          </a:prstGeom>
+          <a:noFill/>
+          <a:ln>
+            <a:noFill/>
+          </a:ln>
+        </p:spPr>
+        <p:txBody>
+          <a:bodyPr wrap="none" lIns="0" tIns="0" rIns="0" bIns="0" anchor="t" anchorCtr="0">
+            <a:spAutoFit/>
+          </a:bodyPr>
+          <a:lstStyle/>
+          <a:p>
+            <a:pPr algn="l"/>
+            <a:r>
+              <a:rPr lang="zh-TW" sz="1500" dirty="0">
+                <a:solidFill>
+                  <a:schemeClr val="dk1"/>
+                </a:solidFill>
+                <a:latin typeface="Microsoft JhengHei"/>
+                <a:ea typeface="Microsoft JhengHei"/>
+                <a:cs typeface="Microsoft JhengHei"/>
+              </a:rPr>
+              <a:t>僅訓練資料案例庫</a:t>
+            </a:r>
+          </a:p>
+        </p:txBody>
+      </p:sp>
+      <p:sp>
+        <p:nvSpPr>
+          <p:cNvPr id="45" name="Rectangle 45"/>
+          <p:cNvSpPr/>
+          <p:nvPr/>
+        </p:nvSpPr>
+        <p:spPr>
+          <a:xfrm>
+            <a:off x="5143500" y="4591050"/>
+            <a:ext cx="2781300" cy="781050"/>
+          </a:xfrm>
+          <a:prstGeom prst="roundRect">
+            <a:avLst>
+              <a:gd name="adj" fmla="val 9756"/>
+            </a:avLst>
+          </a:prstGeom>
+          <a:solidFill>
+            <a:schemeClr val="lt1"/>
+          </a:solidFill>
+          <a:ln w="9525">
+            <a:solidFill>
+              <a:schemeClr val="accent6"/>
+            </a:solidFill>
+          </a:ln>
+        </p:spPr>
+      </p:sp>
+      <p:sp>
+        <p:nvSpPr>
+          <p:cNvPr id="46" name="TextBox 46"/>
+          <p:cNvSpPr txBox="1"/>
+          <p:nvPr/>
+        </p:nvSpPr>
+        <p:spPr>
+          <a:xfrm>
+            <a:off x="5268468" y="4711700"/>
+            <a:ext cx="1262581" cy="322707"/>
+          </a:xfrm>
+          <a:prstGeom prst="rect">
+            <a:avLst/>
+          </a:prstGeom>
+          <a:noFill/>
+          <a:ln>
+            <a:noFill/>
+          </a:ln>
+        </p:spPr>
+        <p:txBody>
+          <a:bodyPr wrap="none" lIns="0" tIns="0" rIns="0" bIns="0" anchor="t" anchorCtr="0">
+            <a:spAutoFit/>
+          </a:bodyPr>
+          <a:lstStyle/>
+          <a:p>
+            <a:pPr algn="l"/>
+            <a:r>
+              <a:rPr lang="zh-TW" sz="1650" b="1" dirty="0">
+                <a:solidFill>
+                  <a:schemeClr val="dk1"/>
+                </a:solidFill>
+                <a:latin typeface="Microsoft JhengHei"/>
+                <a:ea typeface="Microsoft JhengHei"/>
+                <a:cs typeface="Microsoft JhengHei"/>
+              </a:rPr>
+              <a:t>本機 AI 稽核</a:t>
+            </a:r>
+          </a:p>
+        </p:txBody>
+      </p:sp>
+      <p:sp>
+        <p:nvSpPr>
+          <p:cNvPr id="47" name="TextBox 47"/>
+          <p:cNvSpPr txBox="1"/>
+          <p:nvPr/>
+        </p:nvSpPr>
+        <p:spPr>
+          <a:xfrm>
+            <a:off x="5269230" y="5019675"/>
             <a:ext cx="1832610" cy="293370"/>
           </a:xfrm>
           <a:prstGeom prst="rect">
@@ -2699,54 +3275,14 @@
       </p:sp>
       <p:sp>
         <p:nvSpPr>
-          <p:cNvPr id="32" name="TextBox 32"/>
-          <p:cNvSpPr txBox="1"/>
-          <p:nvPr/>
-        </p:nvSpPr>
-        <p:spPr>
-          <a:xfrm>
-            <a:off x="6421755" y="4355592"/>
-            <a:ext cx="1832610" cy="293370"/>
-          </a:xfrm>
-          <a:prstGeom prst="rect">
-            <a:avLst/>
-          </a:prstGeom>
-          <a:noFill/>
-          <a:ln>
-            <a:noFill/>
-          </a:ln>
-        </p:spPr>
-        <p:txBody>
-          <a:bodyPr wrap="none" lIns="0" tIns="0" rIns="0" bIns="0" anchor="t" anchorCtr="0">
-            <a:spAutoFit/>
-          </a:bodyPr>
-          <a:lstStyle/>
-          <a:p>
-            <a:pPr algn="l"/>
-            <a:r>
-              <a:rPr lang="zh-TW" sz="1500" dirty="0">
-                <a:solidFill>
-                  <a:schemeClr val="dk1"/>
-                </a:solidFill>
-                <a:latin typeface="Microsoft JhengHei"/>
-                <a:ea typeface="Microsoft JhengHei"/>
-                <a:cs typeface="Microsoft JhengHei"/>
-              </a:rPr>
-              <a:t>稽核不改寫正式分類</a:t>
-            </a:r>
-          </a:p>
-        </p:txBody>
-      </p:sp>
-      <p:sp>
-        <p:nvSpPr>
-          <p:cNvPr id="33" name="Freeform 33"/>
+          <p:cNvPr id="48" name="Freeform 48"/>
           <p:cNvSpPr/>
           <p:nvPr/>
         </p:nvSpPr>
         <p:spPr>
           <a:xfrm>
-            <a:off x="9020175" y="3671697"/>
-            <a:ext cx="133350" cy="114300"/>
+            <a:off x="47625" y="3067050"/>
+            <a:ext cx="10467975" cy="1914525"/>
           </a:xfrm>
           <a:custGeom>
             <a:avLst/>
@@ -2755,27 +3291,27 @@
             <a:cxnLst/>
             <a:rect l="l" t="t" r="r" b="b"/>
             <a:pathLst>
-              <a:path w="133350" h="114300">
+              <a:path w="10467975" h="1914525">
                 <a:moveTo>
-                  <a:pt x="0" y="57150"/>
+                  <a:pt x="10467975" y="0"/>
                 </a:moveTo>
                 <a:lnTo>
-                  <a:pt x="133350" y="57150"/>
-                </a:lnTo>
-                <a:moveTo>
-                  <a:pt x="76200" y="0"/>
-                </a:moveTo>
-                <a:lnTo>
-                  <a:pt x="133350" y="57150"/>
+                  <a:pt x="10467975" y="657225"/>
                 </a:lnTo>
                 <a:lnTo>
-                  <a:pt x="76200" y="114300"/>
+                  <a:pt x="0" y="657225"/>
+                </a:lnTo>
+                <a:lnTo>
+                  <a:pt x="0" y="1914525"/>
+                </a:lnTo>
+                <a:lnTo>
+                  <a:pt x="333375" y="1914525"/>
                 </a:lnTo>
               </a:path>
             </a:pathLst>
           </a:custGeom>
           <a:noFill/>
-          <a:ln w="28575">
+          <a:ln w="19050">
             <a:solidFill>
               <a:schemeClr val="accent1"/>
             </a:solidFill>
@@ -2784,18 +3320,405 @@
       </p:sp>
       <p:sp>
         <p:nvSpPr>
-          <p:cNvPr id="34" name="Rectangle 34"/>
+          <p:cNvPr id="49" name="Freeform 49"/>
           <p:cNvSpPr/>
           <p:nvPr/>
         </p:nvSpPr>
         <p:spPr>
           <a:xfrm>
-            <a:off x="9191625" y="1663446"/>
-            <a:ext cx="2809875" cy="3655314"/>
+            <a:off x="314325" y="4933950"/>
+            <a:ext cx="66675" cy="95250"/>
+          </a:xfrm>
+          <a:custGeom>
+            <a:avLst/>
+            <a:gdLst/>
+            <a:ahLst/>
+            <a:cxnLst/>
+            <a:rect l="l" t="t" r="r" b="b"/>
+            <a:pathLst>
+              <a:path w="66675" h="95250">
+                <a:moveTo>
+                  <a:pt x="0" y="0"/>
+                </a:moveTo>
+                <a:lnTo>
+                  <a:pt x="66675" y="47625"/>
+                </a:lnTo>
+                <a:lnTo>
+                  <a:pt x="0" y="95250"/>
+                </a:lnTo>
+              </a:path>
+            </a:pathLst>
+          </a:custGeom>
+          <a:noFill/>
+          <a:ln w="19050">
+            <a:solidFill>
+              <a:schemeClr val="accent1"/>
+            </a:solidFill>
+          </a:ln>
+        </p:spPr>
+      </p:sp>
+      <p:sp>
+        <p:nvSpPr>
+          <p:cNvPr id="50" name="TextBox 50"/>
+          <p:cNvSpPr txBox="1"/>
+          <p:nvPr/>
+        </p:nvSpPr>
+        <p:spPr>
+          <a:xfrm>
+            <a:off x="4564380" y="3435350"/>
+            <a:ext cx="2682240" cy="322707"/>
+          </a:xfrm>
+          <a:prstGeom prst="rect">
+            <a:avLst/>
+          </a:prstGeom>
+          <a:noFill/>
+          <a:ln>
+            <a:noFill/>
+          </a:ln>
+        </p:spPr>
+        <p:txBody>
+          <a:bodyPr wrap="none" lIns="0" tIns="0" rIns="0" bIns="0" anchor="t" anchorCtr="0">
+            <a:spAutoFit/>
+          </a:bodyPr>
+          <a:lstStyle/>
+          <a:p>
+            <a:pPr algn="ctr"/>
+            <a:r>
+              <a:rPr lang="ja-JP" sz="1650" dirty="0">
+                <a:solidFill>
+                  <a:schemeClr val="dk1"/>
+                </a:solidFill>
+                <a:latin typeface="Microsoft JhengHei"/>
+                <a:ea typeface="Microsoft JhengHei"/>
+                <a:cs typeface="Microsoft JhengHei"/>
+              </a:rPr>
+              <a:t>正式類別・信心・模型表徵</a:t>
+            </a:r>
+          </a:p>
+        </p:txBody>
+      </p:sp>
+      <p:sp>
+        <p:nvSpPr>
+          <p:cNvPr id="51" name="Freeform 51"/>
+          <p:cNvSpPr/>
+          <p:nvPr/>
+        </p:nvSpPr>
+        <p:spPr>
+          <a:xfrm>
+            <a:off x="2190750" y="4981575"/>
+            <a:ext cx="285750" cy="9525"/>
+          </a:xfrm>
+          <a:custGeom>
+            <a:avLst/>
+            <a:gdLst/>
+            <a:ahLst/>
+            <a:cxnLst/>
+            <a:rect l="l" t="t" r="r" b="b"/>
+            <a:pathLst>
+              <a:path w="285750" h="9525">
+                <a:moveTo>
+                  <a:pt x="0" y="0"/>
+                </a:moveTo>
+                <a:lnTo>
+                  <a:pt x="285750" y="0"/>
+                </a:lnTo>
+              </a:path>
+            </a:pathLst>
+          </a:custGeom>
+          <a:noFill/>
+          <a:ln w="19050">
+            <a:solidFill>
+              <a:schemeClr val="accent1"/>
+            </a:solidFill>
+          </a:ln>
+        </p:spPr>
+      </p:sp>
+      <p:sp>
+        <p:nvSpPr>
+          <p:cNvPr id="52" name="Freeform 52"/>
+          <p:cNvSpPr/>
+          <p:nvPr/>
+        </p:nvSpPr>
+        <p:spPr>
+          <a:xfrm>
+            <a:off x="2409825" y="4933950"/>
+            <a:ext cx="66675" cy="95250"/>
+          </a:xfrm>
+          <a:custGeom>
+            <a:avLst/>
+            <a:gdLst/>
+            <a:ahLst/>
+            <a:cxnLst/>
+            <a:rect l="l" t="t" r="r" b="b"/>
+            <a:pathLst>
+              <a:path w="66675" h="95250">
+                <a:moveTo>
+                  <a:pt x="0" y="0"/>
+                </a:moveTo>
+                <a:lnTo>
+                  <a:pt x="66675" y="47625"/>
+                </a:lnTo>
+                <a:lnTo>
+                  <a:pt x="0" y="95250"/>
+                </a:lnTo>
+              </a:path>
+            </a:pathLst>
+          </a:custGeom>
+          <a:noFill/>
+          <a:ln w="19050">
+            <a:solidFill>
+              <a:schemeClr val="accent1"/>
+            </a:solidFill>
+          </a:ln>
+        </p:spPr>
+      </p:sp>
+      <p:sp>
+        <p:nvSpPr>
+          <p:cNvPr id="53" name="Freeform 53"/>
+          <p:cNvSpPr/>
+          <p:nvPr/>
+        </p:nvSpPr>
+        <p:spPr>
+          <a:xfrm>
+            <a:off x="4800600" y="4981575"/>
+            <a:ext cx="342900" cy="9525"/>
+          </a:xfrm>
+          <a:custGeom>
+            <a:avLst/>
+            <a:gdLst/>
+            <a:ahLst/>
+            <a:cxnLst/>
+            <a:rect l="l" t="t" r="r" b="b"/>
+            <a:pathLst>
+              <a:path w="342900" h="9525">
+                <a:moveTo>
+                  <a:pt x="0" y="0"/>
+                </a:moveTo>
+                <a:lnTo>
+                  <a:pt x="342900" y="0"/>
+                </a:lnTo>
+              </a:path>
+            </a:pathLst>
+          </a:custGeom>
+          <a:noFill/>
+          <a:ln w="19050">
+            <a:solidFill>
+              <a:schemeClr val="accent1"/>
+            </a:solidFill>
+          </a:ln>
+        </p:spPr>
+      </p:sp>
+      <p:sp>
+        <p:nvSpPr>
+          <p:cNvPr id="54" name="Freeform 54"/>
+          <p:cNvSpPr/>
+          <p:nvPr/>
+        </p:nvSpPr>
+        <p:spPr>
+          <a:xfrm>
+            <a:off x="5076825" y="4933950"/>
+            <a:ext cx="66675" cy="95250"/>
+          </a:xfrm>
+          <a:custGeom>
+            <a:avLst/>
+            <a:gdLst/>
+            <a:ahLst/>
+            <a:cxnLst/>
+            <a:rect l="l" t="t" r="r" b="b"/>
+            <a:pathLst>
+              <a:path w="66675" h="95250">
+                <a:moveTo>
+                  <a:pt x="0" y="0"/>
+                </a:moveTo>
+                <a:lnTo>
+                  <a:pt x="66675" y="47625"/>
+                </a:lnTo>
+                <a:lnTo>
+                  <a:pt x="0" y="95250"/>
+                </a:lnTo>
+              </a:path>
+            </a:pathLst>
+          </a:custGeom>
+          <a:noFill/>
+          <a:ln w="19050">
+            <a:solidFill>
+              <a:schemeClr val="accent1"/>
+            </a:solidFill>
+          </a:ln>
+        </p:spPr>
+      </p:sp>
+      <p:sp>
+        <p:nvSpPr>
+          <p:cNvPr id="55" name="TextBox 55"/>
+          <p:cNvSpPr txBox="1"/>
+          <p:nvPr/>
+        </p:nvSpPr>
+        <p:spPr>
+          <a:xfrm>
+            <a:off x="3107055" y="5486400"/>
+            <a:ext cx="1024890" cy="293370"/>
+          </a:xfrm>
+          <a:prstGeom prst="rect">
+            <a:avLst/>
+          </a:prstGeom>
+          <a:noFill/>
+          <a:ln>
+            <a:noFill/>
+          </a:ln>
+        </p:spPr>
+        <p:txBody>
+          <a:bodyPr wrap="none" lIns="0" tIns="0" rIns="0" bIns="0" anchor="t" anchorCtr="0">
+            <a:spAutoFit/>
+          </a:bodyPr>
+          <a:lstStyle/>
+          <a:p>
+            <a:pPr algn="ctr"/>
+            <a:r>
+              <a:rPr lang="zh-TW" sz="1500" dirty="0">
+                <a:solidFill>
+                  <a:schemeClr val="accent5"/>
+                </a:solidFill>
+                <a:latin typeface="Microsoft JhengHei"/>
+                <a:ea typeface="Microsoft JhengHei"/>
+                <a:cs typeface="Microsoft JhengHei"/>
+              </a:rPr>
+              <a:t>訓練案例庫</a:t>
+            </a:r>
+          </a:p>
+        </p:txBody>
+      </p:sp>
+      <p:sp>
+        <p:nvSpPr>
+          <p:cNvPr id="56" name="Freeform 56"/>
+          <p:cNvSpPr/>
+          <p:nvPr/>
+        </p:nvSpPr>
+        <p:spPr>
+          <a:xfrm>
+            <a:off x="3619500" y="5372100"/>
+            <a:ext cx="9525" cy="114300"/>
+          </a:xfrm>
+          <a:custGeom>
+            <a:avLst/>
+            <a:gdLst/>
+            <a:ahLst/>
+            <a:cxnLst/>
+            <a:rect l="l" t="t" r="r" b="b"/>
+            <a:pathLst>
+              <a:path w="9525" h="114300">
+                <a:moveTo>
+                  <a:pt x="0" y="114300"/>
+                </a:moveTo>
+                <a:lnTo>
+                  <a:pt x="0" y="0"/>
+                </a:lnTo>
+              </a:path>
+            </a:pathLst>
+          </a:custGeom>
+          <a:noFill/>
+          <a:ln w="19050">
+            <a:solidFill>
+              <a:srgbClr val="6B6B6B"/>
+            </a:solidFill>
+            <a:custDash>
+              <a:ds d="250000" sp="200000"/>
+            </a:custDash>
+          </a:ln>
+        </p:spPr>
+      </p:sp>
+      <p:sp>
+        <p:nvSpPr>
+          <p:cNvPr id="57" name="Freeform 57"/>
+          <p:cNvSpPr/>
+          <p:nvPr/>
+        </p:nvSpPr>
+        <p:spPr>
+          <a:xfrm>
+            <a:off x="3571875" y="5372100"/>
+            <a:ext cx="95250" cy="66675"/>
+          </a:xfrm>
+          <a:custGeom>
+            <a:avLst/>
+            <a:gdLst/>
+            <a:ahLst/>
+            <a:cxnLst/>
+            <a:rect l="l" t="t" r="r" b="b"/>
+            <a:pathLst>
+              <a:path w="95250" h="66675">
+                <a:moveTo>
+                  <a:pt x="0" y="66675"/>
+                </a:moveTo>
+                <a:lnTo>
+                  <a:pt x="47625" y="0"/>
+                </a:lnTo>
+                <a:lnTo>
+                  <a:pt x="95250" y="66675"/>
+                </a:lnTo>
+              </a:path>
+            </a:pathLst>
+          </a:custGeom>
+          <a:noFill/>
+          <a:ln w="19050">
+            <a:solidFill>
+              <a:srgbClr val="6B6B6B"/>
+            </a:solidFill>
+          </a:ln>
+        </p:spPr>
+      </p:sp>
+      <p:sp>
+        <p:nvSpPr>
+          <p:cNvPr id="58" name="TextBox 58"/>
+          <p:cNvSpPr txBox="1"/>
+          <p:nvPr/>
+        </p:nvSpPr>
+        <p:spPr>
+          <a:xfrm>
+            <a:off x="5269230" y="5486400"/>
+            <a:ext cx="1630680" cy="293370"/>
+          </a:xfrm>
+          <a:prstGeom prst="rect">
+            <a:avLst/>
+          </a:prstGeom>
+          <a:noFill/>
+          <a:ln>
+            <a:noFill/>
+          </a:ln>
+        </p:spPr>
+        <p:txBody>
+          <a:bodyPr wrap="none" lIns="0" tIns="0" rIns="0" bIns="0" anchor="t" anchorCtr="0">
+            <a:spAutoFit/>
+          </a:bodyPr>
+          <a:lstStyle/>
+          <a:p>
+            <a:pPr algn="l"/>
+            <a:r>
+              <a:rPr lang="zh-TW" sz="1500" dirty="0">
+                <a:solidFill>
+                  <a:schemeClr val="accent5"/>
+                </a:solidFill>
+                <a:latin typeface="Microsoft JhengHei"/>
+                <a:ea typeface="Microsoft JhengHei"/>
+                <a:cs typeface="Microsoft JhengHei"/>
+              </a:rPr>
+              <a:t>稽核保留正式分類</a:t>
+            </a:r>
+          </a:p>
+        </p:txBody>
+      </p:sp>
+      <p:sp>
+        <p:nvSpPr>
+          <p:cNvPr id="59" name="Rectangle 59"/>
+          <p:cNvSpPr/>
+          <p:nvPr/>
+        </p:nvSpPr>
+        <p:spPr>
+          <a:xfrm>
+            <a:off x="8382000" y="4038600"/>
+            <a:ext cx="3657600" cy="1771650"/>
           </a:xfrm>
           <a:prstGeom prst="roundRect">
             <a:avLst>
-              <a:gd name="adj" fmla="val 2712"/>
+              <a:gd name="adj" fmla="val 4301"/>
             </a:avLst>
           </a:prstGeom>
           <a:solidFill>
@@ -2808,89 +3731,9 @@
           </a:ln>
         </p:spPr>
       </p:sp>
-      <p:sp>
-        <p:nvSpPr>
-          <p:cNvPr id="35" name="TextBox 35"/>
-          <p:cNvSpPr txBox="1"/>
-          <p:nvPr/>
-        </p:nvSpPr>
-        <p:spPr>
-          <a:xfrm>
-            <a:off x="9354693" y="1742567"/>
-            <a:ext cx="145040" cy="322707"/>
-          </a:xfrm>
-          <a:prstGeom prst="rect">
-            <a:avLst/>
-          </a:prstGeom>
-          <a:noFill/>
-          <a:ln>
-            <a:noFill/>
-          </a:ln>
-        </p:spPr>
-        <p:txBody>
-          <a:bodyPr wrap="none" lIns="0" tIns="0" rIns="0" bIns="0" anchor="t" anchorCtr="0">
-            <a:spAutoFit/>
-          </a:bodyPr>
-          <a:lstStyle/>
-          <a:p>
-            <a:pPr algn="l"/>
-            <a:r>
-              <a:rPr lang="en-US" sz="1650" b="1" dirty="0">
-                <a:solidFill>
-                  <a:schemeClr val="accent1"/>
-                </a:solidFill>
-                <a:latin typeface="Microsoft JhengHei"/>
-                <a:ea typeface="Microsoft JhengHei"/>
-                <a:cs typeface="Microsoft JhengHei"/>
-              </a:rPr>
-              <a:t>d</a:t>
-            </a:r>
-          </a:p>
-        </p:txBody>
-      </p:sp>
-      <p:sp>
-        <p:nvSpPr>
-          <p:cNvPr id="36" name="TextBox 36"/>
-          <p:cNvSpPr txBox="1"/>
-          <p:nvPr/>
-        </p:nvSpPr>
-        <p:spPr>
-          <a:xfrm>
-            <a:off x="9640062" y="1729867"/>
-            <a:ext cx="1638351" cy="337376"/>
-          </a:xfrm>
-          <a:prstGeom prst="rect">
-            <a:avLst/>
-          </a:prstGeom>
-          <a:noFill/>
-          <a:ln>
-            <a:noFill/>
-          </a:ln>
-        </p:spPr>
-        <p:txBody>
-          <a:bodyPr wrap="none" lIns="0" tIns="0" rIns="0" bIns="0" anchor="t" anchorCtr="0">
-            <a:spAutoFit/>
-          </a:bodyPr>
-          <a:lstStyle/>
-          <a:p>
-            <a:pPr algn="l"/>
-            <a:r>
-              <a:rPr lang="zh-TW" sz="1720" b="1" dirty="0">
-                <a:solidFill>
-                  <a:schemeClr val="dk1"/>
-                </a:solidFill>
-                <a:latin typeface="Microsoft JhengHei"/>
-                <a:ea typeface="Microsoft JhengHei"/>
-                <a:cs typeface="Microsoft JhengHei"/>
-              </a:rPr>
-              <a:t>受控處置與回復</a:t>
-            </a:r>
-          </a:p>
-        </p:txBody>
-      </p:sp>
       <p:pic>
         <p:nvPicPr>
-          <p:cNvPr id="37" name="Image 37"/>
+          <p:cNvPr id="60" name="Image 60"/>
           <p:cNvPicPr>
             <a:picLocks noChangeAspect="1"/>
           </p:cNvPicPr>
@@ -2904,8 +3747,8 @@
         </p:blipFill>
         <p:spPr>
           <a:xfrm>
-            <a:off x="10136505" y="2064639"/>
-            <a:ext cx="891540" cy="891540"/>
+            <a:off x="8553450" y="4086225"/>
+            <a:ext cx="342900" cy="342900"/>
           </a:xfrm>
           <a:prstGeom prst="rect">
             <a:avLst/>
@@ -2914,32 +3757,72 @@
       </p:pic>
       <p:sp>
         <p:nvSpPr>
-          <p:cNvPr id="38" name="TextBox 38"/>
-          <p:cNvSpPr txBox="1"/>
-          <p:nvPr/>
-        </p:nvSpPr>
-        <p:spPr>
-          <a:xfrm>
-            <a:off x="9335643" y="3094736"/>
-            <a:ext cx="2460117" cy="322707"/>
-          </a:xfrm>
-          <a:prstGeom prst="rect">
-            <a:avLst/>
-          </a:prstGeom>
-          <a:noFill/>
-          <a:ln>
-            <a:noFill/>
-          </a:ln>
-        </p:spPr>
-        <p:txBody>
-          <a:bodyPr wrap="none" lIns="0" tIns="0" rIns="0" bIns="0" anchor="t" anchorCtr="0">
-            <a:spAutoFit/>
-          </a:bodyPr>
-          <a:lstStyle/>
-          <a:p>
-            <a:pPr algn="l"/>
-            <a:r>
-              <a:rPr lang="zh-TW" sz="1650" dirty="0">
+          <p:cNvPr id="61" name="TextBox 61"/>
+          <p:cNvSpPr txBox="1"/>
+          <p:nvPr/>
+        </p:nvSpPr>
+        <p:spPr>
+          <a:xfrm>
+            <a:off x="8982456" y="4127500"/>
+            <a:ext cx="1930767" cy="352044"/>
+          </a:xfrm>
+          <a:prstGeom prst="rect">
+            <a:avLst/>
+          </a:prstGeom>
+          <a:noFill/>
+          <a:ln>
+            <a:noFill/>
+          </a:ln>
+        </p:spPr>
+        <p:txBody>
+          <a:bodyPr wrap="none" lIns="0" tIns="0" rIns="0" bIns="0" anchor="t" anchorCtr="0">
+            <a:spAutoFit/>
+          </a:bodyPr>
+          <a:lstStyle/>
+          <a:p>
+            <a:pPr algn="l"/>
+            <a:r>
+              <a:rPr lang="zh-TW" sz="1800" b="1" dirty="0">
+                <a:solidFill>
+                  <a:schemeClr val="accent1"/>
+                </a:solidFill>
+                <a:latin typeface="Microsoft JhengHei"/>
+                <a:ea typeface="Microsoft JhengHei"/>
+                <a:cs typeface="Microsoft JhengHei"/>
+              </a:rPr>
+              <a:t>d 受控處置與回復</a:t>
+            </a:r>
+          </a:p>
+        </p:txBody>
+      </p:sp>
+      <p:sp>
+        <p:nvSpPr>
+          <p:cNvPr id="62" name="TextBox 62"/>
+          <p:cNvSpPr txBox="1"/>
+          <p:nvPr/>
+        </p:nvSpPr>
+        <p:spPr>
+          <a:xfrm>
+            <a:off x="8601456" y="4603750"/>
+            <a:ext cx="1750847" cy="352044"/>
+          </a:xfrm>
+          <a:prstGeom prst="rect">
+            <a:avLst/>
+          </a:prstGeom>
+          <a:noFill/>
+          <a:ln>
+            <a:noFill/>
+          </a:ln>
+        </p:spPr>
+        <p:txBody>
+          <a:bodyPr wrap="none" lIns="0" tIns="0" rIns="0" bIns="0" anchor="t" anchorCtr="0">
+            <a:spAutoFit/>
+          </a:bodyPr>
+          <a:lstStyle/>
+          <a:p>
+            <a:pPr algn="l"/>
+            <a:r>
+              <a:rPr lang="zh-TW" sz="1800" dirty="0">
                 <a:solidFill>
                   <a:schemeClr val="dk1"/>
                 </a:solidFill>
@@ -2947,39 +3830,39 @@
                 <a:ea typeface="Microsoft JhengHei"/>
                 <a:cs typeface="Microsoft JhengHei"/>
               </a:rPr>
-              <a:t>策略閘門檢查範圍與期限</a:t>
-            </a:r>
-          </a:p>
-        </p:txBody>
-      </p:sp>
-      <p:sp>
-        <p:nvSpPr>
-          <p:cNvPr id="39" name="TextBox 39"/>
-          <p:cNvSpPr txBox="1"/>
-          <p:nvPr/>
-        </p:nvSpPr>
-        <p:spPr>
-          <a:xfrm>
-            <a:off x="9335643" y="3391916"/>
-            <a:ext cx="2304631" cy="322707"/>
-          </a:xfrm>
-          <a:prstGeom prst="rect">
-            <a:avLst/>
-          </a:prstGeom>
-          <a:noFill/>
-          <a:ln>
-            <a:noFill/>
-          </a:ln>
-        </p:spPr>
-        <p:txBody>
-          <a:bodyPr wrap="none" lIns="0" tIns="0" rIns="0" bIns="0" anchor="t" anchorCtr="0">
-            <a:spAutoFit/>
-          </a:bodyPr>
-          <a:lstStyle/>
-          <a:p>
-            <a:pPr algn="l"/>
-            <a:r>
-              <a:rPr lang="zh-TW" sz="1650" dirty="0">
+              <a:t>策略檢查 → 套用</a:t>
+            </a:r>
+          </a:p>
+        </p:txBody>
+      </p:sp>
+      <p:sp>
+        <p:nvSpPr>
+          <p:cNvPr id="63" name="TextBox 63"/>
+          <p:cNvSpPr txBox="1"/>
+          <p:nvPr/>
+        </p:nvSpPr>
+        <p:spPr>
+          <a:xfrm>
+            <a:off x="8601456" y="4956175"/>
+            <a:ext cx="1750847" cy="352044"/>
+          </a:xfrm>
+          <a:prstGeom prst="rect">
+            <a:avLst/>
+          </a:prstGeom>
+          <a:noFill/>
+          <a:ln>
+            <a:noFill/>
+          </a:ln>
+        </p:spPr>
+        <p:txBody>
+          <a:bodyPr wrap="none" lIns="0" tIns="0" rIns="0" bIns="0" anchor="t" anchorCtr="0">
+            <a:spAutoFit/>
+          </a:bodyPr>
+          <a:lstStyle/>
+          <a:p>
+            <a:pPr algn="l"/>
+            <a:r>
+              <a:rPr lang="zh-TW" sz="1800" dirty="0">
                 <a:solidFill>
                   <a:schemeClr val="dk1"/>
                 </a:solidFill>
@@ -2987,125 +3870,61 @@
                 <a:ea typeface="Microsoft JhengHei"/>
                 <a:cs typeface="Microsoft JhengHei"/>
               </a:rPr>
-              <a:t>套用 → 讀回 → 到期撤銷</a:t>
-            </a:r>
-          </a:p>
-        </p:txBody>
-      </p:sp>
-      <p:sp>
-        <p:nvSpPr>
-          <p:cNvPr id="40" name="Rectangle 40"/>
+              <a:t>讀回 → 到期撤銷</a:t>
+            </a:r>
+          </a:p>
+        </p:txBody>
+      </p:sp>
+      <p:sp>
+        <p:nvSpPr>
+          <p:cNvPr id="64" name="TextBox 64"/>
+          <p:cNvSpPr txBox="1"/>
+          <p:nvPr/>
+        </p:nvSpPr>
+        <p:spPr>
+          <a:xfrm>
+            <a:off x="8602980" y="5457825"/>
+            <a:ext cx="1862900" cy="293370"/>
+          </a:xfrm>
+          <a:prstGeom prst="rect">
+            <a:avLst/>
+          </a:prstGeom>
+          <a:noFill/>
+          <a:ln>
+            <a:noFill/>
+          </a:ln>
+        </p:spPr>
+        <p:txBody>
+          <a:bodyPr wrap="none" lIns="0" tIns="0" rIns="0" bIns="0" anchor="t" anchorCtr="0">
+            <a:spAutoFit/>
+          </a:bodyPr>
+          <a:lstStyle/>
+          <a:p>
+            <a:pPr algn="l"/>
+            <a:r>
+              <a:rPr lang="zh-TW" sz="1500" dirty="0">
+                <a:solidFill>
+                  <a:schemeClr val="accent5"/>
+                </a:solidFill>
+                <a:latin typeface="Microsoft JhengHei"/>
+                <a:ea typeface="Microsoft JhengHei"/>
+                <a:cs typeface="Microsoft JhengHei"/>
+              </a:rPr>
+              <a:t>複核／不確定 → 蒐證</a:t>
+            </a:r>
+          </a:p>
+        </p:txBody>
+      </p:sp>
+      <p:sp>
+        <p:nvSpPr>
+          <p:cNvPr id="65" name="Freeform 65"/>
           <p:cNvSpPr/>
           <p:nvPr/>
         </p:nvSpPr>
         <p:spPr>
           <a:xfrm>
-            <a:off x="9324975" y="3862578"/>
-            <a:ext cx="2543175" cy="1188720"/>
-          </a:xfrm>
-          <a:prstGeom prst="roundRect">
-            <a:avLst>
-              <a:gd name="adj" fmla="val 6410"/>
-            </a:avLst>
-          </a:prstGeom>
-          <a:solidFill>
-            <a:schemeClr val="lt1"/>
-          </a:solidFill>
-          <a:ln>
-            <a:noFill/>
-          </a:ln>
-        </p:spPr>
-      </p:sp>
-      <p:sp>
-        <p:nvSpPr>
-          <p:cNvPr id="41" name="TextBox 41"/>
-          <p:cNvSpPr txBox="1"/>
-          <p:nvPr/>
-        </p:nvSpPr>
-        <p:spPr>
-          <a:xfrm>
-            <a:off x="9422130" y="3998976"/>
-            <a:ext cx="2034540" cy="293370"/>
-          </a:xfrm>
-          <a:prstGeom prst="rect">
-            <a:avLst/>
-          </a:prstGeom>
-          <a:noFill/>
-          <a:ln>
-            <a:noFill/>
-          </a:ln>
-        </p:spPr>
-        <p:txBody>
-          <a:bodyPr wrap="none" lIns="0" tIns="0" rIns="0" bIns="0" anchor="t" anchorCtr="0">
-            <a:spAutoFit/>
-          </a:bodyPr>
-          <a:lstStyle/>
-          <a:p>
-            <a:pPr algn="l"/>
-            <a:r>
-              <a:rPr lang="zh-TW" sz="1500" dirty="0">
-                <a:solidFill>
-                  <a:schemeClr val="dk1"/>
-                </a:solidFill>
-                <a:latin typeface="Microsoft JhengHei"/>
-                <a:ea typeface="Microsoft JhengHei"/>
-                <a:cs typeface="Microsoft JhengHei"/>
-              </a:rPr>
-              <a:t>輸出：處置與回復回條</a:t>
-            </a:r>
-          </a:p>
-        </p:txBody>
-      </p:sp>
-      <p:sp>
-        <p:nvSpPr>
-          <p:cNvPr id="42" name="TextBox 42"/>
-          <p:cNvSpPr txBox="1"/>
-          <p:nvPr/>
-        </p:nvSpPr>
-        <p:spPr>
-          <a:xfrm>
-            <a:off x="9422130" y="4355592"/>
-            <a:ext cx="1630680" cy="293370"/>
-          </a:xfrm>
-          <a:prstGeom prst="rect">
-            <a:avLst/>
-          </a:prstGeom>
-          <a:noFill/>
-          <a:ln>
-            <a:noFill/>
-          </a:ln>
-        </p:spPr>
-        <p:txBody>
-          <a:bodyPr wrap="none" lIns="0" tIns="0" rIns="0" bIns="0" anchor="t" anchorCtr="0">
-            <a:spAutoFit/>
-          </a:bodyPr>
-          <a:lstStyle/>
-          <a:p>
-            <a:pPr algn="l"/>
-            <a:r>
-              <a:rPr lang="zh-TW" sz="1500" dirty="0">
-                <a:solidFill>
-                  <a:schemeClr val="dk1"/>
-                </a:solidFill>
-                <a:latin typeface="Microsoft JhengHei"/>
-                <a:ea typeface="Microsoft JhengHei"/>
-                <a:cs typeface="Microsoft JhengHei"/>
-              </a:rPr>
-              <a:t>複核事件保留蒐證</a:t>
-            </a:r>
-          </a:p>
-        </p:txBody>
-      </p:sp>
-      <p:sp>
-        <p:nvSpPr>
-          <p:cNvPr id="43" name="Freeform 43"/>
-          <p:cNvSpPr/>
-          <p:nvPr/>
-        </p:nvSpPr>
-        <p:spPr>
-          <a:xfrm>
-            <a:off x="1571625" y="5333619"/>
-            <a:ext cx="9001125" cy="289750"/>
+            <a:off x="7924800" y="4981575"/>
+            <a:ext cx="457200" cy="9525"/>
           </a:xfrm>
           <a:custGeom>
             <a:avLst/>
@@ -3114,18 +3933,12 @@
             <a:cxnLst/>
             <a:rect l="l" t="t" r="r" b="b"/>
             <a:pathLst>
-              <a:path w="9001125" h="289750">
+              <a:path w="457200" h="9525">
                 <a:moveTo>
-                  <a:pt x="9001125" y="0"/>
+                  <a:pt x="0" y="0"/>
                 </a:moveTo>
                 <a:lnTo>
-                  <a:pt x="9001125" y="289750"/>
-                </a:lnTo>
-                <a:lnTo>
-                  <a:pt x="0" y="289750"/>
-                </a:lnTo>
-                <a:lnTo>
-                  <a:pt x="0" y="0"/>
+                  <a:pt x="457200" y="0"/>
                 </a:lnTo>
               </a:path>
             </a:pathLst>
@@ -3133,24 +3946,86 @@
           <a:noFill/>
           <a:ln w="19050">
             <a:solidFill>
-              <a:srgbClr val="6B6B6B"/>
+              <a:schemeClr val="accent1"/>
             </a:solidFill>
-            <a:custDash>
-              <a:ds d="350000" sp="250000"/>
-            </a:custDash>
-          </a:ln>
-        </p:spPr>
-      </p:sp>
-      <p:sp>
-        <p:nvSpPr>
-          <p:cNvPr id="44" name="TextBox 44"/>
-          <p:cNvSpPr txBox="1"/>
-          <p:nvPr/>
-        </p:nvSpPr>
-        <p:spPr>
-          <a:xfrm>
-            <a:off x="3807295" y="5687632"/>
-            <a:ext cx="4577410" cy="322707"/>
+          </a:ln>
+        </p:spPr>
+      </p:sp>
+      <p:sp>
+        <p:nvSpPr>
+          <p:cNvPr id="66" name="Freeform 66"/>
+          <p:cNvSpPr/>
+          <p:nvPr/>
+        </p:nvSpPr>
+        <p:spPr>
+          <a:xfrm>
+            <a:off x="8315325" y="4933950"/>
+            <a:ext cx="66675" cy="95250"/>
+          </a:xfrm>
+          <a:custGeom>
+            <a:avLst/>
+            <a:gdLst/>
+            <a:ahLst/>
+            <a:cxnLst/>
+            <a:rect l="l" t="t" r="r" b="b"/>
+            <a:pathLst>
+              <a:path w="66675" h="95250">
+                <a:moveTo>
+                  <a:pt x="0" y="0"/>
+                </a:moveTo>
+                <a:lnTo>
+                  <a:pt x="66675" y="47625"/>
+                </a:lnTo>
+                <a:lnTo>
+                  <a:pt x="0" y="95250"/>
+                </a:lnTo>
+              </a:path>
+            </a:pathLst>
+          </a:custGeom>
+          <a:noFill/>
+          <a:ln w="19050">
+            <a:solidFill>
+              <a:schemeClr val="accent1"/>
+            </a:solidFill>
+          </a:ln>
+        </p:spPr>
+      </p:sp>
+      <p:sp>
+        <p:nvSpPr>
+          <p:cNvPr id="67" name="Rectangle 67"/>
+          <p:cNvSpPr/>
+          <p:nvPr/>
+        </p:nvSpPr>
+        <p:spPr>
+          <a:xfrm>
+            <a:off x="152400" y="5962650"/>
+            <a:ext cx="11887200" cy="361950"/>
+          </a:xfrm>
+          <a:prstGeom prst="roundRect">
+            <a:avLst>
+              <a:gd name="adj" fmla="val 21053"/>
+            </a:avLst>
+          </a:prstGeom>
+          <a:solidFill>
+            <a:srgbClr val="F5F7FA"/>
+          </a:solidFill>
+          <a:ln w="9525">
+            <a:solidFill>
+              <a:schemeClr val="accent6"/>
+            </a:solidFill>
+          </a:ln>
+        </p:spPr>
+      </p:sp>
+      <p:sp>
+        <p:nvSpPr>
+          <p:cNvPr id="68" name="TextBox 68"/>
+          <p:cNvSpPr txBox="1"/>
+          <p:nvPr/>
+        </p:nvSpPr>
+        <p:spPr>
+          <a:xfrm>
+            <a:off x="2918174" y="6007100"/>
+            <a:ext cx="6355652" cy="322707"/>
           </a:xfrm>
           <a:prstGeom prst="rect">
             <a:avLst/>
@@ -3176,14 +4051,14 @@
                 <a:ea typeface="Microsoft JhengHei"/>
                 <a:cs typeface="Microsoft JhengHei"/>
               </a:rPr>
-              <a:t>同一事件 ID 串接偵測、證據、稽核與處置回條</a:t>
-            </a:r>
-          </a:p>
-        </p:txBody>
-      </p:sp>
-      <p:sp>
-        <p:nvSpPr>
-          <p:cNvPr id="45" name="TextBox 45"/>
+              <a:t>共用事件 ID：正式判定｜Top-5 證據｜AI 稽核｜處置與回復回條</a:t>
+            </a:r>
+          </a:p>
+        </p:txBody>
+      </p:sp>
+      <p:sp>
+        <p:nvSpPr>
+          <p:cNvPr id="69" name="TextBox 69"/>
           <p:cNvSpPr txBox="1"/>
           <p:nvPr/>
         </p:nvSpPr>
@@ -3223,7 +4098,7 @@
       </p:sp>
       <p:sp>
         <p:nvSpPr>
-          <p:cNvPr id="46" name="TextBox 46"/>
+          <p:cNvPr id="70" name="TextBox 70"/>
           <p:cNvSpPr txBox="1"/>
           <p:nvPr/>
         </p:nvSpPr>
@@ -3326,7 +4201,7 @@
             <a:r>
               <a:rPr lang="en-US" sz="1200" b="1" dirty="0">
                 <a:solidFill>
-                  <a:schemeClr val="accent1"/>
+                  <a:schemeClr val="accent2"/>
                 </a:solidFill>
                 <a:latin typeface="Microsoft JhengHei"/>
                 <a:ea typeface="Microsoft JhengHei"/>
@@ -3377,9 +4252,33 @@
           </a:p>
         </p:txBody>
       </p:sp>
+      <p:sp>
+        <p:nvSpPr>
+          <p:cNvPr id="4" name="Rectangle 4"/>
+          <p:cNvSpPr/>
+          <p:nvPr/>
+        </p:nvSpPr>
+        <p:spPr>
+          <a:xfrm>
+            <a:off x="609600" y="2095500"/>
+            <a:ext cx="2000250" cy="2095500"/>
+          </a:xfrm>
+          <a:prstGeom prst="roundRect">
+            <a:avLst>
+              <a:gd name="adj" fmla="val 3810"/>
+            </a:avLst>
+          </a:prstGeom>
+          <a:solidFill>
+            <a:schemeClr val="accent3"/>
+          </a:solidFill>
+          <a:ln>
+            <a:noFill/>
+          </a:ln>
+        </p:spPr>
+      </p:sp>
       <p:pic>
         <p:nvPicPr>
-          <p:cNvPr id="4" name="Image 4"/>
+          <p:cNvPr id="5" name="Image 5"/>
           <p:cNvPicPr>
             <a:picLocks noChangeAspect="1"/>
           </p:cNvPicPr>
@@ -3393,8 +4292,8 @@
         </p:blipFill>
         <p:spPr>
           <a:xfrm>
-            <a:off x="1276350" y="1714500"/>
-            <a:ext cx="1905000" cy="1905000"/>
+            <a:off x="1085850" y="2257425"/>
+            <a:ext cx="1047750" cy="1047750"/>
           </a:xfrm>
           <a:prstGeom prst="rect">
             <a:avLst/>
@@ -3403,14 +4302,415 @@
       </p:pic>
       <p:sp>
         <p:nvSpPr>
-          <p:cNvPr id="5" name="TextBox 5"/>
-          <p:cNvSpPr txBox="1"/>
-          <p:nvPr/>
-        </p:nvSpPr>
-        <p:spPr>
-          <a:xfrm>
-            <a:off x="598170" y="3911600"/>
-            <a:ext cx="1537335" cy="440055"/>
+          <p:cNvPr id="6" name="TextBox 6"/>
+          <p:cNvSpPr txBox="1"/>
+          <p:nvPr/>
+        </p:nvSpPr>
+        <p:spPr>
+          <a:xfrm>
+            <a:off x="895731" y="3546475"/>
+            <a:ext cx="1472184" cy="352044"/>
+          </a:xfrm>
+          <a:prstGeom prst="rect">
+            <a:avLst/>
+          </a:prstGeom>
+          <a:noFill/>
+          <a:ln>
+            <a:noFill/>
+          </a:ln>
+        </p:spPr>
+        <p:txBody>
+          <a:bodyPr wrap="none" lIns="0" tIns="0" rIns="0" bIns="0" anchor="t" anchorCtr="0">
+            <a:spAutoFit/>
+          </a:bodyPr>
+          <a:lstStyle/>
+          <a:p>
+            <a:pPr algn="l"/>
+            <a:r>
+              <a:rPr lang="zh-TW" sz="1800" dirty="0">
+                <a:solidFill>
+                  <a:srgbClr val="FFFFFF"/>
+                </a:solidFill>
+                <a:latin typeface="Microsoft JhengHei"/>
+                <a:ea typeface="Microsoft JhengHei"/>
+                <a:cs typeface="Microsoft JhengHei"/>
+              </a:rPr>
+              <a:t>同一流量輸入</a:t>
+            </a:r>
+          </a:p>
+        </p:txBody>
+      </p:sp>
+      <p:sp>
+        <p:nvSpPr>
+          <p:cNvPr id="7" name="Rectangle 7"/>
+          <p:cNvSpPr/>
+          <p:nvPr/>
+        </p:nvSpPr>
+        <p:spPr>
+          <a:xfrm>
+            <a:off x="3524250" y="1809750"/>
+            <a:ext cx="3238500" cy="1238250"/>
+          </a:xfrm>
+          <a:prstGeom prst="roundRect">
+            <a:avLst>
+              <a:gd name="adj" fmla="val 6154"/>
+            </a:avLst>
+          </a:prstGeom>
+          <a:solidFill>
+            <a:schemeClr val="accent3"/>
+          </a:solidFill>
+          <a:ln>
+            <a:noFill/>
+          </a:ln>
+        </p:spPr>
+      </p:sp>
+      <p:sp>
+        <p:nvSpPr>
+          <p:cNvPr id="8" name="TextBox 8"/>
+          <p:cNvSpPr txBox="1"/>
+          <p:nvPr/>
+        </p:nvSpPr>
+        <p:spPr>
+          <a:xfrm>
+            <a:off x="3779520" y="1958975"/>
+            <a:ext cx="829361" cy="440055"/>
+          </a:xfrm>
+          <a:prstGeom prst="rect">
+            <a:avLst/>
+          </a:prstGeom>
+          <a:noFill/>
+          <a:ln>
+            <a:noFill/>
+          </a:ln>
+        </p:spPr>
+        <p:txBody>
+          <a:bodyPr wrap="none" lIns="0" tIns="0" rIns="0" bIns="0" anchor="t" anchorCtr="0">
+            <a:spAutoFit/>
+          </a:bodyPr>
+          <a:lstStyle/>
+          <a:p>
+            <a:pPr algn="l"/>
+            <a:r>
+              <a:rPr lang="en-US" sz="2250" b="1" dirty="0">
+                <a:solidFill>
+                  <a:srgbClr val="FFFFFF"/>
+                </a:solidFill>
+                <a:latin typeface="Microsoft JhengHei"/>
+                <a:ea typeface="Microsoft JhengHei"/>
+                <a:cs typeface="Microsoft JhengHei"/>
+              </a:rPr>
+              <a:t>CTBM</a:t>
+            </a:r>
+          </a:p>
+        </p:txBody>
+      </p:sp>
+      <p:sp>
+        <p:nvSpPr>
+          <p:cNvPr id="9" name="TextBox 9"/>
+          <p:cNvSpPr txBox="1"/>
+          <p:nvPr/>
+        </p:nvSpPr>
+        <p:spPr>
+          <a:xfrm>
+            <a:off x="3781806" y="2470150"/>
+            <a:ext cx="2199132" cy="352044"/>
+          </a:xfrm>
+          <a:prstGeom prst="rect">
+            <a:avLst/>
+          </a:prstGeom>
+          <a:noFill/>
+          <a:ln>
+            <a:noFill/>
+          </a:ln>
+        </p:spPr>
+        <p:txBody>
+          <a:bodyPr wrap="none" lIns="0" tIns="0" rIns="0" bIns="0" anchor="t" anchorCtr="0">
+            <a:spAutoFit/>
+          </a:bodyPr>
+          <a:lstStyle/>
+          <a:p>
+            <a:pPr algn="l"/>
+            <a:r>
+              <a:rPr lang="ja-JP" sz="1800" dirty="0">
+                <a:solidFill>
+                  <a:schemeClr val="accent6"/>
+                </a:solidFill>
+                <a:latin typeface="Microsoft JhengHei"/>
+                <a:ea typeface="Microsoft JhengHei"/>
+                <a:cs typeface="Microsoft JhengHei"/>
+              </a:rPr>
+              <a:t>內容・時間差・方向</a:t>
+            </a:r>
+          </a:p>
+        </p:txBody>
+      </p:sp>
+      <p:sp>
+        <p:nvSpPr>
+          <p:cNvPr id="10" name="Rectangle 10"/>
+          <p:cNvSpPr/>
+          <p:nvPr/>
+        </p:nvSpPr>
+        <p:spPr>
+          <a:xfrm>
+            <a:off x="3524250" y="3524250"/>
+            <a:ext cx="3238500" cy="1238250"/>
+          </a:xfrm>
+          <a:prstGeom prst="roundRect">
+            <a:avLst>
+              <a:gd name="adj" fmla="val 6154"/>
+            </a:avLst>
+          </a:prstGeom>
+          <a:solidFill>
+            <a:schemeClr val="accent3"/>
+          </a:solidFill>
+          <a:ln>
+            <a:noFill/>
+          </a:ln>
+        </p:spPr>
+      </p:sp>
+      <p:sp>
+        <p:nvSpPr>
+          <p:cNvPr id="11" name="TextBox 11"/>
+          <p:cNvSpPr txBox="1"/>
+          <p:nvPr/>
+        </p:nvSpPr>
+        <p:spPr>
+          <a:xfrm>
+            <a:off x="3779520" y="3673475"/>
+            <a:ext cx="946976" cy="440055"/>
+          </a:xfrm>
+          <a:prstGeom prst="rect">
+            <a:avLst/>
+          </a:prstGeom>
+          <a:noFill/>
+          <a:ln>
+            <a:noFill/>
+          </a:ln>
+        </p:spPr>
+        <p:txBody>
+          <a:bodyPr wrap="none" lIns="0" tIns="0" rIns="0" bIns="0" anchor="t" anchorCtr="0">
+            <a:spAutoFit/>
+          </a:bodyPr>
+          <a:lstStyle/>
+          <a:p>
+            <a:pPr algn="l"/>
+            <a:r>
+              <a:rPr lang="en-US" sz="2250" b="1" dirty="0">
+                <a:solidFill>
+                  <a:srgbClr val="FFFFFF"/>
+                </a:solidFill>
+                <a:latin typeface="Microsoft JhengHei"/>
+                <a:ea typeface="Microsoft JhengHei"/>
+                <a:cs typeface="Microsoft JhengHei"/>
+              </a:rPr>
+              <a:t>PBCNN</a:t>
+            </a:r>
+          </a:p>
+        </p:txBody>
+      </p:sp>
+      <p:sp>
+        <p:nvSpPr>
+          <p:cNvPr id="12" name="TextBox 12"/>
+          <p:cNvSpPr txBox="1"/>
+          <p:nvPr/>
+        </p:nvSpPr>
+        <p:spPr>
+          <a:xfrm>
+            <a:off x="3781806" y="4184650"/>
+            <a:ext cx="1714500" cy="352044"/>
+          </a:xfrm>
+          <a:prstGeom prst="rect">
+            <a:avLst/>
+          </a:prstGeom>
+          <a:noFill/>
+          <a:ln>
+            <a:noFill/>
+          </a:ln>
+        </p:spPr>
+        <p:txBody>
+          <a:bodyPr wrap="none" lIns="0" tIns="0" rIns="0" bIns="0" anchor="t" anchorCtr="0">
+            <a:spAutoFit/>
+          </a:bodyPr>
+          <a:lstStyle/>
+          <a:p>
+            <a:pPr algn="l"/>
+            <a:r>
+              <a:rPr lang="zh-TW" sz="1800" dirty="0">
+                <a:solidFill>
+                  <a:schemeClr val="accent6"/>
+                </a:solidFill>
+                <a:latin typeface="Microsoft JhengHei"/>
+                <a:ea typeface="Microsoft JhengHei"/>
+                <a:cs typeface="Microsoft JhengHei"/>
+              </a:rPr>
+              <a:t>短窗位元組模式</a:t>
+            </a:r>
+          </a:p>
+        </p:txBody>
+      </p:sp>
+      <p:sp>
+        <p:nvSpPr>
+          <p:cNvPr id="13" name="Freeform 13"/>
+          <p:cNvSpPr/>
+          <p:nvPr/>
+        </p:nvSpPr>
+        <p:spPr>
+          <a:xfrm>
+            <a:off x="2609850" y="2428875"/>
+            <a:ext cx="5676900" cy="1714500"/>
+          </a:xfrm>
+          <a:custGeom>
+            <a:avLst/>
+            <a:gdLst/>
+            <a:ahLst/>
+            <a:cxnLst/>
+            <a:rect l="l" t="t" r="r" b="b"/>
+            <a:pathLst>
+              <a:path w="5676900" h="1714500">
+                <a:moveTo>
+                  <a:pt x="0" y="714375"/>
+                </a:moveTo>
+                <a:lnTo>
+                  <a:pt x="457200" y="714375"/>
+                </a:lnTo>
+                <a:lnTo>
+                  <a:pt x="457200" y="0"/>
+                </a:lnTo>
+                <a:lnTo>
+                  <a:pt x="914400" y="0"/>
+                </a:lnTo>
+                <a:moveTo>
+                  <a:pt x="457200" y="714375"/>
+                </a:moveTo>
+                <a:lnTo>
+                  <a:pt x="457200" y="1714500"/>
+                </a:lnTo>
+                <a:lnTo>
+                  <a:pt x="914400" y="1714500"/>
+                </a:lnTo>
+                <a:moveTo>
+                  <a:pt x="4152900" y="0"/>
+                </a:moveTo>
+                <a:lnTo>
+                  <a:pt x="4819650" y="0"/>
+                </a:lnTo>
+                <a:lnTo>
+                  <a:pt x="4819650" y="857250"/>
+                </a:lnTo>
+                <a:lnTo>
+                  <a:pt x="5676900" y="857250"/>
+                </a:lnTo>
+                <a:moveTo>
+                  <a:pt x="4152900" y="1714500"/>
+                </a:moveTo>
+                <a:lnTo>
+                  <a:pt x="4819650" y="1714500"/>
+                </a:lnTo>
+                <a:lnTo>
+                  <a:pt x="4819650" y="857250"/>
+                </a:lnTo>
+              </a:path>
+            </a:pathLst>
+          </a:custGeom>
+          <a:noFill/>
+          <a:ln w="28575">
+            <a:solidFill>
+              <a:schemeClr val="accent2"/>
+            </a:solidFill>
+          </a:ln>
+        </p:spPr>
+      </p:sp>
+      <p:sp>
+        <p:nvSpPr>
+          <p:cNvPr id="14" name="Freeform 14"/>
+          <p:cNvSpPr/>
+          <p:nvPr/>
+        </p:nvSpPr>
+        <p:spPr>
+          <a:xfrm>
+            <a:off x="3467100" y="2371725"/>
+            <a:ext cx="4819650" cy="1828800"/>
+          </a:xfrm>
+          <a:custGeom>
+            <a:avLst/>
+            <a:gdLst/>
+            <a:ahLst/>
+            <a:cxnLst/>
+            <a:rect l="l" t="t" r="r" b="b"/>
+            <a:pathLst>
+              <a:path w="4819650" h="1828800">
+                <a:moveTo>
+                  <a:pt x="0" y="0"/>
+                </a:moveTo>
+                <a:lnTo>
+                  <a:pt x="57150" y="57150"/>
+                </a:lnTo>
+                <a:lnTo>
+                  <a:pt x="0" y="114300"/>
+                </a:lnTo>
+                <a:moveTo>
+                  <a:pt x="0" y="1714500"/>
+                </a:moveTo>
+                <a:lnTo>
+                  <a:pt x="57150" y="1771650"/>
+                </a:lnTo>
+                <a:lnTo>
+                  <a:pt x="0" y="1828800"/>
+                </a:lnTo>
+                <a:moveTo>
+                  <a:pt x="4762500" y="857250"/>
+                </a:moveTo>
+                <a:lnTo>
+                  <a:pt x="4819650" y="914400"/>
+                </a:lnTo>
+                <a:lnTo>
+                  <a:pt x="4762500" y="971550"/>
+                </a:lnTo>
+              </a:path>
+            </a:pathLst>
+          </a:custGeom>
+          <a:noFill/>
+          <a:ln w="28575">
+            <a:solidFill>
+              <a:schemeClr val="accent2"/>
+            </a:solidFill>
+          </a:ln>
+        </p:spPr>
+      </p:sp>
+      <p:sp>
+        <p:nvSpPr>
+          <p:cNvPr id="15" name="Rectangle 15"/>
+          <p:cNvSpPr/>
+          <p:nvPr/>
+        </p:nvSpPr>
+        <p:spPr>
+          <a:xfrm>
+            <a:off x="8286750" y="2571750"/>
+            <a:ext cx="3295650" cy="1428750"/>
+          </a:xfrm>
+          <a:prstGeom prst="roundRect">
+            <a:avLst>
+              <a:gd name="adj" fmla="val 5333"/>
+            </a:avLst>
+          </a:prstGeom>
+          <a:solidFill>
+            <a:schemeClr val="accent3"/>
+          </a:solidFill>
+          <a:ln>
+            <a:noFill/>
+          </a:ln>
+        </p:spPr>
+      </p:sp>
+      <p:sp>
+        <p:nvSpPr>
+          <p:cNvPr id="16" name="TextBox 16"/>
+          <p:cNvSpPr txBox="1"/>
+          <p:nvPr/>
+        </p:nvSpPr>
+        <p:spPr>
+          <a:xfrm>
+            <a:off x="8522970" y="2787650"/>
+            <a:ext cx="2354294" cy="440055"/>
           </a:xfrm>
           <a:prstGeom prst="rect">
             <a:avLst/>
@@ -3436,39 +4736,39 @@
                 <a:ea typeface="Microsoft JhengHei"/>
                 <a:cs typeface="Microsoft JhengHei"/>
               </a:rPr>
-              <a:t>內容與時序</a:t>
-            </a:r>
-          </a:p>
-        </p:txBody>
-      </p:sp>
-      <p:sp>
-        <p:nvSpPr>
-          <p:cNvPr id="6" name="TextBox 6"/>
-          <p:cNvSpPr txBox="1"/>
-          <p:nvPr/>
-        </p:nvSpPr>
-        <p:spPr>
-          <a:xfrm>
-            <a:off x="601980" y="4438650"/>
-            <a:ext cx="2610612" cy="293370"/>
-          </a:xfrm>
-          <a:prstGeom prst="rect">
-            <a:avLst/>
-          </a:prstGeom>
-          <a:noFill/>
-          <a:ln>
-            <a:noFill/>
-          </a:ln>
-        </p:spPr>
-        <p:txBody>
-          <a:bodyPr wrap="none" lIns="0" tIns="0" rIns="0" bIns="0" anchor="t" anchorCtr="0">
-            <a:spAutoFit/>
-          </a:bodyPr>
-          <a:lstStyle/>
-          <a:p>
-            <a:pPr algn="l"/>
-            <a:r>
-              <a:rPr lang="zh-TW" sz="1500" dirty="0">
+              <a:t>校準＋OOF Gate</a:t>
+            </a:r>
+          </a:p>
+        </p:txBody>
+      </p:sp>
+      <p:sp>
+        <p:nvSpPr>
+          <p:cNvPr id="17" name="TextBox 17"/>
+          <p:cNvSpPr txBox="1"/>
+          <p:nvPr/>
+        </p:nvSpPr>
+        <p:spPr>
+          <a:xfrm>
+            <a:off x="8525256" y="3346450"/>
+            <a:ext cx="1714500" cy="352044"/>
+          </a:xfrm>
+          <a:prstGeom prst="rect">
+            <a:avLst/>
+          </a:prstGeom>
+          <a:noFill/>
+          <a:ln>
+            <a:noFill/>
+          </a:ln>
+        </p:spPr>
+        <p:txBody>
+          <a:bodyPr wrap="none" lIns="0" tIns="0" rIns="0" bIns="0" anchor="t" anchorCtr="0">
+            <a:spAutoFit/>
+          </a:bodyPr>
+          <a:lstStyle/>
+          <a:p>
+            <a:pPr algn="l"/>
+            <a:r>
+              <a:rPr lang="zh-TW" sz="1800" dirty="0">
                 <a:solidFill>
                   <a:schemeClr val="accent6"/>
                 </a:solidFill>
@@ -3476,302 +4776,14 @@
                 <a:ea typeface="Microsoft JhengHei"/>
                 <a:cs typeface="Microsoft JhengHei"/>
               </a:rPr>
-              <a:t>CTBM 讀取內容、時間與方向</a:t>
-            </a:r>
-          </a:p>
-        </p:txBody>
-      </p:sp>
-      <p:sp>
-        <p:nvSpPr>
-          <p:cNvPr id="7" name="TextBox 7"/>
-          <p:cNvSpPr txBox="1"/>
-          <p:nvPr/>
-        </p:nvSpPr>
-        <p:spPr>
-          <a:xfrm>
-            <a:off x="3834384" y="2546350"/>
-            <a:ext cx="227343" cy="528066"/>
-          </a:xfrm>
-          <a:prstGeom prst="rect">
-            <a:avLst/>
-          </a:prstGeom>
-          <a:noFill/>
-          <a:ln>
-            <a:noFill/>
-          </a:ln>
-        </p:spPr>
-        <p:txBody>
-          <a:bodyPr wrap="none" lIns="0" tIns="0" rIns="0" bIns="0" anchor="t" anchorCtr="0">
-            <a:spAutoFit/>
-          </a:bodyPr>
-          <a:lstStyle/>
-          <a:p>
-            <a:pPr algn="l"/>
-            <a:r>
-              <a:rPr lang="zh-TW" sz="2700" dirty="0">
-                <a:solidFill>
-                  <a:schemeClr val="accent2"/>
-                </a:solidFill>
-                <a:latin typeface="Microsoft JhengHei"/>
-                <a:ea typeface="Microsoft JhengHei"/>
-                <a:cs typeface="Microsoft JhengHei"/>
-              </a:rPr>
-              <a:t>→</a:t>
-            </a:r>
-          </a:p>
-        </p:txBody>
-      </p:sp>
-      <p:pic>
-        <p:nvPicPr>
-          <p:cNvPr id="8" name="Image 8"/>
-          <p:cNvPicPr>
-            <a:picLocks noChangeAspect="1"/>
-          </p:cNvPicPr>
-          <p:nvPr/>
-        </p:nvPicPr>
-        <p:blipFill>
-          <a:blip r:embed="rId3"/>
-          <a:stretch>
-            <a:fillRect/>
-          </a:stretch>
-        </p:blipFill>
-        <p:spPr>
-          <a:xfrm>
-            <a:off x="5038725" y="1714500"/>
-            <a:ext cx="1905000" cy="1905000"/>
-          </a:xfrm>
-          <a:prstGeom prst="rect">
-            <a:avLst/>
-          </a:prstGeom>
-        </p:spPr>
-      </p:pic>
-      <p:sp>
-        <p:nvSpPr>
-          <p:cNvPr id="9" name="TextBox 9"/>
-          <p:cNvSpPr txBox="1"/>
-          <p:nvPr/>
-        </p:nvSpPr>
-        <p:spPr>
-          <a:xfrm>
-            <a:off x="4360545" y="3911600"/>
-            <a:ext cx="1234440" cy="440055"/>
-          </a:xfrm>
-          <a:prstGeom prst="rect">
-            <a:avLst/>
-          </a:prstGeom>
-          <a:noFill/>
-          <a:ln>
-            <a:noFill/>
-          </a:ln>
-        </p:spPr>
-        <p:txBody>
-          <a:bodyPr wrap="none" lIns="0" tIns="0" rIns="0" bIns="0" anchor="t" anchorCtr="0">
-            <a:spAutoFit/>
-          </a:bodyPr>
-          <a:lstStyle/>
-          <a:p>
-            <a:pPr algn="l"/>
-            <a:r>
-              <a:rPr lang="zh-TW" sz="2250" dirty="0">
-                <a:solidFill>
-                  <a:srgbClr val="FFFFFF"/>
-                </a:solidFill>
-                <a:latin typeface="Microsoft JhengHei"/>
-                <a:ea typeface="Microsoft JhengHei"/>
-                <a:cs typeface="Microsoft JhengHei"/>
-              </a:rPr>
-              <a:t>短窗模式</a:t>
-            </a:r>
-          </a:p>
-        </p:txBody>
-      </p:sp>
-      <p:sp>
-        <p:nvSpPr>
-          <p:cNvPr id="10" name="TextBox 10"/>
-          <p:cNvSpPr txBox="1"/>
-          <p:nvPr/>
-        </p:nvSpPr>
-        <p:spPr>
-          <a:xfrm>
-            <a:off x="4364355" y="4438650"/>
-            <a:ext cx="2483358" cy="293370"/>
-          </a:xfrm>
-          <a:prstGeom prst="rect">
-            <a:avLst/>
-          </a:prstGeom>
-          <a:noFill/>
-          <a:ln>
-            <a:noFill/>
-          </a:ln>
-        </p:spPr>
-        <p:txBody>
-          <a:bodyPr wrap="none" lIns="0" tIns="0" rIns="0" bIns="0" anchor="t" anchorCtr="0">
-            <a:spAutoFit/>
-          </a:bodyPr>
-          <a:lstStyle/>
-          <a:p>
-            <a:pPr algn="l"/>
-            <a:r>
-              <a:rPr lang="zh-TW" sz="1500" dirty="0">
-                <a:solidFill>
-                  <a:schemeClr val="accent6"/>
-                </a:solidFill>
-                <a:latin typeface="Microsoft JhengHei"/>
-                <a:ea typeface="Microsoft JhengHei"/>
-                <a:cs typeface="Microsoft JhengHei"/>
-              </a:rPr>
-              <a:t>PBCNN 補充局部位元組特徵</a:t>
-            </a:r>
-          </a:p>
-        </p:txBody>
-      </p:sp>
-      <p:sp>
-        <p:nvSpPr>
-          <p:cNvPr id="11" name="TextBox 11"/>
-          <p:cNvSpPr txBox="1"/>
-          <p:nvPr/>
-        </p:nvSpPr>
-        <p:spPr>
-          <a:xfrm>
-            <a:off x="7596759" y="2546350"/>
-            <a:ext cx="227343" cy="528066"/>
-          </a:xfrm>
-          <a:prstGeom prst="rect">
-            <a:avLst/>
-          </a:prstGeom>
-          <a:noFill/>
-          <a:ln>
-            <a:noFill/>
-          </a:ln>
-        </p:spPr>
-        <p:txBody>
-          <a:bodyPr wrap="none" lIns="0" tIns="0" rIns="0" bIns="0" anchor="t" anchorCtr="0">
-            <a:spAutoFit/>
-          </a:bodyPr>
-          <a:lstStyle/>
-          <a:p>
-            <a:pPr algn="l"/>
-            <a:r>
-              <a:rPr lang="zh-TW" sz="2700" dirty="0">
-                <a:solidFill>
-                  <a:schemeClr val="accent2"/>
-                </a:solidFill>
-                <a:latin typeface="Microsoft JhengHei"/>
-                <a:ea typeface="Microsoft JhengHei"/>
-                <a:cs typeface="Microsoft JhengHei"/>
-              </a:rPr>
-              <a:t>→</a:t>
-            </a:r>
-          </a:p>
-        </p:txBody>
-      </p:sp>
-      <p:pic>
-        <p:nvPicPr>
-          <p:cNvPr id="12" name="Image 12"/>
-          <p:cNvPicPr>
-            <a:picLocks noChangeAspect="1"/>
-          </p:cNvPicPr>
-          <p:nvPr/>
-        </p:nvPicPr>
-        <p:blipFill>
-          <a:blip r:embed="rId4"/>
-          <a:stretch>
-            <a:fillRect/>
-          </a:stretch>
-        </p:blipFill>
-        <p:spPr>
-          <a:xfrm>
-            <a:off x="8801100" y="1714500"/>
-            <a:ext cx="1905000" cy="1905000"/>
-          </a:xfrm>
-          <a:prstGeom prst="rect">
-            <a:avLst/>
-          </a:prstGeom>
-        </p:spPr>
-      </p:pic>
-      <p:sp>
-        <p:nvSpPr>
-          <p:cNvPr id="13" name="TextBox 13"/>
-          <p:cNvSpPr txBox="1"/>
-          <p:nvPr/>
-        </p:nvSpPr>
-        <p:spPr>
-          <a:xfrm>
-            <a:off x="8122920" y="3911600"/>
-            <a:ext cx="1234440" cy="440055"/>
-          </a:xfrm>
-          <a:prstGeom prst="rect">
-            <a:avLst/>
-          </a:prstGeom>
-          <a:noFill/>
-          <a:ln>
-            <a:noFill/>
-          </a:ln>
-        </p:spPr>
-        <p:txBody>
-          <a:bodyPr wrap="none" lIns="0" tIns="0" rIns="0" bIns="0" anchor="t" anchorCtr="0">
-            <a:spAutoFit/>
-          </a:bodyPr>
-          <a:lstStyle/>
-          <a:p>
-            <a:pPr algn="l"/>
-            <a:r>
-              <a:rPr lang="zh-TW" sz="2250" dirty="0">
-                <a:solidFill>
-                  <a:srgbClr val="FFFFFF"/>
-                </a:solidFill>
-                <a:latin typeface="Microsoft JhengHei"/>
-                <a:ea typeface="Microsoft JhengHei"/>
-                <a:cs typeface="Microsoft JhengHei"/>
-              </a:rPr>
-              <a:t>融合判定</a:t>
-            </a:r>
-          </a:p>
-        </p:txBody>
-      </p:sp>
-      <p:sp>
-        <p:nvSpPr>
-          <p:cNvPr id="14" name="TextBox 14"/>
-          <p:cNvSpPr txBox="1"/>
-          <p:nvPr/>
-        </p:nvSpPr>
-        <p:spPr>
-          <a:xfrm>
-            <a:off x="8126730" y="4438650"/>
-            <a:ext cx="2438400" cy="293370"/>
-          </a:xfrm>
-          <a:prstGeom prst="rect">
-            <a:avLst/>
-          </a:prstGeom>
-          <a:noFill/>
-          <a:ln>
-            <a:noFill/>
-          </a:ln>
-        </p:spPr>
-        <p:txBody>
-          <a:bodyPr wrap="none" lIns="0" tIns="0" rIns="0" bIns="0" anchor="t" anchorCtr="0">
-            <a:spAutoFit/>
-          </a:bodyPr>
-          <a:lstStyle/>
-          <a:p>
-            <a:pPr algn="l"/>
-            <a:r>
-              <a:rPr lang="zh-TW" sz="1500" dirty="0">
-                <a:solidFill>
-                  <a:schemeClr val="accent6"/>
-                </a:solidFill>
-                <a:latin typeface="Microsoft JhengHei"/>
-                <a:ea typeface="Microsoft JhengHei"/>
-                <a:cs typeface="Microsoft JhengHei"/>
-              </a:rPr>
-              <a:t>校準後依事件證據動態調權</a:t>
-            </a:r>
-          </a:p>
-        </p:txBody>
-      </p:sp>
-      <p:sp>
-        <p:nvSpPr>
-          <p:cNvPr id="15" name="Rectangle 15"/>
+              <a:t>依事件證據融合</a:t>
+            </a:r>
+          </a:p>
+        </p:txBody>
+      </p:sp>
+      <p:sp>
+        <p:nvSpPr>
+          <p:cNvPr id="18" name="Rectangle 18"/>
           <p:cNvSpPr/>
           <p:nvPr/>
         </p:nvSpPr>
@@ -3795,7 +4807,7 @@
       </p:sp>
       <p:sp>
         <p:nvSpPr>
-          <p:cNvPr id="16" name="TextBox 16"/>
+          <p:cNvPr id="19" name="TextBox 19"/>
           <p:cNvSpPr txBox="1"/>
           <p:nvPr/>
         </p:nvSpPr>
@@ -3835,7 +4847,7 @@
       </p:sp>
       <p:sp>
         <p:nvSpPr>
-          <p:cNvPr id="17" name="TextBox 17"/>
+          <p:cNvPr id="20" name="TextBox 20"/>
           <p:cNvSpPr txBox="1"/>
           <p:nvPr/>
         </p:nvSpPr>
@@ -3875,7 +4887,7 @@
       </p:sp>
       <p:sp>
         <p:nvSpPr>
-          <p:cNvPr id="18" name="TextBox 18"/>
+          <p:cNvPr id="21" name="TextBox 21"/>
           <p:cNvSpPr txBox="1"/>
           <p:nvPr/>
         </p:nvSpPr>
@@ -4550,7 +5562,7 @@
             <a:r>
               <a:rPr lang="en-US" sz="1200" b="1" dirty="0">
                 <a:solidFill>
-                  <a:schemeClr val="accent1"/>
+                  <a:schemeClr val="accent2"/>
                 </a:solidFill>
                 <a:latin typeface="Microsoft JhengHei"/>
                 <a:ea typeface="Microsoft JhengHei"/>
@@ -5998,7 +7010,7 @@
             <a:r>
               <a:rPr lang="en-US" sz="1200" b="1" dirty="0">
                 <a:solidFill>
-                  <a:schemeClr val="accent1"/>
+                  <a:schemeClr val="accent2"/>
                 </a:solidFill>
                 <a:latin typeface="Microsoft JhengHei"/>
                 <a:ea typeface="Microsoft JhengHei"/>

--- a/deliverables/決賽簡報_AI資安框架.pptx
+++ b/deliverables/決賽簡報_AI資安框架.pptx
@@ -1282,7 +1282,7 @@
     <p:bg>
       <p:bgPr>
         <a:solidFill>
-          <a:schemeClr val="lt2"/>
+          <a:schemeClr val="lt1"/>
         </a:solidFill>
         <a:effectLst/>
       </p:bgPr>
@@ -1330,7 +1330,7 @@
             <a:r>
               <a:rPr lang="zh-TW" sz="1350" b="1" dirty="0">
                 <a:solidFill>
-                  <a:schemeClr val="accent2"/>
+                  <a:schemeClr val="accent1"/>
                 </a:solidFill>
                 <a:latin typeface="Microsoft JhengHei"/>
                 <a:ea typeface="Microsoft JhengHei"/>
@@ -1370,7 +1370,7 @@
             <a:r>
               <a:rPr lang="zh-TW" sz="3220" dirty="0">
                 <a:solidFill>
-                  <a:srgbClr val="FFFFFF"/>
+                  <a:srgbClr val="121314"/>
                 </a:solidFill>
                 <a:latin typeface="Microsoft JhengHei"/>
                 <a:ea typeface="Microsoft JhengHei"/>
@@ -1410,7 +1410,7 @@
             <a:r>
               <a:rPr lang="zh-TW" sz="3220" dirty="0">
                 <a:solidFill>
-                  <a:srgbClr val="FFFFFF"/>
+                  <a:srgbClr val="121314"/>
                 </a:solidFill>
                 <a:latin typeface="Microsoft JhengHei"/>
                 <a:ea typeface="Microsoft JhengHei"/>
@@ -1450,7 +1450,7 @@
             <a:r>
               <a:rPr lang="zh-TW" sz="3220" dirty="0">
                 <a:solidFill>
-                  <a:srgbClr val="FFFFFF"/>
+                  <a:srgbClr val="121314"/>
                 </a:solidFill>
                 <a:latin typeface="Microsoft JhengHei"/>
                 <a:ea typeface="Microsoft JhengHei"/>
@@ -1490,7 +1490,7 @@
             <a:r>
               <a:rPr lang="zh-TW" sz="2100" dirty="0">
                 <a:solidFill>
-                  <a:schemeClr val="accent6"/>
+                  <a:schemeClr val="accent5"/>
                 </a:solidFill>
                 <a:latin typeface="Microsoft JhengHei"/>
                 <a:ea typeface="Microsoft JhengHei"/>
@@ -1722,7 +1722,7 @@
             </a:avLst>
           </a:prstGeom>
           <a:solidFill>
-            <a:srgbClr val="F5F7FA"/>
+            <a:schemeClr val="accent3"/>
           </a:solidFill>
           <a:ln w="9525">
             <a:solidFill>
@@ -1972,7 +1972,7 @@
             </a:avLst>
           </a:prstGeom>
           <a:solidFill>
-            <a:srgbClr val="F5F7FA"/>
+            <a:schemeClr val="accent3"/>
           </a:solidFill>
           <a:ln w="9525">
             <a:solidFill>
@@ -2882,7 +2882,7 @@
             </a:avLst>
           </a:prstGeom>
           <a:solidFill>
-            <a:srgbClr val="F5F7FA"/>
+            <a:schemeClr val="accent3"/>
           </a:solidFill>
           <a:ln w="9525">
             <a:solidFill>
@@ -3722,7 +3722,7 @@
             </a:avLst>
           </a:prstGeom>
           <a:solidFill>
-            <a:srgbClr val="F5F7FA"/>
+            <a:schemeClr val="accent3"/>
           </a:solidFill>
           <a:ln w="9525">
             <a:solidFill>
@@ -4007,7 +4007,7 @@
             </a:avLst>
           </a:prstGeom>
           <a:solidFill>
-            <a:srgbClr val="F5F7FA"/>
+            <a:schemeClr val="accent3"/>
           </a:solidFill>
           <a:ln w="9525">
             <a:solidFill>
@@ -4153,7 +4153,7 @@
     <p:bg>
       <p:bgPr>
         <a:solidFill>
-          <a:schemeClr val="lt2"/>
+          <a:schemeClr val="lt1"/>
         </a:solidFill>
         <a:effectLst/>
       </p:bgPr>
@@ -4201,7 +4201,7 @@
             <a:r>
               <a:rPr lang="en-US" sz="1200" b="1" dirty="0">
                 <a:solidFill>
-                  <a:schemeClr val="accent2"/>
+                  <a:schemeClr val="accent1"/>
                 </a:solidFill>
                 <a:latin typeface="Microsoft JhengHei"/>
                 <a:ea typeface="Microsoft JhengHei"/>
@@ -4241,7 +4241,7 @@
             <a:r>
               <a:rPr lang="zh-TW" sz="3300" dirty="0">
                 <a:solidFill>
-                  <a:srgbClr val="FFFFFF"/>
+                  <a:srgbClr val="121314"/>
                 </a:solidFill>
                 <a:latin typeface="Microsoft JhengHei"/>
                 <a:ea typeface="Microsoft JhengHei"/>
@@ -4329,7 +4329,7 @@
             <a:r>
               <a:rPr lang="zh-TW" sz="1800" dirty="0">
                 <a:solidFill>
-                  <a:srgbClr val="FFFFFF"/>
+                  <a:srgbClr val="121314"/>
                 </a:solidFill>
                 <a:latin typeface="Microsoft JhengHei"/>
                 <a:ea typeface="Microsoft JhengHei"/>
@@ -4393,7 +4393,7 @@
             <a:r>
               <a:rPr lang="en-US" sz="2250" b="1" dirty="0">
                 <a:solidFill>
-                  <a:srgbClr val="FFFFFF"/>
+                  <a:srgbClr val="121314"/>
                 </a:solidFill>
                 <a:latin typeface="Microsoft JhengHei"/>
                 <a:ea typeface="Microsoft JhengHei"/>
@@ -4433,7 +4433,7 @@
             <a:r>
               <a:rPr lang="ja-JP" sz="1800" dirty="0">
                 <a:solidFill>
-                  <a:schemeClr val="accent6"/>
+                  <a:schemeClr val="accent5"/>
                 </a:solidFill>
                 <a:latin typeface="Microsoft JhengHei"/>
                 <a:ea typeface="Microsoft JhengHei"/>
@@ -4497,7 +4497,7 @@
             <a:r>
               <a:rPr lang="en-US" sz="2250" b="1" dirty="0">
                 <a:solidFill>
-                  <a:srgbClr val="FFFFFF"/>
+                  <a:srgbClr val="121314"/>
                 </a:solidFill>
                 <a:latin typeface="Microsoft JhengHei"/>
                 <a:ea typeface="Microsoft JhengHei"/>
@@ -4537,7 +4537,7 @@
             <a:r>
               <a:rPr lang="zh-TW" sz="1800" dirty="0">
                 <a:solidFill>
-                  <a:schemeClr val="accent6"/>
+                  <a:schemeClr val="accent5"/>
                 </a:solidFill>
                 <a:latin typeface="Microsoft JhengHei"/>
                 <a:ea typeface="Microsoft JhengHei"/>
@@ -4615,7 +4615,7 @@
           <a:noFill/>
           <a:ln w="28575">
             <a:solidFill>
-              <a:schemeClr val="accent2"/>
+              <a:schemeClr val="accent1"/>
             </a:solidFill>
           </a:ln>
         </p:spPr>
@@ -4672,7 +4672,7 @@
           <a:noFill/>
           <a:ln w="28575">
             <a:solidFill>
-              <a:schemeClr val="accent2"/>
+              <a:schemeClr val="accent1"/>
             </a:solidFill>
           </a:ln>
         </p:spPr>
@@ -4730,7 +4730,7 @@
             <a:r>
               <a:rPr lang="zh-TW" sz="2250" dirty="0">
                 <a:solidFill>
-                  <a:srgbClr val="FFFFFF"/>
+                  <a:srgbClr val="121314"/>
                 </a:solidFill>
                 <a:latin typeface="Microsoft JhengHei"/>
                 <a:ea typeface="Microsoft JhengHei"/>
@@ -4770,7 +4770,7 @@
             <a:r>
               <a:rPr lang="zh-TW" sz="1800" dirty="0">
                 <a:solidFill>
-                  <a:schemeClr val="accent6"/>
+                  <a:schemeClr val="accent5"/>
                 </a:solidFill>
                 <a:latin typeface="Microsoft JhengHei"/>
                 <a:ea typeface="Microsoft JhengHei"/>
@@ -4834,7 +4834,7 @@
             <a:r>
               <a:rPr lang="zh-TW" sz="1800" dirty="0">
                 <a:solidFill>
-                  <a:srgbClr val="FFFFFF"/>
+                  <a:srgbClr val="121314"/>
                 </a:solidFill>
                 <a:latin typeface="Microsoft JhengHei"/>
                 <a:ea typeface="Microsoft JhengHei"/>
@@ -4874,7 +4874,7 @@
             <a:r>
               <a:rPr lang="zh-TW" sz="1050" dirty="0">
                 <a:solidFill>
-                  <a:schemeClr val="accent6"/>
+                  <a:schemeClr val="accent5"/>
                 </a:solidFill>
                 <a:latin typeface="Microsoft JhengHei"/>
                 <a:ea typeface="Microsoft JhengHei"/>
@@ -4914,7 +4914,7 @@
             <a:r>
               <a:rPr lang="zh-TW" sz="1050" dirty="0">
                 <a:solidFill>
-                  <a:schemeClr val="accent6"/>
+                  <a:schemeClr val="accent5"/>
                 </a:solidFill>
                 <a:latin typeface="Microsoft JhengHei"/>
                 <a:ea typeface="Microsoft JhengHei"/>
@@ -5082,7 +5082,7 @@
             </a:avLst>
           </a:prstGeom>
           <a:solidFill>
-            <a:srgbClr val="F5F7FA"/>
+            <a:schemeClr val="accent3"/>
           </a:solidFill>
           <a:ln>
             <a:noFill/>
@@ -5186,7 +5186,7 @@
             </a:avLst>
           </a:prstGeom>
           <a:solidFill>
-            <a:srgbClr val="F5F7FA"/>
+            <a:schemeClr val="accent3"/>
           </a:solidFill>
           <a:ln>
             <a:noFill/>
@@ -5290,7 +5290,7 @@
             </a:avLst>
           </a:prstGeom>
           <a:solidFill>
-            <a:srgbClr val="F5F7FA"/>
+            <a:schemeClr val="accent3"/>
           </a:solidFill>
           <a:ln>
             <a:noFill/>
@@ -5514,7 +5514,7 @@
     <p:bg>
       <p:bgPr>
         <a:solidFill>
-          <a:schemeClr val="lt2"/>
+          <a:schemeClr val="lt1"/>
         </a:solidFill>
         <a:effectLst/>
       </p:bgPr>
@@ -5562,7 +5562,7 @@
             <a:r>
               <a:rPr lang="en-US" sz="1200" b="1" dirty="0">
                 <a:solidFill>
-                  <a:schemeClr val="accent2"/>
+                  <a:schemeClr val="accent1"/>
                 </a:solidFill>
                 <a:latin typeface="Microsoft JhengHei"/>
                 <a:ea typeface="Microsoft JhengHei"/>
@@ -5602,7 +5602,7 @@
             <a:r>
               <a:rPr lang="zh-TW" sz="3300" dirty="0">
                 <a:solidFill>
-                  <a:srgbClr val="FFFFFF"/>
+                  <a:srgbClr val="121314"/>
                 </a:solidFill>
                 <a:latin typeface="Microsoft JhengHei"/>
                 <a:ea typeface="Microsoft JhengHei"/>
@@ -5666,7 +5666,7 @@
             <a:r>
               <a:rPr lang="zh-TW" sz="1500" dirty="0">
                 <a:solidFill>
-                  <a:schemeClr val="accent2"/>
+                  <a:schemeClr val="accent1"/>
                 </a:solidFill>
                 <a:latin typeface="Microsoft JhengHei"/>
                 <a:ea typeface="Microsoft JhengHei"/>
@@ -5706,7 +5706,7 @@
             <a:r>
               <a:rPr lang="zh-TW" sz="2400" dirty="0">
                 <a:solidFill>
-                  <a:srgbClr val="FFFFFF"/>
+                  <a:srgbClr val="121314"/>
                 </a:solidFill>
                 <a:latin typeface="Microsoft JhengHei"/>
                 <a:ea typeface="Microsoft JhengHei"/>
@@ -5746,7 +5746,7 @@
             <a:r>
               <a:rPr lang="zh-TW" sz="1650" dirty="0">
                 <a:solidFill>
-                  <a:schemeClr val="accent6"/>
+                  <a:schemeClr val="accent5"/>
                 </a:solidFill>
                 <a:latin typeface="Microsoft JhengHei"/>
                 <a:ea typeface="Microsoft JhengHei"/>
@@ -5810,7 +5810,7 @@
             <a:r>
               <a:rPr lang="zh-TW" sz="1500" dirty="0">
                 <a:solidFill>
-                  <a:schemeClr val="accent2"/>
+                  <a:schemeClr val="accent1"/>
                 </a:solidFill>
                 <a:latin typeface="Microsoft JhengHei"/>
                 <a:ea typeface="Microsoft JhengHei"/>
@@ -5850,7 +5850,7 @@
             <a:r>
               <a:rPr lang="zh-TW" sz="2400" dirty="0">
                 <a:solidFill>
-                  <a:srgbClr val="FFFFFF"/>
+                  <a:srgbClr val="121314"/>
                 </a:solidFill>
                 <a:latin typeface="Microsoft JhengHei"/>
                 <a:ea typeface="Microsoft JhengHei"/>
@@ -5890,7 +5890,7 @@
             <a:r>
               <a:rPr lang="zh-TW" sz="1650" dirty="0">
                 <a:solidFill>
-                  <a:schemeClr val="accent6"/>
+                  <a:schemeClr val="accent5"/>
                 </a:solidFill>
                 <a:latin typeface="Microsoft JhengHei"/>
                 <a:ea typeface="Microsoft JhengHei"/>
@@ -5954,7 +5954,7 @@
             <a:r>
               <a:rPr lang="zh-TW" sz="1500" dirty="0">
                 <a:solidFill>
-                  <a:schemeClr val="accent2"/>
+                  <a:schemeClr val="accent1"/>
                 </a:solidFill>
                 <a:latin typeface="Microsoft JhengHei"/>
                 <a:ea typeface="Microsoft JhengHei"/>
@@ -5994,7 +5994,7 @@
             <a:r>
               <a:rPr lang="zh-TW" sz="2400" dirty="0">
                 <a:solidFill>
-                  <a:srgbClr val="FFFFFF"/>
+                  <a:srgbClr val="121314"/>
                 </a:solidFill>
                 <a:latin typeface="Microsoft JhengHei"/>
                 <a:ea typeface="Microsoft JhengHei"/>
@@ -6034,7 +6034,7 @@
             <a:r>
               <a:rPr lang="zh-TW" sz="1650" dirty="0">
                 <a:solidFill>
-                  <a:schemeClr val="accent6"/>
+                  <a:schemeClr val="accent5"/>
                 </a:solidFill>
                 <a:latin typeface="Microsoft JhengHei"/>
                 <a:ea typeface="Microsoft JhengHei"/>
@@ -6074,7 +6074,7 @@
             <a:r>
               <a:rPr lang="zh-TW" sz="2020" dirty="0">
                 <a:solidFill>
-                  <a:srgbClr val="FFFFFF"/>
+                  <a:srgbClr val="121314"/>
                 </a:solidFill>
                 <a:latin typeface="Microsoft JhengHei"/>
                 <a:ea typeface="Microsoft JhengHei"/>
@@ -6114,7 +6114,7 @@
             <a:r>
               <a:rPr lang="zh-TW" sz="1650" dirty="0">
                 <a:solidFill>
-                  <a:schemeClr val="accent6"/>
+                  <a:schemeClr val="accent5"/>
                 </a:solidFill>
                 <a:latin typeface="Microsoft JhengHei"/>
                 <a:ea typeface="Microsoft JhengHei"/>
@@ -6154,7 +6154,7 @@
             <a:r>
               <a:rPr lang="zh-TW" sz="1050" dirty="0">
                 <a:solidFill>
-                  <a:schemeClr val="accent6"/>
+                  <a:schemeClr val="accent5"/>
                 </a:solidFill>
                 <a:latin typeface="Microsoft JhengHei"/>
                 <a:ea typeface="Microsoft JhengHei"/>
@@ -6194,7 +6194,7 @@
             <a:r>
               <a:rPr lang="zh-TW" sz="1050" dirty="0">
                 <a:solidFill>
-                  <a:schemeClr val="accent6"/>
+                  <a:schemeClr val="accent5"/>
                 </a:solidFill>
                 <a:latin typeface="Microsoft JhengHei"/>
                 <a:ea typeface="Microsoft JhengHei"/>
@@ -6738,7 +6738,7 @@
             </a:avLst>
           </a:prstGeom>
           <a:solidFill>
-            <a:srgbClr val="F5F7FA"/>
+            <a:schemeClr val="accent3"/>
           </a:solidFill>
           <a:ln>
             <a:noFill/>
@@ -6957,6 +6957,706 @@
 </file>
 
 <file path=ppt/slides/slide7.xml><?xml version="1.0" encoding="utf-8"?>
+<p:sld xmlns:a="http://schemas.openxmlformats.org/drawingml/2006/main" xmlns:r="http://schemas.openxmlformats.org/officeDocument/2006/relationships" xmlns:p="http://schemas.openxmlformats.org/presentationml/2006/main">
+  <p:cSld>
+    <p:bg>
+      <p:bgPr>
+        <a:solidFill>
+          <a:schemeClr val="lt1"/>
+        </a:solidFill>
+        <a:effectLst/>
+      </p:bgPr>
+    </p:bg>
+    <p:spTree>
+      <p:nvGrpSpPr>
+        <p:cNvPr id="1" name=""/>
+        <p:cNvGrpSpPr/>
+        <p:nvPr/>
+      </p:nvGrpSpPr>
+      <p:grpSpPr>
+        <a:xfrm>
+          <a:off x="0" y="0"/>
+          <a:ext cx="0" cy="0"/>
+          <a:chOff x="0" y="0"/>
+          <a:chExt cx="0" cy="0"/>
+        </a:xfrm>
+      </p:grpSpPr>
+      <p:sp>
+        <p:nvSpPr>
+          <p:cNvPr id="2" name="TextBox 2"/>
+          <p:cNvSpPr txBox="1"/>
+          <p:nvPr/>
+        </p:nvSpPr>
+        <p:spPr>
+          <a:xfrm>
+            <a:off x="603504" y="390525"/>
+            <a:ext cx="1580388" cy="234696"/>
+          </a:xfrm>
+          <a:prstGeom prst="rect">
+            <a:avLst/>
+          </a:prstGeom>
+          <a:noFill/>
+          <a:ln>
+            <a:noFill/>
+          </a:ln>
+        </p:spPr>
+        <p:txBody>
+          <a:bodyPr wrap="none" lIns="0" tIns="0" rIns="0" bIns="0" anchor="t" anchorCtr="0">
+            <a:spAutoFit/>
+          </a:bodyPr>
+          <a:lstStyle/>
+          <a:p>
+            <a:pPr algn="l"/>
+            <a:r>
+              <a:rPr lang="en-US" sz="1200" b="1" dirty="0">
+                <a:solidFill>
+                  <a:schemeClr val="accent1"/>
+                </a:solidFill>
+                <a:latin typeface="Microsoft JhengHei"/>
+                <a:ea typeface="Microsoft JhengHei"/>
+                <a:cs typeface="Microsoft JhengHei"/>
+              </a:rPr>
+              <a:t>MEASURED RESULTS</a:t>
+            </a:r>
+          </a:p>
+        </p:txBody>
+      </p:sp>
+      <p:sp>
+        <p:nvSpPr>
+          <p:cNvPr id="3" name="TextBox 3"/>
+          <p:cNvSpPr txBox="1"/>
+          <p:nvPr/>
+        </p:nvSpPr>
+        <p:spPr>
+          <a:xfrm>
+            <a:off x="592836" y="736600"/>
+            <a:ext cx="6252972" cy="645414"/>
+          </a:xfrm>
+          <a:prstGeom prst="rect">
+            <a:avLst/>
+          </a:prstGeom>
+          <a:noFill/>
+          <a:ln>
+            <a:noFill/>
+          </a:ln>
+        </p:spPr>
+        <p:txBody>
+          <a:bodyPr wrap="none" lIns="0" tIns="0" rIns="0" bIns="0" anchor="t" anchorCtr="0">
+            <a:spAutoFit/>
+          </a:bodyPr>
+          <a:lstStyle/>
+          <a:p>
+            <a:pPr algn="l"/>
+            <a:r>
+              <a:rPr lang="zh-TW" sz="3300" dirty="0">
+                <a:solidFill>
+                  <a:srgbClr val="121314"/>
+                </a:solidFill>
+                <a:latin typeface="Microsoft JhengHei"/>
+                <a:ea typeface="Microsoft JhengHei"/>
+                <a:cs typeface="Microsoft JhengHei"/>
+              </a:rPr>
+              <a:t>從相似案例，走到可核對的結論</a:t>
+            </a:r>
+          </a:p>
+        </p:txBody>
+      </p:sp>
+      <p:sp>
+        <p:nvSpPr>
+          <p:cNvPr id="4" name="TextBox 4"/>
+          <p:cNvSpPr txBox="1"/>
+          <p:nvPr/>
+        </p:nvSpPr>
+        <p:spPr>
+          <a:xfrm>
+            <a:off x="590550" y="2038350"/>
+            <a:ext cx="1946338" cy="790575"/>
+          </a:xfrm>
+          <a:prstGeom prst="rect">
+            <a:avLst/>
+          </a:prstGeom>
+          <a:noFill/>
+          <a:ln>
+            <a:noFill/>
+          </a:ln>
+        </p:spPr>
+        <p:txBody>
+          <a:bodyPr wrap="none" lIns="0" tIns="0" rIns="0" bIns="0" anchor="t" anchorCtr="0">
+            <a:spAutoFit/>
+          </a:bodyPr>
+          <a:lstStyle/>
+          <a:p>
+            <a:pPr algn="l"/>
+            <a:r>
+              <a:rPr lang="zh-TW" sz="4050" dirty="0">
+                <a:solidFill>
+                  <a:srgbClr val="121314"/>
+                </a:solidFill>
+                <a:latin typeface="Microsoft JhengHei"/>
+                <a:ea typeface="Microsoft JhengHei"/>
+                <a:cs typeface="Microsoft JhengHei"/>
+              </a:rPr>
+              <a:t>97.62%</a:t>
+            </a:r>
+          </a:p>
+        </p:txBody>
+      </p:sp>
+      <p:sp>
+        <p:nvSpPr>
+          <p:cNvPr id="5" name="TextBox 5"/>
+          <p:cNvSpPr txBox="1"/>
+          <p:nvPr/>
+        </p:nvSpPr>
+        <p:spPr>
+          <a:xfrm>
+            <a:off x="598932" y="2870200"/>
+            <a:ext cx="1747952" cy="410718"/>
+          </a:xfrm>
+          <a:prstGeom prst="rect">
+            <a:avLst/>
+          </a:prstGeom>
+          <a:noFill/>
+          <a:ln>
+            <a:noFill/>
+          </a:ln>
+        </p:spPr>
+        <p:txBody>
+          <a:bodyPr wrap="none" lIns="0" tIns="0" rIns="0" bIns="0" anchor="t" anchorCtr="0">
+            <a:spAutoFit/>
+          </a:bodyPr>
+          <a:lstStyle/>
+          <a:p>
+            <a:pPr algn="l"/>
+            <a:r>
+              <a:rPr lang="zh-TW" sz="2100" dirty="0">
+                <a:solidFill>
+                  <a:srgbClr val="121314"/>
+                </a:solidFill>
+                <a:latin typeface="Microsoft JhengHei"/>
+                <a:ea typeface="Microsoft JhengHei"/>
+                <a:cs typeface="Microsoft JhengHei"/>
+              </a:rPr>
+              <a:t>Top-5 命中率</a:t>
+            </a:r>
+          </a:p>
+        </p:txBody>
+      </p:sp>
+      <p:sp>
+        <p:nvSpPr>
+          <p:cNvPr id="6" name="TextBox 6"/>
+          <p:cNvSpPr txBox="1"/>
+          <p:nvPr/>
+        </p:nvSpPr>
+        <p:spPr>
+          <a:xfrm>
+            <a:off x="602361" y="3479800"/>
+            <a:ext cx="2690724" cy="278702"/>
+          </a:xfrm>
+          <a:prstGeom prst="rect">
+            <a:avLst/>
+          </a:prstGeom>
+          <a:noFill/>
+          <a:ln>
+            <a:noFill/>
+          </a:ln>
+        </p:spPr>
+        <p:txBody>
+          <a:bodyPr wrap="none" lIns="0" tIns="0" rIns="0" bIns="0" anchor="t" anchorCtr="0">
+            <a:spAutoFit/>
+          </a:bodyPr>
+          <a:lstStyle/>
+          <a:p>
+            <a:pPr algn="l"/>
+            <a:r>
+              <a:rPr lang="zh-TW" sz="1420" dirty="0">
+                <a:solidFill>
+                  <a:schemeClr val="accent5"/>
+                </a:solidFill>
+                <a:latin typeface="Microsoft JhengHei"/>
+                <a:ea typeface="Microsoft JhengHei"/>
+                <a:cs typeface="Microsoft JhengHei"/>
+              </a:rPr>
+              <a:t>463 筆查詢／1,550 筆訓練案例</a:t>
+            </a:r>
+          </a:p>
+        </p:txBody>
+      </p:sp>
+      <p:sp>
+        <p:nvSpPr>
+          <p:cNvPr id="7" name="TextBox 7"/>
+          <p:cNvSpPr txBox="1"/>
+          <p:nvPr/>
+        </p:nvSpPr>
+        <p:spPr>
+          <a:xfrm>
+            <a:off x="4352925" y="2038350"/>
+            <a:ext cx="1946338" cy="790575"/>
+          </a:xfrm>
+          <a:prstGeom prst="rect">
+            <a:avLst/>
+          </a:prstGeom>
+          <a:noFill/>
+          <a:ln>
+            <a:noFill/>
+          </a:ln>
+        </p:spPr>
+        <p:txBody>
+          <a:bodyPr wrap="none" lIns="0" tIns="0" rIns="0" bIns="0" anchor="t" anchorCtr="0">
+            <a:spAutoFit/>
+          </a:bodyPr>
+          <a:lstStyle/>
+          <a:p>
+            <a:pPr algn="l"/>
+            <a:r>
+              <a:rPr lang="zh-TW" sz="4050" dirty="0">
+                <a:solidFill>
+                  <a:srgbClr val="121314"/>
+                </a:solidFill>
+                <a:latin typeface="Microsoft JhengHei"/>
+                <a:ea typeface="Microsoft JhengHei"/>
+                <a:cs typeface="Microsoft JhengHei"/>
+              </a:rPr>
+              <a:t>93.89%</a:t>
+            </a:r>
+          </a:p>
+        </p:txBody>
+      </p:sp>
+      <p:sp>
+        <p:nvSpPr>
+          <p:cNvPr id="8" name="TextBox 8"/>
+          <p:cNvSpPr txBox="1"/>
+          <p:nvPr/>
+        </p:nvSpPr>
+        <p:spPr>
+          <a:xfrm>
+            <a:off x="4361307" y="2870200"/>
+            <a:ext cx="902513" cy="410718"/>
+          </a:xfrm>
+          <a:prstGeom prst="rect">
+            <a:avLst/>
+          </a:prstGeom>
+          <a:noFill/>
+          <a:ln>
+            <a:noFill/>
+          </a:ln>
+        </p:spPr>
+        <p:txBody>
+          <a:bodyPr wrap="none" lIns="0" tIns="0" rIns="0" bIns="0" anchor="t" anchorCtr="0">
+            <a:spAutoFit/>
+          </a:bodyPr>
+          <a:lstStyle/>
+          <a:p>
+            <a:pPr algn="l"/>
+            <a:r>
+              <a:rPr lang="en-US" sz="2100" dirty="0">
+                <a:solidFill>
+                  <a:srgbClr val="121314"/>
+                </a:solidFill>
+                <a:latin typeface="Microsoft JhengHei"/>
+                <a:ea typeface="Microsoft JhengHei"/>
+                <a:cs typeface="Microsoft JhengHei"/>
+              </a:rPr>
+              <a:t>MRR@5</a:t>
+            </a:r>
+          </a:p>
+        </p:txBody>
+      </p:sp>
+      <p:sp>
+        <p:nvSpPr>
+          <p:cNvPr id="9" name="TextBox 9"/>
+          <p:cNvSpPr txBox="1"/>
+          <p:nvPr/>
+        </p:nvSpPr>
+        <p:spPr>
+          <a:xfrm>
+            <a:off x="4364736" y="3479800"/>
+            <a:ext cx="1926082" cy="278702"/>
+          </a:xfrm>
+          <a:prstGeom prst="rect">
+            <a:avLst/>
+          </a:prstGeom>
+          <a:noFill/>
+          <a:ln>
+            <a:noFill/>
+          </a:ln>
+        </p:spPr>
+        <p:txBody>
+          <a:bodyPr wrap="none" lIns="0" tIns="0" rIns="0" bIns="0" anchor="t" anchorCtr="0">
+            <a:spAutoFit/>
+          </a:bodyPr>
+          <a:lstStyle/>
+          <a:p>
+            <a:pPr algn="l"/>
+            <a:r>
+              <a:rPr lang="zh-TW" sz="1420" dirty="0">
+                <a:solidFill>
+                  <a:schemeClr val="accent5"/>
+                </a:solidFill>
+                <a:latin typeface="Microsoft JhengHei"/>
+                <a:ea typeface="Microsoft JhengHei"/>
+                <a:cs typeface="Microsoft JhengHei"/>
+              </a:rPr>
+              <a:t>前五筆結果的排序品質</a:t>
+            </a:r>
+          </a:p>
+        </p:txBody>
+      </p:sp>
+      <p:sp>
+        <p:nvSpPr>
+          <p:cNvPr id="10" name="TextBox 10"/>
+          <p:cNvSpPr txBox="1"/>
+          <p:nvPr/>
+        </p:nvSpPr>
+        <p:spPr>
+          <a:xfrm>
+            <a:off x="8115300" y="2038350"/>
+            <a:ext cx="1946338" cy="790575"/>
+          </a:xfrm>
+          <a:prstGeom prst="rect">
+            <a:avLst/>
+          </a:prstGeom>
+          <a:noFill/>
+          <a:ln>
+            <a:noFill/>
+          </a:ln>
+        </p:spPr>
+        <p:txBody>
+          <a:bodyPr wrap="none" lIns="0" tIns="0" rIns="0" bIns="0" anchor="t" anchorCtr="0">
+            <a:spAutoFit/>
+          </a:bodyPr>
+          <a:lstStyle/>
+          <a:p>
+            <a:pPr algn="l"/>
+            <a:r>
+              <a:rPr lang="zh-TW" sz="4050" dirty="0">
+                <a:solidFill>
+                  <a:srgbClr val="121314"/>
+                </a:solidFill>
+                <a:latin typeface="Microsoft JhengHei"/>
+                <a:ea typeface="Microsoft JhengHei"/>
+                <a:cs typeface="Microsoft JhengHei"/>
+              </a:rPr>
+              <a:t>97.11%</a:t>
+            </a:r>
+          </a:p>
+        </p:txBody>
+      </p:sp>
+      <p:sp>
+        <p:nvSpPr>
+          <p:cNvPr id="11" name="TextBox 11"/>
+          <p:cNvSpPr txBox="1"/>
+          <p:nvPr/>
+        </p:nvSpPr>
+        <p:spPr>
+          <a:xfrm>
+            <a:off x="8123682" y="2870200"/>
+            <a:ext cx="1434846" cy="410718"/>
+          </a:xfrm>
+          <a:prstGeom prst="rect">
+            <a:avLst/>
+          </a:prstGeom>
+          <a:noFill/>
+          <a:ln>
+            <a:noFill/>
+          </a:ln>
+        </p:spPr>
+        <p:txBody>
+          <a:bodyPr wrap="none" lIns="0" tIns="0" rIns="0" bIns="0" anchor="t" anchorCtr="0">
+            <a:spAutoFit/>
+          </a:bodyPr>
+          <a:lstStyle/>
+          <a:p>
+            <a:pPr algn="l"/>
+            <a:r>
+              <a:rPr lang="zh-TW" sz="2100" dirty="0">
+                <a:solidFill>
+                  <a:srgbClr val="121314"/>
+                </a:solidFill>
+                <a:latin typeface="Microsoft JhengHei"/>
+                <a:ea typeface="Microsoft JhengHei"/>
+                <a:cs typeface="Microsoft JhengHei"/>
+              </a:rPr>
+              <a:t>支持精確率</a:t>
+            </a:r>
+          </a:p>
+        </p:txBody>
+      </p:sp>
+      <p:sp>
+        <p:nvSpPr>
+          <p:cNvPr id="12" name="TextBox 12"/>
+          <p:cNvSpPr txBox="1"/>
+          <p:nvPr/>
+        </p:nvSpPr>
+        <p:spPr>
+          <a:xfrm>
+            <a:off x="8127111" y="3479800"/>
+            <a:ext cx="2642934" cy="278702"/>
+          </a:xfrm>
+          <a:prstGeom prst="rect">
+            <a:avLst/>
+          </a:prstGeom>
+          <a:noFill/>
+          <a:ln>
+            <a:noFill/>
+          </a:ln>
+        </p:spPr>
+        <p:txBody>
+          <a:bodyPr wrap="none" lIns="0" tIns="0" rIns="0" bIns="0" anchor="t" anchorCtr="0">
+            <a:spAutoFit/>
+          </a:bodyPr>
+          <a:lstStyle/>
+          <a:p>
+            <a:pPr algn="l"/>
+            <a:r>
+              <a:rPr lang="zh-TW" sz="1420" dirty="0">
+                <a:solidFill>
+                  <a:schemeClr val="accent5"/>
+                </a:solidFill>
+                <a:latin typeface="Microsoft JhengHei"/>
+                <a:ea typeface="Microsoft JhengHei"/>
+                <a:cs typeface="Microsoft JhengHei"/>
+              </a:rPr>
+              <a:t>415 支持／13 複核／35 不確定</a:t>
+            </a:r>
+          </a:p>
+        </p:txBody>
+      </p:sp>
+      <p:sp>
+        <p:nvSpPr>
+          <p:cNvPr id="13" name="Rectangle 13"/>
+          <p:cNvSpPr/>
+          <p:nvPr/>
+        </p:nvSpPr>
+        <p:spPr>
+          <a:xfrm>
+            <a:off x="609600" y="4533900"/>
+            <a:ext cx="10972800" cy="1238250"/>
+          </a:xfrm>
+          <a:prstGeom prst="roundRect">
+            <a:avLst>
+              <a:gd name="adj" fmla="val 6154"/>
+            </a:avLst>
+          </a:prstGeom>
+          <a:solidFill>
+            <a:schemeClr val="accent3"/>
+          </a:solidFill>
+          <a:ln>
+            <a:noFill/>
+          </a:ln>
+        </p:spPr>
+      </p:sp>
+      <p:sp>
+        <p:nvSpPr>
+          <p:cNvPr id="14" name="TextBox 14"/>
+          <p:cNvSpPr txBox="1"/>
+          <p:nvPr/>
+        </p:nvSpPr>
+        <p:spPr>
+          <a:xfrm>
+            <a:off x="821055" y="4581525"/>
+            <a:ext cx="1558592" cy="661035"/>
+          </a:xfrm>
+          <a:prstGeom prst="rect">
+            <a:avLst/>
+          </a:prstGeom>
+          <a:noFill/>
+          <a:ln>
+            <a:noFill/>
+          </a:ln>
+        </p:spPr>
+        <p:txBody>
+          <a:bodyPr wrap="none" lIns="0" tIns="0" rIns="0" bIns="0" anchor="t" anchorCtr="0">
+            <a:spAutoFit/>
+          </a:bodyPr>
+          <a:lstStyle/>
+          <a:p>
+            <a:pPr algn="l"/>
+            <a:r>
+              <a:rPr lang="zh-TW" sz="3380" dirty="0">
+                <a:solidFill>
+                  <a:schemeClr val="accent1"/>
+                </a:solidFill>
+                <a:latin typeface="Microsoft JhengHei"/>
+                <a:ea typeface="Microsoft JhengHei"/>
+                <a:cs typeface="Microsoft JhengHei"/>
+              </a:rPr>
+              <a:t>18 / 30</a:t>
+            </a:r>
+          </a:p>
+        </p:txBody>
+      </p:sp>
+      <p:sp>
+        <p:nvSpPr>
+          <p:cNvPr id="15" name="TextBox 15"/>
+          <p:cNvSpPr txBox="1"/>
+          <p:nvPr/>
+        </p:nvSpPr>
+        <p:spPr>
+          <a:xfrm>
+            <a:off x="3704844" y="4759325"/>
+            <a:ext cx="3432429" cy="381381"/>
+          </a:xfrm>
+          <a:prstGeom prst="rect">
+            <a:avLst/>
+          </a:prstGeom>
+          <a:noFill/>
+          <a:ln>
+            <a:noFill/>
+          </a:ln>
+        </p:spPr>
+        <p:txBody>
+          <a:bodyPr wrap="none" lIns="0" tIns="0" rIns="0" bIns="0" anchor="t" anchorCtr="0">
+            <a:spAutoFit/>
+          </a:bodyPr>
+          <a:lstStyle/>
+          <a:p>
+            <a:pPr algn="l"/>
+            <a:r>
+              <a:rPr lang="zh-TW" sz="1950" dirty="0">
+                <a:solidFill>
+                  <a:srgbClr val="121314"/>
+                </a:solidFill>
+                <a:latin typeface="Microsoft JhengHei"/>
+                <a:ea typeface="Microsoft JhengHei"/>
+                <a:cs typeface="Microsoft JhengHei"/>
+              </a:rPr>
+              <a:t>偵測誤判分流至複核或不確定</a:t>
+            </a:r>
+          </a:p>
+        </p:txBody>
+      </p:sp>
+      <p:sp>
+        <p:nvSpPr>
+          <p:cNvPr id="16" name="TextBox 16"/>
+          <p:cNvSpPr txBox="1"/>
+          <p:nvPr/>
+        </p:nvSpPr>
+        <p:spPr>
+          <a:xfrm>
+            <a:off x="829437" y="5213350"/>
+            <a:ext cx="5392898" cy="337376"/>
+          </a:xfrm>
+          <a:prstGeom prst="rect">
+            <a:avLst/>
+          </a:prstGeom>
+          <a:noFill/>
+          <a:ln>
+            <a:noFill/>
+          </a:ln>
+        </p:spPr>
+        <p:txBody>
+          <a:bodyPr wrap="none" lIns="0" tIns="0" rIns="0" bIns="0" anchor="t" anchorCtr="0">
+            <a:spAutoFit/>
+          </a:bodyPr>
+          <a:lstStyle/>
+          <a:p>
+            <a:pPr algn="l"/>
+            <a:r>
+              <a:rPr lang="zh-TW" sz="1720" dirty="0">
+                <a:solidFill>
+                  <a:schemeClr val="accent5"/>
+                </a:solidFill>
+                <a:latin typeface="Microsoft JhengHei"/>
+                <a:ea typeface="Microsoft JhengHei"/>
+                <a:cs typeface="Microsoft JhengHei"/>
+              </a:rPr>
+              <a:t>AI 依案例證據給出稽核結論；正式分類保持可追溯。</a:t>
+            </a:r>
+          </a:p>
+        </p:txBody>
+      </p:sp>
+      <p:sp>
+        <p:nvSpPr>
+          <p:cNvPr id="17" name="TextBox 17"/>
+          <p:cNvSpPr txBox="1"/>
+          <p:nvPr/>
+        </p:nvSpPr>
+        <p:spPr>
+          <a:xfrm>
+            <a:off x="604266" y="6416675"/>
+            <a:ext cx="1617135" cy="205359"/>
+          </a:xfrm>
+          <a:prstGeom prst="rect">
+            <a:avLst/>
+          </a:prstGeom>
+          <a:noFill/>
+          <a:ln>
+            <a:noFill/>
+          </a:ln>
+        </p:spPr>
+        <p:txBody>
+          <a:bodyPr wrap="none" lIns="0" tIns="0" rIns="0" bIns="0" anchor="t" anchorCtr="0">
+            <a:spAutoFit/>
+          </a:bodyPr>
+          <a:lstStyle/>
+          <a:p>
+            <a:pPr algn="l"/>
+            <a:r>
+              <a:rPr lang="zh-TW" sz="1050" dirty="0">
+                <a:solidFill>
+                  <a:schemeClr val="accent5"/>
+                </a:solidFill>
+                <a:latin typeface="Microsoft JhengHei"/>
+                <a:ea typeface="Microsoft JhengHei"/>
+                <a:cs typeface="Microsoft JhengHei"/>
+              </a:rPr>
+              <a:t>AI 資安框架 · 資安技術組</a:t>
+            </a:r>
+          </a:p>
+        </p:txBody>
+      </p:sp>
+      <p:sp>
+        <p:nvSpPr>
+          <p:cNvPr id="18" name="TextBox 18"/>
+          <p:cNvSpPr txBox="1"/>
+          <p:nvPr/>
+        </p:nvSpPr>
+        <p:spPr>
+          <a:xfrm>
+            <a:off x="11103540" y="6416675"/>
+            <a:ext cx="484194" cy="205359"/>
+          </a:xfrm>
+          <a:prstGeom prst="rect">
+            <a:avLst/>
+          </a:prstGeom>
+          <a:noFill/>
+          <a:ln>
+            <a:noFill/>
+          </a:ln>
+        </p:spPr>
+        <p:txBody>
+          <a:bodyPr wrap="none" lIns="0" tIns="0" rIns="0" bIns="0" anchor="t" anchorCtr="0">
+            <a:spAutoFit/>
+          </a:bodyPr>
+          <a:lstStyle/>
+          <a:p>
+            <a:pPr algn="r"/>
+            <a:r>
+              <a:rPr lang="zh-TW" sz="1050" dirty="0">
+                <a:solidFill>
+                  <a:schemeClr val="accent5"/>
+                </a:solidFill>
+                <a:latin typeface="Microsoft JhengHei"/>
+                <a:ea typeface="Microsoft JhengHei"/>
+                <a:cs typeface="Microsoft JhengHei"/>
+              </a:rPr>
+              <a:t>07 / 08</a:t>
+            </a:r>
+          </a:p>
+        </p:txBody>
+      </p:sp>
+    </p:spTree>
+  </p:cSld>
+  <p:clrMapOvr>
+    <a:masterClrMapping/>
+  </p:clrMapOvr>
+  <p:transition xmlns:p14="http://schemas.microsoft.com/office/powerpoint/2010/main" p14:dur="400">
+    <p:fade/>
+  </p:transition>
+</p:sld>
+</file>
+
+<file path=ppt/slides/slide8.xml><?xml version="1.0" encoding="utf-8"?>
 <p:sld xmlns:a="http://schemas.openxmlformats.org/drawingml/2006/main" xmlns:r="http://schemas.openxmlformats.org/officeDocument/2006/relationships" xmlns:p="http://schemas.openxmlformats.org/presentationml/2006/main">
   <p:cSld>
     <p:bg>
@@ -6989,706 +7689,6 @@
         </p:nvSpPr>
         <p:spPr>
           <a:xfrm>
-            <a:off x="603504" y="390525"/>
-            <a:ext cx="1580388" cy="234696"/>
-          </a:xfrm>
-          <a:prstGeom prst="rect">
-            <a:avLst/>
-          </a:prstGeom>
-          <a:noFill/>
-          <a:ln>
-            <a:noFill/>
-          </a:ln>
-        </p:spPr>
-        <p:txBody>
-          <a:bodyPr wrap="none" lIns="0" tIns="0" rIns="0" bIns="0" anchor="t" anchorCtr="0">
-            <a:spAutoFit/>
-          </a:bodyPr>
-          <a:lstStyle/>
-          <a:p>
-            <a:pPr algn="l"/>
-            <a:r>
-              <a:rPr lang="en-US" sz="1200" b="1" dirty="0">
-                <a:solidFill>
-                  <a:schemeClr val="accent2"/>
-                </a:solidFill>
-                <a:latin typeface="Microsoft JhengHei"/>
-                <a:ea typeface="Microsoft JhengHei"/>
-                <a:cs typeface="Microsoft JhengHei"/>
-              </a:rPr>
-              <a:t>MEASURED RESULTS</a:t>
-            </a:r>
-          </a:p>
-        </p:txBody>
-      </p:sp>
-      <p:sp>
-        <p:nvSpPr>
-          <p:cNvPr id="3" name="TextBox 3"/>
-          <p:cNvSpPr txBox="1"/>
-          <p:nvPr/>
-        </p:nvSpPr>
-        <p:spPr>
-          <a:xfrm>
-            <a:off x="592836" y="736600"/>
-            <a:ext cx="6252972" cy="645414"/>
-          </a:xfrm>
-          <a:prstGeom prst="rect">
-            <a:avLst/>
-          </a:prstGeom>
-          <a:noFill/>
-          <a:ln>
-            <a:noFill/>
-          </a:ln>
-        </p:spPr>
-        <p:txBody>
-          <a:bodyPr wrap="none" lIns="0" tIns="0" rIns="0" bIns="0" anchor="t" anchorCtr="0">
-            <a:spAutoFit/>
-          </a:bodyPr>
-          <a:lstStyle/>
-          <a:p>
-            <a:pPr algn="l"/>
-            <a:r>
-              <a:rPr lang="zh-TW" sz="3300" dirty="0">
-                <a:solidFill>
-                  <a:srgbClr val="FFFFFF"/>
-                </a:solidFill>
-                <a:latin typeface="Microsoft JhengHei"/>
-                <a:ea typeface="Microsoft JhengHei"/>
-                <a:cs typeface="Microsoft JhengHei"/>
-              </a:rPr>
-              <a:t>從相似案例，走到可核對的結論</a:t>
-            </a:r>
-          </a:p>
-        </p:txBody>
-      </p:sp>
-      <p:sp>
-        <p:nvSpPr>
-          <p:cNvPr id="4" name="TextBox 4"/>
-          <p:cNvSpPr txBox="1"/>
-          <p:nvPr/>
-        </p:nvSpPr>
-        <p:spPr>
-          <a:xfrm>
-            <a:off x="590550" y="2038350"/>
-            <a:ext cx="1946338" cy="790575"/>
-          </a:xfrm>
-          <a:prstGeom prst="rect">
-            <a:avLst/>
-          </a:prstGeom>
-          <a:noFill/>
-          <a:ln>
-            <a:noFill/>
-          </a:ln>
-        </p:spPr>
-        <p:txBody>
-          <a:bodyPr wrap="none" lIns="0" tIns="0" rIns="0" bIns="0" anchor="t" anchorCtr="0">
-            <a:spAutoFit/>
-          </a:bodyPr>
-          <a:lstStyle/>
-          <a:p>
-            <a:pPr algn="l"/>
-            <a:r>
-              <a:rPr lang="zh-TW" sz="4050" dirty="0">
-                <a:solidFill>
-                  <a:srgbClr val="FFFFFF"/>
-                </a:solidFill>
-                <a:latin typeface="Microsoft JhengHei"/>
-                <a:ea typeface="Microsoft JhengHei"/>
-                <a:cs typeface="Microsoft JhengHei"/>
-              </a:rPr>
-              <a:t>97.62%</a:t>
-            </a:r>
-          </a:p>
-        </p:txBody>
-      </p:sp>
-      <p:sp>
-        <p:nvSpPr>
-          <p:cNvPr id="5" name="TextBox 5"/>
-          <p:cNvSpPr txBox="1"/>
-          <p:nvPr/>
-        </p:nvSpPr>
-        <p:spPr>
-          <a:xfrm>
-            <a:off x="598932" y="2870200"/>
-            <a:ext cx="1747952" cy="410718"/>
-          </a:xfrm>
-          <a:prstGeom prst="rect">
-            <a:avLst/>
-          </a:prstGeom>
-          <a:noFill/>
-          <a:ln>
-            <a:noFill/>
-          </a:ln>
-        </p:spPr>
-        <p:txBody>
-          <a:bodyPr wrap="none" lIns="0" tIns="0" rIns="0" bIns="0" anchor="t" anchorCtr="0">
-            <a:spAutoFit/>
-          </a:bodyPr>
-          <a:lstStyle/>
-          <a:p>
-            <a:pPr algn="l"/>
-            <a:r>
-              <a:rPr lang="zh-TW" sz="2100" dirty="0">
-                <a:solidFill>
-                  <a:srgbClr val="FFFFFF"/>
-                </a:solidFill>
-                <a:latin typeface="Microsoft JhengHei"/>
-                <a:ea typeface="Microsoft JhengHei"/>
-                <a:cs typeface="Microsoft JhengHei"/>
-              </a:rPr>
-              <a:t>Top-5 命中率</a:t>
-            </a:r>
-          </a:p>
-        </p:txBody>
-      </p:sp>
-      <p:sp>
-        <p:nvSpPr>
-          <p:cNvPr id="6" name="TextBox 6"/>
-          <p:cNvSpPr txBox="1"/>
-          <p:nvPr/>
-        </p:nvSpPr>
-        <p:spPr>
-          <a:xfrm>
-            <a:off x="602361" y="3479800"/>
-            <a:ext cx="2690724" cy="278702"/>
-          </a:xfrm>
-          <a:prstGeom prst="rect">
-            <a:avLst/>
-          </a:prstGeom>
-          <a:noFill/>
-          <a:ln>
-            <a:noFill/>
-          </a:ln>
-        </p:spPr>
-        <p:txBody>
-          <a:bodyPr wrap="none" lIns="0" tIns="0" rIns="0" bIns="0" anchor="t" anchorCtr="0">
-            <a:spAutoFit/>
-          </a:bodyPr>
-          <a:lstStyle/>
-          <a:p>
-            <a:pPr algn="l"/>
-            <a:r>
-              <a:rPr lang="zh-TW" sz="1420" dirty="0">
-                <a:solidFill>
-                  <a:schemeClr val="accent6"/>
-                </a:solidFill>
-                <a:latin typeface="Microsoft JhengHei"/>
-                <a:ea typeface="Microsoft JhengHei"/>
-                <a:cs typeface="Microsoft JhengHei"/>
-              </a:rPr>
-              <a:t>463 筆查詢／1,550 筆訓練案例</a:t>
-            </a:r>
-          </a:p>
-        </p:txBody>
-      </p:sp>
-      <p:sp>
-        <p:nvSpPr>
-          <p:cNvPr id="7" name="TextBox 7"/>
-          <p:cNvSpPr txBox="1"/>
-          <p:nvPr/>
-        </p:nvSpPr>
-        <p:spPr>
-          <a:xfrm>
-            <a:off x="4352925" y="2038350"/>
-            <a:ext cx="1946338" cy="790575"/>
-          </a:xfrm>
-          <a:prstGeom prst="rect">
-            <a:avLst/>
-          </a:prstGeom>
-          <a:noFill/>
-          <a:ln>
-            <a:noFill/>
-          </a:ln>
-        </p:spPr>
-        <p:txBody>
-          <a:bodyPr wrap="none" lIns="0" tIns="0" rIns="0" bIns="0" anchor="t" anchorCtr="0">
-            <a:spAutoFit/>
-          </a:bodyPr>
-          <a:lstStyle/>
-          <a:p>
-            <a:pPr algn="l"/>
-            <a:r>
-              <a:rPr lang="zh-TW" sz="4050" dirty="0">
-                <a:solidFill>
-                  <a:srgbClr val="FFFFFF"/>
-                </a:solidFill>
-                <a:latin typeface="Microsoft JhengHei"/>
-                <a:ea typeface="Microsoft JhengHei"/>
-                <a:cs typeface="Microsoft JhengHei"/>
-              </a:rPr>
-              <a:t>93.89%</a:t>
-            </a:r>
-          </a:p>
-        </p:txBody>
-      </p:sp>
-      <p:sp>
-        <p:nvSpPr>
-          <p:cNvPr id="8" name="TextBox 8"/>
-          <p:cNvSpPr txBox="1"/>
-          <p:nvPr/>
-        </p:nvSpPr>
-        <p:spPr>
-          <a:xfrm>
-            <a:off x="4361307" y="2870200"/>
-            <a:ext cx="902513" cy="410718"/>
-          </a:xfrm>
-          <a:prstGeom prst="rect">
-            <a:avLst/>
-          </a:prstGeom>
-          <a:noFill/>
-          <a:ln>
-            <a:noFill/>
-          </a:ln>
-        </p:spPr>
-        <p:txBody>
-          <a:bodyPr wrap="none" lIns="0" tIns="0" rIns="0" bIns="0" anchor="t" anchorCtr="0">
-            <a:spAutoFit/>
-          </a:bodyPr>
-          <a:lstStyle/>
-          <a:p>
-            <a:pPr algn="l"/>
-            <a:r>
-              <a:rPr lang="en-US" sz="2100" dirty="0">
-                <a:solidFill>
-                  <a:srgbClr val="FFFFFF"/>
-                </a:solidFill>
-                <a:latin typeface="Microsoft JhengHei"/>
-                <a:ea typeface="Microsoft JhengHei"/>
-                <a:cs typeface="Microsoft JhengHei"/>
-              </a:rPr>
-              <a:t>MRR@5</a:t>
-            </a:r>
-          </a:p>
-        </p:txBody>
-      </p:sp>
-      <p:sp>
-        <p:nvSpPr>
-          <p:cNvPr id="9" name="TextBox 9"/>
-          <p:cNvSpPr txBox="1"/>
-          <p:nvPr/>
-        </p:nvSpPr>
-        <p:spPr>
-          <a:xfrm>
-            <a:off x="4364736" y="3479800"/>
-            <a:ext cx="1926082" cy="278702"/>
-          </a:xfrm>
-          <a:prstGeom prst="rect">
-            <a:avLst/>
-          </a:prstGeom>
-          <a:noFill/>
-          <a:ln>
-            <a:noFill/>
-          </a:ln>
-        </p:spPr>
-        <p:txBody>
-          <a:bodyPr wrap="none" lIns="0" tIns="0" rIns="0" bIns="0" anchor="t" anchorCtr="0">
-            <a:spAutoFit/>
-          </a:bodyPr>
-          <a:lstStyle/>
-          <a:p>
-            <a:pPr algn="l"/>
-            <a:r>
-              <a:rPr lang="zh-TW" sz="1420" dirty="0">
-                <a:solidFill>
-                  <a:schemeClr val="accent6"/>
-                </a:solidFill>
-                <a:latin typeface="Microsoft JhengHei"/>
-                <a:ea typeface="Microsoft JhengHei"/>
-                <a:cs typeface="Microsoft JhengHei"/>
-              </a:rPr>
-              <a:t>前五筆結果的排序品質</a:t>
-            </a:r>
-          </a:p>
-        </p:txBody>
-      </p:sp>
-      <p:sp>
-        <p:nvSpPr>
-          <p:cNvPr id="10" name="TextBox 10"/>
-          <p:cNvSpPr txBox="1"/>
-          <p:nvPr/>
-        </p:nvSpPr>
-        <p:spPr>
-          <a:xfrm>
-            <a:off x="8115300" y="2038350"/>
-            <a:ext cx="1946338" cy="790575"/>
-          </a:xfrm>
-          <a:prstGeom prst="rect">
-            <a:avLst/>
-          </a:prstGeom>
-          <a:noFill/>
-          <a:ln>
-            <a:noFill/>
-          </a:ln>
-        </p:spPr>
-        <p:txBody>
-          <a:bodyPr wrap="none" lIns="0" tIns="0" rIns="0" bIns="0" anchor="t" anchorCtr="0">
-            <a:spAutoFit/>
-          </a:bodyPr>
-          <a:lstStyle/>
-          <a:p>
-            <a:pPr algn="l"/>
-            <a:r>
-              <a:rPr lang="zh-TW" sz="4050" dirty="0">
-                <a:solidFill>
-                  <a:srgbClr val="FFFFFF"/>
-                </a:solidFill>
-                <a:latin typeface="Microsoft JhengHei"/>
-                <a:ea typeface="Microsoft JhengHei"/>
-                <a:cs typeface="Microsoft JhengHei"/>
-              </a:rPr>
-              <a:t>97.11%</a:t>
-            </a:r>
-          </a:p>
-        </p:txBody>
-      </p:sp>
-      <p:sp>
-        <p:nvSpPr>
-          <p:cNvPr id="11" name="TextBox 11"/>
-          <p:cNvSpPr txBox="1"/>
-          <p:nvPr/>
-        </p:nvSpPr>
-        <p:spPr>
-          <a:xfrm>
-            <a:off x="8123682" y="2870200"/>
-            <a:ext cx="1434846" cy="410718"/>
-          </a:xfrm>
-          <a:prstGeom prst="rect">
-            <a:avLst/>
-          </a:prstGeom>
-          <a:noFill/>
-          <a:ln>
-            <a:noFill/>
-          </a:ln>
-        </p:spPr>
-        <p:txBody>
-          <a:bodyPr wrap="none" lIns="0" tIns="0" rIns="0" bIns="0" anchor="t" anchorCtr="0">
-            <a:spAutoFit/>
-          </a:bodyPr>
-          <a:lstStyle/>
-          <a:p>
-            <a:pPr algn="l"/>
-            <a:r>
-              <a:rPr lang="zh-TW" sz="2100" dirty="0">
-                <a:solidFill>
-                  <a:srgbClr val="FFFFFF"/>
-                </a:solidFill>
-                <a:latin typeface="Microsoft JhengHei"/>
-                <a:ea typeface="Microsoft JhengHei"/>
-                <a:cs typeface="Microsoft JhengHei"/>
-              </a:rPr>
-              <a:t>支持精確率</a:t>
-            </a:r>
-          </a:p>
-        </p:txBody>
-      </p:sp>
-      <p:sp>
-        <p:nvSpPr>
-          <p:cNvPr id="12" name="TextBox 12"/>
-          <p:cNvSpPr txBox="1"/>
-          <p:nvPr/>
-        </p:nvSpPr>
-        <p:spPr>
-          <a:xfrm>
-            <a:off x="8127111" y="3479800"/>
-            <a:ext cx="2642934" cy="278702"/>
-          </a:xfrm>
-          <a:prstGeom prst="rect">
-            <a:avLst/>
-          </a:prstGeom>
-          <a:noFill/>
-          <a:ln>
-            <a:noFill/>
-          </a:ln>
-        </p:spPr>
-        <p:txBody>
-          <a:bodyPr wrap="none" lIns="0" tIns="0" rIns="0" bIns="0" anchor="t" anchorCtr="0">
-            <a:spAutoFit/>
-          </a:bodyPr>
-          <a:lstStyle/>
-          <a:p>
-            <a:pPr algn="l"/>
-            <a:r>
-              <a:rPr lang="zh-TW" sz="1420" dirty="0">
-                <a:solidFill>
-                  <a:schemeClr val="accent6"/>
-                </a:solidFill>
-                <a:latin typeface="Microsoft JhengHei"/>
-                <a:ea typeface="Microsoft JhengHei"/>
-                <a:cs typeface="Microsoft JhengHei"/>
-              </a:rPr>
-              <a:t>415 支持／13 複核／35 不確定</a:t>
-            </a:r>
-          </a:p>
-        </p:txBody>
-      </p:sp>
-      <p:sp>
-        <p:nvSpPr>
-          <p:cNvPr id="13" name="Rectangle 13"/>
-          <p:cNvSpPr/>
-          <p:nvPr/>
-        </p:nvSpPr>
-        <p:spPr>
-          <a:xfrm>
-            <a:off x="609600" y="4533900"/>
-            <a:ext cx="10972800" cy="1238250"/>
-          </a:xfrm>
-          <a:prstGeom prst="roundRect">
-            <a:avLst>
-              <a:gd name="adj" fmla="val 6154"/>
-            </a:avLst>
-          </a:prstGeom>
-          <a:solidFill>
-            <a:schemeClr val="accent3"/>
-          </a:solidFill>
-          <a:ln>
-            <a:noFill/>
-          </a:ln>
-        </p:spPr>
-      </p:sp>
-      <p:sp>
-        <p:nvSpPr>
-          <p:cNvPr id="14" name="TextBox 14"/>
-          <p:cNvSpPr txBox="1"/>
-          <p:nvPr/>
-        </p:nvSpPr>
-        <p:spPr>
-          <a:xfrm>
-            <a:off x="821055" y="4581525"/>
-            <a:ext cx="1558592" cy="661035"/>
-          </a:xfrm>
-          <a:prstGeom prst="rect">
-            <a:avLst/>
-          </a:prstGeom>
-          <a:noFill/>
-          <a:ln>
-            <a:noFill/>
-          </a:ln>
-        </p:spPr>
-        <p:txBody>
-          <a:bodyPr wrap="none" lIns="0" tIns="0" rIns="0" bIns="0" anchor="t" anchorCtr="0">
-            <a:spAutoFit/>
-          </a:bodyPr>
-          <a:lstStyle/>
-          <a:p>
-            <a:pPr algn="l"/>
-            <a:r>
-              <a:rPr lang="zh-TW" sz="3380" dirty="0">
-                <a:solidFill>
-                  <a:schemeClr val="accent2"/>
-                </a:solidFill>
-                <a:latin typeface="Microsoft JhengHei"/>
-                <a:ea typeface="Microsoft JhengHei"/>
-                <a:cs typeface="Microsoft JhengHei"/>
-              </a:rPr>
-              <a:t>18 / 30</a:t>
-            </a:r>
-          </a:p>
-        </p:txBody>
-      </p:sp>
-      <p:sp>
-        <p:nvSpPr>
-          <p:cNvPr id="15" name="TextBox 15"/>
-          <p:cNvSpPr txBox="1"/>
-          <p:nvPr/>
-        </p:nvSpPr>
-        <p:spPr>
-          <a:xfrm>
-            <a:off x="3704844" y="4759325"/>
-            <a:ext cx="3432429" cy="381381"/>
-          </a:xfrm>
-          <a:prstGeom prst="rect">
-            <a:avLst/>
-          </a:prstGeom>
-          <a:noFill/>
-          <a:ln>
-            <a:noFill/>
-          </a:ln>
-        </p:spPr>
-        <p:txBody>
-          <a:bodyPr wrap="none" lIns="0" tIns="0" rIns="0" bIns="0" anchor="t" anchorCtr="0">
-            <a:spAutoFit/>
-          </a:bodyPr>
-          <a:lstStyle/>
-          <a:p>
-            <a:pPr algn="l"/>
-            <a:r>
-              <a:rPr lang="zh-TW" sz="1950" dirty="0">
-                <a:solidFill>
-                  <a:srgbClr val="FFFFFF"/>
-                </a:solidFill>
-                <a:latin typeface="Microsoft JhengHei"/>
-                <a:ea typeface="Microsoft JhengHei"/>
-                <a:cs typeface="Microsoft JhengHei"/>
-              </a:rPr>
-              <a:t>偵測誤判分流至複核或不確定</a:t>
-            </a:r>
-          </a:p>
-        </p:txBody>
-      </p:sp>
-      <p:sp>
-        <p:nvSpPr>
-          <p:cNvPr id="16" name="TextBox 16"/>
-          <p:cNvSpPr txBox="1"/>
-          <p:nvPr/>
-        </p:nvSpPr>
-        <p:spPr>
-          <a:xfrm>
-            <a:off x="829437" y="5213350"/>
-            <a:ext cx="5392898" cy="337376"/>
-          </a:xfrm>
-          <a:prstGeom prst="rect">
-            <a:avLst/>
-          </a:prstGeom>
-          <a:noFill/>
-          <a:ln>
-            <a:noFill/>
-          </a:ln>
-        </p:spPr>
-        <p:txBody>
-          <a:bodyPr wrap="none" lIns="0" tIns="0" rIns="0" bIns="0" anchor="t" anchorCtr="0">
-            <a:spAutoFit/>
-          </a:bodyPr>
-          <a:lstStyle/>
-          <a:p>
-            <a:pPr algn="l"/>
-            <a:r>
-              <a:rPr lang="zh-TW" sz="1720" dirty="0">
-                <a:solidFill>
-                  <a:schemeClr val="accent6"/>
-                </a:solidFill>
-                <a:latin typeface="Microsoft JhengHei"/>
-                <a:ea typeface="Microsoft JhengHei"/>
-                <a:cs typeface="Microsoft JhengHei"/>
-              </a:rPr>
-              <a:t>AI 依案例證據給出稽核結論；正式分類保持可追溯。</a:t>
-            </a:r>
-          </a:p>
-        </p:txBody>
-      </p:sp>
-      <p:sp>
-        <p:nvSpPr>
-          <p:cNvPr id="17" name="TextBox 17"/>
-          <p:cNvSpPr txBox="1"/>
-          <p:nvPr/>
-        </p:nvSpPr>
-        <p:spPr>
-          <a:xfrm>
-            <a:off x="604266" y="6416675"/>
-            <a:ext cx="1617135" cy="205359"/>
-          </a:xfrm>
-          <a:prstGeom prst="rect">
-            <a:avLst/>
-          </a:prstGeom>
-          <a:noFill/>
-          <a:ln>
-            <a:noFill/>
-          </a:ln>
-        </p:spPr>
-        <p:txBody>
-          <a:bodyPr wrap="none" lIns="0" tIns="0" rIns="0" bIns="0" anchor="t" anchorCtr="0">
-            <a:spAutoFit/>
-          </a:bodyPr>
-          <a:lstStyle/>
-          <a:p>
-            <a:pPr algn="l"/>
-            <a:r>
-              <a:rPr lang="zh-TW" sz="1050" dirty="0">
-                <a:solidFill>
-                  <a:schemeClr val="accent6"/>
-                </a:solidFill>
-                <a:latin typeface="Microsoft JhengHei"/>
-                <a:ea typeface="Microsoft JhengHei"/>
-                <a:cs typeface="Microsoft JhengHei"/>
-              </a:rPr>
-              <a:t>AI 資安框架 · 資安技術組</a:t>
-            </a:r>
-          </a:p>
-        </p:txBody>
-      </p:sp>
-      <p:sp>
-        <p:nvSpPr>
-          <p:cNvPr id="18" name="TextBox 18"/>
-          <p:cNvSpPr txBox="1"/>
-          <p:nvPr/>
-        </p:nvSpPr>
-        <p:spPr>
-          <a:xfrm>
-            <a:off x="11103540" y="6416675"/>
-            <a:ext cx="484194" cy="205359"/>
-          </a:xfrm>
-          <a:prstGeom prst="rect">
-            <a:avLst/>
-          </a:prstGeom>
-          <a:noFill/>
-          <a:ln>
-            <a:noFill/>
-          </a:ln>
-        </p:spPr>
-        <p:txBody>
-          <a:bodyPr wrap="none" lIns="0" tIns="0" rIns="0" bIns="0" anchor="t" anchorCtr="0">
-            <a:spAutoFit/>
-          </a:bodyPr>
-          <a:lstStyle/>
-          <a:p>
-            <a:pPr algn="r"/>
-            <a:r>
-              <a:rPr lang="zh-TW" sz="1050" dirty="0">
-                <a:solidFill>
-                  <a:schemeClr val="accent6"/>
-                </a:solidFill>
-                <a:latin typeface="Microsoft JhengHei"/>
-                <a:ea typeface="Microsoft JhengHei"/>
-                <a:cs typeface="Microsoft JhengHei"/>
-              </a:rPr>
-              <a:t>07 / 08</a:t>
-            </a:r>
-          </a:p>
-        </p:txBody>
-      </p:sp>
-    </p:spTree>
-  </p:cSld>
-  <p:clrMapOvr>
-    <a:masterClrMapping/>
-  </p:clrMapOvr>
-  <p:transition xmlns:p14="http://schemas.microsoft.com/office/powerpoint/2010/main" p14:dur="400">
-    <p:fade/>
-  </p:transition>
-</p:sld>
-</file>
-
-<file path=ppt/slides/slide8.xml><?xml version="1.0" encoding="utf-8"?>
-<p:sld xmlns:a="http://schemas.openxmlformats.org/drawingml/2006/main" xmlns:r="http://schemas.openxmlformats.org/officeDocument/2006/relationships" xmlns:p="http://schemas.openxmlformats.org/presentationml/2006/main">
-  <p:cSld>
-    <p:bg>
-      <p:bgPr>
-        <a:solidFill>
-          <a:schemeClr val="accent1"/>
-        </a:solidFill>
-        <a:effectLst/>
-      </p:bgPr>
-    </p:bg>
-    <p:spTree>
-      <p:nvGrpSpPr>
-        <p:cNvPr id="1" name=""/>
-        <p:cNvGrpSpPr/>
-        <p:nvPr/>
-      </p:nvGrpSpPr>
-      <p:grpSpPr>
-        <a:xfrm>
-          <a:off x="0" y="0"/>
-          <a:ext cx="0" cy="0"/>
-          <a:chOff x="0" y="0"/>
-          <a:chExt cx="0" cy="0"/>
-        </a:xfrm>
-      </p:grpSpPr>
-      <p:sp>
-        <p:nvSpPr>
-          <p:cNvPr id="2" name="TextBox 2"/>
-          <p:cNvSpPr txBox="1"/>
-          <p:nvPr/>
-        </p:nvSpPr>
-        <p:spPr>
-          <a:xfrm>
             <a:off x="602742" y="711200"/>
             <a:ext cx="2261837" cy="264033"/>
           </a:xfrm>
@@ -7710,7 +7710,7 @@
             <a:r>
               <a:rPr lang="en-US" sz="1350" b="1" dirty="0">
                 <a:solidFill>
-                  <a:srgbClr val="FFFFFF"/>
+                  <a:srgbClr val="121314"/>
                 </a:solidFill>
                 <a:latin typeface="Microsoft JhengHei"/>
                 <a:ea typeface="Microsoft JhengHei"/>
@@ -7750,7 +7750,7 @@
             <a:r>
               <a:rPr lang="zh-TW" sz="4200" dirty="0">
                 <a:solidFill>
-                  <a:srgbClr val="FFFFFF"/>
+                  <a:srgbClr val="121314"/>
                 </a:solidFill>
                 <a:latin typeface="Microsoft JhengHei"/>
                 <a:ea typeface="Microsoft JhengHei"/>
@@ -7790,7 +7790,7 @@
             <a:r>
               <a:rPr lang="zh-TW" sz="4200" dirty="0">
                 <a:solidFill>
-                  <a:srgbClr val="FFFFFF"/>
+                  <a:srgbClr val="121314"/>
                 </a:solidFill>
                 <a:latin typeface="Microsoft JhengHei"/>
                 <a:ea typeface="Microsoft JhengHei"/>
@@ -7830,7 +7830,7 @@
             <a:r>
               <a:rPr lang="zh-TW" sz="4200" dirty="0">
                 <a:solidFill>
-                  <a:srgbClr val="FFFFFF"/>
+                  <a:srgbClr val="121314"/>
                 </a:solidFill>
                 <a:latin typeface="Microsoft JhengHei"/>
                 <a:ea typeface="Microsoft JhengHei"/>
@@ -7894,7 +7894,7 @@
             <a:r>
               <a:rPr lang="zh-TW" sz="2100" dirty="0">
                 <a:solidFill>
-                  <a:srgbClr val="FFFFFF"/>
+                  <a:srgbClr val="121314"/>
                 </a:solidFill>
                 <a:latin typeface="Microsoft JhengHei"/>
                 <a:ea typeface="Microsoft JhengHei"/>
@@ -7934,7 +7934,7 @@
             <a:r>
               <a:rPr lang="zh-TW" sz="1650" dirty="0">
                 <a:solidFill>
-                  <a:srgbClr val="FFFFFF"/>
+                  <a:srgbClr val="121314"/>
                 </a:solidFill>
                 <a:latin typeface="Microsoft JhengHei"/>
                 <a:ea typeface="Microsoft JhengHei"/>
@@ -7970,16 +7970,16 @@
         <a:srgbClr val="1F497D"/>
       </a:dk2>
       <a:lt2>
-        <a:srgbClr val="000000"/>
+        <a:srgbClr val="F2F7FC"/>
       </a:lt2>
       <a:accent1>
         <a:srgbClr val="0070D1"/>
       </a:accent1>
       <a:accent2>
-        <a:srgbClr val="53B1FF"/>
+        <a:srgbClr val="0070D1"/>
       </a:accent2>
       <a:accent3>
-        <a:srgbClr val="181818"/>
+        <a:srgbClr val="F5F7FA"/>
       </a:accent3>
       <a:accent4>
         <a:srgbClr val="0070D1"/>
@@ -7991,10 +7991,10 @@
         <a:srgbClr val="CCCCCC"/>
       </a:accent6>
       <a:hlink>
-        <a:srgbClr val="53B1FF"/>
+        <a:srgbClr val="0070D1"/>
       </a:hlink>
       <a:folHlink>
-        <a:srgbClr val="181818"/>
+        <a:srgbClr val="F5F7FA"/>
       </a:folHlink>
     </a:clrScheme>
     <a:fontScheme name="finals_editorial">
@@ -8290,16 +8290,16 @@
         <a:srgbClr val="1F497D"/>
       </a:dk2>
       <a:lt2>
-        <a:srgbClr val="000000"/>
+        <a:srgbClr val="F2F7FC"/>
       </a:lt2>
       <a:accent1>
         <a:srgbClr val="0070D1"/>
       </a:accent1>
       <a:accent2>
-        <a:srgbClr val="53B1FF"/>
+        <a:srgbClr val="0070D1"/>
       </a:accent2>
       <a:accent3>
-        <a:srgbClr val="181818"/>
+        <a:srgbClr val="F5F7FA"/>
       </a:accent3>
       <a:accent4>
         <a:srgbClr val="0070D1"/>
@@ -8311,10 +8311,10 @@
         <a:srgbClr val="CCCCCC"/>
       </a:accent6>
       <a:hlink>
-        <a:srgbClr val="53B1FF"/>
+        <a:srgbClr val="0070D1"/>
       </a:hlink>
       <a:folHlink>
-        <a:srgbClr val="181818"/>
+        <a:srgbClr val="F5F7FA"/>
       </a:folHlink>
     </a:clrScheme>
     <a:fontScheme name="finals_editorial">

--- a/deliverables/決賽簡報_AI資安框架.pptx
+++ b/deliverables/決賽簡報_AI資安框架.pptx
@@ -1894,7 +1894,7 @@
               </a:avLst>
             </a:prstGeom>
             <a:solidFill>
-              <a:schemeClr val="accent1"/>
+              <a:schemeClr val="accent2"/>
             </a:solidFill>
             <a:ln>
               <a:noFill/>
@@ -1985,7 +1985,7 @@
               <a:r>
                 <a:rPr lang="zh-TW" sz="3220" dirty="0">
                   <a:solidFill>
-                    <a:srgbClr val="121314"/>
+                    <a:schemeClr val="accent5"/>
                   </a:solidFill>
                   <a:latin typeface="Times New Roman"/>
                   <a:ea typeface="DFKai-SB"/>
@@ -2025,7 +2025,7 @@
               <a:r>
                 <a:rPr lang="zh-TW" sz="3220" dirty="0">
                   <a:solidFill>
-                    <a:srgbClr val="121314"/>
+                    <a:schemeClr val="accent5"/>
                   </a:solidFill>
                   <a:latin typeface="Times New Roman"/>
                   <a:ea typeface="DFKai-SB"/>
@@ -2065,7 +2065,7 @@
               <a:r>
                 <a:rPr lang="zh-TW" sz="3220" dirty="0">
                   <a:solidFill>
-                    <a:srgbClr val="121314"/>
+                    <a:schemeClr val="accent5"/>
                   </a:solidFill>
                   <a:latin typeface="Times New Roman"/>
                   <a:ea typeface="DFKai-SB"/>
@@ -2076,7 +2076,7 @@
               <a:r>
                 <a:rPr lang="en-US" sz="3220" dirty="0">
                   <a:solidFill>
-                    <a:srgbClr val="121314"/>
+                    <a:schemeClr val="accent5"/>
                   </a:solidFill>
                   <a:latin typeface="Times New Roman"/>
                   <a:ea typeface="DFKai-SB"/>
@@ -2087,7 +2087,7 @@
               <a:r>
                 <a:rPr lang="zh-TW" sz="3220" dirty="0">
                   <a:solidFill>
-                    <a:srgbClr val="121314"/>
+                    <a:schemeClr val="accent5"/>
                   </a:solidFill>
                   <a:latin typeface="Times New Roman"/>
                   <a:ea typeface="DFKai-SB"/>
@@ -2127,7 +2127,7 @@
               <a:r>
                 <a:rPr lang="zh-TW" sz="2100" dirty="0">
                   <a:solidFill>
-                    <a:schemeClr val="accent5"/>
+                    <a:schemeClr val="accent6"/>
                   </a:solidFill>
                   <a:latin typeface="Times New Roman"/>
                   <a:ea typeface="DFKai-SB"/>
@@ -2559,7 +2559,7 @@
               <a:noFill/>
               <a:ln w="13395" cap="rnd">
                 <a:solidFill>
-                  <a:srgbClr val="95BADC"/>
+                  <a:srgbClr val="7294A9"/>
                 </a:solidFill>
               </a:ln>
             </p:spPr>
@@ -2595,7 +2595,7 @@
               <a:noFill/>
               <a:ln w="13395" cap="rnd">
                 <a:solidFill>
-                  <a:srgbClr val="95BADC"/>
+                  <a:srgbClr val="7294A9"/>
                 </a:solidFill>
               </a:ln>
             </p:spPr>
@@ -2631,7 +2631,7 @@
               <a:noFill/>
               <a:ln w="13395" cap="rnd">
                 <a:solidFill>
-                  <a:srgbClr val="95BADC"/>
+                  <a:srgbClr val="7294A9"/>
                 </a:solidFill>
               </a:ln>
             </p:spPr>
@@ -2667,7 +2667,7 @@
               <a:noFill/>
               <a:ln w="13395" cap="rnd">
                 <a:solidFill>
-                  <a:srgbClr val="95BADC"/>
+                  <a:srgbClr val="7294A9"/>
                 </a:solidFill>
               </a:ln>
             </p:spPr>
@@ -2702,7 +2702,7 @@
                 <a:avLst/>
               </a:prstGeom>
               <a:solidFill>
-                <a:srgbClr val="E7F1FB"/>
+                <a:srgbClr val="EAF0F4"/>
               </a:solidFill>
               <a:ln w="7441">
                 <a:solidFill>
@@ -3057,7 +3057,7 @@
             <a:noFill/>
             <a:ln w="9525">
               <a:solidFill>
-                <a:srgbClr val="E3EAF2"/>
+                <a:srgbClr val="D6DDE0"/>
               </a:solidFill>
             </a:ln>
           </p:spPr>
@@ -3091,7 +3091,7 @@
               <a:r>
                 <a:rPr lang="en-US" sz="1120" dirty="0">
                   <a:solidFill>
-                    <a:schemeClr val="accent5"/>
+                    <a:schemeClr val="accent6"/>
                   </a:solidFill>
                   <a:latin typeface="Times New Roman"/>
                   <a:ea typeface="DFKai-SB"/>
@@ -3102,7 +3102,7 @@
               <a:r>
                 <a:rPr lang="zh-TW" sz="1120" dirty="0">
                   <a:solidFill>
-                    <a:schemeClr val="accent5"/>
+                    <a:schemeClr val="accent6"/>
                   </a:solidFill>
                   <a:latin typeface="Times New Roman"/>
                   <a:ea typeface="DFKai-SB"/>
@@ -3142,7 +3142,7 @@
               <a:r>
                 <a:rPr lang="zh-TW" sz="1120" dirty="0">
                   <a:solidFill>
-                    <a:schemeClr val="accent5"/>
+                    <a:schemeClr val="accent6"/>
                   </a:solidFill>
                   <a:latin typeface="Times New Roman"/>
                   <a:ea typeface="DFKai-SB"/>
@@ -3218,7 +3218,7 @@
               </a:avLst>
             </a:prstGeom>
             <a:solidFill>
-              <a:schemeClr val="accent1"/>
+              <a:schemeClr val="accent2"/>
             </a:solidFill>
             <a:ln>
               <a:noFill/>
@@ -3294,7 +3294,7 @@
               <a:r>
                 <a:rPr lang="zh-TW" sz="3150" dirty="0">
                   <a:solidFill>
-                    <a:srgbClr val="121314"/>
+                    <a:schemeClr val="accent5"/>
                   </a:solidFill>
                   <a:latin typeface="Times New Roman"/>
                   <a:ea typeface="DFKai-SB"/>
@@ -3361,7 +3361,7 @@
               </a:avLst>
             </a:prstGeom>
             <a:solidFill>
-              <a:srgbClr val="EAF3FC"/>
+              <a:srgbClr val="EAF0F4"/>
             </a:solidFill>
             <a:ln>
               <a:noFill/>
@@ -3437,7 +3437,7 @@
               <a:r>
                 <a:rPr lang="zh-TW" sz="1950" b="1" dirty="0">
                   <a:solidFill>
-                    <a:srgbClr val="121314"/>
+                    <a:schemeClr val="dk1"/>
                   </a:solidFill>
                   <a:latin typeface="Times New Roman"/>
                   <a:ea typeface="DFKai-SB"/>
@@ -3448,7 +3448,7 @@
               <a:r>
                 <a:rPr lang="en-US" sz="1950" b="1" dirty="0">
                   <a:solidFill>
-                    <a:srgbClr val="121314"/>
+                    <a:schemeClr val="dk1"/>
                   </a:solidFill>
                   <a:latin typeface="Times New Roman"/>
                   <a:ea typeface="DFKai-SB"/>
@@ -3459,7 +3459,7 @@
               <a:r>
                 <a:rPr lang="zh-TW" sz="1950" b="1" dirty="0">
                   <a:solidFill>
-                    <a:srgbClr val="121314"/>
+                    <a:schemeClr val="dk1"/>
                   </a:solidFill>
                   <a:latin typeface="Times New Roman"/>
                   <a:ea typeface="DFKai-SB"/>
@@ -3470,7 +3470,7 @@
               <a:r>
                 <a:rPr lang="en-US" sz="1950" b="1" dirty="0">
                   <a:solidFill>
-                    <a:srgbClr val="121314"/>
+                    <a:schemeClr val="dk1"/>
                   </a:solidFill>
                   <a:latin typeface="Times New Roman"/>
                   <a:ea typeface="DFKai-SB"/>
@@ -3481,7 +3481,7 @@
               <a:r>
                 <a:rPr lang="zh-TW" sz="1950" b="1" dirty="0">
                   <a:solidFill>
-                    <a:srgbClr val="121314"/>
+                    <a:schemeClr val="dk1"/>
                   </a:solidFill>
                   <a:latin typeface="Times New Roman"/>
                   <a:ea typeface="DFKai-SB"/>
@@ -3841,7 +3841,7 @@
               <a:noFill/>
               <a:ln w="22503" cap="rnd">
                 <a:solidFill>
-                  <a:srgbClr val="95BADC"/>
+                  <a:srgbClr val="7294A9"/>
                 </a:solidFill>
               </a:ln>
             </p:spPr>
@@ -3877,7 +3877,7 @@
               <a:noFill/>
               <a:ln w="22503" cap="rnd">
                 <a:solidFill>
-                  <a:srgbClr val="95BADC"/>
+                  <a:srgbClr val="7294A9"/>
                 </a:solidFill>
               </a:ln>
             </p:spPr>
@@ -3913,7 +3913,7 @@
               <a:noFill/>
               <a:ln w="22503" cap="rnd">
                 <a:solidFill>
-                  <a:srgbClr val="95BADC"/>
+                  <a:srgbClr val="7294A9"/>
                 </a:solidFill>
               </a:ln>
             </p:spPr>
@@ -3949,7 +3949,7 @@
               <a:noFill/>
               <a:ln w="22503" cap="rnd">
                 <a:solidFill>
-                  <a:srgbClr val="95BADC"/>
+                  <a:srgbClr val="7294A9"/>
                 </a:solidFill>
               </a:ln>
             </p:spPr>
@@ -3984,7 +3984,7 @@
                 <a:avLst/>
               </a:prstGeom>
               <a:solidFill>
-                <a:srgbClr val="E7F1FB"/>
+                <a:srgbClr val="EAF0F4"/>
               </a:solidFill>
               <a:ln w="12502">
                 <a:solidFill>
@@ -4365,7 +4365,7 @@
               <a:r>
                 <a:rPr lang="zh-TW" sz="1580" dirty="0">
                   <a:solidFill>
-                    <a:schemeClr val="accent5"/>
+                    <a:schemeClr val="accent6"/>
                   </a:solidFill>
                   <a:latin typeface="Times New Roman"/>
                   <a:ea typeface="DFKai-SB"/>
@@ -4417,7 +4417,7 @@
               </a:avLst>
             </a:prstGeom>
             <a:solidFill>
-              <a:srgbClr val="EAF3FC"/>
+              <a:srgbClr val="EAF0F4"/>
             </a:solidFill>
             <a:ln>
               <a:noFill/>
@@ -4493,7 +4493,7 @@
               <a:r>
                 <a:rPr lang="zh-TW" sz="1950" b="1" dirty="0">
                   <a:solidFill>
-                    <a:srgbClr val="121314"/>
+                    <a:schemeClr val="dk1"/>
                   </a:solidFill>
                   <a:latin typeface="Times New Roman"/>
                   <a:ea typeface="DFKai-SB"/>
@@ -4575,7 +4575,7 @@
               <a:noFill/>
               <a:ln w="15180" cap="rnd">
                 <a:solidFill>
-                  <a:srgbClr val="95BADC"/>
+                  <a:srgbClr val="7294A9"/>
                 </a:solidFill>
               </a:ln>
             </p:spPr>
@@ -4611,7 +4611,7 @@
               <a:noFill/>
               <a:ln w="15180" cap="rnd">
                 <a:solidFill>
-                  <a:srgbClr val="95BADC"/>
+                  <a:srgbClr val="7294A9"/>
                 </a:solidFill>
               </a:ln>
             </p:spPr>
@@ -4647,7 +4647,7 @@
               <a:noFill/>
               <a:ln w="15180" cap="rnd">
                 <a:solidFill>
-                  <a:srgbClr val="95BADC"/>
+                  <a:srgbClr val="7294A9"/>
                 </a:solidFill>
               </a:ln>
             </p:spPr>
@@ -4683,7 +4683,7 @@
               <a:noFill/>
               <a:ln w="15180" cap="rnd">
                 <a:solidFill>
-                  <a:srgbClr val="95BADC"/>
+                  <a:srgbClr val="7294A9"/>
                 </a:solidFill>
               </a:ln>
             </p:spPr>
@@ -4875,7 +4875,7 @@
               <a:noFill/>
               <a:ln w="15180" cap="rnd">
                 <a:solidFill>
-                  <a:srgbClr val="95BADC"/>
+                  <a:srgbClr val="7294A9"/>
                 </a:solidFill>
               </a:ln>
             </p:spPr>
@@ -4911,7 +4911,7 @@
               <a:noFill/>
               <a:ln w="15180" cap="rnd">
                 <a:solidFill>
-                  <a:srgbClr val="95BADC"/>
+                  <a:srgbClr val="7294A9"/>
                 </a:solidFill>
               </a:ln>
             </p:spPr>
@@ -4947,7 +4947,7 @@
               <a:noFill/>
               <a:ln w="15180" cap="rnd">
                 <a:solidFill>
-                  <a:srgbClr val="95BADC"/>
+                  <a:srgbClr val="7294A9"/>
                 </a:solidFill>
               </a:ln>
             </p:spPr>
@@ -4983,7 +4983,7 @@
               <a:noFill/>
               <a:ln w="15180" cap="rnd">
                 <a:solidFill>
-                  <a:srgbClr val="95BADC"/>
+                  <a:srgbClr val="7294A9"/>
                 </a:solidFill>
               </a:ln>
             </p:spPr>
@@ -5186,7 +5186,7 @@
               <a:noFill/>
               <a:ln w="15180" cap="rnd">
                 <a:solidFill>
-                  <a:srgbClr val="95BADC"/>
+                  <a:srgbClr val="7294A9"/>
                 </a:solidFill>
               </a:ln>
             </p:spPr>
@@ -5222,7 +5222,7 @@
               <a:noFill/>
               <a:ln w="15180" cap="rnd">
                 <a:solidFill>
-                  <a:srgbClr val="95BADC"/>
+                  <a:srgbClr val="7294A9"/>
                 </a:solidFill>
               </a:ln>
             </p:spPr>
@@ -5258,7 +5258,7 @@
               <a:noFill/>
               <a:ln w="15180" cap="rnd">
                 <a:solidFill>
-                  <a:srgbClr val="95BADC"/>
+                  <a:srgbClr val="7294A9"/>
                 </a:solidFill>
               </a:ln>
             </p:spPr>
@@ -5294,7 +5294,7 @@
               <a:noFill/>
               <a:ln w="15180" cap="rnd">
                 <a:solidFill>
-                  <a:srgbClr val="95BADC"/>
+                  <a:srgbClr val="7294A9"/>
                 </a:solidFill>
               </a:ln>
             </p:spPr>
@@ -5486,7 +5486,7 @@
               <a:noFill/>
               <a:ln w="15180" cap="rnd">
                 <a:solidFill>
-                  <a:srgbClr val="95BADC"/>
+                  <a:srgbClr val="7294A9"/>
                 </a:solidFill>
               </a:ln>
             </p:spPr>
@@ -5522,7 +5522,7 @@
               <a:noFill/>
               <a:ln w="15180" cap="rnd">
                 <a:solidFill>
-                  <a:srgbClr val="95BADC"/>
+                  <a:srgbClr val="7294A9"/>
                 </a:solidFill>
               </a:ln>
             </p:spPr>
@@ -5558,7 +5558,7 @@
               <a:noFill/>
               <a:ln w="15180" cap="rnd">
                 <a:solidFill>
-                  <a:srgbClr val="95BADC"/>
+                  <a:srgbClr val="7294A9"/>
                 </a:solidFill>
               </a:ln>
             </p:spPr>
@@ -5594,7 +5594,7 @@
               <a:noFill/>
               <a:ln w="15180" cap="rnd">
                 <a:solidFill>
-                  <a:srgbClr val="95BADC"/>
+                  <a:srgbClr val="7294A9"/>
                 </a:solidFill>
               </a:ln>
             </p:spPr>
@@ -5657,7 +5657,7 @@
               </a:avLst>
             </a:prstGeom>
             <a:solidFill>
-              <a:srgbClr val="E2EDF8"/>
+              <a:srgbClr val="EAF0F4"/>
             </a:solidFill>
             <a:ln>
               <a:noFill/>
@@ -5901,7 +5901,7 @@
               <a:r>
                 <a:rPr lang="zh-TW" sz="1580" dirty="0">
                   <a:solidFill>
-                    <a:schemeClr val="accent5"/>
+                    <a:schemeClr val="accent6"/>
                   </a:solidFill>
                   <a:latin typeface="Times New Roman"/>
                   <a:ea typeface="DFKai-SB"/>
@@ -5958,7 +5958,7 @@
             <a:noFill/>
             <a:ln w="9525">
               <a:solidFill>
-                <a:srgbClr val="E3EAF2"/>
+                <a:srgbClr val="D6DDE0"/>
               </a:solidFill>
             </a:ln>
           </p:spPr>
@@ -5992,7 +5992,7 @@
               <a:r>
                 <a:rPr lang="en-US" sz="1120" dirty="0">
                   <a:solidFill>
-                    <a:schemeClr val="accent5"/>
+                    <a:schemeClr val="accent6"/>
                   </a:solidFill>
                   <a:latin typeface="Times New Roman"/>
                   <a:ea typeface="DFKai-SB"/>
@@ -6003,7 +6003,7 @@
               <a:r>
                 <a:rPr lang="zh-TW" sz="1120" dirty="0">
                   <a:solidFill>
-                    <a:schemeClr val="accent5"/>
+                    <a:schemeClr val="accent6"/>
                   </a:solidFill>
                   <a:latin typeface="Times New Roman"/>
                   <a:ea typeface="DFKai-SB"/>
@@ -6043,7 +6043,7 @@
               <a:r>
                 <a:rPr lang="zh-TW" sz="1120" dirty="0">
                   <a:solidFill>
-                    <a:schemeClr val="accent5"/>
+                    <a:schemeClr val="accent6"/>
                   </a:solidFill>
                   <a:latin typeface="Times New Roman"/>
                   <a:ea typeface="DFKai-SB"/>
@@ -6119,7 +6119,7 @@
               </a:avLst>
             </a:prstGeom>
             <a:solidFill>
-              <a:schemeClr val="accent1"/>
+              <a:schemeClr val="accent2"/>
             </a:solidFill>
             <a:ln>
               <a:noFill/>
@@ -6195,7 +6195,7 @@
               <a:r>
                 <a:rPr lang="zh-TW" sz="3150" dirty="0">
                   <a:solidFill>
-                    <a:srgbClr val="121314"/>
+                    <a:schemeClr val="accent5"/>
                   </a:solidFill>
                   <a:latin typeface="Times New Roman"/>
                   <a:ea typeface="DFKai-SB"/>
@@ -6262,7 +6262,7 @@
               </a:avLst>
             </a:prstGeom>
             <a:solidFill>
-              <a:srgbClr val="EAF3FC"/>
+              <a:srgbClr val="EAF0F4"/>
             </a:solidFill>
             <a:ln>
               <a:noFill/>
@@ -6338,7 +6338,7 @@
               <a:r>
                 <a:rPr lang="zh-TW" sz="1950" b="1" dirty="0">
                   <a:solidFill>
-                    <a:srgbClr val="121314"/>
+                    <a:schemeClr val="dk1"/>
                   </a:solidFill>
                   <a:latin typeface="Times New Roman"/>
                   <a:ea typeface="DFKai-SB"/>
@@ -6402,7 +6402,7 @@
               <a:r>
                 <a:rPr lang="zh-TW" sz="1720" dirty="0">
                   <a:solidFill>
-                    <a:srgbClr val="121314"/>
+                    <a:schemeClr val="dk1"/>
                   </a:solidFill>
                   <a:latin typeface="Times New Roman"/>
                   <a:ea typeface="DFKai-SB"/>
@@ -6610,7 +6610,7 @@
               <a:noFill/>
               <a:ln w="18455" cap="rnd">
                 <a:solidFill>
-                  <a:srgbClr val="95BADC"/>
+                  <a:srgbClr val="7294A9"/>
                 </a:solidFill>
               </a:ln>
             </p:spPr>
@@ -6646,7 +6646,7 @@
               <a:noFill/>
               <a:ln w="18455" cap="rnd">
                 <a:solidFill>
-                  <a:srgbClr val="95BADC"/>
+                  <a:srgbClr val="7294A9"/>
                 </a:solidFill>
               </a:ln>
             </p:spPr>
@@ -6682,7 +6682,7 @@
               <a:noFill/>
               <a:ln w="18455" cap="rnd">
                 <a:solidFill>
-                  <a:srgbClr val="95BADC"/>
+                  <a:srgbClr val="7294A9"/>
                 </a:solidFill>
               </a:ln>
             </p:spPr>
@@ -6718,7 +6718,7 @@
               <a:noFill/>
               <a:ln w="18455" cap="rnd">
                 <a:solidFill>
-                  <a:srgbClr val="95BADC"/>
+                  <a:srgbClr val="7294A9"/>
                 </a:solidFill>
               </a:ln>
             </p:spPr>
@@ -6753,7 +6753,7 @@
               <a:r>
                 <a:rPr lang="zh-TW" sz="1720" dirty="0">
                   <a:solidFill>
-                    <a:srgbClr val="121314"/>
+                    <a:schemeClr val="dk1"/>
                   </a:solidFill>
                   <a:latin typeface="Times New Roman"/>
                   <a:ea typeface="DFKai-SB"/>
@@ -7045,7 +7045,7 @@
               <a:r>
                 <a:rPr lang="zh-TW" sz="1580" dirty="0">
                   <a:solidFill>
-                    <a:schemeClr val="accent5"/>
+                    <a:schemeClr val="accent6"/>
                   </a:solidFill>
                   <a:latin typeface="Times New Roman"/>
                   <a:ea typeface="DFKai-SB"/>
@@ -7097,7 +7097,7 @@
               </a:avLst>
             </a:prstGeom>
             <a:solidFill>
-              <a:srgbClr val="EAF3FC"/>
+              <a:srgbClr val="EAF0F4"/>
             </a:solidFill>
             <a:ln>
               <a:noFill/>
@@ -7173,7 +7173,7 @@
               <a:r>
                 <a:rPr lang="en-US" sz="1950" b="1" dirty="0">
                   <a:solidFill>
-                    <a:srgbClr val="121314"/>
+                    <a:schemeClr val="dk1"/>
                   </a:solidFill>
                   <a:latin typeface="Times New Roman"/>
                   <a:ea typeface="DFKai-SB"/>
@@ -7184,7 +7184,7 @@
               <a:r>
                 <a:rPr lang="zh-TW" sz="1950" b="1" dirty="0">
                   <a:solidFill>
-                    <a:srgbClr val="121314"/>
+                    <a:schemeClr val="dk1"/>
                   </a:solidFill>
                   <a:latin typeface="Times New Roman"/>
                   <a:ea typeface="DFKai-SB"/>
@@ -7248,7 +7248,7 @@
               <a:r>
                 <a:rPr lang="zh-TW" sz="1650" dirty="0">
                   <a:solidFill>
-                    <a:srgbClr val="121314"/>
+                    <a:schemeClr val="dk1"/>
                   </a:solidFill>
                   <a:latin typeface="Times New Roman"/>
                   <a:ea typeface="DFKai-SB"/>
@@ -7471,7 +7471,7 @@
               <a:r>
                 <a:rPr lang="zh-TW" sz="1650" dirty="0">
                   <a:solidFill>
-                    <a:srgbClr val="121314"/>
+                    <a:schemeClr val="dk1"/>
                   </a:solidFill>
                   <a:latin typeface="Times New Roman"/>
                   <a:ea typeface="DFKai-SB"/>
@@ -7535,7 +7535,7 @@
               <a:r>
                 <a:rPr lang="zh-TW" sz="1650" dirty="0">
                   <a:solidFill>
-                    <a:srgbClr val="121314"/>
+                    <a:schemeClr val="dk1"/>
                   </a:solidFill>
                   <a:latin typeface="Times New Roman"/>
                   <a:ea typeface="DFKai-SB"/>
@@ -7713,7 +7713,7 @@
               </a:avLst>
             </a:prstGeom>
             <a:solidFill>
-              <a:srgbClr val="E2EDF8"/>
+              <a:srgbClr val="EAF0F4"/>
             </a:solidFill>
             <a:ln>
               <a:noFill/>
@@ -7749,7 +7749,7 @@
               <a:r>
                 <a:rPr lang="zh-TW" sz="1650" dirty="0">
                   <a:solidFill>
-                    <a:srgbClr val="121314"/>
+                    <a:schemeClr val="dk1"/>
                   </a:solidFill>
                   <a:latin typeface="Times New Roman"/>
                   <a:ea typeface="DFKai-SB"/>
@@ -7777,7 +7777,7 @@
               </a:avLst>
             </a:prstGeom>
             <a:solidFill>
-              <a:srgbClr val="E2EDF8"/>
+              <a:srgbClr val="EAF0F4"/>
             </a:solidFill>
             <a:ln>
               <a:noFill/>
@@ -7813,7 +7813,7 @@
               <a:r>
                 <a:rPr lang="zh-TW" sz="1580" dirty="0">
                   <a:solidFill>
-                    <a:srgbClr val="121314"/>
+                    <a:schemeClr val="dk1"/>
                   </a:solidFill>
                   <a:latin typeface="Times New Roman"/>
                   <a:ea typeface="DFKai-SB"/>
@@ -7933,7 +7933,7 @@
               <a:r>
                 <a:rPr lang="zh-TW" sz="1580" dirty="0">
                   <a:solidFill>
-                    <a:schemeClr val="accent5"/>
+                    <a:schemeClr val="accent6"/>
                   </a:solidFill>
                   <a:latin typeface="Times New Roman"/>
                   <a:ea typeface="DFKai-SB"/>
@@ -7990,7 +7990,7 @@
             <a:noFill/>
             <a:ln w="9525">
               <a:solidFill>
-                <a:srgbClr val="E3EAF2"/>
+                <a:srgbClr val="D6DDE0"/>
               </a:solidFill>
             </a:ln>
           </p:spPr>
@@ -8024,7 +8024,7 @@
               <a:r>
                 <a:rPr lang="en-US" sz="1120" dirty="0">
                   <a:solidFill>
-                    <a:schemeClr val="accent5"/>
+                    <a:schemeClr val="accent6"/>
                   </a:solidFill>
                   <a:latin typeface="Times New Roman"/>
                   <a:ea typeface="DFKai-SB"/>
@@ -8035,7 +8035,7 @@
               <a:r>
                 <a:rPr lang="zh-TW" sz="1120" dirty="0">
                   <a:solidFill>
-                    <a:schemeClr val="accent5"/>
+                    <a:schemeClr val="accent6"/>
                   </a:solidFill>
                   <a:latin typeface="Times New Roman"/>
                   <a:ea typeface="DFKai-SB"/>
@@ -8075,7 +8075,7 @@
               <a:r>
                 <a:rPr lang="zh-TW" sz="1120" dirty="0">
                   <a:solidFill>
-                    <a:schemeClr val="accent5"/>
+                    <a:schemeClr val="accent6"/>
                   </a:solidFill>
                   <a:latin typeface="Times New Roman"/>
                   <a:ea typeface="DFKai-SB"/>
@@ -8151,7 +8151,7 @@
               </a:avLst>
             </a:prstGeom>
             <a:solidFill>
-              <a:schemeClr val="accent1"/>
+              <a:schemeClr val="accent2"/>
             </a:solidFill>
             <a:ln>
               <a:noFill/>
@@ -8227,7 +8227,7 @@
               <a:r>
                 <a:rPr lang="zh-TW" sz="3150" dirty="0">
                   <a:solidFill>
-                    <a:srgbClr val="121314"/>
+                    <a:schemeClr val="accent5"/>
                   </a:solidFill>
                   <a:latin typeface="Times New Roman"/>
                   <a:ea typeface="DFKai-SB"/>
@@ -8294,7 +8294,7 @@
               </a:avLst>
             </a:prstGeom>
             <a:solidFill>
-              <a:srgbClr val="EAF3FC"/>
+              <a:srgbClr val="EAF0F4"/>
             </a:solidFill>
             <a:ln>
               <a:noFill/>
@@ -8370,7 +8370,7 @@
               <a:r>
                 <a:rPr lang="zh-TW" sz="1950" b="1" dirty="0">
                   <a:solidFill>
-                    <a:srgbClr val="121314"/>
+                    <a:schemeClr val="dk1"/>
                   </a:solidFill>
                   <a:latin typeface="Times New Roman"/>
                   <a:ea typeface="DFKai-SB"/>
@@ -8434,7 +8434,7 @@
               <a:r>
                 <a:rPr lang="zh-TW" sz="1650" dirty="0">
                   <a:solidFill>
-                    <a:srgbClr val="121314"/>
+                    <a:schemeClr val="dk1"/>
                   </a:solidFill>
                   <a:latin typeface="Times New Roman"/>
                   <a:ea typeface="DFKai-SB"/>
@@ -8445,7 +8445,7 @@
               <a:r>
                 <a:rPr lang="en-US" sz="1650" dirty="0">
                   <a:solidFill>
-                    <a:srgbClr val="121314"/>
+                    <a:schemeClr val="dk1"/>
                   </a:solidFill>
                   <a:latin typeface="Times New Roman"/>
                   <a:ea typeface="DFKai-SB"/>
@@ -8456,7 +8456,7 @@
               <a:r>
                 <a:rPr lang="zh-TW" sz="1650" dirty="0">
                   <a:solidFill>
-                    <a:srgbClr val="121314"/>
+                    <a:schemeClr val="dk1"/>
                   </a:solidFill>
                   <a:latin typeface="Times New Roman"/>
                   <a:ea typeface="DFKai-SB"/>
@@ -8562,7 +8562,7 @@
               <a:noFill/>
               <a:ln w="11906" cap="rnd">
                 <a:solidFill>
-                  <a:srgbClr val="A7C7E3"/>
+                  <a:srgbClr val="7294A9"/>
                 </a:solidFill>
               </a:ln>
             </p:spPr>
@@ -8648,7 +8648,7 @@
               <a:noFill/>
               <a:ln w="11906" cap="rnd">
                 <a:solidFill>
-                  <a:srgbClr val="A7C7E3"/>
+                  <a:srgbClr val="7294A9"/>
                 </a:solidFill>
               </a:ln>
             </p:spPr>
@@ -8734,7 +8734,7 @@
               <a:noFill/>
               <a:ln w="11906" cap="rnd">
                 <a:solidFill>
-                  <a:srgbClr val="A7C7E3"/>
+                  <a:srgbClr val="7294A9"/>
                 </a:solidFill>
               </a:ln>
             </p:spPr>
@@ -8811,7 +8811,7 @@
               <a:noFill/>
               <a:ln w="11906" cap="rnd">
                 <a:solidFill>
-                  <a:srgbClr val="8DB5D9"/>
+                  <a:srgbClr val="7294A9"/>
                 </a:solidFill>
               </a:ln>
             </p:spPr>
@@ -8847,7 +8847,7 @@
               <a:noFill/>
               <a:ln w="11906" cap="rnd">
                 <a:solidFill>
-                  <a:srgbClr val="8DB5D9"/>
+                  <a:srgbClr val="7294A9"/>
                 </a:solidFill>
               </a:ln>
             </p:spPr>
@@ -8883,7 +8883,7 @@
               <a:noFill/>
               <a:ln w="11906" cap="rnd">
                 <a:solidFill>
-                  <a:srgbClr val="8DB5D9"/>
+                  <a:srgbClr val="7294A9"/>
                 </a:solidFill>
               </a:ln>
             </p:spPr>
@@ -8919,7 +8919,7 @@
               <a:noFill/>
               <a:ln w="11906" cap="rnd">
                 <a:solidFill>
-                  <a:srgbClr val="8DB5D9"/>
+                  <a:srgbClr val="7294A9"/>
                 </a:solidFill>
               </a:ln>
             </p:spPr>
@@ -8955,7 +8955,7 @@
               <a:noFill/>
               <a:ln w="11906" cap="rnd">
                 <a:solidFill>
-                  <a:srgbClr val="8DB5D9"/>
+                  <a:srgbClr val="7294A9"/>
                 </a:solidFill>
               </a:ln>
             </p:spPr>
@@ -8991,7 +8991,7 @@
               <a:noFill/>
               <a:ln w="11906" cap="rnd">
                 <a:solidFill>
-                  <a:srgbClr val="8DB5D9"/>
+                  <a:srgbClr val="7294A9"/>
                 </a:solidFill>
               </a:ln>
             </p:spPr>
@@ -9027,7 +9027,7 @@
               <a:noFill/>
               <a:ln w="11906" cap="rnd">
                 <a:solidFill>
-                  <a:srgbClr val="8DB5D9"/>
+                  <a:srgbClr val="7294A9"/>
                 </a:solidFill>
               </a:ln>
             </p:spPr>
@@ -9063,7 +9063,7 @@
               <a:noFill/>
               <a:ln w="11906" cap="rnd">
                 <a:solidFill>
-                  <a:srgbClr val="8DB5D9"/>
+                  <a:srgbClr val="7294A9"/>
                 </a:solidFill>
               </a:ln>
             </p:spPr>
@@ -9164,7 +9164,7 @@
               <a:noFill/>
               <a:ln w="11906" cap="rnd">
                 <a:solidFill>
-                  <a:srgbClr val="A7C7E3"/>
+                  <a:srgbClr val="7294A9"/>
                 </a:solidFill>
               </a:ln>
             </p:spPr>
@@ -9250,7 +9250,7 @@
               <a:noFill/>
               <a:ln w="11906" cap="rnd">
                 <a:solidFill>
-                  <a:srgbClr val="A7C7E3"/>
+                  <a:srgbClr val="7294A9"/>
                 </a:solidFill>
               </a:ln>
             </p:spPr>
@@ -9336,7 +9336,7 @@
               <a:noFill/>
               <a:ln w="11906" cap="rnd">
                 <a:solidFill>
-                  <a:srgbClr val="A7C7E3"/>
+                  <a:srgbClr val="7294A9"/>
                 </a:solidFill>
               </a:ln>
             </p:spPr>
@@ -9708,7 +9708,7 @@
               </a:avLst>
             </a:prstGeom>
             <a:solidFill>
-              <a:srgbClr val="E2EDF8"/>
+              <a:srgbClr val="EAF0F4"/>
             </a:solidFill>
             <a:ln>
               <a:noFill/>
@@ -9744,7 +9744,7 @@
               <a:r>
                 <a:rPr lang="zh-TW" sz="1650" dirty="0">
                   <a:solidFill>
-                    <a:srgbClr val="121314"/>
+                    <a:schemeClr val="dk1"/>
                   </a:solidFill>
                   <a:latin typeface="Times New Roman"/>
                   <a:ea typeface="DFKai-SB"/>
@@ -9772,7 +9772,7 @@
               </a:avLst>
             </a:prstGeom>
             <a:solidFill>
-              <a:srgbClr val="E2EDF8"/>
+              <a:srgbClr val="EAF0F4"/>
             </a:solidFill>
             <a:ln>
               <a:noFill/>
@@ -9808,7 +9808,7 @@
               <a:r>
                 <a:rPr lang="zh-TW" sz="1650" dirty="0">
                   <a:solidFill>
-                    <a:srgbClr val="121314"/>
+                    <a:schemeClr val="dk1"/>
                   </a:solidFill>
                   <a:latin typeface="Times New Roman"/>
                   <a:ea typeface="DFKai-SB"/>
@@ -9928,7 +9928,7 @@
               <a:r>
                 <a:rPr lang="zh-TW" sz="1580" dirty="0">
                   <a:solidFill>
-                    <a:schemeClr val="accent5"/>
+                    <a:schemeClr val="accent6"/>
                   </a:solidFill>
                   <a:latin typeface="Times New Roman"/>
                   <a:ea typeface="DFKai-SB"/>
@@ -9980,7 +9980,7 @@
               </a:avLst>
             </a:prstGeom>
             <a:solidFill>
-              <a:srgbClr val="EAF3FC"/>
+              <a:srgbClr val="EAF0F4"/>
             </a:solidFill>
             <a:ln>
               <a:noFill/>
@@ -10056,7 +10056,7 @@
               <a:r>
                 <a:rPr lang="zh-TW" sz="1950" b="1" dirty="0">
                   <a:solidFill>
-                    <a:srgbClr val="121314"/>
+                    <a:schemeClr val="dk1"/>
                   </a:solidFill>
                   <a:latin typeface="Times New Roman"/>
                   <a:ea typeface="DFKai-SB"/>
@@ -10084,7 +10084,7 @@
               </a:avLst>
             </a:prstGeom>
             <a:solidFill>
-              <a:srgbClr val="E2EDF8"/>
+              <a:srgbClr val="EAF0F4"/>
             </a:solidFill>
             <a:ln>
               <a:noFill/>
@@ -10248,7 +10248,7 @@
               <a:noFill/>
               <a:ln w="11906" cap="rnd">
                 <a:solidFill>
-                  <a:srgbClr val="95BADC"/>
+                  <a:srgbClr val="7294A9"/>
                 </a:solidFill>
               </a:ln>
             </p:spPr>
@@ -10284,7 +10284,7 @@
               <a:noFill/>
               <a:ln w="11906" cap="rnd">
                 <a:solidFill>
-                  <a:srgbClr val="95BADC"/>
+                  <a:srgbClr val="7294A9"/>
                 </a:solidFill>
               </a:ln>
             </p:spPr>
@@ -10320,7 +10320,7 @@
               <a:noFill/>
               <a:ln w="11906" cap="rnd">
                 <a:solidFill>
-                  <a:srgbClr val="95BADC"/>
+                  <a:srgbClr val="7294A9"/>
                 </a:solidFill>
               </a:ln>
             </p:spPr>
@@ -10356,7 +10356,7 @@
               <a:noFill/>
               <a:ln w="11906" cap="rnd">
                 <a:solidFill>
-                  <a:srgbClr val="95BADC"/>
+                  <a:srgbClr val="7294A9"/>
                 </a:solidFill>
               </a:ln>
             </p:spPr>
@@ -11033,7 +11033,7 @@
               <a:r>
                 <a:rPr lang="zh-TW" sz="1580" dirty="0">
                   <a:solidFill>
-                    <a:schemeClr val="accent5"/>
+                    <a:schemeClr val="accent6"/>
                   </a:solidFill>
                   <a:latin typeface="Times New Roman"/>
                   <a:ea typeface="DFKai-SB"/>
@@ -11044,7 +11044,7 @@
               <a:r>
                 <a:rPr lang="en-US" sz="1580" dirty="0">
                   <a:solidFill>
-                    <a:schemeClr val="accent5"/>
+                    <a:schemeClr val="accent6"/>
                   </a:solidFill>
                   <a:latin typeface="Times New Roman"/>
                   <a:ea typeface="DFKai-SB"/>
@@ -11055,7 +11055,7 @@
               <a:r>
                 <a:rPr lang="zh-TW" sz="1580" dirty="0">
                   <a:solidFill>
-                    <a:schemeClr val="accent5"/>
+                    <a:schemeClr val="accent6"/>
                   </a:solidFill>
                   <a:latin typeface="Times New Roman"/>
                   <a:ea typeface="DFKai-SB"/>
@@ -11112,7 +11112,7 @@
             <a:noFill/>
             <a:ln w="9525">
               <a:solidFill>
-                <a:srgbClr val="E3EAF2"/>
+                <a:srgbClr val="D6DDE0"/>
               </a:solidFill>
             </a:ln>
           </p:spPr>
@@ -11146,7 +11146,7 @@
               <a:r>
                 <a:rPr lang="en-US" sz="1120" dirty="0">
                   <a:solidFill>
-                    <a:schemeClr val="accent5"/>
+                    <a:schemeClr val="accent6"/>
                   </a:solidFill>
                   <a:latin typeface="Times New Roman"/>
                   <a:ea typeface="DFKai-SB"/>
@@ -11157,7 +11157,7 @@
               <a:r>
                 <a:rPr lang="zh-TW" sz="1120" dirty="0">
                   <a:solidFill>
-                    <a:schemeClr val="accent5"/>
+                    <a:schemeClr val="accent6"/>
                   </a:solidFill>
                   <a:latin typeface="Times New Roman"/>
                   <a:ea typeface="DFKai-SB"/>
@@ -11197,7 +11197,7 @@
               <a:r>
                 <a:rPr lang="zh-TW" sz="1120" dirty="0">
                   <a:solidFill>
-                    <a:schemeClr val="accent5"/>
+                    <a:schemeClr val="accent6"/>
                   </a:solidFill>
                   <a:latin typeface="Times New Roman"/>
                   <a:ea typeface="DFKai-SB"/>
@@ -11248,7 +11248,7 @@
             <a:hlinkClick r:id="" action="ppaction://media"/>
             <a:extLst>
               <a:ext uri="{FF2B5EF4-FFF2-40B4-BE49-F238E27FC236}">
-                <a16:creationId xmlns:a16="http://schemas.microsoft.com/office/drawing/2014/main" id="{769353B6-9DBC-4F2E-828C-AB1667AC6C49}"/>
+                <a16:creationId xmlns:a16="http://schemas.microsoft.com/office/drawing/2014/main" id="{474880EC-B5CB-4349-A221-3843E0CCED40}"/>
               </a:ext>
             </a:extLst>
           </p:cNvPr>
@@ -11482,7 +11482,7 @@
               </a:avLst>
             </a:prstGeom>
             <a:solidFill>
-              <a:schemeClr val="accent1"/>
+              <a:schemeClr val="accent2"/>
             </a:solidFill>
             <a:ln>
               <a:noFill/>
@@ -11558,7 +11558,7 @@
               <a:r>
                 <a:rPr lang="zh-TW" sz="3150" dirty="0">
                   <a:solidFill>
-                    <a:srgbClr val="121314"/>
+                    <a:schemeClr val="accent5"/>
                   </a:solidFill>
                   <a:latin typeface="Times New Roman"/>
                   <a:ea typeface="DFKai-SB"/>
@@ -11605,7 +11605,7 @@
             </a:solidFill>
             <a:ln w="9525">
               <a:solidFill>
-                <a:schemeClr val="accent6"/>
+                <a:srgbClr val="D6DDE0"/>
               </a:solidFill>
             </a:ln>
           </p:spPr>
@@ -11834,7 +11834,7 @@
               <a:r>
                 <a:rPr lang="ja-JP" sz="1500" dirty="0">
                   <a:solidFill>
-                    <a:schemeClr val="accent5"/>
+                    <a:schemeClr val="accent6"/>
                   </a:solidFill>
                   <a:latin typeface="Times New Roman"/>
                   <a:ea typeface="DFKai-SB"/>
@@ -11866,7 +11866,7 @@
             </a:solidFill>
             <a:ln w="9525">
               <a:solidFill>
-                <a:schemeClr val="accent6"/>
+                <a:srgbClr val="D6DDE0"/>
               </a:solidFill>
             </a:ln>
           </p:spPr>
@@ -11967,7 +11967,7 @@
             </a:solidFill>
             <a:ln w="9525">
               <a:solidFill>
-                <a:schemeClr val="accent6"/>
+                <a:srgbClr val="D6DDE0"/>
               </a:solidFill>
             </a:ln>
           </p:spPr>
@@ -12073,7 +12073,7 @@
             </a:solidFill>
             <a:ln w="9525">
               <a:solidFill>
-                <a:schemeClr val="accent6"/>
+                <a:srgbClr val="D6DDE0"/>
               </a:solidFill>
             </a:ln>
           </p:spPr>
@@ -12179,7 +12179,7 @@
             </a:solidFill>
             <a:ln w="9525">
               <a:solidFill>
-                <a:schemeClr val="accent6"/>
+                <a:srgbClr val="D6DDE0"/>
               </a:solidFill>
             </a:ln>
           </p:spPr>
@@ -12296,7 +12296,7 @@
             </a:solidFill>
             <a:ln w="9525">
               <a:solidFill>
-                <a:schemeClr val="accent6"/>
+                <a:srgbClr val="D6DDE0"/>
               </a:solidFill>
             </a:ln>
           </p:spPr>
@@ -12798,7 +12798,7 @@
             </a:solidFill>
             <a:ln w="9525">
               <a:solidFill>
-                <a:schemeClr val="accent6"/>
+                <a:srgbClr val="D6DDE0"/>
               </a:solidFill>
             </a:ln>
           </p:spPr>
@@ -12921,7 +12921,7 @@
             </a:solidFill>
             <a:ln w="9525">
               <a:solidFill>
-                <a:schemeClr val="accent6"/>
+                <a:srgbClr val="D6DDE0"/>
               </a:solidFill>
             </a:ln>
           </p:spPr>
@@ -13038,7 +13038,7 @@
             </a:solidFill>
             <a:ln w="9525">
               <a:solidFill>
-                <a:schemeClr val="accent6"/>
+                <a:srgbClr val="D6DDE0"/>
               </a:solidFill>
             </a:ln>
           </p:spPr>
@@ -13155,7 +13155,7 @@
             </a:solidFill>
             <a:ln w="9525">
               <a:solidFill>
-                <a:schemeClr val="accent6"/>
+                <a:srgbClr val="D6DDE0"/>
               </a:solidFill>
             </a:ln>
           </p:spPr>
@@ -13565,7 +13565,7 @@
               <a:r>
                 <a:rPr lang="zh-TW" sz="1500" dirty="0">
                   <a:solidFill>
-                    <a:schemeClr val="accent5"/>
+                    <a:schemeClr val="accent6"/>
                   </a:solidFill>
                   <a:latin typeface="Times New Roman"/>
                   <a:ea typeface="DFKai-SB"/>
@@ -13607,7 +13607,7 @@
             <a:noFill/>
             <a:ln w="19050">
               <a:solidFill>
-                <a:srgbClr val="6B6B6B"/>
+                <a:srgbClr val="53666E"/>
               </a:solidFill>
               <a:custDash>
                 <a:ds d="250000" sp="200000"/>
@@ -13649,7 +13649,7 @@
             <a:noFill/>
             <a:ln w="19050">
               <a:solidFill>
-                <a:srgbClr val="6B6B6B"/>
+                <a:srgbClr val="53666E"/>
               </a:solidFill>
             </a:ln>
           </p:spPr>
@@ -13683,7 +13683,7 @@
               <a:r>
                 <a:rPr lang="zh-TW" sz="1500" dirty="0">
                   <a:solidFill>
-                    <a:schemeClr val="accent5"/>
+                    <a:schemeClr val="accent6"/>
                   </a:solidFill>
                   <a:latin typeface="Times New Roman"/>
                   <a:ea typeface="DFKai-SB"/>
@@ -13715,7 +13715,7 @@
             </a:solidFill>
             <a:ln w="9525">
               <a:solidFill>
-                <a:schemeClr val="accent6"/>
+                <a:srgbClr val="D6DDE0"/>
               </a:solidFill>
             </a:ln>
           </p:spPr>
@@ -13904,7 +13904,7 @@
               <a:r>
                 <a:rPr lang="zh-TW" sz="1500" dirty="0">
                   <a:solidFill>
-                    <a:schemeClr val="accent5"/>
+                    <a:schemeClr val="accent6"/>
                   </a:solidFill>
                   <a:latin typeface="Times New Roman"/>
                   <a:ea typeface="DFKai-SB"/>
@@ -14011,7 +14011,7 @@
             </a:solidFill>
             <a:ln w="9525">
               <a:solidFill>
-                <a:schemeClr val="accent6"/>
+                <a:srgbClr val="D6DDE0"/>
               </a:solidFill>
             </a:ln>
           </p:spPr>
@@ -14168,7 +14168,7 @@
             <a:noFill/>
             <a:ln w="9525">
               <a:solidFill>
-                <a:srgbClr val="E3EAF2"/>
+                <a:srgbClr val="D6DDE0"/>
               </a:solidFill>
             </a:ln>
           </p:spPr>
@@ -14202,7 +14202,7 @@
               <a:r>
                 <a:rPr lang="en-US" sz="1120" dirty="0">
                   <a:solidFill>
-                    <a:schemeClr val="accent5"/>
+                    <a:schemeClr val="accent6"/>
                   </a:solidFill>
                   <a:latin typeface="Times New Roman"/>
                   <a:ea typeface="DFKai-SB"/>
@@ -14213,7 +14213,7 @@
               <a:r>
                 <a:rPr lang="zh-TW" sz="1120" dirty="0">
                   <a:solidFill>
-                    <a:schemeClr val="accent5"/>
+                    <a:schemeClr val="accent6"/>
                   </a:solidFill>
                   <a:latin typeface="Times New Roman"/>
                   <a:ea typeface="DFKai-SB"/>
@@ -14253,7 +14253,7 @@
               <a:r>
                 <a:rPr lang="zh-TW" sz="1120" dirty="0">
                   <a:solidFill>
-                    <a:schemeClr val="accent5"/>
+                    <a:schemeClr val="accent6"/>
                   </a:solidFill>
                   <a:latin typeface="Times New Roman"/>
                   <a:ea typeface="DFKai-SB"/>
@@ -14329,7 +14329,7 @@
               </a:avLst>
             </a:prstGeom>
             <a:solidFill>
-              <a:schemeClr val="accent1"/>
+              <a:schemeClr val="accent2"/>
             </a:solidFill>
             <a:ln>
               <a:noFill/>
@@ -14405,7 +14405,7 @@
               <a:r>
                 <a:rPr lang="zh-TW" sz="3150" dirty="0">
                   <a:solidFill>
-                    <a:srgbClr val="121314"/>
+                    <a:schemeClr val="accent5"/>
                   </a:solidFill>
                   <a:latin typeface="Times New Roman"/>
                   <a:ea typeface="DFKai-SB"/>
@@ -14552,7 +14552,7 @@
               </a:avLst>
             </a:prstGeom>
             <a:solidFill>
-              <a:srgbClr val="E2EDF8"/>
+              <a:srgbClr val="EAF0F4"/>
             </a:solidFill>
             <a:ln>
               <a:noFill/>
@@ -14712,7 +14712,7 @@
               </a:avLst>
             </a:prstGeom>
             <a:solidFill>
-              <a:srgbClr val="E2EDF8"/>
+              <a:srgbClr val="EAF0F4"/>
             </a:solidFill>
             <a:ln>
               <a:noFill/>
@@ -14872,7 +14872,7 @@
               </a:avLst>
             </a:prstGeom>
             <a:solidFill>
-              <a:srgbClr val="E2EDF8"/>
+              <a:srgbClr val="EAF0F4"/>
             </a:solidFill>
             <a:ln>
               <a:noFill/>
@@ -15291,7 +15291,7 @@
               <a:r>
                 <a:rPr lang="zh-TW" sz="1580" dirty="0">
                   <a:solidFill>
-                    <a:schemeClr val="accent5"/>
+                    <a:schemeClr val="accent6"/>
                   </a:solidFill>
                   <a:latin typeface="Times New Roman"/>
                   <a:ea typeface="DFKai-SB"/>
@@ -15548,7 +15548,7 @@
               <a:r>
                 <a:rPr lang="zh-TW" sz="1580" dirty="0">
                   <a:solidFill>
-                    <a:schemeClr val="accent5"/>
+                    <a:schemeClr val="accent6"/>
                   </a:solidFill>
                   <a:latin typeface="Times New Roman"/>
                   <a:ea typeface="DFKai-SB"/>
@@ -15735,7 +15735,7 @@
               </a:avLst>
             </a:prstGeom>
             <a:solidFill>
-              <a:srgbClr val="EAF3FC"/>
+              <a:srgbClr val="EAF0F4"/>
             </a:solidFill>
             <a:ln>
               <a:noFill/>
@@ -15862,7 +15862,7 @@
               <a:r>
                 <a:rPr lang="zh-TW" sz="1720" dirty="0">
                   <a:solidFill>
-                    <a:schemeClr val="accent5"/>
+                    <a:schemeClr val="accent6"/>
                   </a:solidFill>
                   <a:latin typeface="Times New Roman"/>
                   <a:ea typeface="DFKai-SB"/>
@@ -16058,7 +16058,7 @@
             <a:noFill/>
             <a:ln w="9525">
               <a:solidFill>
-                <a:srgbClr val="E3EAF2"/>
+                <a:srgbClr val="D6DDE0"/>
               </a:solidFill>
             </a:ln>
           </p:spPr>
@@ -16092,7 +16092,7 @@
               <a:r>
                 <a:rPr lang="en-US" sz="1120" dirty="0">
                   <a:solidFill>
-                    <a:schemeClr val="accent5"/>
+                    <a:schemeClr val="accent6"/>
                   </a:solidFill>
                   <a:latin typeface="Times New Roman"/>
                   <a:ea typeface="DFKai-SB"/>
@@ -16103,7 +16103,7 @@
               <a:r>
                 <a:rPr lang="zh-TW" sz="1120" dirty="0">
                   <a:solidFill>
-                    <a:schemeClr val="accent5"/>
+                    <a:schemeClr val="accent6"/>
                   </a:solidFill>
                   <a:latin typeface="Times New Roman"/>
                   <a:ea typeface="DFKai-SB"/>
@@ -16143,7 +16143,7 @@
               <a:r>
                 <a:rPr lang="zh-TW" sz="1120" dirty="0">
                   <a:solidFill>
-                    <a:schemeClr val="accent5"/>
+                    <a:schemeClr val="accent6"/>
                   </a:solidFill>
                   <a:latin typeface="Times New Roman"/>
                   <a:ea typeface="DFKai-SB"/>
@@ -16219,7 +16219,7 @@
               </a:avLst>
             </a:prstGeom>
             <a:solidFill>
-              <a:schemeClr val="accent1"/>
+              <a:schemeClr val="accent2"/>
             </a:solidFill>
             <a:ln>
               <a:noFill/>
@@ -16295,7 +16295,7 @@
               <a:r>
                 <a:rPr lang="zh-TW" sz="3150" dirty="0">
                   <a:solidFill>
-                    <a:srgbClr val="121314"/>
+                    <a:schemeClr val="accent5"/>
                   </a:solidFill>
                   <a:latin typeface="Times New Roman"/>
                   <a:ea typeface="DFKai-SB"/>
@@ -16632,7 +16632,7 @@
                 </a:avLst>
               </a:prstGeom>
               <a:solidFill>
-                <a:srgbClr val="8EB9DE"/>
+                <a:srgbClr val="7294A9"/>
               </a:solidFill>
               <a:ln>
                 <a:noFill/>
@@ -16656,7 +16656,7 @@
                 </a:avLst>
               </a:prstGeom>
               <a:solidFill>
-                <a:srgbClr val="8EB9DE"/>
+                <a:srgbClr val="7294A9"/>
               </a:solidFill>
               <a:ln>
                 <a:noFill/>
@@ -16680,7 +16680,7 @@
                 </a:avLst>
               </a:prstGeom>
               <a:solidFill>
-                <a:srgbClr val="8EB9DE"/>
+                <a:srgbClr val="7294A9"/>
               </a:solidFill>
               <a:ln>
                 <a:noFill/>
@@ -16704,7 +16704,7 @@
                 </a:avLst>
               </a:prstGeom>
               <a:solidFill>
-                <a:srgbClr val="8EB9DE"/>
+                <a:srgbClr val="7294A9"/>
               </a:solidFill>
               <a:ln>
                 <a:noFill/>
@@ -17063,7 +17063,7 @@
                 </a:avLst>
               </a:prstGeom>
               <a:solidFill>
-                <a:srgbClr val="8EB9DE"/>
+                <a:srgbClr val="7294A9"/>
               </a:solidFill>
               <a:ln>
                 <a:noFill/>
@@ -17087,7 +17087,7 @@
                 </a:avLst>
               </a:prstGeom>
               <a:solidFill>
-                <a:srgbClr val="8EB9DE"/>
+                <a:srgbClr val="7294A9"/>
               </a:solidFill>
               <a:ln>
                 <a:noFill/>
@@ -17111,7 +17111,7 @@
                 </a:avLst>
               </a:prstGeom>
               <a:solidFill>
-                <a:srgbClr val="8EB9DE"/>
+                <a:srgbClr val="7294A9"/>
               </a:solidFill>
               <a:ln>
                 <a:noFill/>
@@ -17135,7 +17135,7 @@
                 </a:avLst>
               </a:prstGeom>
               <a:solidFill>
-                <a:srgbClr val="8EB9DE"/>
+                <a:srgbClr val="7294A9"/>
               </a:solidFill>
               <a:ln>
                 <a:noFill/>
@@ -17359,7 +17359,7 @@
               </a:avLst>
             </a:prstGeom>
             <a:solidFill>
-              <a:srgbClr val="EAF3FC"/>
+              <a:srgbClr val="EAF0F4"/>
             </a:solidFill>
             <a:ln>
               <a:noFill/>
@@ -17435,7 +17435,7 @@
               <a:r>
                 <a:rPr lang="en-US" sz="1580" dirty="0">
                   <a:solidFill>
-                    <a:schemeClr val="accent5"/>
+                    <a:schemeClr val="accent6"/>
                   </a:solidFill>
                   <a:latin typeface="Times New Roman"/>
                   <a:ea typeface="DFKai-SB"/>
@@ -17446,7 +17446,7 @@
               <a:r>
                 <a:rPr lang="zh-TW" sz="1580" dirty="0">
                   <a:solidFill>
-                    <a:schemeClr val="accent5"/>
+                    <a:schemeClr val="accent6"/>
                   </a:solidFill>
                   <a:latin typeface="Times New Roman"/>
                   <a:ea typeface="DFKai-SB"/>
@@ -17671,7 +17671,7 @@
               <a:r>
                 <a:rPr lang="zh-TW" sz="1650" dirty="0">
                   <a:solidFill>
-                    <a:schemeClr val="accent5"/>
+                    <a:schemeClr val="accent6"/>
                   </a:solidFill>
                   <a:latin typeface="Times New Roman"/>
                   <a:ea typeface="DFKai-SB"/>
@@ -17699,7 +17699,7 @@
               </a:avLst>
             </a:prstGeom>
             <a:solidFill>
-              <a:srgbClr val="EAF3FC"/>
+              <a:srgbClr val="EAF0F4"/>
             </a:solidFill>
             <a:ln w="9525">
               <a:solidFill>
@@ -17765,7 +17765,7 @@
               </a:avLst>
             </a:prstGeom>
             <a:solidFill>
-              <a:srgbClr val="EAF3FC"/>
+              <a:srgbClr val="EAF0F4"/>
             </a:solidFill>
             <a:ln w="9525">
               <a:solidFill>
@@ -17831,7 +17831,7 @@
               </a:avLst>
             </a:prstGeom>
             <a:solidFill>
-              <a:srgbClr val="EAF3FC"/>
+              <a:srgbClr val="EAF0F4"/>
             </a:solidFill>
             <a:ln w="9525">
               <a:solidFill>
@@ -17897,7 +17897,7 @@
               </a:avLst>
             </a:prstGeom>
             <a:solidFill>
-              <a:srgbClr val="EAF3FC"/>
+              <a:srgbClr val="EAF0F4"/>
             </a:solidFill>
             <a:ln w="9525">
               <a:solidFill>
@@ -17963,7 +17963,7 @@
               </a:avLst>
             </a:prstGeom>
             <a:solidFill>
-              <a:srgbClr val="EAF3FC"/>
+              <a:srgbClr val="EAF0F4"/>
             </a:solidFill>
             <a:ln w="9525">
               <a:solidFill>
@@ -18092,7 +18092,7 @@
               <a:r>
                 <a:rPr lang="zh-TW" sz="1580" dirty="0">
                   <a:solidFill>
-                    <a:schemeClr val="accent5"/>
+                    <a:schemeClr val="accent6"/>
                   </a:solidFill>
                   <a:latin typeface="Times New Roman"/>
                   <a:ea typeface="DFKai-SB"/>
@@ -18263,7 +18263,7 @@
               </a:avLst>
             </a:prstGeom>
             <a:solidFill>
-              <a:srgbClr val="EAF3FC"/>
+              <a:srgbClr val="EAF0F4"/>
             </a:solidFill>
             <a:ln>
               <a:noFill/>
@@ -18339,7 +18339,7 @@
               <a:r>
                 <a:rPr lang="zh-TW" sz="1650" dirty="0">
                   <a:solidFill>
-                    <a:schemeClr val="accent5"/>
+                    <a:schemeClr val="accent6"/>
                   </a:solidFill>
                   <a:latin typeface="Times New Roman"/>
                   <a:ea typeface="DFKai-SB"/>
@@ -18845,7 +18845,7 @@
               <a:r>
                 <a:rPr lang="zh-TW" sz="1580" dirty="0">
                   <a:solidFill>
-                    <a:schemeClr val="accent5"/>
+                    <a:schemeClr val="accent6"/>
                   </a:solidFill>
                   <a:latin typeface="Times New Roman"/>
                   <a:ea typeface="DFKai-SB"/>
@@ -18964,7 +18964,7 @@
             <a:noFill/>
             <a:ln w="9525">
               <a:solidFill>
-                <a:srgbClr val="E3EAF2"/>
+                <a:srgbClr val="D6DDE0"/>
               </a:solidFill>
             </a:ln>
           </p:spPr>
@@ -18998,7 +18998,7 @@
               <a:r>
                 <a:rPr lang="en-US" sz="1120" dirty="0">
                   <a:solidFill>
-                    <a:schemeClr val="accent5"/>
+                    <a:schemeClr val="accent6"/>
                   </a:solidFill>
                   <a:latin typeface="Times New Roman"/>
                   <a:ea typeface="DFKai-SB"/>
@@ -19009,7 +19009,7 @@
               <a:r>
                 <a:rPr lang="zh-TW" sz="1120" dirty="0">
                   <a:solidFill>
-                    <a:schemeClr val="accent5"/>
+                    <a:schemeClr val="accent6"/>
                   </a:solidFill>
                   <a:latin typeface="Times New Roman"/>
                   <a:ea typeface="DFKai-SB"/>
@@ -19049,7 +19049,7 @@
               <a:r>
                 <a:rPr lang="zh-TW" sz="1120" dirty="0">
                   <a:solidFill>
-                    <a:schemeClr val="accent5"/>
+                    <a:schemeClr val="accent6"/>
                   </a:solidFill>
                   <a:latin typeface="Times New Roman"/>
                   <a:ea typeface="DFKai-SB"/>
@@ -19125,7 +19125,7 @@
               </a:avLst>
             </a:prstGeom>
             <a:solidFill>
-              <a:schemeClr val="accent1"/>
+              <a:schemeClr val="accent2"/>
             </a:solidFill>
             <a:ln>
               <a:noFill/>
@@ -19201,7 +19201,7 @@
               <a:r>
                 <a:rPr lang="zh-TW" sz="3150" dirty="0">
                   <a:solidFill>
-                    <a:srgbClr val="121314"/>
+                    <a:schemeClr val="accent5"/>
                   </a:solidFill>
                   <a:latin typeface="Times New Roman"/>
                   <a:ea typeface="DFKai-SB"/>
@@ -19244,7 +19244,7 @@
               </a:avLst>
             </a:prstGeom>
             <a:solidFill>
-              <a:srgbClr val="EAF3FC"/>
+              <a:srgbClr val="EAF0F4"/>
             </a:solidFill>
             <a:ln>
               <a:noFill/>
@@ -19344,7 +19344,7 @@
               <a:r>
                 <a:rPr lang="zh-TW" sz="2180" dirty="0">
                   <a:solidFill>
-                    <a:srgbClr val="121314"/>
+                    <a:schemeClr val="dk1"/>
                   </a:solidFill>
                   <a:latin typeface="Times New Roman"/>
                   <a:ea typeface="DFKai-SB"/>
@@ -19384,7 +19384,7 @@
               <a:r>
                 <a:rPr lang="ja-JP" sz="1500" dirty="0">
                   <a:solidFill>
-                    <a:schemeClr val="accent5"/>
+                    <a:schemeClr val="accent6"/>
                   </a:solidFill>
                   <a:latin typeface="Times New Roman"/>
                   <a:ea typeface="DFKai-SB"/>
@@ -19605,7 +19605,7 @@
               <a:noFill/>
               <a:ln w="28575" cap="rnd">
                 <a:solidFill>
-                  <a:srgbClr val="8DB5D9"/>
+                  <a:srgbClr val="7294A9"/>
                 </a:solidFill>
               </a:ln>
             </p:spPr>
@@ -19641,7 +19641,7 @@
               <a:noFill/>
               <a:ln w="28575" cap="rnd">
                 <a:solidFill>
-                  <a:srgbClr val="8DB5D9"/>
+                  <a:srgbClr val="7294A9"/>
                 </a:solidFill>
               </a:ln>
             </p:spPr>
@@ -19677,7 +19677,7 @@
               <a:noFill/>
               <a:ln w="28575" cap="rnd">
                 <a:solidFill>
-                  <a:srgbClr val="8DB5D9"/>
+                  <a:srgbClr val="7294A9"/>
                 </a:solidFill>
               </a:ln>
             </p:spPr>
@@ -19713,7 +19713,7 @@
               <a:noFill/>
               <a:ln w="28575" cap="rnd">
                 <a:solidFill>
-                  <a:srgbClr val="8DB5D9"/>
+                  <a:srgbClr val="7294A9"/>
                 </a:solidFill>
               </a:ln>
             </p:spPr>
@@ -19749,7 +19749,7 @@
               <a:noFill/>
               <a:ln w="28575" cap="rnd">
                 <a:solidFill>
-                  <a:srgbClr val="8DB5D9"/>
+                  <a:srgbClr val="7294A9"/>
                 </a:solidFill>
               </a:ln>
             </p:spPr>
@@ -19785,7 +19785,7 @@
               <a:noFill/>
               <a:ln w="28575" cap="rnd">
                 <a:solidFill>
-                  <a:srgbClr val="8DB5D9"/>
+                  <a:srgbClr val="7294A9"/>
                 </a:solidFill>
               </a:ln>
             </p:spPr>
@@ -19821,7 +19821,7 @@
               <a:noFill/>
               <a:ln w="28575" cap="rnd">
                 <a:solidFill>
-                  <a:srgbClr val="8DB5D9"/>
+                  <a:srgbClr val="7294A9"/>
                 </a:solidFill>
               </a:ln>
             </p:spPr>
@@ -19857,7 +19857,7 @@
               <a:noFill/>
               <a:ln w="28575" cap="rnd">
                 <a:solidFill>
-                  <a:srgbClr val="8DB5D9"/>
+                  <a:srgbClr val="7294A9"/>
                 </a:solidFill>
               </a:ln>
             </p:spPr>
@@ -19892,7 +19892,7 @@
               <a:r>
                 <a:rPr lang="zh-TW" sz="2180" dirty="0">
                   <a:solidFill>
-                    <a:srgbClr val="121314"/>
+                    <a:schemeClr val="dk1"/>
                   </a:solidFill>
                   <a:latin typeface="Times New Roman"/>
                   <a:ea typeface="DFKai-SB"/>
@@ -19932,7 +19932,7 @@
               <a:r>
                 <a:rPr lang="zh-TW" sz="1500" dirty="0">
                   <a:solidFill>
-                    <a:schemeClr val="accent5"/>
+                    <a:schemeClr val="accent6"/>
                   </a:solidFill>
                   <a:latin typeface="Times New Roman"/>
                   <a:ea typeface="DFKai-SB"/>
@@ -20153,7 +20153,7 @@
               <a:noFill/>
               <a:ln w="28575" cap="rnd">
                 <a:solidFill>
-                  <a:srgbClr val="95BADC"/>
+                  <a:srgbClr val="7294A9"/>
                 </a:solidFill>
               </a:ln>
             </p:spPr>
@@ -20189,7 +20189,7 @@
               <a:noFill/>
               <a:ln w="28575" cap="rnd">
                 <a:solidFill>
-                  <a:srgbClr val="95BADC"/>
+                  <a:srgbClr val="7294A9"/>
                 </a:solidFill>
               </a:ln>
             </p:spPr>
@@ -20225,7 +20225,7 @@
               <a:noFill/>
               <a:ln w="28575" cap="rnd">
                 <a:solidFill>
-                  <a:srgbClr val="95BADC"/>
+                  <a:srgbClr val="7294A9"/>
                 </a:solidFill>
               </a:ln>
             </p:spPr>
@@ -20261,7 +20261,7 @@
               <a:noFill/>
               <a:ln w="28575" cap="rnd">
                 <a:solidFill>
-                  <a:srgbClr val="95BADC"/>
+                  <a:srgbClr val="7294A9"/>
                 </a:solidFill>
               </a:ln>
             </p:spPr>
@@ -20296,7 +20296,7 @@
               <a:r>
                 <a:rPr lang="zh-TW" sz="2180" dirty="0">
                   <a:solidFill>
-                    <a:srgbClr val="121314"/>
+                    <a:schemeClr val="dk1"/>
                   </a:solidFill>
                   <a:latin typeface="Times New Roman"/>
                   <a:ea typeface="DFKai-SB"/>
@@ -20336,7 +20336,7 @@
               <a:r>
                 <a:rPr lang="zh-TW" sz="1500" dirty="0">
                   <a:solidFill>
-                    <a:schemeClr val="accent5"/>
+                    <a:schemeClr val="accent6"/>
                   </a:solidFill>
                   <a:latin typeface="Times New Roman"/>
                   <a:ea typeface="DFKai-SB"/>
@@ -20698,7 +20698,7 @@
               <a:r>
                 <a:rPr lang="zh-TW" sz="2180" dirty="0">
                   <a:solidFill>
-                    <a:srgbClr val="121314"/>
+                    <a:schemeClr val="dk1"/>
                   </a:solidFill>
                   <a:latin typeface="Times New Roman"/>
                   <a:ea typeface="DFKai-SB"/>
@@ -20738,7 +20738,7 @@
               <a:r>
                 <a:rPr lang="zh-TW" sz="1500" dirty="0">
                   <a:solidFill>
-                    <a:schemeClr val="accent5"/>
+                    <a:schemeClr val="accent6"/>
                   </a:solidFill>
                   <a:latin typeface="Times New Roman"/>
                   <a:ea typeface="DFKai-SB"/>
@@ -20783,7 +20783,7 @@
             <a:noFill/>
             <a:ln w="23812">
               <a:solidFill>
-                <a:srgbClr val="6B6B6B"/>
+                <a:srgbClr val="53666E"/>
               </a:solidFill>
               <a:custDash>
                 <a:ds d="240000" sp="200000"/>
@@ -20825,7 +20825,7 @@
             <a:noFill/>
             <a:ln w="23812">
               <a:solidFill>
-                <a:srgbClr val="6B6B6B"/>
+                <a:srgbClr val="53666E"/>
               </a:solidFill>
             </a:ln>
           </p:spPr>
@@ -20925,7 +20925,7 @@
               <a:noFill/>
               <a:ln w="12502" cap="rnd">
                 <a:solidFill>
-                  <a:srgbClr val="95BADC"/>
+                  <a:srgbClr val="7294A9"/>
                 </a:solidFill>
               </a:ln>
             </p:spPr>
@@ -20961,7 +20961,7 @@
               <a:noFill/>
               <a:ln w="12502" cap="rnd">
                 <a:solidFill>
-                  <a:srgbClr val="95BADC"/>
+                  <a:srgbClr val="7294A9"/>
                 </a:solidFill>
               </a:ln>
             </p:spPr>
@@ -20997,7 +20997,7 @@
               <a:noFill/>
               <a:ln w="12502" cap="rnd">
                 <a:solidFill>
-                  <a:srgbClr val="95BADC"/>
+                  <a:srgbClr val="7294A9"/>
                 </a:solidFill>
               </a:ln>
             </p:spPr>
@@ -21033,7 +21033,7 @@
               <a:noFill/>
               <a:ln w="12502" cap="rnd">
                 <a:solidFill>
-                  <a:srgbClr val="95BADC"/>
+                  <a:srgbClr val="7294A9"/>
                 </a:solidFill>
               </a:ln>
             </p:spPr>
@@ -21211,7 +21211,7 @@
             <a:noFill/>
             <a:ln w="9525">
               <a:solidFill>
-                <a:srgbClr val="E3EAF2"/>
+                <a:srgbClr val="D6DDE0"/>
               </a:solidFill>
             </a:ln>
           </p:spPr>
@@ -21245,7 +21245,7 @@
               <a:r>
                 <a:rPr lang="en-US" sz="1120" dirty="0">
                   <a:solidFill>
-                    <a:schemeClr val="accent5"/>
+                    <a:schemeClr val="accent6"/>
                   </a:solidFill>
                   <a:latin typeface="Times New Roman"/>
                   <a:ea typeface="DFKai-SB"/>
@@ -21256,7 +21256,7 @@
               <a:r>
                 <a:rPr lang="zh-TW" sz="1120" dirty="0">
                   <a:solidFill>
-                    <a:schemeClr val="accent5"/>
+                    <a:schemeClr val="accent6"/>
                   </a:solidFill>
                   <a:latin typeface="Times New Roman"/>
                   <a:ea typeface="DFKai-SB"/>
@@ -21296,7 +21296,7 @@
               <a:r>
                 <a:rPr lang="zh-TW" sz="1120" dirty="0">
                   <a:solidFill>
-                    <a:schemeClr val="accent5"/>
+                    <a:schemeClr val="accent6"/>
                   </a:solidFill>
                   <a:latin typeface="Times New Roman"/>
                   <a:ea typeface="DFKai-SB"/>
@@ -21372,7 +21372,7 @@
               </a:avLst>
             </a:prstGeom>
             <a:solidFill>
-              <a:schemeClr val="accent1"/>
+              <a:schemeClr val="accent2"/>
             </a:solidFill>
             <a:ln>
               <a:noFill/>
@@ -21448,7 +21448,7 @@
               <a:r>
                 <a:rPr lang="zh-TW" sz="3150" dirty="0">
                   <a:solidFill>
-                    <a:srgbClr val="121314"/>
+                    <a:schemeClr val="accent5"/>
                   </a:solidFill>
                   <a:latin typeface="Times New Roman"/>
                   <a:ea typeface="DFKai-SB"/>
@@ -21503,7 +21503,7 @@
               <a:r>
                 <a:rPr lang="zh-TW" sz="1800" dirty="0">
                   <a:solidFill>
-                    <a:schemeClr val="accent5"/>
+                    <a:schemeClr val="accent6"/>
                   </a:solidFill>
                   <a:latin typeface="Times New Roman"/>
                   <a:ea typeface="DFKai-SB"/>
@@ -21514,7 +21514,7 @@
               <a:r>
                 <a:rPr lang="en-US" sz="1800" dirty="0">
                   <a:solidFill>
-                    <a:schemeClr val="accent5"/>
+                    <a:schemeClr val="accent6"/>
                   </a:solidFill>
                   <a:latin typeface="Times New Roman"/>
                   <a:ea typeface="DFKai-SB"/>
@@ -21570,7 +21570,7 @@
               <a:noFill/>
               <a:ln w="9525">
                 <a:solidFill>
-                  <a:srgbClr val="DDE5ED"/>
+                  <a:srgbClr val="D6DDE0"/>
                 </a:solidFill>
               </a:ln>
             </p:spPr>
@@ -21604,7 +21604,7 @@
                 <a:r>
                   <a:rPr lang="zh-TW" sz="1500" dirty="0">
                     <a:solidFill>
-                      <a:schemeClr val="accent5"/>
+                      <a:schemeClr val="accent6"/>
                     </a:solidFill>
                     <a:latin typeface="Times New Roman"/>
                     <a:ea typeface="DFKai-SB"/>
@@ -21646,7 +21646,7 @@
               <a:noFill/>
               <a:ln w="9525">
                 <a:solidFill>
-                  <a:srgbClr val="DDE5ED"/>
+                  <a:srgbClr val="D6DDE0"/>
                 </a:solidFill>
               </a:ln>
             </p:spPr>
@@ -21680,7 +21680,7 @@
                 <a:r>
                   <a:rPr lang="zh-TW" sz="1500" dirty="0">
                     <a:solidFill>
-                      <a:schemeClr val="accent5"/>
+                      <a:schemeClr val="accent6"/>
                     </a:solidFill>
                     <a:latin typeface="Times New Roman"/>
                     <a:ea typeface="DFKai-SB"/>
@@ -21722,7 +21722,7 @@
               <a:noFill/>
               <a:ln w="9525">
                 <a:solidFill>
-                  <a:srgbClr val="DDE5ED"/>
+                  <a:srgbClr val="D6DDE0"/>
                 </a:solidFill>
               </a:ln>
             </p:spPr>
@@ -21756,7 +21756,7 @@
                 <a:r>
                   <a:rPr lang="zh-TW" sz="1500" dirty="0">
                     <a:solidFill>
-                      <a:schemeClr val="accent5"/>
+                      <a:schemeClr val="accent6"/>
                     </a:solidFill>
                     <a:latin typeface="Times New Roman"/>
                     <a:ea typeface="DFKai-SB"/>
@@ -21796,7 +21796,7 @@
                 <a:r>
                   <a:rPr lang="en-US" sz="1720" dirty="0">
                     <a:solidFill>
-                      <a:srgbClr val="121314"/>
+                      <a:schemeClr val="dk1"/>
                     </a:solidFill>
                     <a:latin typeface="Times New Roman"/>
                     <a:ea typeface="DFKai-SB"/>
@@ -21822,7 +21822,7 @@
                 <a:avLst/>
               </a:prstGeom>
               <a:solidFill>
-                <a:srgbClr val="9ABDE0"/>
+                <a:srgbClr val="7294A9"/>
               </a:solidFill>
               <a:ln>
                 <a:noFill/>
@@ -21858,7 +21858,7 @@
                 <a:r>
                   <a:rPr lang="zh-TW" sz="1720" b="1" dirty="0">
                     <a:solidFill>
-                      <a:srgbClr val="121314"/>
+                      <a:schemeClr val="dk1"/>
                     </a:solidFill>
                     <a:latin typeface="Times New Roman"/>
                     <a:ea typeface="DFKai-SB"/>
@@ -21898,7 +21898,7 @@
                 <a:r>
                   <a:rPr lang="en-US" sz="1720" dirty="0">
                     <a:solidFill>
-                      <a:srgbClr val="121314"/>
+                      <a:schemeClr val="dk1"/>
                     </a:solidFill>
                     <a:latin typeface="Times New Roman"/>
                     <a:ea typeface="DFKai-SB"/>
@@ -21924,7 +21924,7 @@
                 <a:avLst/>
               </a:prstGeom>
               <a:solidFill>
-                <a:srgbClr val="9ABDE0"/>
+                <a:srgbClr val="7294A9"/>
               </a:solidFill>
               <a:ln>
                 <a:noFill/>
@@ -21960,7 +21960,7 @@
                 <a:r>
                   <a:rPr lang="zh-TW" sz="1720" b="1" dirty="0">
                     <a:solidFill>
-                      <a:srgbClr val="121314"/>
+                      <a:schemeClr val="dk1"/>
                     </a:solidFill>
                     <a:latin typeface="Times New Roman"/>
                     <a:ea typeface="DFKai-SB"/>
@@ -22026,7 +22026,7 @@
                 <a:avLst/>
               </a:prstGeom>
               <a:solidFill>
-                <a:schemeClr val="accent1"/>
+                <a:schemeClr val="accent2"/>
               </a:solidFill>
               <a:ln>
                 <a:noFill/>
@@ -22091,7 +22091,7 @@
               </a:avLst>
             </a:prstGeom>
             <a:solidFill>
-              <a:srgbClr val="EAF3FC"/>
+              <a:srgbClr val="EAF0F4"/>
             </a:solidFill>
             <a:ln>
               <a:noFill/>
@@ -22247,7 +22247,7 @@
               <a:r>
                 <a:rPr lang="zh-TW" sz="1580" dirty="0">
                   <a:solidFill>
-                    <a:schemeClr val="accent5"/>
+                    <a:schemeClr val="accent6"/>
                   </a:solidFill>
                   <a:latin typeface="Times New Roman"/>
                   <a:ea typeface="DFKai-SB"/>
@@ -22388,7 +22388,7 @@
             <a:noFill/>
             <a:ln w="9525">
               <a:solidFill>
-                <a:srgbClr val="E3EAF2"/>
+                <a:srgbClr val="D6DDE0"/>
               </a:solidFill>
             </a:ln>
           </p:spPr>
@@ -22422,7 +22422,7 @@
               <a:r>
                 <a:rPr lang="en-US" sz="1120" dirty="0">
                   <a:solidFill>
-                    <a:schemeClr val="accent5"/>
+                    <a:schemeClr val="accent6"/>
                   </a:solidFill>
                   <a:latin typeface="Times New Roman"/>
                   <a:ea typeface="DFKai-SB"/>
@@ -22433,7 +22433,7 @@
               <a:r>
                 <a:rPr lang="zh-TW" sz="1120" dirty="0">
                   <a:solidFill>
-                    <a:schemeClr val="accent5"/>
+                    <a:schemeClr val="accent6"/>
                   </a:solidFill>
                   <a:latin typeface="Times New Roman"/>
                   <a:ea typeface="DFKai-SB"/>
@@ -22473,7 +22473,7 @@
               <a:r>
                 <a:rPr lang="zh-TW" sz="1120" dirty="0">
                   <a:solidFill>
-                    <a:schemeClr val="accent5"/>
+                    <a:schemeClr val="accent6"/>
                   </a:solidFill>
                   <a:latin typeface="Times New Roman"/>
                   <a:ea typeface="DFKai-SB"/>
@@ -22549,7 +22549,7 @@
               </a:avLst>
             </a:prstGeom>
             <a:solidFill>
-              <a:schemeClr val="accent1"/>
+              <a:schemeClr val="accent2"/>
             </a:solidFill>
             <a:ln>
               <a:noFill/>
@@ -22625,7 +22625,7 @@
               <a:r>
                 <a:rPr lang="zh-TW" sz="3150" dirty="0">
                   <a:solidFill>
-                    <a:srgbClr val="121314"/>
+                    <a:schemeClr val="accent5"/>
                   </a:solidFill>
                   <a:latin typeface="Times New Roman"/>
                   <a:ea typeface="DFKai-SB"/>
@@ -22636,7 +22636,7 @@
               <a:r>
                 <a:rPr lang="en-US" sz="3150" dirty="0">
                   <a:solidFill>
-                    <a:srgbClr val="121314"/>
+                    <a:schemeClr val="accent5"/>
                   </a:solidFill>
                   <a:latin typeface="Times New Roman"/>
                   <a:ea typeface="DFKai-SB"/>
@@ -22647,7 +22647,7 @@
               <a:r>
                 <a:rPr lang="zh-TW" sz="3150" dirty="0">
                   <a:solidFill>
-                    <a:srgbClr val="121314"/>
+                    <a:schemeClr val="accent5"/>
                   </a:solidFill>
                   <a:latin typeface="Times New Roman"/>
                   <a:ea typeface="DFKai-SB"/>
@@ -22948,7 +22948,7 @@
               <a:r>
                 <a:rPr lang="zh-TW" sz="1580" dirty="0">
                   <a:solidFill>
-                    <a:schemeClr val="accent5"/>
+                    <a:schemeClr val="accent6"/>
                   </a:solidFill>
                   <a:latin typeface="Times New Roman"/>
                   <a:ea typeface="DFKai-SB"/>
@@ -22976,7 +22976,7 @@
               </a:avLst>
             </a:prstGeom>
             <a:solidFill>
-              <a:srgbClr val="EAF3FC"/>
+              <a:srgbClr val="EAF0F4"/>
             </a:solidFill>
             <a:ln>
               <a:noFill/>
@@ -23332,7 +23332,7 @@
                 <a:avLst/>
               </a:prstGeom>
               <a:solidFill>
-                <a:srgbClr val="E7F1FB"/>
+                <a:srgbClr val="EAF0F4"/>
               </a:solidFill>
               <a:ln w="14883">
                 <a:solidFill>
@@ -23712,7 +23712,7 @@
               <a:avLst/>
             </a:prstGeom>
             <a:solidFill>
-              <a:srgbClr val="E7F1FB"/>
+              <a:srgbClr val="EAF0F4"/>
             </a:solidFill>
             <a:ln w="14883">
               <a:solidFill>
@@ -23898,7 +23898,7 @@
               </a:avLst>
             </a:prstGeom>
             <a:solidFill>
-              <a:srgbClr val="EAF3FC"/>
+              <a:srgbClr val="EAF0F4"/>
             </a:solidFill>
             <a:ln>
               <a:noFill/>
@@ -23991,7 +23991,7 @@
             <a:noFill/>
             <a:ln w="9525">
               <a:solidFill>
-                <a:srgbClr val="E3EAF2"/>
+                <a:srgbClr val="D6DDE0"/>
               </a:solidFill>
             </a:ln>
           </p:spPr>
@@ -24025,7 +24025,7 @@
               <a:r>
                 <a:rPr lang="en-US" sz="1120" dirty="0">
                   <a:solidFill>
-                    <a:schemeClr val="accent5"/>
+                    <a:schemeClr val="accent6"/>
                   </a:solidFill>
                   <a:latin typeface="Times New Roman"/>
                   <a:ea typeface="DFKai-SB"/>
@@ -24036,7 +24036,7 @@
               <a:r>
                 <a:rPr lang="zh-TW" sz="1120" dirty="0">
                   <a:solidFill>
-                    <a:schemeClr val="accent5"/>
+                    <a:schemeClr val="accent6"/>
                   </a:solidFill>
                   <a:latin typeface="Times New Roman"/>
                   <a:ea typeface="DFKai-SB"/>
@@ -24076,7 +24076,7 @@
               <a:r>
                 <a:rPr lang="zh-TW" sz="1120" dirty="0">
                   <a:solidFill>
-                    <a:schemeClr val="accent5"/>
+                    <a:schemeClr val="accent6"/>
                   </a:solidFill>
                   <a:latin typeface="Times New Roman"/>
                   <a:ea typeface="DFKai-SB"/>
@@ -24152,7 +24152,7 @@
               </a:avLst>
             </a:prstGeom>
             <a:solidFill>
-              <a:schemeClr val="accent1"/>
+              <a:schemeClr val="accent2"/>
             </a:solidFill>
             <a:ln>
               <a:noFill/>
@@ -24228,7 +24228,7 @@
               <a:r>
                 <a:rPr lang="zh-TW" sz="3150" dirty="0">
                   <a:solidFill>
-                    <a:srgbClr val="121314"/>
+                    <a:schemeClr val="accent5"/>
                   </a:solidFill>
                   <a:latin typeface="Times New Roman"/>
                   <a:ea typeface="DFKai-SB"/>
@@ -24283,7 +24283,7 @@
               <a:r>
                 <a:rPr lang="zh-TW" sz="2700" dirty="0">
                   <a:solidFill>
-                    <a:srgbClr val="121314"/>
+                    <a:schemeClr val="dk1"/>
                   </a:solidFill>
                   <a:latin typeface="Times New Roman"/>
                   <a:ea typeface="DFKai-SB"/>
@@ -24389,7 +24389,7 @@
               <a:noFill/>
               <a:ln w="18455" cap="rnd">
                 <a:solidFill>
-                  <a:srgbClr val="95BADC"/>
+                  <a:srgbClr val="7294A9"/>
                 </a:solidFill>
               </a:ln>
             </p:spPr>
@@ -24425,7 +24425,7 @@
               <a:noFill/>
               <a:ln w="18455" cap="rnd">
                 <a:solidFill>
-                  <a:srgbClr val="95BADC"/>
+                  <a:srgbClr val="7294A9"/>
                 </a:solidFill>
               </a:ln>
             </p:spPr>
@@ -24461,7 +24461,7 @@
               <a:noFill/>
               <a:ln w="18455" cap="rnd">
                 <a:solidFill>
-                  <a:srgbClr val="95BADC"/>
+                  <a:srgbClr val="7294A9"/>
                 </a:solidFill>
               </a:ln>
             </p:spPr>
@@ -24497,7 +24497,7 @@
               <a:noFill/>
               <a:ln w="18455" cap="rnd">
                 <a:solidFill>
-                  <a:srgbClr val="95BADC"/>
+                  <a:srgbClr val="7294A9"/>
                 </a:solidFill>
               </a:ln>
             </p:spPr>
@@ -24572,7 +24572,7 @@
               <a:r>
                 <a:rPr lang="zh-TW" sz="1500" dirty="0">
                   <a:solidFill>
-                    <a:schemeClr val="accent5"/>
+                    <a:schemeClr val="accent6"/>
                   </a:solidFill>
                   <a:latin typeface="Times New Roman"/>
                   <a:ea typeface="DFKai-SB"/>
@@ -24826,7 +24826,7 @@
               <a:r>
                 <a:rPr lang="en-US" sz="1500" dirty="0">
                   <a:solidFill>
-                    <a:schemeClr val="accent5"/>
+                    <a:schemeClr val="accent6"/>
                   </a:solidFill>
                   <a:latin typeface="Times New Roman"/>
                   <a:ea typeface="DFKai-SB"/>
@@ -24837,7 +24837,7 @@
               <a:r>
                 <a:rPr lang="zh-TW" sz="1500" dirty="0">
                   <a:solidFill>
-                    <a:schemeClr val="accent5"/>
+                    <a:schemeClr val="accent6"/>
                   </a:solidFill>
                   <a:latin typeface="Times New Roman"/>
                   <a:ea typeface="DFKai-SB"/>
@@ -24976,7 +24976,7 @@
                 <a:avLst/>
               </a:prstGeom>
               <a:solidFill>
-                <a:srgbClr val="E7F1FB"/>
+                <a:srgbClr val="EAF0F4"/>
               </a:solidFill>
               <a:ln w="23068">
                 <a:solidFill>
@@ -25127,7 +25127,7 @@
               <a:r>
                 <a:rPr lang="zh-TW" sz="1500" dirty="0">
                   <a:solidFill>
-                    <a:schemeClr val="accent5"/>
+                    <a:schemeClr val="accent6"/>
                   </a:solidFill>
                   <a:latin typeface="Times New Roman"/>
                   <a:ea typeface="DFKai-SB"/>
@@ -25489,7 +25489,7 @@
               <a:r>
                 <a:rPr lang="zh-TW" sz="1500" dirty="0">
                   <a:solidFill>
-                    <a:schemeClr val="accent5"/>
+                    <a:schemeClr val="accent6"/>
                   </a:solidFill>
                   <a:latin typeface="Times New Roman"/>
                   <a:ea typeface="DFKai-SB"/>
@@ -25517,7 +25517,7 @@
               </a:avLst>
             </a:prstGeom>
             <a:solidFill>
-              <a:srgbClr val="E2EDF8"/>
+              <a:srgbClr val="FFF4DD"/>
             </a:solidFill>
             <a:ln>
               <a:noFill/>
@@ -25553,7 +25553,7 @@
               <a:r>
                 <a:rPr lang="zh-TW" sz="1950" dirty="0">
                   <a:solidFill>
-                    <a:schemeClr val="dk1"/>
+                    <a:schemeClr val="accent5"/>
                   </a:solidFill>
                   <a:latin typeface="Times New Roman"/>
                   <a:ea typeface="DFKai-SB"/>
@@ -25564,7 +25564,7 @@
               <a:r>
                 <a:rPr lang="en-US" sz="1950" dirty="0">
                   <a:solidFill>
-                    <a:schemeClr val="dk1"/>
+                    <a:schemeClr val="accent5"/>
                   </a:solidFill>
                   <a:latin typeface="Times New Roman"/>
                   <a:ea typeface="DFKai-SB"/>
@@ -25575,7 +25575,7 @@
               <a:r>
                 <a:rPr lang="zh-TW" sz="1950" dirty="0">
                   <a:solidFill>
-                    <a:schemeClr val="dk1"/>
+                    <a:schemeClr val="accent5"/>
                   </a:solidFill>
                   <a:latin typeface="Times New Roman"/>
                   <a:ea typeface="DFKai-SB"/>
@@ -25734,7 +25734,7 @@
             <a:noFill/>
             <a:ln w="9525">
               <a:solidFill>
-                <a:srgbClr val="E3EAF2"/>
+                <a:srgbClr val="D6DDE0"/>
               </a:solidFill>
             </a:ln>
           </p:spPr>
@@ -25768,7 +25768,7 @@
               <a:r>
                 <a:rPr lang="en-US" sz="1120" dirty="0">
                   <a:solidFill>
-                    <a:schemeClr val="accent5"/>
+                    <a:schemeClr val="accent6"/>
                   </a:solidFill>
                   <a:latin typeface="Times New Roman"/>
                   <a:ea typeface="DFKai-SB"/>
@@ -25779,7 +25779,7 @@
               <a:r>
                 <a:rPr lang="zh-TW" sz="1120" dirty="0">
                   <a:solidFill>
-                    <a:schemeClr val="accent5"/>
+                    <a:schemeClr val="accent6"/>
                   </a:solidFill>
                   <a:latin typeface="Times New Roman"/>
                   <a:ea typeface="DFKai-SB"/>
@@ -25819,7 +25819,7 @@
               <a:r>
                 <a:rPr lang="zh-TW" sz="1120" dirty="0">
                   <a:solidFill>
-                    <a:schemeClr val="accent5"/>
+                    <a:schemeClr val="accent6"/>
                   </a:solidFill>
                   <a:latin typeface="Times New Roman"/>
                   <a:ea typeface="DFKai-SB"/>
@@ -25844,7 +25844,7 @@
   <a:themeElements>
     <a:clrScheme name="finals_editorial">
       <a:dk1>
-        <a:srgbClr val="000000"/>
+        <a:srgbClr val="171C1D"/>
       </a:dk1>
       <a:lt1>
         <a:srgbClr val="FFFFFF"/>
@@ -25853,31 +25853,31 @@
         <a:srgbClr val="1F497D"/>
       </a:dk2>
       <a:lt2>
-        <a:srgbClr val="F2F7FC"/>
+        <a:srgbClr val="F0F2F3"/>
       </a:lt2>
       <a:accent1>
-        <a:srgbClr val="0070D1"/>
+        <a:srgbClr val="105186"/>
       </a:accent1>
       <a:accent2>
-        <a:srgbClr val="0070D1"/>
+        <a:srgbClr val="FDB338"/>
       </a:accent2>
       <a:accent3>
-        <a:srgbClr val="F5F7FA"/>
+        <a:srgbClr val="F0F2F3"/>
       </a:accent3>
       <a:accent4>
-        <a:srgbClr val="0070D1"/>
+        <a:srgbClr val="105186"/>
       </a:accent4>
       <a:accent5>
-        <a:srgbClr val="6B6B6B"/>
+        <a:srgbClr val="092B42"/>
       </a:accent5>
       <a:accent6>
-        <a:srgbClr val="CCCCCC"/>
+        <a:srgbClr val="53666E"/>
       </a:accent6>
       <a:hlink>
-        <a:srgbClr val="0070D1"/>
+        <a:srgbClr val="FDB338"/>
       </a:hlink>
       <a:folHlink>
-        <a:srgbClr val="F5F7FA"/>
+        <a:srgbClr val="F0F2F3"/>
       </a:folHlink>
     </a:clrScheme>
     <a:fontScheme name="finals_editorial">
@@ -26164,7 +26164,7 @@
   <a:themeElements>
     <a:clrScheme name="finals_editorial">
       <a:dk1>
-        <a:srgbClr val="000000"/>
+        <a:srgbClr val="171C1D"/>
       </a:dk1>
       <a:lt1>
         <a:srgbClr val="FFFFFF"/>
@@ -26173,31 +26173,31 @@
         <a:srgbClr val="1F497D"/>
       </a:dk2>
       <a:lt2>
-        <a:srgbClr val="F2F7FC"/>
+        <a:srgbClr val="F0F2F3"/>
       </a:lt2>
       <a:accent1>
-        <a:srgbClr val="0070D1"/>
+        <a:srgbClr val="105186"/>
       </a:accent1>
       <a:accent2>
-        <a:srgbClr val="0070D1"/>
+        <a:srgbClr val="FDB338"/>
       </a:accent2>
       <a:accent3>
-        <a:srgbClr val="F5F7FA"/>
+        <a:srgbClr val="F0F2F3"/>
       </a:accent3>
       <a:accent4>
-        <a:srgbClr val="0070D1"/>
+        <a:srgbClr val="105186"/>
       </a:accent4>
       <a:accent5>
-        <a:srgbClr val="6B6B6B"/>
+        <a:srgbClr val="092B42"/>
       </a:accent5>
       <a:accent6>
-        <a:srgbClr val="CCCCCC"/>
+        <a:srgbClr val="53666E"/>
       </a:accent6>
       <a:hlink>
-        <a:srgbClr val="0070D1"/>
+        <a:srgbClr val="FDB338"/>
       </a:hlink>
       <a:folHlink>
-        <a:srgbClr val="F5F7FA"/>
+        <a:srgbClr val="F0F2F3"/>
       </a:folHlink>
     </a:clrScheme>
     <a:fontScheme name="finals_editorial">

--- a/deliverables/決賽簡報_AI資安框架.pptx
+++ b/deliverables/決賽簡報_AI資安框架.pptx
@@ -400,7 +400,7 @@
                 <a:ea typeface="DFKai-SB"/>
                 <a:cs typeface="Times New Roman"/>
               </a:rPr>
-              <a:t>我們的作品將入侵偵測、案例檢索、AI稽核與受控處置，整合在同一條事件鏈。前段產生判定與模型表徵，後段依相似案例核對證據，最後留下可驗證、可回復的處置回條。</a:t>
+              <a:t>我們把入侵偵測、案例證據與受控處置串成同一事件流程，讓管理者能核對判斷依據，並追蹤處置與回復。</a:t>
             </a:r>
           </a:p>
         </p:txBody>
@@ -662,7 +662,7 @@
                 <a:ea typeface="DFKai-SB"/>
                 <a:cs typeface="Times New Roman"/>
               </a:rPr>
-              <a:t>30 筆偵測誤判有 18 筆分流；其餘 12 筆仍獲 AI 支持。處置另經信心、政策、白名單與期限檢查，並可到期撤銷。AI 不改寫正式分類；複核／不確定走監測或蒐證。</a:t>
+              <a:t>30 筆偵測誤判有 18 筆分流；其餘 12 筆仍獲 AI 支持。處置另經信心、政策、動作白名單與期限檢查，並可到期撤銷。AI 不改寫正式分類；複核／不確定走監測或蒐證。</a:t>
             </a:r>
           </a:p>
         </p:txBody>
@@ -987,7 +987,7 @@
                 <a:ea typeface="DFKai-SB"/>
                 <a:cs typeface="Times New Roman"/>
               </a:rPr>
-              <a:t>前段以兩種互補特徵平行判斷，並非先後串行。CTBM閱讀封包內容、時間差與方向；PBCNN補充短視窗位元組模式。校準後由OOF Gate依事件證據融合，輸出固定十七類，並保留信心與表徵交給後段。</a:t>
+              <a:t>前段讓兩種模型分析同一筆流量。CTBM掌握封包內容、時間差與方向，PBCNN補充短視窗的位元組模式；經校準與融合閘門整合後，輸出十七類判定、信心與流量表徵。這些表徵會接到下一頁的案例檢索。</a:t>
             </a:r>
           </a:p>
         </p:txBody>
@@ -1050,7 +1050,7 @@
                 <a:ea typeface="DFKai-SB"/>
                 <a:cs typeface="Times New Roman"/>
               </a:rPr>
-              <a:t>後段不是只把類別名稱送進語言模型。我們結合五百一十二維流量表徵與十七維類別機率，建立任務向量，查詢只由訓練資料建立的案例庫。前五筆案例與類別共識交給本機AI核對，回傳支持、複核或不確定，連同正式分類留在同一事件紀錄。</a:t>
+              <a:t>我們把五百一十二維流量表徵與十七維類別機率，組成五百二十九維任務向量，查詢只由訓練資料建立的案例庫。檢索同時考慮流量特徵與判定資訊，本機AI再依前五筆案例核對證據，回傳支持、複核或不確定；正式分類與稽核結論保留在同一事件紀錄。</a:t>
             </a:r>
           </a:p>
         </p:txBody>
@@ -1113,7 +1113,7 @@
                 <a:ea typeface="DFKai-SB"/>
                 <a:cs typeface="Times New Roman"/>
               </a:rPr>
-              <a:t>處置由政策閘門檢查範圍、白名單與有效期，通過後才套用並讀回規則，再於到期撤銷。六種隔離情境包含四種實際套用規則、兩種監測或蒐證；背景服務六種皆保留，回復完整性六種皆通過。這些結果量測隔離TCP交易與回條，不代表原始攻擊封包或正式場域的防禦率。</a:t>
+              <a:t>策略閘門檢查範圍、動作白名單與有效期，通過後才套用並讀回規則，再於到期撤銷。六種隔離情境包含四種套用規則、兩種監測或蒐證；背景服務六種皆保留，回復完整性六種皆通過。這裡呈現的是隔離TCP交易與回條驗證。</a:t>
             </a:r>
           </a:p>
         </p:txBody>
@@ -1302,7 +1302,7 @@
                 <a:ea typeface="DFKai-SB"/>
                 <a:cs typeface="Times New Roman"/>
               </a:rPr>
-              <a:t>我們以十七類真實前處理張量重跑整合鏈，並以六種隔離情境確認處置回條與回復行為。作品把偵測、證據與處置放在同一個框架，讓判斷有依據、稽核有證據、處置可回復。前面播放的三十秒動畫以兩倍速說明流程，並可搭配本機執行紀錄展示。</a:t>
+              <a:t>十七類整合重跑與六種隔離情境，驗證了同事件的判定、證據和回復紀錄。感謝聆聽，敬請指教。</a:t>
             </a:r>
           </a:p>
         </p:txBody>
@@ -11248,7 +11248,7 @@
             <a:hlinkClick r:id="" action="ppaction://media"/>
             <a:extLst>
               <a:ext uri="{FF2B5EF4-FFF2-40B4-BE49-F238E27FC236}">
-                <a16:creationId xmlns:a16="http://schemas.microsoft.com/office/drawing/2014/main" id="{474880EC-B5CB-4349-A221-3843E0CCED40}"/>
+                <a16:creationId xmlns:a16="http://schemas.microsoft.com/office/drawing/2014/main" id="{CBE9B365-B31D-49F3-801D-C762CAC8265B}"/>
               </a:ext>
             </a:extLst>
           </p:cNvPr>
@@ -19363,8 +19363,8 @@
           </p:nvSpPr>
           <p:spPr>
             <a:xfrm>
-              <a:off x="979170" y="3927475"/>
-              <a:ext cx="1832610" cy="293370"/>
+              <a:off x="878205" y="3927475"/>
+              <a:ext cx="2034540" cy="293370"/>
             </a:xfrm>
             <a:prstGeom prst="rect">
               <a:avLst/>
@@ -19390,7 +19390,7 @@
                   <a:ea typeface="DFKai-SB"/>
                   <a:cs typeface="Times New Roman"/>
                 </a:rPr>
-                <a:t>範圍・白名單・期限</a:t>
+                <a:t>範圍・允許動作・期限</a:t>
               </a:r>
             </a:p>
           </p:txBody>

--- a/deliverables/決賽簡報_AI資安框架.pptx
+++ b/deliverables/決賽簡報_AI資安框架.pptx
@@ -857,12 +857,7 @@
             <p:ph type="sldImg" idx="2"/>
           </p:nvPr>
         </p:nvSpPr>
-        <p:spPr>
-          <a:xfrm>
-            <a:off x="381000" y="685800"/>
-            <a:ext cx="6096000" cy="3429000"/>
-          </a:xfrm>
-        </p:spPr>
+        <p:spPr/>
       </p:sp>
       <p:sp>
         <p:nvSpPr>
@@ -2027,16 +2022,16 @@
       </p:grpSp>
       <p:grpSp>
         <p:nvGrpSpPr>
-          <p:cNvPr id="51" name="page-content"/>
+          <p:cNvPr id="79" name="page-content"/>
           <p:cNvGrpSpPr/>
           <p:nvPr/>
         </p:nvGrpSpPr>
         <p:grpSpPr>
           <a:xfrm>
             <a:off x="593217" y="1558925"/>
-            <a:ext cx="10619494" cy="4366815"/>
+            <a:ext cx="10911792" cy="3889375"/>
             <a:chOff x="593217" y="1558925"/>
-            <a:chExt cx="10619494" cy="4366815"/>
+            <a:chExt cx="10911792" cy="3889375"/>
           </a:xfrm>
         </p:grpSpPr>
         <p:sp>
@@ -3557,71 +3552,39 @@
         </p:sp>
         <p:grpSp>
           <p:nvGrpSpPr>
-            <p:cNvPr id="50" name="Group 50"/>
+            <p:cNvPr id="78" name="Group 78"/>
             <p:cNvGrpSpPr/>
             <p:nvPr/>
           </p:nvGrpSpPr>
           <p:grpSpPr>
             <a:xfrm>
-              <a:off x="9659838" y="4108549"/>
-              <a:ext cx="1552873" cy="1817191"/>
-              <a:chOff x="9659838" y="4108549"/>
-              <a:chExt cx="1552873" cy="1817191"/>
+              <a:off x="8954691" y="1639491"/>
+              <a:ext cx="2550318" cy="2550318"/>
+              <a:chOff x="8954691" y="1639491"/>
+              <a:chExt cx="2550318" cy="2550318"/>
             </a:xfrm>
           </p:grpSpPr>
           <p:sp>
             <p:nvSpPr>
-              <p:cNvPr id="47" name="Freeform 47"/>
+              <p:cNvPr id="47" name="Ellipse 47"/>
               <p:cNvSpPr/>
               <p:nvPr/>
             </p:nvSpPr>
             <p:spPr>
               <a:xfrm>
-                <a:off x="9659838" y="4108549"/>
-                <a:ext cx="1387673" cy="1784152"/>
+                <a:off x="9217819" y="1902619"/>
+                <a:ext cx="2024062" cy="2024062"/>
               </a:xfrm>
-              <a:custGeom>
+              <a:prstGeom prst="ellipse">
                 <a:avLst/>
-                <a:gdLst/>
-                <a:ahLst/>
-                <a:cxnLst/>
-                <a:rect l="l" t="t" r="r" b="b"/>
-                <a:pathLst>
-                  <a:path w="1387673" h="1784152">
-                    <a:moveTo>
-                      <a:pt x="693837" y="0"/>
-                    </a:moveTo>
-                    <a:lnTo>
-                      <a:pt x="1387673" y="297359"/>
-                    </a:lnTo>
-                    <a:lnTo>
-                      <a:pt x="1387673" y="825996"/>
-                    </a:lnTo>
-                    <a:cubicBezTo>
-                      <a:pt x="1387673" y="1255514"/>
-                      <a:pt x="1057275" y="1552873"/>
-                      <a:pt x="693837" y="1784152"/>
-                    </a:cubicBezTo>
-                    <a:cubicBezTo>
-                      <a:pt x="330398" y="1552873"/>
-                      <a:pt x="0" y="1255514"/>
-                      <a:pt x="0" y="825996"/>
-                    </a:cubicBezTo>
-                    <a:lnTo>
-                      <a:pt x="0" y="297359"/>
-                    </a:lnTo>
-                    <a:close/>
-                  </a:path>
-                </a:pathLst>
-              </a:custGeom>
+              </a:prstGeom>
               <a:solidFill>
-                <a:schemeClr val="lt1"/>
+                <a:srgbClr val="EAF0F4"/>
               </a:solidFill>
-              <a:ln w="99120" cap="rnd">
+              <a:ln w="40481">
                 <a:solidFill>
-                  <a:schemeClr val="accent1"/>
+                  <a:srgbClr val="D6DDE0"/>
                 </a:solidFill>
-                <a:round/>
               </a:ln>
             </p:spPr>
           </p:sp>
@@ -3633,8 +3596,8 @@
             </p:nvSpPr>
             <p:spPr>
               <a:xfrm>
-                <a:off x="9990237" y="4670227"/>
-                <a:ext cx="759916" cy="528638"/>
+                <a:off x="9217819" y="1902619"/>
+                <a:ext cx="2024062" cy="2024062"/>
               </a:xfrm>
               <a:custGeom>
                 <a:avLst/>
@@ -3643,77 +3606,1025 @@
                 <a:cxnLst/>
                 <a:rect l="l" t="t" r="r" b="b"/>
                 <a:pathLst>
-                  <a:path w="759916" h="528638">
+                  <a:path w="2024062" h="2024062">
                     <a:moveTo>
-                      <a:pt x="0" y="264319"/>
+                      <a:pt x="1012031" y="0"/>
                     </a:moveTo>
-                    <a:lnTo>
-                      <a:pt x="264319" y="528638"/>
-                    </a:lnTo>
-                    <a:lnTo>
-                      <a:pt x="759916" y="0"/>
-                    </a:lnTo>
+                    <a:cubicBezTo>
+                      <a:pt x="1686719" y="0"/>
+                      <a:pt x="2024062" y="337344"/>
+                      <a:pt x="2024062" y="1012031"/>
+                    </a:cubicBezTo>
+                    <a:cubicBezTo>
+                      <a:pt x="2024062" y="1686719"/>
+                      <a:pt x="1686719" y="2024062"/>
+                      <a:pt x="1012031" y="2024062"/>
+                    </a:cubicBezTo>
+                    <a:cubicBezTo>
+                      <a:pt x="337344" y="2024062"/>
+                      <a:pt x="0" y="1686719"/>
+                      <a:pt x="0" y="1012031"/>
+                    </a:cubicBezTo>
+                    <a:cubicBezTo>
+                      <a:pt x="0" y="337344"/>
+                      <a:pt x="337344" y="0"/>
+                      <a:pt x="1012031" y="0"/>
+                    </a:cubicBezTo>
                   </a:path>
                 </a:pathLst>
               </a:custGeom>
               <a:noFill/>
-              <a:ln w="132159" cap="rnd">
+              <a:ln w="52626">
                 <a:solidFill>
                   <a:schemeClr val="accent1"/>
                 </a:solidFill>
-                <a:round/>
               </a:ln>
             </p:spPr>
           </p:sp>
+          <p:grpSp>
+            <p:nvGrpSpPr>
+              <p:cNvPr id="52" name="Group 52"/>
+              <p:cNvGrpSpPr/>
+              <p:nvPr/>
+            </p:nvGrpSpPr>
+            <p:grpSpPr>
+              <a:xfrm>
+                <a:off x="9884494" y="2470621"/>
+                <a:ext cx="772940" cy="904504"/>
+                <a:chOff x="9884494" y="2470621"/>
+                <a:chExt cx="772940" cy="904504"/>
+              </a:xfrm>
+            </p:grpSpPr>
+            <p:sp>
+              <p:nvSpPr>
+                <p:cNvPr id="49" name="Freeform 49"/>
+                <p:cNvSpPr/>
+                <p:nvPr/>
+              </p:nvSpPr>
+              <p:spPr>
+                <a:xfrm>
+                  <a:off x="9884494" y="2470621"/>
+                  <a:ext cx="690711" cy="888057"/>
+                </a:xfrm>
+                <a:custGeom>
+                  <a:avLst/>
+                  <a:gdLst/>
+                  <a:ahLst/>
+                  <a:cxnLst/>
+                  <a:rect l="l" t="t" r="r" b="b"/>
+                  <a:pathLst>
+                    <a:path w="690711" h="888057">
+                      <a:moveTo>
+                        <a:pt x="345356" y="0"/>
+                      </a:moveTo>
+                      <a:lnTo>
+                        <a:pt x="690711" y="148010"/>
+                      </a:lnTo>
+                      <a:lnTo>
+                        <a:pt x="690711" y="411138"/>
+                      </a:lnTo>
+                      <a:cubicBezTo>
+                        <a:pt x="690711" y="624929"/>
+                        <a:pt x="526256" y="772939"/>
+                        <a:pt x="345356" y="888057"/>
+                      </a:cubicBezTo>
+                      <a:cubicBezTo>
+                        <a:pt x="164455" y="772939"/>
+                        <a:pt x="0" y="624929"/>
+                        <a:pt x="0" y="411138"/>
+                      </a:cubicBezTo>
+                      <a:lnTo>
+                        <a:pt x="0" y="148010"/>
+                      </a:lnTo>
+                      <a:close/>
+                    </a:path>
+                  </a:pathLst>
+                </a:custGeom>
+                <a:solidFill>
+                  <a:schemeClr val="lt1"/>
+                </a:solidFill>
+                <a:ln w="49337" cap="rnd">
+                  <a:solidFill>
+                    <a:schemeClr val="accent1"/>
+                  </a:solidFill>
+                  <a:round/>
+                </a:ln>
+              </p:spPr>
+            </p:sp>
+            <p:sp>
+              <p:nvSpPr>
+                <p:cNvPr id="50" name="Freeform 50"/>
+                <p:cNvSpPr/>
+                <p:nvPr/>
+              </p:nvSpPr>
+              <p:spPr>
+                <a:xfrm>
+                  <a:off x="10048949" y="2750195"/>
+                  <a:ext cx="378247" cy="263128"/>
+                </a:xfrm>
+                <a:custGeom>
+                  <a:avLst/>
+                  <a:gdLst/>
+                  <a:ahLst/>
+                  <a:cxnLst/>
+                  <a:rect l="l" t="t" r="r" b="b"/>
+                  <a:pathLst>
+                    <a:path w="378247" h="263128">
+                      <a:moveTo>
+                        <a:pt x="0" y="131564"/>
+                      </a:moveTo>
+                      <a:lnTo>
+                        <a:pt x="131564" y="263128"/>
+                      </a:lnTo>
+                      <a:lnTo>
+                        <a:pt x="378247" y="0"/>
+                      </a:lnTo>
+                    </a:path>
+                  </a:pathLst>
+                </a:custGeom>
+                <a:noFill/>
+                <a:ln w="65782" cap="rnd">
+                  <a:solidFill>
+                    <a:schemeClr val="accent1"/>
+                  </a:solidFill>
+                  <a:round/>
+                </a:ln>
+              </p:spPr>
+            </p:sp>
+            <p:sp>
+              <p:nvSpPr>
+                <p:cNvPr id="51" name="Freeform 51"/>
+                <p:cNvSpPr/>
+                <p:nvPr/>
+              </p:nvSpPr>
+              <p:spPr>
+                <a:xfrm>
+                  <a:off x="10443642" y="3095551"/>
+                  <a:ext cx="213792" cy="279574"/>
+                </a:xfrm>
+                <a:custGeom>
+                  <a:avLst/>
+                  <a:gdLst/>
+                  <a:ahLst/>
+                  <a:cxnLst/>
+                  <a:rect l="l" t="t" r="r" b="b"/>
+                  <a:pathLst>
+                    <a:path w="213792" h="279574">
+                      <a:moveTo>
+                        <a:pt x="49337" y="0"/>
+                      </a:moveTo>
+                      <a:lnTo>
+                        <a:pt x="213792" y="0"/>
+                      </a:lnTo>
+                      <a:lnTo>
+                        <a:pt x="213792" y="197346"/>
+                      </a:lnTo>
+                      <a:lnTo>
+                        <a:pt x="0" y="197346"/>
+                      </a:lnTo>
+                      <a:moveTo>
+                        <a:pt x="82228" y="115119"/>
+                      </a:moveTo>
+                      <a:lnTo>
+                        <a:pt x="0" y="197346"/>
+                      </a:lnTo>
+                      <a:lnTo>
+                        <a:pt x="82228" y="279574"/>
+                      </a:lnTo>
+                    </a:path>
+                  </a:pathLst>
+                </a:custGeom>
+                <a:noFill/>
+                <a:ln w="49337" cap="rnd">
+                  <a:solidFill>
+                    <a:schemeClr val="accent1"/>
+                  </a:solidFill>
+                  <a:round/>
+                </a:ln>
+              </p:spPr>
+            </p:sp>
+          </p:grpSp>
           <p:sp>
             <p:nvSpPr>
-              <p:cNvPr id="49" name="Freeform 49"/>
+              <p:cNvPr id="53" name="Ellipse 53"/>
               <p:cNvSpPr/>
               <p:nvPr/>
             </p:nvSpPr>
             <p:spPr>
               <a:xfrm>
-                <a:off x="10783193" y="5364063"/>
-                <a:ext cx="429518" cy="561677"/>
+                <a:off x="9966722" y="1639491"/>
+                <a:ext cx="526256" cy="526256"/>
               </a:xfrm>
-              <a:custGeom>
+              <a:prstGeom prst="ellipse">
                 <a:avLst/>
-                <a:gdLst/>
-                <a:ahLst/>
-                <a:cxnLst/>
-                <a:rect l="l" t="t" r="r" b="b"/>
-                <a:pathLst>
-                  <a:path w="429518" h="561677">
-                    <a:moveTo>
-                      <a:pt x="99120" y="0"/>
-                    </a:moveTo>
-                    <a:lnTo>
-                      <a:pt x="429518" y="0"/>
-                    </a:lnTo>
-                    <a:lnTo>
-                      <a:pt x="429518" y="396478"/>
-                    </a:lnTo>
-                    <a:lnTo>
-                      <a:pt x="0" y="396478"/>
-                    </a:lnTo>
-                    <a:moveTo>
-                      <a:pt x="165199" y="231279"/>
-                    </a:moveTo>
-                    <a:lnTo>
-                      <a:pt x="0" y="396478"/>
-                    </a:lnTo>
-                    <a:lnTo>
-                      <a:pt x="165199" y="561677"/>
-                    </a:lnTo>
-                  </a:path>
-                </a:pathLst>
-              </a:custGeom>
-              <a:noFill/>
-              <a:ln w="99120" cap="rnd">
+              </a:prstGeom>
+              <a:solidFill>
+                <a:schemeClr val="lt1"/>
+              </a:solidFill>
+              <a:ln w="28337">
                 <a:solidFill>
-                  <a:schemeClr val="accent1"/>
+                  <a:srgbClr val="D6DDE0"/>
                 </a:solidFill>
-                <a:round/>
+              </a:ln>
+            </p:spPr>
+          </p:sp>
+          <p:grpSp>
+            <p:nvGrpSpPr>
+              <p:cNvPr id="57" name="Group 57"/>
+              <p:cNvGrpSpPr/>
+              <p:nvPr/>
+            </p:nvGrpSpPr>
+            <p:grpSpPr>
+              <a:xfrm>
+                <a:off x="10052745" y="1725513"/>
+                <a:ext cx="354211" cy="354211"/>
+                <a:chOff x="10052745" y="1725513"/>
+                <a:chExt cx="354211" cy="354211"/>
+              </a:xfrm>
+            </p:grpSpPr>
+            <p:sp>
+              <p:nvSpPr>
+                <p:cNvPr id="54" name="Rectangle 54"/>
+                <p:cNvSpPr/>
+                <p:nvPr/>
+              </p:nvSpPr>
+              <p:spPr>
+                <a:xfrm>
+                  <a:off x="10103346" y="1776115"/>
+                  <a:ext cx="253008" cy="253008"/>
+                </a:xfrm>
+                <a:prstGeom prst="roundRect">
+                  <a:avLst>
+                    <a:gd name="adj" fmla="val 12500"/>
+                  </a:avLst>
+                </a:prstGeom>
+                <a:solidFill>
+                  <a:schemeClr val="lt1"/>
+                </a:solidFill>
+                <a:ln w="18976" cap="rnd">
+                  <a:solidFill>
+                    <a:schemeClr val="accent1"/>
+                  </a:solidFill>
+                  <a:round/>
+                </a:ln>
+              </p:spPr>
+            </p:sp>
+            <p:sp>
+              <p:nvSpPr>
+                <p:cNvPr id="55" name="Rectangle 55"/>
+                <p:cNvSpPr/>
+                <p:nvPr/>
+              </p:nvSpPr>
+              <p:spPr>
+                <a:xfrm>
+                  <a:off x="10172923" y="1845692"/>
+                  <a:ext cx="113854" cy="113854"/>
+                </a:xfrm>
+                <a:prstGeom prst="roundRect">
+                  <a:avLst>
+                    <a:gd name="adj" fmla="val 16667"/>
+                  </a:avLst>
+                </a:prstGeom>
+                <a:solidFill>
+                  <a:schemeClr val="accent3"/>
+                </a:solidFill>
+                <a:ln w="18976" cap="rnd">
+                  <a:solidFill>
+                    <a:schemeClr val="accent1"/>
+                  </a:solidFill>
+                  <a:round/>
+                </a:ln>
+              </p:spPr>
+            </p:sp>
+            <p:sp>
+              <p:nvSpPr>
+                <p:cNvPr id="56" name="Freeform 56"/>
+                <p:cNvSpPr/>
+                <p:nvPr/>
+              </p:nvSpPr>
+              <p:spPr>
+                <a:xfrm>
+                  <a:off x="10052745" y="1725513"/>
+                  <a:ext cx="354211" cy="354211"/>
+                </a:xfrm>
+                <a:custGeom>
+                  <a:avLst/>
+                  <a:gdLst/>
+                  <a:ahLst/>
+                  <a:cxnLst/>
+                  <a:rect l="l" t="t" r="r" b="b"/>
+                  <a:pathLst>
+                    <a:path w="354211" h="354211">
+                      <a:moveTo>
+                        <a:pt x="107528" y="0"/>
+                      </a:moveTo>
+                      <a:lnTo>
+                        <a:pt x="107528" y="50602"/>
+                      </a:lnTo>
+                      <a:moveTo>
+                        <a:pt x="177105" y="0"/>
+                      </a:moveTo>
+                      <a:lnTo>
+                        <a:pt x="177105" y="50602"/>
+                      </a:lnTo>
+                      <a:moveTo>
+                        <a:pt x="246683" y="0"/>
+                      </a:moveTo>
+                      <a:lnTo>
+                        <a:pt x="246683" y="50602"/>
+                      </a:lnTo>
+                      <a:moveTo>
+                        <a:pt x="107528" y="303609"/>
+                      </a:moveTo>
+                      <a:lnTo>
+                        <a:pt x="107528" y="354211"/>
+                      </a:lnTo>
+                      <a:moveTo>
+                        <a:pt x="177105" y="303609"/>
+                      </a:moveTo>
+                      <a:lnTo>
+                        <a:pt x="177105" y="354211"/>
+                      </a:lnTo>
+                      <a:moveTo>
+                        <a:pt x="246683" y="303609"/>
+                      </a:moveTo>
+                      <a:lnTo>
+                        <a:pt x="246683" y="354211"/>
+                      </a:lnTo>
+                      <a:moveTo>
+                        <a:pt x="0" y="107528"/>
+                      </a:moveTo>
+                      <a:lnTo>
+                        <a:pt x="50602" y="107528"/>
+                      </a:lnTo>
+                      <a:moveTo>
+                        <a:pt x="0" y="177105"/>
+                      </a:moveTo>
+                      <a:lnTo>
+                        <a:pt x="50602" y="177105"/>
+                      </a:lnTo>
+                      <a:moveTo>
+                        <a:pt x="0" y="246683"/>
+                      </a:moveTo>
+                      <a:lnTo>
+                        <a:pt x="50602" y="246683"/>
+                      </a:lnTo>
+                      <a:moveTo>
+                        <a:pt x="303609" y="107528"/>
+                      </a:moveTo>
+                      <a:lnTo>
+                        <a:pt x="354211" y="107528"/>
+                      </a:lnTo>
+                      <a:moveTo>
+                        <a:pt x="303609" y="177105"/>
+                      </a:moveTo>
+                      <a:lnTo>
+                        <a:pt x="354211" y="177105"/>
+                      </a:lnTo>
+                      <a:moveTo>
+                        <a:pt x="303609" y="246683"/>
+                      </a:moveTo>
+                      <a:lnTo>
+                        <a:pt x="354211" y="246683"/>
+                      </a:lnTo>
+                    </a:path>
+                  </a:pathLst>
+                </a:custGeom>
+                <a:noFill/>
+                <a:ln w="18976" cap="rnd">
+                  <a:solidFill>
+                    <a:schemeClr val="accent1"/>
+                  </a:solidFill>
+                  <a:round/>
+                </a:ln>
+              </p:spPr>
+            </p:sp>
+          </p:grpSp>
+          <p:sp>
+            <p:nvSpPr>
+              <p:cNvPr id="58" name="Ellipse 58"/>
+              <p:cNvSpPr/>
+              <p:nvPr/>
+            </p:nvSpPr>
+            <p:spPr>
+              <a:xfrm>
+                <a:off x="10978753" y="2651522"/>
+                <a:ext cx="526256" cy="526256"/>
+              </a:xfrm>
+              <a:prstGeom prst="ellipse">
+                <a:avLst/>
+              </a:prstGeom>
+              <a:solidFill>
+                <a:schemeClr val="lt1"/>
+              </a:solidFill>
+              <a:ln w="28337">
+                <a:solidFill>
+                  <a:srgbClr val="D6DDE0"/>
+                </a:solidFill>
+              </a:ln>
+            </p:spPr>
+          </p:sp>
+          <p:grpSp>
+            <p:nvGrpSpPr>
+              <p:cNvPr id="64" name="Group 64"/>
+              <p:cNvGrpSpPr/>
+              <p:nvPr/>
+            </p:nvGrpSpPr>
+            <p:grpSpPr>
+              <a:xfrm>
+                <a:off x="11083751" y="2750195"/>
+                <a:ext cx="335236" cy="328910"/>
+                <a:chOff x="11083751" y="2750195"/>
+                <a:chExt cx="335236" cy="328910"/>
+              </a:xfrm>
+            </p:grpSpPr>
+            <p:sp>
+              <p:nvSpPr>
+                <p:cNvPr id="59" name="Freeform 59"/>
+                <p:cNvSpPr/>
+                <p:nvPr/>
+              </p:nvSpPr>
+              <p:spPr>
+                <a:xfrm>
+                  <a:off x="11083751" y="2794471"/>
+                  <a:ext cx="240357" cy="253008"/>
+                </a:xfrm>
+                <a:custGeom>
+                  <a:avLst/>
+                  <a:gdLst/>
+                  <a:ahLst/>
+                  <a:cxnLst/>
+                  <a:rect l="l" t="t" r="r" b="b"/>
+                  <a:pathLst>
+                    <a:path w="240357" h="253008">
+                      <a:moveTo>
+                        <a:pt x="0" y="0"/>
+                      </a:moveTo>
+                      <a:lnTo>
+                        <a:pt x="0" y="196081"/>
+                      </a:lnTo>
+                      <a:cubicBezTo>
+                        <a:pt x="0" y="253008"/>
+                        <a:pt x="240357" y="253008"/>
+                        <a:pt x="240357" y="196081"/>
+                      </a:cubicBezTo>
+                      <a:lnTo>
+                        <a:pt x="240357" y="0"/>
+                      </a:lnTo>
+                    </a:path>
+                  </a:pathLst>
+                </a:custGeom>
+                <a:solidFill>
+                  <a:schemeClr val="lt1"/>
+                </a:solidFill>
+                <a:ln w="18976" cap="rnd">
+                  <a:solidFill>
+                    <a:schemeClr val="accent1"/>
+                  </a:solidFill>
+                  <a:round/>
+                </a:ln>
+              </p:spPr>
+            </p:sp>
+            <p:sp>
+              <p:nvSpPr>
+                <p:cNvPr id="60" name="Ellipse 60"/>
+                <p:cNvSpPr/>
+                <p:nvPr/>
+              </p:nvSpPr>
+              <p:spPr>
+                <a:xfrm>
+                  <a:off x="11083751" y="2750195"/>
+                  <a:ext cx="240357" cy="88553"/>
+                </a:xfrm>
+                <a:prstGeom prst="ellipse">
+                  <a:avLst/>
+                </a:prstGeom>
+                <a:solidFill>
+                  <a:schemeClr val="lt1"/>
+                </a:solidFill>
+                <a:ln w="18976" cap="rnd">
+                  <a:solidFill>
+                    <a:schemeClr val="accent1"/>
+                  </a:solidFill>
+                  <a:round/>
+                </a:ln>
+              </p:spPr>
+            </p:sp>
+            <p:sp>
+              <p:nvSpPr>
+                <p:cNvPr id="61" name="Freeform 61"/>
+                <p:cNvSpPr/>
+                <p:nvPr/>
+              </p:nvSpPr>
+              <p:spPr>
+                <a:xfrm>
+                  <a:off x="11083751" y="2883024"/>
+                  <a:ext cx="240357" cy="56927"/>
+                </a:xfrm>
+                <a:custGeom>
+                  <a:avLst/>
+                  <a:gdLst/>
+                  <a:ahLst/>
+                  <a:cxnLst/>
+                  <a:rect l="l" t="t" r="r" b="b"/>
+                  <a:pathLst>
+                    <a:path w="240357" h="56927">
+                      <a:moveTo>
+                        <a:pt x="0" y="0"/>
+                      </a:moveTo>
+                      <a:cubicBezTo>
+                        <a:pt x="0" y="56927"/>
+                        <a:pt x="240357" y="56927"/>
+                        <a:pt x="240357" y="0"/>
+                      </a:cubicBezTo>
+                    </a:path>
+                  </a:pathLst>
+                </a:custGeom>
+                <a:noFill/>
+                <a:ln w="18976" cap="rnd">
+                  <a:solidFill>
+                    <a:schemeClr val="accent1"/>
+                  </a:solidFill>
+                  <a:round/>
+                </a:ln>
+              </p:spPr>
+            </p:sp>
+            <p:sp>
+              <p:nvSpPr>
+                <p:cNvPr id="62" name="Ellipse 62"/>
+                <p:cNvSpPr/>
+                <p:nvPr/>
+              </p:nvSpPr>
+              <p:spPr>
+                <a:xfrm>
+                  <a:off x="11241881" y="2895674"/>
+                  <a:ext cx="139154" cy="139154"/>
+                </a:xfrm>
+                <a:prstGeom prst="ellipse">
+                  <a:avLst/>
+                </a:prstGeom>
+                <a:solidFill>
+                  <a:schemeClr val="accent3"/>
+                </a:solidFill>
+                <a:ln w="18976" cap="rnd">
+                  <a:solidFill>
+                    <a:schemeClr val="accent1"/>
+                  </a:solidFill>
+                  <a:round/>
+                </a:ln>
+              </p:spPr>
+            </p:sp>
+            <p:sp>
+              <p:nvSpPr>
+                <p:cNvPr id="63" name="Freeform 63"/>
+                <p:cNvSpPr/>
+                <p:nvPr/>
+              </p:nvSpPr>
+              <p:spPr>
+                <a:xfrm>
+                  <a:off x="11362060" y="3015853"/>
+                  <a:ext cx="56927" cy="63252"/>
+                </a:xfrm>
+                <a:custGeom>
+                  <a:avLst/>
+                  <a:gdLst/>
+                  <a:ahLst/>
+                  <a:cxnLst/>
+                  <a:rect l="l" t="t" r="r" b="b"/>
+                  <a:pathLst>
+                    <a:path w="56927" h="63252">
+                      <a:moveTo>
+                        <a:pt x="0" y="0"/>
+                      </a:moveTo>
+                      <a:lnTo>
+                        <a:pt x="56927" y="63252"/>
+                      </a:lnTo>
+                    </a:path>
+                  </a:pathLst>
+                </a:custGeom>
+                <a:solidFill>
+                  <a:schemeClr val="lt1"/>
+                </a:solidFill>
+                <a:ln w="25301" cap="rnd">
+                  <a:solidFill>
+                    <a:schemeClr val="accent1"/>
+                  </a:solidFill>
+                  <a:round/>
+                </a:ln>
+              </p:spPr>
+            </p:sp>
+          </p:grpSp>
+          <p:sp>
+            <p:nvSpPr>
+              <p:cNvPr id="65" name="Ellipse 65"/>
+              <p:cNvSpPr/>
+              <p:nvPr/>
+            </p:nvSpPr>
+            <p:spPr>
+              <a:xfrm>
+                <a:off x="9966722" y="3663553"/>
+                <a:ext cx="526256" cy="526256"/>
+              </a:xfrm>
+              <a:prstGeom prst="ellipse">
+                <a:avLst/>
+              </a:prstGeom>
+              <a:solidFill>
+                <a:schemeClr val="lt1"/>
+              </a:solidFill>
+              <a:ln w="28337">
+                <a:solidFill>
+                  <a:srgbClr val="D6DDE0"/>
+                </a:solidFill>
+              </a:ln>
+            </p:spPr>
+          </p:sp>
+          <p:grpSp>
+            <p:nvGrpSpPr>
+              <p:cNvPr id="68" name="Group 68"/>
+              <p:cNvGrpSpPr/>
+              <p:nvPr/>
+            </p:nvGrpSpPr>
+            <p:grpSpPr>
+              <a:xfrm>
+                <a:off x="10071720" y="3774877"/>
+                <a:ext cx="316260" cy="303609"/>
+                <a:chOff x="10071720" y="3774877"/>
+                <a:chExt cx="316260" cy="303609"/>
+              </a:xfrm>
+            </p:grpSpPr>
+            <p:sp>
+              <p:nvSpPr>
+                <p:cNvPr id="66" name="Rectangle 66"/>
+                <p:cNvSpPr/>
+                <p:nvPr/>
+              </p:nvSpPr>
+              <p:spPr>
+                <a:xfrm>
+                  <a:off x="10071720" y="3774877"/>
+                  <a:ext cx="316260" cy="303609"/>
+                </a:xfrm>
+                <a:prstGeom prst="roundRect">
+                  <a:avLst>
+                    <a:gd name="adj" fmla="val 8333"/>
+                  </a:avLst>
+                </a:prstGeom>
+                <a:solidFill>
+                  <a:schemeClr val="lt1"/>
+                </a:solidFill>
+                <a:ln w="18976" cap="rnd">
+                  <a:solidFill>
+                    <a:schemeClr val="accent1"/>
+                  </a:solidFill>
+                  <a:round/>
+                </a:ln>
+              </p:spPr>
+            </p:sp>
+            <p:sp>
+              <p:nvSpPr>
+                <p:cNvPr id="67" name="Freeform 67"/>
+                <p:cNvSpPr/>
+                <p:nvPr/>
+              </p:nvSpPr>
+              <p:spPr>
+                <a:xfrm>
+                  <a:off x="10071720" y="3774877"/>
+                  <a:ext cx="316260" cy="303609"/>
+                </a:xfrm>
+                <a:custGeom>
+                  <a:avLst/>
+                  <a:gdLst/>
+                  <a:ahLst/>
+                  <a:cxnLst/>
+                  <a:rect l="l" t="t" r="r" b="b"/>
+                  <a:pathLst>
+                    <a:path w="316260" h="303609">
+                      <a:moveTo>
+                        <a:pt x="0" y="101203"/>
+                      </a:moveTo>
+                      <a:lnTo>
+                        <a:pt x="316260" y="101203"/>
+                      </a:lnTo>
+                      <a:moveTo>
+                        <a:pt x="0" y="202406"/>
+                      </a:moveTo>
+                      <a:lnTo>
+                        <a:pt x="316260" y="202406"/>
+                      </a:lnTo>
+                      <a:moveTo>
+                        <a:pt x="101203" y="0"/>
+                      </a:moveTo>
+                      <a:lnTo>
+                        <a:pt x="101203" y="101203"/>
+                      </a:lnTo>
+                      <a:moveTo>
+                        <a:pt x="227707" y="0"/>
+                      </a:moveTo>
+                      <a:lnTo>
+                        <a:pt x="227707" y="101203"/>
+                      </a:lnTo>
+                      <a:moveTo>
+                        <a:pt x="56927" y="101203"/>
+                      </a:moveTo>
+                      <a:lnTo>
+                        <a:pt x="56927" y="202406"/>
+                      </a:lnTo>
+                      <a:moveTo>
+                        <a:pt x="189756" y="101203"/>
+                      </a:moveTo>
+                      <a:lnTo>
+                        <a:pt x="189756" y="202406"/>
+                      </a:lnTo>
+                      <a:moveTo>
+                        <a:pt x="101203" y="202406"/>
+                      </a:moveTo>
+                      <a:lnTo>
+                        <a:pt x="101203" y="303609"/>
+                      </a:lnTo>
+                      <a:moveTo>
+                        <a:pt x="227707" y="202406"/>
+                      </a:moveTo>
+                      <a:lnTo>
+                        <a:pt x="227707" y="303609"/>
+                      </a:lnTo>
+                    </a:path>
+                  </a:pathLst>
+                </a:custGeom>
+                <a:noFill/>
+                <a:ln w="18976" cap="rnd">
+                  <a:solidFill>
+                    <a:schemeClr val="accent1"/>
+                  </a:solidFill>
+                  <a:round/>
+                </a:ln>
+              </p:spPr>
+            </p:sp>
+          </p:grpSp>
+          <p:sp>
+            <p:nvSpPr>
+              <p:cNvPr id="69" name="Ellipse 69"/>
+              <p:cNvSpPr/>
+              <p:nvPr/>
+            </p:nvSpPr>
+            <p:spPr>
+              <a:xfrm>
+                <a:off x="8954691" y="2651522"/>
+                <a:ext cx="526256" cy="526256"/>
+              </a:xfrm>
+              <a:prstGeom prst="ellipse">
+                <a:avLst/>
+              </a:prstGeom>
+              <a:solidFill>
+                <a:schemeClr val="lt1"/>
+              </a:solidFill>
+              <a:ln w="28337">
+                <a:solidFill>
+                  <a:srgbClr val="D6DDE0"/>
+                </a:solidFill>
+              </a:ln>
+            </p:spPr>
+          </p:sp>
+          <p:grpSp>
+            <p:nvGrpSpPr>
+              <p:cNvPr id="76" name="Group 76"/>
+              <p:cNvGrpSpPr/>
+              <p:nvPr/>
+            </p:nvGrpSpPr>
+            <p:grpSpPr>
+              <a:xfrm>
+                <a:off x="9034388" y="2743870"/>
+                <a:ext cx="366861" cy="335235"/>
+                <a:chOff x="9034388" y="2743870"/>
+                <a:chExt cx="366861" cy="335235"/>
+              </a:xfrm>
+            </p:grpSpPr>
+            <p:sp>
+              <p:nvSpPr>
+                <p:cNvPr id="70" name="Rectangle 70"/>
+                <p:cNvSpPr/>
+                <p:nvPr/>
+              </p:nvSpPr>
+              <p:spPr>
+                <a:xfrm>
+                  <a:off x="9091315" y="2743870"/>
+                  <a:ext cx="253008" cy="126504"/>
+                </a:xfrm>
+                <a:prstGeom prst="roundRect">
+                  <a:avLst>
+                    <a:gd name="adj" fmla="val 20000"/>
+                  </a:avLst>
+                </a:prstGeom>
+                <a:solidFill>
+                  <a:schemeClr val="lt1"/>
+                </a:solidFill>
+                <a:ln w="18976" cap="rnd">
+                  <a:solidFill>
+                    <a:schemeClr val="accent1"/>
+                  </a:solidFill>
+                  <a:round/>
+                </a:ln>
+              </p:spPr>
+            </p:sp>
+            <p:sp>
+              <p:nvSpPr>
+                <p:cNvPr id="71" name="Freeform 71"/>
+                <p:cNvSpPr/>
+                <p:nvPr/>
+              </p:nvSpPr>
+              <p:spPr>
+                <a:xfrm>
+                  <a:off x="9078664" y="2870374"/>
+                  <a:ext cx="278309" cy="126504"/>
+                </a:xfrm>
+                <a:custGeom>
+                  <a:avLst/>
+                  <a:gdLst/>
+                  <a:ahLst/>
+                  <a:cxnLst/>
+                  <a:rect l="l" t="t" r="r" b="b"/>
+                  <a:pathLst>
+                    <a:path w="278309" h="126504">
+                      <a:moveTo>
+                        <a:pt x="139154" y="0"/>
+                      </a:moveTo>
+                      <a:lnTo>
+                        <a:pt x="139154" y="82228"/>
+                      </a:lnTo>
+                      <a:moveTo>
+                        <a:pt x="0" y="82228"/>
+                      </a:moveTo>
+                      <a:lnTo>
+                        <a:pt x="278309" y="82228"/>
+                      </a:lnTo>
+                      <a:moveTo>
+                        <a:pt x="0" y="82228"/>
+                      </a:moveTo>
+                      <a:lnTo>
+                        <a:pt x="0" y="126504"/>
+                      </a:lnTo>
+                      <a:moveTo>
+                        <a:pt x="139154" y="82228"/>
+                      </a:moveTo>
+                      <a:lnTo>
+                        <a:pt x="139154" y="126504"/>
+                      </a:lnTo>
+                      <a:moveTo>
+                        <a:pt x="278309" y="82228"/>
+                      </a:moveTo>
+                      <a:lnTo>
+                        <a:pt x="278309" y="126504"/>
+                      </a:lnTo>
+                    </a:path>
+                  </a:pathLst>
+                </a:custGeom>
+                <a:noFill/>
+                <a:ln w="18976" cap="rnd">
+                  <a:solidFill>
+                    <a:schemeClr val="accent1"/>
+                  </a:solidFill>
+                  <a:round/>
+                </a:ln>
+              </p:spPr>
+            </p:sp>
+            <p:sp>
+              <p:nvSpPr>
+                <p:cNvPr id="72" name="Rectangle 72"/>
+                <p:cNvSpPr/>
+                <p:nvPr/>
+              </p:nvSpPr>
+              <p:spPr>
+                <a:xfrm>
+                  <a:off x="9034388" y="2996878"/>
+                  <a:ext cx="88553" cy="82228"/>
+                </a:xfrm>
+                <a:prstGeom prst="roundRect">
+                  <a:avLst>
+                    <a:gd name="adj" fmla="val 23077"/>
+                  </a:avLst>
+                </a:prstGeom>
+                <a:solidFill>
+                  <a:schemeClr val="lt1"/>
+                </a:solidFill>
+                <a:ln w="18976" cap="rnd">
+                  <a:solidFill>
+                    <a:schemeClr val="accent1"/>
+                  </a:solidFill>
+                  <a:round/>
+                </a:ln>
+              </p:spPr>
+            </p:sp>
+            <p:sp>
+              <p:nvSpPr>
+                <p:cNvPr id="73" name="Rectangle 73"/>
+                <p:cNvSpPr/>
+                <p:nvPr/>
+              </p:nvSpPr>
+              <p:spPr>
+                <a:xfrm>
+                  <a:off x="9173542" y="2996878"/>
+                  <a:ext cx="88553" cy="82228"/>
+                </a:xfrm>
+                <a:prstGeom prst="roundRect">
+                  <a:avLst>
+                    <a:gd name="adj" fmla="val 23077"/>
+                  </a:avLst>
+                </a:prstGeom>
+                <a:solidFill>
+                  <a:schemeClr val="lt1"/>
+                </a:solidFill>
+                <a:ln w="18976" cap="rnd">
+                  <a:solidFill>
+                    <a:schemeClr val="accent1"/>
+                  </a:solidFill>
+                  <a:round/>
+                </a:ln>
+              </p:spPr>
+            </p:sp>
+            <p:sp>
+              <p:nvSpPr>
+                <p:cNvPr id="74" name="Rectangle 74"/>
+                <p:cNvSpPr/>
+                <p:nvPr/>
+              </p:nvSpPr>
+              <p:spPr>
+                <a:xfrm>
+                  <a:off x="9312697" y="2996878"/>
+                  <a:ext cx="88553" cy="82228"/>
+                </a:xfrm>
+                <a:prstGeom prst="roundRect">
+                  <a:avLst>
+                    <a:gd name="adj" fmla="val 23077"/>
+                  </a:avLst>
+                </a:prstGeom>
+                <a:solidFill>
+                  <a:schemeClr val="lt1"/>
+                </a:solidFill>
+                <a:ln w="18976" cap="rnd">
+                  <a:solidFill>
+                    <a:schemeClr val="accent1"/>
+                  </a:solidFill>
+                  <a:round/>
+                </a:ln>
+              </p:spPr>
+            </p:sp>
+            <p:sp>
+              <p:nvSpPr>
+                <p:cNvPr id="75" name="Freeform 75"/>
+                <p:cNvSpPr/>
+                <p:nvPr/>
+              </p:nvSpPr>
+              <p:spPr>
+                <a:xfrm>
+                  <a:off x="9141916" y="2807122"/>
+                  <a:ext cx="151805" cy="9525"/>
+                </a:xfrm>
+                <a:custGeom>
+                  <a:avLst/>
+                  <a:gdLst/>
+                  <a:ahLst/>
+                  <a:cxnLst/>
+                  <a:rect l="l" t="t" r="r" b="b"/>
+                  <a:pathLst>
+                    <a:path w="151805" h="9525">
+                      <a:moveTo>
+                        <a:pt x="0" y="0"/>
+                      </a:moveTo>
+                      <a:lnTo>
+                        <a:pt x="151805" y="0"/>
+                      </a:lnTo>
+                    </a:path>
+                  </a:pathLst>
+                </a:custGeom>
+                <a:solidFill>
+                  <a:schemeClr val="lt1"/>
+                </a:solidFill>
+                <a:ln w="18976" cap="rnd">
+                  <a:solidFill>
+                    <a:schemeClr val="accent1"/>
+                  </a:solidFill>
+                  <a:round/>
+                </a:ln>
+              </p:spPr>
+            </p:sp>
+          </p:grpSp>
+          <p:sp>
+            <p:nvSpPr>
+              <p:cNvPr id="77" name="Ellipse 77"/>
+              <p:cNvSpPr/>
+              <p:nvPr/>
+            </p:nvSpPr>
+            <p:spPr>
+              <a:xfrm>
+                <a:off x="10857309" y="2125266"/>
+                <a:ext cx="161925" cy="161925"/>
+              </a:xfrm>
+              <a:prstGeom prst="ellipse">
+                <a:avLst/>
+              </a:prstGeom>
+              <a:solidFill>
+                <a:schemeClr val="accent2"/>
+              </a:solidFill>
+              <a:ln>
+                <a:noFill/>
               </a:ln>
             </p:spPr>
           </p:sp>
@@ -3721,7 +4632,7 @@
       </p:grpSp>
       <p:grpSp>
         <p:nvGrpSpPr>
-          <p:cNvPr id="55" name="footer"/>
+          <p:cNvPr id="92" name="footer"/>
           <p:cNvGrpSpPr/>
           <p:nvPr/>
         </p:nvGrpSpPr>
@@ -3735,7 +4646,7 @@
         </p:grpSpPr>
         <p:sp>
           <p:nvSpPr>
-            <p:cNvPr id="52" name="Line 52"/>
+            <p:cNvPr id="80" name="Line 80"/>
             <p:cNvSpPr/>
             <p:nvPr/>
           </p:nvSpPr>
@@ -3771,7 +4682,7 @@
         </p:sp>
         <p:sp>
           <p:nvSpPr>
-            <p:cNvPr id="53" name="TextBox 53"/>
+            <p:cNvPr id="81" name="TextBox 81"/>
             <p:cNvSpPr txBox="1"/>
             <p:nvPr>
               <p:custDataLst>
@@ -3826,7 +4737,7 @@
         </p:sp>
         <p:sp>
           <p:nvSpPr>
-            <p:cNvPr id="54" name="TextBox 54"/>
+            <p:cNvPr id="82" name="TextBox 82"/>
             <p:cNvSpPr txBox="1"/>
             <p:nvPr>
               <p:custDataLst>
@@ -3867,6 +4778,222 @@
               </a:r>
             </a:p>
           </p:txBody>
+        </p:sp>
+        <p:sp>
+          <p:nvSpPr>
+            <p:cNvPr id="83" name="Rectangle 83"/>
+            <p:cNvSpPr/>
+            <p:nvPr/>
+          </p:nvSpPr>
+          <p:spPr>
+            <a:xfrm>
+              <a:off x="8858250" y="6515100"/>
+              <a:ext cx="114300" cy="28575"/>
+            </a:xfrm>
+            <a:prstGeom prst="roundRect">
+              <a:avLst>
+                <a:gd name="adj" fmla="val 33333"/>
+              </a:avLst>
+            </a:prstGeom>
+            <a:solidFill>
+              <a:schemeClr val="accent2"/>
+            </a:solidFill>
+            <a:ln>
+              <a:noFill/>
+            </a:ln>
+          </p:spPr>
+        </p:sp>
+        <p:sp>
+          <p:nvSpPr>
+            <p:cNvPr id="84" name="Rectangle 84"/>
+            <p:cNvSpPr/>
+            <p:nvPr/>
+          </p:nvSpPr>
+          <p:spPr>
+            <a:xfrm>
+              <a:off x="9048750" y="6515100"/>
+              <a:ext cx="114300" cy="28575"/>
+            </a:xfrm>
+            <a:prstGeom prst="roundRect">
+              <a:avLst>
+                <a:gd name="adj" fmla="val 33333"/>
+              </a:avLst>
+            </a:prstGeom>
+            <a:solidFill>
+              <a:srgbClr val="D6DDE0"/>
+            </a:solidFill>
+            <a:ln>
+              <a:noFill/>
+            </a:ln>
+          </p:spPr>
+        </p:sp>
+        <p:sp>
+          <p:nvSpPr>
+            <p:cNvPr id="85" name="Rectangle 85"/>
+            <p:cNvSpPr/>
+            <p:nvPr/>
+          </p:nvSpPr>
+          <p:spPr>
+            <a:xfrm>
+              <a:off x="9239250" y="6515100"/>
+              <a:ext cx="114300" cy="28575"/>
+            </a:xfrm>
+            <a:prstGeom prst="roundRect">
+              <a:avLst>
+                <a:gd name="adj" fmla="val 33333"/>
+              </a:avLst>
+            </a:prstGeom>
+            <a:solidFill>
+              <a:srgbClr val="D6DDE0"/>
+            </a:solidFill>
+            <a:ln>
+              <a:noFill/>
+            </a:ln>
+          </p:spPr>
+        </p:sp>
+        <p:sp>
+          <p:nvSpPr>
+            <p:cNvPr id="86" name="Rectangle 86"/>
+            <p:cNvSpPr/>
+            <p:nvPr/>
+          </p:nvSpPr>
+          <p:spPr>
+            <a:xfrm>
+              <a:off x="9429750" y="6515100"/>
+              <a:ext cx="114300" cy="28575"/>
+            </a:xfrm>
+            <a:prstGeom prst="roundRect">
+              <a:avLst>
+                <a:gd name="adj" fmla="val 33333"/>
+              </a:avLst>
+            </a:prstGeom>
+            <a:solidFill>
+              <a:srgbClr val="D6DDE0"/>
+            </a:solidFill>
+            <a:ln>
+              <a:noFill/>
+            </a:ln>
+          </p:spPr>
+        </p:sp>
+        <p:sp>
+          <p:nvSpPr>
+            <p:cNvPr id="87" name="Rectangle 87"/>
+            <p:cNvSpPr/>
+            <p:nvPr/>
+          </p:nvSpPr>
+          <p:spPr>
+            <a:xfrm>
+              <a:off x="9620250" y="6515100"/>
+              <a:ext cx="114300" cy="28575"/>
+            </a:xfrm>
+            <a:prstGeom prst="roundRect">
+              <a:avLst>
+                <a:gd name="adj" fmla="val 33333"/>
+              </a:avLst>
+            </a:prstGeom>
+            <a:solidFill>
+              <a:srgbClr val="D6DDE0"/>
+            </a:solidFill>
+            <a:ln>
+              <a:noFill/>
+            </a:ln>
+          </p:spPr>
+        </p:sp>
+        <p:sp>
+          <p:nvSpPr>
+            <p:cNvPr id="88" name="Rectangle 88"/>
+            <p:cNvSpPr/>
+            <p:nvPr/>
+          </p:nvSpPr>
+          <p:spPr>
+            <a:xfrm>
+              <a:off x="9810750" y="6515100"/>
+              <a:ext cx="114300" cy="28575"/>
+            </a:xfrm>
+            <a:prstGeom prst="roundRect">
+              <a:avLst>
+                <a:gd name="adj" fmla="val 33333"/>
+              </a:avLst>
+            </a:prstGeom>
+            <a:solidFill>
+              <a:srgbClr val="D6DDE0"/>
+            </a:solidFill>
+            <a:ln>
+              <a:noFill/>
+            </a:ln>
+          </p:spPr>
+        </p:sp>
+        <p:sp>
+          <p:nvSpPr>
+            <p:cNvPr id="89" name="Rectangle 89"/>
+            <p:cNvSpPr/>
+            <p:nvPr/>
+          </p:nvSpPr>
+          <p:spPr>
+            <a:xfrm>
+              <a:off x="10001250" y="6515100"/>
+              <a:ext cx="114300" cy="28575"/>
+            </a:xfrm>
+            <a:prstGeom prst="roundRect">
+              <a:avLst>
+                <a:gd name="adj" fmla="val 33333"/>
+              </a:avLst>
+            </a:prstGeom>
+            <a:solidFill>
+              <a:srgbClr val="D6DDE0"/>
+            </a:solidFill>
+            <a:ln>
+              <a:noFill/>
+            </a:ln>
+          </p:spPr>
+        </p:sp>
+        <p:sp>
+          <p:nvSpPr>
+            <p:cNvPr id="90" name="Rectangle 90"/>
+            <p:cNvSpPr/>
+            <p:nvPr/>
+          </p:nvSpPr>
+          <p:spPr>
+            <a:xfrm>
+              <a:off x="10191750" y="6515100"/>
+              <a:ext cx="114300" cy="28575"/>
+            </a:xfrm>
+            <a:prstGeom prst="roundRect">
+              <a:avLst>
+                <a:gd name="adj" fmla="val 33333"/>
+              </a:avLst>
+            </a:prstGeom>
+            <a:solidFill>
+              <a:srgbClr val="D6DDE0"/>
+            </a:solidFill>
+            <a:ln>
+              <a:noFill/>
+            </a:ln>
+          </p:spPr>
+        </p:sp>
+        <p:sp>
+          <p:nvSpPr>
+            <p:cNvPr id="91" name="Rectangle 91"/>
+            <p:cNvSpPr/>
+            <p:nvPr/>
+          </p:nvSpPr>
+          <p:spPr>
+            <a:xfrm>
+              <a:off x="10382250" y="6515100"/>
+              <a:ext cx="114300" cy="28575"/>
+            </a:xfrm>
+            <a:prstGeom prst="roundRect">
+              <a:avLst>
+                <a:gd name="adj" fmla="val 33333"/>
+              </a:avLst>
+            </a:prstGeom>
+            <a:solidFill>
+              <a:srgbClr val="D6DDE0"/>
+            </a:solidFill>
+            <a:ln>
+              <a:noFill/>
+            </a:ln>
+          </p:spPr>
         </p:sp>
       </p:grpSp>
     </p:spTree>
@@ -3904,16 +5031,16 @@
       </p:grpSpPr>
       <p:grpSp>
         <p:nvGrpSpPr>
-          <p:cNvPr id="5" name="headline"/>
+          <p:cNvPr id="6" name="headline"/>
           <p:cNvGrpSpPr/>
           <p:nvPr/>
         </p:nvGrpSpPr>
         <p:grpSpPr>
           <a:xfrm>
             <a:off x="593598" y="257175"/>
-            <a:ext cx="4272534" cy="1082802"/>
+            <a:ext cx="4272534" cy="1085850"/>
             <a:chOff x="593598" y="257175"/>
-            <a:chExt cx="4272534" cy="1082802"/>
+            <a:chExt cx="4272534" cy="1085850"/>
           </a:xfrm>
         </p:grpSpPr>
         <p:sp>
@@ -4028,10 +5155,32 @@
             </a:p>
           </p:txBody>
         </p:sp>
+        <p:sp>
+          <p:nvSpPr>
+            <p:cNvPr id="5" name="Rectangle 5"/>
+            <p:cNvSpPr/>
+            <p:nvPr/>
+          </p:nvSpPr>
+          <p:spPr>
+            <a:xfrm>
+              <a:off x="609600" y="1314450"/>
+              <a:ext cx="762000" cy="28575"/>
+            </a:xfrm>
+            <a:prstGeom prst="rect">
+              <a:avLst/>
+            </a:prstGeom>
+            <a:solidFill>
+              <a:schemeClr val="accent1"/>
+            </a:solidFill>
+            <a:ln>
+              <a:noFill/>
+            </a:ln>
+          </p:spPr>
+        </p:sp>
       </p:grpSp>
       <p:grpSp>
         <p:nvGrpSpPr>
-          <p:cNvPr id="90" name="page-content"/>
+          <p:cNvPr id="93" name="page-content"/>
           <p:cNvGrpSpPr/>
           <p:nvPr/>
         </p:nvGrpSpPr>
@@ -4045,7 +5194,7 @@
         </p:grpSpPr>
         <p:sp>
           <p:nvSpPr>
-            <p:cNvPr id="6" name="Rectangle 6"/>
+            <p:cNvPr id="7" name="Rectangle 7"/>
             <p:cNvSpPr/>
             <p:nvPr/>
           </p:nvSpPr>
@@ -4069,7 +5218,7 @@
         </p:sp>
         <p:sp>
           <p:nvSpPr>
-            <p:cNvPr id="7" name="Rectangle 7"/>
+            <p:cNvPr id="8" name="Rectangle 8"/>
             <p:cNvSpPr/>
             <p:nvPr/>
           </p:nvSpPr>
@@ -4093,7 +5242,29 @@
         </p:sp>
         <p:sp>
           <p:nvSpPr>
-            <p:cNvPr id="8" name="TextBox 8"/>
+            <p:cNvPr id="9" name="Rectangle 9"/>
+            <p:cNvSpPr/>
+            <p:nvPr/>
+          </p:nvSpPr>
+          <p:spPr>
+            <a:xfrm>
+              <a:off x="609600" y="1571625"/>
+              <a:ext cx="38100" cy="2095500"/>
+            </a:xfrm>
+            <a:prstGeom prst="rect">
+              <a:avLst/>
+            </a:prstGeom>
+            <a:solidFill>
+              <a:schemeClr val="accent1"/>
+            </a:solidFill>
+            <a:ln>
+              <a:noFill/>
+            </a:ln>
+          </p:spPr>
+        </p:sp>
+        <p:sp>
+          <p:nvSpPr>
+            <p:cNvPr id="10" name="TextBox 10"/>
             <p:cNvSpPr txBox="1"/>
             <p:nvPr>
               <p:custDataLst>
@@ -4137,7 +5308,7 @@
         </p:sp>
         <p:sp>
           <p:nvSpPr>
-            <p:cNvPr id="9" name="TextBox 9"/>
+            <p:cNvPr id="11" name="TextBox 11"/>
             <p:cNvSpPr txBox="1"/>
             <p:nvPr>
               <p:custDataLst>
@@ -4225,7 +5396,7 @@
         </p:sp>
         <p:grpSp>
           <p:nvGrpSpPr>
-            <p:cNvPr id="13" name="Group 13"/>
+            <p:cNvPr id="15" name="Group 15"/>
             <p:cNvGrpSpPr/>
             <p:nvPr/>
           </p:nvGrpSpPr>
@@ -4239,7 +5410,7 @@
           </p:grpSpPr>
           <p:sp>
             <p:nvSpPr>
-              <p:cNvPr id="10" name="Rectangle 10"/>
+              <p:cNvPr id="12" name="Rectangle 12"/>
               <p:cNvSpPr/>
               <p:nvPr/>
             </p:nvSpPr>
@@ -4266,7 +5437,7 @@
           </p:sp>
           <p:sp>
             <p:nvSpPr>
-              <p:cNvPr id="11" name="Rectangle 11"/>
+              <p:cNvPr id="13" name="Rectangle 13"/>
               <p:cNvSpPr/>
               <p:nvPr/>
             </p:nvSpPr>
@@ -4293,7 +5464,7 @@
           </p:sp>
           <p:sp>
             <p:nvSpPr>
-              <p:cNvPr id="12" name="Freeform 12"/>
+              <p:cNvPr id="14" name="Freeform 14"/>
               <p:cNvSpPr/>
               <p:nvPr/>
             </p:nvSpPr>
@@ -4397,7 +5568,7 @@
         </p:grpSp>
         <p:sp>
           <p:nvSpPr>
-            <p:cNvPr id="14" name="TextBox 14"/>
+            <p:cNvPr id="16" name="TextBox 16"/>
             <p:cNvSpPr txBox="1"/>
             <p:nvPr>
               <p:custDataLst>
@@ -4441,7 +5612,7 @@
         </p:sp>
         <p:sp>
           <p:nvSpPr>
-            <p:cNvPr id="15" name="Freeform 15"/>
+            <p:cNvPr id="17" name="Freeform 17"/>
             <p:cNvSpPr/>
             <p:nvPr/>
           </p:nvSpPr>
@@ -4477,7 +5648,7 @@
         </p:sp>
         <p:sp>
           <p:nvSpPr>
-            <p:cNvPr id="16" name="Freeform 16"/>
+            <p:cNvPr id="18" name="Freeform 18"/>
             <p:cNvSpPr/>
             <p:nvPr/>
           </p:nvSpPr>
@@ -4516,7 +5687,7 @@
         </p:sp>
         <p:grpSp>
           <p:nvGrpSpPr>
-            <p:cNvPr id="22" name="Group 22"/>
+            <p:cNvPr id="24" name="Group 24"/>
             <p:cNvGrpSpPr/>
             <p:nvPr/>
           </p:nvGrpSpPr>
@@ -4530,7 +5701,7 @@
           </p:grpSpPr>
           <p:sp>
             <p:nvSpPr>
-              <p:cNvPr id="17" name="Freeform 17"/>
+              <p:cNvPr id="19" name="Freeform 19"/>
               <p:cNvSpPr/>
               <p:nvPr/>
             </p:nvSpPr>
@@ -4577,7 +5748,7 @@
           </p:sp>
           <p:sp>
             <p:nvSpPr>
-              <p:cNvPr id="18" name="Ellipse 18"/>
+              <p:cNvPr id="20" name="Ellipse 20"/>
               <p:cNvSpPr/>
               <p:nvPr/>
             </p:nvSpPr>
@@ -4602,7 +5773,7 @@
           </p:sp>
           <p:sp>
             <p:nvSpPr>
-              <p:cNvPr id="19" name="Freeform 19"/>
+              <p:cNvPr id="21" name="Freeform 21"/>
               <p:cNvSpPr/>
               <p:nvPr/>
             </p:nvSpPr>
@@ -4641,7 +5812,7 @@
           </p:sp>
           <p:sp>
             <p:nvSpPr>
-              <p:cNvPr id="20" name="Ellipse 20"/>
+              <p:cNvPr id="22" name="Ellipse 22"/>
               <p:cNvSpPr/>
               <p:nvPr/>
             </p:nvSpPr>
@@ -4666,7 +5837,7 @@
           </p:sp>
           <p:sp>
             <p:nvSpPr>
-              <p:cNvPr id="21" name="Freeform 21"/>
+              <p:cNvPr id="23" name="Freeform 23"/>
               <p:cNvSpPr/>
               <p:nvPr/>
             </p:nvSpPr>
@@ -4706,7 +5877,7 @@
         </p:grpSp>
         <p:sp>
           <p:nvSpPr>
-            <p:cNvPr id="23" name="TextBox 23"/>
+            <p:cNvPr id="25" name="TextBox 25"/>
             <p:cNvSpPr txBox="1"/>
             <p:nvPr>
               <p:custDataLst>
@@ -4750,7 +5921,7 @@
         </p:sp>
         <p:sp>
           <p:nvSpPr>
-            <p:cNvPr id="24" name="Freeform 24"/>
+            <p:cNvPr id="26" name="Freeform 26"/>
             <p:cNvSpPr/>
             <p:nvPr/>
           </p:nvSpPr>
@@ -4786,7 +5957,7 @@
         </p:sp>
         <p:sp>
           <p:nvSpPr>
-            <p:cNvPr id="25" name="Freeform 25"/>
+            <p:cNvPr id="27" name="Freeform 27"/>
             <p:cNvSpPr/>
             <p:nvPr/>
           </p:nvSpPr>
@@ -4825,7 +5996,7 @@
         </p:sp>
         <p:grpSp>
           <p:nvGrpSpPr>
-            <p:cNvPr id="31" name="Group 31"/>
+            <p:cNvPr id="33" name="Group 33"/>
             <p:cNvGrpSpPr/>
             <p:nvPr/>
           </p:nvGrpSpPr>
@@ -4839,7 +6010,7 @@
           </p:grpSpPr>
           <p:sp>
             <p:nvSpPr>
-              <p:cNvPr id="26" name="Rectangle 26"/>
+              <p:cNvPr id="28" name="Rectangle 28"/>
               <p:cNvSpPr/>
               <p:nvPr/>
             </p:nvSpPr>
@@ -4865,7 +6036,7 @@
           </p:sp>
           <p:sp>
             <p:nvSpPr>
-              <p:cNvPr id="27" name="Line 27"/>
+              <p:cNvPr id="29" name="Line 29"/>
               <p:cNvSpPr/>
               <p:nvPr/>
             </p:nvSpPr>
@@ -4901,7 +6072,7 @@
           </p:sp>
           <p:sp>
             <p:nvSpPr>
-              <p:cNvPr id="28" name="Line 28"/>
+              <p:cNvPr id="30" name="Line 30"/>
               <p:cNvSpPr/>
               <p:nvPr/>
             </p:nvSpPr>
@@ -4937,7 +6108,7 @@
           </p:sp>
           <p:sp>
             <p:nvSpPr>
-              <p:cNvPr id="29" name="Line 29"/>
+              <p:cNvPr id="31" name="Line 31"/>
               <p:cNvSpPr/>
               <p:nvPr/>
             </p:nvSpPr>
@@ -4973,7 +6144,7 @@
           </p:sp>
           <p:sp>
             <p:nvSpPr>
-              <p:cNvPr id="30" name="Line 30"/>
+              <p:cNvPr id="32" name="Line 32"/>
               <p:cNvSpPr/>
               <p:nvPr/>
             </p:nvSpPr>
@@ -5010,7 +6181,7 @@
         </p:grpSp>
         <p:grpSp>
           <p:nvGrpSpPr>
-            <p:cNvPr id="35" name="Group 35"/>
+            <p:cNvPr id="37" name="Group 37"/>
             <p:cNvGrpSpPr/>
             <p:nvPr/>
           </p:nvGrpSpPr>
@@ -5024,7 +6195,7 @@
           </p:grpSpPr>
           <p:sp>
             <p:nvSpPr>
-              <p:cNvPr id="32" name="Ellipse 32"/>
+              <p:cNvPr id="34" name="Ellipse 34"/>
               <p:cNvSpPr/>
               <p:nvPr/>
             </p:nvSpPr>
@@ -5048,7 +6219,7 @@
           </p:sp>
           <p:sp>
             <p:nvSpPr>
-              <p:cNvPr id="33" name="Line 33"/>
+              <p:cNvPr id="35" name="Line 35"/>
               <p:cNvSpPr/>
               <p:nvPr/>
             </p:nvSpPr>
@@ -5084,7 +6255,7 @@
           </p:sp>
           <p:sp>
             <p:nvSpPr>
-              <p:cNvPr id="34" name="Line 34"/>
+              <p:cNvPr id="36" name="Line 36"/>
               <p:cNvSpPr/>
               <p:nvPr/>
             </p:nvSpPr>
@@ -5121,7 +6292,7 @@
         </p:grpSp>
         <p:sp>
           <p:nvSpPr>
-            <p:cNvPr id="36" name="TextBox 36"/>
+            <p:cNvPr id="38" name="TextBox 38"/>
             <p:cNvSpPr txBox="1"/>
             <p:nvPr>
               <p:custDataLst>
@@ -5176,7 +6347,7 @@
         </p:sp>
         <p:sp>
           <p:nvSpPr>
-            <p:cNvPr id="37" name="Freeform 37"/>
+            <p:cNvPr id="39" name="Freeform 39"/>
             <p:cNvSpPr/>
             <p:nvPr/>
           </p:nvSpPr>
@@ -5212,7 +6383,7 @@
         </p:sp>
         <p:sp>
           <p:nvSpPr>
-            <p:cNvPr id="38" name="Freeform 38"/>
+            <p:cNvPr id="40" name="Freeform 40"/>
             <p:cNvSpPr/>
             <p:nvPr/>
           </p:nvSpPr>
@@ -5251,7 +6422,7 @@
         </p:sp>
         <p:grpSp>
           <p:nvGrpSpPr>
-            <p:cNvPr id="42" name="Group 42"/>
+            <p:cNvPr id="44" name="Group 44"/>
             <p:cNvGrpSpPr/>
             <p:nvPr/>
           </p:nvGrpSpPr>
@@ -5265,7 +6436,7 @@
           </p:grpSpPr>
           <p:sp>
             <p:nvSpPr>
-              <p:cNvPr id="39" name="Freeform 39"/>
+              <p:cNvPr id="41" name="Freeform 41"/>
               <p:cNvSpPr/>
               <p:nvPr/>
             </p:nvSpPr>
@@ -5321,7 +6492,7 @@
           </p:sp>
           <p:sp>
             <p:nvSpPr>
-              <p:cNvPr id="40" name="Freeform 40"/>
+              <p:cNvPr id="42" name="Freeform 42"/>
               <p:cNvSpPr/>
               <p:nvPr/>
             </p:nvSpPr>
@@ -5361,7 +6532,7 @@
           </p:sp>
           <p:sp>
             <p:nvSpPr>
-              <p:cNvPr id="41" name="Freeform 41"/>
+              <p:cNvPr id="43" name="Freeform 43"/>
               <p:cNvSpPr/>
               <p:nvPr/>
             </p:nvSpPr>
@@ -5414,7 +6585,7 @@
         </p:grpSp>
         <p:sp>
           <p:nvSpPr>
-            <p:cNvPr id="43" name="TextBox 43"/>
+            <p:cNvPr id="45" name="TextBox 45"/>
             <p:cNvSpPr txBox="1"/>
             <p:nvPr>
               <p:custDataLst>
@@ -5458,7 +6629,7 @@
         </p:sp>
         <p:sp>
           <p:nvSpPr>
-            <p:cNvPr id="44" name="TextBox 44"/>
+            <p:cNvPr id="46" name="TextBox 46"/>
             <p:cNvSpPr txBox="1"/>
             <p:nvPr>
               <p:custDataLst>
@@ -5502,7 +6673,7 @@
         </p:sp>
         <p:sp>
           <p:nvSpPr>
-            <p:cNvPr id="45" name="TextBox 45"/>
+            <p:cNvPr id="47" name="TextBox 47"/>
             <p:cNvSpPr txBox="1"/>
             <p:nvPr>
               <p:custDataLst>
@@ -5546,7 +6717,7 @@
         </p:sp>
         <p:sp>
           <p:nvSpPr>
-            <p:cNvPr id="46" name="TextBox 46"/>
+            <p:cNvPr id="48" name="TextBox 48"/>
             <p:cNvSpPr txBox="1"/>
             <p:nvPr>
               <p:custDataLst>
@@ -5590,7 +6761,7 @@
         </p:sp>
         <p:sp>
           <p:nvSpPr>
-            <p:cNvPr id="47" name="Rectangle 47"/>
+            <p:cNvPr id="49" name="Rectangle 49"/>
             <p:cNvSpPr/>
             <p:nvPr/>
           </p:nvSpPr>
@@ -5614,7 +6785,7 @@
         </p:sp>
         <p:sp>
           <p:nvSpPr>
-            <p:cNvPr id="48" name="Rectangle 48"/>
+            <p:cNvPr id="50" name="Rectangle 50"/>
             <p:cNvSpPr/>
             <p:nvPr/>
           </p:nvSpPr>
@@ -5638,7 +6809,29 @@
         </p:sp>
         <p:sp>
           <p:nvSpPr>
-            <p:cNvPr id="49" name="TextBox 49"/>
+            <p:cNvPr id="51" name="Rectangle 51"/>
+            <p:cNvSpPr/>
+            <p:nvPr/>
+          </p:nvSpPr>
+          <p:spPr>
+            <a:xfrm>
+              <a:off x="609600" y="3895725"/>
+              <a:ext cx="38100" cy="2095500"/>
+            </a:xfrm>
+            <a:prstGeom prst="rect">
+              <a:avLst/>
+            </a:prstGeom>
+            <a:solidFill>
+              <a:schemeClr val="accent1"/>
+            </a:solidFill>
+            <a:ln>
+              <a:noFill/>
+            </a:ln>
+          </p:spPr>
+        </p:sp>
+        <p:sp>
+          <p:nvSpPr>
+            <p:cNvPr id="52" name="TextBox 52"/>
             <p:cNvSpPr txBox="1"/>
             <p:nvPr>
               <p:custDataLst>
@@ -5682,7 +6875,7 @@
         </p:sp>
         <p:sp>
           <p:nvSpPr>
-            <p:cNvPr id="50" name="TextBox 50"/>
+            <p:cNvPr id="53" name="TextBox 53"/>
             <p:cNvSpPr txBox="1"/>
             <p:nvPr>
               <p:custDataLst>
@@ -5726,7 +6919,7 @@
         </p:sp>
         <p:grpSp>
           <p:nvGrpSpPr>
-            <p:cNvPr id="56" name="Group 56"/>
+            <p:cNvPr id="59" name="Group 59"/>
             <p:cNvGrpSpPr/>
             <p:nvPr/>
           </p:nvGrpSpPr>
@@ -5740,7 +6933,7 @@
           </p:grpSpPr>
           <p:sp>
             <p:nvSpPr>
-              <p:cNvPr id="51" name="Rectangle 51"/>
+              <p:cNvPr id="54" name="Rectangle 54"/>
               <p:cNvSpPr/>
               <p:nvPr/>
             </p:nvSpPr>
@@ -5766,7 +6959,7 @@
           </p:sp>
           <p:sp>
             <p:nvSpPr>
-              <p:cNvPr id="52" name="Line 52"/>
+              <p:cNvPr id="55" name="Line 55"/>
               <p:cNvSpPr/>
               <p:nvPr/>
             </p:nvSpPr>
@@ -5802,7 +6995,7 @@
           </p:sp>
           <p:sp>
             <p:nvSpPr>
-              <p:cNvPr id="53" name="Line 53"/>
+              <p:cNvPr id="56" name="Line 56"/>
               <p:cNvSpPr/>
               <p:nvPr/>
             </p:nvSpPr>
@@ -5838,7 +7031,7 @@
           </p:sp>
           <p:sp>
             <p:nvSpPr>
-              <p:cNvPr id="54" name="Line 54"/>
+              <p:cNvPr id="57" name="Line 57"/>
               <p:cNvSpPr/>
               <p:nvPr/>
             </p:nvSpPr>
@@ -5874,7 +7067,7 @@
           </p:sp>
           <p:sp>
             <p:nvSpPr>
-              <p:cNvPr id="55" name="Line 55"/>
+              <p:cNvPr id="58" name="Line 58"/>
               <p:cNvSpPr/>
               <p:nvPr/>
             </p:nvSpPr>
@@ -5911,7 +7104,7 @@
         </p:grpSp>
         <p:sp>
           <p:nvSpPr>
-            <p:cNvPr id="57" name="TextBox 57"/>
+            <p:cNvPr id="60" name="TextBox 60"/>
             <p:cNvSpPr txBox="1"/>
             <p:nvPr>
               <p:custDataLst>
@@ -5955,7 +7148,7 @@
         </p:sp>
         <p:sp>
           <p:nvSpPr>
-            <p:cNvPr id="58" name="Freeform 58"/>
+            <p:cNvPr id="61" name="Freeform 61"/>
             <p:cNvSpPr/>
             <p:nvPr/>
           </p:nvSpPr>
@@ -5991,7 +7184,7 @@
         </p:sp>
         <p:sp>
           <p:nvSpPr>
-            <p:cNvPr id="59" name="Freeform 59"/>
+            <p:cNvPr id="62" name="Freeform 62"/>
             <p:cNvSpPr/>
             <p:nvPr/>
           </p:nvSpPr>
@@ -6030,7 +7223,7 @@
         </p:sp>
         <p:grpSp>
           <p:nvGrpSpPr>
-            <p:cNvPr id="65" name="Group 65"/>
+            <p:cNvPr id="68" name="Group 68"/>
             <p:cNvGrpSpPr/>
             <p:nvPr/>
           </p:nvGrpSpPr>
@@ -6044,7 +7237,7 @@
           </p:grpSpPr>
           <p:sp>
             <p:nvSpPr>
-              <p:cNvPr id="60" name="Rectangle 60"/>
+              <p:cNvPr id="63" name="Rectangle 63"/>
               <p:cNvSpPr/>
               <p:nvPr/>
             </p:nvSpPr>
@@ -6070,7 +7263,7 @@
           </p:sp>
           <p:sp>
             <p:nvSpPr>
-              <p:cNvPr id="61" name="Line 61"/>
+              <p:cNvPr id="64" name="Line 64"/>
               <p:cNvSpPr/>
               <p:nvPr/>
             </p:nvSpPr>
@@ -6106,7 +7299,7 @@
           </p:sp>
           <p:sp>
             <p:nvSpPr>
-              <p:cNvPr id="62" name="Line 62"/>
+              <p:cNvPr id="65" name="Line 65"/>
               <p:cNvSpPr/>
               <p:nvPr/>
             </p:nvSpPr>
@@ -6142,7 +7335,7 @@
           </p:sp>
           <p:sp>
             <p:nvSpPr>
-              <p:cNvPr id="63" name="Line 63"/>
+              <p:cNvPr id="66" name="Line 66"/>
               <p:cNvSpPr/>
               <p:nvPr/>
             </p:nvSpPr>
@@ -6178,7 +7371,7 @@
           </p:sp>
           <p:sp>
             <p:nvSpPr>
-              <p:cNvPr id="64" name="Line 64"/>
+              <p:cNvPr id="67" name="Line 67"/>
               <p:cNvSpPr/>
               <p:nvPr/>
             </p:nvSpPr>
@@ -6215,7 +7408,7 @@
         </p:grpSp>
         <p:sp>
           <p:nvSpPr>
-            <p:cNvPr id="66" name="TextBox 66"/>
+            <p:cNvPr id="69" name="TextBox 69"/>
             <p:cNvSpPr txBox="1"/>
             <p:nvPr>
               <p:custDataLst>
@@ -6270,7 +7463,7 @@
         </p:sp>
         <p:sp>
           <p:nvSpPr>
-            <p:cNvPr id="67" name="Freeform 67"/>
+            <p:cNvPr id="70" name="Freeform 70"/>
             <p:cNvSpPr/>
             <p:nvPr/>
           </p:nvSpPr>
@@ -6306,7 +7499,7 @@
         </p:sp>
         <p:sp>
           <p:nvSpPr>
-            <p:cNvPr id="68" name="Freeform 68"/>
+            <p:cNvPr id="71" name="Freeform 71"/>
             <p:cNvSpPr/>
             <p:nvPr/>
           </p:nvSpPr>
@@ -6345,7 +7538,7 @@
         </p:sp>
         <p:grpSp>
           <p:nvGrpSpPr>
-            <p:cNvPr id="74" name="Group 74"/>
+            <p:cNvPr id="77" name="Group 77"/>
             <p:cNvGrpSpPr/>
             <p:nvPr/>
           </p:nvGrpSpPr>
@@ -6359,7 +7552,7 @@
           </p:grpSpPr>
           <p:sp>
             <p:nvSpPr>
-              <p:cNvPr id="69" name="Rectangle 69"/>
+              <p:cNvPr id="72" name="Rectangle 72"/>
               <p:cNvSpPr/>
               <p:nvPr/>
             </p:nvSpPr>
@@ -6385,7 +7578,7 @@
           </p:sp>
           <p:sp>
             <p:nvSpPr>
-              <p:cNvPr id="70" name="Line 70"/>
+              <p:cNvPr id="73" name="Line 73"/>
               <p:cNvSpPr/>
               <p:nvPr/>
             </p:nvSpPr>
@@ -6421,7 +7614,7 @@
           </p:sp>
           <p:sp>
             <p:nvSpPr>
-              <p:cNvPr id="71" name="Line 71"/>
+              <p:cNvPr id="74" name="Line 74"/>
               <p:cNvSpPr/>
               <p:nvPr/>
             </p:nvSpPr>
@@ -6457,7 +7650,7 @@
           </p:sp>
           <p:sp>
             <p:nvSpPr>
-              <p:cNvPr id="72" name="Line 72"/>
+              <p:cNvPr id="75" name="Line 75"/>
               <p:cNvSpPr/>
               <p:nvPr/>
             </p:nvSpPr>
@@ -6493,7 +7686,7 @@
           </p:sp>
           <p:sp>
             <p:nvSpPr>
-              <p:cNvPr id="73" name="Line 73"/>
+              <p:cNvPr id="76" name="Line 76"/>
               <p:cNvSpPr/>
               <p:nvPr/>
             </p:nvSpPr>
@@ -6530,7 +7723,7 @@
         </p:grpSp>
         <p:sp>
           <p:nvSpPr>
-            <p:cNvPr id="75" name="TextBox 75"/>
+            <p:cNvPr id="78" name="TextBox 78"/>
             <p:cNvSpPr txBox="1"/>
             <p:nvPr>
               <p:custDataLst>
@@ -6574,7 +7767,7 @@
         </p:sp>
         <p:sp>
           <p:nvSpPr>
-            <p:cNvPr id="76" name="Freeform 76"/>
+            <p:cNvPr id="79" name="Freeform 79"/>
             <p:cNvSpPr/>
             <p:nvPr/>
           </p:nvSpPr>
@@ -6610,7 +7803,7 @@
         </p:sp>
         <p:sp>
           <p:nvSpPr>
-            <p:cNvPr id="77" name="Freeform 77"/>
+            <p:cNvPr id="80" name="Freeform 80"/>
             <p:cNvSpPr/>
             <p:nvPr/>
           </p:nvSpPr>
@@ -6649,7 +7842,7 @@
         </p:sp>
         <p:grpSp>
           <p:nvGrpSpPr>
-            <p:cNvPr id="83" name="Group 83"/>
+            <p:cNvPr id="86" name="Group 86"/>
             <p:cNvGrpSpPr/>
             <p:nvPr/>
           </p:nvGrpSpPr>
@@ -6663,7 +7856,7 @@
           </p:grpSpPr>
           <p:sp>
             <p:nvSpPr>
-              <p:cNvPr id="78" name="Rectangle 78"/>
+              <p:cNvPr id="81" name="Rectangle 81"/>
               <p:cNvSpPr/>
               <p:nvPr/>
             </p:nvSpPr>
@@ -6689,7 +7882,7 @@
           </p:sp>
           <p:sp>
             <p:nvSpPr>
-              <p:cNvPr id="79" name="Line 79"/>
+              <p:cNvPr id="82" name="Line 82"/>
               <p:cNvSpPr/>
               <p:nvPr/>
             </p:nvSpPr>
@@ -6725,7 +7918,7 @@
           </p:sp>
           <p:sp>
             <p:nvSpPr>
-              <p:cNvPr id="80" name="Line 80"/>
+              <p:cNvPr id="83" name="Line 83"/>
               <p:cNvSpPr/>
               <p:nvPr/>
             </p:nvSpPr>
@@ -6761,7 +7954,7 @@
           </p:sp>
           <p:sp>
             <p:nvSpPr>
-              <p:cNvPr id="81" name="Line 81"/>
+              <p:cNvPr id="84" name="Line 84"/>
               <p:cNvSpPr/>
               <p:nvPr/>
             </p:nvSpPr>
@@ -6797,7 +7990,7 @@
           </p:sp>
           <p:sp>
             <p:nvSpPr>
-              <p:cNvPr id="82" name="Line 82"/>
+              <p:cNvPr id="85" name="Line 85"/>
               <p:cNvSpPr/>
               <p:nvPr/>
             </p:nvSpPr>
@@ -6834,7 +8027,7 @@
         </p:grpSp>
         <p:sp>
           <p:nvSpPr>
-            <p:cNvPr id="84" name="TextBox 84"/>
+            <p:cNvPr id="87" name="TextBox 87"/>
             <p:cNvSpPr txBox="1"/>
             <p:nvPr>
               <p:custDataLst>
@@ -6878,7 +8071,7 @@
         </p:sp>
         <p:sp>
           <p:nvSpPr>
-            <p:cNvPr id="85" name="Rectangle 85"/>
+            <p:cNvPr id="88" name="Rectangle 88"/>
             <p:cNvSpPr/>
             <p:nvPr/>
           </p:nvSpPr>
@@ -6902,7 +8095,7 @@
         </p:sp>
         <p:sp>
           <p:nvSpPr>
-            <p:cNvPr id="86" name="TextBox 86"/>
+            <p:cNvPr id="89" name="TextBox 89"/>
             <p:cNvSpPr txBox="1"/>
             <p:nvPr>
               <p:custDataLst>
@@ -6979,7 +8172,7 @@
         </p:sp>
         <p:sp>
           <p:nvSpPr>
-            <p:cNvPr id="87" name="TextBox 87"/>
+            <p:cNvPr id="90" name="TextBox 90"/>
             <p:cNvSpPr txBox="1"/>
             <p:nvPr>
               <p:custDataLst>
@@ -7067,7 +8260,7 @@
         </p:sp>
         <p:sp>
           <p:nvSpPr>
-            <p:cNvPr id="88" name="TextBox 88"/>
+            <p:cNvPr id="91" name="TextBox 91"/>
             <p:cNvSpPr txBox="1"/>
             <p:nvPr>
               <p:custDataLst>
@@ -7122,7 +8315,7 @@
         </p:sp>
         <p:sp>
           <p:nvSpPr>
-            <p:cNvPr id="89" name="TextBox 89"/>
+            <p:cNvPr id="92" name="TextBox 92"/>
             <p:cNvSpPr txBox="1"/>
             <p:nvPr>
               <p:custDataLst>
@@ -7167,7 +8360,7 @@
       </p:grpSp>
       <p:grpSp>
         <p:nvGrpSpPr>
-          <p:cNvPr id="94" name="footer"/>
+          <p:cNvPr id="100" name="footer"/>
           <p:cNvGrpSpPr/>
           <p:nvPr/>
         </p:nvGrpSpPr>
@@ -7181,7 +8374,7 @@
         </p:grpSpPr>
         <p:sp>
           <p:nvSpPr>
-            <p:cNvPr id="91" name="Line 91"/>
+            <p:cNvPr id="94" name="Line 94"/>
             <p:cNvSpPr/>
             <p:nvPr/>
           </p:nvSpPr>
@@ -7217,7 +8410,7 @@
         </p:sp>
         <p:sp>
           <p:nvSpPr>
-            <p:cNvPr id="92" name="TextBox 92"/>
+            <p:cNvPr id="95" name="TextBox 95"/>
             <p:cNvSpPr txBox="1"/>
             <p:nvPr>
               <p:custDataLst>
@@ -7272,7 +8465,7 @@
         </p:sp>
         <p:sp>
           <p:nvSpPr>
-            <p:cNvPr id="93" name="TextBox 93"/>
+            <p:cNvPr id="96" name="TextBox 96"/>
             <p:cNvSpPr txBox="1"/>
             <p:nvPr>
               <p:custDataLst>
@@ -7313,6 +8506,78 @@
               </a:r>
             </a:p>
           </p:txBody>
+        </p:sp>
+        <p:sp>
+          <p:nvSpPr>
+            <p:cNvPr id="97" name="Rectangle 97"/>
+            <p:cNvSpPr/>
+            <p:nvPr/>
+          </p:nvSpPr>
+          <p:spPr>
+            <a:xfrm>
+              <a:off x="8858250" y="6515100"/>
+              <a:ext cx="114300" cy="28575"/>
+            </a:xfrm>
+            <a:prstGeom prst="roundRect">
+              <a:avLst>
+                <a:gd name="adj" fmla="val 33333"/>
+              </a:avLst>
+            </a:prstGeom>
+            <a:solidFill>
+              <a:schemeClr val="accent2"/>
+            </a:solidFill>
+            <a:ln>
+              <a:noFill/>
+            </a:ln>
+          </p:spPr>
+        </p:sp>
+        <p:sp>
+          <p:nvSpPr>
+            <p:cNvPr id="98" name="Rectangle 98"/>
+            <p:cNvSpPr/>
+            <p:nvPr/>
+          </p:nvSpPr>
+          <p:spPr>
+            <a:xfrm>
+              <a:off x="9048750" y="6515100"/>
+              <a:ext cx="114300" cy="28575"/>
+            </a:xfrm>
+            <a:prstGeom prst="roundRect">
+              <a:avLst>
+                <a:gd name="adj" fmla="val 33333"/>
+              </a:avLst>
+            </a:prstGeom>
+            <a:solidFill>
+              <a:srgbClr val="D6DDE0"/>
+            </a:solidFill>
+            <a:ln>
+              <a:noFill/>
+            </a:ln>
+          </p:spPr>
+        </p:sp>
+        <p:sp>
+          <p:nvSpPr>
+            <p:cNvPr id="99" name="Rectangle 99"/>
+            <p:cNvSpPr/>
+            <p:nvPr/>
+          </p:nvSpPr>
+          <p:spPr>
+            <a:xfrm>
+              <a:off x="9239250" y="6515100"/>
+              <a:ext cx="114300" cy="28575"/>
+            </a:xfrm>
+            <a:prstGeom prst="roundRect">
+              <a:avLst>
+                <a:gd name="adj" fmla="val 33333"/>
+              </a:avLst>
+            </a:prstGeom>
+            <a:solidFill>
+              <a:srgbClr val="D6DDE0"/>
+            </a:solidFill>
+            <a:ln>
+              <a:noFill/>
+            </a:ln>
+          </p:spPr>
         </p:sp>
       </p:grpSp>
     </p:spTree>
@@ -7350,16 +8615,16 @@
       </p:grpSpPr>
       <p:grpSp>
         <p:nvGrpSpPr>
-          <p:cNvPr id="5" name="headline"/>
+          <p:cNvPr id="6" name="headline"/>
           <p:cNvGrpSpPr/>
           <p:nvPr/>
         </p:nvGrpSpPr>
         <p:grpSpPr>
           <a:xfrm>
             <a:off x="593598" y="257175"/>
-            <a:ext cx="4272534" cy="1082802"/>
+            <a:ext cx="4272534" cy="1085850"/>
             <a:chOff x="593598" y="257175"/>
-            <a:chExt cx="4272534" cy="1082802"/>
+            <a:chExt cx="4272534" cy="1085850"/>
           </a:xfrm>
         </p:grpSpPr>
         <p:sp>
@@ -7474,10 +8739,32 @@
             </a:p>
           </p:txBody>
         </p:sp>
+        <p:sp>
+          <p:nvSpPr>
+            <p:cNvPr id="5" name="Rectangle 5"/>
+            <p:cNvSpPr/>
+            <p:nvPr/>
+          </p:nvSpPr>
+          <p:spPr>
+            <a:xfrm>
+              <a:off x="609600" y="1314450"/>
+              <a:ext cx="762000" cy="28575"/>
+            </a:xfrm>
+            <a:prstGeom prst="rect">
+              <a:avLst/>
+            </a:prstGeom>
+            <a:solidFill>
+              <a:schemeClr val="accent1"/>
+            </a:solidFill>
+            <a:ln>
+              <a:noFill/>
+            </a:ln>
+          </p:spPr>
+        </p:sp>
       </p:grpSp>
       <p:grpSp>
         <p:nvGrpSpPr>
-          <p:cNvPr id="60" name="page-content"/>
+          <p:cNvPr id="63" name="page-content"/>
           <p:cNvGrpSpPr/>
           <p:nvPr/>
         </p:nvGrpSpPr>
@@ -7491,7 +8778,7 @@
         </p:grpSpPr>
         <p:sp>
           <p:nvSpPr>
-            <p:cNvPr id="6" name="Rectangle 6"/>
+            <p:cNvPr id="7" name="Rectangle 7"/>
             <p:cNvSpPr/>
             <p:nvPr/>
           </p:nvSpPr>
@@ -7515,7 +8802,7 @@
         </p:sp>
         <p:sp>
           <p:nvSpPr>
-            <p:cNvPr id="7" name="Rectangle 7"/>
+            <p:cNvPr id="8" name="Rectangle 8"/>
             <p:cNvSpPr/>
             <p:nvPr/>
           </p:nvSpPr>
@@ -7539,7 +8826,29 @@
         </p:sp>
         <p:sp>
           <p:nvSpPr>
-            <p:cNvPr id="8" name="TextBox 8"/>
+            <p:cNvPr id="9" name="Rectangle 9"/>
+            <p:cNvSpPr/>
+            <p:nvPr/>
+          </p:nvSpPr>
+          <p:spPr>
+            <a:xfrm>
+              <a:off x="609600" y="1571625"/>
+              <a:ext cx="38100" cy="2095500"/>
+            </a:xfrm>
+            <a:prstGeom prst="rect">
+              <a:avLst/>
+            </a:prstGeom>
+            <a:solidFill>
+              <a:schemeClr val="accent1"/>
+            </a:solidFill>
+            <a:ln>
+              <a:noFill/>
+            </a:ln>
+          </p:spPr>
+        </p:sp>
+        <p:sp>
+          <p:nvSpPr>
+            <p:cNvPr id="10" name="TextBox 10"/>
             <p:cNvSpPr txBox="1"/>
             <p:nvPr>
               <p:custDataLst>
@@ -7583,7 +8892,7 @@
         </p:sp>
         <p:sp>
           <p:nvSpPr>
-            <p:cNvPr id="9" name="TextBox 9"/>
+            <p:cNvPr id="11" name="TextBox 11"/>
             <p:cNvSpPr txBox="1"/>
             <p:nvPr>
               <p:custDataLst>
@@ -7627,7 +8936,7 @@
         </p:sp>
         <p:grpSp>
           <p:nvGrpSpPr>
-            <p:cNvPr id="15" name="Group 15"/>
+            <p:cNvPr id="17" name="Group 17"/>
             <p:cNvGrpSpPr/>
             <p:nvPr/>
           </p:nvGrpSpPr>
@@ -7641,7 +8950,7 @@
           </p:grpSpPr>
           <p:sp>
             <p:nvSpPr>
-              <p:cNvPr id="10" name="Freeform 10"/>
+              <p:cNvPr id="12" name="Freeform 12"/>
               <p:cNvSpPr/>
               <p:nvPr/>
             </p:nvSpPr>
@@ -7688,7 +8997,7 @@
           </p:sp>
           <p:sp>
             <p:nvSpPr>
-              <p:cNvPr id="11" name="Ellipse 11"/>
+              <p:cNvPr id="13" name="Ellipse 13"/>
               <p:cNvSpPr/>
               <p:nvPr/>
             </p:nvSpPr>
@@ -7713,7 +9022,7 @@
           </p:sp>
           <p:sp>
             <p:nvSpPr>
-              <p:cNvPr id="12" name="Freeform 12"/>
+              <p:cNvPr id="14" name="Freeform 14"/>
               <p:cNvSpPr/>
               <p:nvPr/>
             </p:nvSpPr>
@@ -7752,7 +9061,7 @@
           </p:sp>
           <p:sp>
             <p:nvSpPr>
-              <p:cNvPr id="13" name="Ellipse 13"/>
+              <p:cNvPr id="15" name="Ellipse 15"/>
               <p:cNvSpPr/>
               <p:nvPr/>
             </p:nvSpPr>
@@ -7777,7 +9086,7 @@
           </p:sp>
           <p:sp>
             <p:nvSpPr>
-              <p:cNvPr id="14" name="Freeform 14"/>
+              <p:cNvPr id="16" name="Freeform 16"/>
               <p:cNvSpPr/>
               <p:nvPr/>
             </p:nvSpPr>
@@ -7817,7 +9126,7 @@
         </p:grpSp>
         <p:sp>
           <p:nvSpPr>
-            <p:cNvPr id="16" name="TextBox 16"/>
+            <p:cNvPr id="18" name="TextBox 18"/>
             <p:cNvSpPr txBox="1"/>
             <p:nvPr>
               <p:custDataLst>
@@ -7861,7 +9170,7 @@
         </p:sp>
         <p:grpSp>
           <p:nvGrpSpPr>
-            <p:cNvPr id="19" name="Group 19"/>
+            <p:cNvPr id="21" name="Group 21"/>
             <p:cNvGrpSpPr/>
             <p:nvPr/>
           </p:nvGrpSpPr>
@@ -7875,7 +9184,7 @@
           </p:grpSpPr>
           <p:sp>
             <p:nvSpPr>
-              <p:cNvPr id="17" name="Ellipse 17"/>
+              <p:cNvPr id="19" name="Ellipse 19"/>
               <p:cNvSpPr/>
               <p:nvPr/>
             </p:nvSpPr>
@@ -7899,7 +9208,7 @@
           </p:sp>
           <p:sp>
             <p:nvSpPr>
-              <p:cNvPr id="18" name="Line 18"/>
+              <p:cNvPr id="20" name="Line 20"/>
               <p:cNvSpPr/>
               <p:nvPr/>
             </p:nvSpPr>
@@ -7936,7 +9245,7 @@
         </p:grpSp>
         <p:sp>
           <p:nvSpPr>
-            <p:cNvPr id="20" name="TextBox 20"/>
+            <p:cNvPr id="22" name="TextBox 22"/>
             <p:cNvSpPr txBox="1"/>
             <p:nvPr>
               <p:custDataLst>
@@ -7991,7 +9300,7 @@
         </p:sp>
         <p:grpSp>
           <p:nvGrpSpPr>
-            <p:cNvPr id="26" name="Group 26"/>
+            <p:cNvPr id="28" name="Group 28"/>
             <p:cNvGrpSpPr/>
             <p:nvPr/>
           </p:nvGrpSpPr>
@@ -8005,7 +9314,7 @@
           </p:grpSpPr>
           <p:sp>
             <p:nvSpPr>
-              <p:cNvPr id="21" name="Rectangle 21"/>
+              <p:cNvPr id="23" name="Rectangle 23"/>
               <p:cNvSpPr/>
               <p:nvPr/>
             </p:nvSpPr>
@@ -8031,7 +9340,7 @@
           </p:sp>
           <p:sp>
             <p:nvSpPr>
-              <p:cNvPr id="22" name="Line 22"/>
+              <p:cNvPr id="24" name="Line 24"/>
               <p:cNvSpPr/>
               <p:nvPr/>
             </p:nvSpPr>
@@ -8067,7 +9376,7 @@
           </p:sp>
           <p:sp>
             <p:nvSpPr>
-              <p:cNvPr id="23" name="Line 23"/>
+              <p:cNvPr id="25" name="Line 25"/>
               <p:cNvSpPr/>
               <p:nvPr/>
             </p:nvSpPr>
@@ -8103,7 +9412,7 @@
           </p:sp>
           <p:sp>
             <p:nvSpPr>
-              <p:cNvPr id="24" name="Line 24"/>
+              <p:cNvPr id="26" name="Line 26"/>
               <p:cNvSpPr/>
               <p:nvPr/>
             </p:nvSpPr>
@@ -8139,7 +9448,7 @@
           </p:sp>
           <p:sp>
             <p:nvSpPr>
-              <p:cNvPr id="25" name="Line 25"/>
+              <p:cNvPr id="27" name="Line 27"/>
               <p:cNvSpPr/>
               <p:nvPr/>
             </p:nvSpPr>
@@ -8176,7 +9485,7 @@
         </p:grpSp>
         <p:sp>
           <p:nvSpPr>
-            <p:cNvPr id="27" name="TextBox 27"/>
+            <p:cNvPr id="29" name="TextBox 29"/>
             <p:cNvSpPr txBox="1"/>
             <p:nvPr>
               <p:custDataLst>
@@ -8220,7 +9529,7 @@
         </p:sp>
         <p:sp>
           <p:nvSpPr>
-            <p:cNvPr id="28" name="Freeform 28"/>
+            <p:cNvPr id="30" name="Freeform 30"/>
             <p:cNvSpPr/>
             <p:nvPr/>
           </p:nvSpPr>
@@ -8256,7 +9565,7 @@
         </p:sp>
         <p:sp>
           <p:nvSpPr>
-            <p:cNvPr id="29" name="Freeform 29"/>
+            <p:cNvPr id="31" name="Freeform 31"/>
             <p:cNvSpPr/>
             <p:nvPr/>
           </p:nvSpPr>
@@ -8295,7 +9604,7 @@
         </p:sp>
         <p:sp>
           <p:nvSpPr>
-            <p:cNvPr id="30" name="Freeform 30"/>
+            <p:cNvPr id="32" name="Freeform 32"/>
             <p:cNvSpPr/>
             <p:nvPr/>
           </p:nvSpPr>
@@ -8331,7 +9640,7 @@
         </p:sp>
         <p:sp>
           <p:nvSpPr>
-            <p:cNvPr id="31" name="Freeform 31"/>
+            <p:cNvPr id="33" name="Freeform 33"/>
             <p:cNvSpPr/>
             <p:nvPr/>
           </p:nvSpPr>
@@ -8370,7 +9679,7 @@
         </p:sp>
         <p:sp>
           <p:nvSpPr>
-            <p:cNvPr id="32" name="TextBox 32"/>
+            <p:cNvPr id="34" name="TextBox 34"/>
             <p:cNvSpPr txBox="1"/>
             <p:nvPr>
               <p:custDataLst>
@@ -8436,7 +9745,7 @@
         </p:sp>
         <p:sp>
           <p:nvSpPr>
-            <p:cNvPr id="33" name="TextBox 33"/>
+            <p:cNvPr id="35" name="TextBox 35"/>
             <p:cNvSpPr txBox="1"/>
             <p:nvPr>
               <p:custDataLst>
@@ -8480,7 +9789,7 @@
         </p:sp>
         <p:sp>
           <p:nvSpPr>
-            <p:cNvPr id="34" name="TextBox 34"/>
+            <p:cNvPr id="36" name="TextBox 36"/>
             <p:cNvSpPr txBox="1"/>
             <p:nvPr>
               <p:custDataLst>
@@ -8524,7 +9833,7 @@
         </p:sp>
         <p:sp>
           <p:nvSpPr>
-            <p:cNvPr id="35" name="Rectangle 35"/>
+            <p:cNvPr id="37" name="Rectangle 37"/>
             <p:cNvSpPr/>
             <p:nvPr/>
           </p:nvSpPr>
@@ -8548,7 +9857,7 @@
         </p:sp>
         <p:sp>
           <p:nvSpPr>
-            <p:cNvPr id="36" name="Rectangle 36"/>
+            <p:cNvPr id="38" name="Rectangle 38"/>
             <p:cNvSpPr/>
             <p:nvPr/>
           </p:nvSpPr>
@@ -8572,7 +9881,29 @@
         </p:sp>
         <p:sp>
           <p:nvSpPr>
-            <p:cNvPr id="37" name="TextBox 37"/>
+            <p:cNvPr id="39" name="Rectangle 39"/>
+            <p:cNvSpPr/>
+            <p:nvPr/>
+          </p:nvSpPr>
+          <p:spPr>
+            <a:xfrm>
+              <a:off x="609600" y="3895725"/>
+              <a:ext cx="38100" cy="2095500"/>
+            </a:xfrm>
+            <a:prstGeom prst="rect">
+              <a:avLst/>
+            </a:prstGeom>
+            <a:solidFill>
+              <a:schemeClr val="accent1"/>
+            </a:solidFill>
+            <a:ln>
+              <a:noFill/>
+            </a:ln>
+          </p:spPr>
+        </p:sp>
+        <p:sp>
+          <p:nvSpPr>
+            <p:cNvPr id="40" name="TextBox 40"/>
             <p:cNvSpPr txBox="1"/>
             <p:nvPr>
               <p:custDataLst>
@@ -8616,7 +9947,7 @@
         </p:sp>
         <p:sp>
           <p:nvSpPr>
-            <p:cNvPr id="38" name="TextBox 38"/>
+            <p:cNvPr id="41" name="TextBox 41"/>
             <p:cNvSpPr txBox="1"/>
             <p:nvPr>
               <p:custDataLst>
@@ -8671,7 +10002,7 @@
         </p:sp>
         <p:sp>
           <p:nvSpPr>
-            <p:cNvPr id="39" name="Rectangle 39"/>
+            <p:cNvPr id="42" name="Rectangle 42"/>
             <p:cNvSpPr/>
             <p:nvPr/>
           </p:nvSpPr>
@@ -8695,7 +10026,7 @@
         </p:sp>
         <p:sp>
           <p:nvSpPr>
-            <p:cNvPr id="40" name="TextBox 40"/>
+            <p:cNvPr id="43" name="TextBox 43"/>
             <p:cNvSpPr txBox="1"/>
             <p:nvPr>
               <p:custDataLst>
@@ -8739,7 +10070,7 @@
         </p:sp>
         <p:sp>
           <p:nvSpPr>
-            <p:cNvPr id="41" name="Freeform 41"/>
+            <p:cNvPr id="44" name="Freeform 44"/>
             <p:cNvSpPr/>
             <p:nvPr/>
           </p:nvSpPr>
@@ -8781,7 +10112,7 @@
         </p:sp>
         <p:sp>
           <p:nvSpPr>
-            <p:cNvPr id="42" name="Freeform 42"/>
+            <p:cNvPr id="45" name="Freeform 45"/>
             <p:cNvSpPr/>
             <p:nvPr/>
           </p:nvSpPr>
@@ -8820,7 +10151,7 @@
         </p:sp>
         <p:sp>
           <p:nvSpPr>
-            <p:cNvPr id="43" name="Freeform 43"/>
+            <p:cNvPr id="46" name="Freeform 46"/>
             <p:cNvSpPr/>
             <p:nvPr/>
           </p:nvSpPr>
@@ -8859,7 +10190,7 @@
         </p:sp>
         <p:sp>
           <p:nvSpPr>
-            <p:cNvPr id="44" name="Freeform 44"/>
+            <p:cNvPr id="47" name="Freeform 47"/>
             <p:cNvSpPr/>
             <p:nvPr/>
           </p:nvSpPr>
@@ -8898,7 +10229,7 @@
         </p:sp>
         <p:sp>
           <p:nvSpPr>
-            <p:cNvPr id="45" name="Rectangle 45"/>
+            <p:cNvPr id="48" name="Rectangle 48"/>
             <p:cNvSpPr/>
             <p:nvPr/>
           </p:nvSpPr>
@@ -8922,7 +10253,7 @@
         </p:sp>
         <p:sp>
           <p:nvSpPr>
-            <p:cNvPr id="46" name="TextBox 46"/>
+            <p:cNvPr id="49" name="TextBox 49"/>
             <p:cNvSpPr txBox="1"/>
             <p:nvPr>
               <p:custDataLst>
@@ -8966,7 +10297,7 @@
         </p:sp>
         <p:sp>
           <p:nvSpPr>
-            <p:cNvPr id="47" name="Rectangle 47"/>
+            <p:cNvPr id="50" name="Rectangle 50"/>
             <p:cNvSpPr/>
             <p:nvPr/>
           </p:nvSpPr>
@@ -8990,7 +10321,7 @@
         </p:sp>
         <p:sp>
           <p:nvSpPr>
-            <p:cNvPr id="48" name="TextBox 48"/>
+            <p:cNvPr id="51" name="TextBox 51"/>
             <p:cNvSpPr txBox="1"/>
             <p:nvPr>
               <p:custDataLst>
@@ -9034,7 +10365,7 @@
         </p:sp>
         <p:sp>
           <p:nvSpPr>
-            <p:cNvPr id="49" name="Freeform 49"/>
+            <p:cNvPr id="52" name="Freeform 52"/>
             <p:cNvSpPr/>
             <p:nvPr/>
           </p:nvSpPr>
@@ -9070,7 +10401,7 @@
         </p:sp>
         <p:sp>
           <p:nvSpPr>
-            <p:cNvPr id="50" name="Freeform 50"/>
+            <p:cNvPr id="53" name="Freeform 53"/>
             <p:cNvSpPr/>
             <p:nvPr/>
           </p:nvSpPr>
@@ -9109,7 +10440,7 @@
         </p:sp>
         <p:sp>
           <p:nvSpPr>
-            <p:cNvPr id="51" name="Freeform 51"/>
+            <p:cNvPr id="54" name="Freeform 54"/>
             <p:cNvSpPr/>
             <p:nvPr/>
           </p:nvSpPr>
@@ -9145,7 +10476,7 @@
         </p:sp>
         <p:sp>
           <p:nvSpPr>
-            <p:cNvPr id="52" name="Freeform 52"/>
+            <p:cNvPr id="55" name="Freeform 55"/>
             <p:cNvSpPr/>
             <p:nvPr/>
           </p:nvSpPr>
@@ -9184,7 +10515,7 @@
         </p:sp>
         <p:sp>
           <p:nvSpPr>
-            <p:cNvPr id="53" name="Rectangle 53"/>
+            <p:cNvPr id="56" name="Rectangle 56"/>
             <p:cNvSpPr/>
             <p:nvPr/>
           </p:nvSpPr>
@@ -9208,7 +10539,7 @@
         </p:sp>
         <p:sp>
           <p:nvSpPr>
-            <p:cNvPr id="54" name="TextBox 54"/>
+            <p:cNvPr id="57" name="TextBox 57"/>
             <p:cNvSpPr txBox="1"/>
             <p:nvPr>
               <p:custDataLst>
@@ -9252,7 +10583,7 @@
         </p:sp>
         <p:sp>
           <p:nvSpPr>
-            <p:cNvPr id="55" name="Rectangle 55"/>
+            <p:cNvPr id="58" name="Rectangle 58"/>
             <p:cNvSpPr/>
             <p:nvPr/>
           </p:nvSpPr>
@@ -9276,7 +10607,7 @@
         </p:sp>
         <p:sp>
           <p:nvSpPr>
-            <p:cNvPr id="56" name="TextBox 56"/>
+            <p:cNvPr id="59" name="TextBox 59"/>
             <p:cNvSpPr txBox="1"/>
             <p:nvPr>
               <p:custDataLst>
@@ -9320,7 +10651,7 @@
         </p:sp>
         <p:sp>
           <p:nvSpPr>
-            <p:cNvPr id="57" name="TextBox 57"/>
+            <p:cNvPr id="60" name="TextBox 60"/>
             <p:cNvSpPr txBox="1"/>
             <p:nvPr>
               <p:custDataLst>
@@ -9364,7 +10695,7 @@
         </p:sp>
         <p:sp>
           <p:nvSpPr>
-            <p:cNvPr id="58" name="TextBox 58"/>
+            <p:cNvPr id="61" name="TextBox 61"/>
             <p:cNvSpPr txBox="1"/>
             <p:nvPr>
               <p:custDataLst>
@@ -9408,7 +10739,7 @@
         </p:sp>
         <p:sp>
           <p:nvSpPr>
-            <p:cNvPr id="59" name="TextBox 59"/>
+            <p:cNvPr id="62" name="TextBox 62"/>
             <p:cNvSpPr txBox="1"/>
             <p:nvPr>
               <p:custDataLst>
@@ -9453,7 +10784,7 @@
       </p:grpSp>
       <p:grpSp>
         <p:nvGrpSpPr>
-          <p:cNvPr id="64" name="footer"/>
+          <p:cNvPr id="70" name="footer"/>
           <p:cNvGrpSpPr/>
           <p:nvPr/>
         </p:nvGrpSpPr>
@@ -9467,7 +10798,7 @@
         </p:grpSpPr>
         <p:sp>
           <p:nvSpPr>
-            <p:cNvPr id="61" name="Line 61"/>
+            <p:cNvPr id="64" name="Line 64"/>
             <p:cNvSpPr/>
             <p:nvPr/>
           </p:nvSpPr>
@@ -9503,7 +10834,7 @@
         </p:sp>
         <p:sp>
           <p:nvSpPr>
-            <p:cNvPr id="62" name="TextBox 62"/>
+            <p:cNvPr id="65" name="TextBox 65"/>
             <p:cNvSpPr txBox="1"/>
             <p:nvPr>
               <p:custDataLst>
@@ -9558,7 +10889,7 @@
         </p:sp>
         <p:sp>
           <p:nvSpPr>
-            <p:cNvPr id="63" name="TextBox 63"/>
+            <p:cNvPr id="66" name="TextBox 66"/>
             <p:cNvSpPr txBox="1"/>
             <p:nvPr>
               <p:custDataLst>
@@ -9599,6 +10930,78 @@
               </a:r>
             </a:p>
           </p:txBody>
+        </p:sp>
+        <p:sp>
+          <p:nvSpPr>
+            <p:cNvPr id="67" name="Rectangle 67"/>
+            <p:cNvSpPr/>
+            <p:nvPr/>
+          </p:nvSpPr>
+          <p:spPr>
+            <a:xfrm>
+              <a:off x="8858250" y="6515100"/>
+              <a:ext cx="114300" cy="28575"/>
+            </a:xfrm>
+            <a:prstGeom prst="roundRect">
+              <a:avLst>
+                <a:gd name="adj" fmla="val 33333"/>
+              </a:avLst>
+            </a:prstGeom>
+            <a:solidFill>
+              <a:srgbClr val="D6DDE0"/>
+            </a:solidFill>
+            <a:ln>
+              <a:noFill/>
+            </a:ln>
+          </p:spPr>
+        </p:sp>
+        <p:sp>
+          <p:nvSpPr>
+            <p:cNvPr id="68" name="Rectangle 68"/>
+            <p:cNvSpPr/>
+            <p:nvPr/>
+          </p:nvSpPr>
+          <p:spPr>
+            <a:xfrm>
+              <a:off x="9048750" y="6515100"/>
+              <a:ext cx="114300" cy="28575"/>
+            </a:xfrm>
+            <a:prstGeom prst="roundRect">
+              <a:avLst>
+                <a:gd name="adj" fmla="val 33333"/>
+              </a:avLst>
+            </a:prstGeom>
+            <a:solidFill>
+              <a:schemeClr val="accent2"/>
+            </a:solidFill>
+            <a:ln>
+              <a:noFill/>
+            </a:ln>
+          </p:spPr>
+        </p:sp>
+        <p:sp>
+          <p:nvSpPr>
+            <p:cNvPr id="69" name="Rectangle 69"/>
+            <p:cNvSpPr/>
+            <p:nvPr/>
+          </p:nvSpPr>
+          <p:spPr>
+            <a:xfrm>
+              <a:off x="9239250" y="6515100"/>
+              <a:ext cx="114300" cy="28575"/>
+            </a:xfrm>
+            <a:prstGeom prst="roundRect">
+              <a:avLst>
+                <a:gd name="adj" fmla="val 33333"/>
+              </a:avLst>
+            </a:prstGeom>
+            <a:solidFill>
+              <a:srgbClr val="D6DDE0"/>
+            </a:solidFill>
+            <a:ln>
+              <a:noFill/>
+            </a:ln>
+          </p:spPr>
         </p:sp>
       </p:grpSp>
     </p:spTree>
@@ -9636,16 +11039,16 @@
       </p:grpSpPr>
       <p:grpSp>
         <p:nvGrpSpPr>
-          <p:cNvPr id="5" name="headline"/>
+          <p:cNvPr id="6" name="headline"/>
           <p:cNvGrpSpPr/>
           <p:nvPr/>
         </p:nvGrpSpPr>
         <p:grpSpPr>
           <a:xfrm>
             <a:off x="593598" y="257175"/>
-            <a:ext cx="4272534" cy="1082802"/>
+            <a:ext cx="4272534" cy="1085850"/>
             <a:chOff x="593598" y="257175"/>
-            <a:chExt cx="4272534" cy="1082802"/>
+            <a:chExt cx="4272534" cy="1085850"/>
           </a:xfrm>
         </p:grpSpPr>
         <p:sp>
@@ -9760,10 +11163,32 @@
             </a:p>
           </p:txBody>
         </p:sp>
+        <p:sp>
+          <p:nvSpPr>
+            <p:cNvPr id="5" name="Rectangle 5"/>
+            <p:cNvSpPr/>
+            <p:nvPr/>
+          </p:nvSpPr>
+          <p:spPr>
+            <a:xfrm>
+              <a:off x="609600" y="1314450"/>
+              <a:ext cx="762000" cy="28575"/>
+            </a:xfrm>
+            <a:prstGeom prst="rect">
+              <a:avLst/>
+            </a:prstGeom>
+            <a:solidFill>
+              <a:schemeClr val="accent1"/>
+            </a:solidFill>
+            <a:ln>
+              <a:noFill/>
+            </a:ln>
+          </p:spPr>
+        </p:sp>
       </p:grpSp>
       <p:grpSp>
         <p:nvGrpSpPr>
-          <p:cNvPr id="101" name="page-content"/>
+          <p:cNvPr id="104" name="page-content"/>
           <p:cNvGrpSpPr/>
           <p:nvPr/>
         </p:nvGrpSpPr>
@@ -9777,7 +11202,7 @@
         </p:grpSpPr>
         <p:sp>
           <p:nvSpPr>
-            <p:cNvPr id="6" name="Rectangle 6"/>
+            <p:cNvPr id="7" name="Rectangle 7"/>
             <p:cNvSpPr/>
             <p:nvPr/>
           </p:nvSpPr>
@@ -9801,7 +11226,7 @@
         </p:sp>
         <p:sp>
           <p:nvSpPr>
-            <p:cNvPr id="7" name="Rectangle 7"/>
+            <p:cNvPr id="8" name="Rectangle 8"/>
             <p:cNvSpPr/>
             <p:nvPr/>
           </p:nvSpPr>
@@ -9825,7 +11250,29 @@
         </p:sp>
         <p:sp>
           <p:nvSpPr>
-            <p:cNvPr id="8" name="TextBox 8"/>
+            <p:cNvPr id="9" name="Rectangle 9"/>
+            <p:cNvSpPr/>
+            <p:nvPr/>
+          </p:nvSpPr>
+          <p:spPr>
+            <a:xfrm>
+              <a:off x="609600" y="1571625"/>
+              <a:ext cx="38100" cy="2095500"/>
+            </a:xfrm>
+            <a:prstGeom prst="rect">
+              <a:avLst/>
+            </a:prstGeom>
+            <a:solidFill>
+              <a:schemeClr val="accent1"/>
+            </a:solidFill>
+            <a:ln>
+              <a:noFill/>
+            </a:ln>
+          </p:spPr>
+        </p:sp>
+        <p:sp>
+          <p:nvSpPr>
+            <p:cNvPr id="10" name="TextBox 10"/>
             <p:cNvSpPr txBox="1"/>
             <p:nvPr>
               <p:custDataLst>
@@ -9869,7 +11316,7 @@
         </p:sp>
         <p:sp>
           <p:nvSpPr>
-            <p:cNvPr id="9" name="TextBox 9"/>
+            <p:cNvPr id="11" name="TextBox 11"/>
             <p:cNvSpPr txBox="1"/>
             <p:nvPr>
               <p:custDataLst>
@@ -9913,7 +11360,7 @@
         </p:sp>
         <p:sp>
           <p:nvSpPr>
-            <p:cNvPr id="10" name="Rectangle 10"/>
+            <p:cNvPr id="12" name="Rectangle 12"/>
             <p:cNvSpPr/>
             <p:nvPr/>
           </p:nvSpPr>
@@ -9937,7 +11384,7 @@
         </p:sp>
         <p:sp>
           <p:nvSpPr>
-            <p:cNvPr id="11" name="TextBox 11"/>
+            <p:cNvPr id="13" name="TextBox 13"/>
             <p:cNvSpPr txBox="1"/>
             <p:nvPr>
               <p:custDataLst>
@@ -10003,7 +11450,7 @@
         </p:sp>
         <p:grpSp>
           <p:nvGrpSpPr>
-            <p:cNvPr id="21" name="Group 21"/>
+            <p:cNvPr id="23" name="Group 23"/>
             <p:cNvGrpSpPr/>
             <p:nvPr/>
           </p:nvGrpSpPr>
@@ -10017,7 +11464,7 @@
           </p:grpSpPr>
           <p:sp>
             <p:nvSpPr>
-              <p:cNvPr id="12" name="Rectangle 12"/>
+              <p:cNvPr id="14" name="Rectangle 14"/>
               <p:cNvSpPr/>
               <p:nvPr/>
             </p:nvSpPr>
@@ -10043,7 +11490,7 @@
           </p:sp>
           <p:sp>
             <p:nvSpPr>
-              <p:cNvPr id="13" name="Ellipse 13"/>
+              <p:cNvPr id="15" name="Ellipse 15"/>
               <p:cNvSpPr/>
               <p:nvPr/>
             </p:nvSpPr>
@@ -10067,7 +11514,7 @@
           </p:sp>
           <p:sp>
             <p:nvSpPr>
-              <p:cNvPr id="14" name="Line 14"/>
+              <p:cNvPr id="16" name="Line 16"/>
               <p:cNvSpPr/>
               <p:nvPr/>
             </p:nvSpPr>
@@ -10103,7 +11550,7 @@
           </p:sp>
           <p:sp>
             <p:nvSpPr>
-              <p:cNvPr id="15" name="Rectangle 15"/>
+              <p:cNvPr id="17" name="Rectangle 17"/>
               <p:cNvSpPr/>
               <p:nvPr/>
             </p:nvSpPr>
@@ -10129,7 +11576,7 @@
           </p:sp>
           <p:sp>
             <p:nvSpPr>
-              <p:cNvPr id="16" name="Ellipse 16"/>
+              <p:cNvPr id="18" name="Ellipse 18"/>
               <p:cNvSpPr/>
               <p:nvPr/>
             </p:nvSpPr>
@@ -10153,7 +11600,7 @@
           </p:sp>
           <p:sp>
             <p:nvSpPr>
-              <p:cNvPr id="17" name="Line 17"/>
+              <p:cNvPr id="19" name="Line 19"/>
               <p:cNvSpPr/>
               <p:nvPr/>
             </p:nvSpPr>
@@ -10189,7 +11636,7 @@
           </p:sp>
           <p:sp>
             <p:nvSpPr>
-              <p:cNvPr id="18" name="Rectangle 18"/>
+              <p:cNvPr id="20" name="Rectangle 20"/>
               <p:cNvSpPr/>
               <p:nvPr/>
             </p:nvSpPr>
@@ -10215,7 +11662,7 @@
           </p:sp>
           <p:sp>
             <p:nvSpPr>
-              <p:cNvPr id="19" name="Ellipse 19"/>
+              <p:cNvPr id="21" name="Ellipse 21"/>
               <p:cNvSpPr/>
               <p:nvPr/>
             </p:nvSpPr>
@@ -10239,7 +11686,7 @@
           </p:sp>
           <p:sp>
             <p:nvSpPr>
-              <p:cNvPr id="20" name="Line 20"/>
+              <p:cNvPr id="22" name="Line 22"/>
               <p:cNvSpPr/>
               <p:nvPr/>
             </p:nvSpPr>
@@ -10276,7 +11723,7 @@
         </p:grpSp>
         <p:grpSp>
           <p:nvGrpSpPr>
-            <p:cNvPr id="31" name="Group 31"/>
+            <p:cNvPr id="33" name="Group 33"/>
             <p:cNvGrpSpPr/>
             <p:nvPr/>
           </p:nvGrpSpPr>
@@ -10290,7 +11737,7 @@
           </p:grpSpPr>
           <p:sp>
             <p:nvSpPr>
-              <p:cNvPr id="22" name="Rectangle 22"/>
+              <p:cNvPr id="24" name="Rectangle 24"/>
               <p:cNvSpPr/>
               <p:nvPr/>
             </p:nvSpPr>
@@ -10316,7 +11763,7 @@
           </p:sp>
           <p:sp>
             <p:nvSpPr>
-              <p:cNvPr id="23" name="Line 23"/>
+              <p:cNvPr id="25" name="Line 25"/>
               <p:cNvSpPr/>
               <p:nvPr/>
             </p:nvSpPr>
@@ -10352,7 +11799,7 @@
           </p:sp>
           <p:sp>
             <p:nvSpPr>
-              <p:cNvPr id="24" name="Line 24"/>
+              <p:cNvPr id="26" name="Line 26"/>
               <p:cNvSpPr/>
               <p:nvPr/>
             </p:nvSpPr>
@@ -10388,7 +11835,7 @@
           </p:sp>
           <p:sp>
             <p:nvSpPr>
-              <p:cNvPr id="25" name="Line 25"/>
+              <p:cNvPr id="27" name="Line 27"/>
               <p:cNvSpPr/>
               <p:nvPr/>
             </p:nvSpPr>
@@ -10424,7 +11871,7 @@
           </p:sp>
           <p:sp>
             <p:nvSpPr>
-              <p:cNvPr id="26" name="Line 26"/>
+              <p:cNvPr id="28" name="Line 28"/>
               <p:cNvSpPr/>
               <p:nvPr/>
             </p:nvSpPr>
@@ -10460,7 +11907,7 @@
           </p:sp>
           <p:sp>
             <p:nvSpPr>
-              <p:cNvPr id="27" name="Line 27"/>
+              <p:cNvPr id="29" name="Line 29"/>
               <p:cNvSpPr/>
               <p:nvPr/>
             </p:nvSpPr>
@@ -10496,7 +11943,7 @@
           </p:sp>
           <p:sp>
             <p:nvSpPr>
-              <p:cNvPr id="28" name="Line 28"/>
+              <p:cNvPr id="30" name="Line 30"/>
               <p:cNvSpPr/>
               <p:nvPr/>
             </p:nvSpPr>
@@ -10532,7 +11979,7 @@
           </p:sp>
           <p:sp>
             <p:nvSpPr>
-              <p:cNvPr id="29" name="Line 29"/>
+              <p:cNvPr id="31" name="Line 31"/>
               <p:cNvSpPr/>
               <p:nvPr/>
             </p:nvSpPr>
@@ -10568,7 +12015,7 @@
           </p:sp>
           <p:sp>
             <p:nvSpPr>
-              <p:cNvPr id="30" name="Line 30"/>
+              <p:cNvPr id="32" name="Line 32"/>
               <p:cNvSpPr/>
               <p:nvPr/>
             </p:nvSpPr>
@@ -10605,7 +12052,7 @@
         </p:grpSp>
         <p:grpSp>
           <p:nvGrpSpPr>
-            <p:cNvPr id="41" name="Group 41"/>
+            <p:cNvPr id="43" name="Group 43"/>
             <p:cNvGrpSpPr/>
             <p:nvPr/>
           </p:nvGrpSpPr>
@@ -10619,7 +12066,7 @@
           </p:grpSpPr>
           <p:sp>
             <p:nvSpPr>
-              <p:cNvPr id="32" name="Rectangle 32"/>
+              <p:cNvPr id="34" name="Rectangle 34"/>
               <p:cNvSpPr/>
               <p:nvPr/>
             </p:nvSpPr>
@@ -10645,7 +12092,7 @@
           </p:sp>
           <p:sp>
             <p:nvSpPr>
-              <p:cNvPr id="33" name="Ellipse 33"/>
+              <p:cNvPr id="35" name="Ellipse 35"/>
               <p:cNvSpPr/>
               <p:nvPr/>
             </p:nvSpPr>
@@ -10669,7 +12116,7 @@
           </p:sp>
           <p:sp>
             <p:nvSpPr>
-              <p:cNvPr id="34" name="Line 34"/>
+              <p:cNvPr id="36" name="Line 36"/>
               <p:cNvSpPr/>
               <p:nvPr/>
             </p:nvSpPr>
@@ -10705,7 +12152,7 @@
           </p:sp>
           <p:sp>
             <p:nvSpPr>
-              <p:cNvPr id="35" name="Rectangle 35"/>
+              <p:cNvPr id="37" name="Rectangle 37"/>
               <p:cNvSpPr/>
               <p:nvPr/>
             </p:nvSpPr>
@@ -10731,7 +12178,7 @@
           </p:sp>
           <p:sp>
             <p:nvSpPr>
-              <p:cNvPr id="36" name="Ellipse 36"/>
+              <p:cNvPr id="38" name="Ellipse 38"/>
               <p:cNvSpPr/>
               <p:nvPr/>
             </p:nvSpPr>
@@ -10755,7 +12202,7 @@
           </p:sp>
           <p:sp>
             <p:nvSpPr>
-              <p:cNvPr id="37" name="Line 37"/>
+              <p:cNvPr id="39" name="Line 39"/>
               <p:cNvSpPr/>
               <p:nvPr/>
             </p:nvSpPr>
@@ -10791,7 +12238,7 @@
           </p:sp>
           <p:sp>
             <p:nvSpPr>
-              <p:cNvPr id="38" name="Rectangle 38"/>
+              <p:cNvPr id="40" name="Rectangle 40"/>
               <p:cNvSpPr/>
               <p:nvPr/>
             </p:nvSpPr>
@@ -10817,7 +12264,7 @@
           </p:sp>
           <p:sp>
             <p:nvSpPr>
-              <p:cNvPr id="39" name="Ellipse 39"/>
+              <p:cNvPr id="41" name="Ellipse 41"/>
               <p:cNvSpPr/>
               <p:nvPr/>
             </p:nvSpPr>
@@ -10841,7 +12288,7 @@
           </p:sp>
           <p:sp>
             <p:nvSpPr>
-              <p:cNvPr id="40" name="Line 40"/>
+              <p:cNvPr id="42" name="Line 42"/>
               <p:cNvSpPr/>
               <p:nvPr/>
             </p:nvSpPr>
@@ -10878,7 +12325,7 @@
         </p:grpSp>
         <p:sp>
           <p:nvSpPr>
-            <p:cNvPr id="42" name="Freeform 42"/>
+            <p:cNvPr id="44" name="Freeform 44"/>
             <p:cNvSpPr/>
             <p:nvPr/>
           </p:nvSpPr>
@@ -10914,7 +12361,7 @@
         </p:sp>
         <p:sp>
           <p:nvSpPr>
-            <p:cNvPr id="43" name="Freeform 43"/>
+            <p:cNvPr id="45" name="Freeform 45"/>
             <p:cNvSpPr/>
             <p:nvPr/>
           </p:nvSpPr>
@@ -10953,7 +12400,7 @@
         </p:sp>
         <p:sp>
           <p:nvSpPr>
-            <p:cNvPr id="44" name="Freeform 44"/>
+            <p:cNvPr id="46" name="Freeform 46"/>
             <p:cNvSpPr/>
             <p:nvPr/>
           </p:nvSpPr>
@@ -10989,7 +12436,7 @@
         </p:sp>
         <p:sp>
           <p:nvSpPr>
-            <p:cNvPr id="45" name="Freeform 45"/>
+            <p:cNvPr id="47" name="Freeform 47"/>
             <p:cNvSpPr/>
             <p:nvPr/>
           </p:nvSpPr>
@@ -11028,7 +12475,7 @@
         </p:sp>
         <p:sp>
           <p:nvSpPr>
-            <p:cNvPr id="46" name="TextBox 46"/>
+            <p:cNvPr id="48" name="TextBox 48"/>
             <p:cNvSpPr txBox="1"/>
             <p:nvPr>
               <p:custDataLst>
@@ -11072,7 +12519,7 @@
         </p:sp>
         <p:sp>
           <p:nvSpPr>
-            <p:cNvPr id="47" name="Freeform 47"/>
+            <p:cNvPr id="49" name="Freeform 49"/>
             <p:cNvSpPr/>
             <p:nvPr/>
           </p:nvSpPr>
@@ -11114,7 +12561,7 @@
         </p:sp>
         <p:sp>
           <p:nvSpPr>
-            <p:cNvPr id="48" name="Freeform 48"/>
+            <p:cNvPr id="50" name="Freeform 50"/>
             <p:cNvSpPr/>
             <p:nvPr/>
           </p:nvSpPr>
@@ -11153,7 +12600,7 @@
         </p:sp>
         <p:sp>
           <p:nvSpPr>
-            <p:cNvPr id="49" name="Freeform 49"/>
+            <p:cNvPr id="51" name="Freeform 51"/>
             <p:cNvSpPr/>
             <p:nvPr/>
           </p:nvSpPr>
@@ -11192,7 +12639,7 @@
         </p:sp>
         <p:sp>
           <p:nvSpPr>
-            <p:cNvPr id="50" name="Freeform 50"/>
+            <p:cNvPr id="52" name="Freeform 52"/>
             <p:cNvSpPr/>
             <p:nvPr/>
           </p:nvSpPr>
@@ -11231,7 +12678,7 @@
         </p:sp>
         <p:sp>
           <p:nvSpPr>
-            <p:cNvPr id="51" name="Rectangle 51"/>
+            <p:cNvPr id="53" name="Rectangle 53"/>
             <p:cNvSpPr/>
             <p:nvPr/>
           </p:nvSpPr>
@@ -11255,7 +12702,7 @@
         </p:sp>
         <p:sp>
           <p:nvSpPr>
-            <p:cNvPr id="52" name="TextBox 52"/>
+            <p:cNvPr id="54" name="TextBox 54"/>
             <p:cNvSpPr txBox="1"/>
             <p:nvPr>
               <p:custDataLst>
@@ -11299,7 +12746,7 @@
         </p:sp>
         <p:sp>
           <p:nvSpPr>
-            <p:cNvPr id="53" name="Rectangle 53"/>
+            <p:cNvPr id="55" name="Rectangle 55"/>
             <p:cNvSpPr/>
             <p:nvPr/>
           </p:nvSpPr>
@@ -11323,7 +12770,7 @@
         </p:sp>
         <p:sp>
           <p:nvSpPr>
-            <p:cNvPr id="54" name="TextBox 54"/>
+            <p:cNvPr id="56" name="TextBox 56"/>
             <p:cNvSpPr txBox="1"/>
             <p:nvPr>
               <p:custDataLst>
@@ -11367,7 +12814,7 @@
         </p:sp>
         <p:sp>
           <p:nvSpPr>
-            <p:cNvPr id="55" name="TextBox 55"/>
+            <p:cNvPr id="57" name="TextBox 57"/>
             <p:cNvSpPr txBox="1"/>
             <p:nvPr>
               <p:custDataLst>
@@ -11411,7 +12858,7 @@
         </p:sp>
         <p:sp>
           <p:nvSpPr>
-            <p:cNvPr id="56" name="TextBox 56"/>
+            <p:cNvPr id="58" name="TextBox 58"/>
             <p:cNvSpPr txBox="1"/>
             <p:nvPr>
               <p:custDataLst>
@@ -11455,7 +12902,7 @@
         </p:sp>
         <p:sp>
           <p:nvSpPr>
-            <p:cNvPr id="57" name="TextBox 57"/>
+            <p:cNvPr id="59" name="TextBox 59"/>
             <p:cNvSpPr txBox="1"/>
             <p:nvPr>
               <p:custDataLst>
@@ -11499,7 +12946,7 @@
         </p:sp>
         <p:sp>
           <p:nvSpPr>
-            <p:cNvPr id="58" name="Rectangle 58"/>
+            <p:cNvPr id="60" name="Rectangle 60"/>
             <p:cNvSpPr/>
             <p:nvPr/>
           </p:nvSpPr>
@@ -11523,7 +12970,7 @@
         </p:sp>
         <p:sp>
           <p:nvSpPr>
-            <p:cNvPr id="59" name="Rectangle 59"/>
+            <p:cNvPr id="61" name="Rectangle 61"/>
             <p:cNvSpPr/>
             <p:nvPr/>
           </p:nvSpPr>
@@ -11547,7 +12994,29 @@
         </p:sp>
         <p:sp>
           <p:nvSpPr>
-            <p:cNvPr id="60" name="TextBox 60"/>
+            <p:cNvPr id="62" name="Rectangle 62"/>
+            <p:cNvSpPr/>
+            <p:nvPr/>
+          </p:nvSpPr>
+          <p:spPr>
+            <a:xfrm>
+              <a:off x="609600" y="3895725"/>
+              <a:ext cx="38100" cy="2095500"/>
+            </a:xfrm>
+            <a:prstGeom prst="rect">
+              <a:avLst/>
+            </a:prstGeom>
+            <a:solidFill>
+              <a:schemeClr val="accent1"/>
+            </a:solidFill>
+            <a:ln>
+              <a:noFill/>
+            </a:ln>
+          </p:spPr>
+        </p:sp>
+        <p:sp>
+          <p:nvSpPr>
+            <p:cNvPr id="63" name="TextBox 63"/>
             <p:cNvSpPr txBox="1"/>
             <p:nvPr>
               <p:custDataLst>
@@ -11591,7 +13060,7 @@
         </p:sp>
         <p:sp>
           <p:nvSpPr>
-            <p:cNvPr id="61" name="TextBox 61"/>
+            <p:cNvPr id="64" name="TextBox 64"/>
             <p:cNvSpPr txBox="1"/>
             <p:nvPr>
               <p:custDataLst>
@@ -11635,7 +13104,7 @@
         </p:sp>
         <p:sp>
           <p:nvSpPr>
-            <p:cNvPr id="62" name="Rectangle 62"/>
+            <p:cNvPr id="65" name="Rectangle 65"/>
             <p:cNvSpPr/>
             <p:nvPr/>
           </p:nvSpPr>
@@ -11659,7 +13128,7 @@
         </p:sp>
         <p:sp>
           <p:nvSpPr>
-            <p:cNvPr id="63" name="TextBox 63"/>
+            <p:cNvPr id="66" name="TextBox 66"/>
             <p:cNvSpPr txBox="1"/>
             <p:nvPr>
               <p:custDataLst>
@@ -11725,7 +13194,7 @@
         </p:sp>
         <p:sp>
           <p:nvSpPr>
-            <p:cNvPr id="64" name="Rectangle 64"/>
+            <p:cNvPr id="67" name="Rectangle 67"/>
             <p:cNvSpPr/>
             <p:nvPr/>
           </p:nvSpPr>
@@ -11749,7 +13218,7 @@
         </p:sp>
         <p:grpSp>
           <p:nvGrpSpPr>
-            <p:cNvPr id="70" name="Group 70"/>
+            <p:cNvPr id="73" name="Group 73"/>
             <p:cNvGrpSpPr/>
             <p:nvPr/>
           </p:nvGrpSpPr>
@@ -11763,7 +13232,7 @@
           </p:grpSpPr>
           <p:sp>
             <p:nvSpPr>
-              <p:cNvPr id="65" name="Rectangle 65"/>
+              <p:cNvPr id="68" name="Rectangle 68"/>
               <p:cNvSpPr/>
               <p:nvPr/>
             </p:nvSpPr>
@@ -11789,7 +13258,7 @@
           </p:sp>
           <p:sp>
             <p:nvSpPr>
-              <p:cNvPr id="66" name="Line 66"/>
+              <p:cNvPr id="69" name="Line 69"/>
               <p:cNvSpPr/>
               <p:nvPr/>
             </p:nvSpPr>
@@ -11825,7 +13294,7 @@
           </p:sp>
           <p:sp>
             <p:nvSpPr>
-              <p:cNvPr id="67" name="Line 67"/>
+              <p:cNvPr id="70" name="Line 70"/>
               <p:cNvSpPr/>
               <p:nvPr/>
             </p:nvSpPr>
@@ -11861,7 +13330,7 @@
           </p:sp>
           <p:sp>
             <p:nvSpPr>
-              <p:cNvPr id="68" name="Line 68"/>
+              <p:cNvPr id="71" name="Line 71"/>
               <p:cNvSpPr/>
               <p:nvPr/>
             </p:nvSpPr>
@@ -11897,7 +13366,7 @@
           </p:sp>
           <p:sp>
             <p:nvSpPr>
-              <p:cNvPr id="69" name="Line 69"/>
+              <p:cNvPr id="72" name="Line 72"/>
               <p:cNvSpPr/>
               <p:nvPr/>
             </p:nvSpPr>
@@ -11934,7 +13403,7 @@
         </p:grpSp>
         <p:sp>
           <p:nvSpPr>
-            <p:cNvPr id="71" name="TextBox 71"/>
+            <p:cNvPr id="74" name="TextBox 74"/>
             <p:cNvSpPr txBox="1"/>
             <p:nvPr>
               <p:custDataLst>
@@ -11978,7 +13447,7 @@
         </p:sp>
         <p:sp>
           <p:nvSpPr>
-            <p:cNvPr id="72" name="Freeform 72"/>
+            <p:cNvPr id="75" name="Freeform 75"/>
             <p:cNvSpPr/>
             <p:nvPr/>
           </p:nvSpPr>
@@ -12014,7 +13483,7 @@
         </p:sp>
         <p:sp>
           <p:nvSpPr>
-            <p:cNvPr id="73" name="Freeform 73"/>
+            <p:cNvPr id="76" name="Freeform 76"/>
             <p:cNvSpPr/>
             <p:nvPr/>
           </p:nvSpPr>
@@ -12053,7 +13522,7 @@
         </p:sp>
         <p:sp>
           <p:nvSpPr>
-            <p:cNvPr id="74" name="Rectangle 74"/>
+            <p:cNvPr id="77" name="Rectangle 77"/>
             <p:cNvSpPr/>
             <p:nvPr/>
           </p:nvSpPr>
@@ -12077,7 +13546,7 @@
         </p:sp>
         <p:grpSp>
           <p:nvGrpSpPr>
-            <p:cNvPr id="78" name="Group 78"/>
+            <p:cNvPr id="81" name="Group 81"/>
             <p:cNvGrpSpPr/>
             <p:nvPr/>
           </p:nvGrpSpPr>
@@ -12091,7 +13560,7 @@
           </p:grpSpPr>
           <p:sp>
             <p:nvSpPr>
-              <p:cNvPr id="75" name="Rectangle 75"/>
+              <p:cNvPr id="78" name="Rectangle 78"/>
               <p:cNvSpPr/>
               <p:nvPr/>
             </p:nvSpPr>
@@ -12118,7 +13587,7 @@
           </p:sp>
           <p:sp>
             <p:nvSpPr>
-              <p:cNvPr id="76" name="Rectangle 76"/>
+              <p:cNvPr id="79" name="Rectangle 79"/>
               <p:cNvSpPr/>
               <p:nvPr/>
             </p:nvSpPr>
@@ -12145,7 +13614,7 @@
           </p:sp>
           <p:sp>
             <p:nvSpPr>
-              <p:cNvPr id="77" name="Freeform 77"/>
+              <p:cNvPr id="80" name="Freeform 80"/>
               <p:cNvSpPr/>
               <p:nvPr/>
             </p:nvSpPr>
@@ -12249,7 +13718,7 @@
         </p:grpSp>
         <p:sp>
           <p:nvSpPr>
-            <p:cNvPr id="79" name="TextBox 79"/>
+            <p:cNvPr id="82" name="TextBox 82"/>
             <p:cNvSpPr txBox="1"/>
             <p:nvPr>
               <p:custDataLst>
@@ -12293,7 +13762,7 @@
         </p:sp>
         <p:sp>
           <p:nvSpPr>
-            <p:cNvPr id="80" name="Freeform 80"/>
+            <p:cNvPr id="83" name="Freeform 83"/>
             <p:cNvSpPr/>
             <p:nvPr/>
           </p:nvSpPr>
@@ -12329,7 +13798,7 @@
         </p:sp>
         <p:sp>
           <p:nvSpPr>
-            <p:cNvPr id="81" name="Freeform 81"/>
+            <p:cNvPr id="84" name="Freeform 84"/>
             <p:cNvSpPr/>
             <p:nvPr/>
           </p:nvSpPr>
@@ -12368,7 +13837,7 @@
         </p:sp>
         <p:sp>
           <p:nvSpPr>
-            <p:cNvPr id="82" name="Rectangle 82"/>
+            <p:cNvPr id="85" name="Rectangle 85"/>
             <p:cNvSpPr/>
             <p:nvPr/>
           </p:nvSpPr>
@@ -12392,7 +13861,7 @@
         </p:sp>
         <p:grpSp>
           <p:nvGrpSpPr>
-            <p:cNvPr id="88" name="Group 88"/>
+            <p:cNvPr id="91" name="Group 91"/>
             <p:cNvGrpSpPr/>
             <p:nvPr/>
           </p:nvGrpSpPr>
@@ -12406,7 +13875,7 @@
           </p:grpSpPr>
           <p:sp>
             <p:nvSpPr>
-              <p:cNvPr id="83" name="Freeform 83"/>
+              <p:cNvPr id="86" name="Freeform 86"/>
               <p:cNvSpPr/>
               <p:nvPr/>
             </p:nvSpPr>
@@ -12453,7 +13922,7 @@
           </p:sp>
           <p:sp>
             <p:nvSpPr>
-              <p:cNvPr id="84" name="Ellipse 84"/>
+              <p:cNvPr id="87" name="Ellipse 87"/>
               <p:cNvSpPr/>
               <p:nvPr/>
             </p:nvSpPr>
@@ -12478,7 +13947,7 @@
           </p:sp>
           <p:sp>
             <p:nvSpPr>
-              <p:cNvPr id="85" name="Freeform 85"/>
+              <p:cNvPr id="88" name="Freeform 88"/>
               <p:cNvSpPr/>
               <p:nvPr/>
             </p:nvSpPr>
@@ -12517,7 +13986,7 @@
           </p:sp>
           <p:sp>
             <p:nvSpPr>
-              <p:cNvPr id="86" name="Ellipse 86"/>
+              <p:cNvPr id="89" name="Ellipse 89"/>
               <p:cNvSpPr/>
               <p:nvPr/>
             </p:nvSpPr>
@@ -12542,7 +14011,7 @@
           </p:sp>
           <p:sp>
             <p:nvSpPr>
-              <p:cNvPr id="87" name="Freeform 87"/>
+              <p:cNvPr id="90" name="Freeform 90"/>
               <p:cNvSpPr/>
               <p:nvPr/>
             </p:nvSpPr>
@@ -12582,7 +14051,7 @@
         </p:grpSp>
         <p:sp>
           <p:nvSpPr>
-            <p:cNvPr id="89" name="TextBox 89"/>
+            <p:cNvPr id="92" name="TextBox 92"/>
             <p:cNvSpPr txBox="1"/>
             <p:nvPr>
               <p:custDataLst>
@@ -12637,7 +14106,7 @@
         </p:sp>
         <p:sp>
           <p:nvSpPr>
-            <p:cNvPr id="90" name="Freeform 90"/>
+            <p:cNvPr id="93" name="Freeform 93"/>
             <p:cNvSpPr/>
             <p:nvPr/>
           </p:nvSpPr>
@@ -12673,7 +14142,7 @@
         </p:sp>
         <p:sp>
           <p:nvSpPr>
-            <p:cNvPr id="91" name="Freeform 91"/>
+            <p:cNvPr id="94" name="Freeform 94"/>
             <p:cNvSpPr/>
             <p:nvPr/>
           </p:nvSpPr>
@@ -12712,7 +14181,7 @@
         </p:sp>
         <p:sp>
           <p:nvSpPr>
-            <p:cNvPr id="92" name="Rectangle 92"/>
+            <p:cNvPr id="95" name="Rectangle 95"/>
             <p:cNvSpPr/>
             <p:nvPr/>
           </p:nvSpPr>
@@ -12736,7 +14205,7 @@
         </p:sp>
         <p:grpSp>
           <p:nvGrpSpPr>
-            <p:cNvPr id="96" name="Group 96"/>
+            <p:cNvPr id="99" name="Group 99"/>
             <p:cNvGrpSpPr/>
             <p:nvPr/>
           </p:nvGrpSpPr>
@@ -12750,7 +14219,7 @@
           </p:grpSpPr>
           <p:sp>
             <p:nvSpPr>
-              <p:cNvPr id="93" name="Freeform 93"/>
+              <p:cNvPr id="96" name="Freeform 96"/>
               <p:cNvSpPr/>
               <p:nvPr/>
             </p:nvSpPr>
@@ -12806,7 +14275,7 @@
           </p:sp>
           <p:sp>
             <p:nvSpPr>
-              <p:cNvPr id="94" name="Freeform 94"/>
+              <p:cNvPr id="97" name="Freeform 97"/>
               <p:cNvSpPr/>
               <p:nvPr/>
             </p:nvSpPr>
@@ -12846,7 +14315,7 @@
           </p:sp>
           <p:sp>
             <p:nvSpPr>
-              <p:cNvPr id="95" name="Freeform 95"/>
+              <p:cNvPr id="98" name="Freeform 98"/>
               <p:cNvSpPr/>
               <p:nvPr/>
             </p:nvSpPr>
@@ -12899,7 +14368,7 @@
         </p:grpSp>
         <p:sp>
           <p:nvSpPr>
-            <p:cNvPr id="97" name="TextBox 97"/>
+            <p:cNvPr id="100" name="TextBox 100"/>
             <p:cNvSpPr txBox="1"/>
             <p:nvPr>
               <p:custDataLst>
@@ -12943,7 +14412,7 @@
         </p:sp>
         <p:sp>
           <p:nvSpPr>
-            <p:cNvPr id="98" name="TextBox 98"/>
+            <p:cNvPr id="101" name="TextBox 101"/>
             <p:cNvSpPr txBox="1"/>
             <p:nvPr>
               <p:custDataLst>
@@ -13009,7 +14478,7 @@
         </p:sp>
         <p:sp>
           <p:nvSpPr>
-            <p:cNvPr id="99" name="TextBox 99"/>
+            <p:cNvPr id="102" name="TextBox 102"/>
             <p:cNvSpPr txBox="1"/>
             <p:nvPr>
               <p:custDataLst>
@@ -13053,7 +14522,7 @@
         </p:sp>
         <p:sp>
           <p:nvSpPr>
-            <p:cNvPr id="100" name="TextBox 100"/>
+            <p:cNvPr id="103" name="TextBox 103"/>
             <p:cNvSpPr txBox="1"/>
             <p:nvPr>
               <p:custDataLst>
@@ -13120,7 +14589,7 @@
       </p:grpSp>
       <p:grpSp>
         <p:nvGrpSpPr>
-          <p:cNvPr id="105" name="footer"/>
+          <p:cNvPr id="111" name="footer"/>
           <p:cNvGrpSpPr/>
           <p:nvPr/>
         </p:nvGrpSpPr>
@@ -13134,7 +14603,7 @@
         </p:grpSpPr>
         <p:sp>
           <p:nvSpPr>
-            <p:cNvPr id="102" name="Line 102"/>
+            <p:cNvPr id="105" name="Line 105"/>
             <p:cNvSpPr/>
             <p:nvPr/>
           </p:nvSpPr>
@@ -13170,7 +14639,7 @@
         </p:sp>
         <p:sp>
           <p:nvSpPr>
-            <p:cNvPr id="103" name="TextBox 103"/>
+            <p:cNvPr id="106" name="TextBox 106"/>
             <p:cNvSpPr txBox="1"/>
             <p:nvPr>
               <p:custDataLst>
@@ -13225,7 +14694,7 @@
         </p:sp>
         <p:sp>
           <p:nvSpPr>
-            <p:cNvPr id="104" name="TextBox 104"/>
+            <p:cNvPr id="107" name="TextBox 107"/>
             <p:cNvSpPr txBox="1"/>
             <p:nvPr>
               <p:custDataLst>
@@ -13266,6 +14735,78 @@
               </a:r>
             </a:p>
           </p:txBody>
+        </p:sp>
+        <p:sp>
+          <p:nvSpPr>
+            <p:cNvPr id="108" name="Rectangle 108"/>
+            <p:cNvSpPr/>
+            <p:nvPr/>
+          </p:nvSpPr>
+          <p:spPr>
+            <a:xfrm>
+              <a:off x="8858250" y="6515100"/>
+              <a:ext cx="114300" cy="28575"/>
+            </a:xfrm>
+            <a:prstGeom prst="roundRect">
+              <a:avLst>
+                <a:gd name="adj" fmla="val 33333"/>
+              </a:avLst>
+            </a:prstGeom>
+            <a:solidFill>
+              <a:srgbClr val="D6DDE0"/>
+            </a:solidFill>
+            <a:ln>
+              <a:noFill/>
+            </a:ln>
+          </p:spPr>
+        </p:sp>
+        <p:sp>
+          <p:nvSpPr>
+            <p:cNvPr id="109" name="Rectangle 109"/>
+            <p:cNvSpPr/>
+            <p:nvPr/>
+          </p:nvSpPr>
+          <p:spPr>
+            <a:xfrm>
+              <a:off x="9048750" y="6515100"/>
+              <a:ext cx="114300" cy="28575"/>
+            </a:xfrm>
+            <a:prstGeom prst="roundRect">
+              <a:avLst>
+                <a:gd name="adj" fmla="val 33333"/>
+              </a:avLst>
+            </a:prstGeom>
+            <a:solidFill>
+              <a:srgbClr val="D6DDE0"/>
+            </a:solidFill>
+            <a:ln>
+              <a:noFill/>
+            </a:ln>
+          </p:spPr>
+        </p:sp>
+        <p:sp>
+          <p:nvSpPr>
+            <p:cNvPr id="110" name="Rectangle 110"/>
+            <p:cNvSpPr/>
+            <p:nvPr/>
+          </p:nvSpPr>
+          <p:spPr>
+            <a:xfrm>
+              <a:off x="9239250" y="6515100"/>
+              <a:ext cx="114300" cy="28575"/>
+            </a:xfrm>
+            <a:prstGeom prst="roundRect">
+              <a:avLst>
+                <a:gd name="adj" fmla="val 33333"/>
+              </a:avLst>
+            </a:prstGeom>
+            <a:solidFill>
+              <a:schemeClr val="accent2"/>
+            </a:solidFill>
+            <a:ln>
+              <a:noFill/>
+            </a:ln>
+          </p:spPr>
         </p:sp>
       </p:grpSp>
     </p:spTree>
@@ -13512,16 +15053,16 @@
       </p:grpSpPr>
       <p:grpSp>
         <p:nvGrpSpPr>
-          <p:cNvPr id="5" name="headline"/>
+          <p:cNvPr id="6" name="headline"/>
           <p:cNvGrpSpPr/>
           <p:nvPr/>
         </p:nvGrpSpPr>
         <p:grpSpPr>
           <a:xfrm>
             <a:off x="593598" y="257175"/>
-            <a:ext cx="4696587" cy="1082802"/>
+            <a:ext cx="4696587" cy="1085850"/>
             <a:chOff x="593598" y="257175"/>
-            <a:chExt cx="4696587" cy="1082802"/>
+            <a:chExt cx="4696587" cy="1085850"/>
           </a:xfrm>
         </p:grpSpPr>
         <p:sp>
@@ -13636,10 +15177,32 @@
             </a:p>
           </p:txBody>
         </p:sp>
+        <p:sp>
+          <p:nvSpPr>
+            <p:cNvPr id="5" name="Rectangle 5"/>
+            <p:cNvSpPr/>
+            <p:nvPr/>
+          </p:nvSpPr>
+          <p:spPr>
+            <a:xfrm>
+              <a:off x="609600" y="1314450"/>
+              <a:ext cx="762000" cy="28575"/>
+            </a:xfrm>
+            <a:prstGeom prst="rect">
+              <a:avLst/>
+            </a:prstGeom>
+            <a:solidFill>
+              <a:schemeClr val="accent1"/>
+            </a:solidFill>
+            <a:ln>
+              <a:noFill/>
+            </a:ln>
+          </p:spPr>
+        </p:sp>
       </p:grpSp>
       <p:grpSp>
         <p:nvGrpSpPr>
-          <p:cNvPr id="88" name="page-content"/>
+          <p:cNvPr id="89" name="page-content"/>
           <p:cNvGrpSpPr/>
           <p:nvPr/>
         </p:nvGrpSpPr>
@@ -13653,7 +15216,7 @@
         </p:grpSpPr>
         <p:sp>
           <p:nvSpPr>
-            <p:cNvPr id="6" name="Rectangle 6"/>
+            <p:cNvPr id="7" name="Rectangle 7"/>
             <p:cNvSpPr/>
             <p:nvPr/>
           </p:nvSpPr>
@@ -13679,7 +15242,7 @@
         </p:sp>
         <p:sp>
           <p:nvSpPr>
-            <p:cNvPr id="7" name="TextBox 7"/>
+            <p:cNvPr id="8" name="TextBox 8"/>
             <p:cNvSpPr txBox="1"/>
             <p:nvPr>
               <p:custDataLst>
@@ -13734,7 +15297,7 @@
         </p:sp>
         <p:grpSp>
           <p:nvGrpSpPr>
-            <p:cNvPr id="14" name="Group 14"/>
+            <p:cNvPr id="15" name="Group 15"/>
             <p:cNvGrpSpPr/>
             <p:nvPr/>
           </p:nvGrpSpPr>
@@ -13748,7 +15311,7 @@
           </p:grpSpPr>
           <p:sp>
             <p:nvSpPr>
-              <p:cNvPr id="8" name="Rectangle 8"/>
+              <p:cNvPr id="9" name="Rectangle 9"/>
               <p:cNvSpPr/>
               <p:nvPr/>
             </p:nvSpPr>
@@ -13775,7 +15338,7 @@
           </p:sp>
           <p:sp>
             <p:nvSpPr>
-              <p:cNvPr id="9" name="Freeform 9"/>
+              <p:cNvPr id="10" name="Freeform 10"/>
               <p:cNvSpPr/>
               <p:nvPr/>
             </p:nvSpPr>
@@ -13836,7 +15399,7 @@
           </p:sp>
           <p:sp>
             <p:nvSpPr>
-              <p:cNvPr id="10" name="Rectangle 10"/>
+              <p:cNvPr id="11" name="Rectangle 11"/>
               <p:cNvSpPr/>
               <p:nvPr/>
             </p:nvSpPr>
@@ -13863,7 +15426,7 @@
           </p:sp>
           <p:sp>
             <p:nvSpPr>
-              <p:cNvPr id="11" name="Rectangle 11"/>
+              <p:cNvPr id="12" name="Rectangle 12"/>
               <p:cNvSpPr/>
               <p:nvPr/>
             </p:nvSpPr>
@@ -13890,7 +15453,7 @@
           </p:sp>
           <p:sp>
             <p:nvSpPr>
-              <p:cNvPr id="12" name="Rectangle 12"/>
+              <p:cNvPr id="13" name="Rectangle 13"/>
               <p:cNvSpPr/>
               <p:nvPr/>
             </p:nvSpPr>
@@ -13917,7 +15480,7 @@
           </p:sp>
           <p:sp>
             <p:nvSpPr>
-              <p:cNvPr id="13" name="Freeform 13"/>
+              <p:cNvPr id="14" name="Freeform 14"/>
               <p:cNvSpPr/>
               <p:nvPr/>
             </p:nvSpPr>
@@ -13957,7 +15520,7 @@
         </p:grpSp>
         <p:sp>
           <p:nvSpPr>
-            <p:cNvPr id="15" name="TextBox 15"/>
+            <p:cNvPr id="16" name="TextBox 16"/>
             <p:cNvSpPr txBox="1"/>
             <p:nvPr>
               <p:custDataLst>
@@ -14001,7 +15564,7 @@
         </p:sp>
         <p:sp>
           <p:nvSpPr>
-            <p:cNvPr id="16" name="TextBox 16"/>
+            <p:cNvPr id="17" name="TextBox 17"/>
             <p:cNvSpPr txBox="1"/>
             <p:nvPr>
               <p:custDataLst>
@@ -14045,7 +15608,7 @@
         </p:sp>
         <p:sp>
           <p:nvSpPr>
-            <p:cNvPr id="17" name="TextBox 17"/>
+            <p:cNvPr id="18" name="TextBox 18"/>
             <p:cNvSpPr txBox="1"/>
             <p:nvPr>
               <p:custDataLst>
@@ -14089,7 +15652,7 @@
         </p:sp>
         <p:sp>
           <p:nvSpPr>
-            <p:cNvPr id="18" name="TextBox 18"/>
+            <p:cNvPr id="19" name="TextBox 19"/>
             <p:cNvSpPr txBox="1"/>
             <p:nvPr>
               <p:custDataLst>
@@ -14133,7 +15696,7 @@
         </p:sp>
         <p:sp>
           <p:nvSpPr>
-            <p:cNvPr id="19" name="Rectangle 19"/>
+            <p:cNvPr id="20" name="Rectangle 20"/>
             <p:cNvSpPr/>
             <p:nvPr/>
           </p:nvSpPr>
@@ -14159,7 +15722,7 @@
         </p:sp>
         <p:grpSp>
           <p:nvGrpSpPr>
-            <p:cNvPr id="23" name="Group 23"/>
+            <p:cNvPr id="24" name="Group 24"/>
             <p:cNvGrpSpPr/>
             <p:nvPr/>
           </p:nvGrpSpPr>
@@ -14173,7 +15736,7 @@
           </p:grpSpPr>
           <p:sp>
             <p:nvSpPr>
-              <p:cNvPr id="20" name="Rectangle 20"/>
+              <p:cNvPr id="21" name="Rectangle 21"/>
               <p:cNvSpPr/>
               <p:nvPr/>
             </p:nvSpPr>
@@ -14200,7 +15763,7 @@
           </p:sp>
           <p:sp>
             <p:nvSpPr>
-              <p:cNvPr id="21" name="Rectangle 21"/>
+              <p:cNvPr id="22" name="Rectangle 22"/>
               <p:cNvSpPr/>
               <p:nvPr/>
             </p:nvSpPr>
@@ -14227,7 +15790,7 @@
           </p:sp>
           <p:sp>
             <p:nvSpPr>
-              <p:cNvPr id="22" name="Freeform 22"/>
+              <p:cNvPr id="23" name="Freeform 23"/>
               <p:cNvSpPr/>
               <p:nvPr/>
             </p:nvSpPr>
@@ -14331,7 +15894,7 @@
         </p:grpSp>
         <p:sp>
           <p:nvSpPr>
-            <p:cNvPr id="24" name="TextBox 24"/>
+            <p:cNvPr id="25" name="TextBox 25"/>
             <p:cNvSpPr txBox="1"/>
             <p:nvPr>
               <p:custDataLst>
@@ -14386,7 +15949,7 @@
         </p:sp>
         <p:sp>
           <p:nvSpPr>
-            <p:cNvPr id="25" name="Rectangle 25"/>
+            <p:cNvPr id="26" name="Rectangle 26"/>
             <p:cNvSpPr/>
             <p:nvPr/>
           </p:nvSpPr>
@@ -14412,7 +15975,7 @@
         </p:sp>
         <p:sp>
           <p:nvSpPr>
-            <p:cNvPr id="26" name="TextBox 26"/>
+            <p:cNvPr id="27" name="TextBox 27"/>
             <p:cNvSpPr txBox="1"/>
             <p:nvPr>
               <p:custDataLst>
@@ -14456,7 +16019,7 @@
         </p:sp>
         <p:sp>
           <p:nvSpPr>
-            <p:cNvPr id="27" name="TextBox 27"/>
+            <p:cNvPr id="28" name="TextBox 28"/>
             <p:cNvSpPr txBox="1"/>
             <p:nvPr>
               <p:custDataLst>
@@ -14500,7 +16063,7 @@
         </p:sp>
         <p:sp>
           <p:nvSpPr>
-            <p:cNvPr id="28" name="Rectangle 28"/>
+            <p:cNvPr id="29" name="Rectangle 29"/>
             <p:cNvSpPr/>
             <p:nvPr/>
           </p:nvSpPr>
@@ -14526,7 +16089,7 @@
         </p:sp>
         <p:sp>
           <p:nvSpPr>
-            <p:cNvPr id="29" name="TextBox 29"/>
+            <p:cNvPr id="30" name="TextBox 30"/>
             <p:cNvSpPr txBox="1"/>
             <p:nvPr>
               <p:custDataLst>
@@ -14570,7 +16133,7 @@
         </p:sp>
         <p:sp>
           <p:nvSpPr>
-            <p:cNvPr id="30" name="TextBox 30"/>
+            <p:cNvPr id="31" name="TextBox 31"/>
             <p:cNvSpPr txBox="1"/>
             <p:nvPr>
               <p:custDataLst>
@@ -14614,7 +16177,7 @@
         </p:sp>
         <p:sp>
           <p:nvSpPr>
-            <p:cNvPr id="31" name="Rectangle 31"/>
+            <p:cNvPr id="32" name="Rectangle 32"/>
             <p:cNvSpPr/>
             <p:nvPr/>
           </p:nvSpPr>
@@ -14640,7 +16203,7 @@
         </p:sp>
         <p:sp>
           <p:nvSpPr>
-            <p:cNvPr id="32" name="TextBox 32"/>
+            <p:cNvPr id="33" name="TextBox 33"/>
             <p:cNvSpPr txBox="1"/>
             <p:nvPr>
               <p:custDataLst>
@@ -14695,7 +16258,7 @@
         </p:sp>
         <p:sp>
           <p:nvSpPr>
-            <p:cNvPr id="33" name="TextBox 33"/>
+            <p:cNvPr id="34" name="TextBox 34"/>
             <p:cNvSpPr txBox="1"/>
             <p:nvPr>
               <p:custDataLst>
@@ -14739,7 +16302,7 @@
         </p:sp>
         <p:sp>
           <p:nvSpPr>
-            <p:cNvPr id="34" name="Rectangle 34"/>
+            <p:cNvPr id="35" name="Rectangle 35"/>
             <p:cNvSpPr/>
             <p:nvPr/>
           </p:nvSpPr>
@@ -14765,7 +16328,7 @@
         </p:sp>
         <p:sp>
           <p:nvSpPr>
-            <p:cNvPr id="35" name="TextBox 35"/>
+            <p:cNvPr id="36" name="TextBox 36"/>
             <p:cNvSpPr txBox="1"/>
             <p:nvPr>
               <p:custDataLst>
@@ -14809,7 +16372,7 @@
         </p:sp>
         <p:sp>
           <p:nvSpPr>
-            <p:cNvPr id="36" name="TextBox 36"/>
+            <p:cNvPr id="37" name="TextBox 37"/>
             <p:cNvSpPr txBox="1"/>
             <p:nvPr>
               <p:custDataLst>
@@ -14853,7 +16416,7 @@
         </p:sp>
         <p:sp>
           <p:nvSpPr>
-            <p:cNvPr id="37" name="Freeform 37"/>
+            <p:cNvPr id="38" name="Freeform 38"/>
             <p:cNvSpPr/>
             <p:nvPr/>
           </p:nvSpPr>
@@ -14895,7 +16458,7 @@
         </p:sp>
         <p:sp>
           <p:nvSpPr>
-            <p:cNvPr id="38" name="Freeform 38"/>
+            <p:cNvPr id="39" name="Freeform 39"/>
             <p:cNvSpPr/>
             <p:nvPr/>
           </p:nvSpPr>
@@ -14934,7 +16497,7 @@
         </p:sp>
         <p:sp>
           <p:nvSpPr>
-            <p:cNvPr id="39" name="Freeform 39"/>
+            <p:cNvPr id="40" name="Freeform 40"/>
             <p:cNvSpPr/>
             <p:nvPr/>
           </p:nvSpPr>
@@ -14973,7 +16536,7 @@
         </p:sp>
         <p:sp>
           <p:nvSpPr>
-            <p:cNvPr id="40" name="Freeform 40"/>
+            <p:cNvPr id="41" name="Freeform 41"/>
             <p:cNvSpPr/>
             <p:nvPr/>
           </p:nvSpPr>
@@ -15012,7 +16575,7 @@
         </p:sp>
         <p:sp>
           <p:nvSpPr>
-            <p:cNvPr id="41" name="Freeform 41"/>
+            <p:cNvPr id="42" name="Freeform 42"/>
             <p:cNvSpPr/>
             <p:nvPr/>
           </p:nvSpPr>
@@ -15054,7 +16617,7 @@
         </p:sp>
         <p:sp>
           <p:nvSpPr>
-            <p:cNvPr id="42" name="Freeform 42"/>
+            <p:cNvPr id="43" name="Freeform 43"/>
             <p:cNvSpPr/>
             <p:nvPr/>
           </p:nvSpPr>
@@ -15093,7 +16656,7 @@
         </p:sp>
         <p:sp>
           <p:nvSpPr>
-            <p:cNvPr id="43" name="Freeform 43"/>
+            <p:cNvPr id="44" name="Freeform 44"/>
             <p:cNvSpPr/>
             <p:nvPr/>
           </p:nvSpPr>
@@ -15135,7 +16698,7 @@
         </p:sp>
         <p:sp>
           <p:nvSpPr>
-            <p:cNvPr id="44" name="Freeform 44"/>
+            <p:cNvPr id="45" name="Freeform 45"/>
             <p:cNvSpPr/>
             <p:nvPr/>
           </p:nvSpPr>
@@ -15174,7 +16737,7 @@
         </p:sp>
         <p:sp>
           <p:nvSpPr>
-            <p:cNvPr id="45" name="Freeform 45"/>
+            <p:cNvPr id="46" name="Freeform 46"/>
             <p:cNvSpPr/>
             <p:nvPr/>
           </p:nvSpPr>
@@ -15210,7 +16773,7 @@
         </p:sp>
         <p:sp>
           <p:nvSpPr>
-            <p:cNvPr id="46" name="Freeform 46"/>
+            <p:cNvPr id="47" name="Freeform 47"/>
             <p:cNvSpPr/>
             <p:nvPr/>
           </p:nvSpPr>
@@ -15249,7 +16812,7 @@
         </p:sp>
         <p:sp>
           <p:nvSpPr>
-            <p:cNvPr id="47" name="Rectangle 47"/>
+            <p:cNvPr id="48" name="Rectangle 48"/>
             <p:cNvSpPr/>
             <p:nvPr/>
           </p:nvSpPr>
@@ -15275,7 +16838,7 @@
         </p:sp>
         <p:grpSp>
           <p:nvGrpSpPr>
-            <p:cNvPr id="53" name="Group 53"/>
+            <p:cNvPr id="54" name="Group 54"/>
             <p:cNvGrpSpPr/>
             <p:nvPr/>
           </p:nvGrpSpPr>
@@ -15289,7 +16852,7 @@
           </p:grpSpPr>
           <p:sp>
             <p:nvSpPr>
-              <p:cNvPr id="48" name="Freeform 48"/>
+              <p:cNvPr id="49" name="Freeform 49"/>
               <p:cNvSpPr/>
               <p:nvPr/>
             </p:nvSpPr>
@@ -15336,7 +16899,7 @@
           </p:sp>
           <p:sp>
             <p:nvSpPr>
-              <p:cNvPr id="49" name="Ellipse 49"/>
+              <p:cNvPr id="50" name="Ellipse 50"/>
               <p:cNvSpPr/>
               <p:nvPr/>
             </p:nvSpPr>
@@ -15361,7 +16924,7 @@
           </p:sp>
           <p:sp>
             <p:nvSpPr>
-              <p:cNvPr id="50" name="Freeform 50"/>
+              <p:cNvPr id="51" name="Freeform 51"/>
               <p:cNvSpPr/>
               <p:nvPr/>
             </p:nvSpPr>
@@ -15400,7 +16963,7 @@
           </p:sp>
           <p:sp>
             <p:nvSpPr>
-              <p:cNvPr id="51" name="Ellipse 51"/>
+              <p:cNvPr id="52" name="Ellipse 52"/>
               <p:cNvSpPr/>
               <p:nvPr/>
             </p:nvSpPr>
@@ -15425,7 +16988,7 @@
           </p:sp>
           <p:sp>
             <p:nvSpPr>
-              <p:cNvPr id="52" name="Freeform 52"/>
+              <p:cNvPr id="53" name="Freeform 53"/>
               <p:cNvSpPr/>
               <p:nvPr/>
             </p:nvSpPr>
@@ -15465,7 +17028,7 @@
         </p:grpSp>
         <p:sp>
           <p:nvSpPr>
-            <p:cNvPr id="54" name="TextBox 54"/>
+            <p:cNvPr id="55" name="TextBox 55"/>
             <p:cNvSpPr txBox="1"/>
             <p:nvPr>
               <p:custDataLst>
@@ -15542,7 +17105,7 @@
         </p:sp>
         <p:sp>
           <p:nvSpPr>
-            <p:cNvPr id="55" name="Rectangle 55"/>
+            <p:cNvPr id="56" name="Rectangle 56"/>
             <p:cNvSpPr/>
             <p:nvPr/>
           </p:nvSpPr>
@@ -15568,7 +17131,7 @@
         </p:sp>
         <p:sp>
           <p:nvSpPr>
-            <p:cNvPr id="56" name="TextBox 56"/>
+            <p:cNvPr id="57" name="TextBox 57"/>
             <p:cNvSpPr txBox="1"/>
             <p:nvPr>
               <p:custDataLst>
@@ -15612,7 +17175,7 @@
         </p:sp>
         <p:sp>
           <p:nvSpPr>
-            <p:cNvPr id="57" name="TextBox 57"/>
+            <p:cNvPr id="58" name="TextBox 58"/>
             <p:cNvSpPr txBox="1"/>
             <p:nvPr>
               <p:custDataLst>
@@ -15667,7 +17230,7 @@
         </p:sp>
         <p:sp>
           <p:nvSpPr>
-            <p:cNvPr id="58" name="Rectangle 58"/>
+            <p:cNvPr id="59" name="Rectangle 59"/>
             <p:cNvSpPr/>
             <p:nvPr/>
           </p:nvSpPr>
@@ -15693,7 +17256,7 @@
         </p:sp>
         <p:sp>
           <p:nvSpPr>
-            <p:cNvPr id="59" name="TextBox 59"/>
+            <p:cNvPr id="60" name="TextBox 60"/>
             <p:cNvSpPr txBox="1"/>
             <p:nvPr>
               <p:custDataLst>
@@ -15748,7 +17311,7 @@
         </p:sp>
         <p:sp>
           <p:nvSpPr>
-            <p:cNvPr id="60" name="TextBox 60"/>
+            <p:cNvPr id="61" name="TextBox 61"/>
             <p:cNvSpPr txBox="1"/>
             <p:nvPr>
               <p:custDataLst>
@@ -15792,7 +17355,7 @@
         </p:sp>
         <p:sp>
           <p:nvSpPr>
-            <p:cNvPr id="61" name="Rectangle 61"/>
+            <p:cNvPr id="62" name="Rectangle 62"/>
             <p:cNvSpPr/>
             <p:nvPr/>
           </p:nvSpPr>
@@ -15818,7 +17381,7 @@
         </p:sp>
         <p:sp>
           <p:nvSpPr>
-            <p:cNvPr id="62" name="TextBox 62"/>
+            <p:cNvPr id="63" name="TextBox 63"/>
             <p:cNvSpPr txBox="1"/>
             <p:nvPr>
               <p:custDataLst>
@@ -15884,7 +17447,7 @@
         </p:sp>
         <p:sp>
           <p:nvSpPr>
-            <p:cNvPr id="63" name="TextBox 63"/>
+            <p:cNvPr id="64" name="TextBox 64"/>
             <p:cNvSpPr txBox="1"/>
             <p:nvPr>
               <p:custDataLst>
@@ -15928,7 +17491,7 @@
         </p:sp>
         <p:sp>
           <p:nvSpPr>
-            <p:cNvPr id="64" name="Freeform 64"/>
+            <p:cNvPr id="65" name="Freeform 65"/>
             <p:cNvSpPr/>
             <p:nvPr/>
           </p:nvSpPr>
@@ -15973,7 +17536,7 @@
         </p:sp>
         <p:sp>
           <p:nvSpPr>
-            <p:cNvPr id="65" name="Freeform 65"/>
+            <p:cNvPr id="66" name="Freeform 66"/>
             <p:cNvSpPr/>
             <p:nvPr/>
           </p:nvSpPr>
@@ -16012,7 +17575,7 @@
         </p:sp>
         <p:sp>
           <p:nvSpPr>
-            <p:cNvPr id="66" name="TextBox 66"/>
+            <p:cNvPr id="67" name="TextBox 67"/>
             <p:cNvSpPr txBox="1"/>
             <p:nvPr>
               <p:custDataLst>
@@ -16056,7 +17619,7 @@
         </p:sp>
         <p:sp>
           <p:nvSpPr>
-            <p:cNvPr id="67" name="Freeform 67"/>
+            <p:cNvPr id="68" name="Freeform 68"/>
             <p:cNvSpPr/>
             <p:nvPr/>
           </p:nvSpPr>
@@ -16092,7 +17655,7 @@
         </p:sp>
         <p:sp>
           <p:nvSpPr>
-            <p:cNvPr id="68" name="Freeform 68"/>
+            <p:cNvPr id="69" name="Freeform 69"/>
             <p:cNvSpPr/>
             <p:nvPr/>
           </p:nvSpPr>
@@ -16131,7 +17694,7 @@
         </p:sp>
         <p:sp>
           <p:nvSpPr>
-            <p:cNvPr id="69" name="Freeform 69"/>
+            <p:cNvPr id="70" name="Freeform 70"/>
             <p:cNvSpPr/>
             <p:nvPr/>
           </p:nvSpPr>
@@ -16167,7 +17730,7 @@
         </p:sp>
         <p:sp>
           <p:nvSpPr>
-            <p:cNvPr id="70" name="Freeform 70"/>
+            <p:cNvPr id="71" name="Freeform 71"/>
             <p:cNvSpPr/>
             <p:nvPr/>
           </p:nvSpPr>
@@ -16206,7 +17769,7 @@
         </p:sp>
         <p:sp>
           <p:nvSpPr>
-            <p:cNvPr id="71" name="TextBox 71"/>
+            <p:cNvPr id="72" name="TextBox 72"/>
             <p:cNvSpPr txBox="1"/>
             <p:nvPr>
               <p:custDataLst>
@@ -16250,7 +17813,7 @@
         </p:sp>
         <p:sp>
           <p:nvSpPr>
-            <p:cNvPr id="72" name="Freeform 72"/>
+            <p:cNvPr id="73" name="Freeform 73"/>
             <p:cNvSpPr/>
             <p:nvPr/>
           </p:nvSpPr>
@@ -16289,7 +17852,7 @@
         </p:sp>
         <p:sp>
           <p:nvSpPr>
-            <p:cNvPr id="73" name="Freeform 73"/>
+            <p:cNvPr id="74" name="Freeform 74"/>
             <p:cNvSpPr/>
             <p:nvPr/>
           </p:nvSpPr>
@@ -16328,7 +17891,7 @@
         </p:sp>
         <p:sp>
           <p:nvSpPr>
-            <p:cNvPr id="74" name="TextBox 74"/>
+            <p:cNvPr id="75" name="TextBox 75"/>
             <p:cNvSpPr txBox="1"/>
             <p:nvPr>
               <p:custDataLst>
@@ -16372,7 +17935,7 @@
         </p:sp>
         <p:sp>
           <p:nvSpPr>
-            <p:cNvPr id="75" name="Rectangle 75"/>
+            <p:cNvPr id="76" name="Rectangle 76"/>
             <p:cNvSpPr/>
             <p:nvPr/>
           </p:nvSpPr>
@@ -16398,7 +17961,7 @@
         </p:sp>
         <p:grpSp>
           <p:nvGrpSpPr>
-            <p:cNvPr id="79" name="Group 79"/>
+            <p:cNvPr id="80" name="Group 80"/>
             <p:cNvGrpSpPr/>
             <p:nvPr/>
           </p:nvGrpSpPr>
@@ -16412,7 +17975,7 @@
           </p:grpSpPr>
           <p:sp>
             <p:nvSpPr>
-              <p:cNvPr id="76" name="Freeform 76"/>
+              <p:cNvPr id="77" name="Freeform 77"/>
               <p:cNvSpPr/>
               <p:nvPr/>
             </p:nvSpPr>
@@ -16468,7 +18031,7 @@
           </p:sp>
           <p:sp>
             <p:nvSpPr>
-              <p:cNvPr id="77" name="Freeform 77"/>
+              <p:cNvPr id="78" name="Freeform 78"/>
               <p:cNvSpPr/>
               <p:nvPr/>
             </p:nvSpPr>
@@ -16508,7 +18071,7 @@
           </p:sp>
           <p:sp>
             <p:nvSpPr>
-              <p:cNvPr id="78" name="Freeform 78"/>
+              <p:cNvPr id="79" name="Freeform 79"/>
               <p:cNvSpPr/>
               <p:nvPr/>
             </p:nvSpPr>
@@ -16561,7 +18124,7 @@
         </p:grpSp>
         <p:sp>
           <p:nvSpPr>
-            <p:cNvPr id="80" name="TextBox 80"/>
+            <p:cNvPr id="81" name="TextBox 81"/>
             <p:cNvSpPr txBox="1"/>
             <p:nvPr>
               <p:custDataLst>
@@ -16616,7 +18179,7 @@
         </p:sp>
         <p:sp>
           <p:nvSpPr>
-            <p:cNvPr id="81" name="TextBox 81"/>
+            <p:cNvPr id="82" name="TextBox 82"/>
             <p:cNvSpPr txBox="1"/>
             <p:nvPr>
               <p:custDataLst>
@@ -16660,7 +18223,7 @@
         </p:sp>
         <p:sp>
           <p:nvSpPr>
-            <p:cNvPr id="82" name="TextBox 82"/>
+            <p:cNvPr id="83" name="TextBox 83"/>
             <p:cNvSpPr txBox="1"/>
             <p:nvPr>
               <p:custDataLst>
@@ -16704,7 +18267,7 @@
         </p:sp>
         <p:sp>
           <p:nvSpPr>
-            <p:cNvPr id="83" name="TextBox 83"/>
+            <p:cNvPr id="84" name="TextBox 84"/>
             <p:cNvSpPr txBox="1"/>
             <p:nvPr>
               <p:custDataLst>
@@ -16748,7 +18311,7 @@
         </p:sp>
         <p:sp>
           <p:nvSpPr>
-            <p:cNvPr id="84" name="Freeform 84"/>
+            <p:cNvPr id="85" name="Freeform 85"/>
             <p:cNvSpPr/>
             <p:nvPr/>
           </p:nvSpPr>
@@ -16784,7 +18347,7 @@
         </p:sp>
         <p:sp>
           <p:nvSpPr>
-            <p:cNvPr id="85" name="Freeform 85"/>
+            <p:cNvPr id="86" name="Freeform 86"/>
             <p:cNvSpPr/>
             <p:nvPr/>
           </p:nvSpPr>
@@ -16823,7 +18386,7 @@
         </p:sp>
         <p:sp>
           <p:nvSpPr>
-            <p:cNvPr id="86" name="Rectangle 86"/>
+            <p:cNvPr id="87" name="Rectangle 87"/>
             <p:cNvSpPr/>
             <p:nvPr/>
           </p:nvSpPr>
@@ -16849,7 +18412,7 @@
         </p:sp>
         <p:sp>
           <p:nvSpPr>
-            <p:cNvPr id="87" name="TextBox 87"/>
+            <p:cNvPr id="88" name="TextBox 88"/>
             <p:cNvSpPr txBox="1"/>
             <p:nvPr>
               <p:custDataLst>
@@ -16960,7 +18523,7 @@
       </p:grpSp>
       <p:grpSp>
         <p:nvGrpSpPr>
-          <p:cNvPr id="92" name="footer"/>
+          <p:cNvPr id="102" name="footer"/>
           <p:cNvGrpSpPr/>
           <p:nvPr/>
         </p:nvGrpSpPr>
@@ -16974,7 +18537,7 @@
         </p:grpSpPr>
         <p:sp>
           <p:nvSpPr>
-            <p:cNvPr id="89" name="Line 89"/>
+            <p:cNvPr id="90" name="Line 90"/>
             <p:cNvSpPr/>
             <p:nvPr/>
           </p:nvSpPr>
@@ -17010,7 +18573,7 @@
         </p:sp>
         <p:sp>
           <p:nvSpPr>
-            <p:cNvPr id="90" name="TextBox 90"/>
+            <p:cNvPr id="91" name="TextBox 91"/>
             <p:cNvSpPr txBox="1"/>
             <p:nvPr>
               <p:custDataLst>
@@ -17065,7 +18628,7 @@
         </p:sp>
         <p:sp>
           <p:nvSpPr>
-            <p:cNvPr id="91" name="TextBox 91"/>
+            <p:cNvPr id="92" name="TextBox 92"/>
             <p:cNvSpPr txBox="1"/>
             <p:nvPr>
               <p:custDataLst>
@@ -17106,6 +18669,222 @@
               </a:r>
             </a:p>
           </p:txBody>
+        </p:sp>
+        <p:sp>
+          <p:nvSpPr>
+            <p:cNvPr id="93" name="Rectangle 93"/>
+            <p:cNvSpPr/>
+            <p:nvPr/>
+          </p:nvSpPr>
+          <p:spPr>
+            <a:xfrm>
+              <a:off x="8858250" y="6515100"/>
+              <a:ext cx="114300" cy="28575"/>
+            </a:xfrm>
+            <a:prstGeom prst="roundRect">
+              <a:avLst>
+                <a:gd name="adj" fmla="val 33333"/>
+              </a:avLst>
+            </a:prstGeom>
+            <a:solidFill>
+              <a:srgbClr val="D6DDE0"/>
+            </a:solidFill>
+            <a:ln>
+              <a:noFill/>
+            </a:ln>
+          </p:spPr>
+        </p:sp>
+        <p:sp>
+          <p:nvSpPr>
+            <p:cNvPr id="94" name="Rectangle 94"/>
+            <p:cNvSpPr/>
+            <p:nvPr/>
+          </p:nvSpPr>
+          <p:spPr>
+            <a:xfrm>
+              <a:off x="9048750" y="6515100"/>
+              <a:ext cx="114300" cy="28575"/>
+            </a:xfrm>
+            <a:prstGeom prst="roundRect">
+              <a:avLst>
+                <a:gd name="adj" fmla="val 33333"/>
+              </a:avLst>
+            </a:prstGeom>
+            <a:solidFill>
+              <a:srgbClr val="D6DDE0"/>
+            </a:solidFill>
+            <a:ln>
+              <a:noFill/>
+            </a:ln>
+          </p:spPr>
+        </p:sp>
+        <p:sp>
+          <p:nvSpPr>
+            <p:cNvPr id="95" name="Rectangle 95"/>
+            <p:cNvSpPr/>
+            <p:nvPr/>
+          </p:nvSpPr>
+          <p:spPr>
+            <a:xfrm>
+              <a:off x="9239250" y="6515100"/>
+              <a:ext cx="114300" cy="28575"/>
+            </a:xfrm>
+            <a:prstGeom prst="roundRect">
+              <a:avLst>
+                <a:gd name="adj" fmla="val 33333"/>
+              </a:avLst>
+            </a:prstGeom>
+            <a:solidFill>
+              <a:schemeClr val="accent2"/>
+            </a:solidFill>
+            <a:ln>
+              <a:noFill/>
+            </a:ln>
+          </p:spPr>
+        </p:sp>
+        <p:sp>
+          <p:nvSpPr>
+            <p:cNvPr id="96" name="Rectangle 96"/>
+            <p:cNvSpPr/>
+            <p:nvPr/>
+          </p:nvSpPr>
+          <p:spPr>
+            <a:xfrm>
+              <a:off x="9429750" y="6515100"/>
+              <a:ext cx="114300" cy="28575"/>
+            </a:xfrm>
+            <a:prstGeom prst="roundRect">
+              <a:avLst>
+                <a:gd name="adj" fmla="val 33333"/>
+              </a:avLst>
+            </a:prstGeom>
+            <a:solidFill>
+              <a:srgbClr val="D6DDE0"/>
+            </a:solidFill>
+            <a:ln>
+              <a:noFill/>
+            </a:ln>
+          </p:spPr>
+        </p:sp>
+        <p:sp>
+          <p:nvSpPr>
+            <p:cNvPr id="97" name="Rectangle 97"/>
+            <p:cNvSpPr/>
+            <p:nvPr/>
+          </p:nvSpPr>
+          <p:spPr>
+            <a:xfrm>
+              <a:off x="9620250" y="6515100"/>
+              <a:ext cx="114300" cy="28575"/>
+            </a:xfrm>
+            <a:prstGeom prst="roundRect">
+              <a:avLst>
+                <a:gd name="adj" fmla="val 33333"/>
+              </a:avLst>
+            </a:prstGeom>
+            <a:solidFill>
+              <a:srgbClr val="D6DDE0"/>
+            </a:solidFill>
+            <a:ln>
+              <a:noFill/>
+            </a:ln>
+          </p:spPr>
+        </p:sp>
+        <p:sp>
+          <p:nvSpPr>
+            <p:cNvPr id="98" name="Rectangle 98"/>
+            <p:cNvSpPr/>
+            <p:nvPr/>
+          </p:nvSpPr>
+          <p:spPr>
+            <a:xfrm>
+              <a:off x="9810750" y="6515100"/>
+              <a:ext cx="114300" cy="28575"/>
+            </a:xfrm>
+            <a:prstGeom prst="roundRect">
+              <a:avLst>
+                <a:gd name="adj" fmla="val 33333"/>
+              </a:avLst>
+            </a:prstGeom>
+            <a:solidFill>
+              <a:srgbClr val="D6DDE0"/>
+            </a:solidFill>
+            <a:ln>
+              <a:noFill/>
+            </a:ln>
+          </p:spPr>
+        </p:sp>
+        <p:sp>
+          <p:nvSpPr>
+            <p:cNvPr id="99" name="Rectangle 99"/>
+            <p:cNvSpPr/>
+            <p:nvPr/>
+          </p:nvSpPr>
+          <p:spPr>
+            <a:xfrm>
+              <a:off x="10001250" y="6515100"/>
+              <a:ext cx="114300" cy="28575"/>
+            </a:xfrm>
+            <a:prstGeom prst="roundRect">
+              <a:avLst>
+                <a:gd name="adj" fmla="val 33333"/>
+              </a:avLst>
+            </a:prstGeom>
+            <a:solidFill>
+              <a:srgbClr val="D6DDE0"/>
+            </a:solidFill>
+            <a:ln>
+              <a:noFill/>
+            </a:ln>
+          </p:spPr>
+        </p:sp>
+        <p:sp>
+          <p:nvSpPr>
+            <p:cNvPr id="100" name="Rectangle 100"/>
+            <p:cNvSpPr/>
+            <p:nvPr/>
+          </p:nvSpPr>
+          <p:spPr>
+            <a:xfrm>
+              <a:off x="10191750" y="6515100"/>
+              <a:ext cx="114300" cy="28575"/>
+            </a:xfrm>
+            <a:prstGeom prst="roundRect">
+              <a:avLst>
+                <a:gd name="adj" fmla="val 33333"/>
+              </a:avLst>
+            </a:prstGeom>
+            <a:solidFill>
+              <a:srgbClr val="D6DDE0"/>
+            </a:solidFill>
+            <a:ln>
+              <a:noFill/>
+            </a:ln>
+          </p:spPr>
+        </p:sp>
+        <p:sp>
+          <p:nvSpPr>
+            <p:cNvPr id="101" name="Rectangle 101"/>
+            <p:cNvSpPr/>
+            <p:nvPr/>
+          </p:nvSpPr>
+          <p:spPr>
+            <a:xfrm>
+              <a:off x="10382250" y="6515100"/>
+              <a:ext cx="114300" cy="28575"/>
+            </a:xfrm>
+            <a:prstGeom prst="roundRect">
+              <a:avLst>
+                <a:gd name="adj" fmla="val 33333"/>
+              </a:avLst>
+            </a:prstGeom>
+            <a:solidFill>
+              <a:srgbClr val="D6DDE0"/>
+            </a:solidFill>
+            <a:ln>
+              <a:noFill/>
+            </a:ln>
+          </p:spPr>
         </p:sp>
       </p:grpSp>
     </p:spTree>
@@ -17143,16 +18922,16 @@
       </p:grpSpPr>
       <p:grpSp>
         <p:nvGrpSpPr>
-          <p:cNvPr id="5" name="headline"/>
+          <p:cNvPr id="6" name="headline"/>
           <p:cNvGrpSpPr/>
           <p:nvPr/>
         </p:nvGrpSpPr>
         <p:grpSpPr>
           <a:xfrm>
             <a:off x="593598" y="257175"/>
-            <a:ext cx="5120640" cy="1082802"/>
+            <a:ext cx="5120640" cy="1085850"/>
             <a:chOff x="593598" y="257175"/>
-            <a:chExt cx="5120640" cy="1082802"/>
+            <a:chExt cx="5120640" cy="1085850"/>
           </a:xfrm>
         </p:grpSpPr>
         <p:sp>
@@ -17267,10 +19046,32 @@
             </a:p>
           </p:txBody>
         </p:sp>
+        <p:sp>
+          <p:nvSpPr>
+            <p:cNvPr id="5" name="Rectangle 5"/>
+            <p:cNvSpPr/>
+            <p:nvPr/>
+          </p:nvSpPr>
+          <p:spPr>
+            <a:xfrm>
+              <a:off x="609600" y="1314450"/>
+              <a:ext cx="762000" cy="28575"/>
+            </a:xfrm>
+            <a:prstGeom prst="rect">
+              <a:avLst/>
+            </a:prstGeom>
+            <a:solidFill>
+              <a:schemeClr val="accent1"/>
+            </a:solidFill>
+            <a:ln>
+              <a:noFill/>
+            </a:ln>
+          </p:spPr>
+        </p:sp>
       </p:grpSp>
       <p:grpSp>
         <p:nvGrpSpPr>
-          <p:cNvPr id="58" name="page-content"/>
+          <p:cNvPr id="61" name="page-content"/>
           <p:cNvGrpSpPr/>
           <p:nvPr/>
         </p:nvGrpSpPr>
@@ -17284,7 +19085,7 @@
         </p:grpSpPr>
         <p:sp>
           <p:nvSpPr>
-            <p:cNvPr id="6" name="Rectangle 6"/>
+            <p:cNvPr id="7" name="Rectangle 7"/>
             <p:cNvSpPr/>
             <p:nvPr/>
           </p:nvSpPr>
@@ -17308,7 +19109,7 @@
         </p:sp>
         <p:sp>
           <p:nvSpPr>
-            <p:cNvPr id="7" name="TextBox 7"/>
+            <p:cNvPr id="8" name="TextBox 8"/>
             <p:cNvSpPr txBox="1"/>
             <p:nvPr>
               <p:custDataLst>
@@ -17352,7 +19153,7 @@
         </p:sp>
         <p:sp>
           <p:nvSpPr>
-            <p:cNvPr id="8" name="TextBox 8"/>
+            <p:cNvPr id="9" name="TextBox 9"/>
             <p:cNvSpPr txBox="1"/>
             <p:nvPr>
               <p:custDataLst>
@@ -17396,7 +19197,7 @@
         </p:sp>
         <p:sp>
           <p:nvSpPr>
-            <p:cNvPr id="9" name="Rectangle 9"/>
+            <p:cNvPr id="10" name="Rectangle 10"/>
             <p:cNvSpPr/>
             <p:nvPr/>
           </p:nvSpPr>
@@ -17420,7 +19221,7 @@
         </p:sp>
         <p:sp>
           <p:nvSpPr>
-            <p:cNvPr id="10" name="Rectangle 10"/>
+            <p:cNvPr id="11" name="Rectangle 11"/>
             <p:cNvSpPr/>
             <p:nvPr/>
           </p:nvSpPr>
@@ -17444,7 +19245,7 @@
         </p:sp>
         <p:sp>
           <p:nvSpPr>
-            <p:cNvPr id="11" name="Rectangle 11"/>
+            <p:cNvPr id="12" name="Rectangle 12"/>
             <p:cNvSpPr/>
             <p:nvPr/>
           </p:nvSpPr>
@@ -17468,7 +19269,7 @@
         </p:sp>
         <p:sp>
           <p:nvSpPr>
-            <p:cNvPr id="12" name="Rectangle 12"/>
+            <p:cNvPr id="13" name="Rectangle 13"/>
             <p:cNvSpPr/>
             <p:nvPr/>
           </p:nvSpPr>
@@ -17492,7 +19293,7 @@
         </p:sp>
         <p:sp>
           <p:nvSpPr>
-            <p:cNvPr id="13" name="Rectangle 13"/>
+            <p:cNvPr id="14" name="Rectangle 14"/>
             <p:cNvSpPr/>
             <p:nvPr/>
           </p:nvSpPr>
@@ -17516,7 +19317,7 @@
         </p:sp>
         <p:sp>
           <p:nvSpPr>
-            <p:cNvPr id="14" name="TextBox 14"/>
+            <p:cNvPr id="15" name="TextBox 15"/>
             <p:cNvSpPr txBox="1"/>
             <p:nvPr>
               <p:custDataLst>
@@ -17560,7 +19361,7 @@
         </p:sp>
         <p:sp>
           <p:nvSpPr>
-            <p:cNvPr id="15" name="Rectangle 15"/>
+            <p:cNvPr id="16" name="Rectangle 16"/>
             <p:cNvSpPr/>
             <p:nvPr/>
           </p:nvSpPr>
@@ -17584,7 +19385,7 @@
         </p:sp>
         <p:sp>
           <p:nvSpPr>
-            <p:cNvPr id="16" name="Rectangle 16"/>
+            <p:cNvPr id="17" name="Rectangle 17"/>
             <p:cNvSpPr/>
             <p:nvPr/>
           </p:nvSpPr>
@@ -17608,7 +19409,7 @@
         </p:sp>
         <p:sp>
           <p:nvSpPr>
-            <p:cNvPr id="17" name="Rectangle 17"/>
+            <p:cNvPr id="18" name="Rectangle 18"/>
             <p:cNvSpPr/>
             <p:nvPr/>
           </p:nvSpPr>
@@ -17632,7 +19433,7 @@
         </p:sp>
         <p:sp>
           <p:nvSpPr>
-            <p:cNvPr id="18" name="Rectangle 18"/>
+            <p:cNvPr id="19" name="Rectangle 19"/>
             <p:cNvSpPr/>
             <p:nvPr/>
           </p:nvSpPr>
@@ -17656,7 +19457,7 @@
         </p:sp>
         <p:sp>
           <p:nvSpPr>
-            <p:cNvPr id="19" name="Rectangle 19"/>
+            <p:cNvPr id="20" name="Rectangle 20"/>
             <p:cNvSpPr/>
             <p:nvPr/>
           </p:nvSpPr>
@@ -17680,7 +19481,7 @@
         </p:sp>
         <p:sp>
           <p:nvSpPr>
-            <p:cNvPr id="20" name="TextBox 20"/>
+            <p:cNvPr id="21" name="TextBox 21"/>
             <p:cNvSpPr txBox="1"/>
             <p:nvPr>
               <p:custDataLst>
@@ -17724,7 +19525,7 @@
         </p:sp>
         <p:sp>
           <p:nvSpPr>
-            <p:cNvPr id="21" name="Rectangle 21"/>
+            <p:cNvPr id="22" name="Rectangle 22"/>
             <p:cNvSpPr/>
             <p:nvPr/>
           </p:nvSpPr>
@@ -17748,7 +19549,7 @@
         </p:sp>
         <p:sp>
           <p:nvSpPr>
-            <p:cNvPr id="22" name="Rectangle 22"/>
+            <p:cNvPr id="23" name="Rectangle 23"/>
             <p:cNvSpPr/>
             <p:nvPr/>
           </p:nvSpPr>
@@ -17772,7 +19573,7 @@
         </p:sp>
         <p:sp>
           <p:nvSpPr>
-            <p:cNvPr id="23" name="Rectangle 23"/>
+            <p:cNvPr id="24" name="Rectangle 24"/>
             <p:cNvSpPr/>
             <p:nvPr/>
           </p:nvSpPr>
@@ -17796,7 +19597,7 @@
         </p:sp>
         <p:sp>
           <p:nvSpPr>
-            <p:cNvPr id="24" name="Rectangle 24"/>
+            <p:cNvPr id="25" name="Rectangle 25"/>
             <p:cNvSpPr/>
             <p:nvPr/>
           </p:nvSpPr>
@@ -17820,7 +19621,7 @@
         </p:sp>
         <p:sp>
           <p:nvSpPr>
-            <p:cNvPr id="25" name="Rectangle 25"/>
+            <p:cNvPr id="26" name="Rectangle 26"/>
             <p:cNvSpPr/>
             <p:nvPr/>
           </p:nvSpPr>
@@ -17844,7 +19645,7 @@
         </p:sp>
         <p:sp>
           <p:nvSpPr>
-            <p:cNvPr id="26" name="Freeform 26"/>
+            <p:cNvPr id="27" name="Freeform 27"/>
             <p:cNvSpPr/>
             <p:nvPr/>
           </p:nvSpPr>
@@ -17886,7 +19687,7 @@
         </p:sp>
         <p:sp>
           <p:nvSpPr>
-            <p:cNvPr id="27" name="Freeform 27"/>
+            <p:cNvPr id="28" name="Freeform 28"/>
             <p:cNvSpPr/>
             <p:nvPr/>
           </p:nvSpPr>
@@ -17925,7 +19726,7 @@
         </p:sp>
         <p:sp>
           <p:nvSpPr>
-            <p:cNvPr id="28" name="Freeform 28"/>
+            <p:cNvPr id="29" name="Freeform 29"/>
             <p:cNvSpPr/>
             <p:nvPr/>
           </p:nvSpPr>
@@ -17964,7 +19765,7 @@
         </p:sp>
         <p:sp>
           <p:nvSpPr>
-            <p:cNvPr id="29" name="Freeform 29"/>
+            <p:cNvPr id="30" name="Freeform 30"/>
             <p:cNvSpPr/>
             <p:nvPr/>
           </p:nvSpPr>
@@ -18003,7 +19804,7 @@
         </p:sp>
         <p:sp>
           <p:nvSpPr>
-            <p:cNvPr id="30" name="Rectangle 30"/>
+            <p:cNvPr id="31" name="Rectangle 31"/>
             <p:cNvSpPr/>
             <p:nvPr/>
           </p:nvSpPr>
@@ -18018,7 +19819,31 @@
               </a:avLst>
             </a:prstGeom>
             <a:solidFill>
-              <a:schemeClr val="accent3"/>
+              <a:schemeClr val="lt1"/>
+            </a:solidFill>
+            <a:ln w="9525">
+              <a:solidFill>
+                <a:srgbClr val="D6DDE0"/>
+              </a:solidFill>
+            </a:ln>
+          </p:spPr>
+        </p:sp>
+        <p:sp>
+          <p:nvSpPr>
+            <p:cNvPr id="32" name="Rectangle 32"/>
+            <p:cNvSpPr/>
+            <p:nvPr/>
+          </p:nvSpPr>
+          <p:spPr>
+            <a:xfrm>
+              <a:off x="3524250" y="1866900"/>
+              <a:ext cx="38100" cy="1409700"/>
+            </a:xfrm>
+            <a:prstGeom prst="rect">
+              <a:avLst/>
+            </a:prstGeom>
+            <a:solidFill>
+              <a:schemeClr val="accent1"/>
             </a:solidFill>
             <a:ln>
               <a:noFill/>
@@ -18027,7 +19852,7 @@
         </p:sp>
         <p:grpSp>
           <p:nvGrpSpPr>
-            <p:cNvPr id="34" name="Group 34"/>
+            <p:cNvPr id="36" name="Group 36"/>
             <p:cNvGrpSpPr/>
             <p:nvPr/>
           </p:nvGrpSpPr>
@@ -18041,7 +19866,7 @@
           </p:grpSpPr>
           <p:sp>
             <p:nvSpPr>
-              <p:cNvPr id="31" name="Rectangle 31"/>
+              <p:cNvPr id="33" name="Rectangle 33"/>
               <p:cNvSpPr/>
               <p:nvPr/>
             </p:nvSpPr>
@@ -18068,7 +19893,7 @@
           </p:sp>
           <p:sp>
             <p:nvSpPr>
-              <p:cNvPr id="32" name="Rectangle 32"/>
+              <p:cNvPr id="34" name="Rectangle 34"/>
               <p:cNvSpPr/>
               <p:nvPr/>
             </p:nvSpPr>
@@ -18095,7 +19920,7 @@
           </p:sp>
           <p:sp>
             <p:nvSpPr>
-              <p:cNvPr id="33" name="Freeform 33"/>
+              <p:cNvPr id="35" name="Freeform 35"/>
               <p:cNvSpPr/>
               <p:nvPr/>
             </p:nvSpPr>
@@ -18199,7 +20024,7 @@
         </p:grpSp>
         <p:sp>
           <p:nvSpPr>
-            <p:cNvPr id="35" name="TextBox 35"/>
+            <p:cNvPr id="37" name="TextBox 37"/>
             <p:cNvSpPr txBox="1"/>
             <p:nvPr>
               <p:custDataLst>
@@ -18243,7 +20068,7 @@
         </p:sp>
         <p:sp>
           <p:nvSpPr>
-            <p:cNvPr id="36" name="TextBox 36"/>
+            <p:cNvPr id="38" name="TextBox 38"/>
             <p:cNvSpPr txBox="1"/>
             <p:nvPr>
               <p:custDataLst>
@@ -18287,7 +20112,7 @@
         </p:sp>
         <p:sp>
           <p:nvSpPr>
-            <p:cNvPr id="37" name="TextBox 37"/>
+            <p:cNvPr id="39" name="TextBox 39"/>
             <p:cNvSpPr txBox="1"/>
             <p:nvPr>
               <p:custDataLst>
@@ -18331,7 +20156,7 @@
         </p:sp>
         <p:sp>
           <p:nvSpPr>
-            <p:cNvPr id="38" name="Rectangle 38"/>
+            <p:cNvPr id="40" name="Rectangle 40"/>
             <p:cNvSpPr/>
             <p:nvPr/>
           </p:nvSpPr>
@@ -18346,7 +20171,31 @@
               </a:avLst>
             </a:prstGeom>
             <a:solidFill>
-              <a:schemeClr val="accent3"/>
+              <a:schemeClr val="lt1"/>
+            </a:solidFill>
+            <a:ln w="9525">
+              <a:solidFill>
+                <a:srgbClr val="D6DDE0"/>
+              </a:solidFill>
+            </a:ln>
+          </p:spPr>
+        </p:sp>
+        <p:sp>
+          <p:nvSpPr>
+            <p:cNvPr id="41" name="Rectangle 41"/>
+            <p:cNvSpPr/>
+            <p:nvPr/>
+          </p:nvSpPr>
+          <p:spPr>
+            <a:xfrm>
+              <a:off x="3524250" y="3629025"/>
+              <a:ext cx="38100" cy="1409700"/>
+            </a:xfrm>
+            <a:prstGeom prst="rect">
+              <a:avLst/>
+            </a:prstGeom>
+            <a:solidFill>
+              <a:schemeClr val="accent1"/>
             </a:solidFill>
             <a:ln>
               <a:noFill/>
@@ -18355,7 +20204,7 @@
         </p:sp>
         <p:grpSp>
           <p:nvGrpSpPr>
-            <p:cNvPr id="42" name="Group 42"/>
+            <p:cNvPr id="45" name="Group 45"/>
             <p:cNvGrpSpPr/>
             <p:nvPr/>
           </p:nvGrpSpPr>
@@ -18369,7 +20218,7 @@
           </p:grpSpPr>
           <p:sp>
             <p:nvSpPr>
-              <p:cNvPr id="39" name="Rectangle 39"/>
+              <p:cNvPr id="42" name="Rectangle 42"/>
               <p:cNvSpPr/>
               <p:nvPr/>
             </p:nvSpPr>
@@ -18395,7 +20244,7 @@
           </p:sp>
           <p:sp>
             <p:nvSpPr>
-              <p:cNvPr id="40" name="Line 40"/>
+              <p:cNvPr id="43" name="Line 43"/>
               <p:cNvSpPr/>
               <p:nvPr/>
             </p:nvSpPr>
@@ -18431,7 +20280,7 @@
           </p:sp>
           <p:sp>
             <p:nvSpPr>
-              <p:cNvPr id="41" name="Line 41"/>
+              <p:cNvPr id="44" name="Line 44"/>
               <p:cNvSpPr/>
               <p:nvPr/>
             </p:nvSpPr>
@@ -18468,7 +20317,7 @@
         </p:grpSp>
         <p:sp>
           <p:nvSpPr>
-            <p:cNvPr id="43" name="TextBox 43"/>
+            <p:cNvPr id="46" name="TextBox 46"/>
             <p:cNvSpPr txBox="1"/>
             <p:nvPr>
               <p:custDataLst>
@@ -18512,7 +20361,7 @@
         </p:sp>
         <p:sp>
           <p:nvSpPr>
-            <p:cNvPr id="44" name="TextBox 44"/>
+            <p:cNvPr id="47" name="TextBox 47"/>
             <p:cNvSpPr txBox="1"/>
             <p:nvPr>
               <p:custDataLst>
@@ -18556,7 +20405,7 @@
         </p:sp>
         <p:sp>
           <p:nvSpPr>
-            <p:cNvPr id="45" name="TextBox 45"/>
+            <p:cNvPr id="48" name="TextBox 48"/>
             <p:cNvSpPr txBox="1"/>
             <p:nvPr>
               <p:custDataLst>
@@ -18600,7 +20449,7 @@
         </p:sp>
         <p:sp>
           <p:nvSpPr>
-            <p:cNvPr id="46" name="Freeform 46"/>
+            <p:cNvPr id="49" name="Freeform 49"/>
             <p:cNvSpPr/>
             <p:nvPr/>
           </p:nvSpPr>
@@ -18642,7 +20491,7 @@
         </p:sp>
         <p:sp>
           <p:nvSpPr>
-            <p:cNvPr id="47" name="Freeform 47"/>
+            <p:cNvPr id="50" name="Freeform 50"/>
             <p:cNvSpPr/>
             <p:nvPr/>
           </p:nvSpPr>
@@ -18681,7 +20530,7 @@
         </p:sp>
         <p:sp>
           <p:nvSpPr>
-            <p:cNvPr id="48" name="Freeform 48"/>
+            <p:cNvPr id="51" name="Freeform 51"/>
             <p:cNvSpPr/>
             <p:nvPr/>
           </p:nvSpPr>
@@ -18720,7 +20569,7 @@
         </p:sp>
         <p:sp>
           <p:nvSpPr>
-            <p:cNvPr id="49" name="Freeform 49"/>
+            <p:cNvPr id="52" name="Freeform 52"/>
             <p:cNvSpPr/>
             <p:nvPr/>
           </p:nvSpPr>
@@ -18759,7 +20608,7 @@
         </p:sp>
         <p:sp>
           <p:nvSpPr>
-            <p:cNvPr id="50" name="Rectangle 50"/>
+            <p:cNvPr id="53" name="Rectangle 53"/>
             <p:cNvSpPr/>
             <p:nvPr/>
           </p:nvSpPr>
@@ -18783,7 +20632,7 @@
         </p:sp>
         <p:sp>
           <p:nvSpPr>
-            <p:cNvPr id="51" name="TextBox 51"/>
+            <p:cNvPr id="54" name="TextBox 54"/>
             <p:cNvSpPr txBox="1"/>
             <p:nvPr>
               <p:custDataLst>
@@ -18838,7 +20687,7 @@
         </p:sp>
         <p:sp>
           <p:nvSpPr>
-            <p:cNvPr id="52" name="TextBox 52"/>
+            <p:cNvPr id="55" name="TextBox 55"/>
             <p:cNvSpPr txBox="1"/>
             <p:nvPr>
               <p:custDataLst>
@@ -18882,7 +20731,7 @@
         </p:sp>
         <p:sp>
           <p:nvSpPr>
-            <p:cNvPr id="53" name="TextBox 53"/>
+            <p:cNvPr id="56" name="TextBox 56"/>
             <p:cNvSpPr txBox="1"/>
             <p:nvPr>
               <p:custDataLst>
@@ -18926,7 +20775,7 @@
         </p:sp>
         <p:sp>
           <p:nvSpPr>
-            <p:cNvPr id="54" name="Freeform 54"/>
+            <p:cNvPr id="57" name="Freeform 57"/>
             <p:cNvSpPr/>
             <p:nvPr/>
           </p:nvSpPr>
@@ -18962,7 +20811,7 @@
         </p:sp>
         <p:sp>
           <p:nvSpPr>
-            <p:cNvPr id="55" name="Freeform 55"/>
+            <p:cNvPr id="58" name="Freeform 58"/>
             <p:cNvSpPr/>
             <p:nvPr/>
           </p:nvSpPr>
@@ -19001,7 +20850,7 @@
         </p:sp>
         <p:sp>
           <p:nvSpPr>
-            <p:cNvPr id="56" name="Rectangle 56"/>
+            <p:cNvPr id="59" name="Rectangle 59"/>
             <p:cNvSpPr/>
             <p:nvPr/>
           </p:nvSpPr>
@@ -19025,7 +20874,7 @@
         </p:sp>
         <p:sp>
           <p:nvSpPr>
-            <p:cNvPr id="57" name="TextBox 57"/>
+            <p:cNvPr id="60" name="TextBox 60"/>
             <p:cNvSpPr txBox="1"/>
             <p:nvPr>
               <p:custDataLst>
@@ -19070,7 +20919,7 @@
       </p:grpSp>
       <p:grpSp>
         <p:nvGrpSpPr>
-          <p:cNvPr id="62" name="footer"/>
+          <p:cNvPr id="74" name="footer"/>
           <p:cNvGrpSpPr/>
           <p:nvPr/>
         </p:nvGrpSpPr>
@@ -19084,7 +20933,7 @@
         </p:grpSpPr>
         <p:sp>
           <p:nvSpPr>
-            <p:cNvPr id="59" name="Line 59"/>
+            <p:cNvPr id="62" name="Line 62"/>
             <p:cNvSpPr/>
             <p:nvPr/>
           </p:nvSpPr>
@@ -19120,7 +20969,7 @@
         </p:sp>
         <p:sp>
           <p:nvSpPr>
-            <p:cNvPr id="60" name="TextBox 60"/>
+            <p:cNvPr id="63" name="TextBox 63"/>
             <p:cNvSpPr txBox="1"/>
             <p:nvPr>
               <p:custDataLst>
@@ -19175,7 +21024,7 @@
         </p:sp>
         <p:sp>
           <p:nvSpPr>
-            <p:cNvPr id="61" name="TextBox 61"/>
+            <p:cNvPr id="64" name="TextBox 64"/>
             <p:cNvSpPr txBox="1"/>
             <p:nvPr>
               <p:custDataLst>
@@ -19216,6 +21065,222 @@
               </a:r>
             </a:p>
           </p:txBody>
+        </p:sp>
+        <p:sp>
+          <p:nvSpPr>
+            <p:cNvPr id="65" name="Rectangle 65"/>
+            <p:cNvSpPr/>
+            <p:nvPr/>
+          </p:nvSpPr>
+          <p:spPr>
+            <a:xfrm>
+              <a:off x="8858250" y="6515100"/>
+              <a:ext cx="114300" cy="28575"/>
+            </a:xfrm>
+            <a:prstGeom prst="roundRect">
+              <a:avLst>
+                <a:gd name="adj" fmla="val 33333"/>
+              </a:avLst>
+            </a:prstGeom>
+            <a:solidFill>
+              <a:srgbClr val="D6DDE0"/>
+            </a:solidFill>
+            <a:ln>
+              <a:noFill/>
+            </a:ln>
+          </p:spPr>
+        </p:sp>
+        <p:sp>
+          <p:nvSpPr>
+            <p:cNvPr id="66" name="Rectangle 66"/>
+            <p:cNvSpPr/>
+            <p:nvPr/>
+          </p:nvSpPr>
+          <p:spPr>
+            <a:xfrm>
+              <a:off x="9048750" y="6515100"/>
+              <a:ext cx="114300" cy="28575"/>
+            </a:xfrm>
+            <a:prstGeom prst="roundRect">
+              <a:avLst>
+                <a:gd name="adj" fmla="val 33333"/>
+              </a:avLst>
+            </a:prstGeom>
+            <a:solidFill>
+              <a:srgbClr val="D6DDE0"/>
+            </a:solidFill>
+            <a:ln>
+              <a:noFill/>
+            </a:ln>
+          </p:spPr>
+        </p:sp>
+        <p:sp>
+          <p:nvSpPr>
+            <p:cNvPr id="67" name="Rectangle 67"/>
+            <p:cNvSpPr/>
+            <p:nvPr/>
+          </p:nvSpPr>
+          <p:spPr>
+            <a:xfrm>
+              <a:off x="9239250" y="6515100"/>
+              <a:ext cx="114300" cy="28575"/>
+            </a:xfrm>
+            <a:prstGeom prst="roundRect">
+              <a:avLst>
+                <a:gd name="adj" fmla="val 33333"/>
+              </a:avLst>
+            </a:prstGeom>
+            <a:solidFill>
+              <a:srgbClr val="D6DDE0"/>
+            </a:solidFill>
+            <a:ln>
+              <a:noFill/>
+            </a:ln>
+          </p:spPr>
+        </p:sp>
+        <p:sp>
+          <p:nvSpPr>
+            <p:cNvPr id="68" name="Rectangle 68"/>
+            <p:cNvSpPr/>
+            <p:nvPr/>
+          </p:nvSpPr>
+          <p:spPr>
+            <a:xfrm>
+              <a:off x="9429750" y="6515100"/>
+              <a:ext cx="114300" cy="28575"/>
+            </a:xfrm>
+            <a:prstGeom prst="roundRect">
+              <a:avLst>
+                <a:gd name="adj" fmla="val 33333"/>
+              </a:avLst>
+            </a:prstGeom>
+            <a:solidFill>
+              <a:schemeClr val="accent2"/>
+            </a:solidFill>
+            <a:ln>
+              <a:noFill/>
+            </a:ln>
+          </p:spPr>
+        </p:sp>
+        <p:sp>
+          <p:nvSpPr>
+            <p:cNvPr id="69" name="Rectangle 69"/>
+            <p:cNvSpPr/>
+            <p:nvPr/>
+          </p:nvSpPr>
+          <p:spPr>
+            <a:xfrm>
+              <a:off x="9620250" y="6515100"/>
+              <a:ext cx="114300" cy="28575"/>
+            </a:xfrm>
+            <a:prstGeom prst="roundRect">
+              <a:avLst>
+                <a:gd name="adj" fmla="val 33333"/>
+              </a:avLst>
+            </a:prstGeom>
+            <a:solidFill>
+              <a:srgbClr val="D6DDE0"/>
+            </a:solidFill>
+            <a:ln>
+              <a:noFill/>
+            </a:ln>
+          </p:spPr>
+        </p:sp>
+        <p:sp>
+          <p:nvSpPr>
+            <p:cNvPr id="70" name="Rectangle 70"/>
+            <p:cNvSpPr/>
+            <p:nvPr/>
+          </p:nvSpPr>
+          <p:spPr>
+            <a:xfrm>
+              <a:off x="9810750" y="6515100"/>
+              <a:ext cx="114300" cy="28575"/>
+            </a:xfrm>
+            <a:prstGeom prst="roundRect">
+              <a:avLst>
+                <a:gd name="adj" fmla="val 33333"/>
+              </a:avLst>
+            </a:prstGeom>
+            <a:solidFill>
+              <a:srgbClr val="D6DDE0"/>
+            </a:solidFill>
+            <a:ln>
+              <a:noFill/>
+            </a:ln>
+          </p:spPr>
+        </p:sp>
+        <p:sp>
+          <p:nvSpPr>
+            <p:cNvPr id="71" name="Rectangle 71"/>
+            <p:cNvSpPr/>
+            <p:nvPr/>
+          </p:nvSpPr>
+          <p:spPr>
+            <a:xfrm>
+              <a:off x="10001250" y="6515100"/>
+              <a:ext cx="114300" cy="28575"/>
+            </a:xfrm>
+            <a:prstGeom prst="roundRect">
+              <a:avLst>
+                <a:gd name="adj" fmla="val 33333"/>
+              </a:avLst>
+            </a:prstGeom>
+            <a:solidFill>
+              <a:srgbClr val="D6DDE0"/>
+            </a:solidFill>
+            <a:ln>
+              <a:noFill/>
+            </a:ln>
+          </p:spPr>
+        </p:sp>
+        <p:sp>
+          <p:nvSpPr>
+            <p:cNvPr id="72" name="Rectangle 72"/>
+            <p:cNvSpPr/>
+            <p:nvPr/>
+          </p:nvSpPr>
+          <p:spPr>
+            <a:xfrm>
+              <a:off x="10191750" y="6515100"/>
+              <a:ext cx="114300" cy="28575"/>
+            </a:xfrm>
+            <a:prstGeom prst="roundRect">
+              <a:avLst>
+                <a:gd name="adj" fmla="val 33333"/>
+              </a:avLst>
+            </a:prstGeom>
+            <a:solidFill>
+              <a:srgbClr val="D6DDE0"/>
+            </a:solidFill>
+            <a:ln>
+              <a:noFill/>
+            </a:ln>
+          </p:spPr>
+        </p:sp>
+        <p:sp>
+          <p:nvSpPr>
+            <p:cNvPr id="73" name="Rectangle 73"/>
+            <p:cNvSpPr/>
+            <p:nvPr/>
+          </p:nvSpPr>
+          <p:spPr>
+            <a:xfrm>
+              <a:off x="10382250" y="6515100"/>
+              <a:ext cx="114300" cy="28575"/>
+            </a:xfrm>
+            <a:prstGeom prst="roundRect">
+              <a:avLst>
+                <a:gd name="adj" fmla="val 33333"/>
+              </a:avLst>
+            </a:prstGeom>
+            <a:solidFill>
+              <a:srgbClr val="D6DDE0"/>
+            </a:solidFill>
+            <a:ln>
+              <a:noFill/>
+            </a:ln>
+          </p:spPr>
         </p:sp>
       </p:grpSp>
     </p:spTree>
@@ -19253,16 +21318,16 @@
       </p:grpSpPr>
       <p:grpSp>
         <p:nvGrpSpPr>
-          <p:cNvPr id="5" name="headline"/>
+          <p:cNvPr id="6" name="headline"/>
           <p:cNvGrpSpPr/>
           <p:nvPr/>
         </p:nvGrpSpPr>
         <p:grpSpPr>
           <a:xfrm>
             <a:off x="593598" y="257175"/>
-            <a:ext cx="5968746" cy="1082802"/>
+            <a:ext cx="5968746" cy="1085850"/>
             <a:chOff x="593598" y="257175"/>
-            <a:chExt cx="5968746" cy="1082802"/>
+            <a:chExt cx="5968746" cy="1085850"/>
           </a:xfrm>
         </p:grpSpPr>
         <p:sp>
@@ -19377,10 +21442,32 @@
             </a:p>
           </p:txBody>
         </p:sp>
+        <p:sp>
+          <p:nvSpPr>
+            <p:cNvPr id="5" name="Rectangle 5"/>
+            <p:cNvSpPr/>
+            <p:nvPr/>
+          </p:nvSpPr>
+          <p:spPr>
+            <a:xfrm>
+              <a:off x="609600" y="1314450"/>
+              <a:ext cx="762000" cy="28575"/>
+            </a:xfrm>
+            <a:prstGeom prst="rect">
+              <a:avLst/>
+            </a:prstGeom>
+            <a:solidFill>
+              <a:schemeClr val="accent1"/>
+            </a:solidFill>
+            <a:ln>
+              <a:noFill/>
+            </a:ln>
+          </p:spPr>
+        </p:sp>
       </p:grpSp>
       <p:grpSp>
         <p:nvGrpSpPr>
-          <p:cNvPr id="85" name="page-content"/>
+          <p:cNvPr id="86" name="page-content"/>
           <p:cNvGrpSpPr/>
           <p:nvPr/>
         </p:nvGrpSpPr>
@@ -19394,7 +21481,7 @@
         </p:grpSpPr>
         <p:sp>
           <p:nvSpPr>
-            <p:cNvPr id="6" name="TextBox 6"/>
+            <p:cNvPr id="7" name="TextBox 7"/>
             <p:cNvSpPr txBox="1"/>
             <p:nvPr>
               <p:custDataLst>
@@ -19438,7 +21525,7 @@
         </p:sp>
         <p:sp>
           <p:nvSpPr>
-            <p:cNvPr id="7" name="Rectangle 7"/>
+            <p:cNvPr id="8" name="Rectangle 8"/>
             <p:cNvSpPr/>
             <p:nvPr/>
           </p:nvSpPr>
@@ -19462,7 +21549,7 @@
         </p:sp>
         <p:grpSp>
           <p:nvGrpSpPr>
-            <p:cNvPr id="18" name="Group 18"/>
+            <p:cNvPr id="19" name="Group 19"/>
             <p:cNvGrpSpPr/>
             <p:nvPr/>
           </p:nvGrpSpPr>
@@ -19476,7 +21563,7 @@
           </p:grpSpPr>
           <p:sp>
             <p:nvSpPr>
-              <p:cNvPr id="8" name="Line 8"/>
+              <p:cNvPr id="9" name="Line 9"/>
               <p:cNvSpPr/>
               <p:nvPr/>
             </p:nvSpPr>
@@ -19512,7 +21599,7 @@
           </p:sp>
           <p:sp>
             <p:nvSpPr>
-              <p:cNvPr id="9" name="Line 9"/>
+              <p:cNvPr id="10" name="Line 10"/>
               <p:cNvSpPr/>
               <p:nvPr/>
             </p:nvSpPr>
@@ -19548,7 +21635,7 @@
           </p:sp>
           <p:sp>
             <p:nvSpPr>
-              <p:cNvPr id="10" name="Line 10"/>
+              <p:cNvPr id="11" name="Line 11"/>
               <p:cNvSpPr/>
               <p:nvPr/>
             </p:nvSpPr>
@@ -19584,7 +21671,7 @@
           </p:sp>
           <p:sp>
             <p:nvSpPr>
-              <p:cNvPr id="11" name="Line 11"/>
+              <p:cNvPr id="12" name="Line 12"/>
               <p:cNvSpPr/>
               <p:nvPr/>
             </p:nvSpPr>
@@ -19620,7 +21707,7 @@
           </p:sp>
           <p:sp>
             <p:nvSpPr>
-              <p:cNvPr id="12" name="Line 12"/>
+              <p:cNvPr id="13" name="Line 13"/>
               <p:cNvSpPr/>
               <p:nvPr/>
             </p:nvSpPr>
@@ -19656,7 +21743,7 @@
           </p:sp>
           <p:sp>
             <p:nvSpPr>
-              <p:cNvPr id="13" name="Line 13"/>
+              <p:cNvPr id="14" name="Line 14"/>
               <p:cNvSpPr/>
               <p:nvPr/>
             </p:nvSpPr>
@@ -19692,7 +21779,7 @@
           </p:sp>
           <p:sp>
             <p:nvSpPr>
-              <p:cNvPr id="14" name="Rectangle 14"/>
+              <p:cNvPr id="15" name="Rectangle 15"/>
               <p:cNvSpPr/>
               <p:nvPr/>
             </p:nvSpPr>
@@ -19716,7 +21803,7 @@
           </p:sp>
           <p:sp>
             <p:nvSpPr>
-              <p:cNvPr id="15" name="Rectangle 15"/>
+              <p:cNvPr id="16" name="Rectangle 16"/>
               <p:cNvSpPr/>
               <p:nvPr/>
             </p:nvSpPr>
@@ -19740,7 +21827,7 @@
           </p:sp>
           <p:sp>
             <p:nvSpPr>
-              <p:cNvPr id="16" name="Rectangle 16"/>
+              <p:cNvPr id="17" name="Rectangle 17"/>
               <p:cNvSpPr/>
               <p:nvPr/>
             </p:nvSpPr>
@@ -19764,7 +21851,7 @@
           </p:sp>
           <p:sp>
             <p:nvSpPr>
-              <p:cNvPr id="17" name="Rectangle 17"/>
+              <p:cNvPr id="18" name="Rectangle 18"/>
               <p:cNvSpPr/>
               <p:nvPr/>
             </p:nvSpPr>
@@ -19789,7 +21876,7 @@
         </p:grpSp>
         <p:sp>
           <p:nvSpPr>
-            <p:cNvPr id="19" name="TextBox 19"/>
+            <p:cNvPr id="20" name="TextBox 20"/>
             <p:cNvSpPr txBox="1"/>
             <p:nvPr>
               <p:custDataLst>
@@ -19833,7 +21920,7 @@
         </p:sp>
         <p:sp>
           <p:nvSpPr>
-            <p:cNvPr id="20" name="TextBox 20"/>
+            <p:cNvPr id="21" name="TextBox 21"/>
             <p:cNvSpPr txBox="1"/>
             <p:nvPr>
               <p:custDataLst>
@@ -19877,7 +21964,7 @@
         </p:sp>
         <p:sp>
           <p:nvSpPr>
-            <p:cNvPr id="21" name="Rectangle 21"/>
+            <p:cNvPr id="22" name="Rectangle 22"/>
             <p:cNvSpPr/>
             <p:nvPr/>
           </p:nvSpPr>
@@ -19901,7 +21988,7 @@
         </p:sp>
         <p:grpSp>
           <p:nvGrpSpPr>
-            <p:cNvPr id="32" name="Group 32"/>
+            <p:cNvPr id="33" name="Group 33"/>
             <p:cNvGrpSpPr/>
             <p:nvPr/>
           </p:nvGrpSpPr>
@@ -19915,7 +22002,7 @@
           </p:grpSpPr>
           <p:sp>
             <p:nvSpPr>
-              <p:cNvPr id="22" name="Line 22"/>
+              <p:cNvPr id="23" name="Line 23"/>
               <p:cNvSpPr/>
               <p:nvPr/>
             </p:nvSpPr>
@@ -19951,7 +22038,7 @@
           </p:sp>
           <p:sp>
             <p:nvSpPr>
-              <p:cNvPr id="23" name="Line 23"/>
+              <p:cNvPr id="24" name="Line 24"/>
               <p:cNvSpPr/>
               <p:nvPr/>
             </p:nvSpPr>
@@ -19987,7 +22074,7 @@
           </p:sp>
           <p:sp>
             <p:nvSpPr>
-              <p:cNvPr id="24" name="Line 24"/>
+              <p:cNvPr id="25" name="Line 25"/>
               <p:cNvSpPr/>
               <p:nvPr/>
             </p:nvSpPr>
@@ -20023,7 +22110,7 @@
           </p:sp>
           <p:sp>
             <p:nvSpPr>
-              <p:cNvPr id="25" name="Line 25"/>
+              <p:cNvPr id="26" name="Line 26"/>
               <p:cNvSpPr/>
               <p:nvPr/>
             </p:nvSpPr>
@@ -20059,7 +22146,7 @@
           </p:sp>
           <p:sp>
             <p:nvSpPr>
-              <p:cNvPr id="26" name="Line 26"/>
+              <p:cNvPr id="27" name="Line 27"/>
               <p:cNvSpPr/>
               <p:nvPr/>
             </p:nvSpPr>
@@ -20095,7 +22182,7 @@
           </p:sp>
           <p:sp>
             <p:nvSpPr>
-              <p:cNvPr id="27" name="Line 27"/>
+              <p:cNvPr id="28" name="Line 28"/>
               <p:cNvSpPr/>
               <p:nvPr/>
             </p:nvSpPr>
@@ -20131,7 +22218,7 @@
           </p:sp>
           <p:sp>
             <p:nvSpPr>
-              <p:cNvPr id="28" name="Rectangle 28"/>
+              <p:cNvPr id="29" name="Rectangle 29"/>
               <p:cNvSpPr/>
               <p:nvPr/>
             </p:nvSpPr>
@@ -20155,7 +22242,7 @@
           </p:sp>
           <p:sp>
             <p:nvSpPr>
-              <p:cNvPr id="29" name="Rectangle 29"/>
+              <p:cNvPr id="30" name="Rectangle 30"/>
               <p:cNvSpPr/>
               <p:nvPr/>
             </p:nvSpPr>
@@ -20179,7 +22266,7 @@
           </p:sp>
           <p:sp>
             <p:nvSpPr>
-              <p:cNvPr id="30" name="Rectangle 30"/>
+              <p:cNvPr id="31" name="Rectangle 31"/>
               <p:cNvSpPr/>
               <p:nvPr/>
             </p:nvSpPr>
@@ -20203,7 +22290,7 @@
           </p:sp>
           <p:sp>
             <p:nvSpPr>
-              <p:cNvPr id="31" name="Rectangle 31"/>
+              <p:cNvPr id="32" name="Rectangle 32"/>
               <p:cNvSpPr/>
               <p:nvPr/>
             </p:nvSpPr>
@@ -20228,7 +22315,7 @@
         </p:grpSp>
         <p:sp>
           <p:nvSpPr>
-            <p:cNvPr id="33" name="TextBox 33"/>
+            <p:cNvPr id="34" name="TextBox 34"/>
             <p:cNvSpPr txBox="1"/>
             <p:nvPr>
               <p:custDataLst>
@@ -20272,7 +22359,7 @@
         </p:sp>
         <p:sp>
           <p:nvSpPr>
-            <p:cNvPr id="34" name="Freeform 34"/>
+            <p:cNvPr id="35" name="Freeform 35"/>
             <p:cNvSpPr/>
             <p:nvPr/>
           </p:nvSpPr>
@@ -20317,7 +22404,7 @@
         </p:sp>
         <p:sp>
           <p:nvSpPr>
-            <p:cNvPr id="35" name="Freeform 35"/>
+            <p:cNvPr id="36" name="Freeform 36"/>
             <p:cNvSpPr/>
             <p:nvPr/>
           </p:nvSpPr>
@@ -20356,7 +22443,7 @@
         </p:sp>
         <p:sp>
           <p:nvSpPr>
-            <p:cNvPr id="36" name="Freeform 36"/>
+            <p:cNvPr id="37" name="Freeform 37"/>
             <p:cNvSpPr/>
             <p:nvPr/>
           </p:nvSpPr>
@@ -20392,7 +22479,7 @@
         </p:sp>
         <p:sp>
           <p:nvSpPr>
-            <p:cNvPr id="37" name="Freeform 37"/>
+            <p:cNvPr id="38" name="Freeform 38"/>
             <p:cNvSpPr/>
             <p:nvPr/>
           </p:nvSpPr>
@@ -20431,7 +22518,7 @@
         </p:sp>
         <p:sp>
           <p:nvSpPr>
-            <p:cNvPr id="38" name="Rectangle 38"/>
+            <p:cNvPr id="39" name="Rectangle 39"/>
             <p:cNvSpPr/>
             <p:nvPr/>
           </p:nvSpPr>
@@ -20455,7 +22542,7 @@
         </p:sp>
         <p:sp>
           <p:nvSpPr>
-            <p:cNvPr id="39" name="TextBox 39"/>
+            <p:cNvPr id="40" name="TextBox 40"/>
             <p:cNvSpPr txBox="1"/>
             <p:nvPr>
               <p:custDataLst>
@@ -20499,7 +22586,7 @@
         </p:sp>
         <p:sp>
           <p:nvSpPr>
-            <p:cNvPr id="40" name="TextBox 40"/>
+            <p:cNvPr id="41" name="TextBox 41"/>
             <p:cNvSpPr txBox="1"/>
             <p:nvPr>
               <p:custDataLst>
@@ -20554,7 +22641,7 @@
         </p:sp>
         <p:sp>
           <p:nvSpPr>
-            <p:cNvPr id="41" name="Freeform 41"/>
+            <p:cNvPr id="42" name="Freeform 42"/>
             <p:cNvSpPr/>
             <p:nvPr/>
           </p:nvSpPr>
@@ -20596,7 +22683,7 @@
         </p:sp>
         <p:sp>
           <p:nvSpPr>
-            <p:cNvPr id="42" name="Freeform 42"/>
+            <p:cNvPr id="43" name="Freeform 43"/>
             <p:cNvSpPr/>
             <p:nvPr/>
           </p:nvSpPr>
@@ -20635,7 +22722,7 @@
         </p:sp>
         <p:sp>
           <p:nvSpPr>
-            <p:cNvPr id="43" name="TextBox 43"/>
+            <p:cNvPr id="44" name="TextBox 44"/>
             <p:cNvSpPr txBox="1"/>
             <p:nvPr>
               <p:custDataLst>
@@ -20679,7 +22766,7 @@
         </p:sp>
         <p:grpSp>
           <p:nvGrpSpPr>
-            <p:cNvPr id="49" name="Group 49"/>
+            <p:cNvPr id="50" name="Group 50"/>
             <p:cNvGrpSpPr/>
             <p:nvPr/>
           </p:nvGrpSpPr>
@@ -20693,7 +22780,7 @@
           </p:grpSpPr>
           <p:sp>
             <p:nvSpPr>
-              <p:cNvPr id="44" name="Freeform 44"/>
+              <p:cNvPr id="45" name="Freeform 45"/>
               <p:cNvSpPr/>
               <p:nvPr/>
             </p:nvSpPr>
@@ -20740,7 +22827,7 @@
           </p:sp>
           <p:sp>
             <p:nvSpPr>
-              <p:cNvPr id="45" name="Ellipse 45"/>
+              <p:cNvPr id="46" name="Ellipse 46"/>
               <p:cNvSpPr/>
               <p:nvPr/>
             </p:nvSpPr>
@@ -20765,7 +22852,7 @@
           </p:sp>
           <p:sp>
             <p:nvSpPr>
-              <p:cNvPr id="46" name="Freeform 46"/>
+              <p:cNvPr id="47" name="Freeform 47"/>
               <p:cNvSpPr/>
               <p:nvPr/>
             </p:nvSpPr>
@@ -20804,7 +22891,7 @@
           </p:sp>
           <p:sp>
             <p:nvSpPr>
-              <p:cNvPr id="47" name="Ellipse 47"/>
+              <p:cNvPr id="48" name="Ellipse 48"/>
               <p:cNvSpPr/>
               <p:nvPr/>
             </p:nvSpPr>
@@ -20829,7 +22916,7 @@
           </p:sp>
           <p:sp>
             <p:nvSpPr>
-              <p:cNvPr id="48" name="Freeform 48"/>
+              <p:cNvPr id="49" name="Freeform 49"/>
               <p:cNvSpPr/>
               <p:nvPr/>
             </p:nvSpPr>
@@ -20869,7 +22956,7 @@
         </p:grpSp>
         <p:sp>
           <p:nvSpPr>
-            <p:cNvPr id="50" name="TextBox 50"/>
+            <p:cNvPr id="51" name="TextBox 51"/>
             <p:cNvSpPr txBox="1"/>
             <p:nvPr>
               <p:custDataLst>
@@ -20913,7 +23000,7 @@
         </p:sp>
         <p:sp>
           <p:nvSpPr>
-            <p:cNvPr id="51" name="TextBox 51"/>
+            <p:cNvPr id="52" name="TextBox 52"/>
             <p:cNvSpPr txBox="1"/>
             <p:nvPr>
               <p:custDataLst>
@@ -20957,7 +23044,7 @@
         </p:sp>
         <p:sp>
           <p:nvSpPr>
-            <p:cNvPr id="52" name="Rectangle 52"/>
+            <p:cNvPr id="53" name="Rectangle 53"/>
             <p:cNvSpPr/>
             <p:nvPr/>
           </p:nvSpPr>
@@ -20983,7 +23070,7 @@
         </p:sp>
         <p:sp>
           <p:nvSpPr>
-            <p:cNvPr id="53" name="TextBox 53"/>
+            <p:cNvPr id="54" name="TextBox 54"/>
             <p:cNvSpPr txBox="1"/>
             <p:nvPr>
               <p:custDataLst>
@@ -21027,7 +23114,7 @@
         </p:sp>
         <p:sp>
           <p:nvSpPr>
-            <p:cNvPr id="54" name="Rectangle 54"/>
+            <p:cNvPr id="55" name="Rectangle 55"/>
             <p:cNvSpPr/>
             <p:nvPr/>
           </p:nvSpPr>
@@ -21053,7 +23140,7 @@
         </p:sp>
         <p:sp>
           <p:nvSpPr>
-            <p:cNvPr id="55" name="TextBox 55"/>
+            <p:cNvPr id="56" name="TextBox 56"/>
             <p:cNvSpPr txBox="1"/>
             <p:nvPr>
               <p:custDataLst>
@@ -21097,7 +23184,7 @@
         </p:sp>
         <p:sp>
           <p:nvSpPr>
-            <p:cNvPr id="56" name="Rectangle 56"/>
+            <p:cNvPr id="57" name="Rectangle 57"/>
             <p:cNvSpPr/>
             <p:nvPr/>
           </p:nvSpPr>
@@ -21123,7 +23210,7 @@
         </p:sp>
         <p:sp>
           <p:nvSpPr>
-            <p:cNvPr id="57" name="TextBox 57"/>
+            <p:cNvPr id="58" name="TextBox 58"/>
             <p:cNvSpPr txBox="1"/>
             <p:nvPr>
               <p:custDataLst>
@@ -21167,7 +23254,7 @@
         </p:sp>
         <p:sp>
           <p:nvSpPr>
-            <p:cNvPr id="58" name="Rectangle 58"/>
+            <p:cNvPr id="59" name="Rectangle 59"/>
             <p:cNvSpPr/>
             <p:nvPr/>
           </p:nvSpPr>
@@ -21193,7 +23280,7 @@
         </p:sp>
         <p:sp>
           <p:nvSpPr>
-            <p:cNvPr id="59" name="TextBox 59"/>
+            <p:cNvPr id="60" name="TextBox 60"/>
             <p:cNvSpPr txBox="1"/>
             <p:nvPr>
               <p:custDataLst>
@@ -21237,7 +23324,7 @@
         </p:sp>
         <p:sp>
           <p:nvSpPr>
-            <p:cNvPr id="60" name="Rectangle 60"/>
+            <p:cNvPr id="61" name="Rectangle 61"/>
             <p:cNvSpPr/>
             <p:nvPr/>
           </p:nvSpPr>
@@ -21263,7 +23350,7 @@
         </p:sp>
         <p:sp>
           <p:nvSpPr>
-            <p:cNvPr id="61" name="TextBox 61"/>
+            <p:cNvPr id="62" name="TextBox 62"/>
             <p:cNvSpPr txBox="1"/>
             <p:nvPr>
               <p:custDataLst>
@@ -21307,7 +23394,7 @@
         </p:sp>
         <p:sp>
           <p:nvSpPr>
-            <p:cNvPr id="62" name="TextBox 62"/>
+            <p:cNvPr id="63" name="TextBox 63"/>
             <p:cNvSpPr txBox="1"/>
             <p:nvPr>
               <p:custDataLst>
@@ -21362,7 +23449,7 @@
         </p:sp>
         <p:sp>
           <p:nvSpPr>
-            <p:cNvPr id="63" name="TextBox 63"/>
+            <p:cNvPr id="64" name="TextBox 64"/>
             <p:cNvSpPr txBox="1"/>
             <p:nvPr>
               <p:custDataLst>
@@ -21406,7 +23493,7 @@
         </p:sp>
         <p:sp>
           <p:nvSpPr>
-            <p:cNvPr id="64" name="Freeform 64"/>
+            <p:cNvPr id="65" name="Freeform 65"/>
             <p:cNvSpPr/>
             <p:nvPr/>
           </p:nvSpPr>
@@ -21448,7 +23535,7 @@
         </p:sp>
         <p:sp>
           <p:nvSpPr>
-            <p:cNvPr id="65" name="Freeform 65"/>
+            <p:cNvPr id="66" name="Freeform 66"/>
             <p:cNvSpPr/>
             <p:nvPr/>
           </p:nvSpPr>
@@ -21487,7 +23574,7 @@
         </p:sp>
         <p:sp>
           <p:nvSpPr>
-            <p:cNvPr id="66" name="TextBox 66"/>
+            <p:cNvPr id="67" name="TextBox 67"/>
             <p:cNvSpPr txBox="1"/>
             <p:nvPr>
               <p:custDataLst>
@@ -21553,7 +23640,7 @@
         </p:sp>
         <p:sp>
           <p:nvSpPr>
-            <p:cNvPr id="67" name="Rectangle 67"/>
+            <p:cNvPr id="68" name="Rectangle 68"/>
             <p:cNvSpPr/>
             <p:nvPr/>
           </p:nvSpPr>
@@ -21577,7 +23664,7 @@
         </p:sp>
         <p:sp>
           <p:nvSpPr>
-            <p:cNvPr id="68" name="TextBox 68"/>
+            <p:cNvPr id="69" name="TextBox 69"/>
             <p:cNvSpPr txBox="1"/>
             <p:nvPr>
               <p:custDataLst>
@@ -21621,7 +23708,7 @@
         </p:sp>
         <p:sp>
           <p:nvSpPr>
-            <p:cNvPr id="69" name="TextBox 69"/>
+            <p:cNvPr id="70" name="TextBox 70"/>
             <p:cNvSpPr txBox="1"/>
             <p:nvPr>
               <p:custDataLst>
@@ -21665,7 +23752,7 @@
         </p:sp>
         <p:sp>
           <p:nvSpPr>
-            <p:cNvPr id="70" name="Freeform 70"/>
+            <p:cNvPr id="71" name="Freeform 71"/>
             <p:cNvSpPr/>
             <p:nvPr/>
           </p:nvSpPr>
@@ -21707,7 +23794,7 @@
         </p:sp>
         <p:sp>
           <p:nvSpPr>
-            <p:cNvPr id="71" name="Freeform 71"/>
+            <p:cNvPr id="72" name="Freeform 72"/>
             <p:cNvSpPr/>
             <p:nvPr/>
           </p:nvSpPr>
@@ -21746,7 +23833,7 @@
         </p:sp>
         <p:sp>
           <p:nvSpPr>
-            <p:cNvPr id="72" name="Freeform 72"/>
+            <p:cNvPr id="73" name="Freeform 73"/>
             <p:cNvSpPr/>
             <p:nvPr/>
           </p:nvSpPr>
@@ -21782,7 +23869,7 @@
         </p:sp>
         <p:sp>
           <p:nvSpPr>
-            <p:cNvPr id="73" name="Freeform 73"/>
+            <p:cNvPr id="74" name="Freeform 74"/>
             <p:cNvSpPr/>
             <p:nvPr/>
           </p:nvSpPr>
@@ -21821,7 +23908,7 @@
         </p:sp>
         <p:sp>
           <p:nvSpPr>
-            <p:cNvPr id="74" name="Freeform 74"/>
+            <p:cNvPr id="75" name="Freeform 75"/>
             <p:cNvSpPr/>
             <p:nvPr/>
           </p:nvSpPr>
@@ -21860,7 +23947,7 @@
         </p:sp>
         <p:sp>
           <p:nvSpPr>
-            <p:cNvPr id="75" name="Freeform 75"/>
+            <p:cNvPr id="76" name="Freeform 76"/>
             <p:cNvSpPr/>
             <p:nvPr/>
           </p:nvSpPr>
@@ -21899,7 +23986,7 @@
         </p:sp>
         <p:sp>
           <p:nvSpPr>
-            <p:cNvPr id="76" name="Rectangle 76"/>
+            <p:cNvPr id="77" name="Rectangle 77"/>
             <p:cNvSpPr/>
             <p:nvPr/>
           </p:nvSpPr>
@@ -21923,7 +24010,7 @@
         </p:sp>
         <p:sp>
           <p:nvSpPr>
-            <p:cNvPr id="77" name="TextBox 77"/>
+            <p:cNvPr id="78" name="TextBox 78"/>
             <p:cNvSpPr txBox="1"/>
             <p:nvPr>
               <p:custDataLst>
@@ -21967,7 +24054,7 @@
         </p:sp>
         <p:sp>
           <p:nvSpPr>
-            <p:cNvPr id="78" name="Rectangle 78"/>
+            <p:cNvPr id="79" name="Rectangle 79"/>
             <p:cNvSpPr/>
             <p:nvPr/>
           </p:nvSpPr>
@@ -21991,7 +24078,7 @@
         </p:sp>
         <p:sp>
           <p:nvSpPr>
-            <p:cNvPr id="79" name="TextBox 79"/>
+            <p:cNvPr id="80" name="TextBox 80"/>
             <p:cNvSpPr txBox="1"/>
             <p:nvPr>
               <p:custDataLst>
@@ -22035,7 +24122,7 @@
         </p:sp>
         <p:sp>
           <p:nvSpPr>
-            <p:cNvPr id="80" name="Rectangle 80"/>
+            <p:cNvPr id="81" name="Rectangle 81"/>
             <p:cNvSpPr/>
             <p:nvPr/>
           </p:nvSpPr>
@@ -22059,7 +24146,7 @@
         </p:sp>
         <p:sp>
           <p:nvSpPr>
-            <p:cNvPr id="81" name="TextBox 81"/>
+            <p:cNvPr id="82" name="TextBox 82"/>
             <p:cNvSpPr txBox="1"/>
             <p:nvPr>
               <p:custDataLst>
@@ -22103,7 +24190,7 @@
         </p:sp>
         <p:sp>
           <p:nvSpPr>
-            <p:cNvPr id="82" name="TextBox 82"/>
+            <p:cNvPr id="83" name="TextBox 83"/>
             <p:cNvSpPr txBox="1"/>
             <p:nvPr>
               <p:custDataLst>
@@ -22147,7 +24234,7 @@
         </p:sp>
         <p:sp>
           <p:nvSpPr>
-            <p:cNvPr id="83" name="TextBox 83"/>
+            <p:cNvPr id="84" name="TextBox 84"/>
             <p:cNvSpPr txBox="1"/>
             <p:nvPr>
               <p:custDataLst>
@@ -22191,7 +24278,7 @@
         </p:sp>
         <p:sp>
           <p:nvSpPr>
-            <p:cNvPr id="84" name="TextBox 84"/>
+            <p:cNvPr id="85" name="TextBox 85"/>
             <p:cNvSpPr txBox="1"/>
             <p:nvPr>
               <p:custDataLst>
@@ -22258,7 +24345,7 @@
       </p:grpSp>
       <p:grpSp>
         <p:nvGrpSpPr>
-          <p:cNvPr id="89" name="footer"/>
+          <p:cNvPr id="99" name="footer"/>
           <p:cNvGrpSpPr/>
           <p:nvPr/>
         </p:nvGrpSpPr>
@@ -22272,7 +24359,7 @@
         </p:grpSpPr>
         <p:sp>
           <p:nvSpPr>
-            <p:cNvPr id="86" name="Line 86"/>
+            <p:cNvPr id="87" name="Line 87"/>
             <p:cNvSpPr/>
             <p:nvPr/>
           </p:nvSpPr>
@@ -22308,7 +24395,7 @@
         </p:sp>
         <p:sp>
           <p:nvSpPr>
-            <p:cNvPr id="87" name="TextBox 87"/>
+            <p:cNvPr id="88" name="TextBox 88"/>
             <p:cNvSpPr txBox="1"/>
             <p:nvPr>
               <p:custDataLst>
@@ -22363,7 +24450,7 @@
         </p:sp>
         <p:sp>
           <p:nvSpPr>
-            <p:cNvPr id="88" name="TextBox 88"/>
+            <p:cNvPr id="89" name="TextBox 89"/>
             <p:cNvSpPr txBox="1"/>
             <p:nvPr>
               <p:custDataLst>
@@ -22404,6 +24491,222 @@
               </a:r>
             </a:p>
           </p:txBody>
+        </p:sp>
+        <p:sp>
+          <p:nvSpPr>
+            <p:cNvPr id="90" name="Rectangle 90"/>
+            <p:cNvSpPr/>
+            <p:nvPr/>
+          </p:nvSpPr>
+          <p:spPr>
+            <a:xfrm>
+              <a:off x="8858250" y="6515100"/>
+              <a:ext cx="114300" cy="28575"/>
+            </a:xfrm>
+            <a:prstGeom prst="roundRect">
+              <a:avLst>
+                <a:gd name="adj" fmla="val 33333"/>
+              </a:avLst>
+            </a:prstGeom>
+            <a:solidFill>
+              <a:srgbClr val="D6DDE0"/>
+            </a:solidFill>
+            <a:ln>
+              <a:noFill/>
+            </a:ln>
+          </p:spPr>
+        </p:sp>
+        <p:sp>
+          <p:nvSpPr>
+            <p:cNvPr id="91" name="Rectangle 91"/>
+            <p:cNvSpPr/>
+            <p:nvPr/>
+          </p:nvSpPr>
+          <p:spPr>
+            <a:xfrm>
+              <a:off x="9048750" y="6515100"/>
+              <a:ext cx="114300" cy="28575"/>
+            </a:xfrm>
+            <a:prstGeom prst="roundRect">
+              <a:avLst>
+                <a:gd name="adj" fmla="val 33333"/>
+              </a:avLst>
+            </a:prstGeom>
+            <a:solidFill>
+              <a:srgbClr val="D6DDE0"/>
+            </a:solidFill>
+            <a:ln>
+              <a:noFill/>
+            </a:ln>
+          </p:spPr>
+        </p:sp>
+        <p:sp>
+          <p:nvSpPr>
+            <p:cNvPr id="92" name="Rectangle 92"/>
+            <p:cNvSpPr/>
+            <p:nvPr/>
+          </p:nvSpPr>
+          <p:spPr>
+            <a:xfrm>
+              <a:off x="9239250" y="6515100"/>
+              <a:ext cx="114300" cy="28575"/>
+            </a:xfrm>
+            <a:prstGeom prst="roundRect">
+              <a:avLst>
+                <a:gd name="adj" fmla="val 33333"/>
+              </a:avLst>
+            </a:prstGeom>
+            <a:solidFill>
+              <a:srgbClr val="D6DDE0"/>
+            </a:solidFill>
+            <a:ln>
+              <a:noFill/>
+            </a:ln>
+          </p:spPr>
+        </p:sp>
+        <p:sp>
+          <p:nvSpPr>
+            <p:cNvPr id="93" name="Rectangle 93"/>
+            <p:cNvSpPr/>
+            <p:nvPr/>
+          </p:nvSpPr>
+          <p:spPr>
+            <a:xfrm>
+              <a:off x="9429750" y="6515100"/>
+              <a:ext cx="114300" cy="28575"/>
+            </a:xfrm>
+            <a:prstGeom prst="roundRect">
+              <a:avLst>
+                <a:gd name="adj" fmla="val 33333"/>
+              </a:avLst>
+            </a:prstGeom>
+            <a:solidFill>
+              <a:srgbClr val="D6DDE0"/>
+            </a:solidFill>
+            <a:ln>
+              <a:noFill/>
+            </a:ln>
+          </p:spPr>
+        </p:sp>
+        <p:sp>
+          <p:nvSpPr>
+            <p:cNvPr id="94" name="Rectangle 94"/>
+            <p:cNvSpPr/>
+            <p:nvPr/>
+          </p:nvSpPr>
+          <p:spPr>
+            <a:xfrm>
+              <a:off x="9620250" y="6515100"/>
+              <a:ext cx="114300" cy="28575"/>
+            </a:xfrm>
+            <a:prstGeom prst="roundRect">
+              <a:avLst>
+                <a:gd name="adj" fmla="val 33333"/>
+              </a:avLst>
+            </a:prstGeom>
+            <a:solidFill>
+              <a:schemeClr val="accent2"/>
+            </a:solidFill>
+            <a:ln>
+              <a:noFill/>
+            </a:ln>
+          </p:spPr>
+        </p:sp>
+        <p:sp>
+          <p:nvSpPr>
+            <p:cNvPr id="95" name="Rectangle 95"/>
+            <p:cNvSpPr/>
+            <p:nvPr/>
+          </p:nvSpPr>
+          <p:spPr>
+            <a:xfrm>
+              <a:off x="9810750" y="6515100"/>
+              <a:ext cx="114300" cy="28575"/>
+            </a:xfrm>
+            <a:prstGeom prst="roundRect">
+              <a:avLst>
+                <a:gd name="adj" fmla="val 33333"/>
+              </a:avLst>
+            </a:prstGeom>
+            <a:solidFill>
+              <a:srgbClr val="D6DDE0"/>
+            </a:solidFill>
+            <a:ln>
+              <a:noFill/>
+            </a:ln>
+          </p:spPr>
+        </p:sp>
+        <p:sp>
+          <p:nvSpPr>
+            <p:cNvPr id="96" name="Rectangle 96"/>
+            <p:cNvSpPr/>
+            <p:nvPr/>
+          </p:nvSpPr>
+          <p:spPr>
+            <a:xfrm>
+              <a:off x="10001250" y="6515100"/>
+              <a:ext cx="114300" cy="28575"/>
+            </a:xfrm>
+            <a:prstGeom prst="roundRect">
+              <a:avLst>
+                <a:gd name="adj" fmla="val 33333"/>
+              </a:avLst>
+            </a:prstGeom>
+            <a:solidFill>
+              <a:srgbClr val="D6DDE0"/>
+            </a:solidFill>
+            <a:ln>
+              <a:noFill/>
+            </a:ln>
+          </p:spPr>
+        </p:sp>
+        <p:sp>
+          <p:nvSpPr>
+            <p:cNvPr id="97" name="Rectangle 97"/>
+            <p:cNvSpPr/>
+            <p:nvPr/>
+          </p:nvSpPr>
+          <p:spPr>
+            <a:xfrm>
+              <a:off x="10191750" y="6515100"/>
+              <a:ext cx="114300" cy="28575"/>
+            </a:xfrm>
+            <a:prstGeom prst="roundRect">
+              <a:avLst>
+                <a:gd name="adj" fmla="val 33333"/>
+              </a:avLst>
+            </a:prstGeom>
+            <a:solidFill>
+              <a:srgbClr val="D6DDE0"/>
+            </a:solidFill>
+            <a:ln>
+              <a:noFill/>
+            </a:ln>
+          </p:spPr>
+        </p:sp>
+        <p:sp>
+          <p:nvSpPr>
+            <p:cNvPr id="98" name="Rectangle 98"/>
+            <p:cNvSpPr/>
+            <p:nvPr/>
+          </p:nvSpPr>
+          <p:spPr>
+            <a:xfrm>
+              <a:off x="10382250" y="6515100"/>
+              <a:ext cx="114300" cy="28575"/>
+            </a:xfrm>
+            <a:prstGeom prst="roundRect">
+              <a:avLst>
+                <a:gd name="adj" fmla="val 33333"/>
+              </a:avLst>
+            </a:prstGeom>
+            <a:solidFill>
+              <a:srgbClr val="D6DDE0"/>
+            </a:solidFill>
+            <a:ln>
+              <a:noFill/>
+            </a:ln>
+          </p:spPr>
         </p:sp>
       </p:grpSp>
     </p:spTree>
@@ -22441,16 +24744,16 @@
       </p:grpSpPr>
       <p:grpSp>
         <p:nvGrpSpPr>
-          <p:cNvPr id="5" name="headline"/>
+          <p:cNvPr id="6" name="headline"/>
           <p:cNvGrpSpPr/>
           <p:nvPr/>
         </p:nvGrpSpPr>
         <p:grpSpPr>
           <a:xfrm>
             <a:off x="593598" y="257175"/>
-            <a:ext cx="6392799" cy="1082802"/>
+            <a:ext cx="6392799" cy="1085850"/>
             <a:chOff x="593598" y="257175"/>
-            <a:chExt cx="6392799" cy="1082802"/>
+            <a:chExt cx="6392799" cy="1085850"/>
           </a:xfrm>
         </p:grpSpPr>
         <p:sp>
@@ -22565,10 +24868,32 @@
             </a:p>
           </p:txBody>
         </p:sp>
+        <p:sp>
+          <p:nvSpPr>
+            <p:cNvPr id="5" name="Rectangle 5"/>
+            <p:cNvSpPr/>
+            <p:nvPr/>
+          </p:nvSpPr>
+          <p:spPr>
+            <a:xfrm>
+              <a:off x="609600" y="1314450"/>
+              <a:ext cx="762000" cy="28575"/>
+            </a:xfrm>
+            <a:prstGeom prst="rect">
+              <a:avLst/>
+            </a:prstGeom>
+            <a:solidFill>
+              <a:schemeClr val="accent1"/>
+            </a:solidFill>
+            <a:ln>
+              <a:noFill/>
+            </a:ln>
+          </p:spPr>
+        </p:sp>
       </p:grpSp>
       <p:grpSp>
         <p:nvGrpSpPr>
-          <p:cNvPr id="66" name="page-content"/>
+          <p:cNvPr id="67" name="page-content"/>
           <p:cNvGrpSpPr/>
           <p:nvPr/>
         </p:nvGrpSpPr>
@@ -22582,7 +24907,7 @@
         </p:grpSpPr>
         <p:sp>
           <p:nvSpPr>
-            <p:cNvPr id="6" name="Rectangle 6"/>
+            <p:cNvPr id="7" name="Rectangle 7"/>
             <p:cNvSpPr/>
             <p:nvPr/>
           </p:nvSpPr>
@@ -22606,7 +24931,7 @@
         </p:sp>
         <p:sp>
           <p:nvSpPr>
-            <p:cNvPr id="7" name="TextBox 7"/>
+            <p:cNvPr id="8" name="TextBox 8"/>
             <p:cNvSpPr txBox="1"/>
             <p:nvPr>
               <p:custDataLst>
@@ -22650,7 +24975,7 @@
         </p:sp>
         <p:grpSp>
           <p:nvGrpSpPr>
-            <p:cNvPr id="11" name="Group 11"/>
+            <p:cNvPr id="12" name="Group 12"/>
             <p:cNvGrpSpPr/>
             <p:nvPr/>
           </p:nvGrpSpPr>
@@ -22664,7 +24989,7 @@
           </p:grpSpPr>
           <p:sp>
             <p:nvSpPr>
-              <p:cNvPr id="8" name="Freeform 8"/>
+              <p:cNvPr id="9" name="Freeform 9"/>
               <p:cNvSpPr/>
               <p:nvPr/>
             </p:nvSpPr>
@@ -22720,7 +25045,7 @@
           </p:sp>
           <p:sp>
             <p:nvSpPr>
-              <p:cNvPr id="9" name="Freeform 9"/>
+              <p:cNvPr id="10" name="Freeform 10"/>
               <p:cNvSpPr/>
               <p:nvPr/>
             </p:nvSpPr>
@@ -22760,7 +25085,7 @@
           </p:sp>
           <p:sp>
             <p:nvSpPr>
-              <p:cNvPr id="10" name="Freeform 10"/>
+              <p:cNvPr id="11" name="Freeform 11"/>
               <p:cNvSpPr/>
               <p:nvPr/>
             </p:nvSpPr>
@@ -22813,7 +25138,7 @@
         </p:grpSp>
         <p:sp>
           <p:nvSpPr>
-            <p:cNvPr id="12" name="TextBox 12"/>
+            <p:cNvPr id="13" name="TextBox 13"/>
             <p:cNvSpPr txBox="1"/>
             <p:nvPr>
               <p:custDataLst>
@@ -22857,7 +25182,7 @@
         </p:sp>
         <p:sp>
           <p:nvSpPr>
-            <p:cNvPr id="13" name="TextBox 13"/>
+            <p:cNvPr id="14" name="TextBox 14"/>
             <p:cNvSpPr txBox="1"/>
             <p:nvPr>
               <p:custDataLst>
@@ -22901,7 +25226,7 @@
         </p:sp>
         <p:sp>
           <p:nvSpPr>
-            <p:cNvPr id="14" name="Freeform 14"/>
+            <p:cNvPr id="15" name="Freeform 15"/>
             <p:cNvSpPr/>
             <p:nvPr/>
           </p:nvSpPr>
@@ -22937,7 +25262,7 @@
         </p:sp>
         <p:sp>
           <p:nvSpPr>
-            <p:cNvPr id="15" name="Freeform 15"/>
+            <p:cNvPr id="16" name="Freeform 16"/>
             <p:cNvSpPr/>
             <p:nvPr/>
           </p:nvSpPr>
@@ -22976,7 +25301,7 @@
         </p:sp>
         <p:sp>
           <p:nvSpPr>
-            <p:cNvPr id="16" name="Rectangle 16"/>
+            <p:cNvPr id="17" name="Rectangle 17"/>
             <p:cNvSpPr/>
             <p:nvPr/>
           </p:nvSpPr>
@@ -23000,7 +25325,7 @@
         </p:sp>
         <p:sp>
           <p:nvSpPr>
-            <p:cNvPr id="17" name="TextBox 17"/>
+            <p:cNvPr id="18" name="TextBox 18"/>
             <p:cNvSpPr txBox="1"/>
             <p:nvPr>
               <p:custDataLst>
@@ -23044,7 +25369,7 @@
         </p:sp>
         <p:grpSp>
           <p:nvGrpSpPr>
-            <p:cNvPr id="27" name="Group 27"/>
+            <p:cNvPr id="28" name="Group 28"/>
             <p:cNvGrpSpPr/>
             <p:nvPr/>
           </p:nvGrpSpPr>
@@ -23058,7 +25383,7 @@
           </p:grpSpPr>
           <p:sp>
             <p:nvSpPr>
-              <p:cNvPr id="18" name="Rectangle 18"/>
+              <p:cNvPr id="19" name="Rectangle 19"/>
               <p:cNvSpPr/>
               <p:nvPr/>
             </p:nvSpPr>
@@ -23084,7 +25409,7 @@
           </p:sp>
           <p:sp>
             <p:nvSpPr>
-              <p:cNvPr id="19" name="Line 19"/>
+              <p:cNvPr id="20" name="Line 20"/>
               <p:cNvSpPr/>
               <p:nvPr/>
             </p:nvSpPr>
@@ -23120,7 +25445,7 @@
           </p:sp>
           <p:sp>
             <p:nvSpPr>
-              <p:cNvPr id="20" name="Line 20"/>
+              <p:cNvPr id="21" name="Line 21"/>
               <p:cNvSpPr/>
               <p:nvPr/>
             </p:nvSpPr>
@@ -23156,7 +25481,7 @@
           </p:sp>
           <p:sp>
             <p:nvSpPr>
-              <p:cNvPr id="21" name="Line 21"/>
+              <p:cNvPr id="22" name="Line 22"/>
               <p:cNvSpPr/>
               <p:nvPr/>
             </p:nvSpPr>
@@ -23192,7 +25517,7 @@
           </p:sp>
           <p:sp>
             <p:nvSpPr>
-              <p:cNvPr id="22" name="Line 22"/>
+              <p:cNvPr id="23" name="Line 23"/>
               <p:cNvSpPr/>
               <p:nvPr/>
             </p:nvSpPr>
@@ -23228,7 +25553,7 @@
           </p:sp>
           <p:sp>
             <p:nvSpPr>
-              <p:cNvPr id="23" name="Line 23"/>
+              <p:cNvPr id="24" name="Line 24"/>
               <p:cNvSpPr/>
               <p:nvPr/>
             </p:nvSpPr>
@@ -23264,7 +25589,7 @@
           </p:sp>
           <p:sp>
             <p:nvSpPr>
-              <p:cNvPr id="24" name="Line 24"/>
+              <p:cNvPr id="25" name="Line 25"/>
               <p:cNvSpPr/>
               <p:nvPr/>
             </p:nvSpPr>
@@ -23300,7 +25625,7 @@
           </p:sp>
           <p:sp>
             <p:nvSpPr>
-              <p:cNvPr id="25" name="Line 25"/>
+              <p:cNvPr id="26" name="Line 26"/>
               <p:cNvSpPr/>
               <p:nvPr/>
             </p:nvSpPr>
@@ -23336,7 +25661,7 @@
           </p:sp>
           <p:sp>
             <p:nvSpPr>
-              <p:cNvPr id="26" name="Line 26"/>
+              <p:cNvPr id="27" name="Line 27"/>
               <p:cNvSpPr/>
               <p:nvPr/>
             </p:nvSpPr>
@@ -23373,7 +25698,7 @@
         </p:grpSp>
         <p:sp>
           <p:nvSpPr>
-            <p:cNvPr id="28" name="TextBox 28"/>
+            <p:cNvPr id="29" name="TextBox 29"/>
             <p:cNvSpPr txBox="1"/>
             <p:nvPr>
               <p:custDataLst>
@@ -23417,7 +25742,7 @@
         </p:sp>
         <p:sp>
           <p:nvSpPr>
-            <p:cNvPr id="29" name="TextBox 29"/>
+            <p:cNvPr id="30" name="TextBox 30"/>
             <p:cNvSpPr txBox="1"/>
             <p:nvPr>
               <p:custDataLst>
@@ -23461,7 +25786,7 @@
         </p:sp>
         <p:sp>
           <p:nvSpPr>
-            <p:cNvPr id="30" name="Freeform 30"/>
+            <p:cNvPr id="31" name="Freeform 31"/>
             <p:cNvSpPr/>
             <p:nvPr/>
           </p:nvSpPr>
@@ -23497,7 +25822,7 @@
         </p:sp>
         <p:sp>
           <p:nvSpPr>
-            <p:cNvPr id="31" name="Freeform 31"/>
+            <p:cNvPr id="32" name="Freeform 32"/>
             <p:cNvSpPr/>
             <p:nvPr/>
           </p:nvSpPr>
@@ -23536,7 +25861,7 @@
         </p:sp>
         <p:sp>
           <p:nvSpPr>
-            <p:cNvPr id="32" name="Rectangle 32"/>
+            <p:cNvPr id="33" name="Rectangle 33"/>
             <p:cNvSpPr/>
             <p:nvPr/>
           </p:nvSpPr>
@@ -23560,7 +25885,7 @@
         </p:sp>
         <p:sp>
           <p:nvSpPr>
-            <p:cNvPr id="33" name="TextBox 33"/>
+            <p:cNvPr id="34" name="TextBox 34"/>
             <p:cNvSpPr txBox="1"/>
             <p:nvPr>
               <p:custDataLst>
@@ -23604,7 +25929,7 @@
         </p:sp>
         <p:grpSp>
           <p:nvGrpSpPr>
-            <p:cNvPr id="39" name="Group 39"/>
+            <p:cNvPr id="40" name="Group 40"/>
             <p:cNvGrpSpPr/>
             <p:nvPr/>
           </p:nvGrpSpPr>
@@ -23618,7 +25943,7 @@
           </p:grpSpPr>
           <p:sp>
             <p:nvSpPr>
-              <p:cNvPr id="34" name="Rectangle 34"/>
+              <p:cNvPr id="35" name="Rectangle 35"/>
               <p:cNvSpPr/>
               <p:nvPr/>
             </p:nvSpPr>
@@ -23644,7 +25969,7 @@
           </p:sp>
           <p:sp>
             <p:nvSpPr>
-              <p:cNvPr id="35" name="Line 35"/>
+              <p:cNvPr id="36" name="Line 36"/>
               <p:cNvSpPr/>
               <p:nvPr/>
             </p:nvSpPr>
@@ -23680,7 +26005,7 @@
           </p:sp>
           <p:sp>
             <p:nvSpPr>
-              <p:cNvPr id="36" name="Line 36"/>
+              <p:cNvPr id="37" name="Line 37"/>
               <p:cNvSpPr/>
               <p:nvPr/>
             </p:nvSpPr>
@@ -23716,7 +26041,7 @@
           </p:sp>
           <p:sp>
             <p:nvSpPr>
-              <p:cNvPr id="37" name="Line 37"/>
+              <p:cNvPr id="38" name="Line 38"/>
               <p:cNvSpPr/>
               <p:nvPr/>
             </p:nvSpPr>
@@ -23752,7 +26077,7 @@
           </p:sp>
           <p:sp>
             <p:nvSpPr>
-              <p:cNvPr id="38" name="Line 38"/>
+              <p:cNvPr id="39" name="Line 39"/>
               <p:cNvSpPr/>
               <p:nvPr/>
             </p:nvSpPr>
@@ -23789,7 +26114,7 @@
         </p:grpSp>
         <p:sp>
           <p:nvSpPr>
-            <p:cNvPr id="40" name="TextBox 40"/>
+            <p:cNvPr id="41" name="TextBox 41"/>
             <p:cNvSpPr txBox="1"/>
             <p:nvPr>
               <p:custDataLst>
@@ -23833,7 +26158,7 @@
         </p:sp>
         <p:sp>
           <p:nvSpPr>
-            <p:cNvPr id="41" name="TextBox 41"/>
+            <p:cNvPr id="42" name="TextBox 42"/>
             <p:cNvSpPr txBox="1"/>
             <p:nvPr>
               <p:custDataLst>
@@ -23877,7 +26202,7 @@
         </p:sp>
         <p:sp>
           <p:nvSpPr>
-            <p:cNvPr id="42" name="Freeform 42"/>
+            <p:cNvPr id="43" name="Freeform 43"/>
             <p:cNvSpPr/>
             <p:nvPr/>
           </p:nvSpPr>
@@ -23913,7 +26238,7 @@
         </p:sp>
         <p:sp>
           <p:nvSpPr>
-            <p:cNvPr id="43" name="Freeform 43"/>
+            <p:cNvPr id="44" name="Freeform 44"/>
             <p:cNvSpPr/>
             <p:nvPr/>
           </p:nvSpPr>
@@ -23952,7 +26277,7 @@
         </p:sp>
         <p:sp>
           <p:nvSpPr>
-            <p:cNvPr id="44" name="Rectangle 44"/>
+            <p:cNvPr id="45" name="Rectangle 45"/>
             <p:cNvSpPr/>
             <p:nvPr/>
           </p:nvSpPr>
@@ -23976,7 +26301,7 @@
         </p:sp>
         <p:sp>
           <p:nvSpPr>
-            <p:cNvPr id="45" name="TextBox 45"/>
+            <p:cNvPr id="46" name="TextBox 46"/>
             <p:cNvSpPr txBox="1"/>
             <p:nvPr>
               <p:custDataLst>
@@ -24020,7 +26345,7 @@
         </p:sp>
         <p:grpSp>
           <p:nvGrpSpPr>
-            <p:cNvPr id="51" name="Group 51"/>
+            <p:cNvPr id="52" name="Group 52"/>
             <p:cNvGrpSpPr/>
             <p:nvPr/>
           </p:nvGrpSpPr>
@@ -24034,7 +26359,7 @@
           </p:grpSpPr>
           <p:sp>
             <p:nvSpPr>
-              <p:cNvPr id="46" name="Ellipse 46"/>
+              <p:cNvPr id="47" name="Ellipse 47"/>
               <p:cNvSpPr/>
               <p:nvPr/>
             </p:nvSpPr>
@@ -24058,7 +26383,7 @@
           </p:sp>
           <p:sp>
             <p:nvSpPr>
-              <p:cNvPr id="47" name="Line 47"/>
+              <p:cNvPr id="48" name="Line 48"/>
               <p:cNvSpPr/>
               <p:nvPr/>
             </p:nvSpPr>
@@ -24094,7 +26419,7 @@
           </p:sp>
           <p:sp>
             <p:nvSpPr>
-              <p:cNvPr id="48" name="Line 48"/>
+              <p:cNvPr id="49" name="Line 49"/>
               <p:cNvSpPr/>
               <p:nvPr/>
             </p:nvSpPr>
@@ -24130,7 +26455,7 @@
           </p:sp>
           <p:sp>
             <p:nvSpPr>
-              <p:cNvPr id="49" name="Line 49"/>
+              <p:cNvPr id="50" name="Line 50"/>
               <p:cNvSpPr/>
               <p:nvPr/>
             </p:nvSpPr>
@@ -24166,7 +26491,7 @@
           </p:sp>
           <p:sp>
             <p:nvSpPr>
-              <p:cNvPr id="50" name="Line 50"/>
+              <p:cNvPr id="51" name="Line 51"/>
               <p:cNvSpPr/>
               <p:nvPr/>
             </p:nvSpPr>
@@ -24203,7 +26528,7 @@
         </p:grpSp>
         <p:sp>
           <p:nvSpPr>
-            <p:cNvPr id="52" name="TextBox 52"/>
+            <p:cNvPr id="53" name="TextBox 53"/>
             <p:cNvSpPr txBox="1"/>
             <p:nvPr>
               <p:custDataLst>
@@ -24247,7 +26572,7 @@
         </p:sp>
         <p:sp>
           <p:nvSpPr>
-            <p:cNvPr id="53" name="TextBox 53"/>
+            <p:cNvPr id="54" name="TextBox 54"/>
             <p:cNvSpPr txBox="1"/>
             <p:nvPr>
               <p:custDataLst>
@@ -24291,7 +26616,7 @@
         </p:sp>
         <p:sp>
           <p:nvSpPr>
-            <p:cNvPr id="54" name="Freeform 54"/>
+            <p:cNvPr id="55" name="Freeform 55"/>
             <p:cNvSpPr/>
             <p:nvPr/>
           </p:nvSpPr>
@@ -24333,7 +26658,7 @@
         </p:sp>
         <p:sp>
           <p:nvSpPr>
-            <p:cNvPr id="55" name="Freeform 55"/>
+            <p:cNvPr id="56" name="Freeform 56"/>
             <p:cNvSpPr/>
             <p:nvPr/>
           </p:nvSpPr>
@@ -24372,7 +26697,7 @@
         </p:sp>
         <p:sp>
           <p:nvSpPr>
-            <p:cNvPr id="56" name="Rectangle 56"/>
+            <p:cNvPr id="57" name="Rectangle 57"/>
             <p:cNvSpPr/>
             <p:nvPr/>
           </p:nvSpPr>
@@ -24396,7 +26721,7 @@
         </p:sp>
         <p:grpSp>
           <p:nvGrpSpPr>
-            <p:cNvPr id="62" name="Group 62"/>
+            <p:cNvPr id="63" name="Group 63"/>
             <p:cNvGrpSpPr/>
             <p:nvPr/>
           </p:nvGrpSpPr>
@@ -24410,7 +26735,7 @@
           </p:grpSpPr>
           <p:sp>
             <p:nvSpPr>
-              <p:cNvPr id="57" name="Rectangle 57"/>
+              <p:cNvPr id="58" name="Rectangle 58"/>
               <p:cNvSpPr/>
               <p:nvPr/>
             </p:nvSpPr>
@@ -24436,7 +26761,7 @@
           </p:sp>
           <p:sp>
             <p:nvSpPr>
-              <p:cNvPr id="58" name="Line 58"/>
+              <p:cNvPr id="59" name="Line 59"/>
               <p:cNvSpPr/>
               <p:nvPr/>
             </p:nvSpPr>
@@ -24472,7 +26797,7 @@
           </p:sp>
           <p:sp>
             <p:nvSpPr>
-              <p:cNvPr id="59" name="Line 59"/>
+              <p:cNvPr id="60" name="Line 60"/>
               <p:cNvSpPr/>
               <p:nvPr/>
             </p:nvSpPr>
@@ -24508,7 +26833,7 @@
           </p:sp>
           <p:sp>
             <p:nvSpPr>
-              <p:cNvPr id="60" name="Line 60"/>
+              <p:cNvPr id="61" name="Line 61"/>
               <p:cNvSpPr/>
               <p:nvPr/>
             </p:nvSpPr>
@@ -24544,7 +26869,7 @@
           </p:sp>
           <p:sp>
             <p:nvSpPr>
-              <p:cNvPr id="61" name="Line 61"/>
+              <p:cNvPr id="62" name="Line 62"/>
               <p:cNvSpPr/>
               <p:nvPr/>
             </p:nvSpPr>
@@ -24581,7 +26906,7 @@
         </p:grpSp>
         <p:sp>
           <p:nvSpPr>
-            <p:cNvPr id="63" name="TextBox 63"/>
+            <p:cNvPr id="64" name="TextBox 64"/>
             <p:cNvSpPr txBox="1"/>
             <p:nvPr>
               <p:custDataLst>
@@ -24625,7 +26950,7 @@
         </p:sp>
         <p:sp>
           <p:nvSpPr>
-            <p:cNvPr id="64" name="Rectangle 64"/>
+            <p:cNvPr id="65" name="Rectangle 65"/>
             <p:cNvSpPr/>
             <p:nvPr/>
           </p:nvSpPr>
@@ -24649,7 +26974,7 @@
         </p:sp>
         <p:sp>
           <p:nvSpPr>
-            <p:cNvPr id="65" name="TextBox 65"/>
+            <p:cNvPr id="66" name="TextBox 66"/>
             <p:cNvSpPr txBox="1"/>
             <p:nvPr>
               <p:custDataLst>
@@ -24716,7 +27041,7 @@
       </p:grpSp>
       <p:grpSp>
         <p:nvGrpSpPr>
-          <p:cNvPr id="70" name="footer"/>
+          <p:cNvPr id="80" name="footer"/>
           <p:cNvGrpSpPr/>
           <p:nvPr/>
         </p:nvGrpSpPr>
@@ -24730,7 +27055,7 @@
         </p:grpSpPr>
         <p:sp>
           <p:nvSpPr>
-            <p:cNvPr id="67" name="Line 67"/>
+            <p:cNvPr id="68" name="Line 68"/>
             <p:cNvSpPr/>
             <p:nvPr/>
           </p:nvSpPr>
@@ -24766,7 +27091,7 @@
         </p:sp>
         <p:sp>
           <p:nvSpPr>
-            <p:cNvPr id="68" name="TextBox 68"/>
+            <p:cNvPr id="69" name="TextBox 69"/>
             <p:cNvSpPr txBox="1"/>
             <p:nvPr>
               <p:custDataLst>
@@ -24821,7 +27146,7 @@
         </p:sp>
         <p:sp>
           <p:nvSpPr>
-            <p:cNvPr id="69" name="TextBox 69"/>
+            <p:cNvPr id="70" name="TextBox 70"/>
             <p:cNvSpPr txBox="1"/>
             <p:nvPr>
               <p:custDataLst>
@@ -24862,6 +27187,222 @@
               </a:r>
             </a:p>
           </p:txBody>
+        </p:sp>
+        <p:sp>
+          <p:nvSpPr>
+            <p:cNvPr id="71" name="Rectangle 71"/>
+            <p:cNvSpPr/>
+            <p:nvPr/>
+          </p:nvSpPr>
+          <p:spPr>
+            <a:xfrm>
+              <a:off x="8858250" y="6515100"/>
+              <a:ext cx="114300" cy="28575"/>
+            </a:xfrm>
+            <a:prstGeom prst="roundRect">
+              <a:avLst>
+                <a:gd name="adj" fmla="val 33333"/>
+              </a:avLst>
+            </a:prstGeom>
+            <a:solidFill>
+              <a:srgbClr val="D6DDE0"/>
+            </a:solidFill>
+            <a:ln>
+              <a:noFill/>
+            </a:ln>
+          </p:spPr>
+        </p:sp>
+        <p:sp>
+          <p:nvSpPr>
+            <p:cNvPr id="72" name="Rectangle 72"/>
+            <p:cNvSpPr/>
+            <p:nvPr/>
+          </p:nvSpPr>
+          <p:spPr>
+            <a:xfrm>
+              <a:off x="9048750" y="6515100"/>
+              <a:ext cx="114300" cy="28575"/>
+            </a:xfrm>
+            <a:prstGeom prst="roundRect">
+              <a:avLst>
+                <a:gd name="adj" fmla="val 33333"/>
+              </a:avLst>
+            </a:prstGeom>
+            <a:solidFill>
+              <a:srgbClr val="D6DDE0"/>
+            </a:solidFill>
+            <a:ln>
+              <a:noFill/>
+            </a:ln>
+          </p:spPr>
+        </p:sp>
+        <p:sp>
+          <p:nvSpPr>
+            <p:cNvPr id="73" name="Rectangle 73"/>
+            <p:cNvSpPr/>
+            <p:nvPr/>
+          </p:nvSpPr>
+          <p:spPr>
+            <a:xfrm>
+              <a:off x="9239250" y="6515100"/>
+              <a:ext cx="114300" cy="28575"/>
+            </a:xfrm>
+            <a:prstGeom prst="roundRect">
+              <a:avLst>
+                <a:gd name="adj" fmla="val 33333"/>
+              </a:avLst>
+            </a:prstGeom>
+            <a:solidFill>
+              <a:srgbClr val="D6DDE0"/>
+            </a:solidFill>
+            <a:ln>
+              <a:noFill/>
+            </a:ln>
+          </p:spPr>
+        </p:sp>
+        <p:sp>
+          <p:nvSpPr>
+            <p:cNvPr id="74" name="Rectangle 74"/>
+            <p:cNvSpPr/>
+            <p:nvPr/>
+          </p:nvSpPr>
+          <p:spPr>
+            <a:xfrm>
+              <a:off x="9429750" y="6515100"/>
+              <a:ext cx="114300" cy="28575"/>
+            </a:xfrm>
+            <a:prstGeom prst="roundRect">
+              <a:avLst>
+                <a:gd name="adj" fmla="val 33333"/>
+              </a:avLst>
+            </a:prstGeom>
+            <a:solidFill>
+              <a:srgbClr val="D6DDE0"/>
+            </a:solidFill>
+            <a:ln>
+              <a:noFill/>
+            </a:ln>
+          </p:spPr>
+        </p:sp>
+        <p:sp>
+          <p:nvSpPr>
+            <p:cNvPr id="75" name="Rectangle 75"/>
+            <p:cNvSpPr/>
+            <p:nvPr/>
+          </p:nvSpPr>
+          <p:spPr>
+            <a:xfrm>
+              <a:off x="9620250" y="6515100"/>
+              <a:ext cx="114300" cy="28575"/>
+            </a:xfrm>
+            <a:prstGeom prst="roundRect">
+              <a:avLst>
+                <a:gd name="adj" fmla="val 33333"/>
+              </a:avLst>
+            </a:prstGeom>
+            <a:solidFill>
+              <a:srgbClr val="D6DDE0"/>
+            </a:solidFill>
+            <a:ln>
+              <a:noFill/>
+            </a:ln>
+          </p:spPr>
+        </p:sp>
+        <p:sp>
+          <p:nvSpPr>
+            <p:cNvPr id="76" name="Rectangle 76"/>
+            <p:cNvSpPr/>
+            <p:nvPr/>
+          </p:nvSpPr>
+          <p:spPr>
+            <a:xfrm>
+              <a:off x="9810750" y="6515100"/>
+              <a:ext cx="114300" cy="28575"/>
+            </a:xfrm>
+            <a:prstGeom prst="roundRect">
+              <a:avLst>
+                <a:gd name="adj" fmla="val 33333"/>
+              </a:avLst>
+            </a:prstGeom>
+            <a:solidFill>
+              <a:schemeClr val="accent2"/>
+            </a:solidFill>
+            <a:ln>
+              <a:noFill/>
+            </a:ln>
+          </p:spPr>
+        </p:sp>
+        <p:sp>
+          <p:nvSpPr>
+            <p:cNvPr id="77" name="Rectangle 77"/>
+            <p:cNvSpPr/>
+            <p:nvPr/>
+          </p:nvSpPr>
+          <p:spPr>
+            <a:xfrm>
+              <a:off x="10001250" y="6515100"/>
+              <a:ext cx="114300" cy="28575"/>
+            </a:xfrm>
+            <a:prstGeom prst="roundRect">
+              <a:avLst>
+                <a:gd name="adj" fmla="val 33333"/>
+              </a:avLst>
+            </a:prstGeom>
+            <a:solidFill>
+              <a:srgbClr val="D6DDE0"/>
+            </a:solidFill>
+            <a:ln>
+              <a:noFill/>
+            </a:ln>
+          </p:spPr>
+        </p:sp>
+        <p:sp>
+          <p:nvSpPr>
+            <p:cNvPr id="78" name="Rectangle 78"/>
+            <p:cNvSpPr/>
+            <p:nvPr/>
+          </p:nvSpPr>
+          <p:spPr>
+            <a:xfrm>
+              <a:off x="10191750" y="6515100"/>
+              <a:ext cx="114300" cy="28575"/>
+            </a:xfrm>
+            <a:prstGeom prst="roundRect">
+              <a:avLst>
+                <a:gd name="adj" fmla="val 33333"/>
+              </a:avLst>
+            </a:prstGeom>
+            <a:solidFill>
+              <a:srgbClr val="D6DDE0"/>
+            </a:solidFill>
+            <a:ln>
+              <a:noFill/>
+            </a:ln>
+          </p:spPr>
+        </p:sp>
+        <p:sp>
+          <p:nvSpPr>
+            <p:cNvPr id="79" name="Rectangle 79"/>
+            <p:cNvSpPr/>
+            <p:nvPr/>
+          </p:nvSpPr>
+          <p:spPr>
+            <a:xfrm>
+              <a:off x="10382250" y="6515100"/>
+              <a:ext cx="114300" cy="28575"/>
+            </a:xfrm>
+            <a:prstGeom prst="roundRect">
+              <a:avLst>
+                <a:gd name="adj" fmla="val 33333"/>
+              </a:avLst>
+            </a:prstGeom>
+            <a:solidFill>
+              <a:srgbClr val="D6DDE0"/>
+            </a:solidFill>
+            <a:ln>
+              <a:noFill/>
+            </a:ln>
+          </p:spPr>
         </p:sp>
       </p:grpSp>
     </p:spTree>
@@ -24899,16 +27440,16 @@
       </p:grpSpPr>
       <p:grpSp>
         <p:nvGrpSpPr>
-          <p:cNvPr id="5" name="headline"/>
+          <p:cNvPr id="6" name="headline"/>
           <p:cNvGrpSpPr/>
           <p:nvPr/>
         </p:nvGrpSpPr>
         <p:grpSpPr>
           <a:xfrm>
             <a:off x="593598" y="257175"/>
-            <a:ext cx="5544693" cy="1082802"/>
+            <a:ext cx="5544693" cy="1085850"/>
             <a:chOff x="593598" y="257175"/>
-            <a:chExt cx="5544693" cy="1082802"/>
+            <a:chExt cx="5544693" cy="1085850"/>
           </a:xfrm>
         </p:grpSpPr>
         <p:sp>
@@ -25023,10 +27564,32 @@
             </a:p>
           </p:txBody>
         </p:sp>
+        <p:sp>
+          <p:nvSpPr>
+            <p:cNvPr id="5" name="Rectangle 5"/>
+            <p:cNvSpPr/>
+            <p:nvPr/>
+          </p:nvSpPr>
+          <p:spPr>
+            <a:xfrm>
+              <a:off x="609600" y="1314450"/>
+              <a:ext cx="762000" cy="28575"/>
+            </a:xfrm>
+            <a:prstGeom prst="rect">
+              <a:avLst/>
+            </a:prstGeom>
+            <a:solidFill>
+              <a:schemeClr val="accent1"/>
+            </a:solidFill>
+            <a:ln>
+              <a:noFill/>
+            </a:ln>
+          </p:spPr>
+        </p:sp>
       </p:grpSp>
       <p:grpSp>
         <p:nvGrpSpPr>
-          <p:cNvPr id="29" name="page-content"/>
+          <p:cNvPr id="30" name="page-content"/>
           <p:cNvGrpSpPr/>
           <p:nvPr/>
         </p:nvGrpSpPr>
@@ -25040,7 +27603,7 @@
         </p:grpSpPr>
         <p:sp>
           <p:nvSpPr>
-            <p:cNvPr id="6" name="TextBox 6"/>
+            <p:cNvPr id="7" name="TextBox 7"/>
             <p:cNvSpPr txBox="1"/>
             <p:nvPr>
               <p:custDataLst>
@@ -25095,7 +27658,7 @@
         </p:sp>
         <p:grpSp>
           <p:nvGrpSpPr>
-            <p:cNvPr id="22" name="detector-comparison-chartArea"/>
+            <p:cNvPr id="23" name="detector-comparison-chartArea"/>
             <p:cNvGrpSpPr/>
             <p:nvPr/>
           </p:nvGrpSpPr>
@@ -25109,7 +27672,7 @@
           </p:grpSpPr>
           <p:sp>
             <p:nvSpPr>
-              <p:cNvPr id="7" name="Line 7"/>
+              <p:cNvPr id="8" name="Line 8"/>
               <p:cNvSpPr/>
               <p:nvPr/>
             </p:nvSpPr>
@@ -25145,7 +27708,7 @@
           </p:sp>
           <p:sp>
             <p:nvSpPr>
-              <p:cNvPr id="8" name="TextBox 8"/>
+              <p:cNvPr id="9" name="TextBox 9"/>
               <p:cNvSpPr txBox="1"/>
               <p:nvPr>
                 <p:custDataLst>
@@ -25189,7 +27752,7 @@
           </p:sp>
           <p:sp>
             <p:nvSpPr>
-              <p:cNvPr id="9" name="Line 9"/>
+              <p:cNvPr id="10" name="Line 10"/>
               <p:cNvSpPr/>
               <p:nvPr/>
             </p:nvSpPr>
@@ -25225,7 +27788,7 @@
           </p:sp>
           <p:sp>
             <p:nvSpPr>
-              <p:cNvPr id="10" name="TextBox 10"/>
+              <p:cNvPr id="11" name="TextBox 11"/>
               <p:cNvSpPr txBox="1"/>
               <p:nvPr>
                 <p:custDataLst>
@@ -25269,7 +27832,7 @@
           </p:sp>
           <p:sp>
             <p:nvSpPr>
-              <p:cNvPr id="11" name="Line 11"/>
+              <p:cNvPr id="12" name="Line 12"/>
               <p:cNvSpPr/>
               <p:nvPr/>
             </p:nvSpPr>
@@ -25305,7 +27868,7 @@
           </p:sp>
           <p:sp>
             <p:nvSpPr>
-              <p:cNvPr id="12" name="TextBox 12"/>
+              <p:cNvPr id="13" name="TextBox 13"/>
               <p:cNvSpPr txBox="1"/>
               <p:nvPr>
                 <p:custDataLst>
@@ -25349,7 +27912,7 @@
           </p:sp>
           <p:sp>
             <p:nvSpPr>
-              <p:cNvPr id="13" name="TextBox 13"/>
+              <p:cNvPr id="14" name="TextBox 14"/>
               <p:cNvSpPr txBox="1"/>
               <p:nvPr>
                 <p:custDataLst>
@@ -25393,7 +27956,7 @@
           </p:sp>
           <p:sp>
             <p:nvSpPr>
-              <p:cNvPr id="14" name="Rectangle 14"/>
+              <p:cNvPr id="15" name="Rectangle 15"/>
               <p:cNvSpPr/>
               <p:nvPr/>
             </p:nvSpPr>
@@ -25415,7 +27978,7 @@
           </p:sp>
           <p:sp>
             <p:nvSpPr>
-              <p:cNvPr id="15" name="TextBox 15"/>
+              <p:cNvPr id="16" name="TextBox 16"/>
               <p:cNvSpPr txBox="1"/>
               <p:nvPr>
                 <p:custDataLst>
@@ -25459,7 +28022,7 @@
           </p:sp>
           <p:sp>
             <p:nvSpPr>
-              <p:cNvPr id="16" name="TextBox 16"/>
+              <p:cNvPr id="17" name="TextBox 17"/>
               <p:cNvSpPr txBox="1"/>
               <p:nvPr>
                 <p:custDataLst>
@@ -25503,7 +28066,7 @@
           </p:sp>
           <p:sp>
             <p:nvSpPr>
-              <p:cNvPr id="17" name="Rectangle 17"/>
+              <p:cNvPr id="18" name="Rectangle 18"/>
               <p:cNvSpPr/>
               <p:nvPr/>
             </p:nvSpPr>
@@ -25525,7 +28088,7 @@
           </p:sp>
           <p:sp>
             <p:nvSpPr>
-              <p:cNvPr id="18" name="TextBox 18"/>
+              <p:cNvPr id="19" name="TextBox 19"/>
               <p:cNvSpPr txBox="1"/>
               <p:nvPr>
                 <p:custDataLst>
@@ -25569,7 +28132,7 @@
           </p:sp>
           <p:sp>
             <p:nvSpPr>
-              <p:cNvPr id="19" name="TextBox 19"/>
+              <p:cNvPr id="20" name="TextBox 20"/>
               <p:cNvSpPr txBox="1"/>
               <p:nvPr>
                 <p:custDataLst>
@@ -25613,7 +28176,7 @@
           </p:sp>
           <p:sp>
             <p:nvSpPr>
-              <p:cNvPr id="20" name="Rectangle 20"/>
+              <p:cNvPr id="21" name="Rectangle 21"/>
               <p:cNvSpPr/>
               <p:nvPr/>
             </p:nvSpPr>
@@ -25635,7 +28198,7 @@
           </p:sp>
           <p:sp>
             <p:nvSpPr>
-              <p:cNvPr id="21" name="TextBox 21"/>
+              <p:cNvPr id="22" name="TextBox 22"/>
               <p:cNvSpPr txBox="1"/>
               <p:nvPr>
                 <p:custDataLst>
@@ -25680,7 +28243,7 @@
         </p:grpSp>
         <p:sp>
           <p:nvSpPr>
-            <p:cNvPr id="23" name="Rectangle 23"/>
+            <p:cNvPr id="24" name="Rectangle 24"/>
             <p:cNvSpPr/>
             <p:nvPr/>
           </p:nvSpPr>
@@ -25704,7 +28267,7 @@
         </p:sp>
         <p:sp>
           <p:nvSpPr>
-            <p:cNvPr id="24" name="TextBox 24"/>
+            <p:cNvPr id="25" name="TextBox 25"/>
             <p:cNvSpPr txBox="1"/>
             <p:nvPr>
               <p:custDataLst>
@@ -25748,7 +28311,7 @@
         </p:sp>
         <p:sp>
           <p:nvSpPr>
-            <p:cNvPr id="25" name="TextBox 25"/>
+            <p:cNvPr id="26" name="TextBox 26"/>
             <p:cNvSpPr txBox="1"/>
             <p:nvPr>
               <p:custDataLst>
@@ -25792,7 +28355,7 @@
         </p:sp>
         <p:sp>
           <p:nvSpPr>
-            <p:cNvPr id="26" name="TextBox 26"/>
+            <p:cNvPr id="27" name="TextBox 27"/>
             <p:cNvSpPr txBox="1"/>
             <p:nvPr>
               <p:custDataLst>
@@ -25836,7 +28399,7 @@
         </p:sp>
         <p:sp>
           <p:nvSpPr>
-            <p:cNvPr id="27" name="TextBox 27"/>
+            <p:cNvPr id="28" name="TextBox 28"/>
             <p:cNvSpPr txBox="1"/>
             <p:nvPr>
               <p:custDataLst>
@@ -25880,7 +28443,7 @@
         </p:sp>
         <p:sp>
           <p:nvSpPr>
-            <p:cNvPr id="28" name="TextBox 28"/>
+            <p:cNvPr id="29" name="TextBox 29"/>
             <p:cNvSpPr txBox="1"/>
             <p:nvPr>
               <p:custDataLst>
@@ -25969,7 +28532,7 @@
       </p:grpSp>
       <p:grpSp>
         <p:nvGrpSpPr>
-          <p:cNvPr id="33" name="footer"/>
+          <p:cNvPr id="43" name="footer"/>
           <p:cNvGrpSpPr/>
           <p:nvPr/>
         </p:nvGrpSpPr>
@@ -25983,7 +28546,7 @@
         </p:grpSpPr>
         <p:sp>
           <p:nvSpPr>
-            <p:cNvPr id="30" name="Line 30"/>
+            <p:cNvPr id="31" name="Line 31"/>
             <p:cNvSpPr/>
             <p:nvPr/>
           </p:nvSpPr>
@@ -26019,7 +28582,7 @@
         </p:sp>
         <p:sp>
           <p:nvSpPr>
-            <p:cNvPr id="31" name="TextBox 31"/>
+            <p:cNvPr id="32" name="TextBox 32"/>
             <p:cNvSpPr txBox="1"/>
             <p:nvPr>
               <p:custDataLst>
@@ -26074,7 +28637,7 @@
         </p:sp>
         <p:sp>
           <p:nvSpPr>
-            <p:cNvPr id="32" name="TextBox 32"/>
+            <p:cNvPr id="33" name="TextBox 33"/>
             <p:cNvSpPr txBox="1"/>
             <p:nvPr>
               <p:custDataLst>
@@ -26115,6 +28678,222 @@
               </a:r>
             </a:p>
           </p:txBody>
+        </p:sp>
+        <p:sp>
+          <p:nvSpPr>
+            <p:cNvPr id="34" name="Rectangle 34"/>
+            <p:cNvSpPr/>
+            <p:nvPr/>
+          </p:nvSpPr>
+          <p:spPr>
+            <a:xfrm>
+              <a:off x="8858250" y="6515100"/>
+              <a:ext cx="114300" cy="28575"/>
+            </a:xfrm>
+            <a:prstGeom prst="roundRect">
+              <a:avLst>
+                <a:gd name="adj" fmla="val 33333"/>
+              </a:avLst>
+            </a:prstGeom>
+            <a:solidFill>
+              <a:srgbClr val="D6DDE0"/>
+            </a:solidFill>
+            <a:ln>
+              <a:noFill/>
+            </a:ln>
+          </p:spPr>
+        </p:sp>
+        <p:sp>
+          <p:nvSpPr>
+            <p:cNvPr id="35" name="Rectangle 35"/>
+            <p:cNvSpPr/>
+            <p:nvPr/>
+          </p:nvSpPr>
+          <p:spPr>
+            <a:xfrm>
+              <a:off x="9048750" y="6515100"/>
+              <a:ext cx="114300" cy="28575"/>
+            </a:xfrm>
+            <a:prstGeom prst="roundRect">
+              <a:avLst>
+                <a:gd name="adj" fmla="val 33333"/>
+              </a:avLst>
+            </a:prstGeom>
+            <a:solidFill>
+              <a:srgbClr val="D6DDE0"/>
+            </a:solidFill>
+            <a:ln>
+              <a:noFill/>
+            </a:ln>
+          </p:spPr>
+        </p:sp>
+        <p:sp>
+          <p:nvSpPr>
+            <p:cNvPr id="36" name="Rectangle 36"/>
+            <p:cNvSpPr/>
+            <p:nvPr/>
+          </p:nvSpPr>
+          <p:spPr>
+            <a:xfrm>
+              <a:off x="9239250" y="6515100"/>
+              <a:ext cx="114300" cy="28575"/>
+            </a:xfrm>
+            <a:prstGeom prst="roundRect">
+              <a:avLst>
+                <a:gd name="adj" fmla="val 33333"/>
+              </a:avLst>
+            </a:prstGeom>
+            <a:solidFill>
+              <a:srgbClr val="D6DDE0"/>
+            </a:solidFill>
+            <a:ln>
+              <a:noFill/>
+            </a:ln>
+          </p:spPr>
+        </p:sp>
+        <p:sp>
+          <p:nvSpPr>
+            <p:cNvPr id="37" name="Rectangle 37"/>
+            <p:cNvSpPr/>
+            <p:nvPr/>
+          </p:nvSpPr>
+          <p:spPr>
+            <a:xfrm>
+              <a:off x="9429750" y="6515100"/>
+              <a:ext cx="114300" cy="28575"/>
+            </a:xfrm>
+            <a:prstGeom prst="roundRect">
+              <a:avLst>
+                <a:gd name="adj" fmla="val 33333"/>
+              </a:avLst>
+            </a:prstGeom>
+            <a:solidFill>
+              <a:srgbClr val="D6DDE0"/>
+            </a:solidFill>
+            <a:ln>
+              <a:noFill/>
+            </a:ln>
+          </p:spPr>
+        </p:sp>
+        <p:sp>
+          <p:nvSpPr>
+            <p:cNvPr id="38" name="Rectangle 38"/>
+            <p:cNvSpPr/>
+            <p:nvPr/>
+          </p:nvSpPr>
+          <p:spPr>
+            <a:xfrm>
+              <a:off x="9620250" y="6515100"/>
+              <a:ext cx="114300" cy="28575"/>
+            </a:xfrm>
+            <a:prstGeom prst="roundRect">
+              <a:avLst>
+                <a:gd name="adj" fmla="val 33333"/>
+              </a:avLst>
+            </a:prstGeom>
+            <a:solidFill>
+              <a:srgbClr val="D6DDE0"/>
+            </a:solidFill>
+            <a:ln>
+              <a:noFill/>
+            </a:ln>
+          </p:spPr>
+        </p:sp>
+        <p:sp>
+          <p:nvSpPr>
+            <p:cNvPr id="39" name="Rectangle 39"/>
+            <p:cNvSpPr/>
+            <p:nvPr/>
+          </p:nvSpPr>
+          <p:spPr>
+            <a:xfrm>
+              <a:off x="9810750" y="6515100"/>
+              <a:ext cx="114300" cy="28575"/>
+            </a:xfrm>
+            <a:prstGeom prst="roundRect">
+              <a:avLst>
+                <a:gd name="adj" fmla="val 33333"/>
+              </a:avLst>
+            </a:prstGeom>
+            <a:solidFill>
+              <a:srgbClr val="D6DDE0"/>
+            </a:solidFill>
+            <a:ln>
+              <a:noFill/>
+            </a:ln>
+          </p:spPr>
+        </p:sp>
+        <p:sp>
+          <p:nvSpPr>
+            <p:cNvPr id="40" name="Rectangle 40"/>
+            <p:cNvSpPr/>
+            <p:nvPr/>
+          </p:nvSpPr>
+          <p:spPr>
+            <a:xfrm>
+              <a:off x="10001250" y="6515100"/>
+              <a:ext cx="114300" cy="28575"/>
+            </a:xfrm>
+            <a:prstGeom prst="roundRect">
+              <a:avLst>
+                <a:gd name="adj" fmla="val 33333"/>
+              </a:avLst>
+            </a:prstGeom>
+            <a:solidFill>
+              <a:schemeClr val="accent2"/>
+            </a:solidFill>
+            <a:ln>
+              <a:noFill/>
+            </a:ln>
+          </p:spPr>
+        </p:sp>
+        <p:sp>
+          <p:nvSpPr>
+            <p:cNvPr id="41" name="Rectangle 41"/>
+            <p:cNvSpPr/>
+            <p:nvPr/>
+          </p:nvSpPr>
+          <p:spPr>
+            <a:xfrm>
+              <a:off x="10191750" y="6515100"/>
+              <a:ext cx="114300" cy="28575"/>
+            </a:xfrm>
+            <a:prstGeom prst="roundRect">
+              <a:avLst>
+                <a:gd name="adj" fmla="val 33333"/>
+              </a:avLst>
+            </a:prstGeom>
+            <a:solidFill>
+              <a:srgbClr val="D6DDE0"/>
+            </a:solidFill>
+            <a:ln>
+              <a:noFill/>
+            </a:ln>
+          </p:spPr>
+        </p:sp>
+        <p:sp>
+          <p:nvSpPr>
+            <p:cNvPr id="42" name="Rectangle 42"/>
+            <p:cNvSpPr/>
+            <p:nvPr/>
+          </p:nvSpPr>
+          <p:spPr>
+            <a:xfrm>
+              <a:off x="10382250" y="6515100"/>
+              <a:ext cx="114300" cy="28575"/>
+            </a:xfrm>
+            <a:prstGeom prst="roundRect">
+              <a:avLst>
+                <a:gd name="adj" fmla="val 33333"/>
+              </a:avLst>
+            </a:prstGeom>
+            <a:solidFill>
+              <a:srgbClr val="D6DDE0"/>
+            </a:solidFill>
+            <a:ln>
+              <a:noFill/>
+            </a:ln>
+          </p:spPr>
         </p:sp>
       </p:grpSp>
     </p:spTree>
@@ -26152,16 +28931,16 @@
       </p:grpSpPr>
       <p:grpSp>
         <p:nvGrpSpPr>
-          <p:cNvPr id="5" name="headline"/>
+          <p:cNvPr id="6" name="headline"/>
           <p:cNvGrpSpPr/>
           <p:nvPr/>
         </p:nvGrpSpPr>
         <p:grpSpPr>
           <a:xfrm>
             <a:off x="593598" y="257175"/>
-            <a:ext cx="5270688" cy="1082802"/>
+            <a:ext cx="5270688" cy="1085850"/>
             <a:chOff x="593598" y="257175"/>
-            <a:chExt cx="5270688" cy="1082802"/>
+            <a:chExt cx="5270688" cy="1085850"/>
           </a:xfrm>
         </p:grpSpPr>
         <p:sp>
@@ -26298,10 +29077,32 @@
             </a:p>
           </p:txBody>
         </p:sp>
+        <p:sp>
+          <p:nvSpPr>
+            <p:cNvPr id="5" name="Rectangle 5"/>
+            <p:cNvSpPr/>
+            <p:nvPr/>
+          </p:nvSpPr>
+          <p:spPr>
+            <a:xfrm>
+              <a:off x="609600" y="1314450"/>
+              <a:ext cx="762000" cy="28575"/>
+            </a:xfrm>
+            <a:prstGeom prst="rect">
+              <a:avLst/>
+            </a:prstGeom>
+            <a:solidFill>
+              <a:schemeClr val="accent1"/>
+            </a:solidFill>
+            <a:ln>
+              <a:noFill/>
+            </a:ln>
+          </p:spPr>
+        </p:sp>
       </p:grpSp>
       <p:grpSp>
         <p:nvGrpSpPr>
-          <p:cNvPr id="42" name="page-content"/>
+          <p:cNvPr id="43" name="page-content"/>
           <p:cNvGrpSpPr/>
           <p:nvPr/>
         </p:nvGrpSpPr>
@@ -26315,7 +29116,7 @@
         </p:grpSpPr>
         <p:sp>
           <p:nvSpPr>
-            <p:cNvPr id="6" name="Rectangle 6"/>
+            <p:cNvPr id="7" name="Rectangle 7"/>
             <p:cNvSpPr/>
             <p:nvPr/>
           </p:nvSpPr>
@@ -26339,7 +29140,7 @@
         </p:sp>
         <p:sp>
           <p:nvSpPr>
-            <p:cNvPr id="7" name="TextBox 7"/>
+            <p:cNvPr id="8" name="TextBox 8"/>
             <p:cNvSpPr txBox="1"/>
             <p:nvPr>
               <p:custDataLst>
@@ -26383,7 +29184,7 @@
         </p:sp>
         <p:sp>
           <p:nvSpPr>
-            <p:cNvPr id="8" name="TextBox 8"/>
+            <p:cNvPr id="9" name="TextBox 9"/>
             <p:cNvSpPr txBox="1"/>
             <p:nvPr>
               <p:custDataLst>
@@ -26427,7 +29228,7 @@
         </p:sp>
         <p:sp>
           <p:nvSpPr>
-            <p:cNvPr id="9" name="TextBox 9"/>
+            <p:cNvPr id="10" name="TextBox 10"/>
             <p:cNvSpPr txBox="1"/>
             <p:nvPr>
               <p:custDataLst>
@@ -26482,7 +29283,7 @@
         </p:sp>
         <p:sp>
           <p:nvSpPr>
-            <p:cNvPr id="10" name="TextBox 10"/>
+            <p:cNvPr id="11" name="TextBox 11"/>
             <p:cNvSpPr txBox="1"/>
             <p:nvPr>
               <p:custDataLst>
@@ -26526,7 +29327,7 @@
         </p:sp>
         <p:sp>
           <p:nvSpPr>
-            <p:cNvPr id="11" name="TextBox 11"/>
+            <p:cNvPr id="12" name="TextBox 12"/>
             <p:cNvSpPr txBox="1"/>
             <p:nvPr>
               <p:custDataLst>
@@ -26581,7 +29382,7 @@
         </p:sp>
         <p:sp>
           <p:nvSpPr>
-            <p:cNvPr id="12" name="TextBox 12"/>
+            <p:cNvPr id="13" name="TextBox 13"/>
             <p:cNvSpPr txBox="1"/>
             <p:nvPr>
               <p:custDataLst>
@@ -26625,7 +29426,7 @@
         </p:sp>
         <p:sp>
           <p:nvSpPr>
-            <p:cNvPr id="13" name="Rectangle 13"/>
+            <p:cNvPr id="14" name="Rectangle 14"/>
             <p:cNvSpPr/>
             <p:nvPr/>
           </p:nvSpPr>
@@ -26649,7 +29450,7 @@
         </p:sp>
         <p:sp>
           <p:nvSpPr>
-            <p:cNvPr id="14" name="TextBox 14"/>
+            <p:cNvPr id="15" name="TextBox 15"/>
             <p:cNvSpPr txBox="1"/>
             <p:nvPr>
               <p:custDataLst>
@@ -26715,7 +29516,7 @@
         </p:sp>
         <p:sp>
           <p:nvSpPr>
-            <p:cNvPr id="15" name="Freeform 15"/>
+            <p:cNvPr id="16" name="Freeform 16"/>
             <p:cNvSpPr/>
             <p:nvPr/>
           </p:nvSpPr>
@@ -26757,7 +29558,7 @@
         </p:sp>
         <p:sp>
           <p:nvSpPr>
-            <p:cNvPr id="16" name="Freeform 16"/>
+            <p:cNvPr id="17" name="Freeform 17"/>
             <p:cNvSpPr/>
             <p:nvPr/>
           </p:nvSpPr>
@@ -26796,7 +29597,7 @@
         </p:sp>
         <p:sp>
           <p:nvSpPr>
-            <p:cNvPr id="17" name="Freeform 17"/>
+            <p:cNvPr id="18" name="Freeform 18"/>
             <p:cNvSpPr/>
             <p:nvPr/>
           </p:nvSpPr>
@@ -26832,7 +29633,7 @@
         </p:sp>
         <p:sp>
           <p:nvSpPr>
-            <p:cNvPr id="18" name="Freeform 18"/>
+            <p:cNvPr id="19" name="Freeform 19"/>
             <p:cNvSpPr/>
             <p:nvPr/>
           </p:nvSpPr>
@@ -26871,7 +29672,7 @@
         </p:sp>
         <p:sp>
           <p:nvSpPr>
-            <p:cNvPr id="19" name="Freeform 19"/>
+            <p:cNvPr id="20" name="Freeform 20"/>
             <p:cNvSpPr/>
             <p:nvPr/>
           </p:nvSpPr>
@@ -26910,7 +29711,7 @@
         </p:sp>
         <p:sp>
           <p:nvSpPr>
-            <p:cNvPr id="20" name="Freeform 20"/>
+            <p:cNvPr id="21" name="Freeform 21"/>
             <p:cNvSpPr/>
             <p:nvPr/>
           </p:nvSpPr>
@@ -26949,7 +29750,7 @@
         </p:sp>
         <p:sp>
           <p:nvSpPr>
-            <p:cNvPr id="21" name="Rectangle 21"/>
+            <p:cNvPr id="22" name="Rectangle 22"/>
             <p:cNvSpPr/>
             <p:nvPr/>
           </p:nvSpPr>
@@ -26973,7 +29774,7 @@
         </p:sp>
         <p:grpSp>
           <p:nvGrpSpPr>
-            <p:cNvPr id="25" name="Group 25"/>
+            <p:cNvPr id="26" name="Group 26"/>
             <p:cNvGrpSpPr/>
             <p:nvPr/>
           </p:nvGrpSpPr>
@@ -26987,7 +29788,7 @@
           </p:grpSpPr>
           <p:sp>
             <p:nvSpPr>
-              <p:cNvPr id="22" name="Ellipse 22"/>
+              <p:cNvPr id="23" name="Ellipse 23"/>
               <p:cNvSpPr/>
               <p:nvPr/>
             </p:nvSpPr>
@@ -27011,7 +29812,7 @@
           </p:sp>
           <p:sp>
             <p:nvSpPr>
-              <p:cNvPr id="23" name="Line 23"/>
+              <p:cNvPr id="24" name="Line 24"/>
               <p:cNvSpPr/>
               <p:nvPr/>
             </p:nvSpPr>
@@ -27047,7 +29848,7 @@
           </p:sp>
           <p:sp>
             <p:nvSpPr>
-              <p:cNvPr id="24" name="Line 24"/>
+              <p:cNvPr id="25" name="Line 25"/>
               <p:cNvSpPr/>
               <p:nvPr/>
             </p:nvSpPr>
@@ -27084,7 +29885,7 @@
         </p:grpSp>
         <p:sp>
           <p:nvSpPr>
-            <p:cNvPr id="26" name="TextBox 26"/>
+            <p:cNvPr id="27" name="TextBox 27"/>
             <p:cNvSpPr txBox="1"/>
             <p:nvPr>
               <p:custDataLst>
@@ -27128,7 +29929,7 @@
         </p:sp>
         <p:sp>
           <p:nvSpPr>
-            <p:cNvPr id="27" name="TextBox 27"/>
+            <p:cNvPr id="28" name="TextBox 28"/>
             <p:cNvSpPr txBox="1"/>
             <p:nvPr>
               <p:custDataLst>
@@ -27172,7 +29973,7 @@
         </p:sp>
         <p:sp>
           <p:nvSpPr>
-            <p:cNvPr id="28" name="Rectangle 28"/>
+            <p:cNvPr id="29" name="Rectangle 29"/>
             <p:cNvSpPr/>
             <p:nvPr/>
           </p:nvSpPr>
@@ -27196,7 +29997,7 @@
         </p:sp>
         <p:grpSp>
           <p:nvGrpSpPr>
-            <p:cNvPr id="31" name="Group 31"/>
+            <p:cNvPr id="32" name="Group 32"/>
             <p:cNvGrpSpPr/>
             <p:nvPr/>
           </p:nvGrpSpPr>
@@ -27210,7 +30011,7 @@
           </p:grpSpPr>
           <p:sp>
             <p:nvSpPr>
-              <p:cNvPr id="29" name="Ellipse 29"/>
+              <p:cNvPr id="30" name="Ellipse 30"/>
               <p:cNvSpPr/>
               <p:nvPr/>
             </p:nvSpPr>
@@ -27234,7 +30035,7 @@
           </p:sp>
           <p:sp>
             <p:nvSpPr>
-              <p:cNvPr id="30" name="Line 30"/>
+              <p:cNvPr id="31" name="Line 31"/>
               <p:cNvSpPr/>
               <p:nvPr/>
             </p:nvSpPr>
@@ -27271,7 +30072,7 @@
         </p:grpSp>
         <p:sp>
           <p:nvSpPr>
-            <p:cNvPr id="32" name="TextBox 32"/>
+            <p:cNvPr id="33" name="TextBox 33"/>
             <p:cNvSpPr txBox="1"/>
             <p:nvPr>
               <p:custDataLst>
@@ -27315,7 +30116,7 @@
         </p:sp>
         <p:sp>
           <p:nvSpPr>
-            <p:cNvPr id="33" name="TextBox 33"/>
+            <p:cNvPr id="34" name="TextBox 34"/>
             <p:cNvSpPr txBox="1"/>
             <p:nvPr>
               <p:custDataLst>
@@ -27359,7 +30160,7 @@
         </p:sp>
         <p:sp>
           <p:nvSpPr>
-            <p:cNvPr id="34" name="Rectangle 34"/>
+            <p:cNvPr id="35" name="Rectangle 35"/>
             <p:cNvSpPr/>
             <p:nvPr/>
           </p:nvSpPr>
@@ -27383,7 +30184,7 @@
         </p:sp>
         <p:sp>
           <p:nvSpPr>
-            <p:cNvPr id="35" name="Ellipse 35"/>
+            <p:cNvPr id="36" name="Ellipse 36"/>
             <p:cNvSpPr/>
             <p:nvPr/>
           </p:nvSpPr>
@@ -27407,7 +30208,7 @@
         </p:sp>
         <p:sp>
           <p:nvSpPr>
-            <p:cNvPr id="36" name="TextBox 36"/>
+            <p:cNvPr id="37" name="TextBox 37"/>
             <p:cNvSpPr txBox="1"/>
             <p:nvPr>
               <p:custDataLst>
@@ -27451,7 +30252,7 @@
         </p:sp>
         <p:sp>
           <p:nvSpPr>
-            <p:cNvPr id="37" name="TextBox 37"/>
+            <p:cNvPr id="38" name="TextBox 38"/>
             <p:cNvSpPr txBox="1"/>
             <p:nvPr>
               <p:custDataLst>
@@ -27495,7 +30296,7 @@
         </p:sp>
         <p:sp>
           <p:nvSpPr>
-            <p:cNvPr id="38" name="TextBox 38"/>
+            <p:cNvPr id="39" name="TextBox 39"/>
             <p:cNvSpPr txBox="1"/>
             <p:nvPr>
               <p:custDataLst>
@@ -27539,7 +30340,7 @@
         </p:sp>
         <p:sp>
           <p:nvSpPr>
-            <p:cNvPr id="39" name="TextBox 39"/>
+            <p:cNvPr id="40" name="TextBox 40"/>
             <p:cNvSpPr txBox="1"/>
             <p:nvPr>
               <p:custDataLst>
@@ -27583,7 +30384,7 @@
         </p:sp>
         <p:sp>
           <p:nvSpPr>
-            <p:cNvPr id="40" name="Rectangle 40"/>
+            <p:cNvPr id="41" name="Rectangle 41"/>
             <p:cNvSpPr/>
             <p:nvPr/>
           </p:nvSpPr>
@@ -27607,7 +30408,7 @@
         </p:sp>
         <p:sp>
           <p:nvSpPr>
-            <p:cNvPr id="41" name="TextBox 41"/>
+            <p:cNvPr id="42" name="TextBox 42"/>
             <p:cNvSpPr txBox="1"/>
             <p:nvPr>
               <p:custDataLst>
@@ -27652,7 +30453,7 @@
       </p:grpSp>
       <p:grpSp>
         <p:nvGrpSpPr>
-          <p:cNvPr id="46" name="footer"/>
+          <p:cNvPr id="56" name="footer"/>
           <p:cNvGrpSpPr/>
           <p:nvPr/>
         </p:nvGrpSpPr>
@@ -27666,7 +30467,7 @@
         </p:grpSpPr>
         <p:sp>
           <p:nvSpPr>
-            <p:cNvPr id="43" name="Line 43"/>
+            <p:cNvPr id="44" name="Line 44"/>
             <p:cNvSpPr/>
             <p:nvPr/>
           </p:nvSpPr>
@@ -27702,7 +30503,7 @@
         </p:sp>
         <p:sp>
           <p:nvSpPr>
-            <p:cNvPr id="44" name="TextBox 44"/>
+            <p:cNvPr id="45" name="TextBox 45"/>
             <p:cNvSpPr txBox="1"/>
             <p:nvPr>
               <p:custDataLst>
@@ -27757,7 +30558,7 @@
         </p:sp>
         <p:sp>
           <p:nvSpPr>
-            <p:cNvPr id="45" name="TextBox 45"/>
+            <p:cNvPr id="46" name="TextBox 46"/>
             <p:cNvSpPr txBox="1"/>
             <p:nvPr>
               <p:custDataLst>
@@ -27798,6 +30599,222 @@
               </a:r>
             </a:p>
           </p:txBody>
+        </p:sp>
+        <p:sp>
+          <p:nvSpPr>
+            <p:cNvPr id="47" name="Rectangle 47"/>
+            <p:cNvSpPr/>
+            <p:nvPr/>
+          </p:nvSpPr>
+          <p:spPr>
+            <a:xfrm>
+              <a:off x="8858250" y="6515100"/>
+              <a:ext cx="114300" cy="28575"/>
+            </a:xfrm>
+            <a:prstGeom prst="roundRect">
+              <a:avLst>
+                <a:gd name="adj" fmla="val 33333"/>
+              </a:avLst>
+            </a:prstGeom>
+            <a:solidFill>
+              <a:srgbClr val="D6DDE0"/>
+            </a:solidFill>
+            <a:ln>
+              <a:noFill/>
+            </a:ln>
+          </p:spPr>
+        </p:sp>
+        <p:sp>
+          <p:nvSpPr>
+            <p:cNvPr id="48" name="Rectangle 48"/>
+            <p:cNvSpPr/>
+            <p:nvPr/>
+          </p:nvSpPr>
+          <p:spPr>
+            <a:xfrm>
+              <a:off x="9048750" y="6515100"/>
+              <a:ext cx="114300" cy="28575"/>
+            </a:xfrm>
+            <a:prstGeom prst="roundRect">
+              <a:avLst>
+                <a:gd name="adj" fmla="val 33333"/>
+              </a:avLst>
+            </a:prstGeom>
+            <a:solidFill>
+              <a:srgbClr val="D6DDE0"/>
+            </a:solidFill>
+            <a:ln>
+              <a:noFill/>
+            </a:ln>
+          </p:spPr>
+        </p:sp>
+        <p:sp>
+          <p:nvSpPr>
+            <p:cNvPr id="49" name="Rectangle 49"/>
+            <p:cNvSpPr/>
+            <p:nvPr/>
+          </p:nvSpPr>
+          <p:spPr>
+            <a:xfrm>
+              <a:off x="9239250" y="6515100"/>
+              <a:ext cx="114300" cy="28575"/>
+            </a:xfrm>
+            <a:prstGeom prst="roundRect">
+              <a:avLst>
+                <a:gd name="adj" fmla="val 33333"/>
+              </a:avLst>
+            </a:prstGeom>
+            <a:solidFill>
+              <a:srgbClr val="D6DDE0"/>
+            </a:solidFill>
+            <a:ln>
+              <a:noFill/>
+            </a:ln>
+          </p:spPr>
+        </p:sp>
+        <p:sp>
+          <p:nvSpPr>
+            <p:cNvPr id="50" name="Rectangle 50"/>
+            <p:cNvSpPr/>
+            <p:nvPr/>
+          </p:nvSpPr>
+          <p:spPr>
+            <a:xfrm>
+              <a:off x="9429750" y="6515100"/>
+              <a:ext cx="114300" cy="28575"/>
+            </a:xfrm>
+            <a:prstGeom prst="roundRect">
+              <a:avLst>
+                <a:gd name="adj" fmla="val 33333"/>
+              </a:avLst>
+            </a:prstGeom>
+            <a:solidFill>
+              <a:srgbClr val="D6DDE0"/>
+            </a:solidFill>
+            <a:ln>
+              <a:noFill/>
+            </a:ln>
+          </p:spPr>
+        </p:sp>
+        <p:sp>
+          <p:nvSpPr>
+            <p:cNvPr id="51" name="Rectangle 51"/>
+            <p:cNvSpPr/>
+            <p:nvPr/>
+          </p:nvSpPr>
+          <p:spPr>
+            <a:xfrm>
+              <a:off x="9620250" y="6515100"/>
+              <a:ext cx="114300" cy="28575"/>
+            </a:xfrm>
+            <a:prstGeom prst="roundRect">
+              <a:avLst>
+                <a:gd name="adj" fmla="val 33333"/>
+              </a:avLst>
+            </a:prstGeom>
+            <a:solidFill>
+              <a:srgbClr val="D6DDE0"/>
+            </a:solidFill>
+            <a:ln>
+              <a:noFill/>
+            </a:ln>
+          </p:spPr>
+        </p:sp>
+        <p:sp>
+          <p:nvSpPr>
+            <p:cNvPr id="52" name="Rectangle 52"/>
+            <p:cNvSpPr/>
+            <p:nvPr/>
+          </p:nvSpPr>
+          <p:spPr>
+            <a:xfrm>
+              <a:off x="9810750" y="6515100"/>
+              <a:ext cx="114300" cy="28575"/>
+            </a:xfrm>
+            <a:prstGeom prst="roundRect">
+              <a:avLst>
+                <a:gd name="adj" fmla="val 33333"/>
+              </a:avLst>
+            </a:prstGeom>
+            <a:solidFill>
+              <a:srgbClr val="D6DDE0"/>
+            </a:solidFill>
+            <a:ln>
+              <a:noFill/>
+            </a:ln>
+          </p:spPr>
+        </p:sp>
+        <p:sp>
+          <p:nvSpPr>
+            <p:cNvPr id="53" name="Rectangle 53"/>
+            <p:cNvSpPr/>
+            <p:nvPr/>
+          </p:nvSpPr>
+          <p:spPr>
+            <a:xfrm>
+              <a:off x="10001250" y="6515100"/>
+              <a:ext cx="114300" cy="28575"/>
+            </a:xfrm>
+            <a:prstGeom prst="roundRect">
+              <a:avLst>
+                <a:gd name="adj" fmla="val 33333"/>
+              </a:avLst>
+            </a:prstGeom>
+            <a:solidFill>
+              <a:srgbClr val="D6DDE0"/>
+            </a:solidFill>
+            <a:ln>
+              <a:noFill/>
+            </a:ln>
+          </p:spPr>
+        </p:sp>
+        <p:sp>
+          <p:nvSpPr>
+            <p:cNvPr id="54" name="Rectangle 54"/>
+            <p:cNvSpPr/>
+            <p:nvPr/>
+          </p:nvSpPr>
+          <p:spPr>
+            <a:xfrm>
+              <a:off x="10191750" y="6515100"/>
+              <a:ext cx="114300" cy="28575"/>
+            </a:xfrm>
+            <a:prstGeom prst="roundRect">
+              <a:avLst>
+                <a:gd name="adj" fmla="val 33333"/>
+              </a:avLst>
+            </a:prstGeom>
+            <a:solidFill>
+              <a:schemeClr val="accent2"/>
+            </a:solidFill>
+            <a:ln>
+              <a:noFill/>
+            </a:ln>
+          </p:spPr>
+        </p:sp>
+        <p:sp>
+          <p:nvSpPr>
+            <p:cNvPr id="55" name="Rectangle 55"/>
+            <p:cNvSpPr/>
+            <p:nvPr/>
+          </p:nvSpPr>
+          <p:spPr>
+            <a:xfrm>
+              <a:off x="10382250" y="6515100"/>
+              <a:ext cx="114300" cy="28575"/>
+            </a:xfrm>
+            <a:prstGeom prst="roundRect">
+              <a:avLst>
+                <a:gd name="adj" fmla="val 33333"/>
+              </a:avLst>
+            </a:prstGeom>
+            <a:solidFill>
+              <a:srgbClr val="D6DDE0"/>
+            </a:solidFill>
+            <a:ln>
+              <a:noFill/>
+            </a:ln>
+          </p:spPr>
         </p:sp>
       </p:grpSp>
     </p:spTree>
@@ -27835,16 +30852,16 @@
       </p:grpSpPr>
       <p:grpSp>
         <p:nvGrpSpPr>
-          <p:cNvPr id="5" name="headline"/>
+          <p:cNvPr id="6" name="headline"/>
           <p:cNvGrpSpPr/>
           <p:nvPr/>
         </p:nvGrpSpPr>
         <p:grpSpPr>
           <a:xfrm>
             <a:off x="593598" y="257175"/>
-            <a:ext cx="5968746" cy="1082802"/>
+            <a:ext cx="5968746" cy="1085850"/>
             <a:chOff x="593598" y="257175"/>
-            <a:chExt cx="5968746" cy="1082802"/>
+            <a:chExt cx="5968746" cy="1085850"/>
           </a:xfrm>
         </p:grpSpPr>
         <p:sp>
@@ -27959,10 +30976,32 @@
             </a:p>
           </p:txBody>
         </p:sp>
+        <p:sp>
+          <p:nvSpPr>
+            <p:cNvPr id="5" name="Rectangle 5"/>
+            <p:cNvSpPr/>
+            <p:nvPr/>
+          </p:nvSpPr>
+          <p:spPr>
+            <a:xfrm>
+              <a:off x="609600" y="1314450"/>
+              <a:ext cx="762000" cy="28575"/>
+            </a:xfrm>
+            <a:prstGeom prst="rect">
+              <a:avLst/>
+            </a:prstGeom>
+            <a:solidFill>
+              <a:schemeClr val="accent1"/>
+            </a:solidFill>
+            <a:ln>
+              <a:noFill/>
+            </a:ln>
+          </p:spPr>
+        </p:sp>
       </p:grpSp>
       <p:grpSp>
         <p:nvGrpSpPr>
-          <p:cNvPr id="48" name="page-content"/>
+          <p:cNvPr id="49" name="page-content"/>
           <p:cNvGrpSpPr/>
           <p:nvPr/>
         </p:nvGrpSpPr>
@@ -27976,7 +31015,7 @@
         </p:grpSpPr>
         <p:sp>
           <p:nvSpPr>
-            <p:cNvPr id="6" name="TextBox 6"/>
+            <p:cNvPr id="7" name="TextBox 7"/>
             <p:cNvSpPr txBox="1"/>
             <p:nvPr>
               <p:custDataLst>
@@ -28020,7 +31059,7 @@
         </p:sp>
         <p:sp>
           <p:nvSpPr>
-            <p:cNvPr id="7" name="Rectangle 7"/>
+            <p:cNvPr id="8" name="Rectangle 8"/>
             <p:cNvSpPr/>
             <p:nvPr/>
           </p:nvSpPr>
@@ -28044,7 +31083,7 @@
         </p:sp>
         <p:grpSp>
           <p:nvGrpSpPr>
-            <p:cNvPr id="13" name="Group 13"/>
+            <p:cNvPr id="14" name="Group 14"/>
             <p:cNvGrpSpPr/>
             <p:nvPr/>
           </p:nvGrpSpPr>
@@ -28058,7 +31097,7 @@
           </p:grpSpPr>
           <p:sp>
             <p:nvSpPr>
-              <p:cNvPr id="8" name="Rectangle 8"/>
+              <p:cNvPr id="9" name="Rectangle 9"/>
               <p:cNvSpPr/>
               <p:nvPr/>
             </p:nvSpPr>
@@ -28084,7 +31123,7 @@
           </p:sp>
           <p:sp>
             <p:nvSpPr>
-              <p:cNvPr id="9" name="Line 9"/>
+              <p:cNvPr id="10" name="Line 10"/>
               <p:cNvSpPr/>
               <p:nvPr/>
             </p:nvSpPr>
@@ -28120,7 +31159,7 @@
           </p:sp>
           <p:sp>
             <p:nvSpPr>
-              <p:cNvPr id="10" name="Line 10"/>
+              <p:cNvPr id="11" name="Line 11"/>
               <p:cNvSpPr/>
               <p:nvPr/>
             </p:nvSpPr>
@@ -28156,7 +31195,7 @@
           </p:sp>
           <p:sp>
             <p:nvSpPr>
-              <p:cNvPr id="11" name="Line 11"/>
+              <p:cNvPr id="12" name="Line 12"/>
               <p:cNvSpPr/>
               <p:nvPr/>
             </p:nvSpPr>
@@ -28192,7 +31231,7 @@
           </p:sp>
           <p:sp>
             <p:nvSpPr>
-              <p:cNvPr id="12" name="Line 12"/>
+              <p:cNvPr id="13" name="Line 13"/>
               <p:cNvSpPr/>
               <p:nvPr/>
             </p:nvSpPr>
@@ -28229,7 +31268,7 @@
         </p:grpSp>
         <p:sp>
           <p:nvSpPr>
-            <p:cNvPr id="14" name="TextBox 14"/>
+            <p:cNvPr id="15" name="TextBox 15"/>
             <p:cNvSpPr txBox="1"/>
             <p:nvPr>
               <p:custDataLst>
@@ -28273,7 +31312,7 @@
         </p:sp>
         <p:sp>
           <p:nvSpPr>
-            <p:cNvPr id="15" name="TextBox 15"/>
+            <p:cNvPr id="16" name="TextBox 16"/>
             <p:cNvSpPr txBox="1"/>
             <p:nvPr>
               <p:custDataLst>
@@ -28317,7 +31356,7 @@
         </p:sp>
         <p:sp>
           <p:nvSpPr>
-            <p:cNvPr id="16" name="Freeform 16"/>
+            <p:cNvPr id="17" name="Freeform 17"/>
             <p:cNvSpPr/>
             <p:nvPr/>
           </p:nvSpPr>
@@ -28353,7 +31392,7 @@
         </p:sp>
         <p:sp>
           <p:nvSpPr>
-            <p:cNvPr id="17" name="Freeform 17"/>
+            <p:cNvPr id="18" name="Freeform 18"/>
             <p:cNvSpPr/>
             <p:nvPr/>
           </p:nvSpPr>
@@ -28392,7 +31431,7 @@
         </p:sp>
         <p:sp>
           <p:nvSpPr>
-            <p:cNvPr id="18" name="Rectangle 18"/>
+            <p:cNvPr id="19" name="Rectangle 19"/>
             <p:cNvSpPr/>
             <p:nvPr/>
           </p:nvSpPr>
@@ -28416,7 +31455,7 @@
         </p:sp>
         <p:grpSp>
           <p:nvGrpSpPr>
-            <p:cNvPr id="21" name="Group 21"/>
+            <p:cNvPr id="22" name="Group 22"/>
             <p:cNvGrpSpPr/>
             <p:nvPr/>
           </p:nvGrpSpPr>
@@ -28430,7 +31469,7 @@
           </p:grpSpPr>
           <p:sp>
             <p:nvSpPr>
-              <p:cNvPr id="19" name="Ellipse 19"/>
+              <p:cNvPr id="20" name="Ellipse 20"/>
               <p:cNvSpPr/>
               <p:nvPr/>
             </p:nvSpPr>
@@ -28454,7 +31493,7 @@
           </p:sp>
           <p:sp>
             <p:nvSpPr>
-              <p:cNvPr id="20" name="Line 20"/>
+              <p:cNvPr id="21" name="Line 21"/>
               <p:cNvSpPr/>
               <p:nvPr/>
             </p:nvSpPr>
@@ -28491,7 +31530,7 @@
         </p:grpSp>
         <p:sp>
           <p:nvSpPr>
-            <p:cNvPr id="22" name="TextBox 22"/>
+            <p:cNvPr id="23" name="TextBox 23"/>
             <p:cNvSpPr txBox="1"/>
             <p:nvPr>
               <p:custDataLst>
@@ -28535,7 +31574,7 @@
         </p:sp>
         <p:sp>
           <p:nvSpPr>
-            <p:cNvPr id="23" name="TextBox 23"/>
+            <p:cNvPr id="24" name="TextBox 24"/>
             <p:cNvSpPr txBox="1"/>
             <p:nvPr>
               <p:custDataLst>
@@ -28590,7 +31629,7 @@
         </p:sp>
         <p:sp>
           <p:nvSpPr>
-            <p:cNvPr id="24" name="Freeform 24"/>
+            <p:cNvPr id="25" name="Freeform 25"/>
             <p:cNvSpPr/>
             <p:nvPr/>
           </p:nvSpPr>
@@ -28626,7 +31665,7 @@
         </p:sp>
         <p:sp>
           <p:nvSpPr>
-            <p:cNvPr id="25" name="Freeform 25"/>
+            <p:cNvPr id="26" name="Freeform 26"/>
             <p:cNvSpPr/>
             <p:nvPr/>
           </p:nvSpPr>
@@ -28665,7 +31704,7 @@
         </p:sp>
         <p:sp>
           <p:nvSpPr>
-            <p:cNvPr id="26" name="Rectangle 26"/>
+            <p:cNvPr id="27" name="Rectangle 27"/>
             <p:cNvSpPr/>
             <p:nvPr/>
           </p:nvSpPr>
@@ -28689,7 +31728,7 @@
         </p:sp>
         <p:grpSp>
           <p:nvGrpSpPr>
-            <p:cNvPr id="30" name="Group 30"/>
+            <p:cNvPr id="31" name="Group 31"/>
             <p:cNvGrpSpPr/>
             <p:nvPr/>
           </p:nvGrpSpPr>
@@ -28703,7 +31742,7 @@
           </p:grpSpPr>
           <p:sp>
             <p:nvSpPr>
-              <p:cNvPr id="27" name="Ellipse 27"/>
+              <p:cNvPr id="28" name="Ellipse 28"/>
               <p:cNvSpPr/>
               <p:nvPr/>
             </p:nvSpPr>
@@ -28727,7 +31766,7 @@
           </p:sp>
           <p:sp>
             <p:nvSpPr>
-              <p:cNvPr id="28" name="Line 28"/>
+              <p:cNvPr id="29" name="Line 29"/>
               <p:cNvSpPr/>
               <p:nvPr/>
             </p:nvSpPr>
@@ -28763,7 +31802,7 @@
           </p:sp>
           <p:sp>
             <p:nvSpPr>
-              <p:cNvPr id="29" name="Line 29"/>
+              <p:cNvPr id="30" name="Line 30"/>
               <p:cNvSpPr/>
               <p:nvPr/>
             </p:nvSpPr>
@@ -28800,7 +31839,7 @@
         </p:grpSp>
         <p:sp>
           <p:nvSpPr>
-            <p:cNvPr id="31" name="TextBox 31"/>
+            <p:cNvPr id="32" name="TextBox 32"/>
             <p:cNvSpPr txBox="1"/>
             <p:nvPr>
               <p:custDataLst>
@@ -28844,7 +31883,7 @@
         </p:sp>
         <p:sp>
           <p:nvSpPr>
-            <p:cNvPr id="32" name="TextBox 32"/>
+            <p:cNvPr id="33" name="TextBox 33"/>
             <p:cNvSpPr txBox="1"/>
             <p:nvPr>
               <p:custDataLst>
@@ -28888,7 +31927,7 @@
         </p:sp>
         <p:sp>
           <p:nvSpPr>
-            <p:cNvPr id="33" name="Freeform 33"/>
+            <p:cNvPr id="34" name="Freeform 34"/>
             <p:cNvSpPr/>
             <p:nvPr/>
           </p:nvSpPr>
@@ -28924,7 +31963,7 @@
         </p:sp>
         <p:sp>
           <p:nvSpPr>
-            <p:cNvPr id="34" name="Freeform 34"/>
+            <p:cNvPr id="35" name="Freeform 35"/>
             <p:cNvSpPr/>
             <p:nvPr/>
           </p:nvSpPr>
@@ -28963,7 +32002,7 @@
         </p:sp>
         <p:sp>
           <p:nvSpPr>
-            <p:cNvPr id="35" name="Rectangle 35"/>
+            <p:cNvPr id="36" name="Rectangle 36"/>
             <p:cNvSpPr/>
             <p:nvPr/>
           </p:nvSpPr>
@@ -28987,7 +32026,7 @@
         </p:sp>
         <p:grpSp>
           <p:nvGrpSpPr>
-            <p:cNvPr id="41" name="Group 41"/>
+            <p:cNvPr id="42" name="Group 42"/>
             <p:cNvGrpSpPr/>
             <p:nvPr/>
           </p:nvGrpSpPr>
@@ -29001,7 +32040,7 @@
           </p:grpSpPr>
           <p:sp>
             <p:nvSpPr>
-              <p:cNvPr id="36" name="Ellipse 36"/>
+              <p:cNvPr id="37" name="Ellipse 37"/>
               <p:cNvSpPr/>
               <p:nvPr/>
             </p:nvSpPr>
@@ -29025,7 +32064,7 @@
           </p:sp>
           <p:sp>
             <p:nvSpPr>
-              <p:cNvPr id="37" name="Line 37"/>
+              <p:cNvPr id="38" name="Line 38"/>
               <p:cNvSpPr/>
               <p:nvPr/>
             </p:nvSpPr>
@@ -29061,7 +32100,7 @@
           </p:sp>
           <p:sp>
             <p:nvSpPr>
-              <p:cNvPr id="38" name="Line 38"/>
+              <p:cNvPr id="39" name="Line 39"/>
               <p:cNvSpPr/>
               <p:nvPr/>
             </p:nvSpPr>
@@ -29097,7 +32136,7 @@
           </p:sp>
           <p:sp>
             <p:nvSpPr>
-              <p:cNvPr id="39" name="Line 39"/>
+              <p:cNvPr id="40" name="Line 40"/>
               <p:cNvSpPr/>
               <p:nvPr/>
             </p:nvSpPr>
@@ -29133,7 +32172,7 @@
           </p:sp>
           <p:sp>
             <p:nvSpPr>
-              <p:cNvPr id="40" name="Line 40"/>
+              <p:cNvPr id="41" name="Line 41"/>
               <p:cNvSpPr/>
               <p:nvPr/>
             </p:nvSpPr>
@@ -29170,7 +32209,7 @@
         </p:grpSp>
         <p:sp>
           <p:nvSpPr>
-            <p:cNvPr id="42" name="TextBox 42"/>
+            <p:cNvPr id="43" name="TextBox 43"/>
             <p:cNvSpPr txBox="1"/>
             <p:nvPr>
               <p:custDataLst>
@@ -29214,7 +32253,7 @@
         </p:sp>
         <p:sp>
           <p:nvSpPr>
-            <p:cNvPr id="43" name="TextBox 43"/>
+            <p:cNvPr id="44" name="TextBox 44"/>
             <p:cNvSpPr txBox="1"/>
             <p:nvPr>
               <p:custDataLst>
@@ -29258,7 +32297,7 @@
         </p:sp>
         <p:sp>
           <p:nvSpPr>
-            <p:cNvPr id="44" name="Rectangle 44"/>
+            <p:cNvPr id="45" name="Rectangle 45"/>
             <p:cNvSpPr/>
             <p:nvPr/>
           </p:nvSpPr>
@@ -29282,7 +32321,7 @@
         </p:sp>
         <p:sp>
           <p:nvSpPr>
-            <p:cNvPr id="45" name="TextBox 45"/>
+            <p:cNvPr id="46" name="TextBox 46"/>
             <p:cNvSpPr txBox="1"/>
             <p:nvPr>
               <p:custDataLst>
@@ -29348,7 +32387,7 @@
         </p:sp>
         <p:sp>
           <p:nvSpPr>
-            <p:cNvPr id="46" name="TextBox 46"/>
+            <p:cNvPr id="47" name="TextBox 47"/>
             <p:cNvSpPr txBox="1"/>
             <p:nvPr>
               <p:custDataLst>
@@ -29414,7 +32453,7 @@
         </p:sp>
         <p:sp>
           <p:nvSpPr>
-            <p:cNvPr id="47" name="TextBox 47"/>
+            <p:cNvPr id="48" name="TextBox 48"/>
             <p:cNvSpPr txBox="1"/>
             <p:nvPr>
               <p:custDataLst>
@@ -29459,7 +32498,7 @@
       </p:grpSp>
       <p:grpSp>
         <p:nvGrpSpPr>
-          <p:cNvPr id="52" name="footer"/>
+          <p:cNvPr id="62" name="footer"/>
           <p:cNvGrpSpPr/>
           <p:nvPr/>
         </p:nvGrpSpPr>
@@ -29473,7 +32512,7 @@
         </p:grpSpPr>
         <p:sp>
           <p:nvSpPr>
-            <p:cNvPr id="49" name="Line 49"/>
+            <p:cNvPr id="50" name="Line 50"/>
             <p:cNvSpPr/>
             <p:nvPr/>
           </p:nvSpPr>
@@ -29509,7 +32548,7 @@
         </p:sp>
         <p:sp>
           <p:nvSpPr>
-            <p:cNvPr id="50" name="TextBox 50"/>
+            <p:cNvPr id="51" name="TextBox 51"/>
             <p:cNvSpPr txBox="1"/>
             <p:nvPr>
               <p:custDataLst>
@@ -29564,7 +32603,7 @@
         </p:sp>
         <p:sp>
           <p:nvSpPr>
-            <p:cNvPr id="51" name="TextBox 51"/>
+            <p:cNvPr id="52" name="TextBox 52"/>
             <p:cNvSpPr txBox="1"/>
             <p:nvPr>
               <p:custDataLst>
@@ -29605,6 +32644,222 @@
               </a:r>
             </a:p>
           </p:txBody>
+        </p:sp>
+        <p:sp>
+          <p:nvSpPr>
+            <p:cNvPr id="53" name="Rectangle 53"/>
+            <p:cNvSpPr/>
+            <p:nvPr/>
+          </p:nvSpPr>
+          <p:spPr>
+            <a:xfrm>
+              <a:off x="8858250" y="6515100"/>
+              <a:ext cx="114300" cy="28575"/>
+            </a:xfrm>
+            <a:prstGeom prst="roundRect">
+              <a:avLst>
+                <a:gd name="adj" fmla="val 33333"/>
+              </a:avLst>
+            </a:prstGeom>
+            <a:solidFill>
+              <a:srgbClr val="D6DDE0"/>
+            </a:solidFill>
+            <a:ln>
+              <a:noFill/>
+            </a:ln>
+          </p:spPr>
+        </p:sp>
+        <p:sp>
+          <p:nvSpPr>
+            <p:cNvPr id="54" name="Rectangle 54"/>
+            <p:cNvSpPr/>
+            <p:nvPr/>
+          </p:nvSpPr>
+          <p:spPr>
+            <a:xfrm>
+              <a:off x="9048750" y="6515100"/>
+              <a:ext cx="114300" cy="28575"/>
+            </a:xfrm>
+            <a:prstGeom prst="roundRect">
+              <a:avLst>
+                <a:gd name="adj" fmla="val 33333"/>
+              </a:avLst>
+            </a:prstGeom>
+            <a:solidFill>
+              <a:srgbClr val="D6DDE0"/>
+            </a:solidFill>
+            <a:ln>
+              <a:noFill/>
+            </a:ln>
+          </p:spPr>
+        </p:sp>
+        <p:sp>
+          <p:nvSpPr>
+            <p:cNvPr id="55" name="Rectangle 55"/>
+            <p:cNvSpPr/>
+            <p:nvPr/>
+          </p:nvSpPr>
+          <p:spPr>
+            <a:xfrm>
+              <a:off x="9239250" y="6515100"/>
+              <a:ext cx="114300" cy="28575"/>
+            </a:xfrm>
+            <a:prstGeom prst="roundRect">
+              <a:avLst>
+                <a:gd name="adj" fmla="val 33333"/>
+              </a:avLst>
+            </a:prstGeom>
+            <a:solidFill>
+              <a:srgbClr val="D6DDE0"/>
+            </a:solidFill>
+            <a:ln>
+              <a:noFill/>
+            </a:ln>
+          </p:spPr>
+        </p:sp>
+        <p:sp>
+          <p:nvSpPr>
+            <p:cNvPr id="56" name="Rectangle 56"/>
+            <p:cNvSpPr/>
+            <p:nvPr/>
+          </p:nvSpPr>
+          <p:spPr>
+            <a:xfrm>
+              <a:off x="9429750" y="6515100"/>
+              <a:ext cx="114300" cy="28575"/>
+            </a:xfrm>
+            <a:prstGeom prst="roundRect">
+              <a:avLst>
+                <a:gd name="adj" fmla="val 33333"/>
+              </a:avLst>
+            </a:prstGeom>
+            <a:solidFill>
+              <a:srgbClr val="D6DDE0"/>
+            </a:solidFill>
+            <a:ln>
+              <a:noFill/>
+            </a:ln>
+          </p:spPr>
+        </p:sp>
+        <p:sp>
+          <p:nvSpPr>
+            <p:cNvPr id="57" name="Rectangle 57"/>
+            <p:cNvSpPr/>
+            <p:nvPr/>
+          </p:nvSpPr>
+          <p:spPr>
+            <a:xfrm>
+              <a:off x="9620250" y="6515100"/>
+              <a:ext cx="114300" cy="28575"/>
+            </a:xfrm>
+            <a:prstGeom prst="roundRect">
+              <a:avLst>
+                <a:gd name="adj" fmla="val 33333"/>
+              </a:avLst>
+            </a:prstGeom>
+            <a:solidFill>
+              <a:srgbClr val="D6DDE0"/>
+            </a:solidFill>
+            <a:ln>
+              <a:noFill/>
+            </a:ln>
+          </p:spPr>
+        </p:sp>
+        <p:sp>
+          <p:nvSpPr>
+            <p:cNvPr id="58" name="Rectangle 58"/>
+            <p:cNvSpPr/>
+            <p:nvPr/>
+          </p:nvSpPr>
+          <p:spPr>
+            <a:xfrm>
+              <a:off x="9810750" y="6515100"/>
+              <a:ext cx="114300" cy="28575"/>
+            </a:xfrm>
+            <a:prstGeom prst="roundRect">
+              <a:avLst>
+                <a:gd name="adj" fmla="val 33333"/>
+              </a:avLst>
+            </a:prstGeom>
+            <a:solidFill>
+              <a:srgbClr val="D6DDE0"/>
+            </a:solidFill>
+            <a:ln>
+              <a:noFill/>
+            </a:ln>
+          </p:spPr>
+        </p:sp>
+        <p:sp>
+          <p:nvSpPr>
+            <p:cNvPr id="59" name="Rectangle 59"/>
+            <p:cNvSpPr/>
+            <p:nvPr/>
+          </p:nvSpPr>
+          <p:spPr>
+            <a:xfrm>
+              <a:off x="10001250" y="6515100"/>
+              <a:ext cx="114300" cy="28575"/>
+            </a:xfrm>
+            <a:prstGeom prst="roundRect">
+              <a:avLst>
+                <a:gd name="adj" fmla="val 33333"/>
+              </a:avLst>
+            </a:prstGeom>
+            <a:solidFill>
+              <a:srgbClr val="D6DDE0"/>
+            </a:solidFill>
+            <a:ln>
+              <a:noFill/>
+            </a:ln>
+          </p:spPr>
+        </p:sp>
+        <p:sp>
+          <p:nvSpPr>
+            <p:cNvPr id="60" name="Rectangle 60"/>
+            <p:cNvSpPr/>
+            <p:nvPr/>
+          </p:nvSpPr>
+          <p:spPr>
+            <a:xfrm>
+              <a:off x="10191750" y="6515100"/>
+              <a:ext cx="114300" cy="28575"/>
+            </a:xfrm>
+            <a:prstGeom prst="roundRect">
+              <a:avLst>
+                <a:gd name="adj" fmla="val 33333"/>
+              </a:avLst>
+            </a:prstGeom>
+            <a:solidFill>
+              <a:srgbClr val="D6DDE0"/>
+            </a:solidFill>
+            <a:ln>
+              <a:noFill/>
+            </a:ln>
+          </p:spPr>
+        </p:sp>
+        <p:sp>
+          <p:nvSpPr>
+            <p:cNvPr id="61" name="Rectangle 61"/>
+            <p:cNvSpPr/>
+            <p:nvPr/>
+          </p:nvSpPr>
+          <p:spPr>
+            <a:xfrm>
+              <a:off x="10382250" y="6515100"/>
+              <a:ext cx="114300" cy="28575"/>
+            </a:xfrm>
+            <a:prstGeom prst="roundRect">
+              <a:avLst>
+                <a:gd name="adj" fmla="val 33333"/>
+              </a:avLst>
+            </a:prstGeom>
+            <a:solidFill>
+              <a:schemeClr val="accent2"/>
+            </a:solidFill>
+            <a:ln>
+              <a:noFill/>
+            </a:ln>
+          </p:spPr>
         </p:sp>
       </p:grpSp>
     </p:spTree>

--- a/deliverables/決賽簡報_AI資安框架.pptx
+++ b/deliverables/決賽簡報_AI資安框架.pptx
@@ -1407,7 +1407,7 @@
                 <a:ea typeface="DFKai-SB"/>
                 <a:cs typeface="Times New Roman"/>
               </a:rPr>
-              <a:t>10/29/2026</a:t>
+              <a:t>10/30/2026</a:t>
             </a:fld>
             <a:endParaRPr lang="zh-TW">
               <a:latin typeface="Times New Roman"/>
@@ -1543,7 +1543,7 @@
                 <a:ea typeface="DFKai-SB"/>
                 <a:cs typeface="Times New Roman"/>
               </a:rPr>
-              <a:t>10/29/2026</a:t>
+              <a:t>10/30/2026</a:t>
             </a:fld>
             <a:endParaRPr lang="zh-TW">
               <a:latin typeface="Times New Roman"/>
@@ -6702,9 +6702,9 @@
             <a:p>
               <a:pPr algn="ctr"/>
               <a:r>
-                <a:rPr lang="zh-TW" sz="2850" dirty="0">
+                <a:rPr lang="zh-CN" sz="2850" dirty="0">
                   <a:solidFill>
-                    <a:srgbClr val="245EA8"/>
+                    <a:srgbClr val="087F8C"/>
                   </a:solidFill>
                   <a:latin typeface="Times New Roman"/>
                   <a:ea typeface="DFKai-SB"/>
@@ -8289,9 +8289,9 @@
             <a:p>
               <a:pPr algn="ctr"/>
               <a:r>
-                <a:rPr lang="zh-TW" sz="2850" dirty="0">
+                <a:rPr lang="zh-CN" sz="2850" dirty="0">
                   <a:solidFill>
-                    <a:srgbClr val="245EA8"/>
+                    <a:srgbClr val="087F8C"/>
                   </a:solidFill>
                   <a:latin typeface="Times New Roman"/>
                   <a:ea typeface="DFKai-SB"/>
@@ -8302,7 +8302,7 @@
               <a:r>
                 <a:rPr lang="en-US" sz="2850" dirty="0">
                   <a:solidFill>
-                    <a:srgbClr val="245EA8"/>
+                    <a:srgbClr val="087F8C"/>
                   </a:solidFill>
                   <a:latin typeface="Times New Roman"/>
                   <a:ea typeface="DFKai-SB"/>
@@ -9774,9 +9774,9 @@
             <a:p>
               <a:pPr algn="ctr"/>
               <a:r>
-                <a:rPr lang="zh-TW" sz="2850" dirty="0">
+                <a:rPr lang="en-US" sz="2850" dirty="0">
                   <a:solidFill>
-                    <a:srgbClr val="245EA8"/>
+                    <a:srgbClr val="087F8C"/>
                   </a:solidFill>
                   <a:latin typeface="Times New Roman"/>
                   <a:ea typeface="DFKai-SB"/>
@@ -10724,9 +10724,9 @@
             <a:p>
               <a:pPr algn="ctr"/>
               <a:r>
-                <a:rPr lang="zh-TW" sz="2850" dirty="0">
+                <a:rPr lang="en-US" sz="2850" dirty="0">
                   <a:solidFill>
-                    <a:srgbClr val="245EA8"/>
+                    <a:srgbClr val="087F8C"/>
                   </a:solidFill>
                   <a:latin typeface="Times New Roman"/>
                   <a:ea typeface="DFKai-SB"/>
@@ -12887,9 +12887,9 @@
             <a:p>
               <a:pPr algn="ctr"/>
               <a:r>
-                <a:rPr lang="zh-TW" sz="2850" dirty="0">
+                <a:rPr lang="en-US" sz="2850" dirty="0">
                   <a:solidFill>
-                    <a:srgbClr val="245EA8"/>
+                    <a:srgbClr val="087F8C"/>
                   </a:solidFill>
                   <a:latin typeface="Times New Roman"/>
                   <a:ea typeface="DFKai-SB"/>
@@ -14507,9 +14507,9 @@
             <a:p>
               <a:pPr algn="ctr"/>
               <a:r>
-                <a:rPr lang="zh-TW" sz="2850" dirty="0">
+                <a:rPr lang="en-US" sz="2850" dirty="0">
                   <a:solidFill>
-                    <a:srgbClr val="245EA8"/>
+                    <a:srgbClr val="087F8C"/>
                   </a:solidFill>
                   <a:latin typeface="Times New Roman"/>
                   <a:ea typeface="DFKai-SB"/>
@@ -28227,9 +28227,9 @@
               <a:p>
                 <a:pPr algn="l"/>
                 <a:r>
-                  <a:rPr lang="zh-TW" sz="1720" b="1" dirty="0">
+                  <a:rPr lang="en-US" sz="1720" b="1" dirty="0">
                     <a:solidFill>
-                      <a:srgbClr val="245EA8"/>
+                      <a:srgbClr val="087F8C"/>
                     </a:solidFill>
                     <a:latin typeface="Times New Roman"/>
                     <a:ea typeface="DFKai-SB"/>
@@ -28333,16 +28333,16 @@
             </a:ln>
           </p:spPr>
           <p:txBody>
-            <a:bodyPr wrap="none" lIns="0" tIns="32" rIns="0" bIns="0" anchor="t" anchorCtr="0">
+            <a:bodyPr wrap="none" lIns="0" tIns="-38068" rIns="0" bIns="0" anchor="t" anchorCtr="0">
               <a:noAutofit/>
             </a:bodyPr>
             <a:lstStyle/>
             <a:p>
               <a:pPr algn="l"/>
               <a:r>
-                <a:rPr lang="zh-TW" sz="3600" dirty="0">
+                <a:rPr lang="en-US" sz="3900" dirty="0">
                   <a:solidFill>
-                    <a:srgbClr val="245EA8"/>
+                    <a:srgbClr val="087F8C"/>
                   </a:solidFill>
                   <a:latin typeface="Times New Roman"/>
                   <a:ea typeface="DFKai-SB"/>
@@ -29206,16 +29206,16 @@
             </a:ln>
           </p:spPr>
           <p:txBody>
-            <a:bodyPr wrap="none" lIns="0" tIns="32" rIns="0" bIns="0" anchor="t" anchorCtr="0">
+            <a:bodyPr wrap="none" lIns="0" tIns="-38068" rIns="0" bIns="0" anchor="t" anchorCtr="0">
               <a:noAutofit/>
             </a:bodyPr>
             <a:lstStyle/>
             <a:p>
               <a:pPr algn="l"/>
               <a:r>
-                <a:rPr lang="zh-TW" sz="3600" dirty="0">
+                <a:rPr lang="en-US" sz="3900" dirty="0">
                   <a:solidFill>
-                    <a:srgbClr val="245EA8"/>
+                    <a:srgbClr val="087F8C"/>
                   </a:solidFill>
                   <a:latin typeface="Times New Roman"/>
                   <a:ea typeface="DFKai-SB"/>
@@ -29305,16 +29305,16 @@
             </a:ln>
           </p:spPr>
           <p:txBody>
-            <a:bodyPr wrap="none" lIns="0" tIns="32" rIns="0" bIns="0" anchor="t" anchorCtr="0">
+            <a:bodyPr wrap="none" lIns="0" tIns="-38068" rIns="0" bIns="0" anchor="t" anchorCtr="0">
               <a:noAutofit/>
             </a:bodyPr>
             <a:lstStyle/>
             <a:p>
               <a:pPr algn="l"/>
               <a:r>
-                <a:rPr lang="zh-TW" sz="3300" dirty="0">
+                <a:rPr lang="en-US" sz="3600" dirty="0">
                   <a:solidFill>
-                    <a:srgbClr val="245EA8"/>
+                    <a:srgbClr val="087F8C"/>
                   </a:solidFill>
                   <a:latin typeface="Times New Roman"/>
                   <a:ea typeface="DFKai-SB"/>
@@ -29914,9 +29914,9 @@
             <a:p>
               <a:pPr algn="ctr"/>
               <a:r>
-                <a:rPr lang="zh-TW" sz="2920" dirty="0">
+                <a:rPr lang="en-US" sz="2920" dirty="0">
                   <a:solidFill>
-                    <a:srgbClr val="245EA8"/>
+                    <a:srgbClr val="087F8C"/>
                   </a:solidFill>
                   <a:latin typeface="Times New Roman"/>
                   <a:ea typeface="DFKai-SB"/>
@@ -30101,9 +30101,9 @@
             <a:p>
               <a:pPr algn="ctr"/>
               <a:r>
-                <a:rPr lang="zh-TW" sz="2920" dirty="0">
+                <a:rPr lang="en-US" sz="2920" dirty="0">
                   <a:solidFill>
-                    <a:srgbClr val="245EA8"/>
+                    <a:srgbClr val="087F8C"/>
                   </a:solidFill>
                   <a:latin typeface="Times New Roman"/>
                   <a:ea typeface="DFKai-SB"/>
@@ -30281,9 +30281,9 @@
             <a:p>
               <a:pPr algn="ctr"/>
               <a:r>
-                <a:rPr lang="zh-TW" sz="2920" dirty="0">
+                <a:rPr lang="en-US" sz="2920" dirty="0">
                   <a:solidFill>
-                    <a:srgbClr val="245EA8"/>
+                    <a:srgbClr val="087F8C"/>
                   </a:solidFill>
                   <a:latin typeface="Times New Roman"/>
                   <a:ea typeface="DFKai-SB"/>

--- a/deliverables/決賽簡報_AI資安框架.pptx
+++ b/deliverables/決賽簡報_AI資安框架.pptx
@@ -1981,7 +1981,7 @@
             <p:cNvSpPr/>
             <p:nvPr>
               <p:custDataLst>
-                <p:tags r:id="rId11"/>
+                <p:tags r:id="rIdAlignment3"/>
               </p:custDataLst>
             </p:nvPr>
           </p:nvSpPr>
@@ -2040,7 +2040,7 @@
             <p:cNvSpPr/>
             <p:nvPr>
               <p:custDataLst>
-                <p:tags r:id="rId3"/>
+                <p:tags r:id="rIdAlignment5"/>
               </p:custDataLst>
             </p:nvPr>
           </p:nvSpPr>
@@ -2084,7 +2084,7 @@
             <p:cNvSpPr/>
             <p:nvPr>
               <p:custDataLst>
-                <p:tags r:id="rId4"/>
+                <p:tags r:id="rIdAlignment6"/>
               </p:custDataLst>
             </p:nvPr>
           </p:nvSpPr>
@@ -2128,7 +2128,7 @@
             <p:cNvSpPr/>
             <p:nvPr>
               <p:custDataLst>
-                <p:tags r:id="rId5"/>
+                <p:tags r:id="rIdAlignment7"/>
               </p:custDataLst>
             </p:nvPr>
           </p:nvSpPr>
@@ -2194,7 +2194,7 @@
             <p:cNvSpPr/>
             <p:nvPr>
               <p:custDataLst>
-                <p:tags r:id="rId6"/>
+                <p:tags r:id="rIdAlignment8"/>
               </p:custDataLst>
             </p:nvPr>
           </p:nvSpPr>
@@ -2434,7 +2434,7 @@
             <p:cNvSpPr/>
             <p:nvPr>
               <p:custDataLst>
-                <p:tags r:id="rId7"/>
+                <p:tags r:id="rIdAlignment14"/>
               </p:custDataLst>
             </p:nvPr>
           </p:nvSpPr>
@@ -2767,7 +2767,7 @@
             <p:cNvSpPr/>
             <p:nvPr>
               <p:custDataLst>
-                <p:tags r:id="rId8"/>
+                <p:tags r:id="rIdAlignment24"/>
               </p:custDataLst>
             </p:nvPr>
           </p:nvSpPr>
@@ -3206,7 +3206,7 @@
             <p:cNvSpPr/>
             <p:nvPr>
               <p:custDataLst>
-                <p:tags r:id="rId9"/>
+                <p:tags r:id="rIdAlignment38"/>
               </p:custDataLst>
             </p:nvPr>
           </p:nvSpPr>
@@ -3512,7 +3512,7 @@
             <p:cNvSpPr/>
             <p:nvPr>
               <p:custDataLst>
-                <p:tags r:id="rId10"/>
+                <p:tags r:id="rIdAlignment46"/>
               </p:custDataLst>
             </p:nvPr>
           </p:nvSpPr>
@@ -4686,7 +4686,7 @@
             <p:cNvSpPr/>
             <p:nvPr>
               <p:custDataLst>
-                <p:tags r:id="rId1"/>
+                <p:tags r:id="rIdAlignment81"/>
               </p:custDataLst>
             </p:nvPr>
           </p:nvSpPr>
@@ -4741,7 +4741,7 @@
             <p:cNvSpPr/>
             <p:nvPr>
               <p:custDataLst>
-                <p:tags r:id="rId2"/>
+                <p:tags r:id="rIdAlignment82"/>
               </p:custDataLst>
             </p:nvPr>
           </p:nvSpPr>
@@ -5005,7 +5005,7 @@
 </file>
 
 <file path=ppt/slides/slide10.xml><?xml version="1.0" encoding="utf-8"?>
-<p:sld xmlns:a="http://schemas.openxmlformats.org/drawingml/2006/main" xmlns:r="http://schemas.openxmlformats.org/officeDocument/2006/relationships" xmlns:p="http://schemas.openxmlformats.org/presentationml/2006/main">
+<p:sld xmlns:a="http://schemas.openxmlformats.org/drawingml/2006/main" xmlns:p="http://schemas.openxmlformats.org/presentationml/2006/main" xmlns:r="http://schemas.openxmlformats.org/officeDocument/2006/relationships">
   <p:cSld>
     <p:bg>
       <p:bgPr>
@@ -5073,7 +5073,7 @@
             <p:cNvSpPr/>
             <p:nvPr>
               <p:custDataLst>
-                <p:tags r:id="rId22"/>
+                <p:tags r:id="rIdAlignment3"/>
               </p:custDataLst>
             </p:nvPr>
           </p:nvSpPr>
@@ -5117,7 +5117,7 @@
             <p:cNvSpPr/>
             <p:nvPr>
               <p:custDataLst>
-                <p:tags r:id="rId23"/>
+                <p:tags r:id="rIdAlignment4"/>
               </p:custDataLst>
             </p:nvPr>
           </p:nvSpPr>
@@ -5233,7 +5233,7 @@
               </a:avLst>
             </a:prstGeom>
             <a:solidFill>
-              <a:srgbClr val="EDF3FA"/>
+              <a:srgbClr val="E9F5F3"/>
             </a:solidFill>
             <a:ln>
               <a:noFill/>
@@ -5268,7 +5268,7 @@
             <p:cNvSpPr/>
             <p:nvPr>
               <p:custDataLst>
-                <p:tags r:id="rId3"/>
+                <p:tags r:id="rIdAlignment10"/>
               </p:custDataLst>
             </p:nvPr>
           </p:nvSpPr>
@@ -5312,7 +5312,7 @@
             <p:cNvSpPr/>
             <p:nvPr>
               <p:custDataLst>
-                <p:tags r:id="rId4"/>
+                <p:tags r:id="rIdAlignment11"/>
               </p:custDataLst>
             </p:nvPr>
           </p:nvSpPr>
@@ -5572,7 +5572,7 @@
             <p:cNvSpPr/>
             <p:nvPr>
               <p:custDataLst>
-                <p:tags r:id="rId5"/>
+                <p:tags r:id="rIdAlignment16"/>
               </p:custDataLst>
             </p:nvPr>
           </p:nvSpPr>
@@ -5881,7 +5881,7 @@
             <p:cNvSpPr/>
             <p:nvPr>
               <p:custDataLst>
-                <p:tags r:id="rId6"/>
+                <p:tags r:id="rIdAlignment25"/>
               </p:custDataLst>
             </p:nvPr>
           </p:nvSpPr>
@@ -6296,7 +6296,7 @@
             <p:cNvSpPr/>
             <p:nvPr>
               <p:custDataLst>
-                <p:tags r:id="rId7"/>
+                <p:tags r:id="rIdAlignment38"/>
               </p:custDataLst>
             </p:nvPr>
           </p:nvSpPr>
@@ -6589,7 +6589,7 @@
             <p:cNvSpPr/>
             <p:nvPr>
               <p:custDataLst>
-                <p:tags r:id="rId8"/>
+                <p:tags r:id="rIdAlignment45"/>
               </p:custDataLst>
             </p:nvPr>
           </p:nvSpPr>
@@ -6633,7 +6633,7 @@
             <p:cNvSpPr/>
             <p:nvPr>
               <p:custDataLst>
-                <p:tags r:id="rId9"/>
+                <p:tags r:id="rIdAlignment46"/>
               </p:custDataLst>
             </p:nvPr>
           </p:nvSpPr>
@@ -6677,7 +6677,7 @@
             <p:cNvSpPr/>
             <p:nvPr>
               <p:custDataLst>
-                <p:tags r:id="rId10"/>
+                <p:tags r:id="rIdAlignment47"/>
               </p:custDataLst>
             </p:nvPr>
           </p:nvSpPr>
@@ -6721,7 +6721,7 @@
             <p:cNvSpPr/>
             <p:nvPr>
               <p:custDataLst>
-                <p:tags r:id="rId11"/>
+                <p:tags r:id="rIdAlignment48"/>
               </p:custDataLst>
             </p:nvPr>
           </p:nvSpPr>
@@ -6800,7 +6800,7 @@
               </a:avLst>
             </a:prstGeom>
             <a:solidFill>
-              <a:srgbClr val="EDF3FA"/>
+              <a:srgbClr val="E9F5F3"/>
             </a:solidFill>
             <a:ln>
               <a:noFill/>
@@ -6835,7 +6835,7 @@
             <p:cNvSpPr/>
             <p:nvPr>
               <p:custDataLst>
-                <p:tags r:id="rId12"/>
+                <p:tags r:id="rIdAlignment52"/>
               </p:custDataLst>
             </p:nvPr>
           </p:nvSpPr>
@@ -6879,7 +6879,7 @@
             <p:cNvSpPr/>
             <p:nvPr>
               <p:custDataLst>
-                <p:tags r:id="rId13"/>
+                <p:tags r:id="rIdAlignment53"/>
               </p:custDataLst>
             </p:nvPr>
           </p:nvSpPr>
@@ -7108,7 +7108,7 @@
             <p:cNvSpPr/>
             <p:nvPr>
               <p:custDataLst>
-                <p:tags r:id="rId14"/>
+                <p:tags r:id="rIdAlignment60"/>
               </p:custDataLst>
             </p:nvPr>
           </p:nvSpPr>
@@ -7412,7 +7412,7 @@
             <p:cNvSpPr/>
             <p:nvPr>
               <p:custDataLst>
-                <p:tags r:id="rId15"/>
+                <p:tags r:id="rIdAlignment69"/>
               </p:custDataLst>
             </p:nvPr>
           </p:nvSpPr>
@@ -7727,7 +7727,7 @@
             <p:cNvSpPr/>
             <p:nvPr>
               <p:custDataLst>
-                <p:tags r:id="rId16"/>
+                <p:tags r:id="rIdAlignment78"/>
               </p:custDataLst>
             </p:nvPr>
           </p:nvSpPr>
@@ -8031,7 +8031,7 @@
             <p:cNvSpPr/>
             <p:nvPr>
               <p:custDataLst>
-                <p:tags r:id="rId17"/>
+                <p:tags r:id="rIdAlignment87"/>
               </p:custDataLst>
             </p:nvPr>
           </p:nvSpPr>
@@ -8099,7 +8099,7 @@
             <p:cNvSpPr/>
             <p:nvPr>
               <p:custDataLst>
-                <p:tags r:id="rId18"/>
+                <p:tags r:id="rIdAlignment89"/>
               </p:custDataLst>
             </p:nvPr>
           </p:nvSpPr>
@@ -8176,7 +8176,7 @@
             <p:cNvSpPr/>
             <p:nvPr>
               <p:custDataLst>
-                <p:tags r:id="rId19"/>
+                <p:tags r:id="rIdAlignment90"/>
               </p:custDataLst>
             </p:nvPr>
           </p:nvSpPr>
@@ -8264,7 +8264,7 @@
             <p:cNvSpPr/>
             <p:nvPr>
               <p:custDataLst>
-                <p:tags r:id="rId20"/>
+                <p:tags r:id="rIdAlignment91"/>
               </p:custDataLst>
             </p:nvPr>
           </p:nvSpPr>
@@ -8319,7 +8319,7 @@
             <p:cNvSpPr/>
             <p:nvPr>
               <p:custDataLst>
-                <p:tags r:id="rId21"/>
+                <p:tags r:id="rIdAlignment92"/>
               </p:custDataLst>
             </p:nvPr>
           </p:nvSpPr>
@@ -8414,7 +8414,7 @@
             <p:cNvSpPr/>
             <p:nvPr>
               <p:custDataLst>
-                <p:tags r:id="rId1"/>
+                <p:tags r:id="rIdAlignment95"/>
               </p:custDataLst>
             </p:nvPr>
           </p:nvSpPr>
@@ -8469,7 +8469,7 @@
             <p:cNvSpPr/>
             <p:nvPr>
               <p:custDataLst>
-                <p:tags r:id="rId2"/>
+                <p:tags r:id="rIdAlignment96"/>
               </p:custDataLst>
             </p:nvPr>
           </p:nvSpPr>
@@ -8589,7 +8589,7 @@
 </file>
 
 <file path=ppt/slides/slide11.xml><?xml version="1.0" encoding="utf-8"?>
-<p:sld xmlns:a="http://schemas.openxmlformats.org/drawingml/2006/main" xmlns:r="http://schemas.openxmlformats.org/officeDocument/2006/relationships" xmlns:p="http://schemas.openxmlformats.org/presentationml/2006/main">
+<p:sld xmlns:a="http://schemas.openxmlformats.org/drawingml/2006/main" xmlns:p="http://schemas.openxmlformats.org/presentationml/2006/main" xmlns:r="http://schemas.openxmlformats.org/officeDocument/2006/relationships">
   <p:cSld>
     <p:bg>
       <p:bgPr>
@@ -8657,7 +8657,7 @@
             <p:cNvSpPr/>
             <p:nvPr>
               <p:custDataLst>
-                <p:tags r:id="rId21"/>
+                <p:tags r:id="rIdAlignment3"/>
               </p:custDataLst>
             </p:nvPr>
           </p:nvSpPr>
@@ -8701,7 +8701,7 @@
             <p:cNvSpPr/>
             <p:nvPr>
               <p:custDataLst>
-                <p:tags r:id="rId22"/>
+                <p:tags r:id="rIdAlignment4"/>
               </p:custDataLst>
             </p:nvPr>
           </p:nvSpPr>
@@ -8817,7 +8817,7 @@
               </a:avLst>
             </a:prstGeom>
             <a:solidFill>
-              <a:srgbClr val="EDF3FA"/>
+              <a:srgbClr val="E9F5F3"/>
             </a:solidFill>
             <a:ln>
               <a:noFill/>
@@ -8852,7 +8852,7 @@
             <p:cNvSpPr/>
             <p:nvPr>
               <p:custDataLst>
-                <p:tags r:id="rId3"/>
+                <p:tags r:id="rIdAlignment10"/>
               </p:custDataLst>
             </p:nvPr>
           </p:nvSpPr>
@@ -8896,7 +8896,7 @@
             <p:cNvSpPr/>
             <p:nvPr>
               <p:custDataLst>
-                <p:tags r:id="rId4"/>
+                <p:tags r:id="rIdAlignment11"/>
               </p:custDataLst>
             </p:nvPr>
           </p:nvSpPr>
@@ -9130,7 +9130,7 @@
             <p:cNvSpPr/>
             <p:nvPr>
               <p:custDataLst>
-                <p:tags r:id="rId5"/>
+                <p:tags r:id="rIdAlignment18"/>
               </p:custDataLst>
             </p:nvPr>
           </p:nvSpPr>
@@ -9249,7 +9249,7 @@
             <p:cNvSpPr/>
             <p:nvPr>
               <p:custDataLst>
-                <p:tags r:id="rId6"/>
+                <p:tags r:id="rIdAlignment22"/>
               </p:custDataLst>
             </p:nvPr>
           </p:nvSpPr>
@@ -9489,7 +9489,7 @@
             <p:cNvSpPr/>
             <p:nvPr>
               <p:custDataLst>
-                <p:tags r:id="rId7"/>
+                <p:tags r:id="rIdAlignment29"/>
               </p:custDataLst>
             </p:nvPr>
           </p:nvSpPr>
@@ -9683,7 +9683,7 @@
             <p:cNvSpPr/>
             <p:nvPr>
               <p:custDataLst>
-                <p:tags r:id="rId8"/>
+                <p:tags r:id="rIdAlignment34"/>
               </p:custDataLst>
             </p:nvPr>
           </p:nvSpPr>
@@ -9749,7 +9749,7 @@
             <p:cNvSpPr/>
             <p:nvPr>
               <p:custDataLst>
-                <p:tags r:id="rId9"/>
+                <p:tags r:id="rIdAlignment35"/>
               </p:custDataLst>
             </p:nvPr>
           </p:nvSpPr>
@@ -9793,7 +9793,7 @@
             <p:cNvSpPr/>
             <p:nvPr>
               <p:custDataLst>
-                <p:tags r:id="rId10"/>
+                <p:tags r:id="rIdAlignment36"/>
               </p:custDataLst>
             </p:nvPr>
           </p:nvSpPr>
@@ -9872,7 +9872,7 @@
               </a:avLst>
             </a:prstGeom>
             <a:solidFill>
-              <a:srgbClr val="EDF3FA"/>
+              <a:srgbClr val="E9F5F3"/>
             </a:solidFill>
             <a:ln>
               <a:noFill/>
@@ -9907,7 +9907,7 @@
             <p:cNvSpPr/>
             <p:nvPr>
               <p:custDataLst>
-                <p:tags r:id="rId11"/>
+                <p:tags r:id="rIdAlignment40"/>
               </p:custDataLst>
             </p:nvPr>
           </p:nvSpPr>
@@ -9951,7 +9951,7 @@
             <p:cNvSpPr/>
             <p:nvPr>
               <p:custDataLst>
-                <p:tags r:id="rId12"/>
+                <p:tags r:id="rIdAlignment41"/>
               </p:custDataLst>
             </p:nvPr>
           </p:nvSpPr>
@@ -10030,7 +10030,7 @@
             <p:cNvSpPr/>
             <p:nvPr>
               <p:custDataLst>
-                <p:tags r:id="rId13"/>
+                <p:tags r:id="rIdAlignment43"/>
               </p:custDataLst>
             </p:nvPr>
           </p:nvSpPr>
@@ -10257,7 +10257,7 @@
             <p:cNvSpPr/>
             <p:nvPr>
               <p:custDataLst>
-                <p:tags r:id="rId14"/>
+                <p:tags r:id="rIdAlignment49"/>
               </p:custDataLst>
             </p:nvPr>
           </p:nvSpPr>
@@ -10325,7 +10325,7 @@
             <p:cNvSpPr/>
             <p:nvPr>
               <p:custDataLst>
-                <p:tags r:id="rId15"/>
+                <p:tags r:id="rIdAlignment51"/>
               </p:custDataLst>
             </p:nvPr>
           </p:nvSpPr>
@@ -10543,7 +10543,7 @@
             <p:cNvSpPr/>
             <p:nvPr>
               <p:custDataLst>
-                <p:tags r:id="rId16"/>
+                <p:tags r:id="rIdAlignment57"/>
               </p:custDataLst>
             </p:nvPr>
           </p:nvSpPr>
@@ -10611,7 +10611,7 @@
             <p:cNvSpPr/>
             <p:nvPr>
               <p:custDataLst>
-                <p:tags r:id="rId17"/>
+                <p:tags r:id="rIdAlignment59"/>
               </p:custDataLst>
             </p:nvPr>
           </p:nvSpPr>
@@ -10655,7 +10655,7 @@
             <p:cNvSpPr/>
             <p:nvPr>
               <p:custDataLst>
-                <p:tags r:id="rId18"/>
+                <p:tags r:id="rIdAlignment60"/>
               </p:custDataLst>
             </p:nvPr>
           </p:nvSpPr>
@@ -10699,7 +10699,7 @@
             <p:cNvSpPr/>
             <p:nvPr>
               <p:custDataLst>
-                <p:tags r:id="rId19"/>
+                <p:tags r:id="rIdAlignment61"/>
               </p:custDataLst>
             </p:nvPr>
           </p:nvSpPr>
@@ -10743,7 +10743,7 @@
             <p:cNvSpPr/>
             <p:nvPr>
               <p:custDataLst>
-                <p:tags r:id="rId20"/>
+                <p:tags r:id="rIdAlignment62"/>
               </p:custDataLst>
             </p:nvPr>
           </p:nvSpPr>
@@ -10838,7 +10838,7 @@
             <p:cNvSpPr/>
             <p:nvPr>
               <p:custDataLst>
-                <p:tags r:id="rId1"/>
+                <p:tags r:id="rIdAlignment65"/>
               </p:custDataLst>
             </p:nvPr>
           </p:nvSpPr>
@@ -10893,7 +10893,7 @@
             <p:cNvSpPr/>
             <p:nvPr>
               <p:custDataLst>
-                <p:tags r:id="rId2"/>
+                <p:tags r:id="rIdAlignment66"/>
               </p:custDataLst>
             </p:nvPr>
           </p:nvSpPr>
@@ -11013,7 +11013,7 @@
 </file>
 
 <file path=ppt/slides/slide12.xml><?xml version="1.0" encoding="utf-8"?>
-<p:sld xmlns:a="http://schemas.openxmlformats.org/drawingml/2006/main" xmlns:r="http://schemas.openxmlformats.org/officeDocument/2006/relationships" xmlns:p="http://schemas.openxmlformats.org/presentationml/2006/main">
+<p:sld xmlns:a="http://schemas.openxmlformats.org/drawingml/2006/main" xmlns:p="http://schemas.openxmlformats.org/presentationml/2006/main" xmlns:r="http://schemas.openxmlformats.org/officeDocument/2006/relationships">
   <p:cSld>
     <p:bg>
       <p:bgPr>
@@ -11081,7 +11081,7 @@
             <p:cNvSpPr/>
             <p:nvPr>
               <p:custDataLst>
-                <p:tags r:id="rId22"/>
+                <p:tags r:id="rIdAlignment3"/>
               </p:custDataLst>
             </p:nvPr>
           </p:nvSpPr>
@@ -11125,7 +11125,7 @@
             <p:cNvSpPr/>
             <p:nvPr>
               <p:custDataLst>
-                <p:tags r:id="rId23"/>
+                <p:tags r:id="rIdAlignment4"/>
               </p:custDataLst>
             </p:nvPr>
           </p:nvSpPr>
@@ -11241,7 +11241,7 @@
               </a:avLst>
             </a:prstGeom>
             <a:solidFill>
-              <a:srgbClr val="EDF3FA"/>
+              <a:srgbClr val="E9F5F3"/>
             </a:solidFill>
             <a:ln>
               <a:noFill/>
@@ -11276,7 +11276,7 @@
             <p:cNvSpPr/>
             <p:nvPr>
               <p:custDataLst>
-                <p:tags r:id="rId3"/>
+                <p:tags r:id="rIdAlignment10"/>
               </p:custDataLst>
             </p:nvPr>
           </p:nvSpPr>
@@ -11320,7 +11320,7 @@
             <p:cNvSpPr/>
             <p:nvPr>
               <p:custDataLst>
-                <p:tags r:id="rId4"/>
+                <p:tags r:id="rIdAlignment11"/>
               </p:custDataLst>
             </p:nvPr>
           </p:nvSpPr>
@@ -11388,7 +11388,7 @@
             <p:cNvSpPr/>
             <p:nvPr>
               <p:custDataLst>
-                <p:tags r:id="rId5"/>
+                <p:tags r:id="rIdAlignment13"/>
               </p:custDataLst>
             </p:nvPr>
           </p:nvSpPr>
@@ -12479,7 +12479,7 @@
             <p:cNvSpPr/>
             <p:nvPr>
               <p:custDataLst>
-                <p:tags r:id="rId6"/>
+                <p:tags r:id="rIdAlignment48"/>
               </p:custDataLst>
             </p:nvPr>
           </p:nvSpPr>
@@ -12706,7 +12706,7 @@
             <p:cNvSpPr/>
             <p:nvPr>
               <p:custDataLst>
-                <p:tags r:id="rId7"/>
+                <p:tags r:id="rIdAlignment54"/>
               </p:custDataLst>
             </p:nvPr>
           </p:nvSpPr>
@@ -12774,7 +12774,7 @@
             <p:cNvSpPr/>
             <p:nvPr>
               <p:custDataLst>
-                <p:tags r:id="rId8"/>
+                <p:tags r:id="rIdAlignment56"/>
               </p:custDataLst>
             </p:nvPr>
           </p:nvSpPr>
@@ -12818,7 +12818,7 @@
             <p:cNvSpPr/>
             <p:nvPr>
               <p:custDataLst>
-                <p:tags r:id="rId9"/>
+                <p:tags r:id="rIdAlignment57"/>
               </p:custDataLst>
             </p:nvPr>
           </p:nvSpPr>
@@ -12862,7 +12862,7 @@
             <p:cNvSpPr/>
             <p:nvPr>
               <p:custDataLst>
-                <p:tags r:id="rId10"/>
+                <p:tags r:id="rIdAlignment58"/>
               </p:custDataLst>
             </p:nvPr>
           </p:nvSpPr>
@@ -12906,7 +12906,7 @@
             <p:cNvSpPr/>
             <p:nvPr>
               <p:custDataLst>
-                <p:tags r:id="rId11"/>
+                <p:tags r:id="rIdAlignment59"/>
               </p:custDataLst>
             </p:nvPr>
           </p:nvSpPr>
@@ -12985,7 +12985,7 @@
               </a:avLst>
             </a:prstGeom>
             <a:solidFill>
-              <a:srgbClr val="EDF3FA"/>
+              <a:srgbClr val="E9F5F3"/>
             </a:solidFill>
             <a:ln>
               <a:noFill/>
@@ -13020,7 +13020,7 @@
             <p:cNvSpPr/>
             <p:nvPr>
               <p:custDataLst>
-                <p:tags r:id="rId12"/>
+                <p:tags r:id="rIdAlignment63"/>
               </p:custDataLst>
             </p:nvPr>
           </p:nvSpPr>
@@ -13064,7 +13064,7 @@
             <p:cNvSpPr/>
             <p:nvPr>
               <p:custDataLst>
-                <p:tags r:id="rId13"/>
+                <p:tags r:id="rIdAlignment64"/>
               </p:custDataLst>
             </p:nvPr>
           </p:nvSpPr>
@@ -13132,7 +13132,7 @@
             <p:cNvSpPr/>
             <p:nvPr>
               <p:custDataLst>
-                <p:tags r:id="rId14"/>
+                <p:tags r:id="rIdAlignment66"/>
               </p:custDataLst>
             </p:nvPr>
           </p:nvSpPr>
@@ -13407,7 +13407,7 @@
             <p:cNvSpPr/>
             <p:nvPr>
               <p:custDataLst>
-                <p:tags r:id="rId15"/>
+                <p:tags r:id="rIdAlignment74"/>
               </p:custDataLst>
             </p:nvPr>
           </p:nvSpPr>
@@ -13722,7 +13722,7 @@
             <p:cNvSpPr/>
             <p:nvPr>
               <p:custDataLst>
-                <p:tags r:id="rId16"/>
+                <p:tags r:id="rIdAlignment82"/>
               </p:custDataLst>
             </p:nvPr>
           </p:nvSpPr>
@@ -14055,7 +14055,7 @@
             <p:cNvSpPr/>
             <p:nvPr>
               <p:custDataLst>
-                <p:tags r:id="rId17"/>
+                <p:tags r:id="rIdAlignment92"/>
               </p:custDataLst>
             </p:nvPr>
           </p:nvSpPr>
@@ -14372,7 +14372,7 @@
             <p:cNvSpPr/>
             <p:nvPr>
               <p:custDataLst>
-                <p:tags r:id="rId18"/>
+                <p:tags r:id="rIdAlignment100"/>
               </p:custDataLst>
             </p:nvPr>
           </p:nvSpPr>
@@ -14416,7 +14416,7 @@
             <p:cNvSpPr/>
             <p:nvPr>
               <p:custDataLst>
-                <p:tags r:id="rId19"/>
+                <p:tags r:id="rIdAlignment101"/>
               </p:custDataLst>
             </p:nvPr>
           </p:nvSpPr>
@@ -14482,7 +14482,7 @@
             <p:cNvSpPr/>
             <p:nvPr>
               <p:custDataLst>
-                <p:tags r:id="rId20"/>
+                <p:tags r:id="rIdAlignment102"/>
               </p:custDataLst>
             </p:nvPr>
           </p:nvSpPr>
@@ -14526,7 +14526,7 @@
             <p:cNvSpPr/>
             <p:nvPr>
               <p:custDataLst>
-                <p:tags r:id="rId21"/>
+                <p:tags r:id="rIdAlignment103"/>
               </p:custDataLst>
             </p:nvPr>
           </p:nvSpPr>
@@ -14643,7 +14643,7 @@
             <p:cNvSpPr/>
             <p:nvPr>
               <p:custDataLst>
-                <p:tags r:id="rId1"/>
+                <p:tags r:id="rIdAlignment106"/>
               </p:custDataLst>
             </p:nvPr>
           </p:nvSpPr>
@@ -14698,7 +14698,7 @@
             <p:cNvSpPr/>
             <p:nvPr>
               <p:custDataLst>
-                <p:tags r:id="rId2"/>
+                <p:tags r:id="rIdAlignment107"/>
               </p:custDataLst>
             </p:nvPr>
           </p:nvSpPr>
@@ -15095,7 +15095,7 @@
             <p:cNvSpPr/>
             <p:nvPr>
               <p:custDataLst>
-                <p:tags r:id="rId32"/>
+                <p:tags r:id="rIdAlignment3"/>
               </p:custDataLst>
             </p:nvPr>
           </p:nvSpPr>
@@ -15139,7 +15139,7 @@
             <p:cNvSpPr/>
             <p:nvPr>
               <p:custDataLst>
-                <p:tags r:id="rId33"/>
+                <p:tags r:id="rIdAlignment4"/>
               </p:custDataLst>
             </p:nvPr>
           </p:nvSpPr>
@@ -15246,7 +15246,7 @@
             <p:cNvSpPr/>
             <p:nvPr>
               <p:custDataLst>
-                <p:tags r:id="rId3"/>
+                <p:tags r:id="rIdAlignment8"/>
               </p:custDataLst>
             </p:nvPr>
           </p:nvSpPr>
@@ -15524,7 +15524,7 @@
             <p:cNvSpPr/>
             <p:nvPr>
               <p:custDataLst>
-                <p:tags r:id="rId4"/>
+                <p:tags r:id="rIdAlignment16"/>
               </p:custDataLst>
             </p:nvPr>
           </p:nvSpPr>
@@ -15568,7 +15568,7 @@
             <p:cNvSpPr/>
             <p:nvPr>
               <p:custDataLst>
-                <p:tags r:id="rId5"/>
+                <p:tags r:id="rIdAlignment17"/>
               </p:custDataLst>
             </p:nvPr>
           </p:nvSpPr>
@@ -15612,7 +15612,7 @@
             <p:cNvSpPr/>
             <p:nvPr>
               <p:custDataLst>
-                <p:tags r:id="rId6"/>
+                <p:tags r:id="rIdAlignment18"/>
               </p:custDataLst>
             </p:nvPr>
           </p:nvSpPr>
@@ -15656,7 +15656,7 @@
             <p:cNvSpPr/>
             <p:nvPr>
               <p:custDataLst>
-                <p:tags r:id="rId7"/>
+                <p:tags r:id="rIdAlignment19"/>
               </p:custDataLst>
             </p:nvPr>
           </p:nvSpPr>
@@ -15898,7 +15898,7 @@
             <p:cNvSpPr/>
             <p:nvPr>
               <p:custDataLst>
-                <p:tags r:id="rId8"/>
+                <p:tags r:id="rIdAlignment25"/>
               </p:custDataLst>
             </p:nvPr>
           </p:nvSpPr>
@@ -15979,7 +15979,7 @@
             <p:cNvSpPr/>
             <p:nvPr>
               <p:custDataLst>
-                <p:tags r:id="rId9"/>
+                <p:tags r:id="rIdAlignment27"/>
               </p:custDataLst>
             </p:nvPr>
           </p:nvSpPr>
@@ -16023,7 +16023,7 @@
             <p:cNvSpPr/>
             <p:nvPr>
               <p:custDataLst>
-                <p:tags r:id="rId10"/>
+                <p:tags r:id="rIdAlignment28"/>
               </p:custDataLst>
             </p:nvPr>
           </p:nvSpPr>
@@ -16093,7 +16093,7 @@
             <p:cNvSpPr/>
             <p:nvPr>
               <p:custDataLst>
-                <p:tags r:id="rId11"/>
+                <p:tags r:id="rIdAlignment30"/>
               </p:custDataLst>
             </p:nvPr>
           </p:nvSpPr>
@@ -16137,7 +16137,7 @@
             <p:cNvSpPr/>
             <p:nvPr>
               <p:custDataLst>
-                <p:tags r:id="rId12"/>
+                <p:tags r:id="rIdAlignment31"/>
               </p:custDataLst>
             </p:nvPr>
           </p:nvSpPr>
@@ -16207,7 +16207,7 @@
             <p:cNvSpPr/>
             <p:nvPr>
               <p:custDataLst>
-                <p:tags r:id="rId13"/>
+                <p:tags r:id="rIdAlignment33"/>
               </p:custDataLst>
             </p:nvPr>
           </p:nvSpPr>
@@ -16262,7 +16262,7 @@
             <p:cNvSpPr/>
             <p:nvPr>
               <p:custDataLst>
-                <p:tags r:id="rId14"/>
+                <p:tags r:id="rIdAlignment34"/>
               </p:custDataLst>
             </p:nvPr>
           </p:nvSpPr>
@@ -16332,7 +16332,7 @@
             <p:cNvSpPr/>
             <p:nvPr>
               <p:custDataLst>
-                <p:tags r:id="rId15"/>
+                <p:tags r:id="rIdAlignment36"/>
               </p:custDataLst>
             </p:nvPr>
           </p:nvSpPr>
@@ -16376,7 +16376,7 @@
             <p:cNvSpPr/>
             <p:nvPr>
               <p:custDataLst>
-                <p:tags r:id="rId16"/>
+                <p:tags r:id="rIdAlignment37"/>
               </p:custDataLst>
             </p:nvPr>
           </p:nvSpPr>
@@ -17032,7 +17032,7 @@
             <p:cNvSpPr/>
             <p:nvPr>
               <p:custDataLst>
-                <p:tags r:id="rId17"/>
+                <p:tags r:id="rIdAlignment55"/>
               </p:custDataLst>
             </p:nvPr>
           </p:nvSpPr>
@@ -17135,7 +17135,7 @@
             <p:cNvSpPr/>
             <p:nvPr>
               <p:custDataLst>
-                <p:tags r:id="rId18"/>
+                <p:tags r:id="rIdAlignment57"/>
               </p:custDataLst>
             </p:nvPr>
           </p:nvSpPr>
@@ -17179,7 +17179,7 @@
             <p:cNvSpPr/>
             <p:nvPr>
               <p:custDataLst>
-                <p:tags r:id="rId19"/>
+                <p:tags r:id="rIdAlignment58"/>
               </p:custDataLst>
             </p:nvPr>
           </p:nvSpPr>
@@ -17260,7 +17260,7 @@
             <p:cNvSpPr/>
             <p:nvPr>
               <p:custDataLst>
-                <p:tags r:id="rId20"/>
+                <p:tags r:id="rIdAlignment60"/>
               </p:custDataLst>
             </p:nvPr>
           </p:nvSpPr>
@@ -17315,7 +17315,7 @@
             <p:cNvSpPr/>
             <p:nvPr>
               <p:custDataLst>
-                <p:tags r:id="rId21"/>
+                <p:tags r:id="rIdAlignment61"/>
               </p:custDataLst>
             </p:nvPr>
           </p:nvSpPr>
@@ -17385,7 +17385,7 @@
             <p:cNvSpPr/>
             <p:nvPr>
               <p:custDataLst>
-                <p:tags r:id="rId22"/>
+                <p:tags r:id="rIdAlignment63"/>
               </p:custDataLst>
             </p:nvPr>
           </p:nvSpPr>
@@ -17451,7 +17451,7 @@
             <p:cNvSpPr/>
             <p:nvPr>
               <p:custDataLst>
-                <p:tags r:id="rId23"/>
+                <p:tags r:id="rIdAlignment64"/>
               </p:custDataLst>
             </p:nvPr>
           </p:nvSpPr>
@@ -17579,7 +17579,7 @@
             <p:cNvSpPr/>
             <p:nvPr>
               <p:custDataLst>
-                <p:tags r:id="rId24"/>
+                <p:tags r:id="rIdAlignment67"/>
               </p:custDataLst>
             </p:nvPr>
           </p:nvSpPr>
@@ -17773,7 +17773,7 @@
             <p:cNvSpPr/>
             <p:nvPr>
               <p:custDataLst>
-                <p:tags r:id="rId25"/>
+                <p:tags r:id="rIdAlignment72"/>
               </p:custDataLst>
             </p:nvPr>
           </p:nvSpPr>
@@ -17895,7 +17895,7 @@
             <p:cNvSpPr/>
             <p:nvPr>
               <p:custDataLst>
-                <p:tags r:id="rId26"/>
+                <p:tags r:id="rIdAlignment75"/>
               </p:custDataLst>
             </p:nvPr>
           </p:nvSpPr>
@@ -18128,7 +18128,7 @@
             <p:cNvSpPr/>
             <p:nvPr>
               <p:custDataLst>
-                <p:tags r:id="rId27"/>
+                <p:tags r:id="rIdAlignment81"/>
               </p:custDataLst>
             </p:nvPr>
           </p:nvSpPr>
@@ -18183,7 +18183,7 @@
             <p:cNvSpPr/>
             <p:nvPr>
               <p:custDataLst>
-                <p:tags r:id="rId28"/>
+                <p:tags r:id="rIdAlignment82"/>
               </p:custDataLst>
             </p:nvPr>
           </p:nvSpPr>
@@ -18227,7 +18227,7 @@
             <p:cNvSpPr/>
             <p:nvPr>
               <p:custDataLst>
-                <p:tags r:id="rId29"/>
+                <p:tags r:id="rIdAlignment83"/>
               </p:custDataLst>
             </p:nvPr>
           </p:nvSpPr>
@@ -18271,7 +18271,7 @@
             <p:cNvSpPr/>
             <p:nvPr>
               <p:custDataLst>
-                <p:tags r:id="rId30"/>
+                <p:tags r:id="rIdAlignment84"/>
               </p:custDataLst>
             </p:nvPr>
           </p:nvSpPr>
@@ -18416,7 +18416,7 @@
             <p:cNvSpPr/>
             <p:nvPr>
               <p:custDataLst>
-                <p:tags r:id="rId31"/>
+                <p:tags r:id="rIdAlignment88"/>
               </p:custDataLst>
             </p:nvPr>
           </p:nvSpPr>
@@ -18577,7 +18577,7 @@
             <p:cNvSpPr/>
             <p:nvPr>
               <p:custDataLst>
-                <p:tags r:id="rId1"/>
+                <p:tags r:id="rIdAlignment91"/>
               </p:custDataLst>
             </p:nvPr>
           </p:nvSpPr>
@@ -18632,7 +18632,7 @@
             <p:cNvSpPr/>
             <p:nvPr>
               <p:custDataLst>
-                <p:tags r:id="rId2"/>
+                <p:tags r:id="rIdAlignment92"/>
               </p:custDataLst>
             </p:nvPr>
           </p:nvSpPr>
@@ -18964,7 +18964,7 @@
             <p:cNvSpPr/>
             <p:nvPr>
               <p:custDataLst>
-                <p:tags r:id="rId17"/>
+                <p:tags r:id="rIdAlignment3"/>
               </p:custDataLst>
             </p:nvPr>
           </p:nvSpPr>
@@ -19008,7 +19008,7 @@
             <p:cNvSpPr/>
             <p:nvPr>
               <p:custDataLst>
-                <p:tags r:id="rId18"/>
+                <p:tags r:id="rIdAlignment4"/>
               </p:custDataLst>
             </p:nvPr>
           </p:nvSpPr>
@@ -19113,7 +19113,7 @@
             <p:cNvSpPr/>
             <p:nvPr>
               <p:custDataLst>
-                <p:tags r:id="rId3"/>
+                <p:tags r:id="rIdAlignment8"/>
               </p:custDataLst>
             </p:nvPr>
           </p:nvSpPr>
@@ -19157,7 +19157,7 @@
             <p:cNvSpPr/>
             <p:nvPr>
               <p:custDataLst>
-                <p:tags r:id="rId4"/>
+                <p:tags r:id="rIdAlignment9"/>
               </p:custDataLst>
             </p:nvPr>
           </p:nvSpPr>
@@ -19321,7 +19321,7 @@
             <p:cNvSpPr/>
             <p:nvPr>
               <p:custDataLst>
-                <p:tags r:id="rId5"/>
+                <p:tags r:id="rIdAlignment15"/>
               </p:custDataLst>
             </p:nvPr>
           </p:nvSpPr>
@@ -19485,7 +19485,7 @@
             <p:cNvSpPr/>
             <p:nvPr>
               <p:custDataLst>
-                <p:tags r:id="rId6"/>
+                <p:tags r:id="rIdAlignment21"/>
               </p:custDataLst>
             </p:nvPr>
           </p:nvSpPr>
@@ -20028,7 +20028,7 @@
             <p:cNvSpPr/>
             <p:nvPr>
               <p:custDataLst>
-                <p:tags r:id="rId7"/>
+                <p:tags r:id="rIdAlignment37"/>
               </p:custDataLst>
             </p:nvPr>
           </p:nvSpPr>
@@ -20072,7 +20072,7 @@
             <p:cNvSpPr/>
             <p:nvPr>
               <p:custDataLst>
-                <p:tags r:id="rId8"/>
+                <p:tags r:id="rIdAlignment38"/>
               </p:custDataLst>
             </p:nvPr>
           </p:nvSpPr>
@@ -20116,7 +20116,7 @@
             <p:cNvSpPr/>
             <p:nvPr>
               <p:custDataLst>
-                <p:tags r:id="rId9"/>
+                <p:tags r:id="rIdAlignment39"/>
               </p:custDataLst>
             </p:nvPr>
           </p:nvSpPr>
@@ -20321,7 +20321,7 @@
             <p:cNvSpPr/>
             <p:nvPr>
               <p:custDataLst>
-                <p:tags r:id="rId10"/>
+                <p:tags r:id="rIdAlignment46"/>
               </p:custDataLst>
             </p:nvPr>
           </p:nvSpPr>
@@ -20365,7 +20365,7 @@
             <p:cNvSpPr/>
             <p:nvPr>
               <p:custDataLst>
-                <p:tags r:id="rId11"/>
+                <p:tags r:id="rIdAlignment47"/>
               </p:custDataLst>
             </p:nvPr>
           </p:nvSpPr>
@@ -20409,7 +20409,7 @@
             <p:cNvSpPr/>
             <p:nvPr>
               <p:custDataLst>
-                <p:tags r:id="rId12"/>
+                <p:tags r:id="rIdAlignment48"/>
               </p:custDataLst>
             </p:nvPr>
           </p:nvSpPr>
@@ -20636,7 +20636,7 @@
             <p:cNvSpPr/>
             <p:nvPr>
               <p:custDataLst>
-                <p:tags r:id="rId13"/>
+                <p:tags r:id="rIdAlignment54"/>
               </p:custDataLst>
             </p:nvPr>
           </p:nvSpPr>
@@ -20691,7 +20691,7 @@
             <p:cNvSpPr/>
             <p:nvPr>
               <p:custDataLst>
-                <p:tags r:id="rId14"/>
+                <p:tags r:id="rIdAlignment55"/>
               </p:custDataLst>
             </p:nvPr>
           </p:nvSpPr>
@@ -20735,7 +20735,7 @@
             <p:cNvSpPr/>
             <p:nvPr>
               <p:custDataLst>
-                <p:tags r:id="rId15"/>
+                <p:tags r:id="rIdAlignment56"/>
               </p:custDataLst>
             </p:nvPr>
           </p:nvSpPr>
@@ -20878,7 +20878,7 @@
             <p:cNvSpPr/>
             <p:nvPr>
               <p:custDataLst>
-                <p:tags r:id="rId16"/>
+                <p:tags r:id="rIdAlignment60"/>
               </p:custDataLst>
             </p:nvPr>
           </p:nvSpPr>
@@ -20973,7 +20973,7 @@
             <p:cNvSpPr/>
             <p:nvPr>
               <p:custDataLst>
-                <p:tags r:id="rId1"/>
+                <p:tags r:id="rIdAlignment63"/>
               </p:custDataLst>
             </p:nvPr>
           </p:nvSpPr>
@@ -21028,7 +21028,7 @@
             <p:cNvSpPr/>
             <p:nvPr>
               <p:custDataLst>
-                <p:tags r:id="rId2"/>
+                <p:tags r:id="rIdAlignment64"/>
               </p:custDataLst>
             </p:nvPr>
           </p:nvSpPr>
@@ -21360,7 +21360,7 @@
             <p:cNvSpPr/>
             <p:nvPr>
               <p:custDataLst>
-                <p:tags r:id="rId28"/>
+                <p:tags r:id="rIdAlignment3"/>
               </p:custDataLst>
             </p:nvPr>
           </p:nvSpPr>
@@ -21404,7 +21404,7 @@
             <p:cNvSpPr/>
             <p:nvPr>
               <p:custDataLst>
-                <p:tags r:id="rId29"/>
+                <p:tags r:id="rIdAlignment4"/>
               </p:custDataLst>
             </p:nvPr>
           </p:nvSpPr>
@@ -21485,7 +21485,7 @@
             <p:cNvSpPr/>
             <p:nvPr>
               <p:custDataLst>
-                <p:tags r:id="rId3"/>
+                <p:tags r:id="rIdAlignment7"/>
               </p:custDataLst>
             </p:nvPr>
           </p:nvSpPr>
@@ -21880,7 +21880,7 @@
             <p:cNvSpPr/>
             <p:nvPr>
               <p:custDataLst>
-                <p:tags r:id="rId4"/>
+                <p:tags r:id="rIdAlignment20"/>
               </p:custDataLst>
             </p:nvPr>
           </p:nvSpPr>
@@ -21924,7 +21924,7 @@
             <p:cNvSpPr/>
             <p:nvPr>
               <p:custDataLst>
-                <p:tags r:id="rId5"/>
+                <p:tags r:id="rIdAlignment21"/>
               </p:custDataLst>
             </p:nvPr>
           </p:nvSpPr>
@@ -22319,7 +22319,7 @@
             <p:cNvSpPr/>
             <p:nvPr>
               <p:custDataLst>
-                <p:tags r:id="rId6"/>
+                <p:tags r:id="rIdAlignment34"/>
               </p:custDataLst>
             </p:nvPr>
           </p:nvSpPr>
@@ -22546,7 +22546,7 @@
             <p:cNvSpPr/>
             <p:nvPr>
               <p:custDataLst>
-                <p:tags r:id="rId7"/>
+                <p:tags r:id="rIdAlignment40"/>
               </p:custDataLst>
             </p:nvPr>
           </p:nvSpPr>
@@ -22590,7 +22590,7 @@
             <p:cNvSpPr/>
             <p:nvPr>
               <p:custDataLst>
-                <p:tags r:id="rId8"/>
+                <p:tags r:id="rIdAlignment41"/>
               </p:custDataLst>
             </p:nvPr>
           </p:nvSpPr>
@@ -22726,7 +22726,7 @@
             <p:cNvSpPr/>
             <p:nvPr>
               <p:custDataLst>
-                <p:tags r:id="rId9"/>
+                <p:tags r:id="rIdAlignment44"/>
               </p:custDataLst>
             </p:nvPr>
           </p:nvSpPr>
@@ -22960,7 +22960,7 @@
             <p:cNvSpPr/>
             <p:nvPr>
               <p:custDataLst>
-                <p:tags r:id="rId10"/>
+                <p:tags r:id="rIdAlignment51"/>
               </p:custDataLst>
             </p:nvPr>
           </p:nvSpPr>
@@ -23004,7 +23004,7 @@
             <p:cNvSpPr/>
             <p:nvPr>
               <p:custDataLst>
-                <p:tags r:id="rId11"/>
+                <p:tags r:id="rIdAlignment52"/>
               </p:custDataLst>
             </p:nvPr>
           </p:nvSpPr>
@@ -23074,7 +23074,7 @@
             <p:cNvSpPr/>
             <p:nvPr>
               <p:custDataLst>
-                <p:tags r:id="rId12"/>
+                <p:tags r:id="rIdAlignment54"/>
               </p:custDataLst>
             </p:nvPr>
           </p:nvSpPr>
@@ -23144,7 +23144,7 @@
             <p:cNvSpPr/>
             <p:nvPr>
               <p:custDataLst>
-                <p:tags r:id="rId13"/>
+                <p:tags r:id="rIdAlignment56"/>
               </p:custDataLst>
             </p:nvPr>
           </p:nvSpPr>
@@ -23214,7 +23214,7 @@
             <p:cNvSpPr/>
             <p:nvPr>
               <p:custDataLst>
-                <p:tags r:id="rId14"/>
+                <p:tags r:id="rIdAlignment58"/>
               </p:custDataLst>
             </p:nvPr>
           </p:nvSpPr>
@@ -23284,7 +23284,7 @@
             <p:cNvSpPr/>
             <p:nvPr>
               <p:custDataLst>
-                <p:tags r:id="rId15"/>
+                <p:tags r:id="rIdAlignment60"/>
               </p:custDataLst>
             </p:nvPr>
           </p:nvSpPr>
@@ -23354,7 +23354,7 @@
             <p:cNvSpPr/>
             <p:nvPr>
               <p:custDataLst>
-                <p:tags r:id="rId16"/>
+                <p:tags r:id="rIdAlignment62"/>
               </p:custDataLst>
             </p:nvPr>
           </p:nvSpPr>
@@ -23398,7 +23398,7 @@
             <p:cNvSpPr/>
             <p:nvPr>
               <p:custDataLst>
-                <p:tags r:id="rId17"/>
+                <p:tags r:id="rIdAlignment63"/>
               </p:custDataLst>
             </p:nvPr>
           </p:nvSpPr>
@@ -23453,7 +23453,7 @@
             <p:cNvSpPr/>
             <p:nvPr>
               <p:custDataLst>
-                <p:tags r:id="rId18"/>
+                <p:tags r:id="rIdAlignment64"/>
               </p:custDataLst>
             </p:nvPr>
           </p:nvSpPr>
@@ -23578,7 +23578,7 @@
             <p:cNvSpPr/>
             <p:nvPr>
               <p:custDataLst>
-                <p:tags r:id="rId19"/>
+                <p:tags r:id="rIdAlignment67"/>
               </p:custDataLst>
             </p:nvPr>
           </p:nvSpPr>
@@ -23668,7 +23668,7 @@
             <p:cNvSpPr/>
             <p:nvPr>
               <p:custDataLst>
-                <p:tags r:id="rId20"/>
+                <p:tags r:id="rIdAlignment69"/>
               </p:custDataLst>
             </p:nvPr>
           </p:nvSpPr>
@@ -23712,7 +23712,7 @@
             <p:cNvSpPr/>
             <p:nvPr>
               <p:custDataLst>
-                <p:tags r:id="rId21"/>
+                <p:tags r:id="rIdAlignment70"/>
               </p:custDataLst>
             </p:nvPr>
           </p:nvSpPr>
@@ -24014,7 +24014,7 @@
             <p:cNvSpPr/>
             <p:nvPr>
               <p:custDataLst>
-                <p:tags r:id="rId22"/>
+                <p:tags r:id="rIdAlignment78"/>
               </p:custDataLst>
             </p:nvPr>
           </p:nvSpPr>
@@ -24082,7 +24082,7 @@
             <p:cNvSpPr/>
             <p:nvPr>
               <p:custDataLst>
-                <p:tags r:id="rId23"/>
+                <p:tags r:id="rIdAlignment80"/>
               </p:custDataLst>
             </p:nvPr>
           </p:nvSpPr>
@@ -24150,7 +24150,7 @@
             <p:cNvSpPr/>
             <p:nvPr>
               <p:custDataLst>
-                <p:tags r:id="rId24"/>
+                <p:tags r:id="rIdAlignment82"/>
               </p:custDataLst>
             </p:nvPr>
           </p:nvSpPr>
@@ -24194,7 +24194,7 @@
             <p:cNvSpPr/>
             <p:nvPr>
               <p:custDataLst>
-                <p:tags r:id="rId25"/>
+                <p:tags r:id="rIdAlignment83"/>
               </p:custDataLst>
             </p:nvPr>
           </p:nvSpPr>
@@ -24238,7 +24238,7 @@
             <p:cNvSpPr/>
             <p:nvPr>
               <p:custDataLst>
-                <p:tags r:id="rId26"/>
+                <p:tags r:id="rIdAlignment84"/>
               </p:custDataLst>
             </p:nvPr>
           </p:nvSpPr>
@@ -24282,7 +24282,7 @@
             <p:cNvSpPr/>
             <p:nvPr>
               <p:custDataLst>
-                <p:tags r:id="rId27"/>
+                <p:tags r:id="rIdAlignment85"/>
               </p:custDataLst>
             </p:nvPr>
           </p:nvSpPr>
@@ -24399,7 +24399,7 @@
             <p:cNvSpPr/>
             <p:nvPr>
               <p:custDataLst>
-                <p:tags r:id="rId1"/>
+                <p:tags r:id="rIdAlignment88"/>
               </p:custDataLst>
             </p:nvPr>
           </p:nvSpPr>
@@ -24454,7 +24454,7 @@
             <p:cNvSpPr/>
             <p:nvPr>
               <p:custDataLst>
-                <p:tags r:id="rId2"/>
+                <p:tags r:id="rIdAlignment89"/>
               </p:custDataLst>
             </p:nvPr>
           </p:nvSpPr>
@@ -24786,7 +24786,7 @@
             <p:cNvSpPr/>
             <p:nvPr>
               <p:custDataLst>
-                <p:tags r:id="rId17"/>
+                <p:tags r:id="rIdAlignment3"/>
               </p:custDataLst>
             </p:nvPr>
           </p:nvSpPr>
@@ -24830,7 +24830,7 @@
             <p:cNvSpPr/>
             <p:nvPr>
               <p:custDataLst>
-                <p:tags r:id="rId18"/>
+                <p:tags r:id="rIdAlignment4"/>
               </p:custDataLst>
             </p:nvPr>
           </p:nvSpPr>
@@ -24935,7 +24935,7 @@
             <p:cNvSpPr/>
             <p:nvPr>
               <p:custDataLst>
-                <p:tags r:id="rId3"/>
+                <p:tags r:id="rIdAlignment8"/>
               </p:custDataLst>
             </p:nvPr>
           </p:nvSpPr>
@@ -25142,7 +25142,7 @@
             <p:cNvSpPr/>
             <p:nvPr>
               <p:custDataLst>
-                <p:tags r:id="rId4"/>
+                <p:tags r:id="rIdAlignment13"/>
               </p:custDataLst>
             </p:nvPr>
           </p:nvSpPr>
@@ -25186,7 +25186,7 @@
             <p:cNvSpPr/>
             <p:nvPr>
               <p:custDataLst>
-                <p:tags r:id="rId5"/>
+                <p:tags r:id="rIdAlignment14"/>
               </p:custDataLst>
             </p:nvPr>
           </p:nvSpPr>
@@ -25329,7 +25329,7 @@
             <p:cNvSpPr/>
             <p:nvPr>
               <p:custDataLst>
-                <p:tags r:id="rId6"/>
+                <p:tags r:id="rIdAlignment18"/>
               </p:custDataLst>
             </p:nvPr>
           </p:nvSpPr>
@@ -25702,7 +25702,7 @@
             <p:cNvSpPr/>
             <p:nvPr>
               <p:custDataLst>
-                <p:tags r:id="rId7"/>
+                <p:tags r:id="rIdAlignment29"/>
               </p:custDataLst>
             </p:nvPr>
           </p:nvSpPr>
@@ -25746,7 +25746,7 @@
             <p:cNvSpPr/>
             <p:nvPr>
               <p:custDataLst>
-                <p:tags r:id="rId8"/>
+                <p:tags r:id="rIdAlignment30"/>
               </p:custDataLst>
             </p:nvPr>
           </p:nvSpPr>
@@ -25889,7 +25889,7 @@
             <p:cNvSpPr/>
             <p:nvPr>
               <p:custDataLst>
-                <p:tags r:id="rId9"/>
+                <p:tags r:id="rIdAlignment34"/>
               </p:custDataLst>
             </p:nvPr>
           </p:nvSpPr>
@@ -26118,7 +26118,7 @@
             <p:cNvSpPr/>
             <p:nvPr>
               <p:custDataLst>
-                <p:tags r:id="rId10"/>
+                <p:tags r:id="rIdAlignment41"/>
               </p:custDataLst>
             </p:nvPr>
           </p:nvSpPr>
@@ -26162,7 +26162,7 @@
             <p:cNvSpPr/>
             <p:nvPr>
               <p:custDataLst>
-                <p:tags r:id="rId11"/>
+                <p:tags r:id="rIdAlignment42"/>
               </p:custDataLst>
             </p:nvPr>
           </p:nvSpPr>
@@ -26305,7 +26305,7 @@
             <p:cNvSpPr/>
             <p:nvPr>
               <p:custDataLst>
-                <p:tags r:id="rId12"/>
+                <p:tags r:id="rIdAlignment46"/>
               </p:custDataLst>
             </p:nvPr>
           </p:nvSpPr>
@@ -26532,7 +26532,7 @@
             <p:cNvSpPr/>
             <p:nvPr>
               <p:custDataLst>
-                <p:tags r:id="rId13"/>
+                <p:tags r:id="rIdAlignment53"/>
               </p:custDataLst>
             </p:nvPr>
           </p:nvSpPr>
@@ -26576,7 +26576,7 @@
             <p:cNvSpPr/>
             <p:nvPr>
               <p:custDataLst>
-                <p:tags r:id="rId14"/>
+                <p:tags r:id="rIdAlignment54"/>
               </p:custDataLst>
             </p:nvPr>
           </p:nvSpPr>
@@ -26910,7 +26910,7 @@
             <p:cNvSpPr/>
             <p:nvPr>
               <p:custDataLst>
-                <p:tags r:id="rId15"/>
+                <p:tags r:id="rIdAlignment64"/>
               </p:custDataLst>
             </p:nvPr>
           </p:nvSpPr>
@@ -26978,7 +26978,7 @@
             <p:cNvSpPr/>
             <p:nvPr>
               <p:custDataLst>
-                <p:tags r:id="rId16"/>
+                <p:tags r:id="rIdAlignment66"/>
               </p:custDataLst>
             </p:nvPr>
           </p:nvSpPr>
@@ -27095,7 +27095,7 @@
             <p:cNvSpPr/>
             <p:nvPr>
               <p:custDataLst>
-                <p:tags r:id="rId1"/>
+                <p:tags r:id="rIdAlignment69"/>
               </p:custDataLst>
             </p:nvPr>
           </p:nvSpPr>
@@ -27150,7 +27150,7 @@
             <p:cNvSpPr/>
             <p:nvPr>
               <p:custDataLst>
-                <p:tags r:id="rId2"/>
+                <p:tags r:id="rIdAlignment70"/>
               </p:custDataLst>
             </p:nvPr>
           </p:nvSpPr>
@@ -27482,7 +27482,7 @@
             <p:cNvSpPr/>
             <p:nvPr>
               <p:custDataLst>
-                <p:tags r:id="rId18"/>
+                <p:tags r:id="rIdAlignment3"/>
               </p:custDataLst>
             </p:nvPr>
           </p:nvSpPr>
@@ -27526,7 +27526,7 @@
             <p:cNvSpPr/>
             <p:nvPr>
               <p:custDataLst>
-                <p:tags r:id="rId19"/>
+                <p:tags r:id="rIdAlignment4"/>
               </p:custDataLst>
             </p:nvPr>
           </p:nvSpPr>
@@ -27607,7 +27607,7 @@
             <p:cNvSpPr/>
             <p:nvPr>
               <p:custDataLst>
-                <p:tags r:id="rId3"/>
+                <p:tags r:id="rIdAlignment7"/>
               </p:custDataLst>
             </p:nvPr>
           </p:nvSpPr>
@@ -27712,7 +27712,7 @@
               <p:cNvSpPr/>
               <p:nvPr>
                 <p:custDataLst>
-                  <p:tags r:id="rId9"/>
+                  <p:tags r:id="rIdAlignment9"/>
                 </p:custDataLst>
               </p:nvPr>
             </p:nvSpPr>
@@ -27792,7 +27792,7 @@
               <p:cNvSpPr/>
               <p:nvPr>
                 <p:custDataLst>
-                  <p:tags r:id="rId10"/>
+                  <p:tags r:id="rIdAlignment11"/>
                 </p:custDataLst>
               </p:nvPr>
             </p:nvSpPr>
@@ -27872,7 +27872,7 @@
               <p:cNvSpPr/>
               <p:nvPr>
                 <p:custDataLst>
-                  <p:tags r:id="rId11"/>
+                  <p:tags r:id="rIdAlignment13"/>
                 </p:custDataLst>
               </p:nvPr>
             </p:nvSpPr>
@@ -27916,7 +27916,7 @@
               <p:cNvSpPr/>
               <p:nvPr>
                 <p:custDataLst>
-                  <p:tags r:id="rId12"/>
+                  <p:tags r:id="rIdAlignment14"/>
                 </p:custDataLst>
               </p:nvPr>
             </p:nvSpPr>
@@ -27982,7 +27982,7 @@
               <p:cNvSpPr/>
               <p:nvPr>
                 <p:custDataLst>
-                  <p:tags r:id="rId13"/>
+                  <p:tags r:id="rIdAlignment16"/>
                 </p:custDataLst>
               </p:nvPr>
             </p:nvSpPr>
@@ -28026,7 +28026,7 @@
               <p:cNvSpPr/>
               <p:nvPr>
                 <p:custDataLst>
-                  <p:tags r:id="rId14"/>
+                  <p:tags r:id="rIdAlignment17"/>
                 </p:custDataLst>
               </p:nvPr>
             </p:nvSpPr>
@@ -28092,7 +28092,7 @@
               <p:cNvSpPr/>
               <p:nvPr>
                 <p:custDataLst>
-                  <p:tags r:id="rId15"/>
+                  <p:tags r:id="rIdAlignment19"/>
                 </p:custDataLst>
               </p:nvPr>
             </p:nvSpPr>
@@ -28136,7 +28136,7 @@
               <p:cNvSpPr/>
               <p:nvPr>
                 <p:custDataLst>
-                  <p:tags r:id="rId16"/>
+                  <p:tags r:id="rIdAlignment20"/>
                 </p:custDataLst>
               </p:nvPr>
             </p:nvSpPr>
@@ -28202,7 +28202,7 @@
               <p:cNvSpPr/>
               <p:nvPr>
                 <p:custDataLst>
-                  <p:tags r:id="rId17"/>
+                  <p:tags r:id="rIdAlignment22"/>
                 </p:custDataLst>
               </p:nvPr>
             </p:nvSpPr>
@@ -28271,7 +28271,7 @@
             <p:cNvSpPr/>
             <p:nvPr>
               <p:custDataLst>
-                <p:tags r:id="rId4"/>
+                <p:tags r:id="rIdAlignment25"/>
               </p:custDataLst>
             </p:nvPr>
           </p:nvSpPr>
@@ -28315,7 +28315,7 @@
             <p:cNvSpPr/>
             <p:nvPr>
               <p:custDataLst>
-                <p:tags r:id="rId5"/>
+                <p:tags r:id="rIdAlignment26"/>
               </p:custDataLst>
             </p:nvPr>
           </p:nvSpPr>
@@ -28359,7 +28359,7 @@
             <p:cNvSpPr/>
             <p:nvPr>
               <p:custDataLst>
-                <p:tags r:id="rId6"/>
+                <p:tags r:id="rIdAlignment27"/>
               </p:custDataLst>
             </p:nvPr>
           </p:nvSpPr>
@@ -28403,7 +28403,7 @@
             <p:cNvSpPr/>
             <p:nvPr>
               <p:custDataLst>
-                <p:tags r:id="rId7"/>
+                <p:tags r:id="rIdAlignment28"/>
               </p:custDataLst>
             </p:nvPr>
           </p:nvSpPr>
@@ -28447,7 +28447,7 @@
             <p:cNvSpPr/>
             <p:nvPr>
               <p:custDataLst>
-                <p:tags r:id="rId8"/>
+                <p:tags r:id="rIdAlignment29"/>
               </p:custDataLst>
             </p:nvPr>
           </p:nvSpPr>
@@ -28586,7 +28586,7 @@
             <p:cNvSpPr/>
             <p:nvPr>
               <p:custDataLst>
-                <p:tags r:id="rId1"/>
+                <p:tags r:id="rIdAlignment32"/>
               </p:custDataLst>
             </p:nvPr>
           </p:nvSpPr>
@@ -28641,7 +28641,7 @@
             <p:cNvSpPr/>
             <p:nvPr>
               <p:custDataLst>
-                <p:tags r:id="rId2"/>
+                <p:tags r:id="rIdAlignment33"/>
               </p:custDataLst>
             </p:nvPr>
           </p:nvSpPr>
@@ -28973,7 +28973,7 @@
             <p:cNvSpPr/>
             <p:nvPr>
               <p:custDataLst>
-                <p:tags r:id="rId19"/>
+                <p:tags r:id="rIdAlignment3"/>
               </p:custDataLst>
             </p:nvPr>
           </p:nvSpPr>
@@ -29017,7 +29017,7 @@
             <p:cNvSpPr/>
             <p:nvPr>
               <p:custDataLst>
-                <p:tags r:id="rId20"/>
+                <p:tags r:id="rIdAlignment4"/>
               </p:custDataLst>
             </p:nvPr>
           </p:nvSpPr>
@@ -29144,7 +29144,7 @@
             <p:cNvSpPr/>
             <p:nvPr>
               <p:custDataLst>
-                <p:tags r:id="rId3"/>
+                <p:tags r:id="rIdAlignment8"/>
               </p:custDataLst>
             </p:nvPr>
           </p:nvSpPr>
@@ -29188,7 +29188,7 @@
             <p:cNvSpPr/>
             <p:nvPr>
               <p:custDataLst>
-                <p:tags r:id="rId4"/>
+                <p:tags r:id="rIdAlignment9"/>
               </p:custDataLst>
             </p:nvPr>
           </p:nvSpPr>
@@ -29232,7 +29232,7 @@
             <p:cNvSpPr/>
             <p:nvPr>
               <p:custDataLst>
-                <p:tags r:id="rId5"/>
+                <p:tags r:id="rIdAlignment10"/>
               </p:custDataLst>
             </p:nvPr>
           </p:nvSpPr>
@@ -29287,7 +29287,7 @@
             <p:cNvSpPr/>
             <p:nvPr>
               <p:custDataLst>
-                <p:tags r:id="rId6"/>
+                <p:tags r:id="rIdAlignment11"/>
               </p:custDataLst>
             </p:nvPr>
           </p:nvSpPr>
@@ -29331,7 +29331,7 @@
             <p:cNvSpPr/>
             <p:nvPr>
               <p:custDataLst>
-                <p:tags r:id="rId7"/>
+                <p:tags r:id="rIdAlignment12"/>
               </p:custDataLst>
             </p:nvPr>
           </p:nvSpPr>
@@ -29386,7 +29386,7 @@
             <p:cNvSpPr/>
             <p:nvPr>
               <p:custDataLst>
-                <p:tags r:id="rId8"/>
+                <p:tags r:id="rIdAlignment13"/>
               </p:custDataLst>
             </p:nvPr>
           </p:nvSpPr>
@@ -29454,7 +29454,7 @@
             <p:cNvSpPr/>
             <p:nvPr>
               <p:custDataLst>
-                <p:tags r:id="rId9"/>
+                <p:tags r:id="rIdAlignment15"/>
               </p:custDataLst>
             </p:nvPr>
           </p:nvSpPr>
@@ -29889,7 +29889,7 @@
             <p:cNvSpPr/>
             <p:nvPr>
               <p:custDataLst>
-                <p:tags r:id="rId10"/>
+                <p:tags r:id="rIdAlignment27"/>
               </p:custDataLst>
             </p:nvPr>
           </p:nvSpPr>
@@ -29933,7 +29933,7 @@
             <p:cNvSpPr/>
             <p:nvPr>
               <p:custDataLst>
-                <p:tags r:id="rId11"/>
+                <p:tags r:id="rIdAlignment28"/>
               </p:custDataLst>
             </p:nvPr>
           </p:nvSpPr>
@@ -30076,7 +30076,7 @@
             <p:cNvSpPr/>
             <p:nvPr>
               <p:custDataLst>
-                <p:tags r:id="rId12"/>
+                <p:tags r:id="rIdAlignment33"/>
               </p:custDataLst>
             </p:nvPr>
           </p:nvSpPr>
@@ -30120,7 +30120,7 @@
             <p:cNvSpPr/>
             <p:nvPr>
               <p:custDataLst>
-                <p:tags r:id="rId13"/>
+                <p:tags r:id="rIdAlignment34"/>
               </p:custDataLst>
             </p:nvPr>
           </p:nvSpPr>
@@ -30212,7 +30212,7 @@
             <p:cNvSpPr/>
             <p:nvPr>
               <p:custDataLst>
-                <p:tags r:id="rId14"/>
+                <p:tags r:id="rIdAlignment37"/>
               </p:custDataLst>
             </p:nvPr>
           </p:nvSpPr>
@@ -30256,7 +30256,7 @@
             <p:cNvSpPr/>
             <p:nvPr>
               <p:custDataLst>
-                <p:tags r:id="rId15"/>
+                <p:tags r:id="rIdAlignment38"/>
               </p:custDataLst>
             </p:nvPr>
           </p:nvSpPr>
@@ -30300,7 +30300,7 @@
             <p:cNvSpPr/>
             <p:nvPr>
               <p:custDataLst>
-                <p:tags r:id="rId16"/>
+                <p:tags r:id="rIdAlignment39"/>
               </p:custDataLst>
             </p:nvPr>
           </p:nvSpPr>
@@ -30344,7 +30344,7 @@
             <p:cNvSpPr/>
             <p:nvPr>
               <p:custDataLst>
-                <p:tags r:id="rId17"/>
+                <p:tags r:id="rIdAlignment40"/>
               </p:custDataLst>
             </p:nvPr>
           </p:nvSpPr>
@@ -30412,7 +30412,7 @@
             <p:cNvSpPr/>
             <p:nvPr>
               <p:custDataLst>
-                <p:tags r:id="rId18"/>
+                <p:tags r:id="rIdAlignment42"/>
               </p:custDataLst>
             </p:nvPr>
           </p:nvSpPr>
@@ -30507,7 +30507,7 @@
             <p:cNvSpPr/>
             <p:nvPr>
               <p:custDataLst>
-                <p:tags r:id="rId1"/>
+                <p:tags r:id="rIdAlignment45"/>
               </p:custDataLst>
             </p:nvPr>
           </p:nvSpPr>
@@ -30562,7 +30562,7 @@
             <p:cNvSpPr/>
             <p:nvPr>
               <p:custDataLst>
-                <p:tags r:id="rId2"/>
+                <p:tags r:id="rIdAlignment46"/>
               </p:custDataLst>
             </p:nvPr>
           </p:nvSpPr>
@@ -30916,7 +30916,7 @@
             <p:cNvSpPr/>
             <p:nvPr>
               <p:custDataLst>
-                <p:tags r:id="rId15"/>
+                <p:tags r:id="rIdAlignment3"/>
               </p:custDataLst>
             </p:nvPr>
           </p:nvSpPr>
@@ -30960,7 +30960,7 @@
             <p:cNvSpPr/>
             <p:nvPr>
               <p:custDataLst>
-                <p:tags r:id="rId16"/>
+                <p:tags r:id="rIdAlignment4"/>
               </p:custDataLst>
             </p:nvPr>
           </p:nvSpPr>
@@ -31041,7 +31041,7 @@
             <p:cNvSpPr/>
             <p:nvPr>
               <p:custDataLst>
-                <p:tags r:id="rId3"/>
+                <p:tags r:id="rIdAlignment7"/>
               </p:custDataLst>
             </p:nvPr>
           </p:nvSpPr>
@@ -31294,7 +31294,7 @@
             <p:cNvSpPr/>
             <p:nvPr>
               <p:custDataLst>
-                <p:tags r:id="rId4"/>
+                <p:tags r:id="rIdAlignment15"/>
               </p:custDataLst>
             </p:nvPr>
           </p:nvSpPr>
@@ -31338,7 +31338,7 @@
             <p:cNvSpPr/>
             <p:nvPr>
               <p:custDataLst>
-                <p:tags r:id="rId5"/>
+                <p:tags r:id="rIdAlignment16"/>
               </p:custDataLst>
             </p:nvPr>
           </p:nvSpPr>
@@ -31556,7 +31556,7 @@
             <p:cNvSpPr/>
             <p:nvPr>
               <p:custDataLst>
-                <p:tags r:id="rId6"/>
+                <p:tags r:id="rIdAlignment23"/>
               </p:custDataLst>
             </p:nvPr>
           </p:nvSpPr>
@@ -31600,7 +31600,7 @@
             <p:cNvSpPr/>
             <p:nvPr>
               <p:custDataLst>
-                <p:tags r:id="rId7"/>
+                <p:tags r:id="rIdAlignment24"/>
               </p:custDataLst>
             </p:nvPr>
           </p:nvSpPr>
@@ -31865,7 +31865,7 @@
             <p:cNvSpPr/>
             <p:nvPr>
               <p:custDataLst>
-                <p:tags r:id="rId8"/>
+                <p:tags r:id="rIdAlignment32"/>
               </p:custDataLst>
             </p:nvPr>
           </p:nvSpPr>
@@ -31909,7 +31909,7 @@
             <p:cNvSpPr/>
             <p:nvPr>
               <p:custDataLst>
-                <p:tags r:id="rId9"/>
+                <p:tags r:id="rIdAlignment33"/>
               </p:custDataLst>
             </p:nvPr>
           </p:nvSpPr>
@@ -32235,7 +32235,7 @@
             <p:cNvSpPr/>
             <p:nvPr>
               <p:custDataLst>
-                <p:tags r:id="rId10"/>
+                <p:tags r:id="rIdAlignment43"/>
               </p:custDataLst>
             </p:nvPr>
           </p:nvSpPr>
@@ -32279,7 +32279,7 @@
             <p:cNvSpPr/>
             <p:nvPr>
               <p:custDataLst>
-                <p:tags r:id="rId11"/>
+                <p:tags r:id="rIdAlignment44"/>
               </p:custDataLst>
             </p:nvPr>
           </p:nvSpPr>
@@ -32347,7 +32347,7 @@
             <p:cNvSpPr/>
             <p:nvPr>
               <p:custDataLst>
-                <p:tags r:id="rId12"/>
+                <p:tags r:id="rIdAlignment46"/>
               </p:custDataLst>
             </p:nvPr>
           </p:nvSpPr>
@@ -32413,7 +32413,7 @@
             <p:cNvSpPr/>
             <p:nvPr>
               <p:custDataLst>
-                <p:tags r:id="rId13"/>
+                <p:tags r:id="rIdAlignment47"/>
               </p:custDataLst>
             </p:nvPr>
           </p:nvSpPr>
@@ -32479,7 +32479,7 @@
             <p:cNvSpPr/>
             <p:nvPr>
               <p:custDataLst>
-                <p:tags r:id="rId14"/>
+                <p:tags r:id="rIdAlignment48"/>
               </p:custDataLst>
             </p:nvPr>
           </p:nvSpPr>
@@ -32574,7 +32574,7 @@
             <p:cNvSpPr/>
             <p:nvPr>
               <p:custDataLst>
-                <p:tags r:id="rId1"/>
+                <p:tags r:id="rIdAlignment51"/>
               </p:custDataLst>
             </p:nvPr>
           </p:nvSpPr>
@@ -32629,7 +32629,7 @@
             <p:cNvSpPr/>
             <p:nvPr>
               <p:custDataLst>
-                <p:tags r:id="rId2"/>
+                <p:tags r:id="rIdAlignment52"/>
               </p:custDataLst>
             </p:nvPr>
           </p:nvSpPr>
@@ -32892,1395 +32892,1395 @@
 </p:sld>
 </file>
 
-<file path=ppt/tags/tag1.xml><?xml version="1.0" encoding="utf-8"?>
+<file path=ppt/tags/alignment_slide10_10.xml><?xml version="1.0" encoding="utf-8"?>
+<p:tagLst xmlns:a="http://schemas.openxmlformats.org/drawingml/2006/main" xmlns:r="http://schemas.openxmlformats.org/officeDocument/2006/relationships" xmlns:p="http://schemas.openxmlformats.org/presentationml/2006/main">
+  <p:tag name="ALIGNMENT_TARGET_X" val="65.27999877929688"/>
+</p:tagLst>
+</file>
+
+<file path=ppt/tags/alignment_slide10_11.xml><?xml version="1.0" encoding="utf-8"?>
+<p:tagLst xmlns:a="http://schemas.openxmlformats.org/drawingml/2006/main" xmlns:r="http://schemas.openxmlformats.org/officeDocument/2006/relationships" xmlns:p="http://schemas.openxmlformats.org/presentationml/2006/main">
+  <p:tag name="ALIGNMENT_TARGET_X" val="107.22000122070312"/>
+</p:tagLst>
+</file>
+
+<file path=ppt/tags/alignment_slide10_16.xml><?xml version="1.0" encoding="utf-8"?>
+<p:tagLst xmlns:a="http://schemas.openxmlformats.org/drawingml/2006/main" xmlns:r="http://schemas.openxmlformats.org/officeDocument/2006/relationships" xmlns:p="http://schemas.openxmlformats.org/presentationml/2006/main">
+  <p:tag name="ALIGNMENT_TARGET_X" val="136.5"/>
+</p:tagLst>
+</file>
+
+<file path=ppt/tags/alignment_slide10_25.xml><?xml version="1.0" encoding="utf-8"?>
+<p:tagLst xmlns:a="http://schemas.openxmlformats.org/drawingml/2006/main" xmlns:r="http://schemas.openxmlformats.org/officeDocument/2006/relationships" xmlns:p="http://schemas.openxmlformats.org/presentationml/2006/main">
+  <p:tag name="ALIGNMENT_TARGET_X" val="293.9999656677246"/>
+</p:tagLst>
+</file>
+
+<file path=ppt/tags/alignment_slide10_3.xml><?xml version="1.0" encoding="utf-8"?>
+<p:tagLst xmlns:a="http://schemas.openxmlformats.org/drawingml/2006/main" xmlns:r="http://schemas.openxmlformats.org/officeDocument/2006/relationships" xmlns:p="http://schemas.openxmlformats.org/presentationml/2006/main">
+  <p:tag name="ALIGNMENT_TARGET_X" val="59.4900016784668"/>
+</p:tagLst>
+</file>
+
+<file path=ppt/tags/alignment_slide10_38.xml><?xml version="1.0" encoding="utf-8"?>
+<p:tagLst xmlns:a="http://schemas.openxmlformats.org/drawingml/2006/main" xmlns:r="http://schemas.openxmlformats.org/officeDocument/2006/relationships" xmlns:p="http://schemas.openxmlformats.org/presentationml/2006/main">
+  <p:tag name="ALIGNMENT_TARGET_X" val="451.4999885559082"/>
+</p:tagLst>
+</file>
+
+<file path=ppt/tags/alignment_slide10_4.xml><?xml version="1.0" encoding="utf-8"?>
+<p:tagLst xmlns:a="http://schemas.openxmlformats.org/drawingml/2006/main" xmlns:r="http://schemas.openxmlformats.org/officeDocument/2006/relationships" xmlns:p="http://schemas.openxmlformats.org/presentationml/2006/main">
+  <p:tag name="ALIGNMENT_TARGET_X" val="46.7400016784668"/>
+</p:tagLst>
+</file>
+
+<file path=ppt/tags/alignment_slide10_45.xml><?xml version="1.0" encoding="utf-8"?>
+<p:tagLst xmlns:a="http://schemas.openxmlformats.org/drawingml/2006/main" xmlns:r="http://schemas.openxmlformats.org/officeDocument/2006/relationships" xmlns:p="http://schemas.openxmlformats.org/presentationml/2006/main">
+  <p:tag name="ALIGNMENT_TARGET_X" val="609.0000495910645"/>
+</p:tagLst>
+</file>
+
+<file path=ppt/tags/alignment_slide10_46.xml><?xml version="1.0" encoding="utf-8"?>
+<p:tagLst xmlns:a="http://schemas.openxmlformats.org/drawingml/2006/main" xmlns:r="http://schemas.openxmlformats.org/officeDocument/2006/relationships" xmlns:p="http://schemas.openxmlformats.org/presentationml/2006/main">
+  <p:tag name="ALIGNMENT_TARGET_X" val="65.4000015258789"/>
+</p:tagLst>
+</file>
+
+<file path=ppt/tags/alignment_slide10_47.xml><?xml version="1.0" encoding="utf-8"?>
+<p:tagLst xmlns:a="http://schemas.openxmlformats.org/drawingml/2006/main" xmlns:r="http://schemas.openxmlformats.org/officeDocument/2006/relationships" xmlns:p="http://schemas.openxmlformats.org/presentationml/2006/main">
+  <p:tag name="ALIGNMENT_TARGET_X" val="821.2499504089355"/>
+</p:tagLst>
+</file>
+
+<file path=ppt/tags/alignment_slide10_48.xml><?xml version="1.0" encoding="utf-8"?>
+<p:tagLst xmlns:a="http://schemas.openxmlformats.org/drawingml/2006/main" xmlns:r="http://schemas.openxmlformats.org/officeDocument/2006/relationships" xmlns:p="http://schemas.openxmlformats.org/presentationml/2006/main">
+  <p:tag name="ALIGNMENT_TARGET_X" val="821.2500610351562"/>
+</p:tagLst>
+</file>
+
+<file path=ppt/tags/alignment_slide10_52.xml><?xml version="1.0" encoding="utf-8"?>
+<p:tagLst xmlns:a="http://schemas.openxmlformats.org/drawingml/2006/main" xmlns:r="http://schemas.openxmlformats.org/officeDocument/2006/relationships" xmlns:p="http://schemas.openxmlformats.org/presentationml/2006/main">
+  <p:tag name="ALIGNMENT_TARGET_X" val="65.27999877929688"/>
+</p:tagLst>
+</file>
+
+<file path=ppt/tags/alignment_slide10_53.xml><?xml version="1.0" encoding="utf-8"?>
+<p:tagLst xmlns:a="http://schemas.openxmlformats.org/drawingml/2006/main" xmlns:r="http://schemas.openxmlformats.org/officeDocument/2006/relationships" xmlns:p="http://schemas.openxmlformats.org/presentationml/2006/main">
+  <p:tag name="ALIGNMENT_TARGET_X" val="107.22000122070312"/>
+</p:tagLst>
+</file>
+
+<file path=ppt/tags/alignment_slide10_60.xml><?xml version="1.0" encoding="utf-8"?>
+<p:tagLst xmlns:a="http://schemas.openxmlformats.org/drawingml/2006/main" xmlns:r="http://schemas.openxmlformats.org/officeDocument/2006/relationships" xmlns:p="http://schemas.openxmlformats.org/presentationml/2006/main">
+  <p:tag name="ALIGNMENT_TARGET_X" val="136.5"/>
+</p:tagLst>
+</file>
+
+<file path=ppt/tags/alignment_slide10_69.xml><?xml version="1.0" encoding="utf-8"?>
+<p:tagLst xmlns:a="http://schemas.openxmlformats.org/drawingml/2006/main" xmlns:r="http://schemas.openxmlformats.org/officeDocument/2006/relationships" xmlns:p="http://schemas.openxmlformats.org/presentationml/2006/main">
+  <p:tag name="ALIGNMENT_TARGET_X" val="294.0000457763672"/>
+</p:tagLst>
+</file>
+
+<file path=ppt/tags/alignment_slide10_78.xml><?xml version="1.0" encoding="utf-8"?>
+<p:tagLst xmlns:a="http://schemas.openxmlformats.org/drawingml/2006/main" xmlns:r="http://schemas.openxmlformats.org/officeDocument/2006/relationships" xmlns:p="http://schemas.openxmlformats.org/presentationml/2006/main">
+  <p:tag name="ALIGNMENT_TARGET_X" val="451.50000762939453"/>
+</p:tagLst>
+</file>
+
+<file path=ppt/tags/alignment_slide10_87.xml><?xml version="1.0" encoding="utf-8"?>
+<p:tagLst xmlns:a="http://schemas.openxmlformats.org/drawingml/2006/main" xmlns:r="http://schemas.openxmlformats.org/officeDocument/2006/relationships" xmlns:p="http://schemas.openxmlformats.org/presentationml/2006/main">
+  <p:tag name="ALIGNMENT_TARGET_X" val="609.0000076293945"/>
+</p:tagLst>
+</file>
+
+<file path=ppt/tags/alignment_slide10_89.xml><?xml version="1.0" encoding="utf-8"?>
+<p:tagLst xmlns:a="http://schemas.openxmlformats.org/drawingml/2006/main" xmlns:r="http://schemas.openxmlformats.org/officeDocument/2006/relationships" xmlns:p="http://schemas.openxmlformats.org/presentationml/2006/main">
+  <p:tag name="ALIGNMENT_TARGET_X" val="372.75"/>
+</p:tagLst>
+</file>
+
+<file path=ppt/tags/alignment_slide10_90.xml><?xml version="1.0" encoding="utf-8"?>
+<p:tagLst xmlns:a="http://schemas.openxmlformats.org/drawingml/2006/main" xmlns:r="http://schemas.openxmlformats.org/officeDocument/2006/relationships" xmlns:p="http://schemas.openxmlformats.org/presentationml/2006/main">
+  <p:tag name="ALIGNMENT_TARGET_X" val="65.4000015258789"/>
+</p:tagLst>
+</file>
+
+<file path=ppt/tags/alignment_slide10_91.xml><?xml version="1.0" encoding="utf-8"?>
+<p:tagLst xmlns:a="http://schemas.openxmlformats.org/drawingml/2006/main" xmlns:r="http://schemas.openxmlformats.org/officeDocument/2006/relationships" xmlns:p="http://schemas.openxmlformats.org/presentationml/2006/main">
+  <p:tag name="ALIGNMENT_TARGET_X" val="821.2499885559082"/>
+</p:tagLst>
+</file>
+
+<file path=ppt/tags/alignment_slide10_92.xml><?xml version="1.0" encoding="utf-8"?>
+<p:tagLst xmlns:a="http://schemas.openxmlformats.org/drawingml/2006/main" xmlns:r="http://schemas.openxmlformats.org/officeDocument/2006/relationships" xmlns:p="http://schemas.openxmlformats.org/presentationml/2006/main">
+  <p:tag name="ALIGNMENT_TARGET_X" val="821.2500610351562"/>
+</p:tagLst>
+</file>
+
+<file path=ppt/tags/alignment_slide10_95.xml><?xml version="1.0" encoding="utf-8"?>
 <p:tagLst xmlns:a="http://schemas.openxmlformats.org/drawingml/2006/main" xmlns:r="http://schemas.openxmlformats.org/officeDocument/2006/relationships" xmlns:p="http://schemas.openxmlformats.org/presentationml/2006/main">
   <p:tag name="ALIGNMENT_TARGET_X" val="47.54999923706055"/>
 </p:tagLst>
 </file>
 
-<file path=ppt/tags/tag10.xml><?xml version="1.0" encoding="utf-8"?>
+<file path=ppt/tags/alignment_slide10_96.xml><?xml version="1.0" encoding="utf-8"?>
+<p:tagLst xmlns:a="http://schemas.openxmlformats.org/drawingml/2006/main" xmlns:r="http://schemas.openxmlformats.org/officeDocument/2006/relationships" xmlns:p="http://schemas.openxmlformats.org/presentationml/2006/main">
+  <p:tag name="ALIGNMENT_TARGET_X" val="912.4500274658203"/>
+</p:tagLst>
+</file>
+
+<file path=ppt/tags/alignment_slide11_10.xml><?xml version="1.0" encoding="utf-8"?>
+<p:tagLst xmlns:a="http://schemas.openxmlformats.org/drawingml/2006/main" xmlns:r="http://schemas.openxmlformats.org/officeDocument/2006/relationships" xmlns:p="http://schemas.openxmlformats.org/presentationml/2006/main">
+  <p:tag name="ALIGNMENT_TARGET_X" val="65.27999877929688"/>
+</p:tagLst>
+</file>
+
+<file path=ppt/tags/alignment_slide11_11.xml><?xml version="1.0" encoding="utf-8"?>
+<p:tagLst xmlns:a="http://schemas.openxmlformats.org/drawingml/2006/main" xmlns:r="http://schemas.openxmlformats.org/officeDocument/2006/relationships" xmlns:p="http://schemas.openxmlformats.org/presentationml/2006/main">
+  <p:tag name="ALIGNMENT_TARGET_X" val="107.22000122070312"/>
+</p:tagLst>
+</file>
+
+<file path=ppt/tags/alignment_slide11_18.xml><?xml version="1.0" encoding="utf-8"?>
+<p:tagLst xmlns:a="http://schemas.openxmlformats.org/drawingml/2006/main" xmlns:r="http://schemas.openxmlformats.org/officeDocument/2006/relationships" xmlns:p="http://schemas.openxmlformats.org/presentationml/2006/main">
+  <p:tag name="ALIGNMENT_TARGET_X" val="156.75"/>
+</p:tagLst>
+</file>
+
+<file path=ppt/tags/alignment_slide11_22.xml><?xml version="1.0" encoding="utf-8"?>
+<p:tagLst xmlns:a="http://schemas.openxmlformats.org/drawingml/2006/main" xmlns:r="http://schemas.openxmlformats.org/officeDocument/2006/relationships" xmlns:p="http://schemas.openxmlformats.org/presentationml/2006/main">
+  <p:tag name="ALIGNMENT_TARGET_X" val="379.49996185302734"/>
+</p:tagLst>
+</file>
+
+<file path=ppt/tags/alignment_slide11_29.xml><?xml version="1.0" encoding="utf-8"?>
+<p:tagLst xmlns:a="http://schemas.openxmlformats.org/drawingml/2006/main" xmlns:r="http://schemas.openxmlformats.org/officeDocument/2006/relationships" xmlns:p="http://schemas.openxmlformats.org/presentationml/2006/main">
+  <p:tag name="ALIGNMENT_TARGET_X" val="608.2499885559082"/>
+</p:tagLst>
+</file>
+
+<file path=ppt/tags/alignment_slide11_3.xml><?xml version="1.0" encoding="utf-8"?>
+<p:tagLst xmlns:a="http://schemas.openxmlformats.org/drawingml/2006/main" xmlns:r="http://schemas.openxmlformats.org/officeDocument/2006/relationships" xmlns:p="http://schemas.openxmlformats.org/presentationml/2006/main">
+  <p:tag name="ALIGNMENT_TARGET_X" val="59.4900016784668"/>
+</p:tagLst>
+</file>
+
+<file path=ppt/tags/alignment_slide11_34.xml><?xml version="1.0" encoding="utf-8"?>
+<p:tagLst xmlns:a="http://schemas.openxmlformats.org/drawingml/2006/main" xmlns:r="http://schemas.openxmlformats.org/officeDocument/2006/relationships" xmlns:p="http://schemas.openxmlformats.org/presentationml/2006/main">
+  <p:tag name="ALIGNMENT_TARGET_X" val="65.4000015258789"/>
+</p:tagLst>
+</file>
+
+<file path=ppt/tags/alignment_slide11_35.xml><?xml version="1.0" encoding="utf-8"?>
+<p:tagLst xmlns:a="http://schemas.openxmlformats.org/drawingml/2006/main" xmlns:r="http://schemas.openxmlformats.org/officeDocument/2006/relationships" xmlns:p="http://schemas.openxmlformats.org/presentationml/2006/main">
+  <p:tag name="ALIGNMENT_TARGET_X" val="821.2500047683716"/>
+</p:tagLst>
+</file>
+
+<file path=ppt/tags/alignment_slide11_36.xml><?xml version="1.0" encoding="utf-8"?>
+<p:tagLst xmlns:a="http://schemas.openxmlformats.org/drawingml/2006/main" xmlns:r="http://schemas.openxmlformats.org/officeDocument/2006/relationships" xmlns:p="http://schemas.openxmlformats.org/presentationml/2006/main">
+  <p:tag name="ALIGNMENT_TARGET_X" val="821.2499465942383"/>
+</p:tagLst>
+</file>
+
+<file path=ppt/tags/alignment_slide11_4.xml><?xml version="1.0" encoding="utf-8"?>
+<p:tagLst xmlns:a="http://schemas.openxmlformats.org/drawingml/2006/main" xmlns:r="http://schemas.openxmlformats.org/officeDocument/2006/relationships" xmlns:p="http://schemas.openxmlformats.org/presentationml/2006/main">
+  <p:tag name="ALIGNMENT_TARGET_X" val="46.7400016784668"/>
+</p:tagLst>
+</file>
+
+<file path=ppt/tags/alignment_slide11_40.xml><?xml version="1.0" encoding="utf-8"?>
+<p:tagLst xmlns:a="http://schemas.openxmlformats.org/drawingml/2006/main" xmlns:r="http://schemas.openxmlformats.org/officeDocument/2006/relationships" xmlns:p="http://schemas.openxmlformats.org/presentationml/2006/main">
+  <p:tag name="ALIGNMENT_TARGET_X" val="65.27999877929688"/>
+</p:tagLst>
+</file>
+
+<file path=ppt/tags/alignment_slide11_41.xml><?xml version="1.0" encoding="utf-8"?>
+<p:tagLst xmlns:a="http://schemas.openxmlformats.org/drawingml/2006/main" xmlns:r="http://schemas.openxmlformats.org/officeDocument/2006/relationships" xmlns:p="http://schemas.openxmlformats.org/presentationml/2006/main">
+  <p:tag name="ALIGNMENT_TARGET_X" val="107.22000122070312"/>
+</p:tagLst>
+</file>
+
+<file path=ppt/tags/alignment_slide11_43.xml><?xml version="1.0" encoding="utf-8"?>
+<p:tagLst xmlns:a="http://schemas.openxmlformats.org/drawingml/2006/main" xmlns:r="http://schemas.openxmlformats.org/officeDocument/2006/relationships" xmlns:p="http://schemas.openxmlformats.org/presentationml/2006/main">
+  <p:tag name="ALIGNMENT_TARGET_X" val="122.25003814697266"/>
+</p:tagLst>
+</file>
+
+<file path=ppt/tags/alignment_slide11_49.xml><?xml version="1.0" encoding="utf-8"?>
+<p:tagLst xmlns:a="http://schemas.openxmlformats.org/drawingml/2006/main" xmlns:r="http://schemas.openxmlformats.org/officeDocument/2006/relationships" xmlns:p="http://schemas.openxmlformats.org/presentationml/2006/main">
+  <p:tag name="ALIGNMENT_TARGET_X" val="324.00000762939453"/>
+</p:tagLst>
+</file>
+
+<file path=ppt/tags/alignment_slide11_51.xml><?xml version="1.0" encoding="utf-8"?>
+<p:tagLst xmlns:a="http://schemas.openxmlformats.org/drawingml/2006/main" xmlns:r="http://schemas.openxmlformats.org/officeDocument/2006/relationships" xmlns:p="http://schemas.openxmlformats.org/presentationml/2006/main">
+  <p:tag name="ALIGNMENT_TARGET_X" val="323.99996185302734"/>
+</p:tagLst>
+</file>
+
+<file path=ppt/tags/alignment_slide11_57.xml><?xml version="1.0" encoding="utf-8"?>
+<p:tagLst xmlns:a="http://schemas.openxmlformats.org/drawingml/2006/main" xmlns:r="http://schemas.openxmlformats.org/officeDocument/2006/relationships" xmlns:p="http://schemas.openxmlformats.org/presentationml/2006/main">
+  <p:tag name="ALIGNMENT_TARGET_X" val="570.0000495910645"/>
+</p:tagLst>
+</file>
+
+<file path=ppt/tags/alignment_slide11_59.xml><?xml version="1.0" encoding="utf-8"?>
+<p:tagLst xmlns:a="http://schemas.openxmlformats.org/drawingml/2006/main" xmlns:r="http://schemas.openxmlformats.org/officeDocument/2006/relationships" xmlns:p="http://schemas.openxmlformats.org/presentationml/2006/main">
+  <p:tag name="ALIGNMENT_TARGET_X" val="570.0000076293945"/>
+</p:tagLst>
+</file>
+
+<file path=ppt/tags/alignment_slide11_60.xml><?xml version="1.0" encoding="utf-8"?>
+<p:tagLst xmlns:a="http://schemas.openxmlformats.org/drawingml/2006/main" xmlns:r="http://schemas.openxmlformats.org/officeDocument/2006/relationships" xmlns:p="http://schemas.openxmlformats.org/presentationml/2006/main">
+  <p:tag name="ALIGNMENT_TARGET_X" val="65.4000015258789"/>
+</p:tagLst>
+</file>
+
+<file path=ppt/tags/alignment_slide11_61.xml><?xml version="1.0" encoding="utf-8"?>
+<p:tagLst xmlns:a="http://schemas.openxmlformats.org/drawingml/2006/main" xmlns:r="http://schemas.openxmlformats.org/officeDocument/2006/relationships" xmlns:p="http://schemas.openxmlformats.org/presentationml/2006/main">
+  <p:tag name="ALIGNMENT_TARGET_X" val="821.2500076293945"/>
+</p:tagLst>
+</file>
+
+<file path=ppt/tags/alignment_slide11_62.xml><?xml version="1.0" encoding="utf-8"?>
+<p:tagLst xmlns:a="http://schemas.openxmlformats.org/drawingml/2006/main" xmlns:r="http://schemas.openxmlformats.org/officeDocument/2006/relationships" xmlns:p="http://schemas.openxmlformats.org/presentationml/2006/main">
+  <p:tag name="ALIGNMENT_TARGET_X" val="821.2499923706055"/>
+</p:tagLst>
+</file>
+
+<file path=ppt/tags/alignment_slide11_65.xml><?xml version="1.0" encoding="utf-8"?>
+<p:tagLst xmlns:a="http://schemas.openxmlformats.org/drawingml/2006/main" xmlns:r="http://schemas.openxmlformats.org/officeDocument/2006/relationships" xmlns:p="http://schemas.openxmlformats.org/presentationml/2006/main">
+  <p:tag name="ALIGNMENT_TARGET_X" val="47.54999923706055"/>
+</p:tagLst>
+</file>
+
+<file path=ppt/tags/alignment_slide11_66.xml><?xml version="1.0" encoding="utf-8"?>
+<p:tagLst xmlns:a="http://schemas.openxmlformats.org/drawingml/2006/main" xmlns:r="http://schemas.openxmlformats.org/officeDocument/2006/relationships" xmlns:p="http://schemas.openxmlformats.org/presentationml/2006/main">
+  <p:tag name="ALIGNMENT_TARGET_X" val="912.4500274658203"/>
+</p:tagLst>
+</file>
+
+<file path=ppt/tags/alignment_slide12_10.xml><?xml version="1.0" encoding="utf-8"?>
+<p:tagLst xmlns:a="http://schemas.openxmlformats.org/drawingml/2006/main" xmlns:r="http://schemas.openxmlformats.org/officeDocument/2006/relationships" xmlns:p="http://schemas.openxmlformats.org/presentationml/2006/main">
+  <p:tag name="ALIGNMENT_TARGET_X" val="65.27999877929688"/>
+</p:tagLst>
+</file>
+
+<file path=ppt/tags/alignment_slide12_100.xml><?xml version="1.0" encoding="utf-8"?>
+<p:tagLst xmlns:a="http://schemas.openxmlformats.org/drawingml/2006/main" xmlns:r="http://schemas.openxmlformats.org/officeDocument/2006/relationships" xmlns:p="http://schemas.openxmlformats.org/presentationml/2006/main">
+  <p:tag name="ALIGNMENT_TARGET_X" val="608.9999771118164"/>
+</p:tagLst>
+</file>
+
+<file path=ppt/tags/alignment_slide12_101.xml><?xml version="1.0" encoding="utf-8"?>
+<p:tagLst xmlns:a="http://schemas.openxmlformats.org/drawingml/2006/main" xmlns:r="http://schemas.openxmlformats.org/officeDocument/2006/relationships" xmlns:p="http://schemas.openxmlformats.org/presentationml/2006/main">
+  <p:tag name="ALIGNMENT_TARGET_X" val="65.4000015258789"/>
+</p:tagLst>
+</file>
+
+<file path=ppt/tags/alignment_slide12_102.xml><?xml version="1.0" encoding="utf-8"?>
+<p:tagLst xmlns:a="http://schemas.openxmlformats.org/drawingml/2006/main" xmlns:r="http://schemas.openxmlformats.org/officeDocument/2006/relationships" xmlns:p="http://schemas.openxmlformats.org/presentationml/2006/main">
+  <p:tag name="ALIGNMENT_TARGET_X" val="821.2500047683716"/>
+</p:tagLst>
+</file>
+
+<file path=ppt/tags/alignment_slide12_103.xml><?xml version="1.0" encoding="utf-8"?>
+<p:tagLst xmlns:a="http://schemas.openxmlformats.org/drawingml/2006/main" xmlns:r="http://schemas.openxmlformats.org/officeDocument/2006/relationships" xmlns:p="http://schemas.openxmlformats.org/presentationml/2006/main">
+  <p:tag name="ALIGNMENT_TARGET_X" val="821.2500152587891"/>
+</p:tagLst>
+</file>
+
+<file path=ppt/tags/alignment_slide12_106.xml><?xml version="1.0" encoding="utf-8"?>
+<p:tagLst xmlns:a="http://schemas.openxmlformats.org/drawingml/2006/main" xmlns:r="http://schemas.openxmlformats.org/officeDocument/2006/relationships" xmlns:p="http://schemas.openxmlformats.org/presentationml/2006/main">
+  <p:tag name="ALIGNMENT_TARGET_X" val="47.54999923706055"/>
+</p:tagLst>
+</file>
+
+<file path=ppt/tags/alignment_slide12_107.xml><?xml version="1.0" encoding="utf-8"?>
+<p:tagLst xmlns:a="http://schemas.openxmlformats.org/drawingml/2006/main" xmlns:r="http://schemas.openxmlformats.org/officeDocument/2006/relationships" xmlns:p="http://schemas.openxmlformats.org/presentationml/2006/main">
+  <p:tag name="ALIGNMENT_TARGET_X" val="912.4500274658203"/>
+</p:tagLst>
+</file>
+
+<file path=ppt/tags/alignment_slide12_11.xml><?xml version="1.0" encoding="utf-8"?>
+<p:tagLst xmlns:a="http://schemas.openxmlformats.org/drawingml/2006/main" xmlns:r="http://schemas.openxmlformats.org/officeDocument/2006/relationships" xmlns:p="http://schemas.openxmlformats.org/presentationml/2006/main">
+  <p:tag name="ALIGNMENT_TARGET_X" val="107.22000122070312"/>
+</p:tagLst>
+</file>
+
+<file path=ppt/tags/alignment_slide12_13.xml><?xml version="1.0" encoding="utf-8"?>
+<p:tagLst xmlns:a="http://schemas.openxmlformats.org/drawingml/2006/main" xmlns:r="http://schemas.openxmlformats.org/officeDocument/2006/relationships" xmlns:p="http://schemas.openxmlformats.org/presentationml/2006/main">
+  <p:tag name="ALIGNMENT_TARGET_X" val="189.75003814697266"/>
+</p:tagLst>
+</file>
+
+<file path=ppt/tags/alignment_slide12_3.xml><?xml version="1.0" encoding="utf-8"?>
+<p:tagLst xmlns:a="http://schemas.openxmlformats.org/drawingml/2006/main" xmlns:r="http://schemas.openxmlformats.org/officeDocument/2006/relationships" xmlns:p="http://schemas.openxmlformats.org/presentationml/2006/main">
+  <p:tag name="ALIGNMENT_TARGET_X" val="59.4900016784668"/>
+</p:tagLst>
+</file>
+
+<file path=ppt/tags/alignment_slide12_4.xml><?xml version="1.0" encoding="utf-8"?>
+<p:tagLst xmlns:a="http://schemas.openxmlformats.org/drawingml/2006/main" xmlns:r="http://schemas.openxmlformats.org/officeDocument/2006/relationships" xmlns:p="http://schemas.openxmlformats.org/presentationml/2006/main">
+  <p:tag name="ALIGNMENT_TARGET_X" val="46.7400016784668"/>
+</p:tagLst>
+</file>
+
+<file path=ppt/tags/alignment_slide12_48.xml><?xml version="1.0" encoding="utf-8"?>
+<p:tagLst xmlns:a="http://schemas.openxmlformats.org/drawingml/2006/main" xmlns:r="http://schemas.openxmlformats.org/officeDocument/2006/relationships" xmlns:p="http://schemas.openxmlformats.org/presentationml/2006/main">
+  <p:tag name="ALIGNMENT_TARGET_X" val="189.75000381469727"/>
+</p:tagLst>
+</file>
+
+<file path=ppt/tags/alignment_slide12_54.xml><?xml version="1.0" encoding="utf-8"?>
+<p:tagLst xmlns:a="http://schemas.openxmlformats.org/drawingml/2006/main" xmlns:r="http://schemas.openxmlformats.org/officeDocument/2006/relationships" xmlns:p="http://schemas.openxmlformats.org/presentationml/2006/main">
+  <p:tag name="ALIGNMENT_TARGET_X" val="520.5000381469727"/>
+</p:tagLst>
+</file>
+
+<file path=ppt/tags/alignment_slide12_56.xml><?xml version="1.0" encoding="utf-8"?>
+<p:tagLst xmlns:a="http://schemas.openxmlformats.org/drawingml/2006/main" xmlns:r="http://schemas.openxmlformats.org/officeDocument/2006/relationships" xmlns:p="http://schemas.openxmlformats.org/presentationml/2006/main">
+  <p:tag name="ALIGNMENT_TARGET_X" val="520.5000038146973"/>
+</p:tagLst>
+</file>
+
+<file path=ppt/tags/alignment_slide12_57.xml><?xml version="1.0" encoding="utf-8"?>
+<p:tagLst xmlns:a="http://schemas.openxmlformats.org/drawingml/2006/main" xmlns:r="http://schemas.openxmlformats.org/officeDocument/2006/relationships" xmlns:p="http://schemas.openxmlformats.org/presentationml/2006/main">
+  <p:tag name="ALIGNMENT_TARGET_X" val="65.4000015258789"/>
+</p:tagLst>
+</file>
+
+<file path=ppt/tags/alignment_slide12_58.xml><?xml version="1.0" encoding="utf-8"?>
+<p:tagLst xmlns:a="http://schemas.openxmlformats.org/drawingml/2006/main" xmlns:r="http://schemas.openxmlformats.org/officeDocument/2006/relationships" xmlns:p="http://schemas.openxmlformats.org/presentationml/2006/main">
+  <p:tag name="ALIGNMENT_TARGET_X" val="821.2500286102295"/>
+</p:tagLst>
+</file>
+
+<file path=ppt/tags/alignment_slide12_59.xml><?xml version="1.0" encoding="utf-8"?>
+<p:tagLst xmlns:a="http://schemas.openxmlformats.org/drawingml/2006/main" xmlns:r="http://schemas.openxmlformats.org/officeDocument/2006/relationships" xmlns:p="http://schemas.openxmlformats.org/presentationml/2006/main">
+  <p:tag name="ALIGNMENT_TARGET_X" val="821.2499465942383"/>
+</p:tagLst>
+</file>
+
+<file path=ppt/tags/alignment_slide12_63.xml><?xml version="1.0" encoding="utf-8"?>
+<p:tagLst xmlns:a="http://schemas.openxmlformats.org/drawingml/2006/main" xmlns:r="http://schemas.openxmlformats.org/officeDocument/2006/relationships" xmlns:p="http://schemas.openxmlformats.org/presentationml/2006/main">
+  <p:tag name="ALIGNMENT_TARGET_X" val="65.27999877929688"/>
+</p:tagLst>
+</file>
+
+<file path=ppt/tags/alignment_slide12_64.xml><?xml version="1.0" encoding="utf-8"?>
+<p:tagLst xmlns:a="http://schemas.openxmlformats.org/drawingml/2006/main" xmlns:r="http://schemas.openxmlformats.org/officeDocument/2006/relationships" xmlns:p="http://schemas.openxmlformats.org/presentationml/2006/main">
+  <p:tag name="ALIGNMENT_TARGET_X" val="107.22000122070312"/>
+</p:tagLst>
+</file>
+
+<file path=ppt/tags/alignment_slide12_66.xml><?xml version="1.0" encoding="utf-8"?>
+<p:tagLst xmlns:a="http://schemas.openxmlformats.org/drawingml/2006/main" xmlns:r="http://schemas.openxmlformats.org/officeDocument/2006/relationships" xmlns:p="http://schemas.openxmlformats.org/presentationml/2006/main">
+  <p:tag name="ALIGNMENT_TARGET_X" val="81.83999633789062"/>
+</p:tagLst>
+</file>
+
+<file path=ppt/tags/alignment_slide12_74.xml><?xml version="1.0" encoding="utf-8"?>
+<p:tagLst xmlns:a="http://schemas.openxmlformats.org/drawingml/2006/main" xmlns:r="http://schemas.openxmlformats.org/officeDocument/2006/relationships" xmlns:p="http://schemas.openxmlformats.org/presentationml/2006/main">
+  <p:tag name="ALIGNMENT_TARGET_X" val="159"/>
+</p:tagLst>
+</file>
+
+<file path=ppt/tags/alignment_slide12_82.xml><?xml version="1.0" encoding="utf-8"?>
+<p:tagLst xmlns:a="http://schemas.openxmlformats.org/drawingml/2006/main" xmlns:r="http://schemas.openxmlformats.org/officeDocument/2006/relationships" xmlns:p="http://schemas.openxmlformats.org/presentationml/2006/main">
+  <p:tag name="ALIGNMENT_TARGET_X" val="308.9999885559082"/>
+</p:tagLst>
+</file>
+
+<file path=ppt/tags/alignment_slide12_92.xml><?xml version="1.0" encoding="utf-8"?>
+<p:tagLst xmlns:a="http://schemas.openxmlformats.org/drawingml/2006/main" xmlns:r="http://schemas.openxmlformats.org/officeDocument/2006/relationships" xmlns:p="http://schemas.openxmlformats.org/presentationml/2006/main">
+  <p:tag name="ALIGNMENT_TARGET_X" val="458.9999580383301"/>
+</p:tagLst>
+</file>
+
+<file path=ppt/tags/alignment_slide1_14.xml><?xml version="1.0" encoding="utf-8"?>
+<p:tagLst xmlns:a="http://schemas.openxmlformats.org/drawingml/2006/main" xmlns:r="http://schemas.openxmlformats.org/officeDocument/2006/relationships" xmlns:p="http://schemas.openxmlformats.org/presentationml/2006/main">
+  <p:tag name="ALIGNMENT_TARGET_X" val="134.25000381469727"/>
+</p:tagLst>
+</file>
+
+<file path=ppt/tags/alignment_slide1_24.xml><?xml version="1.0" encoding="utf-8"?>
+<p:tagLst xmlns:a="http://schemas.openxmlformats.org/drawingml/2006/main" xmlns:r="http://schemas.openxmlformats.org/officeDocument/2006/relationships" xmlns:p="http://schemas.openxmlformats.org/presentationml/2006/main">
+  <p:tag name="ALIGNMENT_TARGET_X" val="300.7499885559082"/>
+</p:tagLst>
+</file>
+
+<file path=ppt/tags/alignment_slide1_3.xml><?xml version="1.0" encoding="utf-8"?>
+<p:tagLst xmlns:a="http://schemas.openxmlformats.org/drawingml/2006/main" xmlns:r="http://schemas.openxmlformats.org/officeDocument/2006/relationships" xmlns:p="http://schemas.openxmlformats.org/presentationml/2006/main">
+  <p:tag name="ALIGNMENT_TARGET_X" val="59.4900016784668"/>
+</p:tagLst>
+</file>
+
+<file path=ppt/tags/alignment_slide1_38.xml><?xml version="1.0" encoding="utf-8"?>
+<p:tagLst xmlns:a="http://schemas.openxmlformats.org/drawingml/2006/main" xmlns:r="http://schemas.openxmlformats.org/officeDocument/2006/relationships" xmlns:p="http://schemas.openxmlformats.org/presentationml/2006/main">
+  <p:tag name="ALIGNMENT_TARGET_X" val="467.2499885559082"/>
+</p:tagLst>
+</file>
+
+<file path=ppt/tags/alignment_slide1_46.xml><?xml version="1.0" encoding="utf-8"?>
 <p:tagLst xmlns:a="http://schemas.openxmlformats.org/drawingml/2006/main" xmlns:r="http://schemas.openxmlformats.org/officeDocument/2006/relationships" xmlns:p="http://schemas.openxmlformats.org/presentationml/2006/main">
   <p:tag name="ALIGNMENT_TARGET_X" val="633.7499885559082"/>
 </p:tagLst>
 </file>
 
-<file path=ppt/tags/tag100.xml><?xml version="1.0" encoding="utf-8"?>
+<file path=ppt/tags/alignment_slide1_5.xml><?xml version="1.0" encoding="utf-8"?>
+<p:tagLst xmlns:a="http://schemas.openxmlformats.org/drawingml/2006/main" xmlns:r="http://schemas.openxmlformats.org/officeDocument/2006/relationships" xmlns:p="http://schemas.openxmlformats.org/presentationml/2006/main">
+  <p:tag name="ALIGNMENT_TARGET_X" val="46.709999084472656"/>
+</p:tagLst>
+</file>
+
+<file path=ppt/tags/alignment_slide1_6.xml><?xml version="1.0" encoding="utf-8"?>
+<p:tagLst xmlns:a="http://schemas.openxmlformats.org/drawingml/2006/main" xmlns:r="http://schemas.openxmlformats.org/officeDocument/2006/relationships" xmlns:p="http://schemas.openxmlformats.org/presentationml/2006/main">
+  <p:tag name="ALIGNMENT_TARGET_X" val="46.709999084472656"/>
+</p:tagLst>
+</file>
+
+<file path=ppt/tags/alignment_slide1_7.xml><?xml version="1.0" encoding="utf-8"?>
+<p:tagLst xmlns:a="http://schemas.openxmlformats.org/drawingml/2006/main" xmlns:r="http://schemas.openxmlformats.org/officeDocument/2006/relationships" xmlns:p="http://schemas.openxmlformats.org/presentationml/2006/main">
+  <p:tag name="ALIGNMENT_TARGET_X" val="46.709999084472656"/>
+</p:tagLst>
+</file>
+
+<file path=ppt/tags/alignment_slide1_8.xml><?xml version="1.0" encoding="utf-8"?>
+<p:tagLst xmlns:a="http://schemas.openxmlformats.org/drawingml/2006/main" xmlns:r="http://schemas.openxmlformats.org/officeDocument/2006/relationships" xmlns:p="http://schemas.openxmlformats.org/presentationml/2006/main">
+  <p:tag name="ALIGNMENT_TARGET_X" val="47.15999984741211"/>
+</p:tagLst>
+</file>
+
+<file path=ppt/tags/alignment_slide1_81.xml><?xml version="1.0" encoding="utf-8"?>
+<p:tagLst xmlns:a="http://schemas.openxmlformats.org/drawingml/2006/main" xmlns:r="http://schemas.openxmlformats.org/officeDocument/2006/relationships" xmlns:p="http://schemas.openxmlformats.org/presentationml/2006/main">
+  <p:tag name="ALIGNMENT_TARGET_X" val="47.54999923706055"/>
+</p:tagLst>
+</file>
+
+<file path=ppt/tags/alignment_slide1_82.xml><?xml version="1.0" encoding="utf-8"?>
+<p:tagLst xmlns:a="http://schemas.openxmlformats.org/drawingml/2006/main" xmlns:r="http://schemas.openxmlformats.org/officeDocument/2006/relationships" xmlns:p="http://schemas.openxmlformats.org/presentationml/2006/main">
+  <p:tag name="ALIGNMENT_TARGET_X" val="912.4499855041504"/>
+</p:tagLst>
+</file>
+
+<file path=ppt/tags/alignment_slide3_16.xml><?xml version="1.0" encoding="utf-8"?>
+<p:tagLst xmlns:a="http://schemas.openxmlformats.org/drawingml/2006/main" xmlns:r="http://schemas.openxmlformats.org/officeDocument/2006/relationships" xmlns:p="http://schemas.openxmlformats.org/presentationml/2006/main">
+  <p:tag name="ALIGNMENT_TARGET_X" val="24.8700008392334"/>
+</p:tagLst>
+</file>
+
+<file path=ppt/tags/alignment_slide3_17.xml><?xml version="1.0" encoding="utf-8"?>
+<p:tagLst xmlns:a="http://schemas.openxmlformats.org/drawingml/2006/main" xmlns:r="http://schemas.openxmlformats.org/officeDocument/2006/relationships" xmlns:p="http://schemas.openxmlformats.org/presentationml/2006/main">
+  <p:tag name="ALIGNMENT_TARGET_X" val="24.84000015258789"/>
+</p:tagLst>
+</file>
+
+<file path=ppt/tags/alignment_slide3_18.xml><?xml version="1.0" encoding="utf-8"?>
+<p:tagLst xmlns:a="http://schemas.openxmlformats.org/drawingml/2006/main" xmlns:r="http://schemas.openxmlformats.org/officeDocument/2006/relationships" xmlns:p="http://schemas.openxmlformats.org/presentationml/2006/main">
+  <p:tag name="ALIGNMENT_TARGET_X" val="24.84000015258789"/>
+</p:tagLst>
+</file>
+
+<file path=ppt/tags/alignment_slide3_19.xml><?xml version="1.0" encoding="utf-8"?>
+<p:tagLst xmlns:a="http://schemas.openxmlformats.org/drawingml/2006/main" xmlns:r="http://schemas.openxmlformats.org/officeDocument/2006/relationships" xmlns:p="http://schemas.openxmlformats.org/presentationml/2006/main">
+  <p:tag name="ALIGNMENT_TARGET_X" val="24.899999618530273"/>
+</p:tagLst>
+</file>
+
+<file path=ppt/tags/alignment_slide3_25.xml><?xml version="1.0" encoding="utf-8"?>
+<p:tagLst xmlns:a="http://schemas.openxmlformats.org/drawingml/2006/main" xmlns:r="http://schemas.openxmlformats.org/officeDocument/2006/relationships" xmlns:p="http://schemas.openxmlformats.org/presentationml/2006/main">
+  <p:tag name="ALIGNMENT_TARGET_X" val="245.27999877929688"/>
+</p:tagLst>
+</file>
+
+<file path=ppt/tags/alignment_slide3_27.xml><?xml version="1.0" encoding="utf-8"?>
+<p:tagLst xmlns:a="http://schemas.openxmlformats.org/drawingml/2006/main" xmlns:r="http://schemas.openxmlformats.org/officeDocument/2006/relationships" xmlns:p="http://schemas.openxmlformats.org/presentationml/2006/main">
+  <p:tag name="ALIGNMENT_TARGET_X" val="231.77999877929688"/>
+</p:tagLst>
+</file>
+
+<file path=ppt/tags/alignment_slide3_28.xml><?xml version="1.0" encoding="utf-8"?>
+<p:tagLst xmlns:a="http://schemas.openxmlformats.org/drawingml/2006/main" xmlns:r="http://schemas.openxmlformats.org/officeDocument/2006/relationships" xmlns:p="http://schemas.openxmlformats.org/presentationml/2006/main">
+  <p:tag name="ALIGNMENT_TARGET_X" val="231.89999389648438"/>
+</p:tagLst>
+</file>
+
+<file path=ppt/tags/alignment_slide3_3.xml><?xml version="1.0" encoding="utf-8"?>
+<p:tagLst xmlns:a="http://schemas.openxmlformats.org/drawingml/2006/main" xmlns:r="http://schemas.openxmlformats.org/officeDocument/2006/relationships" xmlns:p="http://schemas.openxmlformats.org/presentationml/2006/main">
+  <p:tag name="ALIGNMENT_TARGET_X" val="59.4900016784668"/>
+</p:tagLst>
+</file>
+
+<file path=ppt/tags/alignment_slide3_30.xml><?xml version="1.0" encoding="utf-8"?>
+<p:tagLst xmlns:a="http://schemas.openxmlformats.org/drawingml/2006/main" xmlns:r="http://schemas.openxmlformats.org/officeDocument/2006/relationships" xmlns:p="http://schemas.openxmlformats.org/presentationml/2006/main">
+  <p:tag name="ALIGNMENT_TARGET_X" val="231.77999877929688"/>
+</p:tagLst>
+</file>
+
+<file path=ppt/tags/alignment_slide3_31.xml><?xml version="1.0" encoding="utf-8"?>
+<p:tagLst xmlns:a="http://schemas.openxmlformats.org/drawingml/2006/main" xmlns:r="http://schemas.openxmlformats.org/officeDocument/2006/relationships" xmlns:p="http://schemas.openxmlformats.org/presentationml/2006/main">
+  <p:tag name="ALIGNMENT_TARGET_X" val="231.89999389648438"/>
+</p:tagLst>
+</file>
+
+<file path=ppt/tags/alignment_slide3_33.xml><?xml version="1.0" encoding="utf-8"?>
+<p:tagLst xmlns:a="http://schemas.openxmlformats.org/drawingml/2006/main" xmlns:r="http://schemas.openxmlformats.org/officeDocument/2006/relationships" xmlns:p="http://schemas.openxmlformats.org/presentationml/2006/main">
+  <p:tag name="ALIGNMENT_TARGET_X" val="510.7799987792969"/>
+</p:tagLst>
+</file>
+
+<file path=ppt/tags/alignment_slide3_34.xml><?xml version="1.0" encoding="utf-8"?>
+<p:tagLst xmlns:a="http://schemas.openxmlformats.org/drawingml/2006/main" xmlns:r="http://schemas.openxmlformats.org/officeDocument/2006/relationships" xmlns:p="http://schemas.openxmlformats.org/presentationml/2006/main">
+  <p:tag name="ALIGNMENT_TARGET_X" val="510.8399963378906"/>
+</p:tagLst>
+</file>
+
+<file path=ppt/tags/alignment_slide3_36.xml><?xml version="1.0" encoding="utf-8"?>
+<p:tagLst xmlns:a="http://schemas.openxmlformats.org/drawingml/2006/main" xmlns:r="http://schemas.openxmlformats.org/officeDocument/2006/relationships" xmlns:p="http://schemas.openxmlformats.org/presentationml/2006/main">
+  <p:tag name="ALIGNMENT_TARGET_X" val="738.780029296875"/>
+</p:tagLst>
+</file>
+
+<file path=ppt/tags/alignment_slide3_37.xml><?xml version="1.0" encoding="utf-8"?>
+<p:tagLst xmlns:a="http://schemas.openxmlformats.org/drawingml/2006/main" xmlns:r="http://schemas.openxmlformats.org/officeDocument/2006/relationships" xmlns:p="http://schemas.openxmlformats.org/presentationml/2006/main">
+  <p:tag name="ALIGNMENT_TARGET_X" val="738.9000244140625"/>
+</p:tagLst>
+</file>
+
+<file path=ppt/tags/alignment_slide3_4.xml><?xml version="1.0" encoding="utf-8"?>
+<p:tagLst xmlns:a="http://schemas.openxmlformats.org/drawingml/2006/main" xmlns:r="http://schemas.openxmlformats.org/officeDocument/2006/relationships" xmlns:p="http://schemas.openxmlformats.org/presentationml/2006/main">
+  <p:tag name="ALIGNMENT_TARGET_X" val="46.7400016784668"/>
+</p:tagLst>
+</file>
+
+<file path=ppt/tags/alignment_slide3_55.xml><?xml version="1.0" encoding="utf-8"?>
+<p:tagLst xmlns:a="http://schemas.openxmlformats.org/drawingml/2006/main" xmlns:r="http://schemas.openxmlformats.org/officeDocument/2006/relationships" xmlns:p="http://schemas.openxmlformats.org/presentationml/2006/main">
+  <p:tag name="ALIGNMENT_TARGET_X" val="59.279998779296875"/>
+</p:tagLst>
+</file>
+
+<file path=ppt/tags/alignment_slide3_57.xml><?xml version="1.0" encoding="utf-8"?>
+<p:tagLst xmlns:a="http://schemas.openxmlformats.org/drawingml/2006/main" xmlns:r="http://schemas.openxmlformats.org/officeDocument/2006/relationships" xmlns:p="http://schemas.openxmlformats.org/presentationml/2006/main">
+  <p:tag name="ALIGNMENT_TARGET_X" val="39.84000015258789"/>
+</p:tagLst>
+</file>
+
+<file path=ppt/tags/alignment_slide3_58.xml><?xml version="1.0" encoding="utf-8"?>
+<p:tagLst xmlns:a="http://schemas.openxmlformats.org/drawingml/2006/main" xmlns:r="http://schemas.openxmlformats.org/officeDocument/2006/relationships" xmlns:p="http://schemas.openxmlformats.org/presentationml/2006/main">
+  <p:tag name="ALIGNMENT_TARGET_X" val="39.900001525878906"/>
+</p:tagLst>
+</file>
+
+<file path=ppt/tags/alignment_slide3_60.xml><?xml version="1.0" encoding="utf-8"?>
+<p:tagLst xmlns:a="http://schemas.openxmlformats.org/drawingml/2006/main" xmlns:r="http://schemas.openxmlformats.org/officeDocument/2006/relationships" xmlns:p="http://schemas.openxmlformats.org/presentationml/2006/main">
+  <p:tag name="ALIGNMENT_TARGET_X" val="204.83999633789062"/>
+</p:tagLst>
+</file>
+
+<file path=ppt/tags/alignment_slide3_61.xml><?xml version="1.0" encoding="utf-8"?>
+<p:tagLst xmlns:a="http://schemas.openxmlformats.org/drawingml/2006/main" xmlns:r="http://schemas.openxmlformats.org/officeDocument/2006/relationships" xmlns:p="http://schemas.openxmlformats.org/presentationml/2006/main">
+  <p:tag name="ALIGNMENT_TARGET_X" val="204.89999389648438"/>
+</p:tagLst>
+</file>
+
+<file path=ppt/tags/alignment_slide3_63.xml><?xml version="1.0" encoding="utf-8"?>
+<p:tagLst xmlns:a="http://schemas.openxmlformats.org/drawingml/2006/main" xmlns:r="http://schemas.openxmlformats.org/officeDocument/2006/relationships" xmlns:p="http://schemas.openxmlformats.org/presentationml/2006/main">
+  <p:tag name="ALIGNMENT_TARGET_X" val="414.8399963378906"/>
+</p:tagLst>
+</file>
+
+<file path=ppt/tags/alignment_slide3_64.xml><?xml version="1.0" encoding="utf-8"?>
+<p:tagLst xmlns:a="http://schemas.openxmlformats.org/drawingml/2006/main" xmlns:r="http://schemas.openxmlformats.org/officeDocument/2006/relationships" xmlns:p="http://schemas.openxmlformats.org/presentationml/2006/main">
+  <p:tag name="ALIGNMENT_TARGET_X" val="414.8999938964844"/>
+</p:tagLst>
+</file>
+
+<file path=ppt/tags/alignment_slide3_67.xml><?xml version="1.0" encoding="utf-8"?>
+<p:tagLst xmlns:a="http://schemas.openxmlformats.org/drawingml/2006/main" xmlns:r="http://schemas.openxmlformats.org/officeDocument/2006/relationships" xmlns:p="http://schemas.openxmlformats.org/presentationml/2006/main">
+  <p:tag name="ALIGNMENT_TARGET_X" val="465"/>
+</p:tagLst>
+</file>
+
+<file path=ppt/tags/alignment_slide3_72.xml><?xml version="1.0" encoding="utf-8"?>
+<p:tagLst xmlns:a="http://schemas.openxmlformats.org/drawingml/2006/main" xmlns:r="http://schemas.openxmlformats.org/officeDocument/2006/relationships" xmlns:p="http://schemas.openxmlformats.org/presentationml/2006/main">
+  <p:tag name="ALIGNMENT_TARGET_X" val="284.99999237060547"/>
+</p:tagLst>
+</file>
+
+<file path=ppt/tags/alignment_slide3_75.xml><?xml version="1.0" encoding="utf-8"?>
+<p:tagLst xmlns:a="http://schemas.openxmlformats.org/drawingml/2006/main" xmlns:r="http://schemas.openxmlformats.org/officeDocument/2006/relationships" xmlns:p="http://schemas.openxmlformats.org/presentationml/2006/main">
+  <p:tag name="ALIGNMENT_TARGET_X" val="414.8999938964844"/>
+</p:tagLst>
+</file>
+
+<file path=ppt/tags/alignment_slide3_8.xml><?xml version="1.0" encoding="utf-8"?>
+<p:tagLst xmlns:a="http://schemas.openxmlformats.org/drawingml/2006/main" xmlns:r="http://schemas.openxmlformats.org/officeDocument/2006/relationships" xmlns:p="http://schemas.openxmlformats.org/presentationml/2006/main">
+  <p:tag name="ALIGNMENT_TARGET_X" val="24.780000686645508"/>
+</p:tagLst>
+</file>
+
+<file path=ppt/tags/alignment_slide3_81.xml><?xml version="1.0" encoding="utf-8"?>
+<p:tagLst xmlns:a="http://schemas.openxmlformats.org/drawingml/2006/main" xmlns:r="http://schemas.openxmlformats.org/officeDocument/2006/relationships" xmlns:p="http://schemas.openxmlformats.org/presentationml/2006/main">
+  <p:tag name="ALIGNMENT_TARGET_X" val="707.280029296875"/>
+</p:tagLst>
+</file>
+
+<file path=ppt/tags/alignment_slide3_82.xml><?xml version="1.0" encoding="utf-8"?>
+<p:tagLst xmlns:a="http://schemas.openxmlformats.org/drawingml/2006/main" xmlns:r="http://schemas.openxmlformats.org/officeDocument/2006/relationships" xmlns:p="http://schemas.openxmlformats.org/presentationml/2006/main">
+  <p:tag name="ALIGNMENT_TARGET_X" val="677.280029296875"/>
+</p:tagLst>
+</file>
+
+<file path=ppt/tags/alignment_slide3_83.xml><?xml version="1.0" encoding="utf-8"?>
+<p:tagLst xmlns:a="http://schemas.openxmlformats.org/drawingml/2006/main" xmlns:r="http://schemas.openxmlformats.org/officeDocument/2006/relationships" xmlns:p="http://schemas.openxmlformats.org/presentationml/2006/main">
+  <p:tag name="ALIGNMENT_TARGET_X" val="677.280029296875"/>
+</p:tagLst>
+</file>
+
+<file path=ppt/tags/alignment_slide3_84.xml><?xml version="1.0" encoding="utf-8"?>
+<p:tagLst xmlns:a="http://schemas.openxmlformats.org/drawingml/2006/main" xmlns:r="http://schemas.openxmlformats.org/officeDocument/2006/relationships" xmlns:p="http://schemas.openxmlformats.org/presentationml/2006/main">
+  <p:tag name="ALIGNMENT_TARGET_X" val="677.4000244140625"/>
+</p:tagLst>
+</file>
+
+<file path=ppt/tags/alignment_slide3_88.xml><?xml version="1.0" encoding="utf-8"?>
+<p:tagLst xmlns:a="http://schemas.openxmlformats.org/drawingml/2006/main" xmlns:r="http://schemas.openxmlformats.org/officeDocument/2006/relationships" xmlns:p="http://schemas.openxmlformats.org/presentationml/2006/main">
+  <p:tag name="ALIGNMENT_TARGET_X" val="480.0000305175781"/>
+</p:tagLst>
+</file>
+
+<file path=ppt/tags/alignment_slide3_91.xml><?xml version="1.0" encoding="utf-8"?>
+<p:tagLst xmlns:a="http://schemas.openxmlformats.org/drawingml/2006/main" xmlns:r="http://schemas.openxmlformats.org/officeDocument/2006/relationships" xmlns:p="http://schemas.openxmlformats.org/presentationml/2006/main">
+  <p:tag name="ALIGNMENT_TARGET_X" val="47.54999923706055"/>
+</p:tagLst>
+</file>
+
+<file path=ppt/tags/alignment_slide3_92.xml><?xml version="1.0" encoding="utf-8"?>
+<p:tagLst xmlns:a="http://schemas.openxmlformats.org/drawingml/2006/main" xmlns:r="http://schemas.openxmlformats.org/officeDocument/2006/relationships" xmlns:p="http://schemas.openxmlformats.org/presentationml/2006/main">
+  <p:tag name="ALIGNMENT_TARGET_X" val="912.4499855041504"/>
+</p:tagLst>
+</file>
+
+<file path=ppt/tags/alignment_slide4_15.xml><?xml version="1.0" encoding="utf-8"?>
+<p:tagLst xmlns:a="http://schemas.openxmlformats.org/drawingml/2006/main" xmlns:r="http://schemas.openxmlformats.org/officeDocument/2006/relationships" xmlns:p="http://schemas.openxmlformats.org/presentationml/2006/main">
+  <p:tag name="ALIGNMENT_TARGET_X" val="63.779998779296875"/>
+</p:tagLst>
+</file>
+
+<file path=ppt/tags/alignment_slide4_21.xml><?xml version="1.0" encoding="utf-8"?>
+<p:tagLst xmlns:a="http://schemas.openxmlformats.org/drawingml/2006/main" xmlns:r="http://schemas.openxmlformats.org/officeDocument/2006/relationships" xmlns:p="http://schemas.openxmlformats.org/presentationml/2006/main">
+  <p:tag name="ALIGNMENT_TARGET_X" val="63.779998779296875"/>
+</p:tagLst>
+</file>
+
+<file path=ppt/tags/alignment_slide4_3.xml><?xml version="1.0" encoding="utf-8"?>
+<p:tagLst xmlns:a="http://schemas.openxmlformats.org/drawingml/2006/main" xmlns:r="http://schemas.openxmlformats.org/officeDocument/2006/relationships" xmlns:p="http://schemas.openxmlformats.org/presentationml/2006/main">
+  <p:tag name="ALIGNMENT_TARGET_X" val="59.4900016784668"/>
+</p:tagLst>
+</file>
+
+<file path=ppt/tags/alignment_slide4_37.xml><?xml version="1.0" encoding="utf-8"?>
+<p:tagLst xmlns:a="http://schemas.openxmlformats.org/drawingml/2006/main" xmlns:r="http://schemas.openxmlformats.org/officeDocument/2006/relationships" xmlns:p="http://schemas.openxmlformats.org/presentationml/2006/main">
+  <p:tag name="ALIGNMENT_TARGET_X" val="368.0400085449219"/>
+</p:tagLst>
+</file>
+
+<file path=ppt/tags/alignment_slide4_38.xml><?xml version="1.0" encoding="utf-8"?>
+<p:tagLst xmlns:a="http://schemas.openxmlformats.org/drawingml/2006/main" xmlns:r="http://schemas.openxmlformats.org/officeDocument/2006/relationships" xmlns:p="http://schemas.openxmlformats.org/presentationml/2006/main">
+  <p:tag name="ALIGNMENT_TARGET_X" val="368.3699951171875"/>
+</p:tagLst>
+</file>
+
+<file path=ppt/tags/alignment_slide4_39.xml><?xml version="1.0" encoding="utf-8"?>
+<p:tagLst xmlns:a="http://schemas.openxmlformats.org/drawingml/2006/main" xmlns:r="http://schemas.openxmlformats.org/officeDocument/2006/relationships" xmlns:p="http://schemas.openxmlformats.org/presentationml/2006/main">
+  <p:tag name="ALIGNMENT_TARGET_X" val="294.8699951171875"/>
+</p:tagLst>
+</file>
+
+<file path=ppt/tags/alignment_slide4_4.xml><?xml version="1.0" encoding="utf-8"?>
+<p:tagLst xmlns:a="http://schemas.openxmlformats.org/drawingml/2006/main" xmlns:r="http://schemas.openxmlformats.org/officeDocument/2006/relationships" xmlns:p="http://schemas.openxmlformats.org/presentationml/2006/main">
+  <p:tag name="ALIGNMENT_TARGET_X" val="46.7400016784668"/>
+</p:tagLst>
+</file>
+
+<file path=ppt/tags/alignment_slide4_46.xml><?xml version="1.0" encoding="utf-8"?>
+<p:tagLst xmlns:a="http://schemas.openxmlformats.org/drawingml/2006/main" xmlns:r="http://schemas.openxmlformats.org/officeDocument/2006/relationships" xmlns:p="http://schemas.openxmlformats.org/presentationml/2006/main">
+  <p:tag name="ALIGNMENT_TARGET_X" val="368.0400085449219"/>
+</p:tagLst>
+</file>
+
+<file path=ppt/tags/alignment_slide4_47.xml><?xml version="1.0" encoding="utf-8"?>
+<p:tagLst xmlns:a="http://schemas.openxmlformats.org/drawingml/2006/main" xmlns:r="http://schemas.openxmlformats.org/officeDocument/2006/relationships" xmlns:p="http://schemas.openxmlformats.org/presentationml/2006/main">
+  <p:tag name="ALIGNMENT_TARGET_X" val="368.3699951171875"/>
+</p:tagLst>
+</file>
+
+<file path=ppt/tags/alignment_slide4_48.xml><?xml version="1.0" encoding="utf-8"?>
+<p:tagLst xmlns:a="http://schemas.openxmlformats.org/drawingml/2006/main" xmlns:r="http://schemas.openxmlformats.org/officeDocument/2006/relationships" xmlns:p="http://schemas.openxmlformats.org/presentationml/2006/main">
+  <p:tag name="ALIGNMENT_TARGET_X" val="294.8699951171875"/>
+</p:tagLst>
+</file>
+
+<file path=ppt/tags/alignment_slide4_54.xml><?xml version="1.0" encoding="utf-8"?>
+<p:tagLst xmlns:a="http://schemas.openxmlformats.org/drawingml/2006/main" xmlns:r="http://schemas.openxmlformats.org/officeDocument/2006/relationships" xmlns:p="http://schemas.openxmlformats.org/presentationml/2006/main">
+  <p:tag name="ALIGNMENT_TARGET_X" val="625.3499755859375"/>
+</p:tagLst>
+</file>
+
+<file path=ppt/tags/alignment_slide4_55.xml><?xml version="1.0" encoding="utf-8"?>
+<p:tagLst xmlns:a="http://schemas.openxmlformats.org/drawingml/2006/main" xmlns:r="http://schemas.openxmlformats.org/officeDocument/2006/relationships" xmlns:p="http://schemas.openxmlformats.org/presentationml/2006/main">
+  <p:tag name="ALIGNMENT_TARGET_X" val="625.5"/>
+</p:tagLst>
+</file>
+
+<file path=ppt/tags/alignment_slide4_56.xml><?xml version="1.0" encoding="utf-8"?>
+<p:tagLst xmlns:a="http://schemas.openxmlformats.org/drawingml/2006/main" xmlns:r="http://schemas.openxmlformats.org/officeDocument/2006/relationships" xmlns:p="http://schemas.openxmlformats.org/presentationml/2006/main">
+  <p:tag name="ALIGNMENT_TARGET_X" val="625.5599975585938"/>
+</p:tagLst>
+</file>
+
+<file path=ppt/tags/alignment_slide4_60.xml><?xml version="1.0" encoding="utf-8"?>
+<p:tagLst xmlns:a="http://schemas.openxmlformats.org/drawingml/2006/main" xmlns:r="http://schemas.openxmlformats.org/officeDocument/2006/relationships" xmlns:p="http://schemas.openxmlformats.org/presentationml/2006/main">
+  <p:tag name="ALIGNMENT_TARGET_X" val="65.25"/>
+</p:tagLst>
+</file>
+
+<file path=ppt/tags/alignment_slide4_63.xml><?xml version="1.0" encoding="utf-8"?>
+<p:tagLst xmlns:a="http://schemas.openxmlformats.org/drawingml/2006/main" xmlns:r="http://schemas.openxmlformats.org/officeDocument/2006/relationships" xmlns:p="http://schemas.openxmlformats.org/presentationml/2006/main">
+  <p:tag name="ALIGNMENT_TARGET_X" val="47.54999923706055"/>
+</p:tagLst>
+</file>
+
+<file path=ppt/tags/alignment_slide4_64.xml><?xml version="1.0" encoding="utf-8"?>
+<p:tagLst xmlns:a="http://schemas.openxmlformats.org/drawingml/2006/main" xmlns:r="http://schemas.openxmlformats.org/officeDocument/2006/relationships" xmlns:p="http://schemas.openxmlformats.org/presentationml/2006/main">
+  <p:tag name="ALIGNMENT_TARGET_X" val="912.4499855041504"/>
+</p:tagLst>
+</file>
+
+<file path=ppt/tags/alignment_slide4_8.xml><?xml version="1.0" encoding="utf-8"?>
+<p:tagLst xmlns:a="http://schemas.openxmlformats.org/drawingml/2006/main" xmlns:r="http://schemas.openxmlformats.org/officeDocument/2006/relationships" xmlns:p="http://schemas.openxmlformats.org/presentationml/2006/main">
+  <p:tag name="ALIGNMENT_TARGET_X" val="63.720001220703125"/>
+</p:tagLst>
+</file>
+
+<file path=ppt/tags/alignment_slide4_9.xml><?xml version="1.0" encoding="utf-8"?>
+<p:tagLst xmlns:a="http://schemas.openxmlformats.org/drawingml/2006/main" xmlns:r="http://schemas.openxmlformats.org/officeDocument/2006/relationships" xmlns:p="http://schemas.openxmlformats.org/presentationml/2006/main">
+  <p:tag name="ALIGNMENT_TARGET_X" val="63.779998779296875"/>
+</p:tagLst>
+</file>
+
+<file path=ppt/tags/alignment_slide5_20.xml><?xml version="1.0" encoding="utf-8"?>
+<p:tagLst xmlns:a="http://schemas.openxmlformats.org/drawingml/2006/main" xmlns:r="http://schemas.openxmlformats.org/officeDocument/2006/relationships" xmlns:p="http://schemas.openxmlformats.org/presentationml/2006/main">
+  <p:tag name="ALIGNMENT_TARGET_X" val="164.99999618530273"/>
+</p:tagLst>
+</file>
+
+<file path=ppt/tags/alignment_slide5_21.xml><?xml version="1.0" encoding="utf-8"?>
+<p:tagLst xmlns:a="http://schemas.openxmlformats.org/drawingml/2006/main" xmlns:r="http://schemas.openxmlformats.org/officeDocument/2006/relationships" xmlns:p="http://schemas.openxmlformats.org/presentationml/2006/main">
+  <p:tag name="ALIGNMENT_TARGET_X" val="145.49995708465576"/>
+</p:tagLst>
+</file>
+
+<file path=ppt/tags/alignment_slide5_3.xml><?xml version="1.0" encoding="utf-8"?>
+<p:tagLst xmlns:a="http://schemas.openxmlformats.org/drawingml/2006/main" xmlns:r="http://schemas.openxmlformats.org/officeDocument/2006/relationships" xmlns:p="http://schemas.openxmlformats.org/presentationml/2006/main">
+  <p:tag name="ALIGNMENT_TARGET_X" val="59.4900016784668"/>
+</p:tagLst>
+</file>
+
+<file path=ppt/tags/alignment_slide5_34.xml><?xml version="1.0" encoding="utf-8"?>
+<p:tagLst xmlns:a="http://schemas.openxmlformats.org/drawingml/2006/main" xmlns:r="http://schemas.openxmlformats.org/officeDocument/2006/relationships" xmlns:p="http://schemas.openxmlformats.org/presentationml/2006/main">
+  <p:tag name="ALIGNMENT_TARGET_X" val="165.00000381469727"/>
+</p:tagLst>
+</file>
+
+<file path=ppt/tags/alignment_slide5_4.xml><?xml version="1.0" encoding="utf-8"?>
+<p:tagLst xmlns:a="http://schemas.openxmlformats.org/drawingml/2006/main" xmlns:r="http://schemas.openxmlformats.org/officeDocument/2006/relationships" xmlns:p="http://schemas.openxmlformats.org/presentationml/2006/main">
+  <p:tag name="ALIGNMENT_TARGET_X" val="46.7400016784668"/>
+</p:tagLst>
+</file>
+
+<file path=ppt/tags/alignment_slide5_40.xml><?xml version="1.0" encoding="utf-8"?>
+<p:tagLst xmlns:a="http://schemas.openxmlformats.org/drawingml/2006/main" xmlns:r="http://schemas.openxmlformats.org/officeDocument/2006/relationships" xmlns:p="http://schemas.openxmlformats.org/presentationml/2006/main">
+  <p:tag name="ALIGNMENT_TARGET_X" val="145.49996185302734"/>
+</p:tagLst>
+</file>
+
+<file path=ppt/tags/alignment_slide5_41.xml><?xml version="1.0" encoding="utf-8"?>
+<p:tagLst xmlns:a="http://schemas.openxmlformats.org/drawingml/2006/main" xmlns:r="http://schemas.openxmlformats.org/officeDocument/2006/relationships" xmlns:p="http://schemas.openxmlformats.org/presentationml/2006/main">
+  <p:tag name="ALIGNMENT_TARGET_X" val="145.49999618530273"/>
+</p:tagLst>
+</file>
+
+<file path=ppt/tags/alignment_slide5_44.xml><?xml version="1.0" encoding="utf-8"?>
+<p:tagLst xmlns:a="http://schemas.openxmlformats.org/drawingml/2006/main" xmlns:r="http://schemas.openxmlformats.org/officeDocument/2006/relationships" xmlns:p="http://schemas.openxmlformats.org/presentationml/2006/main">
+  <p:tag name="ALIGNMENT_TARGET_X" val="321.80999755859375"/>
+</p:tagLst>
+</file>
+
+<file path=ppt/tags/alignment_slide5_51.xml><?xml version="1.0" encoding="utf-8"?>
+<p:tagLst xmlns:a="http://schemas.openxmlformats.org/drawingml/2006/main" xmlns:r="http://schemas.openxmlformats.org/officeDocument/2006/relationships" xmlns:p="http://schemas.openxmlformats.org/presentationml/2006/main">
+  <p:tag name="ALIGNMENT_TARGET_X" val="453.75"/>
+</p:tagLst>
+</file>
+
+<file path=ppt/tags/alignment_slide5_52.xml><?xml version="1.0" encoding="utf-8"?>
+<p:tagLst xmlns:a="http://schemas.openxmlformats.org/drawingml/2006/main" xmlns:r="http://schemas.openxmlformats.org/officeDocument/2006/relationships" xmlns:p="http://schemas.openxmlformats.org/presentationml/2006/main">
+  <p:tag name="ALIGNMENT_TARGET_X" val="453.8399963378906"/>
+</p:tagLst>
+</file>
+
+<file path=ppt/tags/alignment_slide5_54.xml><?xml version="1.0" encoding="utf-8"?>
+<p:tagLst xmlns:a="http://schemas.openxmlformats.org/drawingml/2006/main" xmlns:r="http://schemas.openxmlformats.org/officeDocument/2006/relationships" xmlns:p="http://schemas.openxmlformats.org/presentationml/2006/main">
+  <p:tag name="ALIGNMENT_TARGET_X" val="343.49999046325684"/>
+</p:tagLst>
+</file>
+
+<file path=ppt/tags/alignment_slide5_56.xml><?xml version="1.0" encoding="utf-8"?>
+<p:tagLst xmlns:a="http://schemas.openxmlformats.org/drawingml/2006/main" xmlns:r="http://schemas.openxmlformats.org/officeDocument/2006/relationships" xmlns:p="http://schemas.openxmlformats.org/presentationml/2006/main">
+  <p:tag name="ALIGNMENT_TARGET_X" val="392.99999046325684"/>
+</p:tagLst>
+</file>
+
+<file path=ppt/tags/alignment_slide5_58.xml><?xml version="1.0" encoding="utf-8"?>
+<p:tagLst xmlns:a="http://schemas.openxmlformats.org/drawingml/2006/main" xmlns:r="http://schemas.openxmlformats.org/officeDocument/2006/relationships" xmlns:p="http://schemas.openxmlformats.org/presentationml/2006/main">
+  <p:tag name="ALIGNMENT_TARGET_X" val="442.49999046325684"/>
+</p:tagLst>
+</file>
+
+<file path=ppt/tags/alignment_slide5_60.xml><?xml version="1.0" encoding="utf-8"?>
+<p:tagLst xmlns:a="http://schemas.openxmlformats.org/drawingml/2006/main" xmlns:r="http://schemas.openxmlformats.org/officeDocument/2006/relationships" xmlns:p="http://schemas.openxmlformats.org/presentationml/2006/main">
+  <p:tag name="ALIGNMENT_TARGET_X" val="491.99999046325684"/>
+</p:tagLst>
+</file>
+
+<file path=ppt/tags/alignment_slide5_62.xml><?xml version="1.0" encoding="utf-8"?>
+<p:tagLst xmlns:a="http://schemas.openxmlformats.org/drawingml/2006/main" xmlns:r="http://schemas.openxmlformats.org/officeDocument/2006/relationships" xmlns:p="http://schemas.openxmlformats.org/presentationml/2006/main">
+  <p:tag name="ALIGNMENT_TARGET_X" val="541.4999904632568"/>
+</p:tagLst>
+</file>
+
+<file path=ppt/tags/alignment_slide5_63.xml><?xml version="1.0" encoding="utf-8"?>
+<p:tagLst xmlns:a="http://schemas.openxmlformats.org/drawingml/2006/main" xmlns:r="http://schemas.openxmlformats.org/officeDocument/2006/relationships" xmlns:p="http://schemas.openxmlformats.org/presentationml/2006/main">
+  <p:tag name="ALIGNMENT_TARGET_X" val="321.75"/>
+</p:tagLst>
+</file>
+
+<file path=ppt/tags/alignment_slide5_64.xml><?xml version="1.0" encoding="utf-8"?>
+<p:tagLst xmlns:a="http://schemas.openxmlformats.org/drawingml/2006/main" xmlns:r="http://schemas.openxmlformats.org/officeDocument/2006/relationships" xmlns:p="http://schemas.openxmlformats.org/presentationml/2006/main">
+  <p:tag name="ALIGNMENT_TARGET_X" val="321.8699951171875"/>
+</p:tagLst>
+</file>
+
+<file path=ppt/tags/alignment_slide5_67.xml><?xml version="1.0" encoding="utf-8"?>
+<p:tagLst xmlns:a="http://schemas.openxmlformats.org/drawingml/2006/main" xmlns:r="http://schemas.openxmlformats.org/officeDocument/2006/relationships" xmlns:p="http://schemas.openxmlformats.org/presentationml/2006/main">
+  <p:tag name="ALIGNMENT_TARGET_X" val="636.8099975585938"/>
+</p:tagLst>
+</file>
+
+<file path=ppt/tags/alignment_slide5_69.xml><?xml version="1.0" encoding="utf-8"?>
+<p:tagLst xmlns:a="http://schemas.openxmlformats.org/drawingml/2006/main" xmlns:r="http://schemas.openxmlformats.org/officeDocument/2006/relationships" xmlns:p="http://schemas.openxmlformats.org/presentationml/2006/main">
+  <p:tag name="ALIGNMENT_TARGET_X" val="774.7500610351562"/>
+</p:tagLst>
+</file>
+
+<file path=ppt/tags/alignment_slide5_7.xml><?xml version="1.0" encoding="utf-8"?>
+<p:tagLst xmlns:a="http://schemas.openxmlformats.org/drawingml/2006/main" xmlns:r="http://schemas.openxmlformats.org/officeDocument/2006/relationships" xmlns:p="http://schemas.openxmlformats.org/presentationml/2006/main">
+  <p:tag name="ALIGNMENT_TARGET_X" val="47.310001373291016"/>
+</p:tagLst>
+</file>
+
+<file path=ppt/tags/alignment_slide5_70.xml><?xml version="1.0" encoding="utf-8"?>
+<p:tagLst xmlns:a="http://schemas.openxmlformats.org/drawingml/2006/main" xmlns:r="http://schemas.openxmlformats.org/officeDocument/2006/relationships" xmlns:p="http://schemas.openxmlformats.org/presentationml/2006/main">
+  <p:tag name="ALIGNMENT_TARGET_X" val="774.7499961853027"/>
+</p:tagLst>
+</file>
+
+<file path=ppt/tags/alignment_slide5_78.xml><?xml version="1.0" encoding="utf-8"?>
+<p:tagLst xmlns:a="http://schemas.openxmlformats.org/drawingml/2006/main" xmlns:r="http://schemas.openxmlformats.org/officeDocument/2006/relationships" xmlns:p="http://schemas.openxmlformats.org/presentationml/2006/main">
+  <p:tag name="ALIGNMENT_TARGET_X" val="681.7500114440918"/>
+</p:tagLst>
+</file>
+
+<file path=ppt/tags/alignment_slide5_80.xml><?xml version="1.0" encoding="utf-8"?>
+<p:tagLst xmlns:a="http://schemas.openxmlformats.org/drawingml/2006/main" xmlns:r="http://schemas.openxmlformats.org/officeDocument/2006/relationships" xmlns:p="http://schemas.openxmlformats.org/presentationml/2006/main">
+  <p:tag name="ALIGNMENT_TARGET_X" val="774.7500114440918"/>
+</p:tagLst>
+</file>
+
+<file path=ppt/tags/alignment_slide5_82.xml><?xml version="1.0" encoding="utf-8"?>
+<p:tagLst xmlns:a="http://schemas.openxmlformats.org/drawingml/2006/main" xmlns:r="http://schemas.openxmlformats.org/officeDocument/2006/relationships" xmlns:p="http://schemas.openxmlformats.org/presentationml/2006/main">
+  <p:tag name="ALIGNMENT_TARGET_X" val="867.7499732971191"/>
+</p:tagLst>
+</file>
+
+<file path=ppt/tags/alignment_slide5_83.xml><?xml version="1.0" encoding="utf-8"?>
+<p:tagLst xmlns:a="http://schemas.openxmlformats.org/drawingml/2006/main" xmlns:r="http://schemas.openxmlformats.org/officeDocument/2006/relationships" xmlns:p="http://schemas.openxmlformats.org/presentationml/2006/main">
+  <p:tag name="ALIGNMENT_TARGET_X" val="636.75"/>
+</p:tagLst>
+</file>
+
+<file path=ppt/tags/alignment_slide5_84.xml><?xml version="1.0" encoding="utf-8"?>
+<p:tagLst xmlns:a="http://schemas.openxmlformats.org/drawingml/2006/main" xmlns:r="http://schemas.openxmlformats.org/officeDocument/2006/relationships" xmlns:p="http://schemas.openxmlformats.org/presentationml/2006/main">
+  <p:tag name="ALIGNMENT_TARGET_X" val="636.8699951171875"/>
+</p:tagLst>
+</file>
+
+<file path=ppt/tags/alignment_slide5_85.xml><?xml version="1.0" encoding="utf-8"?>
+<p:tagLst xmlns:a="http://schemas.openxmlformats.org/drawingml/2006/main" xmlns:r="http://schemas.openxmlformats.org/officeDocument/2006/relationships" xmlns:p="http://schemas.openxmlformats.org/presentationml/2006/main">
+  <p:tag name="ALIGNMENT_TARGET_X" val="47.279998779296875"/>
+</p:tagLst>
+</file>
+
+<file path=ppt/tags/alignment_slide5_88.xml><?xml version="1.0" encoding="utf-8"?>
+<p:tagLst xmlns:a="http://schemas.openxmlformats.org/drawingml/2006/main" xmlns:r="http://schemas.openxmlformats.org/officeDocument/2006/relationships" xmlns:p="http://schemas.openxmlformats.org/presentationml/2006/main">
+  <p:tag name="ALIGNMENT_TARGET_X" val="47.54999923706055"/>
+</p:tagLst>
+</file>
+
+<file path=ppt/tags/alignment_slide5_89.xml><?xml version="1.0" encoding="utf-8"?>
+<p:tagLst xmlns:a="http://schemas.openxmlformats.org/drawingml/2006/main" xmlns:r="http://schemas.openxmlformats.org/officeDocument/2006/relationships" xmlns:p="http://schemas.openxmlformats.org/presentationml/2006/main">
+  <p:tag name="ALIGNMENT_TARGET_X" val="912.4499855041504"/>
+</p:tagLst>
+</file>
+
+<file path=ppt/tags/alignment_slide6_13.xml><?xml version="1.0" encoding="utf-8"?>
+<p:tagLst xmlns:a="http://schemas.openxmlformats.org/drawingml/2006/main" xmlns:r="http://schemas.openxmlformats.org/officeDocument/2006/relationships" xmlns:p="http://schemas.openxmlformats.org/presentationml/2006/main">
+  <p:tag name="ALIGNMENT_TARGET_X" val="149.25"/>
+</p:tagLst>
+</file>
+
+<file path=ppt/tags/alignment_slide6_14.xml><?xml version="1.0" encoding="utf-8"?>
+<p:tagLst xmlns:a="http://schemas.openxmlformats.org/drawingml/2006/main" xmlns:r="http://schemas.openxmlformats.org/officeDocument/2006/relationships" xmlns:p="http://schemas.openxmlformats.org/presentationml/2006/main">
+  <p:tag name="ALIGNMENT_TARGET_X" val="149.25"/>
+</p:tagLst>
+</file>
+
+<file path=ppt/tags/alignment_slide6_18.xml><?xml version="1.0" encoding="utf-8"?>
+<p:tagLst xmlns:a="http://schemas.openxmlformats.org/drawingml/2006/main" xmlns:r="http://schemas.openxmlformats.org/officeDocument/2006/relationships" xmlns:p="http://schemas.openxmlformats.org/presentationml/2006/main">
+  <p:tag name="ALIGNMENT_TARGET_X" val="284.3999938964844"/>
+</p:tagLst>
+</file>
+
+<file path=ppt/tags/alignment_slide6_29.xml><?xml version="1.0" encoding="utf-8"?>
+<p:tagLst xmlns:a="http://schemas.openxmlformats.org/drawingml/2006/main" xmlns:r="http://schemas.openxmlformats.org/officeDocument/2006/relationships" xmlns:p="http://schemas.openxmlformats.org/presentationml/2006/main">
+  <p:tag name="ALIGNMENT_TARGET_X" val="369.74998474121094"/>
+</p:tagLst>
+</file>
+
+<file path=ppt/tags/alignment_slide6_3.xml><?xml version="1.0" encoding="utf-8"?>
+<p:tagLst xmlns:a="http://schemas.openxmlformats.org/drawingml/2006/main" xmlns:r="http://schemas.openxmlformats.org/officeDocument/2006/relationships" xmlns:p="http://schemas.openxmlformats.org/presentationml/2006/main">
+  <p:tag name="ALIGNMENT_TARGET_X" val="59.4900016784668"/>
+</p:tagLst>
+</file>
+
+<file path=ppt/tags/alignment_slide6_30.xml><?xml version="1.0" encoding="utf-8"?>
+<p:tagLst xmlns:a="http://schemas.openxmlformats.org/drawingml/2006/main" xmlns:r="http://schemas.openxmlformats.org/officeDocument/2006/relationships" xmlns:p="http://schemas.openxmlformats.org/presentationml/2006/main">
+  <p:tag name="ALIGNMENT_TARGET_X" val="369.74998474121094"/>
+</p:tagLst>
+</file>
+
+<file path=ppt/tags/alignment_slide6_34.xml><?xml version="1.0" encoding="utf-8"?>
 <p:tagLst xmlns:a="http://schemas.openxmlformats.org/drawingml/2006/main" xmlns:r="http://schemas.openxmlformats.org/officeDocument/2006/relationships" xmlns:p="http://schemas.openxmlformats.org/presentationml/2006/main">
   <p:tag name="ALIGNMENT_TARGET_X" val="504.8999938964844"/>
 </p:tagLst>
 </file>
 
-<file path=ppt/tags/tag101.xml><?xml version="1.0" encoding="utf-8"?>
+<file path=ppt/tags/alignment_slide6_4.xml><?xml version="1.0" encoding="utf-8"?>
+<p:tagLst xmlns:a="http://schemas.openxmlformats.org/drawingml/2006/main" xmlns:r="http://schemas.openxmlformats.org/officeDocument/2006/relationships" xmlns:p="http://schemas.openxmlformats.org/presentationml/2006/main">
+  <p:tag name="ALIGNMENT_TARGET_X" val="46.7400016784668"/>
+</p:tagLst>
+</file>
+
+<file path=ppt/tags/alignment_slide6_41.xml><?xml version="1.0" encoding="utf-8"?>
 <p:tagLst xmlns:a="http://schemas.openxmlformats.org/drawingml/2006/main" xmlns:r="http://schemas.openxmlformats.org/officeDocument/2006/relationships" xmlns:p="http://schemas.openxmlformats.org/presentationml/2006/main">
   <p:tag name="ALIGNMENT_TARGET_X" val="590.2499847412109"/>
 </p:tagLst>
 </file>
 
-<file path=ppt/tags/tag102.xml><?xml version="1.0" encoding="utf-8"?>
+<file path=ppt/tags/alignment_slide6_42.xml><?xml version="1.0" encoding="utf-8"?>
 <p:tagLst xmlns:a="http://schemas.openxmlformats.org/drawingml/2006/main" xmlns:r="http://schemas.openxmlformats.org/officeDocument/2006/relationships" xmlns:p="http://schemas.openxmlformats.org/presentationml/2006/main">
   <p:tag name="ALIGNMENT_TARGET_X" val="590.2499771118164"/>
 </p:tagLst>
 </file>
 
-<file path=ppt/tags/tag103.xml><?xml version="1.0" encoding="utf-8"?>
+<file path=ppt/tags/alignment_slide6_46.xml><?xml version="1.0" encoding="utf-8"?>
 <p:tagLst xmlns:a="http://schemas.openxmlformats.org/drawingml/2006/main" xmlns:r="http://schemas.openxmlformats.org/officeDocument/2006/relationships" xmlns:p="http://schemas.openxmlformats.org/presentationml/2006/main">
   <p:tag name="ALIGNMENT_TARGET_X" val="725.4000244140625"/>
 </p:tagLst>
 </file>
 
-<file path=ppt/tags/tag104.xml><?xml version="1.0" encoding="utf-8"?>
+<file path=ppt/tags/alignment_slide6_53.xml><?xml version="1.0" encoding="utf-8"?>
 <p:tagLst xmlns:a="http://schemas.openxmlformats.org/drawingml/2006/main" xmlns:r="http://schemas.openxmlformats.org/officeDocument/2006/relationships" xmlns:p="http://schemas.openxmlformats.org/presentationml/2006/main">
   <p:tag name="ALIGNMENT_TARGET_X" val="810.7499847412109"/>
 </p:tagLst>
 </file>
 
-<file path=ppt/tags/tag105.xml><?xml version="1.0" encoding="utf-8"?>
+<file path=ppt/tags/alignment_slide6_54.xml><?xml version="1.0" encoding="utf-8"?>
 <p:tagLst xmlns:a="http://schemas.openxmlformats.org/drawingml/2006/main" xmlns:r="http://schemas.openxmlformats.org/officeDocument/2006/relationships" xmlns:p="http://schemas.openxmlformats.org/presentationml/2006/main">
   <p:tag name="ALIGNMENT_TARGET_X" val="810.7499771118164"/>
 </p:tagLst>
 </file>
 
-<file path=ppt/tags/tag106.xml><?xml version="1.0" encoding="utf-8"?>
+<file path=ppt/tags/alignment_slide6_64.xml><?xml version="1.0" encoding="utf-8"?>
 <p:tagLst xmlns:a="http://schemas.openxmlformats.org/drawingml/2006/main" xmlns:r="http://schemas.openxmlformats.org/officeDocument/2006/relationships" xmlns:p="http://schemas.openxmlformats.org/presentationml/2006/main">
   <p:tag name="ALIGNMENT_TARGET_X" val="374.2200012207031"/>
 </p:tagLst>
 </file>
 
-<file path=ppt/tags/tag107.xml><?xml version="1.0" encoding="utf-8"?>
+<file path=ppt/tags/alignment_slide6_66.xml><?xml version="1.0" encoding="utf-8"?>
 <p:tagLst xmlns:a="http://schemas.openxmlformats.org/drawingml/2006/main" xmlns:r="http://schemas.openxmlformats.org/officeDocument/2006/relationships" xmlns:p="http://schemas.openxmlformats.org/presentationml/2006/main">
   <p:tag name="ALIGNMENT_TARGET_X" val="65.33999633789062"/>
 </p:tagLst>
 </file>
 
-<file path=ppt/tags/tag108.xml><?xml version="1.0" encoding="utf-8"?>
+<file path=ppt/tags/alignment_slide6_69.xml><?xml version="1.0" encoding="utf-8"?>
+<p:tagLst xmlns:a="http://schemas.openxmlformats.org/drawingml/2006/main" xmlns:r="http://schemas.openxmlformats.org/officeDocument/2006/relationships" xmlns:p="http://schemas.openxmlformats.org/presentationml/2006/main">
+  <p:tag name="ALIGNMENT_TARGET_X" val="47.54999923706055"/>
+</p:tagLst>
+</file>
+
+<file path=ppt/tags/alignment_slide6_70.xml><?xml version="1.0" encoding="utf-8"?>
+<p:tagLst xmlns:a="http://schemas.openxmlformats.org/drawingml/2006/main" xmlns:r="http://schemas.openxmlformats.org/officeDocument/2006/relationships" xmlns:p="http://schemas.openxmlformats.org/presentationml/2006/main">
+  <p:tag name="ALIGNMENT_TARGET_X" val="912.4499855041504"/>
+</p:tagLst>
+</file>
+
+<file path=ppt/tags/alignment_slide6_8.xml><?xml version="1.0" encoding="utf-8"?>
+<p:tagLst xmlns:a="http://schemas.openxmlformats.org/drawingml/2006/main" xmlns:r="http://schemas.openxmlformats.org/officeDocument/2006/relationships" xmlns:p="http://schemas.openxmlformats.org/presentationml/2006/main">
+  <p:tag name="ALIGNMENT_TARGET_X" val="63.900001525878906"/>
+</p:tagLst>
+</file>
+
+<file path=ppt/tags/alignment_slide7_11.xml><?xml version="1.0" encoding="utf-8"?>
+<p:tagLst xmlns:a="http://schemas.openxmlformats.org/drawingml/2006/main" xmlns:r="http://schemas.openxmlformats.org/officeDocument/2006/relationships" xmlns:p="http://schemas.openxmlformats.org/presentationml/2006/main">
+  <p:tag name="ALIGNMENT_TARGET_X" val="393.75004291534424"/>
+</p:tagLst>
+</file>
+
+<file path=ppt/tags/alignment_slide7_13.xml><?xml version="1.0" encoding="utf-8"?>
+<p:tagLst xmlns:a="http://schemas.openxmlformats.org/drawingml/2006/main" xmlns:r="http://schemas.openxmlformats.org/officeDocument/2006/relationships" xmlns:p="http://schemas.openxmlformats.org/presentationml/2006/main">
+  <p:tag name="ALIGNMENT_TARGET_X" val="637.5000610351562"/>
+</p:tagLst>
+</file>
+
+<file path=ppt/tags/alignment_slide7_14.xml><?xml version="1.0" encoding="utf-8"?>
+<p:tagLst xmlns:a="http://schemas.openxmlformats.org/drawingml/2006/main" xmlns:r="http://schemas.openxmlformats.org/officeDocument/2006/relationships" xmlns:p="http://schemas.openxmlformats.org/presentationml/2006/main">
+  <p:tag name="ALIGNMENT_TARGET_X" val="47.310001373291016"/>
+</p:tagLst>
+</file>
+
+<file path=ppt/tags/alignment_slide7_16.xml><?xml version="1.0" encoding="utf-8"?>
+<p:tagLst xmlns:a="http://schemas.openxmlformats.org/drawingml/2006/main" xmlns:r="http://schemas.openxmlformats.org/officeDocument/2006/relationships" xmlns:p="http://schemas.openxmlformats.org/presentationml/2006/main">
+  <p:tag name="ALIGNMENT_TARGET_X" val="547.0813598632812"/>
+</p:tagLst>
+</file>
+
+<file path=ppt/tags/alignment_slide7_17.xml><?xml version="1.0" encoding="utf-8"?>
+<p:tagLst xmlns:a="http://schemas.openxmlformats.org/drawingml/2006/main" xmlns:r="http://schemas.openxmlformats.org/officeDocument/2006/relationships" xmlns:p="http://schemas.openxmlformats.org/presentationml/2006/main">
+  <p:tag name="ALIGNMENT_TARGET_X" val="47.310001373291016"/>
+</p:tagLst>
+</file>
+
+<file path=ppt/tags/alignment_slide7_19.xml><?xml version="1.0" encoding="utf-8"?>
+<p:tagLst xmlns:a="http://schemas.openxmlformats.org/drawingml/2006/main" xmlns:r="http://schemas.openxmlformats.org/officeDocument/2006/relationships" xmlns:p="http://schemas.openxmlformats.org/presentationml/2006/main">
+  <p:tag name="ALIGNMENT_TARGET_X" val="607.31103515625"/>
+</p:tagLst>
+</file>
+
+<file path=ppt/tags/alignment_slide7_20.xml><?xml version="1.0" encoding="utf-8"?>
+<p:tagLst xmlns:a="http://schemas.openxmlformats.org/drawingml/2006/main" xmlns:r="http://schemas.openxmlformats.org/officeDocument/2006/relationships" xmlns:p="http://schemas.openxmlformats.org/presentationml/2006/main">
+  <p:tag name="ALIGNMENT_TARGET_X" val="47.310001373291016"/>
+</p:tagLst>
+</file>
+
+<file path=ppt/tags/alignment_slide7_22.xml><?xml version="1.0" encoding="utf-8"?>
+<p:tagLst xmlns:a="http://schemas.openxmlformats.org/drawingml/2006/main" xmlns:r="http://schemas.openxmlformats.org/officeDocument/2006/relationships" xmlns:p="http://schemas.openxmlformats.org/presentationml/2006/main">
+  <p:tag name="ALIGNMENT_TARGET_X" val="611.9305419921875"/>
+</p:tagLst>
+</file>
+
+<file path=ppt/tags/alignment_slide7_25.xml><?xml version="1.0" encoding="utf-8"?>
+<p:tagLst xmlns:a="http://schemas.openxmlformats.org/drawingml/2006/main" xmlns:r="http://schemas.openxmlformats.org/officeDocument/2006/relationships" xmlns:p="http://schemas.openxmlformats.org/presentationml/2006/main">
+  <p:tag name="ALIGNMENT_TARGET_X" val="732.719970703125"/>
+</p:tagLst>
+</file>
+
+<file path=ppt/tags/alignment_slide7_26.xml><?xml version="1.0" encoding="utf-8"?>
+<p:tagLst xmlns:a="http://schemas.openxmlformats.org/drawingml/2006/main" xmlns:r="http://schemas.openxmlformats.org/officeDocument/2006/relationships" xmlns:p="http://schemas.openxmlformats.org/presentationml/2006/main">
+  <p:tag name="ALIGNMENT_TARGET_X" val="732.0599975585938"/>
+</p:tagLst>
+</file>
+
+<file path=ppt/tags/alignment_slide7_27.xml><?xml version="1.0" encoding="utf-8"?>
+<p:tagLst xmlns:a="http://schemas.openxmlformats.org/drawingml/2006/main" xmlns:r="http://schemas.openxmlformats.org/officeDocument/2006/relationships" xmlns:p="http://schemas.openxmlformats.org/presentationml/2006/main">
+  <p:tag name="ALIGNMENT_TARGET_X" val="732.75"/>
+</p:tagLst>
+</file>
+
+<file path=ppt/tags/alignment_slide7_28.xml><?xml version="1.0" encoding="utf-8"?>
+<p:tagLst xmlns:a="http://schemas.openxmlformats.org/drawingml/2006/main" xmlns:r="http://schemas.openxmlformats.org/officeDocument/2006/relationships" xmlns:p="http://schemas.openxmlformats.org/presentationml/2006/main">
+  <p:tag name="ALIGNMENT_TARGET_X" val="732.8699951171875"/>
+</p:tagLst>
+</file>
+
+<file path=ppt/tags/alignment_slide7_29.xml><?xml version="1.0" encoding="utf-8"?>
+<p:tagLst xmlns:a="http://schemas.openxmlformats.org/drawingml/2006/main" xmlns:r="http://schemas.openxmlformats.org/officeDocument/2006/relationships" xmlns:p="http://schemas.openxmlformats.org/presentationml/2006/main">
+  <p:tag name="ALIGNMENT_TARGET_X" val="47.310001373291016"/>
+</p:tagLst>
+</file>
+
+<file path=ppt/tags/alignment_slide7_3.xml><?xml version="1.0" encoding="utf-8"?>
 <p:tagLst xmlns:a="http://schemas.openxmlformats.org/drawingml/2006/main" xmlns:r="http://schemas.openxmlformats.org/officeDocument/2006/relationships" xmlns:p="http://schemas.openxmlformats.org/presentationml/2006/main">
   <p:tag name="ALIGNMENT_TARGET_X" val="59.4900016784668"/>
 </p:tagLst>
 </file>
 
-<file path=ppt/tags/tag109.xml><?xml version="1.0" encoding="utf-8"?>
+<file path=ppt/tags/alignment_slide7_32.xml><?xml version="1.0" encoding="utf-8"?>
+<p:tagLst xmlns:a="http://schemas.openxmlformats.org/drawingml/2006/main" xmlns:r="http://schemas.openxmlformats.org/officeDocument/2006/relationships" xmlns:p="http://schemas.openxmlformats.org/presentationml/2006/main">
+  <p:tag name="ALIGNMENT_TARGET_X" val="47.54999923706055"/>
+</p:tagLst>
+</file>
+
+<file path=ppt/tags/alignment_slide7_33.xml><?xml version="1.0" encoding="utf-8"?>
+<p:tagLst xmlns:a="http://schemas.openxmlformats.org/drawingml/2006/main" xmlns:r="http://schemas.openxmlformats.org/officeDocument/2006/relationships" xmlns:p="http://schemas.openxmlformats.org/presentationml/2006/main">
+  <p:tag name="ALIGNMENT_TARGET_X" val="912.4499855041504"/>
+</p:tagLst>
+</file>
+
+<file path=ppt/tags/alignment_slide7_4.xml><?xml version="1.0" encoding="utf-8"?>
 <p:tagLst xmlns:a="http://schemas.openxmlformats.org/drawingml/2006/main" xmlns:r="http://schemas.openxmlformats.org/officeDocument/2006/relationships" xmlns:p="http://schemas.openxmlformats.org/presentationml/2006/main">
   <p:tag name="ALIGNMENT_TARGET_X" val="46.7400016784668"/>
 </p:tagLst>
 </file>
 
-<file path=ppt/tags/tag11.xml><?xml version="1.0" encoding="utf-8"?>
+<file path=ppt/tags/alignment_slide7_7.xml><?xml version="1.0" encoding="utf-8"?>
+<p:tagLst xmlns:a="http://schemas.openxmlformats.org/drawingml/2006/main" xmlns:r="http://schemas.openxmlformats.org/officeDocument/2006/relationships" xmlns:p="http://schemas.openxmlformats.org/presentationml/2006/main">
+  <p:tag name="ALIGNMENT_TARGET_X" val="47.279998779296875"/>
+</p:tagLst>
+</file>
+
+<file path=ppt/tags/alignment_slide7_9.xml><?xml version="1.0" encoding="utf-8"?>
+<p:tagLst xmlns:a="http://schemas.openxmlformats.org/drawingml/2006/main" xmlns:r="http://schemas.openxmlformats.org/officeDocument/2006/relationships" xmlns:p="http://schemas.openxmlformats.org/presentationml/2006/main">
+  <p:tag name="ALIGNMENT_TARGET_X" val="150.0000400543213"/>
+</p:tagLst>
+</file>
+
+<file path=ppt/tags/alignment_slide8_10.xml><?xml version="1.0" encoding="utf-8"?>
+<p:tagLst xmlns:a="http://schemas.openxmlformats.org/drawingml/2006/main" xmlns:r="http://schemas.openxmlformats.org/officeDocument/2006/relationships" xmlns:p="http://schemas.openxmlformats.org/presentationml/2006/main">
+  <p:tag name="ALIGNMENT_TARGET_X" val="65.27999877929688"/>
+</p:tagLst>
+</file>
+
+<file path=ppt/tags/alignment_slide8_11.xml><?xml version="1.0" encoding="utf-8"?>
+<p:tagLst xmlns:a="http://schemas.openxmlformats.org/drawingml/2006/main" xmlns:r="http://schemas.openxmlformats.org/officeDocument/2006/relationships" xmlns:p="http://schemas.openxmlformats.org/presentationml/2006/main">
+  <p:tag name="ALIGNMENT_TARGET_X" val="64.68000030517578"/>
+</p:tagLst>
+</file>
+
+<file path=ppt/tags/alignment_slide8_12.xml><?xml version="1.0" encoding="utf-8"?>
+<p:tagLst xmlns:a="http://schemas.openxmlformats.org/drawingml/2006/main" xmlns:r="http://schemas.openxmlformats.org/officeDocument/2006/relationships" xmlns:p="http://schemas.openxmlformats.org/presentationml/2006/main">
+  <p:tag name="ALIGNMENT_TARGET_X" val="65.27999877929688"/>
+</p:tagLst>
+</file>
+
+<file path=ppt/tags/alignment_slide8_13.xml><?xml version="1.0" encoding="utf-8"?>
+<p:tagLst xmlns:a="http://schemas.openxmlformats.org/drawingml/2006/main" xmlns:r="http://schemas.openxmlformats.org/officeDocument/2006/relationships" xmlns:p="http://schemas.openxmlformats.org/presentationml/2006/main">
+  <p:tag name="ALIGNMENT_TARGET_X" val="65.37000274658203"/>
+</p:tagLst>
+</file>
+
+<file path=ppt/tags/alignment_slide8_15.xml><?xml version="1.0" encoding="utf-8"?>
+<p:tagLst xmlns:a="http://schemas.openxmlformats.org/drawingml/2006/main" xmlns:r="http://schemas.openxmlformats.org/officeDocument/2006/relationships" xmlns:p="http://schemas.openxmlformats.org/presentationml/2006/main">
+  <p:tag name="ALIGNMENT_TARGET_X" val="617.2500457763672"/>
+</p:tagLst>
+</file>
+
+<file path=ppt/tags/alignment_slide8_27.xml><?xml version="1.0" encoding="utf-8"?>
+<p:tagLst xmlns:a="http://schemas.openxmlformats.org/drawingml/2006/main" xmlns:r="http://schemas.openxmlformats.org/officeDocument/2006/relationships" xmlns:p="http://schemas.openxmlformats.org/presentationml/2006/main">
+  <p:tag name="ALIGNMENT_TARGET_X" val="431.999963760376"/>
+</p:tagLst>
+</file>
+
+<file path=ppt/tags/alignment_slide8_28.xml><?xml version="1.0" encoding="utf-8"?>
+<p:tagLst xmlns:a="http://schemas.openxmlformats.org/drawingml/2006/main" xmlns:r="http://schemas.openxmlformats.org/officeDocument/2006/relationships" xmlns:p="http://schemas.openxmlformats.org/presentationml/2006/main">
+  <p:tag name="ALIGNMENT_TARGET_X" val="432.0000114440918"/>
+</p:tagLst>
+</file>
+
+<file path=ppt/tags/alignment_slide8_3.xml><?xml version="1.0" encoding="utf-8"?>
 <p:tagLst xmlns:a="http://schemas.openxmlformats.org/drawingml/2006/main" xmlns:r="http://schemas.openxmlformats.org/officeDocument/2006/relationships" xmlns:p="http://schemas.openxmlformats.org/presentationml/2006/main">
   <p:tag name="ALIGNMENT_TARGET_X" val="59.4900016784668"/>
 </p:tagLst>
 </file>
 
-<file path=ppt/tags/tag110.xml><?xml version="1.0" encoding="utf-8"?>
+<file path=ppt/tags/alignment_slide8_33.xml><?xml version="1.0" encoding="utf-8"?>
+<p:tagLst xmlns:a="http://schemas.openxmlformats.org/drawingml/2006/main" xmlns:r="http://schemas.openxmlformats.org/officeDocument/2006/relationships" xmlns:p="http://schemas.openxmlformats.org/presentationml/2006/main">
+  <p:tag name="ALIGNMENT_TARGET_X" val="617.2500343322754"/>
+</p:tagLst>
+</file>
+
+<file path=ppt/tags/alignment_slide8_34.xml><?xml version="1.0" encoding="utf-8"?>
+<p:tagLst xmlns:a="http://schemas.openxmlformats.org/drawingml/2006/main" xmlns:r="http://schemas.openxmlformats.org/officeDocument/2006/relationships" xmlns:p="http://schemas.openxmlformats.org/presentationml/2006/main">
+  <p:tag name="ALIGNMENT_TARGET_X" val="617.2500114440918"/>
+</p:tagLst>
+</file>
+
+<file path=ppt/tags/alignment_slide8_37.xml><?xml version="1.0" encoding="utf-8"?>
+<p:tagLst xmlns:a="http://schemas.openxmlformats.org/drawingml/2006/main" xmlns:r="http://schemas.openxmlformats.org/officeDocument/2006/relationships" xmlns:p="http://schemas.openxmlformats.org/presentationml/2006/main">
+  <p:tag name="ALIGNMENT_TARGET_X" val="802.5000143051147"/>
+</p:tagLst>
+</file>
+
+<file path=ppt/tags/alignment_slide8_38.xml><?xml version="1.0" encoding="utf-8"?>
+<p:tagLst xmlns:a="http://schemas.openxmlformats.org/drawingml/2006/main" xmlns:r="http://schemas.openxmlformats.org/officeDocument/2006/relationships" xmlns:p="http://schemas.openxmlformats.org/presentationml/2006/main">
+  <p:tag name="ALIGNMENT_TARGET_X" val="802.5000343322754"/>
+</p:tagLst>
+</file>
+
+<file path=ppt/tags/alignment_slide8_39.xml><?xml version="1.0" encoding="utf-8"?>
+<p:tagLst xmlns:a="http://schemas.openxmlformats.org/drawingml/2006/main" xmlns:r="http://schemas.openxmlformats.org/officeDocument/2006/relationships" xmlns:p="http://schemas.openxmlformats.org/presentationml/2006/main">
+  <p:tag name="ALIGNMENT_TARGET_X" val="802.4999732971191"/>
+</p:tagLst>
+</file>
+
+<file path=ppt/tags/alignment_slide8_4.xml><?xml version="1.0" encoding="utf-8"?>
+<p:tagLst xmlns:a="http://schemas.openxmlformats.org/drawingml/2006/main" xmlns:r="http://schemas.openxmlformats.org/officeDocument/2006/relationships" xmlns:p="http://schemas.openxmlformats.org/presentationml/2006/main">
+  <p:tag name="ALIGNMENT_TARGET_X" val="46.7400016784668"/>
+</p:tagLst>
+</file>
+
+<file path=ppt/tags/alignment_slide8_40.xml><?xml version="1.0" encoding="utf-8"?>
+<p:tagLst xmlns:a="http://schemas.openxmlformats.org/drawingml/2006/main" xmlns:r="http://schemas.openxmlformats.org/officeDocument/2006/relationships" xmlns:p="http://schemas.openxmlformats.org/presentationml/2006/main">
+  <p:tag name="ALIGNMENT_TARGET_X" val="351.80999755859375"/>
+</p:tagLst>
+</file>
+
+<file path=ppt/tags/alignment_slide8_42.xml><?xml version="1.0" encoding="utf-8"?>
+<p:tagLst xmlns:a="http://schemas.openxmlformats.org/drawingml/2006/main" xmlns:r="http://schemas.openxmlformats.org/officeDocument/2006/relationships" xmlns:p="http://schemas.openxmlformats.org/presentationml/2006/main">
+  <p:tag name="ALIGNMENT_TARGET_X" val="65.25"/>
+</p:tagLst>
+</file>
+
+<file path=ppt/tags/alignment_slide8_45.xml><?xml version="1.0" encoding="utf-8"?>
 <p:tagLst xmlns:a="http://schemas.openxmlformats.org/drawingml/2006/main" xmlns:r="http://schemas.openxmlformats.org/officeDocument/2006/relationships" xmlns:p="http://schemas.openxmlformats.org/presentationml/2006/main">
   <p:tag name="ALIGNMENT_TARGET_X" val="47.54999923706055"/>
 </p:tagLst>
 </file>
 
-<file path=ppt/tags/tag111.xml><?xml version="1.0" encoding="utf-8"?>
+<file path=ppt/tags/alignment_slide8_46.xml><?xml version="1.0" encoding="utf-8"?>
 <p:tagLst xmlns:a="http://schemas.openxmlformats.org/drawingml/2006/main" xmlns:r="http://schemas.openxmlformats.org/officeDocument/2006/relationships" xmlns:p="http://schemas.openxmlformats.org/presentationml/2006/main">
   <p:tag name="ALIGNMENT_TARGET_X" val="912.4499855041504"/>
 </p:tagLst>
 </file>
 
-<file path=ppt/tags/tag112.xml><?xml version="1.0" encoding="utf-8"?>
+<file path=ppt/tags/alignment_slide8_8.xml><?xml version="1.0" encoding="utf-8"?>
+<p:tagLst xmlns:a="http://schemas.openxmlformats.org/drawingml/2006/main" xmlns:r="http://schemas.openxmlformats.org/officeDocument/2006/relationships" xmlns:p="http://schemas.openxmlformats.org/presentationml/2006/main">
+  <p:tag name="ALIGNMENT_TARGET_X" val="65.25"/>
+</p:tagLst>
+</file>
+
+<file path=ppt/tags/alignment_slide8_9.xml><?xml version="1.0" encoding="utf-8"?>
+<p:tagLst xmlns:a="http://schemas.openxmlformats.org/drawingml/2006/main" xmlns:r="http://schemas.openxmlformats.org/officeDocument/2006/relationships" xmlns:p="http://schemas.openxmlformats.org/presentationml/2006/main">
+  <p:tag name="ALIGNMENT_TARGET_X" val="64.55999755859375"/>
+</p:tagLst>
+</file>
+
+<file path=ppt/tags/alignment_slide9_15.xml><?xml version="1.0" encoding="utf-8"?>
+<p:tagLst xmlns:a="http://schemas.openxmlformats.org/drawingml/2006/main" xmlns:r="http://schemas.openxmlformats.org/officeDocument/2006/relationships" xmlns:p="http://schemas.openxmlformats.org/presentationml/2006/main">
+  <p:tag name="ALIGNMENT_TARGET_X" val="149.24999618530273"/>
+</p:tagLst>
+</file>
+
+<file path=ppt/tags/alignment_slide9_16.xml><?xml version="1.0" encoding="utf-8"?>
+<p:tagLst xmlns:a="http://schemas.openxmlformats.org/drawingml/2006/main" xmlns:r="http://schemas.openxmlformats.org/officeDocument/2006/relationships" xmlns:p="http://schemas.openxmlformats.org/presentationml/2006/main">
+  <p:tag name="ALIGNMENT_TARGET_X" val="149.25"/>
+</p:tagLst>
+</file>
+
+<file path=ppt/tags/alignment_slide9_23.xml><?xml version="1.0" encoding="utf-8"?>
+<p:tagLst xmlns:a="http://schemas.openxmlformats.org/drawingml/2006/main" xmlns:r="http://schemas.openxmlformats.org/officeDocument/2006/relationships" xmlns:p="http://schemas.openxmlformats.org/presentationml/2006/main">
+  <p:tag name="ALIGNMENT_TARGET_X" val="369.7500114440918"/>
+</p:tagLst>
+</file>
+
+<file path=ppt/tags/alignment_slide9_24.xml><?xml version="1.0" encoding="utf-8"?>
+<p:tagLst xmlns:a="http://schemas.openxmlformats.org/drawingml/2006/main" xmlns:r="http://schemas.openxmlformats.org/officeDocument/2006/relationships" xmlns:p="http://schemas.openxmlformats.org/presentationml/2006/main">
+  <p:tag name="ALIGNMENT_TARGET_X" val="369.7500457763672"/>
+</p:tagLst>
+</file>
+
+<file path=ppt/tags/alignment_slide9_3.xml><?xml version="1.0" encoding="utf-8"?>
+<p:tagLst xmlns:a="http://schemas.openxmlformats.org/drawingml/2006/main" xmlns:r="http://schemas.openxmlformats.org/officeDocument/2006/relationships" xmlns:p="http://schemas.openxmlformats.org/presentationml/2006/main">
+  <p:tag name="ALIGNMENT_TARGET_X" val="59.4900016784668"/>
+</p:tagLst>
+</file>
+
+<file path=ppt/tags/alignment_slide9_32.xml><?xml version="1.0" encoding="utf-8"?>
+<p:tagLst xmlns:a="http://schemas.openxmlformats.org/drawingml/2006/main" xmlns:r="http://schemas.openxmlformats.org/officeDocument/2006/relationships" xmlns:p="http://schemas.openxmlformats.org/presentationml/2006/main">
+  <p:tag name="ALIGNMENT_TARGET_X" val="590.2499809265137"/>
+</p:tagLst>
+</file>
+
+<file path=ppt/tags/alignment_slide9_33.xml><?xml version="1.0" encoding="utf-8"?>
+<p:tagLst xmlns:a="http://schemas.openxmlformats.org/drawingml/2006/main" xmlns:r="http://schemas.openxmlformats.org/officeDocument/2006/relationships" xmlns:p="http://schemas.openxmlformats.org/presentationml/2006/main">
+  <p:tag name="ALIGNMENT_TARGET_X" val="590.2499771118164"/>
+</p:tagLst>
+</file>
+
+<file path=ppt/tags/alignment_slide9_4.xml><?xml version="1.0" encoding="utf-8"?>
+<p:tagLst xmlns:a="http://schemas.openxmlformats.org/drawingml/2006/main" xmlns:r="http://schemas.openxmlformats.org/officeDocument/2006/relationships" xmlns:p="http://schemas.openxmlformats.org/presentationml/2006/main">
+  <p:tag name="ALIGNMENT_TARGET_X" val="46.7400016784668"/>
+</p:tagLst>
+</file>
+
+<file path=ppt/tags/alignment_slide9_43.xml><?xml version="1.0" encoding="utf-8"?>
+<p:tagLst xmlns:a="http://schemas.openxmlformats.org/drawingml/2006/main" xmlns:r="http://schemas.openxmlformats.org/officeDocument/2006/relationships" xmlns:p="http://schemas.openxmlformats.org/presentationml/2006/main">
+  <p:tag name="ALIGNMENT_TARGET_X" val="810.7499809265137"/>
+</p:tagLst>
+</file>
+
+<file path=ppt/tags/alignment_slide9_44.xml><?xml version="1.0" encoding="utf-8"?>
+<p:tagLst xmlns:a="http://schemas.openxmlformats.org/drawingml/2006/main" xmlns:r="http://schemas.openxmlformats.org/officeDocument/2006/relationships" xmlns:p="http://schemas.openxmlformats.org/presentationml/2006/main">
+  <p:tag name="ALIGNMENT_TARGET_X" val="810.75"/>
+</p:tagLst>
+</file>
+
+<file path=ppt/tags/alignment_slide9_46.xml><?xml version="1.0" encoding="utf-8"?>
+<p:tagLst xmlns:a="http://schemas.openxmlformats.org/drawingml/2006/main" xmlns:r="http://schemas.openxmlformats.org/officeDocument/2006/relationships" xmlns:p="http://schemas.openxmlformats.org/presentationml/2006/main">
+  <p:tag name="ALIGNMENT_TARGET_X" val="480"/>
+</p:tagLst>
+</file>
+
+<file path=ppt/tags/alignment_slide9_47.xml><?xml version="1.0" encoding="utf-8"?>
+<p:tagLst xmlns:a="http://schemas.openxmlformats.org/drawingml/2006/main" xmlns:r="http://schemas.openxmlformats.org/officeDocument/2006/relationships" xmlns:p="http://schemas.openxmlformats.org/presentationml/2006/main">
+  <p:tag name="ALIGNMENT_TARGET_X" val="47.220001220703125"/>
+</p:tagLst>
+</file>
+
+<file path=ppt/tags/alignment_slide9_48.xml><?xml version="1.0" encoding="utf-8"?>
 <p:tagLst xmlns:a="http://schemas.openxmlformats.org/drawingml/2006/main" xmlns:r="http://schemas.openxmlformats.org/officeDocument/2006/relationships" xmlns:p="http://schemas.openxmlformats.org/presentationml/2006/main">
   <p:tag name="ALIGNMENT_TARGET_X" val="47.279998779296875"/>
 </p:tagLst>
 </file>
 
-<file path=ppt/tags/tag113.xml><?xml version="1.0" encoding="utf-8"?>
-<p:tagLst xmlns:a="http://schemas.openxmlformats.org/drawingml/2006/main" xmlns:r="http://schemas.openxmlformats.org/officeDocument/2006/relationships" xmlns:p="http://schemas.openxmlformats.org/presentationml/2006/main">
-  <p:tag name="ALIGNMENT_TARGET_X" val="732.719970703125"/>
-</p:tagLst>
-</file>
-
-<file path=ppt/tags/tag114.xml><?xml version="1.0" encoding="utf-8"?>
-<p:tagLst xmlns:a="http://schemas.openxmlformats.org/drawingml/2006/main" xmlns:r="http://schemas.openxmlformats.org/officeDocument/2006/relationships" xmlns:p="http://schemas.openxmlformats.org/presentationml/2006/main">
-  <p:tag name="ALIGNMENT_TARGET_X" val="732.0599975585938"/>
-</p:tagLst>
-</file>
-
-<file path=ppt/tags/tag115.xml><?xml version="1.0" encoding="utf-8"?>
-<p:tagLst xmlns:a="http://schemas.openxmlformats.org/drawingml/2006/main" xmlns:r="http://schemas.openxmlformats.org/officeDocument/2006/relationships" xmlns:p="http://schemas.openxmlformats.org/presentationml/2006/main">
-  <p:tag name="ALIGNMENT_TARGET_X" val="732.75"/>
-</p:tagLst>
-</file>
-
-<file path=ppt/tags/tag116.xml><?xml version="1.0" encoding="utf-8"?>
-<p:tagLst xmlns:a="http://schemas.openxmlformats.org/drawingml/2006/main" xmlns:r="http://schemas.openxmlformats.org/officeDocument/2006/relationships" xmlns:p="http://schemas.openxmlformats.org/presentationml/2006/main">
-  <p:tag name="ALIGNMENT_TARGET_X" val="732.8699951171875"/>
-</p:tagLst>
-</file>
-
-<file path=ppt/tags/tag117.xml><?xml version="1.0" encoding="utf-8"?>
-<p:tagLst xmlns:a="http://schemas.openxmlformats.org/drawingml/2006/main" xmlns:r="http://schemas.openxmlformats.org/officeDocument/2006/relationships" xmlns:p="http://schemas.openxmlformats.org/presentationml/2006/main">
-  <p:tag name="ALIGNMENT_TARGET_X" val="47.310001373291016"/>
-</p:tagLst>
-</file>
-
-<file path=ppt/tags/tag118.xml><?xml version="1.0" encoding="utf-8"?>
-<p:tagLst xmlns:a="http://schemas.openxmlformats.org/drawingml/2006/main" xmlns:r="http://schemas.openxmlformats.org/officeDocument/2006/relationships" xmlns:p="http://schemas.openxmlformats.org/presentationml/2006/main">
-  <p:tag name="ALIGNMENT_TARGET_X" val="150.0000400543213"/>
-</p:tagLst>
-</file>
-
-<file path=ppt/tags/tag119.xml><?xml version="1.0" encoding="utf-8"?>
-<p:tagLst xmlns:a="http://schemas.openxmlformats.org/drawingml/2006/main" xmlns:r="http://schemas.openxmlformats.org/officeDocument/2006/relationships" xmlns:p="http://schemas.openxmlformats.org/presentationml/2006/main">
-  <p:tag name="ALIGNMENT_TARGET_X" val="393.75004291534424"/>
-</p:tagLst>
-</file>
-
-<file path=ppt/tags/tag12.xml><?xml version="1.0" encoding="utf-8"?>
+<file path=ppt/tags/alignment_slide9_51.xml><?xml version="1.0" encoding="utf-8"?>
 <p:tagLst xmlns:a="http://schemas.openxmlformats.org/drawingml/2006/main" xmlns:r="http://schemas.openxmlformats.org/officeDocument/2006/relationships" xmlns:p="http://schemas.openxmlformats.org/presentationml/2006/main">
   <p:tag name="ALIGNMENT_TARGET_X" val="47.54999923706055"/>
 </p:tagLst>
 </file>
 
-<file path=ppt/tags/tag120.xml><?xml version="1.0" encoding="utf-8"?>
-<p:tagLst xmlns:a="http://schemas.openxmlformats.org/drawingml/2006/main" xmlns:r="http://schemas.openxmlformats.org/officeDocument/2006/relationships" xmlns:p="http://schemas.openxmlformats.org/presentationml/2006/main">
-  <p:tag name="ALIGNMENT_TARGET_X" val="637.5000610351562"/>
-</p:tagLst>
-</file>
-
-<file path=ppt/tags/tag121.xml><?xml version="1.0" encoding="utf-8"?>
-<p:tagLst xmlns:a="http://schemas.openxmlformats.org/drawingml/2006/main" xmlns:r="http://schemas.openxmlformats.org/officeDocument/2006/relationships" xmlns:p="http://schemas.openxmlformats.org/presentationml/2006/main">
-  <p:tag name="ALIGNMENT_TARGET_X" val="47.310001373291016"/>
-</p:tagLst>
-</file>
-
-<file path=ppt/tags/tag122.xml><?xml version="1.0" encoding="utf-8"?>
-<p:tagLst xmlns:a="http://schemas.openxmlformats.org/drawingml/2006/main" xmlns:r="http://schemas.openxmlformats.org/officeDocument/2006/relationships" xmlns:p="http://schemas.openxmlformats.org/presentationml/2006/main">
-  <p:tag name="ALIGNMENT_TARGET_X" val="547.0813598632812"/>
-</p:tagLst>
-</file>
-
-<file path=ppt/tags/tag123.xml><?xml version="1.0" encoding="utf-8"?>
-<p:tagLst xmlns:a="http://schemas.openxmlformats.org/drawingml/2006/main" xmlns:r="http://schemas.openxmlformats.org/officeDocument/2006/relationships" xmlns:p="http://schemas.openxmlformats.org/presentationml/2006/main">
-  <p:tag name="ALIGNMENT_TARGET_X" val="47.310001373291016"/>
-</p:tagLst>
-</file>
-
-<file path=ppt/tags/tag124.xml><?xml version="1.0" encoding="utf-8"?>
-<p:tagLst xmlns:a="http://schemas.openxmlformats.org/drawingml/2006/main" xmlns:r="http://schemas.openxmlformats.org/officeDocument/2006/relationships" xmlns:p="http://schemas.openxmlformats.org/presentationml/2006/main">
-  <p:tag name="ALIGNMENT_TARGET_X" val="607.31103515625"/>
-</p:tagLst>
-</file>
-
-<file path=ppt/tags/tag125.xml><?xml version="1.0" encoding="utf-8"?>
-<p:tagLst xmlns:a="http://schemas.openxmlformats.org/drawingml/2006/main" xmlns:r="http://schemas.openxmlformats.org/officeDocument/2006/relationships" xmlns:p="http://schemas.openxmlformats.org/presentationml/2006/main">
-  <p:tag name="ALIGNMENT_TARGET_X" val="47.310001373291016"/>
-</p:tagLst>
-</file>
-
-<file path=ppt/tags/tag126.xml><?xml version="1.0" encoding="utf-8"?>
-<p:tagLst xmlns:a="http://schemas.openxmlformats.org/drawingml/2006/main" xmlns:r="http://schemas.openxmlformats.org/officeDocument/2006/relationships" xmlns:p="http://schemas.openxmlformats.org/presentationml/2006/main">
-  <p:tag name="ALIGNMENT_TARGET_X" val="611.9305419921875"/>
-</p:tagLst>
-</file>
-
-<file path=ppt/tags/tag127.xml><?xml version="1.0" encoding="utf-8"?>
-<p:tagLst xmlns:a="http://schemas.openxmlformats.org/drawingml/2006/main" xmlns:r="http://schemas.openxmlformats.org/officeDocument/2006/relationships" xmlns:p="http://schemas.openxmlformats.org/presentationml/2006/main">
-  <p:tag name="ALIGNMENT_TARGET_X" val="59.4900016784668"/>
-</p:tagLst>
-</file>
-
-<file path=ppt/tags/tag128.xml><?xml version="1.0" encoding="utf-8"?>
-<p:tagLst xmlns:a="http://schemas.openxmlformats.org/drawingml/2006/main" xmlns:r="http://schemas.openxmlformats.org/officeDocument/2006/relationships" xmlns:p="http://schemas.openxmlformats.org/presentationml/2006/main">
-  <p:tag name="ALIGNMENT_TARGET_X" val="46.7400016784668"/>
-</p:tagLst>
-</file>
-
-<file path=ppt/tags/tag129.xml><?xml version="1.0" encoding="utf-8"?>
-<p:tagLst xmlns:a="http://schemas.openxmlformats.org/drawingml/2006/main" xmlns:r="http://schemas.openxmlformats.org/officeDocument/2006/relationships" xmlns:p="http://schemas.openxmlformats.org/presentationml/2006/main">
-  <p:tag name="ALIGNMENT_TARGET_X" val="47.54999923706055"/>
-</p:tagLst>
-</file>
-
-<file path=ppt/tags/tag13.xml><?xml version="1.0" encoding="utf-8"?>
+<file path=ppt/tags/alignment_slide9_52.xml><?xml version="1.0" encoding="utf-8"?>
 <p:tagLst xmlns:a="http://schemas.openxmlformats.org/drawingml/2006/main" xmlns:r="http://schemas.openxmlformats.org/officeDocument/2006/relationships" xmlns:p="http://schemas.openxmlformats.org/presentationml/2006/main">
   <p:tag name="ALIGNMENT_TARGET_X" val="912.4499855041504"/>
 </p:tagLst>
 </file>
 
-<file path=ppt/tags/tag130.xml><?xml version="1.0" encoding="utf-8"?>
-<p:tagLst xmlns:a="http://schemas.openxmlformats.org/drawingml/2006/main" xmlns:r="http://schemas.openxmlformats.org/officeDocument/2006/relationships" xmlns:p="http://schemas.openxmlformats.org/presentationml/2006/main">
-  <p:tag name="ALIGNMENT_TARGET_X" val="912.4499855041504"/>
-</p:tagLst>
-</file>
-
-<file path=ppt/tags/tag131.xml><?xml version="1.0" encoding="utf-8"?>
-<p:tagLst xmlns:a="http://schemas.openxmlformats.org/drawingml/2006/main" xmlns:r="http://schemas.openxmlformats.org/officeDocument/2006/relationships" xmlns:p="http://schemas.openxmlformats.org/presentationml/2006/main">
-  <p:tag name="ALIGNMENT_TARGET_X" val="65.25"/>
-</p:tagLst>
-</file>
-
-<file path=ppt/tags/tag132.xml><?xml version="1.0" encoding="utf-8"?>
-<p:tagLst xmlns:a="http://schemas.openxmlformats.org/drawingml/2006/main" xmlns:r="http://schemas.openxmlformats.org/officeDocument/2006/relationships" xmlns:p="http://schemas.openxmlformats.org/presentationml/2006/main">
-  <p:tag name="ALIGNMENT_TARGET_X" val="64.55999755859375"/>
-</p:tagLst>
-</file>
-
-<file path=ppt/tags/tag133.xml><?xml version="1.0" encoding="utf-8"?>
-<p:tagLst xmlns:a="http://schemas.openxmlformats.org/drawingml/2006/main" xmlns:r="http://schemas.openxmlformats.org/officeDocument/2006/relationships" xmlns:p="http://schemas.openxmlformats.org/presentationml/2006/main">
-  <p:tag name="ALIGNMENT_TARGET_X" val="65.27999877929688"/>
-</p:tagLst>
-</file>
-
-<file path=ppt/tags/tag134.xml><?xml version="1.0" encoding="utf-8"?>
-<p:tagLst xmlns:a="http://schemas.openxmlformats.org/drawingml/2006/main" xmlns:r="http://schemas.openxmlformats.org/officeDocument/2006/relationships" xmlns:p="http://schemas.openxmlformats.org/presentationml/2006/main">
-  <p:tag name="ALIGNMENT_TARGET_X" val="64.68000030517578"/>
-</p:tagLst>
-</file>
-
-<file path=ppt/tags/tag135.xml><?xml version="1.0" encoding="utf-8"?>
-<p:tagLst xmlns:a="http://schemas.openxmlformats.org/drawingml/2006/main" xmlns:r="http://schemas.openxmlformats.org/officeDocument/2006/relationships" xmlns:p="http://schemas.openxmlformats.org/presentationml/2006/main">
-  <p:tag name="ALIGNMENT_TARGET_X" val="65.27999877929688"/>
-</p:tagLst>
-</file>
-
-<file path=ppt/tags/tag136.xml><?xml version="1.0" encoding="utf-8"?>
-<p:tagLst xmlns:a="http://schemas.openxmlformats.org/drawingml/2006/main" xmlns:r="http://schemas.openxmlformats.org/officeDocument/2006/relationships" xmlns:p="http://schemas.openxmlformats.org/presentationml/2006/main">
-  <p:tag name="ALIGNMENT_TARGET_X" val="65.37000274658203"/>
-</p:tagLst>
-</file>
-
-<file path=ppt/tags/tag137.xml><?xml version="1.0" encoding="utf-8"?>
-<p:tagLst xmlns:a="http://schemas.openxmlformats.org/drawingml/2006/main" xmlns:r="http://schemas.openxmlformats.org/officeDocument/2006/relationships" xmlns:p="http://schemas.openxmlformats.org/presentationml/2006/main">
-  <p:tag name="ALIGNMENT_TARGET_X" val="617.2500457763672"/>
-</p:tagLst>
-</file>
-
-<file path=ppt/tags/tag138.xml><?xml version="1.0" encoding="utf-8"?>
-<p:tagLst xmlns:a="http://schemas.openxmlformats.org/drawingml/2006/main" xmlns:r="http://schemas.openxmlformats.org/officeDocument/2006/relationships" xmlns:p="http://schemas.openxmlformats.org/presentationml/2006/main">
-  <p:tag name="ALIGNMENT_TARGET_X" val="431.999963760376"/>
-</p:tagLst>
-</file>
-
-<file path=ppt/tags/tag139.xml><?xml version="1.0" encoding="utf-8"?>
-<p:tagLst xmlns:a="http://schemas.openxmlformats.org/drawingml/2006/main" xmlns:r="http://schemas.openxmlformats.org/officeDocument/2006/relationships" xmlns:p="http://schemas.openxmlformats.org/presentationml/2006/main">
-  <p:tag name="ALIGNMENT_TARGET_X" val="432.0000114440918"/>
-</p:tagLst>
-</file>
-
-<file path=ppt/tags/tag14.xml><?xml version="1.0" encoding="utf-8"?>
-<p:tagLst xmlns:a="http://schemas.openxmlformats.org/drawingml/2006/main" xmlns:r="http://schemas.openxmlformats.org/officeDocument/2006/relationships" xmlns:p="http://schemas.openxmlformats.org/presentationml/2006/main">
-  <p:tag name="ALIGNMENT_TARGET_X" val="24.780000686645508"/>
-</p:tagLst>
-</file>
-
-<file path=ppt/tags/tag140.xml><?xml version="1.0" encoding="utf-8"?>
-<p:tagLst xmlns:a="http://schemas.openxmlformats.org/drawingml/2006/main" xmlns:r="http://schemas.openxmlformats.org/officeDocument/2006/relationships" xmlns:p="http://schemas.openxmlformats.org/presentationml/2006/main">
-  <p:tag name="ALIGNMENT_TARGET_X" val="617.2500343322754"/>
-</p:tagLst>
-</file>
-
-<file path=ppt/tags/tag141.xml><?xml version="1.0" encoding="utf-8"?>
-<p:tagLst xmlns:a="http://schemas.openxmlformats.org/drawingml/2006/main" xmlns:r="http://schemas.openxmlformats.org/officeDocument/2006/relationships" xmlns:p="http://schemas.openxmlformats.org/presentationml/2006/main">
-  <p:tag name="ALIGNMENT_TARGET_X" val="617.2500114440918"/>
-</p:tagLst>
-</file>
-
-<file path=ppt/tags/tag142.xml><?xml version="1.0" encoding="utf-8"?>
-<p:tagLst xmlns:a="http://schemas.openxmlformats.org/drawingml/2006/main" xmlns:r="http://schemas.openxmlformats.org/officeDocument/2006/relationships" xmlns:p="http://schemas.openxmlformats.org/presentationml/2006/main">
-  <p:tag name="ALIGNMENT_TARGET_X" val="802.5000143051147"/>
-</p:tagLst>
-</file>
-
-<file path=ppt/tags/tag143.xml><?xml version="1.0" encoding="utf-8"?>
-<p:tagLst xmlns:a="http://schemas.openxmlformats.org/drawingml/2006/main" xmlns:r="http://schemas.openxmlformats.org/officeDocument/2006/relationships" xmlns:p="http://schemas.openxmlformats.org/presentationml/2006/main">
-  <p:tag name="ALIGNMENT_TARGET_X" val="802.5000343322754"/>
-</p:tagLst>
-</file>
-
-<file path=ppt/tags/tag144.xml><?xml version="1.0" encoding="utf-8"?>
-<p:tagLst xmlns:a="http://schemas.openxmlformats.org/drawingml/2006/main" xmlns:r="http://schemas.openxmlformats.org/officeDocument/2006/relationships" xmlns:p="http://schemas.openxmlformats.org/presentationml/2006/main">
-  <p:tag name="ALIGNMENT_TARGET_X" val="802.4999732971191"/>
-</p:tagLst>
-</file>
-
-<file path=ppt/tags/tag145.xml><?xml version="1.0" encoding="utf-8"?>
-<p:tagLst xmlns:a="http://schemas.openxmlformats.org/drawingml/2006/main" xmlns:r="http://schemas.openxmlformats.org/officeDocument/2006/relationships" xmlns:p="http://schemas.openxmlformats.org/presentationml/2006/main">
-  <p:tag name="ALIGNMENT_TARGET_X" val="351.80999755859375"/>
-</p:tagLst>
-</file>
-
-<file path=ppt/tags/tag146.xml><?xml version="1.0" encoding="utf-8"?>
-<p:tagLst xmlns:a="http://schemas.openxmlformats.org/drawingml/2006/main" xmlns:r="http://schemas.openxmlformats.org/officeDocument/2006/relationships" xmlns:p="http://schemas.openxmlformats.org/presentationml/2006/main">
-  <p:tag name="ALIGNMENT_TARGET_X" val="65.25"/>
-</p:tagLst>
-</file>
-
-<file path=ppt/tags/tag147.xml><?xml version="1.0" encoding="utf-8"?>
-<p:tagLst xmlns:a="http://schemas.openxmlformats.org/drawingml/2006/main" xmlns:r="http://schemas.openxmlformats.org/officeDocument/2006/relationships" xmlns:p="http://schemas.openxmlformats.org/presentationml/2006/main">
-  <p:tag name="ALIGNMENT_TARGET_X" val="59.4900016784668"/>
-</p:tagLst>
-</file>
-
-<file path=ppt/tags/tag148.xml><?xml version="1.0" encoding="utf-8"?>
-<p:tagLst xmlns:a="http://schemas.openxmlformats.org/drawingml/2006/main" xmlns:r="http://schemas.openxmlformats.org/officeDocument/2006/relationships" xmlns:p="http://schemas.openxmlformats.org/presentationml/2006/main">
-  <p:tag name="ALIGNMENT_TARGET_X" val="46.7400016784668"/>
-</p:tagLst>
-</file>
-
-<file path=ppt/tags/tag149.xml><?xml version="1.0" encoding="utf-8"?>
-<p:tagLst xmlns:a="http://schemas.openxmlformats.org/drawingml/2006/main" xmlns:r="http://schemas.openxmlformats.org/officeDocument/2006/relationships" xmlns:p="http://schemas.openxmlformats.org/presentationml/2006/main">
-  <p:tag name="ALIGNMENT_TARGET_X" val="47.54999923706055"/>
-</p:tagLst>
-</file>
-
-<file path=ppt/tags/tag15.xml><?xml version="1.0" encoding="utf-8"?>
-<p:tagLst xmlns:a="http://schemas.openxmlformats.org/drawingml/2006/main" xmlns:r="http://schemas.openxmlformats.org/officeDocument/2006/relationships" xmlns:p="http://schemas.openxmlformats.org/presentationml/2006/main">
-  <p:tag name="ALIGNMENT_TARGET_X" val="24.8700008392334"/>
-</p:tagLst>
-</file>
-
-<file path=ppt/tags/tag150.xml><?xml version="1.0" encoding="utf-8"?>
-<p:tagLst xmlns:a="http://schemas.openxmlformats.org/drawingml/2006/main" xmlns:r="http://schemas.openxmlformats.org/officeDocument/2006/relationships" xmlns:p="http://schemas.openxmlformats.org/presentationml/2006/main">
-  <p:tag name="ALIGNMENT_TARGET_X" val="912.4499855041504"/>
-</p:tagLst>
-</file>
-
-<file path=ppt/tags/tag151.xml><?xml version="1.0" encoding="utf-8"?>
+<file path=ppt/tags/alignment_slide9_7.xml><?xml version="1.0" encoding="utf-8"?>
 <p:tagLst xmlns:a="http://schemas.openxmlformats.org/drawingml/2006/main" xmlns:r="http://schemas.openxmlformats.org/officeDocument/2006/relationships" xmlns:p="http://schemas.openxmlformats.org/presentationml/2006/main">
   <p:tag name="ALIGNMENT_TARGET_X" val="46.91999816894531"/>
-</p:tagLst>
-</file>
-
-<file path=ppt/tags/tag152.xml><?xml version="1.0" encoding="utf-8"?>
-<p:tagLst xmlns:a="http://schemas.openxmlformats.org/drawingml/2006/main" xmlns:r="http://schemas.openxmlformats.org/officeDocument/2006/relationships" xmlns:p="http://schemas.openxmlformats.org/presentationml/2006/main">
-  <p:tag name="ALIGNMENT_TARGET_X" val="149.24999618530273"/>
-</p:tagLst>
-</file>
-
-<file path=ppt/tags/tag153.xml><?xml version="1.0" encoding="utf-8"?>
-<p:tagLst xmlns:a="http://schemas.openxmlformats.org/drawingml/2006/main" xmlns:r="http://schemas.openxmlformats.org/officeDocument/2006/relationships" xmlns:p="http://schemas.openxmlformats.org/presentationml/2006/main">
-  <p:tag name="ALIGNMENT_TARGET_X" val="149.25"/>
-</p:tagLst>
-</file>
-
-<file path=ppt/tags/tag154.xml><?xml version="1.0" encoding="utf-8"?>
-<p:tagLst xmlns:a="http://schemas.openxmlformats.org/drawingml/2006/main" xmlns:r="http://schemas.openxmlformats.org/officeDocument/2006/relationships" xmlns:p="http://schemas.openxmlformats.org/presentationml/2006/main">
-  <p:tag name="ALIGNMENT_TARGET_X" val="369.7500114440918"/>
-</p:tagLst>
-</file>
-
-<file path=ppt/tags/tag155.xml><?xml version="1.0" encoding="utf-8"?>
-<p:tagLst xmlns:a="http://schemas.openxmlformats.org/drawingml/2006/main" xmlns:r="http://schemas.openxmlformats.org/officeDocument/2006/relationships" xmlns:p="http://schemas.openxmlformats.org/presentationml/2006/main">
-  <p:tag name="ALIGNMENT_TARGET_X" val="369.7500457763672"/>
-</p:tagLst>
-</file>
-
-<file path=ppt/tags/tag156.xml><?xml version="1.0" encoding="utf-8"?>
-<p:tagLst xmlns:a="http://schemas.openxmlformats.org/drawingml/2006/main" xmlns:r="http://schemas.openxmlformats.org/officeDocument/2006/relationships" xmlns:p="http://schemas.openxmlformats.org/presentationml/2006/main">
-  <p:tag name="ALIGNMENT_TARGET_X" val="590.2499809265137"/>
-</p:tagLst>
-</file>
-
-<file path=ppt/tags/tag157.xml><?xml version="1.0" encoding="utf-8"?>
-<p:tagLst xmlns:a="http://schemas.openxmlformats.org/drawingml/2006/main" xmlns:r="http://schemas.openxmlformats.org/officeDocument/2006/relationships" xmlns:p="http://schemas.openxmlformats.org/presentationml/2006/main">
-  <p:tag name="ALIGNMENT_TARGET_X" val="590.2499771118164"/>
-</p:tagLst>
-</file>
-
-<file path=ppt/tags/tag158.xml><?xml version="1.0" encoding="utf-8"?>
-<p:tagLst xmlns:a="http://schemas.openxmlformats.org/drawingml/2006/main" xmlns:r="http://schemas.openxmlformats.org/officeDocument/2006/relationships" xmlns:p="http://schemas.openxmlformats.org/presentationml/2006/main">
-  <p:tag name="ALIGNMENT_TARGET_X" val="810.7499809265137"/>
-</p:tagLst>
-</file>
-
-<file path=ppt/tags/tag159.xml><?xml version="1.0" encoding="utf-8"?>
-<p:tagLst xmlns:a="http://schemas.openxmlformats.org/drawingml/2006/main" xmlns:r="http://schemas.openxmlformats.org/officeDocument/2006/relationships" xmlns:p="http://schemas.openxmlformats.org/presentationml/2006/main">
-  <p:tag name="ALIGNMENT_TARGET_X" val="810.75"/>
-</p:tagLst>
-</file>
-
-<file path=ppt/tags/tag16.xml><?xml version="1.0" encoding="utf-8"?>
-<p:tagLst xmlns:a="http://schemas.openxmlformats.org/drawingml/2006/main" xmlns:r="http://schemas.openxmlformats.org/officeDocument/2006/relationships" xmlns:p="http://schemas.openxmlformats.org/presentationml/2006/main">
-  <p:tag name="ALIGNMENT_TARGET_X" val="24.84000015258789"/>
-</p:tagLst>
-</file>
-
-<file path=ppt/tags/tag160.xml><?xml version="1.0" encoding="utf-8"?>
-<p:tagLst xmlns:a="http://schemas.openxmlformats.org/drawingml/2006/main" xmlns:r="http://schemas.openxmlformats.org/officeDocument/2006/relationships" xmlns:p="http://schemas.openxmlformats.org/presentationml/2006/main">
-  <p:tag name="ALIGNMENT_TARGET_X" val="480"/>
-</p:tagLst>
-</file>
-
-<file path=ppt/tags/tag161.xml><?xml version="1.0" encoding="utf-8"?>
-<p:tagLst xmlns:a="http://schemas.openxmlformats.org/drawingml/2006/main" xmlns:r="http://schemas.openxmlformats.org/officeDocument/2006/relationships" xmlns:p="http://schemas.openxmlformats.org/presentationml/2006/main">
-  <p:tag name="ALIGNMENT_TARGET_X" val="47.220001220703125"/>
-</p:tagLst>
-</file>
-
-<file path=ppt/tags/tag162.xml><?xml version="1.0" encoding="utf-8"?>
-<p:tagLst xmlns:a="http://schemas.openxmlformats.org/drawingml/2006/main" xmlns:r="http://schemas.openxmlformats.org/officeDocument/2006/relationships" xmlns:p="http://schemas.openxmlformats.org/presentationml/2006/main">
-  <p:tag name="ALIGNMENT_TARGET_X" val="47.279998779296875"/>
-</p:tagLst>
-</file>
-
-<file path=ppt/tags/tag163.xml><?xml version="1.0" encoding="utf-8"?>
-<p:tagLst xmlns:a="http://schemas.openxmlformats.org/drawingml/2006/main" xmlns:r="http://schemas.openxmlformats.org/officeDocument/2006/relationships" xmlns:p="http://schemas.openxmlformats.org/presentationml/2006/main">
-  <p:tag name="ALIGNMENT_TARGET_X" val="59.4900016784668"/>
-</p:tagLst>
-</file>
-
-<file path=ppt/tags/tag164.xml><?xml version="1.0" encoding="utf-8"?>
-<p:tagLst xmlns:a="http://schemas.openxmlformats.org/drawingml/2006/main" xmlns:r="http://schemas.openxmlformats.org/officeDocument/2006/relationships" xmlns:p="http://schemas.openxmlformats.org/presentationml/2006/main">
-  <p:tag name="ALIGNMENT_TARGET_X" val="46.7400016784668"/>
-</p:tagLst>
-</file>
-
-<file path=ppt/tags/tag165.xml><?xml version="1.0" encoding="utf-8"?>
-<p:tagLst xmlns:a="http://schemas.openxmlformats.org/drawingml/2006/main" xmlns:r="http://schemas.openxmlformats.org/officeDocument/2006/relationships" xmlns:p="http://schemas.openxmlformats.org/presentationml/2006/main">
-  <p:tag name="ALIGNMENT_TARGET_X" val="47.54999923706055"/>
-</p:tagLst>
-</file>
-
-<file path=ppt/tags/tag166.xml><?xml version="1.0" encoding="utf-8"?>
-<p:tagLst xmlns:a="http://schemas.openxmlformats.org/drawingml/2006/main" xmlns:r="http://schemas.openxmlformats.org/officeDocument/2006/relationships" xmlns:p="http://schemas.openxmlformats.org/presentationml/2006/main">
-  <p:tag name="ALIGNMENT_TARGET_X" val="912.4500274658203"/>
-</p:tagLst>
-</file>
-
-<file path=ppt/tags/tag167.xml><?xml version="1.0" encoding="utf-8"?>
-<p:tagLst xmlns:a="http://schemas.openxmlformats.org/drawingml/2006/main" xmlns:r="http://schemas.openxmlformats.org/officeDocument/2006/relationships" xmlns:p="http://schemas.openxmlformats.org/presentationml/2006/main">
-  <p:tag name="ALIGNMENT_TARGET_X" val="65.27999877929688"/>
-</p:tagLst>
-</file>
-
-<file path=ppt/tags/tag168.xml><?xml version="1.0" encoding="utf-8"?>
-<p:tagLst xmlns:a="http://schemas.openxmlformats.org/drawingml/2006/main" xmlns:r="http://schemas.openxmlformats.org/officeDocument/2006/relationships" xmlns:p="http://schemas.openxmlformats.org/presentationml/2006/main">
-  <p:tag name="ALIGNMENT_TARGET_X" val="107.22000122070312"/>
-</p:tagLst>
-</file>
-
-<file path=ppt/tags/tag169.xml><?xml version="1.0" encoding="utf-8"?>
-<p:tagLst xmlns:a="http://schemas.openxmlformats.org/drawingml/2006/main" xmlns:r="http://schemas.openxmlformats.org/officeDocument/2006/relationships" xmlns:p="http://schemas.openxmlformats.org/presentationml/2006/main">
-  <p:tag name="ALIGNMENT_TARGET_X" val="136.5"/>
-</p:tagLst>
-</file>
-
-<file path=ppt/tags/tag17.xml><?xml version="1.0" encoding="utf-8"?>
-<p:tagLst xmlns:a="http://schemas.openxmlformats.org/drawingml/2006/main" xmlns:r="http://schemas.openxmlformats.org/officeDocument/2006/relationships" xmlns:p="http://schemas.openxmlformats.org/presentationml/2006/main">
-  <p:tag name="ALIGNMENT_TARGET_X" val="24.84000015258789"/>
-</p:tagLst>
-</file>
-
-<file path=ppt/tags/tag170.xml><?xml version="1.0" encoding="utf-8"?>
-<p:tagLst xmlns:a="http://schemas.openxmlformats.org/drawingml/2006/main" xmlns:r="http://schemas.openxmlformats.org/officeDocument/2006/relationships" xmlns:p="http://schemas.openxmlformats.org/presentationml/2006/main">
-  <p:tag name="ALIGNMENT_TARGET_X" val="293.9999656677246"/>
-</p:tagLst>
-</file>
-
-<file path=ppt/tags/tag171.xml><?xml version="1.0" encoding="utf-8"?>
-<p:tagLst xmlns:a="http://schemas.openxmlformats.org/drawingml/2006/main" xmlns:r="http://schemas.openxmlformats.org/officeDocument/2006/relationships" xmlns:p="http://schemas.openxmlformats.org/presentationml/2006/main">
-  <p:tag name="ALIGNMENT_TARGET_X" val="451.4999885559082"/>
-</p:tagLst>
-</file>
-
-<file path=ppt/tags/tag172.xml><?xml version="1.0" encoding="utf-8"?>
-<p:tagLst xmlns:a="http://schemas.openxmlformats.org/drawingml/2006/main" xmlns:r="http://schemas.openxmlformats.org/officeDocument/2006/relationships" xmlns:p="http://schemas.openxmlformats.org/presentationml/2006/main">
-  <p:tag name="ALIGNMENT_TARGET_X" val="609.0000495910645"/>
-</p:tagLst>
-</file>
-
-<file path=ppt/tags/tag173.xml><?xml version="1.0" encoding="utf-8"?>
-<p:tagLst xmlns:a="http://schemas.openxmlformats.org/drawingml/2006/main" xmlns:r="http://schemas.openxmlformats.org/officeDocument/2006/relationships" xmlns:p="http://schemas.openxmlformats.org/presentationml/2006/main">
-  <p:tag name="ALIGNMENT_TARGET_X" val="65.4000015258789"/>
-</p:tagLst>
-</file>
-
-<file path=ppt/tags/tag174.xml><?xml version="1.0" encoding="utf-8"?>
-<p:tagLst xmlns:a="http://schemas.openxmlformats.org/drawingml/2006/main" xmlns:r="http://schemas.openxmlformats.org/officeDocument/2006/relationships" xmlns:p="http://schemas.openxmlformats.org/presentationml/2006/main">
-  <p:tag name="ALIGNMENT_TARGET_X" val="821.2499504089355"/>
-</p:tagLst>
-</file>
-
-<file path=ppt/tags/tag175.xml><?xml version="1.0" encoding="utf-8"?>
-<p:tagLst xmlns:a="http://schemas.openxmlformats.org/drawingml/2006/main" xmlns:r="http://schemas.openxmlformats.org/officeDocument/2006/relationships" xmlns:p="http://schemas.openxmlformats.org/presentationml/2006/main">
-  <p:tag name="ALIGNMENT_TARGET_X" val="821.2500610351562"/>
-</p:tagLst>
-</file>
-
-<file path=ppt/tags/tag176.xml><?xml version="1.0" encoding="utf-8"?>
-<p:tagLst xmlns:a="http://schemas.openxmlformats.org/drawingml/2006/main" xmlns:r="http://schemas.openxmlformats.org/officeDocument/2006/relationships" xmlns:p="http://schemas.openxmlformats.org/presentationml/2006/main">
-  <p:tag name="ALIGNMENT_TARGET_X" val="65.27999877929688"/>
-</p:tagLst>
-</file>
-
-<file path=ppt/tags/tag177.xml><?xml version="1.0" encoding="utf-8"?>
-<p:tagLst xmlns:a="http://schemas.openxmlformats.org/drawingml/2006/main" xmlns:r="http://schemas.openxmlformats.org/officeDocument/2006/relationships" xmlns:p="http://schemas.openxmlformats.org/presentationml/2006/main">
-  <p:tag name="ALIGNMENT_TARGET_X" val="107.22000122070312"/>
-</p:tagLst>
-</file>
-
-<file path=ppt/tags/tag178.xml><?xml version="1.0" encoding="utf-8"?>
-<p:tagLst xmlns:a="http://schemas.openxmlformats.org/drawingml/2006/main" xmlns:r="http://schemas.openxmlformats.org/officeDocument/2006/relationships" xmlns:p="http://schemas.openxmlformats.org/presentationml/2006/main">
-  <p:tag name="ALIGNMENT_TARGET_X" val="136.5"/>
-</p:tagLst>
-</file>
-
-<file path=ppt/tags/tag179.xml><?xml version="1.0" encoding="utf-8"?>
-<p:tagLst xmlns:a="http://schemas.openxmlformats.org/drawingml/2006/main" xmlns:r="http://schemas.openxmlformats.org/officeDocument/2006/relationships" xmlns:p="http://schemas.openxmlformats.org/presentationml/2006/main">
-  <p:tag name="ALIGNMENT_TARGET_X" val="294.0000457763672"/>
-</p:tagLst>
-</file>
-
-<file path=ppt/tags/tag18.xml><?xml version="1.0" encoding="utf-8"?>
-<p:tagLst xmlns:a="http://schemas.openxmlformats.org/drawingml/2006/main" xmlns:r="http://schemas.openxmlformats.org/officeDocument/2006/relationships" xmlns:p="http://schemas.openxmlformats.org/presentationml/2006/main">
-  <p:tag name="ALIGNMENT_TARGET_X" val="24.899999618530273"/>
-</p:tagLst>
-</file>
-
-<file path=ppt/tags/tag180.xml><?xml version="1.0" encoding="utf-8"?>
-<p:tagLst xmlns:a="http://schemas.openxmlformats.org/drawingml/2006/main" xmlns:r="http://schemas.openxmlformats.org/officeDocument/2006/relationships" xmlns:p="http://schemas.openxmlformats.org/presentationml/2006/main">
-  <p:tag name="ALIGNMENT_TARGET_X" val="451.50000762939453"/>
-</p:tagLst>
-</file>
-
-<file path=ppt/tags/tag181.xml><?xml version="1.0" encoding="utf-8"?>
-<p:tagLst xmlns:a="http://schemas.openxmlformats.org/drawingml/2006/main" xmlns:r="http://schemas.openxmlformats.org/officeDocument/2006/relationships" xmlns:p="http://schemas.openxmlformats.org/presentationml/2006/main">
-  <p:tag name="ALIGNMENT_TARGET_X" val="609.0000076293945"/>
-</p:tagLst>
-</file>
-
-<file path=ppt/tags/tag182.xml><?xml version="1.0" encoding="utf-8"?>
-<p:tagLst xmlns:a="http://schemas.openxmlformats.org/drawingml/2006/main" xmlns:r="http://schemas.openxmlformats.org/officeDocument/2006/relationships" xmlns:p="http://schemas.openxmlformats.org/presentationml/2006/main">
-  <p:tag name="ALIGNMENT_TARGET_X" val="372.75"/>
-</p:tagLst>
-</file>
-
-<file path=ppt/tags/tag183.xml><?xml version="1.0" encoding="utf-8"?>
-<p:tagLst xmlns:a="http://schemas.openxmlformats.org/drawingml/2006/main" xmlns:r="http://schemas.openxmlformats.org/officeDocument/2006/relationships" xmlns:p="http://schemas.openxmlformats.org/presentationml/2006/main">
-  <p:tag name="ALIGNMENT_TARGET_X" val="65.4000015258789"/>
-</p:tagLst>
-</file>
-
-<file path=ppt/tags/tag184.xml><?xml version="1.0" encoding="utf-8"?>
-<p:tagLst xmlns:a="http://schemas.openxmlformats.org/drawingml/2006/main" xmlns:r="http://schemas.openxmlformats.org/officeDocument/2006/relationships" xmlns:p="http://schemas.openxmlformats.org/presentationml/2006/main">
-  <p:tag name="ALIGNMENT_TARGET_X" val="821.2499885559082"/>
-</p:tagLst>
-</file>
-
-<file path=ppt/tags/tag185.xml><?xml version="1.0" encoding="utf-8"?>
-<p:tagLst xmlns:a="http://schemas.openxmlformats.org/drawingml/2006/main" xmlns:r="http://schemas.openxmlformats.org/officeDocument/2006/relationships" xmlns:p="http://schemas.openxmlformats.org/presentationml/2006/main">
-  <p:tag name="ALIGNMENT_TARGET_X" val="821.2500610351562"/>
-</p:tagLst>
-</file>
-
-<file path=ppt/tags/tag186.xml><?xml version="1.0" encoding="utf-8"?>
-<p:tagLst xmlns:a="http://schemas.openxmlformats.org/drawingml/2006/main" xmlns:r="http://schemas.openxmlformats.org/officeDocument/2006/relationships" xmlns:p="http://schemas.openxmlformats.org/presentationml/2006/main">
-  <p:tag name="ALIGNMENT_TARGET_X" val="59.4900016784668"/>
-</p:tagLst>
-</file>
-
-<file path=ppt/tags/tag187.xml><?xml version="1.0" encoding="utf-8"?>
-<p:tagLst xmlns:a="http://schemas.openxmlformats.org/drawingml/2006/main" xmlns:r="http://schemas.openxmlformats.org/officeDocument/2006/relationships" xmlns:p="http://schemas.openxmlformats.org/presentationml/2006/main">
-  <p:tag name="ALIGNMENT_TARGET_X" val="46.7400016784668"/>
-</p:tagLst>
-</file>
-
-<file path=ppt/tags/tag188.xml><?xml version="1.0" encoding="utf-8"?>
-<p:tagLst xmlns:a="http://schemas.openxmlformats.org/drawingml/2006/main" xmlns:r="http://schemas.openxmlformats.org/officeDocument/2006/relationships" xmlns:p="http://schemas.openxmlformats.org/presentationml/2006/main">
-  <p:tag name="ALIGNMENT_TARGET_X" val="47.54999923706055"/>
-</p:tagLst>
-</file>
-
-<file path=ppt/tags/tag189.xml><?xml version="1.0" encoding="utf-8"?>
-<p:tagLst xmlns:a="http://schemas.openxmlformats.org/drawingml/2006/main" xmlns:r="http://schemas.openxmlformats.org/officeDocument/2006/relationships" xmlns:p="http://schemas.openxmlformats.org/presentationml/2006/main">
-  <p:tag name="ALIGNMENT_TARGET_X" val="912.4500274658203"/>
-</p:tagLst>
-</file>
-
-<file path=ppt/tags/tag19.xml><?xml version="1.0" encoding="utf-8"?>
-<p:tagLst xmlns:a="http://schemas.openxmlformats.org/drawingml/2006/main" xmlns:r="http://schemas.openxmlformats.org/officeDocument/2006/relationships" xmlns:p="http://schemas.openxmlformats.org/presentationml/2006/main">
-  <p:tag name="ALIGNMENT_TARGET_X" val="245.27999877929688"/>
-</p:tagLst>
-</file>
-
-<file path=ppt/tags/tag190.xml><?xml version="1.0" encoding="utf-8"?>
-<p:tagLst xmlns:a="http://schemas.openxmlformats.org/drawingml/2006/main" xmlns:r="http://schemas.openxmlformats.org/officeDocument/2006/relationships" xmlns:p="http://schemas.openxmlformats.org/presentationml/2006/main">
-  <p:tag name="ALIGNMENT_TARGET_X" val="65.27999877929688"/>
-</p:tagLst>
-</file>
-
-<file path=ppt/tags/tag191.xml><?xml version="1.0" encoding="utf-8"?>
-<p:tagLst xmlns:a="http://schemas.openxmlformats.org/drawingml/2006/main" xmlns:r="http://schemas.openxmlformats.org/officeDocument/2006/relationships" xmlns:p="http://schemas.openxmlformats.org/presentationml/2006/main">
-  <p:tag name="ALIGNMENT_TARGET_X" val="107.22000122070312"/>
-</p:tagLst>
-</file>
-
-<file path=ppt/tags/tag192.xml><?xml version="1.0" encoding="utf-8"?>
-<p:tagLst xmlns:a="http://schemas.openxmlformats.org/drawingml/2006/main" xmlns:r="http://schemas.openxmlformats.org/officeDocument/2006/relationships" xmlns:p="http://schemas.openxmlformats.org/presentationml/2006/main">
-  <p:tag name="ALIGNMENT_TARGET_X" val="156.75"/>
-</p:tagLst>
-</file>
-
-<file path=ppt/tags/tag193.xml><?xml version="1.0" encoding="utf-8"?>
-<p:tagLst xmlns:a="http://schemas.openxmlformats.org/drawingml/2006/main" xmlns:r="http://schemas.openxmlformats.org/officeDocument/2006/relationships" xmlns:p="http://schemas.openxmlformats.org/presentationml/2006/main">
-  <p:tag name="ALIGNMENT_TARGET_X" val="379.49996185302734"/>
-</p:tagLst>
-</file>
-
-<file path=ppt/tags/tag194.xml><?xml version="1.0" encoding="utf-8"?>
-<p:tagLst xmlns:a="http://schemas.openxmlformats.org/drawingml/2006/main" xmlns:r="http://schemas.openxmlformats.org/officeDocument/2006/relationships" xmlns:p="http://schemas.openxmlformats.org/presentationml/2006/main">
-  <p:tag name="ALIGNMENT_TARGET_X" val="608.2499885559082"/>
-</p:tagLst>
-</file>
-
-<file path=ppt/tags/tag195.xml><?xml version="1.0" encoding="utf-8"?>
-<p:tagLst xmlns:a="http://schemas.openxmlformats.org/drawingml/2006/main" xmlns:r="http://schemas.openxmlformats.org/officeDocument/2006/relationships" xmlns:p="http://schemas.openxmlformats.org/presentationml/2006/main">
-  <p:tag name="ALIGNMENT_TARGET_X" val="65.4000015258789"/>
-</p:tagLst>
-</file>
-
-<file path=ppt/tags/tag196.xml><?xml version="1.0" encoding="utf-8"?>
-<p:tagLst xmlns:a="http://schemas.openxmlformats.org/drawingml/2006/main" xmlns:r="http://schemas.openxmlformats.org/officeDocument/2006/relationships" xmlns:p="http://schemas.openxmlformats.org/presentationml/2006/main">
-  <p:tag name="ALIGNMENT_TARGET_X" val="821.2500047683716"/>
-</p:tagLst>
-</file>
-
-<file path=ppt/tags/tag197.xml><?xml version="1.0" encoding="utf-8"?>
-<p:tagLst xmlns:a="http://schemas.openxmlformats.org/drawingml/2006/main" xmlns:r="http://schemas.openxmlformats.org/officeDocument/2006/relationships" xmlns:p="http://schemas.openxmlformats.org/presentationml/2006/main">
-  <p:tag name="ALIGNMENT_TARGET_X" val="821.2499465942383"/>
-</p:tagLst>
-</file>
-
-<file path=ppt/tags/tag198.xml><?xml version="1.0" encoding="utf-8"?>
-<p:tagLst xmlns:a="http://schemas.openxmlformats.org/drawingml/2006/main" xmlns:r="http://schemas.openxmlformats.org/officeDocument/2006/relationships" xmlns:p="http://schemas.openxmlformats.org/presentationml/2006/main">
-  <p:tag name="ALIGNMENT_TARGET_X" val="65.27999877929688"/>
-</p:tagLst>
-</file>
-
-<file path=ppt/tags/tag199.xml><?xml version="1.0" encoding="utf-8"?>
-<p:tagLst xmlns:a="http://schemas.openxmlformats.org/drawingml/2006/main" xmlns:r="http://schemas.openxmlformats.org/officeDocument/2006/relationships" xmlns:p="http://schemas.openxmlformats.org/presentationml/2006/main">
-  <p:tag name="ALIGNMENT_TARGET_X" val="107.22000122070312"/>
-</p:tagLst>
-</file>
-
-<file path=ppt/tags/tag2.xml><?xml version="1.0" encoding="utf-8"?>
-<p:tagLst xmlns:a="http://schemas.openxmlformats.org/drawingml/2006/main" xmlns:r="http://schemas.openxmlformats.org/officeDocument/2006/relationships" xmlns:p="http://schemas.openxmlformats.org/presentationml/2006/main">
-  <p:tag name="ALIGNMENT_TARGET_X" val="912.4499855041504"/>
-</p:tagLst>
-</file>
-
-<file path=ppt/tags/tag20.xml><?xml version="1.0" encoding="utf-8"?>
-<p:tagLst xmlns:a="http://schemas.openxmlformats.org/drawingml/2006/main" xmlns:r="http://schemas.openxmlformats.org/officeDocument/2006/relationships" xmlns:p="http://schemas.openxmlformats.org/presentationml/2006/main">
-  <p:tag name="ALIGNMENT_TARGET_X" val="231.77999877929688"/>
-</p:tagLst>
-</file>
-
-<file path=ppt/tags/tag200.xml><?xml version="1.0" encoding="utf-8"?>
-<p:tagLst xmlns:a="http://schemas.openxmlformats.org/drawingml/2006/main" xmlns:r="http://schemas.openxmlformats.org/officeDocument/2006/relationships" xmlns:p="http://schemas.openxmlformats.org/presentationml/2006/main">
-  <p:tag name="ALIGNMENT_TARGET_X" val="122.25003814697266"/>
-</p:tagLst>
-</file>
-
-<file path=ppt/tags/tag201.xml><?xml version="1.0" encoding="utf-8"?>
-<p:tagLst xmlns:a="http://schemas.openxmlformats.org/drawingml/2006/main" xmlns:r="http://schemas.openxmlformats.org/officeDocument/2006/relationships" xmlns:p="http://schemas.openxmlformats.org/presentationml/2006/main">
-  <p:tag name="ALIGNMENT_TARGET_X" val="324.00000762939453"/>
-</p:tagLst>
-</file>
-
-<file path=ppt/tags/tag202.xml><?xml version="1.0" encoding="utf-8"?>
-<p:tagLst xmlns:a="http://schemas.openxmlformats.org/drawingml/2006/main" xmlns:r="http://schemas.openxmlformats.org/officeDocument/2006/relationships" xmlns:p="http://schemas.openxmlformats.org/presentationml/2006/main">
-  <p:tag name="ALIGNMENT_TARGET_X" val="323.99996185302734"/>
-</p:tagLst>
-</file>
-
-<file path=ppt/tags/tag203.xml><?xml version="1.0" encoding="utf-8"?>
-<p:tagLst xmlns:a="http://schemas.openxmlformats.org/drawingml/2006/main" xmlns:r="http://schemas.openxmlformats.org/officeDocument/2006/relationships" xmlns:p="http://schemas.openxmlformats.org/presentationml/2006/main">
-  <p:tag name="ALIGNMENT_TARGET_X" val="570.0000495910645"/>
-</p:tagLst>
-</file>
-
-<file path=ppt/tags/tag204.xml><?xml version="1.0" encoding="utf-8"?>
-<p:tagLst xmlns:a="http://schemas.openxmlformats.org/drawingml/2006/main" xmlns:r="http://schemas.openxmlformats.org/officeDocument/2006/relationships" xmlns:p="http://schemas.openxmlformats.org/presentationml/2006/main">
-  <p:tag name="ALIGNMENT_TARGET_X" val="570.0000076293945"/>
-</p:tagLst>
-</file>
-
-<file path=ppt/tags/tag205.xml><?xml version="1.0" encoding="utf-8"?>
-<p:tagLst xmlns:a="http://schemas.openxmlformats.org/drawingml/2006/main" xmlns:r="http://schemas.openxmlformats.org/officeDocument/2006/relationships" xmlns:p="http://schemas.openxmlformats.org/presentationml/2006/main">
-  <p:tag name="ALIGNMENT_TARGET_X" val="65.4000015258789"/>
-</p:tagLst>
-</file>
-
-<file path=ppt/tags/tag206.xml><?xml version="1.0" encoding="utf-8"?>
-<p:tagLst xmlns:a="http://schemas.openxmlformats.org/drawingml/2006/main" xmlns:r="http://schemas.openxmlformats.org/officeDocument/2006/relationships" xmlns:p="http://schemas.openxmlformats.org/presentationml/2006/main">
-  <p:tag name="ALIGNMENT_TARGET_X" val="821.2500076293945"/>
-</p:tagLst>
-</file>
-
-<file path=ppt/tags/tag207.xml><?xml version="1.0" encoding="utf-8"?>
-<p:tagLst xmlns:a="http://schemas.openxmlformats.org/drawingml/2006/main" xmlns:r="http://schemas.openxmlformats.org/officeDocument/2006/relationships" xmlns:p="http://schemas.openxmlformats.org/presentationml/2006/main">
-  <p:tag name="ALIGNMENT_TARGET_X" val="821.2499923706055"/>
-</p:tagLst>
-</file>
-
-<file path=ppt/tags/tag208.xml><?xml version="1.0" encoding="utf-8"?>
-<p:tagLst xmlns:a="http://schemas.openxmlformats.org/drawingml/2006/main" xmlns:r="http://schemas.openxmlformats.org/officeDocument/2006/relationships" xmlns:p="http://schemas.openxmlformats.org/presentationml/2006/main">
-  <p:tag name="ALIGNMENT_TARGET_X" val="59.4900016784668"/>
-</p:tagLst>
-</file>
-
-<file path=ppt/tags/tag209.xml><?xml version="1.0" encoding="utf-8"?>
-<p:tagLst xmlns:a="http://schemas.openxmlformats.org/drawingml/2006/main" xmlns:r="http://schemas.openxmlformats.org/officeDocument/2006/relationships" xmlns:p="http://schemas.openxmlformats.org/presentationml/2006/main">
-  <p:tag name="ALIGNMENT_TARGET_X" val="46.7400016784668"/>
-</p:tagLst>
-</file>
-
-<file path=ppt/tags/tag21.xml><?xml version="1.0" encoding="utf-8"?>
-<p:tagLst xmlns:a="http://schemas.openxmlformats.org/drawingml/2006/main" xmlns:r="http://schemas.openxmlformats.org/officeDocument/2006/relationships" xmlns:p="http://schemas.openxmlformats.org/presentationml/2006/main">
-  <p:tag name="ALIGNMENT_TARGET_X" val="231.89999389648438"/>
-</p:tagLst>
-</file>
-
-<file path=ppt/tags/tag210.xml><?xml version="1.0" encoding="utf-8"?>
-<p:tagLst xmlns:a="http://schemas.openxmlformats.org/drawingml/2006/main" xmlns:r="http://schemas.openxmlformats.org/officeDocument/2006/relationships" xmlns:p="http://schemas.openxmlformats.org/presentationml/2006/main">
-  <p:tag name="ALIGNMENT_TARGET_X" val="47.54999923706055"/>
-</p:tagLst>
-</file>
-
-<file path=ppt/tags/tag211.xml><?xml version="1.0" encoding="utf-8"?>
-<p:tagLst xmlns:a="http://schemas.openxmlformats.org/drawingml/2006/main" xmlns:r="http://schemas.openxmlformats.org/officeDocument/2006/relationships" xmlns:p="http://schemas.openxmlformats.org/presentationml/2006/main">
-  <p:tag name="ALIGNMENT_TARGET_X" val="912.4500274658203"/>
-</p:tagLst>
-</file>
-
-<file path=ppt/tags/tag212.xml><?xml version="1.0" encoding="utf-8"?>
-<p:tagLst xmlns:a="http://schemas.openxmlformats.org/drawingml/2006/main" xmlns:r="http://schemas.openxmlformats.org/officeDocument/2006/relationships" xmlns:p="http://schemas.openxmlformats.org/presentationml/2006/main">
-  <p:tag name="ALIGNMENT_TARGET_X" val="65.27999877929688"/>
-</p:tagLst>
-</file>
-
-<file path=ppt/tags/tag213.xml><?xml version="1.0" encoding="utf-8"?>
-<p:tagLst xmlns:a="http://schemas.openxmlformats.org/drawingml/2006/main" xmlns:r="http://schemas.openxmlformats.org/officeDocument/2006/relationships" xmlns:p="http://schemas.openxmlformats.org/presentationml/2006/main">
-  <p:tag name="ALIGNMENT_TARGET_X" val="107.22000122070312"/>
-</p:tagLst>
-</file>
-
-<file path=ppt/tags/tag214.xml><?xml version="1.0" encoding="utf-8"?>
-<p:tagLst xmlns:a="http://schemas.openxmlformats.org/drawingml/2006/main" xmlns:r="http://schemas.openxmlformats.org/officeDocument/2006/relationships" xmlns:p="http://schemas.openxmlformats.org/presentationml/2006/main">
-  <p:tag name="ALIGNMENT_TARGET_X" val="189.75003814697266"/>
-</p:tagLst>
-</file>
-
-<file path=ppt/tags/tag215.xml><?xml version="1.0" encoding="utf-8"?>
-<p:tagLst xmlns:a="http://schemas.openxmlformats.org/drawingml/2006/main" xmlns:r="http://schemas.openxmlformats.org/officeDocument/2006/relationships" xmlns:p="http://schemas.openxmlformats.org/presentationml/2006/main">
-  <p:tag name="ALIGNMENT_TARGET_X" val="189.75000381469727"/>
-</p:tagLst>
-</file>
-
-<file path=ppt/tags/tag216.xml><?xml version="1.0" encoding="utf-8"?>
-<p:tagLst xmlns:a="http://schemas.openxmlformats.org/drawingml/2006/main" xmlns:r="http://schemas.openxmlformats.org/officeDocument/2006/relationships" xmlns:p="http://schemas.openxmlformats.org/presentationml/2006/main">
-  <p:tag name="ALIGNMENT_TARGET_X" val="520.5000381469727"/>
-</p:tagLst>
-</file>
-
-<file path=ppt/tags/tag217.xml><?xml version="1.0" encoding="utf-8"?>
-<p:tagLst xmlns:a="http://schemas.openxmlformats.org/drawingml/2006/main" xmlns:r="http://schemas.openxmlformats.org/officeDocument/2006/relationships" xmlns:p="http://schemas.openxmlformats.org/presentationml/2006/main">
-  <p:tag name="ALIGNMENT_TARGET_X" val="520.5000038146973"/>
-</p:tagLst>
-</file>
-
-<file path=ppt/tags/tag218.xml><?xml version="1.0" encoding="utf-8"?>
-<p:tagLst xmlns:a="http://schemas.openxmlformats.org/drawingml/2006/main" xmlns:r="http://schemas.openxmlformats.org/officeDocument/2006/relationships" xmlns:p="http://schemas.openxmlformats.org/presentationml/2006/main">
-  <p:tag name="ALIGNMENT_TARGET_X" val="65.4000015258789"/>
-</p:tagLst>
-</file>
-
-<file path=ppt/tags/tag219.xml><?xml version="1.0" encoding="utf-8"?>
-<p:tagLst xmlns:a="http://schemas.openxmlformats.org/drawingml/2006/main" xmlns:r="http://schemas.openxmlformats.org/officeDocument/2006/relationships" xmlns:p="http://schemas.openxmlformats.org/presentationml/2006/main">
-  <p:tag name="ALIGNMENT_TARGET_X" val="821.2500286102295"/>
-</p:tagLst>
-</file>
-
-<file path=ppt/tags/tag22.xml><?xml version="1.0" encoding="utf-8"?>
-<p:tagLst xmlns:a="http://schemas.openxmlformats.org/drawingml/2006/main" xmlns:r="http://schemas.openxmlformats.org/officeDocument/2006/relationships" xmlns:p="http://schemas.openxmlformats.org/presentationml/2006/main">
-  <p:tag name="ALIGNMENT_TARGET_X" val="231.77999877929688"/>
-</p:tagLst>
-</file>
-
-<file path=ppt/tags/tag220.xml><?xml version="1.0" encoding="utf-8"?>
-<p:tagLst xmlns:a="http://schemas.openxmlformats.org/drawingml/2006/main" xmlns:r="http://schemas.openxmlformats.org/officeDocument/2006/relationships" xmlns:p="http://schemas.openxmlformats.org/presentationml/2006/main">
-  <p:tag name="ALIGNMENT_TARGET_X" val="821.2499465942383"/>
-</p:tagLst>
-</file>
-
-<file path=ppt/tags/tag221.xml><?xml version="1.0" encoding="utf-8"?>
-<p:tagLst xmlns:a="http://schemas.openxmlformats.org/drawingml/2006/main" xmlns:r="http://schemas.openxmlformats.org/officeDocument/2006/relationships" xmlns:p="http://schemas.openxmlformats.org/presentationml/2006/main">
-  <p:tag name="ALIGNMENT_TARGET_X" val="65.27999877929688"/>
-</p:tagLst>
-</file>
-
-<file path=ppt/tags/tag222.xml><?xml version="1.0" encoding="utf-8"?>
-<p:tagLst xmlns:a="http://schemas.openxmlformats.org/drawingml/2006/main" xmlns:r="http://schemas.openxmlformats.org/officeDocument/2006/relationships" xmlns:p="http://schemas.openxmlformats.org/presentationml/2006/main">
-  <p:tag name="ALIGNMENT_TARGET_X" val="107.22000122070312"/>
-</p:tagLst>
-</file>
-
-<file path=ppt/tags/tag223.xml><?xml version="1.0" encoding="utf-8"?>
-<p:tagLst xmlns:a="http://schemas.openxmlformats.org/drawingml/2006/main" xmlns:r="http://schemas.openxmlformats.org/officeDocument/2006/relationships" xmlns:p="http://schemas.openxmlformats.org/presentationml/2006/main">
-  <p:tag name="ALIGNMENT_TARGET_X" val="81.83999633789062"/>
-</p:tagLst>
-</file>
-
-<file path=ppt/tags/tag224.xml><?xml version="1.0" encoding="utf-8"?>
-<p:tagLst xmlns:a="http://schemas.openxmlformats.org/drawingml/2006/main" xmlns:r="http://schemas.openxmlformats.org/officeDocument/2006/relationships" xmlns:p="http://schemas.openxmlformats.org/presentationml/2006/main">
-  <p:tag name="ALIGNMENT_TARGET_X" val="159"/>
-</p:tagLst>
-</file>
-
-<file path=ppt/tags/tag225.xml><?xml version="1.0" encoding="utf-8"?>
-<p:tagLst xmlns:a="http://schemas.openxmlformats.org/drawingml/2006/main" xmlns:r="http://schemas.openxmlformats.org/officeDocument/2006/relationships" xmlns:p="http://schemas.openxmlformats.org/presentationml/2006/main">
-  <p:tag name="ALIGNMENT_TARGET_X" val="308.9999885559082"/>
-</p:tagLst>
-</file>
-
-<file path=ppt/tags/tag226.xml><?xml version="1.0" encoding="utf-8"?>
-<p:tagLst xmlns:a="http://schemas.openxmlformats.org/drawingml/2006/main" xmlns:r="http://schemas.openxmlformats.org/officeDocument/2006/relationships" xmlns:p="http://schemas.openxmlformats.org/presentationml/2006/main">
-  <p:tag name="ALIGNMENT_TARGET_X" val="458.9999580383301"/>
-</p:tagLst>
-</file>
-
-<file path=ppt/tags/tag227.xml><?xml version="1.0" encoding="utf-8"?>
-<p:tagLst xmlns:a="http://schemas.openxmlformats.org/drawingml/2006/main" xmlns:r="http://schemas.openxmlformats.org/officeDocument/2006/relationships" xmlns:p="http://schemas.openxmlformats.org/presentationml/2006/main">
-  <p:tag name="ALIGNMENT_TARGET_X" val="608.9999771118164"/>
-</p:tagLst>
-</file>
-
-<file path=ppt/tags/tag228.xml><?xml version="1.0" encoding="utf-8"?>
-<p:tagLst xmlns:a="http://schemas.openxmlformats.org/drawingml/2006/main" xmlns:r="http://schemas.openxmlformats.org/officeDocument/2006/relationships" xmlns:p="http://schemas.openxmlformats.org/presentationml/2006/main">
-  <p:tag name="ALIGNMENT_TARGET_X" val="65.4000015258789"/>
-</p:tagLst>
-</file>
-
-<file path=ppt/tags/tag229.xml><?xml version="1.0" encoding="utf-8"?>
-<p:tagLst xmlns:a="http://schemas.openxmlformats.org/drawingml/2006/main" xmlns:r="http://schemas.openxmlformats.org/officeDocument/2006/relationships" xmlns:p="http://schemas.openxmlformats.org/presentationml/2006/main">
-  <p:tag name="ALIGNMENT_TARGET_X" val="821.2500047683716"/>
-</p:tagLst>
-</file>
-
-<file path=ppt/tags/tag23.xml><?xml version="1.0" encoding="utf-8"?>
-<p:tagLst xmlns:a="http://schemas.openxmlformats.org/drawingml/2006/main" xmlns:r="http://schemas.openxmlformats.org/officeDocument/2006/relationships" xmlns:p="http://schemas.openxmlformats.org/presentationml/2006/main">
-  <p:tag name="ALIGNMENT_TARGET_X" val="231.89999389648438"/>
-</p:tagLst>
-</file>
-
-<file path=ppt/tags/tag230.xml><?xml version="1.0" encoding="utf-8"?>
-<p:tagLst xmlns:a="http://schemas.openxmlformats.org/drawingml/2006/main" xmlns:r="http://schemas.openxmlformats.org/officeDocument/2006/relationships" xmlns:p="http://schemas.openxmlformats.org/presentationml/2006/main">
-  <p:tag name="ALIGNMENT_TARGET_X" val="821.2500152587891"/>
-</p:tagLst>
-</file>
-
-<file path=ppt/tags/tag231.xml><?xml version="1.0" encoding="utf-8"?>
-<p:tagLst xmlns:a="http://schemas.openxmlformats.org/drawingml/2006/main" xmlns:r="http://schemas.openxmlformats.org/officeDocument/2006/relationships" xmlns:p="http://schemas.openxmlformats.org/presentationml/2006/main">
-  <p:tag name="ALIGNMENT_TARGET_X" val="59.4900016784668"/>
-</p:tagLst>
-</file>
-
-<file path=ppt/tags/tag232.xml><?xml version="1.0" encoding="utf-8"?>
-<p:tagLst xmlns:a="http://schemas.openxmlformats.org/drawingml/2006/main" xmlns:r="http://schemas.openxmlformats.org/officeDocument/2006/relationships" xmlns:p="http://schemas.openxmlformats.org/presentationml/2006/main">
-  <p:tag name="ALIGNMENT_TARGET_X" val="46.7400016784668"/>
-</p:tagLst>
-</file>
-
-<file path=ppt/tags/tag24.xml><?xml version="1.0" encoding="utf-8"?>
-<p:tagLst xmlns:a="http://schemas.openxmlformats.org/drawingml/2006/main" xmlns:r="http://schemas.openxmlformats.org/officeDocument/2006/relationships" xmlns:p="http://schemas.openxmlformats.org/presentationml/2006/main">
-  <p:tag name="ALIGNMENT_TARGET_X" val="510.7799987792969"/>
-</p:tagLst>
-</file>
-
-<file path=ppt/tags/tag25.xml><?xml version="1.0" encoding="utf-8"?>
-<p:tagLst xmlns:a="http://schemas.openxmlformats.org/drawingml/2006/main" xmlns:r="http://schemas.openxmlformats.org/officeDocument/2006/relationships" xmlns:p="http://schemas.openxmlformats.org/presentationml/2006/main">
-  <p:tag name="ALIGNMENT_TARGET_X" val="510.8399963378906"/>
-</p:tagLst>
-</file>
-
-<file path=ppt/tags/tag26.xml><?xml version="1.0" encoding="utf-8"?>
-<p:tagLst xmlns:a="http://schemas.openxmlformats.org/drawingml/2006/main" xmlns:r="http://schemas.openxmlformats.org/officeDocument/2006/relationships" xmlns:p="http://schemas.openxmlformats.org/presentationml/2006/main">
-  <p:tag name="ALIGNMENT_TARGET_X" val="738.780029296875"/>
-</p:tagLst>
-</file>
-
-<file path=ppt/tags/tag27.xml><?xml version="1.0" encoding="utf-8"?>
-<p:tagLst xmlns:a="http://schemas.openxmlformats.org/drawingml/2006/main" xmlns:r="http://schemas.openxmlformats.org/officeDocument/2006/relationships" xmlns:p="http://schemas.openxmlformats.org/presentationml/2006/main">
-  <p:tag name="ALIGNMENT_TARGET_X" val="738.9000244140625"/>
-</p:tagLst>
-</file>
-
-<file path=ppt/tags/tag28.xml><?xml version="1.0" encoding="utf-8"?>
-<p:tagLst xmlns:a="http://schemas.openxmlformats.org/drawingml/2006/main" xmlns:r="http://schemas.openxmlformats.org/officeDocument/2006/relationships" xmlns:p="http://schemas.openxmlformats.org/presentationml/2006/main">
-  <p:tag name="ALIGNMENT_TARGET_X" val="59.279998779296875"/>
-</p:tagLst>
-</file>
-
-<file path=ppt/tags/tag29.xml><?xml version="1.0" encoding="utf-8"?>
-<p:tagLst xmlns:a="http://schemas.openxmlformats.org/drawingml/2006/main" xmlns:r="http://schemas.openxmlformats.org/officeDocument/2006/relationships" xmlns:p="http://schemas.openxmlformats.org/presentationml/2006/main">
-  <p:tag name="ALIGNMENT_TARGET_X" val="39.84000015258789"/>
-</p:tagLst>
-</file>
-
-<file path=ppt/tags/tag3.xml><?xml version="1.0" encoding="utf-8"?>
-<p:tagLst xmlns:a="http://schemas.openxmlformats.org/drawingml/2006/main" xmlns:r="http://schemas.openxmlformats.org/officeDocument/2006/relationships" xmlns:p="http://schemas.openxmlformats.org/presentationml/2006/main">
-  <p:tag name="ALIGNMENT_TARGET_X" val="46.709999084472656"/>
-</p:tagLst>
-</file>
-
-<file path=ppt/tags/tag30.xml><?xml version="1.0" encoding="utf-8"?>
-<p:tagLst xmlns:a="http://schemas.openxmlformats.org/drawingml/2006/main" xmlns:r="http://schemas.openxmlformats.org/officeDocument/2006/relationships" xmlns:p="http://schemas.openxmlformats.org/presentationml/2006/main">
-  <p:tag name="ALIGNMENT_TARGET_X" val="39.900001525878906"/>
-</p:tagLst>
-</file>
-
-<file path=ppt/tags/tag31.xml><?xml version="1.0" encoding="utf-8"?>
-<p:tagLst xmlns:a="http://schemas.openxmlformats.org/drawingml/2006/main" xmlns:r="http://schemas.openxmlformats.org/officeDocument/2006/relationships" xmlns:p="http://schemas.openxmlformats.org/presentationml/2006/main">
-  <p:tag name="ALIGNMENT_TARGET_X" val="204.83999633789062"/>
-</p:tagLst>
-</file>
-
-<file path=ppt/tags/tag32.xml><?xml version="1.0" encoding="utf-8"?>
-<p:tagLst xmlns:a="http://schemas.openxmlformats.org/drawingml/2006/main" xmlns:r="http://schemas.openxmlformats.org/officeDocument/2006/relationships" xmlns:p="http://schemas.openxmlformats.org/presentationml/2006/main">
-  <p:tag name="ALIGNMENT_TARGET_X" val="204.89999389648438"/>
-</p:tagLst>
-</file>
-
-<file path=ppt/tags/tag33.xml><?xml version="1.0" encoding="utf-8"?>
-<p:tagLst xmlns:a="http://schemas.openxmlformats.org/drawingml/2006/main" xmlns:r="http://schemas.openxmlformats.org/officeDocument/2006/relationships" xmlns:p="http://schemas.openxmlformats.org/presentationml/2006/main">
-  <p:tag name="ALIGNMENT_TARGET_X" val="414.8399963378906"/>
-</p:tagLst>
-</file>
-
-<file path=ppt/tags/tag34.xml><?xml version="1.0" encoding="utf-8"?>
-<p:tagLst xmlns:a="http://schemas.openxmlformats.org/drawingml/2006/main" xmlns:r="http://schemas.openxmlformats.org/officeDocument/2006/relationships" xmlns:p="http://schemas.openxmlformats.org/presentationml/2006/main">
-  <p:tag name="ALIGNMENT_TARGET_X" val="414.8999938964844"/>
-</p:tagLst>
-</file>
-
-<file path=ppt/tags/tag35.xml><?xml version="1.0" encoding="utf-8"?>
-<p:tagLst xmlns:a="http://schemas.openxmlformats.org/drawingml/2006/main" xmlns:r="http://schemas.openxmlformats.org/officeDocument/2006/relationships" xmlns:p="http://schemas.openxmlformats.org/presentationml/2006/main">
-  <p:tag name="ALIGNMENT_TARGET_X" val="465"/>
-</p:tagLst>
-</file>
-
-<file path=ppt/tags/tag36.xml><?xml version="1.0" encoding="utf-8"?>
-<p:tagLst xmlns:a="http://schemas.openxmlformats.org/drawingml/2006/main" xmlns:r="http://schemas.openxmlformats.org/officeDocument/2006/relationships" xmlns:p="http://schemas.openxmlformats.org/presentationml/2006/main">
-  <p:tag name="ALIGNMENT_TARGET_X" val="284.99999237060547"/>
-</p:tagLst>
-</file>
-
-<file path=ppt/tags/tag37.xml><?xml version="1.0" encoding="utf-8"?>
-<p:tagLst xmlns:a="http://schemas.openxmlformats.org/drawingml/2006/main" xmlns:r="http://schemas.openxmlformats.org/officeDocument/2006/relationships" xmlns:p="http://schemas.openxmlformats.org/presentationml/2006/main">
-  <p:tag name="ALIGNMENT_TARGET_X" val="414.8999938964844"/>
-</p:tagLst>
-</file>
-
-<file path=ppt/tags/tag38.xml><?xml version="1.0" encoding="utf-8"?>
-<p:tagLst xmlns:a="http://schemas.openxmlformats.org/drawingml/2006/main" xmlns:r="http://schemas.openxmlformats.org/officeDocument/2006/relationships" xmlns:p="http://schemas.openxmlformats.org/presentationml/2006/main">
-  <p:tag name="ALIGNMENT_TARGET_X" val="707.280029296875"/>
-</p:tagLst>
-</file>
-
-<file path=ppt/tags/tag39.xml><?xml version="1.0" encoding="utf-8"?>
-<p:tagLst xmlns:a="http://schemas.openxmlformats.org/drawingml/2006/main" xmlns:r="http://schemas.openxmlformats.org/officeDocument/2006/relationships" xmlns:p="http://schemas.openxmlformats.org/presentationml/2006/main">
-  <p:tag name="ALIGNMENT_TARGET_X" val="677.280029296875"/>
-</p:tagLst>
-</file>
-
-<file path=ppt/tags/tag4.xml><?xml version="1.0" encoding="utf-8"?>
-<p:tagLst xmlns:a="http://schemas.openxmlformats.org/drawingml/2006/main" xmlns:r="http://schemas.openxmlformats.org/officeDocument/2006/relationships" xmlns:p="http://schemas.openxmlformats.org/presentationml/2006/main">
-  <p:tag name="ALIGNMENT_TARGET_X" val="46.709999084472656"/>
-</p:tagLst>
-</file>
-
-<file path=ppt/tags/tag40.xml><?xml version="1.0" encoding="utf-8"?>
-<p:tagLst xmlns:a="http://schemas.openxmlformats.org/drawingml/2006/main" xmlns:r="http://schemas.openxmlformats.org/officeDocument/2006/relationships" xmlns:p="http://schemas.openxmlformats.org/presentationml/2006/main">
-  <p:tag name="ALIGNMENT_TARGET_X" val="677.280029296875"/>
-</p:tagLst>
-</file>
-
-<file path=ppt/tags/tag41.xml><?xml version="1.0" encoding="utf-8"?>
-<p:tagLst xmlns:a="http://schemas.openxmlformats.org/drawingml/2006/main" xmlns:r="http://schemas.openxmlformats.org/officeDocument/2006/relationships" xmlns:p="http://schemas.openxmlformats.org/presentationml/2006/main">
-  <p:tag name="ALIGNMENT_TARGET_X" val="677.4000244140625"/>
-</p:tagLst>
-</file>
-
-<file path=ppt/tags/tag42.xml><?xml version="1.0" encoding="utf-8"?>
-<p:tagLst xmlns:a="http://schemas.openxmlformats.org/drawingml/2006/main" xmlns:r="http://schemas.openxmlformats.org/officeDocument/2006/relationships" xmlns:p="http://schemas.openxmlformats.org/presentationml/2006/main">
-  <p:tag name="ALIGNMENT_TARGET_X" val="480.0000305175781"/>
-</p:tagLst>
-</file>
-
-<file path=ppt/tags/tag43.xml><?xml version="1.0" encoding="utf-8"?>
-<p:tagLst xmlns:a="http://schemas.openxmlformats.org/drawingml/2006/main" xmlns:r="http://schemas.openxmlformats.org/officeDocument/2006/relationships" xmlns:p="http://schemas.openxmlformats.org/presentationml/2006/main">
-  <p:tag name="ALIGNMENT_TARGET_X" val="59.4900016784668"/>
-</p:tagLst>
-</file>
-
-<file path=ppt/tags/tag44.xml><?xml version="1.0" encoding="utf-8"?>
-<p:tagLst xmlns:a="http://schemas.openxmlformats.org/drawingml/2006/main" xmlns:r="http://schemas.openxmlformats.org/officeDocument/2006/relationships" xmlns:p="http://schemas.openxmlformats.org/presentationml/2006/main">
-  <p:tag name="ALIGNMENT_TARGET_X" val="46.7400016784668"/>
-</p:tagLst>
-</file>
-
-<file path=ppt/tags/tag45.xml><?xml version="1.0" encoding="utf-8"?>
-<p:tagLst xmlns:a="http://schemas.openxmlformats.org/drawingml/2006/main" xmlns:r="http://schemas.openxmlformats.org/officeDocument/2006/relationships" xmlns:p="http://schemas.openxmlformats.org/presentationml/2006/main">
-  <p:tag name="ALIGNMENT_TARGET_X" val="47.54999923706055"/>
-</p:tagLst>
-</file>
-
-<file path=ppt/tags/tag46.xml><?xml version="1.0" encoding="utf-8"?>
-<p:tagLst xmlns:a="http://schemas.openxmlformats.org/drawingml/2006/main" xmlns:r="http://schemas.openxmlformats.org/officeDocument/2006/relationships" xmlns:p="http://schemas.openxmlformats.org/presentationml/2006/main">
-  <p:tag name="ALIGNMENT_TARGET_X" val="912.4499855041504"/>
-</p:tagLst>
-</file>
-
-<file path=ppt/tags/tag47.xml><?xml version="1.0" encoding="utf-8"?>
-<p:tagLst xmlns:a="http://schemas.openxmlformats.org/drawingml/2006/main" xmlns:r="http://schemas.openxmlformats.org/officeDocument/2006/relationships" xmlns:p="http://schemas.openxmlformats.org/presentationml/2006/main">
-  <p:tag name="ALIGNMENT_TARGET_X" val="63.720001220703125"/>
-</p:tagLst>
-</file>
-
-<file path=ppt/tags/tag48.xml><?xml version="1.0" encoding="utf-8"?>
-<p:tagLst xmlns:a="http://schemas.openxmlformats.org/drawingml/2006/main" xmlns:r="http://schemas.openxmlformats.org/officeDocument/2006/relationships" xmlns:p="http://schemas.openxmlformats.org/presentationml/2006/main">
-  <p:tag name="ALIGNMENT_TARGET_X" val="63.779998779296875"/>
-</p:tagLst>
-</file>
-
-<file path=ppt/tags/tag49.xml><?xml version="1.0" encoding="utf-8"?>
-<p:tagLst xmlns:a="http://schemas.openxmlformats.org/drawingml/2006/main" xmlns:r="http://schemas.openxmlformats.org/officeDocument/2006/relationships" xmlns:p="http://schemas.openxmlformats.org/presentationml/2006/main">
-  <p:tag name="ALIGNMENT_TARGET_X" val="63.779998779296875"/>
-</p:tagLst>
-</file>
-
-<file path=ppt/tags/tag5.xml><?xml version="1.0" encoding="utf-8"?>
-<p:tagLst xmlns:a="http://schemas.openxmlformats.org/drawingml/2006/main" xmlns:r="http://schemas.openxmlformats.org/officeDocument/2006/relationships" xmlns:p="http://schemas.openxmlformats.org/presentationml/2006/main">
-  <p:tag name="ALIGNMENT_TARGET_X" val="46.709999084472656"/>
-</p:tagLst>
-</file>
-
-<file path=ppt/tags/tag50.xml><?xml version="1.0" encoding="utf-8"?>
-<p:tagLst xmlns:a="http://schemas.openxmlformats.org/drawingml/2006/main" xmlns:r="http://schemas.openxmlformats.org/officeDocument/2006/relationships" xmlns:p="http://schemas.openxmlformats.org/presentationml/2006/main">
-  <p:tag name="ALIGNMENT_TARGET_X" val="63.779998779296875"/>
-</p:tagLst>
-</file>
-
-<file path=ppt/tags/tag51.xml><?xml version="1.0" encoding="utf-8"?>
-<p:tagLst xmlns:a="http://schemas.openxmlformats.org/drawingml/2006/main" xmlns:r="http://schemas.openxmlformats.org/officeDocument/2006/relationships" xmlns:p="http://schemas.openxmlformats.org/presentationml/2006/main">
-  <p:tag name="ALIGNMENT_TARGET_X" val="368.0400085449219"/>
-</p:tagLst>
-</file>
-
-<file path=ppt/tags/tag52.xml><?xml version="1.0" encoding="utf-8"?>
-<p:tagLst xmlns:a="http://schemas.openxmlformats.org/drawingml/2006/main" xmlns:r="http://schemas.openxmlformats.org/officeDocument/2006/relationships" xmlns:p="http://schemas.openxmlformats.org/presentationml/2006/main">
-  <p:tag name="ALIGNMENT_TARGET_X" val="368.3699951171875"/>
-</p:tagLst>
-</file>
-
-<file path=ppt/tags/tag53.xml><?xml version="1.0" encoding="utf-8"?>
-<p:tagLst xmlns:a="http://schemas.openxmlformats.org/drawingml/2006/main" xmlns:r="http://schemas.openxmlformats.org/officeDocument/2006/relationships" xmlns:p="http://schemas.openxmlformats.org/presentationml/2006/main">
-  <p:tag name="ALIGNMENT_TARGET_X" val="294.8699951171875"/>
-</p:tagLst>
-</file>
-
-<file path=ppt/tags/tag54.xml><?xml version="1.0" encoding="utf-8"?>
-<p:tagLst xmlns:a="http://schemas.openxmlformats.org/drawingml/2006/main" xmlns:r="http://schemas.openxmlformats.org/officeDocument/2006/relationships" xmlns:p="http://schemas.openxmlformats.org/presentationml/2006/main">
-  <p:tag name="ALIGNMENT_TARGET_X" val="368.0400085449219"/>
-</p:tagLst>
-</file>
-
-<file path=ppt/tags/tag55.xml><?xml version="1.0" encoding="utf-8"?>
-<p:tagLst xmlns:a="http://schemas.openxmlformats.org/drawingml/2006/main" xmlns:r="http://schemas.openxmlformats.org/officeDocument/2006/relationships" xmlns:p="http://schemas.openxmlformats.org/presentationml/2006/main">
-  <p:tag name="ALIGNMENT_TARGET_X" val="368.3699951171875"/>
-</p:tagLst>
-</file>
-
-<file path=ppt/tags/tag56.xml><?xml version="1.0" encoding="utf-8"?>
-<p:tagLst xmlns:a="http://schemas.openxmlformats.org/drawingml/2006/main" xmlns:r="http://schemas.openxmlformats.org/officeDocument/2006/relationships" xmlns:p="http://schemas.openxmlformats.org/presentationml/2006/main">
-  <p:tag name="ALIGNMENT_TARGET_X" val="294.8699951171875"/>
-</p:tagLst>
-</file>
-
-<file path=ppt/tags/tag57.xml><?xml version="1.0" encoding="utf-8"?>
-<p:tagLst xmlns:a="http://schemas.openxmlformats.org/drawingml/2006/main" xmlns:r="http://schemas.openxmlformats.org/officeDocument/2006/relationships" xmlns:p="http://schemas.openxmlformats.org/presentationml/2006/main">
-  <p:tag name="ALIGNMENT_TARGET_X" val="625.3499755859375"/>
-</p:tagLst>
-</file>
-
-<file path=ppt/tags/tag58.xml><?xml version="1.0" encoding="utf-8"?>
-<p:tagLst xmlns:a="http://schemas.openxmlformats.org/drawingml/2006/main" xmlns:r="http://schemas.openxmlformats.org/officeDocument/2006/relationships" xmlns:p="http://schemas.openxmlformats.org/presentationml/2006/main">
-  <p:tag name="ALIGNMENT_TARGET_X" val="625.5"/>
-</p:tagLst>
-</file>
-
-<file path=ppt/tags/tag59.xml><?xml version="1.0" encoding="utf-8"?>
-<p:tagLst xmlns:a="http://schemas.openxmlformats.org/drawingml/2006/main" xmlns:r="http://schemas.openxmlformats.org/officeDocument/2006/relationships" xmlns:p="http://schemas.openxmlformats.org/presentationml/2006/main">
-  <p:tag name="ALIGNMENT_TARGET_X" val="625.5599975585938"/>
-</p:tagLst>
-</file>
-
-<file path=ppt/tags/tag6.xml><?xml version="1.0" encoding="utf-8"?>
-<p:tagLst xmlns:a="http://schemas.openxmlformats.org/drawingml/2006/main" xmlns:r="http://schemas.openxmlformats.org/officeDocument/2006/relationships" xmlns:p="http://schemas.openxmlformats.org/presentationml/2006/main">
-  <p:tag name="ALIGNMENT_TARGET_X" val="47.15999984741211"/>
-</p:tagLst>
-</file>
-
-<file path=ppt/tags/tag60.xml><?xml version="1.0" encoding="utf-8"?>
-<p:tagLst xmlns:a="http://schemas.openxmlformats.org/drawingml/2006/main" xmlns:r="http://schemas.openxmlformats.org/officeDocument/2006/relationships" xmlns:p="http://schemas.openxmlformats.org/presentationml/2006/main">
-  <p:tag name="ALIGNMENT_TARGET_X" val="65.25"/>
-</p:tagLst>
-</file>
-
-<file path=ppt/tags/tag61.xml><?xml version="1.0" encoding="utf-8"?>
-<p:tagLst xmlns:a="http://schemas.openxmlformats.org/drawingml/2006/main" xmlns:r="http://schemas.openxmlformats.org/officeDocument/2006/relationships" xmlns:p="http://schemas.openxmlformats.org/presentationml/2006/main">
-  <p:tag name="ALIGNMENT_TARGET_X" val="59.4900016784668"/>
-</p:tagLst>
-</file>
-
-<file path=ppt/tags/tag62.xml><?xml version="1.0" encoding="utf-8"?>
-<p:tagLst xmlns:a="http://schemas.openxmlformats.org/drawingml/2006/main" xmlns:r="http://schemas.openxmlformats.org/officeDocument/2006/relationships" xmlns:p="http://schemas.openxmlformats.org/presentationml/2006/main">
-  <p:tag name="ALIGNMENT_TARGET_X" val="46.7400016784668"/>
-</p:tagLst>
-</file>
-
-<file path=ppt/tags/tag63.xml><?xml version="1.0" encoding="utf-8"?>
-<p:tagLst xmlns:a="http://schemas.openxmlformats.org/drawingml/2006/main" xmlns:r="http://schemas.openxmlformats.org/officeDocument/2006/relationships" xmlns:p="http://schemas.openxmlformats.org/presentationml/2006/main">
-  <p:tag name="ALIGNMENT_TARGET_X" val="47.54999923706055"/>
-</p:tagLst>
-</file>
-
-<file path=ppt/tags/tag64.xml><?xml version="1.0" encoding="utf-8"?>
-<p:tagLst xmlns:a="http://schemas.openxmlformats.org/drawingml/2006/main" xmlns:r="http://schemas.openxmlformats.org/officeDocument/2006/relationships" xmlns:p="http://schemas.openxmlformats.org/presentationml/2006/main">
-  <p:tag name="ALIGNMENT_TARGET_X" val="912.4499855041504"/>
-</p:tagLst>
-</file>
-
-<file path=ppt/tags/tag65.xml><?xml version="1.0" encoding="utf-8"?>
-<p:tagLst xmlns:a="http://schemas.openxmlformats.org/drawingml/2006/main" xmlns:r="http://schemas.openxmlformats.org/officeDocument/2006/relationships" xmlns:p="http://schemas.openxmlformats.org/presentationml/2006/main">
-  <p:tag name="ALIGNMENT_TARGET_X" val="47.310001373291016"/>
-</p:tagLst>
-</file>
-
-<file path=ppt/tags/tag66.xml><?xml version="1.0" encoding="utf-8"?>
-<p:tagLst xmlns:a="http://schemas.openxmlformats.org/drawingml/2006/main" xmlns:r="http://schemas.openxmlformats.org/officeDocument/2006/relationships" xmlns:p="http://schemas.openxmlformats.org/presentationml/2006/main">
-  <p:tag name="ALIGNMENT_TARGET_X" val="164.99999618530273"/>
-</p:tagLst>
-</file>
-
-<file path=ppt/tags/tag67.xml><?xml version="1.0" encoding="utf-8"?>
-<p:tagLst xmlns:a="http://schemas.openxmlformats.org/drawingml/2006/main" xmlns:r="http://schemas.openxmlformats.org/officeDocument/2006/relationships" xmlns:p="http://schemas.openxmlformats.org/presentationml/2006/main">
-  <p:tag name="ALIGNMENT_TARGET_X" val="145.49995708465576"/>
-</p:tagLst>
-</file>
-
-<file path=ppt/tags/tag68.xml><?xml version="1.0" encoding="utf-8"?>
-<p:tagLst xmlns:a="http://schemas.openxmlformats.org/drawingml/2006/main" xmlns:r="http://schemas.openxmlformats.org/officeDocument/2006/relationships" xmlns:p="http://schemas.openxmlformats.org/presentationml/2006/main">
-  <p:tag name="ALIGNMENT_TARGET_X" val="165.00000381469727"/>
-</p:tagLst>
-</file>
-
-<file path=ppt/tags/tag69.xml><?xml version="1.0" encoding="utf-8"?>
-<p:tagLst xmlns:a="http://schemas.openxmlformats.org/drawingml/2006/main" xmlns:r="http://schemas.openxmlformats.org/officeDocument/2006/relationships" xmlns:p="http://schemas.openxmlformats.org/presentationml/2006/main">
-  <p:tag name="ALIGNMENT_TARGET_X" val="145.49996185302734"/>
-</p:tagLst>
-</file>
-
-<file path=ppt/tags/tag7.xml><?xml version="1.0" encoding="utf-8"?>
-<p:tagLst xmlns:a="http://schemas.openxmlformats.org/drawingml/2006/main" xmlns:r="http://schemas.openxmlformats.org/officeDocument/2006/relationships" xmlns:p="http://schemas.openxmlformats.org/presentationml/2006/main">
-  <p:tag name="ALIGNMENT_TARGET_X" val="134.25000381469727"/>
-</p:tagLst>
-</file>
-
-<file path=ppt/tags/tag70.xml><?xml version="1.0" encoding="utf-8"?>
-<p:tagLst xmlns:a="http://schemas.openxmlformats.org/drawingml/2006/main" xmlns:r="http://schemas.openxmlformats.org/officeDocument/2006/relationships" xmlns:p="http://schemas.openxmlformats.org/presentationml/2006/main">
-  <p:tag name="ALIGNMENT_TARGET_X" val="145.49999618530273"/>
-</p:tagLst>
-</file>
-
-<file path=ppt/tags/tag71.xml><?xml version="1.0" encoding="utf-8"?>
-<p:tagLst xmlns:a="http://schemas.openxmlformats.org/drawingml/2006/main" xmlns:r="http://schemas.openxmlformats.org/officeDocument/2006/relationships" xmlns:p="http://schemas.openxmlformats.org/presentationml/2006/main">
-  <p:tag name="ALIGNMENT_TARGET_X" val="321.80999755859375"/>
-</p:tagLst>
-</file>
-
-<file path=ppt/tags/tag72.xml><?xml version="1.0" encoding="utf-8"?>
-<p:tagLst xmlns:a="http://schemas.openxmlformats.org/drawingml/2006/main" xmlns:r="http://schemas.openxmlformats.org/officeDocument/2006/relationships" xmlns:p="http://schemas.openxmlformats.org/presentationml/2006/main">
-  <p:tag name="ALIGNMENT_TARGET_X" val="453.75"/>
-</p:tagLst>
-</file>
-
-<file path=ppt/tags/tag73.xml><?xml version="1.0" encoding="utf-8"?>
-<p:tagLst xmlns:a="http://schemas.openxmlformats.org/drawingml/2006/main" xmlns:r="http://schemas.openxmlformats.org/officeDocument/2006/relationships" xmlns:p="http://schemas.openxmlformats.org/presentationml/2006/main">
-  <p:tag name="ALIGNMENT_TARGET_X" val="453.8399963378906"/>
-</p:tagLst>
-</file>
-
-<file path=ppt/tags/tag74.xml><?xml version="1.0" encoding="utf-8"?>
-<p:tagLst xmlns:a="http://schemas.openxmlformats.org/drawingml/2006/main" xmlns:r="http://schemas.openxmlformats.org/officeDocument/2006/relationships" xmlns:p="http://schemas.openxmlformats.org/presentationml/2006/main">
-  <p:tag name="ALIGNMENT_TARGET_X" val="343.49999046325684"/>
-</p:tagLst>
-</file>
-
-<file path=ppt/tags/tag75.xml><?xml version="1.0" encoding="utf-8"?>
-<p:tagLst xmlns:a="http://schemas.openxmlformats.org/drawingml/2006/main" xmlns:r="http://schemas.openxmlformats.org/officeDocument/2006/relationships" xmlns:p="http://schemas.openxmlformats.org/presentationml/2006/main">
-  <p:tag name="ALIGNMENT_TARGET_X" val="392.99999046325684"/>
-</p:tagLst>
-</file>
-
-<file path=ppt/tags/tag76.xml><?xml version="1.0" encoding="utf-8"?>
-<p:tagLst xmlns:a="http://schemas.openxmlformats.org/drawingml/2006/main" xmlns:r="http://schemas.openxmlformats.org/officeDocument/2006/relationships" xmlns:p="http://schemas.openxmlformats.org/presentationml/2006/main">
-  <p:tag name="ALIGNMENT_TARGET_X" val="442.49999046325684"/>
-</p:tagLst>
-</file>
-
-<file path=ppt/tags/tag77.xml><?xml version="1.0" encoding="utf-8"?>
-<p:tagLst xmlns:a="http://schemas.openxmlformats.org/drawingml/2006/main" xmlns:r="http://schemas.openxmlformats.org/officeDocument/2006/relationships" xmlns:p="http://schemas.openxmlformats.org/presentationml/2006/main">
-  <p:tag name="ALIGNMENT_TARGET_X" val="491.99999046325684"/>
-</p:tagLst>
-</file>
-
-<file path=ppt/tags/tag78.xml><?xml version="1.0" encoding="utf-8"?>
-<p:tagLst xmlns:a="http://schemas.openxmlformats.org/drawingml/2006/main" xmlns:r="http://schemas.openxmlformats.org/officeDocument/2006/relationships" xmlns:p="http://schemas.openxmlformats.org/presentationml/2006/main">
-  <p:tag name="ALIGNMENT_TARGET_X" val="541.4999904632568"/>
-</p:tagLst>
-</file>
-
-<file path=ppt/tags/tag79.xml><?xml version="1.0" encoding="utf-8"?>
-<p:tagLst xmlns:a="http://schemas.openxmlformats.org/drawingml/2006/main" xmlns:r="http://schemas.openxmlformats.org/officeDocument/2006/relationships" xmlns:p="http://schemas.openxmlformats.org/presentationml/2006/main">
-  <p:tag name="ALIGNMENT_TARGET_X" val="321.75"/>
-</p:tagLst>
-</file>
-
-<file path=ppt/tags/tag8.xml><?xml version="1.0" encoding="utf-8"?>
-<p:tagLst xmlns:a="http://schemas.openxmlformats.org/drawingml/2006/main" xmlns:r="http://schemas.openxmlformats.org/officeDocument/2006/relationships" xmlns:p="http://schemas.openxmlformats.org/presentationml/2006/main">
-  <p:tag name="ALIGNMENT_TARGET_X" val="300.7499885559082"/>
-</p:tagLst>
-</file>
-
-<file path=ppt/tags/tag80.xml><?xml version="1.0" encoding="utf-8"?>
-<p:tagLst xmlns:a="http://schemas.openxmlformats.org/drawingml/2006/main" xmlns:r="http://schemas.openxmlformats.org/officeDocument/2006/relationships" xmlns:p="http://schemas.openxmlformats.org/presentationml/2006/main">
-  <p:tag name="ALIGNMENT_TARGET_X" val="321.8699951171875"/>
-</p:tagLst>
-</file>
-
-<file path=ppt/tags/tag81.xml><?xml version="1.0" encoding="utf-8"?>
-<p:tagLst xmlns:a="http://schemas.openxmlformats.org/drawingml/2006/main" xmlns:r="http://schemas.openxmlformats.org/officeDocument/2006/relationships" xmlns:p="http://schemas.openxmlformats.org/presentationml/2006/main">
-  <p:tag name="ALIGNMENT_TARGET_X" val="636.8099975585938"/>
-</p:tagLst>
-</file>
-
-<file path=ppt/tags/tag82.xml><?xml version="1.0" encoding="utf-8"?>
-<p:tagLst xmlns:a="http://schemas.openxmlformats.org/drawingml/2006/main" xmlns:r="http://schemas.openxmlformats.org/officeDocument/2006/relationships" xmlns:p="http://schemas.openxmlformats.org/presentationml/2006/main">
-  <p:tag name="ALIGNMENT_TARGET_X" val="774.7500610351562"/>
-</p:tagLst>
-</file>
-
-<file path=ppt/tags/tag83.xml><?xml version="1.0" encoding="utf-8"?>
-<p:tagLst xmlns:a="http://schemas.openxmlformats.org/drawingml/2006/main" xmlns:r="http://schemas.openxmlformats.org/officeDocument/2006/relationships" xmlns:p="http://schemas.openxmlformats.org/presentationml/2006/main">
-  <p:tag name="ALIGNMENT_TARGET_X" val="774.7499961853027"/>
-</p:tagLst>
-</file>
-
-<file path=ppt/tags/tag84.xml><?xml version="1.0" encoding="utf-8"?>
-<p:tagLst xmlns:a="http://schemas.openxmlformats.org/drawingml/2006/main" xmlns:r="http://schemas.openxmlformats.org/officeDocument/2006/relationships" xmlns:p="http://schemas.openxmlformats.org/presentationml/2006/main">
-  <p:tag name="ALIGNMENT_TARGET_X" val="681.7500114440918"/>
-</p:tagLst>
-</file>
-
-<file path=ppt/tags/tag85.xml><?xml version="1.0" encoding="utf-8"?>
-<p:tagLst xmlns:a="http://schemas.openxmlformats.org/drawingml/2006/main" xmlns:r="http://schemas.openxmlformats.org/officeDocument/2006/relationships" xmlns:p="http://schemas.openxmlformats.org/presentationml/2006/main">
-  <p:tag name="ALIGNMENT_TARGET_X" val="774.7500114440918"/>
-</p:tagLst>
-</file>
-
-<file path=ppt/tags/tag86.xml><?xml version="1.0" encoding="utf-8"?>
-<p:tagLst xmlns:a="http://schemas.openxmlformats.org/drawingml/2006/main" xmlns:r="http://schemas.openxmlformats.org/officeDocument/2006/relationships" xmlns:p="http://schemas.openxmlformats.org/presentationml/2006/main">
-  <p:tag name="ALIGNMENT_TARGET_X" val="867.7499732971191"/>
-</p:tagLst>
-</file>
-
-<file path=ppt/tags/tag87.xml><?xml version="1.0" encoding="utf-8"?>
-<p:tagLst xmlns:a="http://schemas.openxmlformats.org/drawingml/2006/main" xmlns:r="http://schemas.openxmlformats.org/officeDocument/2006/relationships" xmlns:p="http://schemas.openxmlformats.org/presentationml/2006/main">
-  <p:tag name="ALIGNMENT_TARGET_X" val="636.75"/>
-</p:tagLst>
-</file>
-
-<file path=ppt/tags/tag88.xml><?xml version="1.0" encoding="utf-8"?>
-<p:tagLst xmlns:a="http://schemas.openxmlformats.org/drawingml/2006/main" xmlns:r="http://schemas.openxmlformats.org/officeDocument/2006/relationships" xmlns:p="http://schemas.openxmlformats.org/presentationml/2006/main">
-  <p:tag name="ALIGNMENT_TARGET_X" val="636.8699951171875"/>
-</p:tagLst>
-</file>
-
-<file path=ppt/tags/tag89.xml><?xml version="1.0" encoding="utf-8"?>
-<p:tagLst xmlns:a="http://schemas.openxmlformats.org/drawingml/2006/main" xmlns:r="http://schemas.openxmlformats.org/officeDocument/2006/relationships" xmlns:p="http://schemas.openxmlformats.org/presentationml/2006/main">
-  <p:tag name="ALIGNMENT_TARGET_X" val="47.279998779296875"/>
-</p:tagLst>
-</file>
-
-<file path=ppt/tags/tag9.xml><?xml version="1.0" encoding="utf-8"?>
-<p:tagLst xmlns:a="http://schemas.openxmlformats.org/drawingml/2006/main" xmlns:r="http://schemas.openxmlformats.org/officeDocument/2006/relationships" xmlns:p="http://schemas.openxmlformats.org/presentationml/2006/main">
-  <p:tag name="ALIGNMENT_TARGET_X" val="467.2499885559082"/>
-</p:tagLst>
-</file>
-
-<file path=ppt/tags/tag90.xml><?xml version="1.0" encoding="utf-8"?>
-<p:tagLst xmlns:a="http://schemas.openxmlformats.org/drawingml/2006/main" xmlns:r="http://schemas.openxmlformats.org/officeDocument/2006/relationships" xmlns:p="http://schemas.openxmlformats.org/presentationml/2006/main">
-  <p:tag name="ALIGNMENT_TARGET_X" val="59.4900016784668"/>
-</p:tagLst>
-</file>
-
-<file path=ppt/tags/tag91.xml><?xml version="1.0" encoding="utf-8"?>
-<p:tagLst xmlns:a="http://schemas.openxmlformats.org/drawingml/2006/main" xmlns:r="http://schemas.openxmlformats.org/officeDocument/2006/relationships" xmlns:p="http://schemas.openxmlformats.org/presentationml/2006/main">
-  <p:tag name="ALIGNMENT_TARGET_X" val="46.7400016784668"/>
-</p:tagLst>
-</file>
-
-<file path=ppt/tags/tag92.xml><?xml version="1.0" encoding="utf-8"?>
-<p:tagLst xmlns:a="http://schemas.openxmlformats.org/drawingml/2006/main" xmlns:r="http://schemas.openxmlformats.org/officeDocument/2006/relationships" xmlns:p="http://schemas.openxmlformats.org/presentationml/2006/main">
-  <p:tag name="ALIGNMENT_TARGET_X" val="47.54999923706055"/>
-</p:tagLst>
-</file>
-
-<file path=ppt/tags/tag93.xml><?xml version="1.0" encoding="utf-8"?>
-<p:tagLst xmlns:a="http://schemas.openxmlformats.org/drawingml/2006/main" xmlns:r="http://schemas.openxmlformats.org/officeDocument/2006/relationships" xmlns:p="http://schemas.openxmlformats.org/presentationml/2006/main">
-  <p:tag name="ALIGNMENT_TARGET_X" val="912.4499855041504"/>
-</p:tagLst>
-</file>
-
-<file path=ppt/tags/tag94.xml><?xml version="1.0" encoding="utf-8"?>
-<p:tagLst xmlns:a="http://schemas.openxmlformats.org/drawingml/2006/main" xmlns:r="http://schemas.openxmlformats.org/officeDocument/2006/relationships" xmlns:p="http://schemas.openxmlformats.org/presentationml/2006/main">
-  <p:tag name="ALIGNMENT_TARGET_X" val="63.900001525878906"/>
-</p:tagLst>
-</file>
-
-<file path=ppt/tags/tag95.xml><?xml version="1.0" encoding="utf-8"?>
-<p:tagLst xmlns:a="http://schemas.openxmlformats.org/drawingml/2006/main" xmlns:r="http://schemas.openxmlformats.org/officeDocument/2006/relationships" xmlns:p="http://schemas.openxmlformats.org/presentationml/2006/main">
-  <p:tag name="ALIGNMENT_TARGET_X" val="149.25"/>
-</p:tagLst>
-</file>
-
-<file path=ppt/tags/tag96.xml><?xml version="1.0" encoding="utf-8"?>
-<p:tagLst xmlns:a="http://schemas.openxmlformats.org/drawingml/2006/main" xmlns:r="http://schemas.openxmlformats.org/officeDocument/2006/relationships" xmlns:p="http://schemas.openxmlformats.org/presentationml/2006/main">
-  <p:tag name="ALIGNMENT_TARGET_X" val="149.25"/>
-</p:tagLst>
-</file>
-
-<file path=ppt/tags/tag97.xml><?xml version="1.0" encoding="utf-8"?>
-<p:tagLst xmlns:a="http://schemas.openxmlformats.org/drawingml/2006/main" xmlns:r="http://schemas.openxmlformats.org/officeDocument/2006/relationships" xmlns:p="http://schemas.openxmlformats.org/presentationml/2006/main">
-  <p:tag name="ALIGNMENT_TARGET_X" val="284.3999938964844"/>
-</p:tagLst>
-</file>
-
-<file path=ppt/tags/tag98.xml><?xml version="1.0" encoding="utf-8"?>
-<p:tagLst xmlns:a="http://schemas.openxmlformats.org/drawingml/2006/main" xmlns:r="http://schemas.openxmlformats.org/officeDocument/2006/relationships" xmlns:p="http://schemas.openxmlformats.org/presentationml/2006/main">
-  <p:tag name="ALIGNMENT_TARGET_X" val="369.74998474121094"/>
-</p:tagLst>
-</file>
-
-<file path=ppt/tags/tag99.xml><?xml version="1.0" encoding="utf-8"?>
-<p:tagLst xmlns:a="http://schemas.openxmlformats.org/drawingml/2006/main" xmlns:r="http://schemas.openxmlformats.org/officeDocument/2006/relationships" xmlns:p="http://schemas.openxmlformats.org/presentationml/2006/main">
-  <p:tag name="ALIGNMENT_TARGET_X" val="369.74998474121094"/>
 </p:tagLst>
 </file>
 
